--- a/docs/presentations/case-27-proekt-d8-skoup-i-voprosy.pptx
+++ b/docs/presentations/case-27-proekt-d8-skoup-i-voprosy.pptx
@@ -133,7 +133,7 @@
               <c:strCache>
                 <c:ptCount val="1"/>
                 <c:pt idx="0">
-                  <c:v>Старт (нед.)</c:v>
+                  <c:v>Старт</c:v>
                 </c:pt>
               </c:strCache>
             </c:strRef>
@@ -204,22 +204,22 @@
                 <c:formatCode>General</c:formatCode>
                 <c:ptCount val="6"/>
                 <c:pt idx="0">
-                  <c:v>13</c:v>
+                  <c:v>46387</c:v>
                 </c:pt>
                 <c:pt idx="1">
-                  <c:v>13</c:v>
+                  <c:v>46387</c:v>
                 </c:pt>
                 <c:pt idx="2">
-                  <c:v>13</c:v>
+                  <c:v>46387</c:v>
                 </c:pt>
                 <c:pt idx="3">
-                  <c:v>7</c:v>
+                  <c:v>46345</c:v>
                 </c:pt>
                 <c:pt idx="4">
-                  <c:v>3</c:v>
+                  <c:v>46317</c:v>
                 </c:pt>
                 <c:pt idx="5">
-                  <c:v>0</c:v>
+                  <c:v>46296</c:v>
                 </c:pt>
               </c:numCache>
             </c:numRef>
@@ -268,7 +268,7 @@
               <c:strCache>
                 <c:ptCount val="1"/>
                 <c:pt idx="0">
-                  <c:v>Длительность (нед.)</c:v>
+                  <c:v>Длительность</c:v>
                 </c:pt>
               </c:strCache>
             </c:strRef>
@@ -405,22 +405,22 @@
                 <c:formatCode>General</c:formatCode>
                 <c:ptCount val="6"/>
                 <c:pt idx="0">
-                  <c:v>9</c:v>
+                  <c:v>63</c:v>
                 </c:pt>
                 <c:pt idx="1">
-                  <c:v>9</c:v>
+                  <c:v>63</c:v>
                 </c:pt>
                 <c:pt idx="2">
-                  <c:v>5</c:v>
+                  <c:v>35</c:v>
                 </c:pt>
                 <c:pt idx="3">
-                  <c:v>6</c:v>
+                  <c:v>42</c:v>
                 </c:pt>
                 <c:pt idx="4">
-                  <c:v>4</c:v>
+                  <c:v>28</c:v>
                 </c:pt>
                 <c:pt idx="5">
-                  <c:v>3</c:v>
+                  <c:v>21</c:v>
                 </c:pt>
               </c:numCache>
             </c:numRef>
@@ -501,8 +501,8 @@
         <c:axId val="2094734552"/>
         <c:scaling>
           <c:orientation val="minMax"/>
-          <c:max val="24"/>
-          <c:min val="0"/>
+          <c:max val="46486"/>
+          <c:min val="46296"/>
         </c:scaling>
         <c:delete val="0"/>
         <c:axPos val="b"/>
@@ -538,7 +538,7 @@
                     </a:solidFill>
                     <a:latin typeface="Calibri"/>
                   </a:rPr>
-                  <a:t>Неделя от старта проекта</a:t>
+                  <a:t>Ориентировочная дата (2026–2027)</a:t>
                 </a:r>
               </a:p>
             </c:rich>
@@ -546,7 +546,7 @@
           <c:layout/>
           <c:overlay val="0"/>
         </c:title>
-        <c:numFmt formatCode="General" sourceLinked="0"/>
+        <c:numFmt formatCode="[$-419]mmm yy" sourceLinked="0"/>
         <c:majorTickMark val="out"/>
         <c:minorTickMark val="none"/>
         <c:tickLblPos val="low"/>
@@ -564,7 +564,7 @@
           <a:lstStyle/>
           <a:p>
             <a:pPr>
-              <a:defRPr sz="1050" b="0" i="0" u="none" strike="noStrike">
+              <a:defRPr sz="1000" b="0" i="0" u="none" strike="noStrike">
                 <a:solidFill>
                   <a:srgbClr val="5B6B7A"/>
                 </a:solidFill>
@@ -577,7 +577,7 @@
         <c:crossAx val="2094734554"/>
         <c:crosses val="autoZero"/>
         <c:crossBetween val="between"/>
-        <c:majorUnit val="4"/>
+        <c:majorUnit val="31"/>
       </c:valAx>
       <c:spPr>
         <a:noFill/>
@@ -4701,7 +4701,7 @@
                 <a:ea typeface="Calibri" pitchFamily="34" charset="-122"/>
                 <a:cs typeface="Calibri" pitchFamily="34" charset="-120"/>
               </a:rPr>
-              <a:t>Недели от старта проекта. Волна 3+, П4, П5 — ориентировочно, точка старта уточняется по факту приёмки</a:t>
+              <a:t>Ориентировочные даты при условном старте в октябре 2026. Волна 3+, П4, П5 продолжаются в 2027 году — без фиксированного окончания (Кейс 2 методики)</a:t>
             </a:r>
             <a:endParaRPr lang="en-US" sz="1300" dirty="0"/>
           </a:p>
@@ -4715,7 +4715,7 @@
         </p:nvGraphicFramePr>
         <p:xfrm>
           <a:off x="502920" y="1691640"/>
-          <a:ext cx="11155680" cy="4343400"/>
+          <a:ext cx="11155680" cy="4206240"/>
         </p:xfrm>
         <a:graphic xmlns:a="http://schemas.openxmlformats.org/drawingml/2006/main">
           <a:graphicData uri="http://schemas.openxmlformats.org/drawingml/2006/chart">
@@ -4731,7 +4731,7 @@
         </p:nvSpPr>
         <p:spPr>
           <a:xfrm>
-            <a:off x="502920" y="6172200"/>
+            <a:off x="502920" y="6035040"/>
             <a:ext cx="256032" cy="182880"/>
           </a:xfrm>
           <a:prstGeom prst="rect">
@@ -4751,7 +4751,7 @@
         </p:nvSpPr>
         <p:spPr>
           <a:xfrm>
-            <a:off x="822960" y="6126480"/>
+            <a:off x="822960" y="5989320"/>
             <a:ext cx="2926080" cy="274320"/>
           </a:xfrm>
           <a:prstGeom prst="rect">
@@ -4790,7 +4790,7 @@
         </p:nvSpPr>
         <p:spPr>
           <a:xfrm>
-            <a:off x="3931920" y="6172200"/>
+            <a:off x="3931920" y="6035040"/>
             <a:ext cx="256032" cy="182880"/>
           </a:xfrm>
           <a:prstGeom prst="rect">
@@ -4810,7 +4810,7 @@
         </p:nvSpPr>
         <p:spPr>
           <a:xfrm>
-            <a:off x="4251960" y="6126480"/>
+            <a:off x="4251960" y="5989320"/>
             <a:ext cx="3200400" cy="274320"/>
           </a:xfrm>
           <a:prstGeom prst="rect">
@@ -4844,6 +4844,45 @@
       <p:sp>
         <p:nvSpPr>
           <p:cNvPr id="10" name="Text 7"/>
+          <p:cNvSpPr txBox="1"/>
+          <p:nvPr/>
+        </p:nvSpPr>
+        <p:spPr>
+          <a:xfrm>
+            <a:off x="502920" y="6355080"/>
+            <a:ext cx="11155680" cy="320040"/>
+          </a:xfrm>
+          <a:prstGeom prst="rect">
+            <a:avLst/>
+          </a:prstGeom>
+          <a:noFill/>
+          <a:ln/>
+        </p:spPr>
+        <p:txBody>
+          <a:bodyPr wrap="square" lIns="0" tIns="0" rIns="0" bIns="0" rtlCol="0" anchor="ctr"/>
+          <a:lstStyle/>
+          <a:p>
+            <a:pPr indent="0" marL="0">
+              <a:buNone/>
+            </a:pPr>
+            <a:r>
+              <a:rPr lang="en-US" sz="1050" i="1" dirty="0">
+                <a:solidFill>
+                  <a:srgbClr val="5B6B7A"/>
+                </a:solidFill>
+                <a:latin typeface="Calibri" pitchFamily="34" charset="0"/>
+                <a:ea typeface="Calibri" pitchFamily="34" charset="-122"/>
+                <a:cs typeface="Calibri" pitchFamily="34" charset="-120"/>
+              </a:rPr>
+              <a:t>→ Волна 3+, П4 и П5 продолжаются за пределами отображённого периода — переход в промышленную эксплуатацию и режим постоянных улучшений не имеет фиксированной даты завершения.</a:t>
+            </a:r>
+            <a:endParaRPr lang="en-US" sz="1050" dirty="0"/>
+          </a:p>
+        </p:txBody>
+      </p:sp>
+      <p:sp>
+        <p:nvSpPr>
+          <p:cNvPr id="11" name="Text 8"/>
           <p:cNvSpPr txBox="1"/>
           <p:nvPr/>
         </p:nvSpPr>

--- a/docs/presentations/case-27-proekt-d8-skoup-i-voprosy.pptx
+++ b/docs/presentations/case-27-proekt-d8-skoup-i-voprosy.pptx
@@ -10,10 +10,9 @@
     <p:sldId id="258" r:id="rId4"/>
     <p:sldId id="259" r:id="rId5"/>
     <p:sldId id="260" r:id="rId6"/>
-    <p:sldId id="261" r:id="rId7"/>
   </p:sldIdLst>
   <p:notesMasterIdLst>
-    <p:notesMasterId r:id="rId8"/>
+    <p:notesMasterId r:id="rId7"/>
   </p:notesMasterIdLst>
   <p:sldSz cx="12192000" cy="6858000"/>
   <p:notesSz cx="6858000" cy="12192000"/>
@@ -110,497 +109,6 @@
     </a:lvl9pPr>
   </p:defaultTextStyle>
 </p:presentation>
-</file>
-
-<file path=ppt/charts/chart1.xml><?xml version="1.0" encoding="utf-8"?>
-<c:chartSpace xmlns:c="http://schemas.openxmlformats.org/drawingml/2006/chart" xmlns:a="http://schemas.openxmlformats.org/drawingml/2006/main" xmlns:r="http://schemas.openxmlformats.org/officeDocument/2006/relationships">
-  <c:date1904 val="0"/>
-  <c:roundedCorners val="1"/>
-  <c:chart>
-    <c:autoTitleDeleted val="1"/>
-    <c:plotArea>
-      <c:layout/>
-      <c:barChart>
-        <c:barDir val="bar"/>
-        <c:grouping val="stacked"/>
-        <c:varyColors val="0"/>
-        <c:ser>
-          <c:idx val="0"/>
-          <c:order val="0"/>
-          <c:tx>
-            <c:strRef>
-              <c:f>Sheet1!$B$1</c:f>
-              <c:strCache>
-                <c:ptCount val="1"/>
-                <c:pt idx="0">
-                  <c:v>Старт</c:v>
-                </c:pt>
-              </c:strCache>
-            </c:strRef>
-          </c:tx>
-          <c:spPr>
-            <a:solidFill>
-              <a:srgbClr val="FFFFFF"/>
-            </a:solidFill>
-            <a:effectLst/>
-          </c:spPr>
-          <c:invertIfNegative val="0"/>
-          <c:dLbls>
-            <c:numFmt formatCode="0;-0;&quot;&quot;" sourceLinked="0"/>
-            <c:txPr>
-              <a:bodyPr/>
-              <a:lstStyle/>
-              <a:p>
-                <a:pPr>
-                  <a:defRPr b="0" i="0" strike="noStrike" sz="1200" u="none">
-                    <a:solidFill>
-                      <a:srgbClr val="FFFFFF"/>
-                    </a:solidFill>
-                    <a:latin typeface="Arial"/>
-                  </a:defRPr>
-                </a:pPr>
-              </a:p>
-            </c:txPr>
-            <c:showLegendKey val="0"/>
-            <c:showVal val="0"/>
-            <c:showCatName val="0"/>
-            <c:showSerName val="0"/>
-            <c:showPercent val="0"/>
-            <c:showBubbleSize val="0"/>
-            <c:showLeaderLines val="0"/>
-          </c:dLbls>
-          <c:cat>
-            <c:multiLvlStrRef>
-              <c:f>Sheet1!$A$2:$A$7</c:f>
-              <c:multiLvlStrCache>
-                <c:ptCount val="6"/>
-                <c:lvl>
-                  <c:pt idx="0">
-                    <c:v>П5</c:v>
-                  </c:pt>
-                  <c:pt idx="1">
-                    <c:v>П4</c:v>
-                  </c:pt>
-                  <c:pt idx="2">
-                    <c:v>Волна 3+</c:v>
-                  </c:pt>
-                  <c:pt idx="3">
-                    <c:v>Волна 2</c:v>
-                  </c:pt>
-                  <c:pt idx="4">
-                    <c:v>Волна 1</c:v>
-                  </c:pt>
-                  <c:pt idx="5">
-                    <c:v>П2</c:v>
-                  </c:pt>
-                </c:lvl>
-              </c:multiLvlStrCache>
-            </c:multiLvlStrRef>
-          </c:cat>
-          <c:val>
-            <c:numRef>
-              <c:f>Sheet1!$B$2:$B$7</c:f>
-              <c:numCache>
-                <c:formatCode>General</c:formatCode>
-                <c:ptCount val="6"/>
-                <c:pt idx="0">
-                  <c:v>46387</c:v>
-                </c:pt>
-                <c:pt idx="1">
-                  <c:v>46387</c:v>
-                </c:pt>
-                <c:pt idx="2">
-                  <c:v>46387</c:v>
-                </c:pt>
-                <c:pt idx="3">
-                  <c:v>46345</c:v>
-                </c:pt>
-                <c:pt idx="4">
-                  <c:v>46317</c:v>
-                </c:pt>
-                <c:pt idx="5">
-                  <c:v>46296</c:v>
-                </c:pt>
-              </c:numCache>
-            </c:numRef>
-          </c:val>
-        </c:ser>
-        <c:dLbls>
-          <c:numFmt formatCode="0;-0;&quot;&quot;" sourceLinked="0"/>
-          <c:txPr>
-            <a:bodyPr/>
-            <a:lstStyle/>
-            <a:p>
-              <a:pPr>
-                <a:defRPr b="0" i="0" strike="noStrike" sz="1200" u="none">
-                  <a:solidFill>
-                    <a:srgbClr val="FFFFFF"/>
-                  </a:solidFill>
-                  <a:latin typeface="Arial"/>
-                </a:defRPr>
-              </a:pPr>
-            </a:p>
-          </c:txPr>
-          <c:showLegendKey val="0"/>
-          <c:showVal val="0"/>
-          <c:showCatName val="0"/>
-          <c:showSerName val="0"/>
-          <c:showPercent val="0"/>
-          <c:showBubbleSize val="0"/>
-          <c:showLeaderLines val="0"/>
-        </c:dLbls>
-        <c:gapWidth val="50"/>
-        <c:overlap val="100"/>
-        <c:axId val="2094734554"/>
-        <c:axId val="2094734552"/>
-        <c:axId val="2094734556"/>
-      </c:barChart>
-      <c:barChart>
-        <c:barDir val="bar"/>
-        <c:grouping val="stacked"/>
-        <c:varyColors val="0"/>
-        <c:ser>
-          <c:idx val="1"/>
-          <c:order val="1"/>
-          <c:tx>
-            <c:strRef>
-              <c:f>Sheet1!$C$1</c:f>
-              <c:strCache>
-                <c:ptCount val="1"/>
-                <c:pt idx="0">
-                  <c:v>Длительность</c:v>
-                </c:pt>
-              </c:strCache>
-            </c:strRef>
-          </c:tx>
-          <c:spPr>
-            <a:solidFill>
-              <a:srgbClr val="8FC5C9"/>
-            </a:solidFill>
-            <a:effectLst/>
-          </c:spPr>
-          <c:invertIfNegative val="0"/>
-          <c:dLbls>
-            <c:numFmt formatCode="0;-0;&quot;&quot;" sourceLinked="0"/>
-            <c:txPr>
-              <a:bodyPr/>
-              <a:lstStyle/>
-              <a:p>
-                <a:pPr>
-                  <a:defRPr b="0" i="0" strike="noStrike" sz="1200" u="none">
-                    <a:solidFill>
-                      <a:srgbClr val="FFFFFF"/>
-                    </a:solidFill>
-                    <a:latin typeface="Arial"/>
-                  </a:defRPr>
-                </a:pPr>
-              </a:p>
-            </c:txPr>
-            <c:showLegendKey val="0"/>
-            <c:showVal val="0"/>
-            <c:showCatName val="0"/>
-            <c:showSerName val="0"/>
-            <c:showPercent val="0"/>
-            <c:showBubbleSize val="0"/>
-            <c:showLeaderLines val="0"/>
-          </c:dLbls>
-          <c:dPt>
-            <c:idx val="0"/>
-            <c:invertIfNegative val="0"/>
-            <c:bubble3D val="0"/>
-            <c:spPr>
-              <a:solidFill>
-                <a:srgbClr val="8FC5C9"/>
-              </a:solidFill>
-              <a:effectLst/>
-            </c:spPr>
-          </c:dPt>
-          <c:dPt>
-            <c:idx val="1"/>
-            <c:invertIfNegative val="0"/>
-            <c:bubble3D val="0"/>
-            <c:spPr>
-              <a:solidFill>
-                <a:srgbClr val="8FC5C9"/>
-              </a:solidFill>
-              <a:effectLst/>
-            </c:spPr>
-          </c:dPt>
-          <c:dPt>
-            <c:idx val="2"/>
-            <c:invertIfNegative val="0"/>
-            <c:bubble3D val="0"/>
-            <c:spPr>
-              <a:solidFill>
-                <a:srgbClr val="8FC5C9"/>
-              </a:solidFill>
-              <a:effectLst/>
-            </c:spPr>
-          </c:dPt>
-          <c:dPt>
-            <c:idx val="3"/>
-            <c:invertIfNegative val="0"/>
-            <c:bubble3D val="0"/>
-            <c:spPr>
-              <a:solidFill>
-                <a:srgbClr val="0E7C86"/>
-              </a:solidFill>
-              <a:effectLst/>
-            </c:spPr>
-          </c:dPt>
-          <c:dPt>
-            <c:idx val="4"/>
-            <c:invertIfNegative val="0"/>
-            <c:bubble3D val="0"/>
-            <c:spPr>
-              <a:solidFill>
-                <a:srgbClr val="0E7C86"/>
-              </a:solidFill>
-              <a:effectLst/>
-            </c:spPr>
-          </c:dPt>
-          <c:dPt>
-            <c:idx val="5"/>
-            <c:invertIfNegative val="0"/>
-            <c:bubble3D val="0"/>
-            <c:spPr>
-              <a:solidFill>
-                <a:srgbClr val="0E7C86"/>
-              </a:solidFill>
-              <a:effectLst/>
-            </c:spPr>
-          </c:dPt>
-          <c:cat>
-            <c:multiLvlStrRef>
-              <c:f>Sheet1!$A$2:$A$7</c:f>
-              <c:multiLvlStrCache>
-                <c:ptCount val="6"/>
-                <c:lvl>
-                  <c:pt idx="0">
-                    <c:v>П5</c:v>
-                  </c:pt>
-                  <c:pt idx="1">
-                    <c:v>П4</c:v>
-                  </c:pt>
-                  <c:pt idx="2">
-                    <c:v>Волна 3+</c:v>
-                  </c:pt>
-                  <c:pt idx="3">
-                    <c:v>Волна 2</c:v>
-                  </c:pt>
-                  <c:pt idx="4">
-                    <c:v>Волна 1</c:v>
-                  </c:pt>
-                  <c:pt idx="5">
-                    <c:v>П2</c:v>
-                  </c:pt>
-                </c:lvl>
-              </c:multiLvlStrCache>
-            </c:multiLvlStrRef>
-          </c:cat>
-          <c:val>
-            <c:numRef>
-              <c:f>Sheet1!$C$2:$C$7</c:f>
-              <c:numCache>
-                <c:formatCode>General</c:formatCode>
-                <c:ptCount val="6"/>
-                <c:pt idx="0">
-                  <c:v>63</c:v>
-                </c:pt>
-                <c:pt idx="1">
-                  <c:v>63</c:v>
-                </c:pt>
-                <c:pt idx="2">
-                  <c:v>35</c:v>
-                </c:pt>
-                <c:pt idx="3">
-                  <c:v>42</c:v>
-                </c:pt>
-                <c:pt idx="4">
-                  <c:v>28</c:v>
-                </c:pt>
-                <c:pt idx="5">
-                  <c:v>21</c:v>
-                </c:pt>
-              </c:numCache>
-            </c:numRef>
-          </c:val>
-        </c:ser>
-        <c:dLbls>
-          <c:numFmt formatCode="0;-0;&quot;&quot;" sourceLinked="0"/>
-          <c:txPr>
-            <a:bodyPr/>
-            <a:lstStyle/>
-            <a:p>
-              <a:pPr>
-                <a:defRPr b="0" i="0" strike="noStrike" sz="1200" u="none">
-                  <a:solidFill>
-                    <a:srgbClr val="FFFFFF"/>
-                  </a:solidFill>
-                  <a:latin typeface="Arial"/>
-                </a:defRPr>
-              </a:pPr>
-            </a:p>
-          </c:txPr>
-          <c:showLegendKey val="0"/>
-          <c:showVal val="0"/>
-          <c:showCatName val="0"/>
-          <c:showSerName val="0"/>
-          <c:showPercent val="0"/>
-          <c:showBubbleSize val="0"/>
-          <c:showLeaderLines val="0"/>
-        </c:dLbls>
-        <c:gapWidth val="50"/>
-        <c:overlap val="100"/>
-        <c:axId val="2094734554"/>
-        <c:axId val="2094734552"/>
-        <c:axId val="2094734556"/>
-      </c:barChart>
-      <c:catAx>
-        <c:axId val="2094734554"/>
-        <c:scaling>
-          <c:orientation val="minMax"/>
-        </c:scaling>
-        <c:delete val="0"/>
-        <c:axPos val="l"/>
-        <c:numFmt formatCode="General" sourceLinked="1"/>
-        <c:majorTickMark val="out"/>
-        <c:minorTickMark val="none"/>
-        <c:tickLblPos val="nextTo"/>
-        <c:spPr>
-          <a:ln w="12700" cap="flat">
-            <a:solidFill>
-              <a:srgbClr val="D8DEE2"/>
-            </a:solidFill>
-            <a:prstDash val="solid"/>
-            <a:round/>
-          </a:ln>
-        </c:spPr>
-        <c:txPr>
-          <a:bodyPr/>
-          <a:lstStyle/>
-          <a:p>
-            <a:pPr>
-              <a:defRPr sz="1250" b="1" i="0" u="none" strike="noStrike">
-                <a:solidFill>
-                  <a:srgbClr val="1A2733"/>
-                </a:solidFill>
-                <a:latin typeface="Calibri"/>
-              </a:defRPr>
-            </a:pPr>
-            <a:endParaRPr lang="en-US"/>
-          </a:p>
-        </c:txPr>
-        <c:crossAx val="2094734552"/>
-        <c:crosses val="autoZero"/>
-        <c:auto val="1"/>
-        <c:lblAlgn val="ctr"/>
-        <c:noMultiLvlLbl val="1"/>
-      </c:catAx>
-      <c:valAx>
-        <c:axId val="2094734552"/>
-        <c:scaling>
-          <c:orientation val="minMax"/>
-          <c:max val="46486"/>
-          <c:min val="46296"/>
-        </c:scaling>
-        <c:delete val="0"/>
-        <c:axPos val="b"/>
-        <c:majorGridlines>
-          <c:spPr>
-            <a:ln w="9525" cap="flat">
-              <a:solidFill>
-                <a:srgbClr val="D8DEE2"/>
-              </a:solidFill>
-              <a:prstDash val="solid"/>
-              <a:round/>
-            </a:ln>
-          </c:spPr>
-        </c:majorGridlines>
-        <c:title>
-          <c:tx>
-            <c:rich>
-              <a:bodyPr/>
-              <a:lstStyle/>
-              <a:p>
-                <a:pPr>
-                  <a:defRPr sz="1100" b="0" i="0" u="none" strike="noStrike">
-                    <a:solidFill>
-                      <a:srgbClr val="5B6B7A"/>
-                    </a:solidFill>
-                    <a:latin typeface="Calibri"/>
-                  </a:defRPr>
-                </a:pPr>
-                <a:r>
-                  <a:rPr sz="1100" b="0" i="0" u="none" strike="noStrike">
-                    <a:solidFill>
-                      <a:srgbClr val="5B6B7A"/>
-                    </a:solidFill>
-                    <a:latin typeface="Calibri"/>
-                  </a:rPr>
-                  <a:t>Ориентировочная дата (2026–2027)</a:t>
-                </a:r>
-              </a:p>
-            </c:rich>
-          </c:tx>
-          <c:layout/>
-          <c:overlay val="0"/>
-        </c:title>
-        <c:numFmt formatCode="[$-419]mmm yy" sourceLinked="0"/>
-        <c:majorTickMark val="out"/>
-        <c:minorTickMark val="none"/>
-        <c:tickLblPos val="low"/>
-        <c:spPr>
-          <a:ln w="12700" cap="flat">
-            <a:solidFill>
-              <a:srgbClr val="888888"/>
-            </a:solidFill>
-            <a:prstDash val="solid"/>
-            <a:round/>
-          </a:ln>
-        </c:spPr>
-        <c:txPr>
-          <a:bodyPr/>
-          <a:lstStyle/>
-          <a:p>
-            <a:pPr>
-              <a:defRPr sz="1000" b="0" i="0" u="none" strike="noStrike">
-                <a:solidFill>
-                  <a:srgbClr val="5B6B7A"/>
-                </a:solidFill>
-                <a:latin typeface="Calibri"/>
-              </a:defRPr>
-            </a:pPr>
-            <a:endParaRPr lang="en-US"/>
-          </a:p>
-        </c:txPr>
-        <c:crossAx val="2094734554"/>
-        <c:crosses val="autoZero"/>
-        <c:crossBetween val="between"/>
-        <c:majorUnit val="31"/>
-      </c:valAx>
-      <c:spPr>
-        <a:noFill/>
-        <a:ln>
-          <a:noFill/>
-        </a:ln>
-        <a:effectLst/>
-      </c:spPr>
-    </c:plotArea>
-    <c:plotVisOnly val="1"/>
-    <c:dispBlanksAs val="span"/>
-  </c:chart>
-  <c:spPr>
-    <a:noFill/>
-    <a:ln>
-      <a:noFill/>
-    </a:ln>
-    <a:effectLst/>
-  </c:spPr>
-  <c:externalData r:id="rId1">
-    <c:autoUpdate val="0"/>
-  </c:externalData>
-</c:chartSpace>
 </file>
 
 <file path=ppt/notesMasters/notesMaster1.xml><?xml version="1.0" encoding="utf-8"?>
@@ -1374,94 +882,6 @@
             <a:fld id="{F7021451-1387-4CA6-816F-3879F97B5CBC}" type="slidenum">
               <a:rPr lang="en-US"/>
               <a:t>5</a:t>
-            </a:fld>
-            <a:endParaRPr lang="en-US"/>
-          </a:p>
-        </p:txBody>
-      </p:sp>
-    </p:spTree>
-    <p:extLst>
-      <p:ext uri="{BB962C8B-B14F-4D97-AF65-F5344CB8AC3E}">
-        <p14:creationId xmlns:p14="http://schemas.microsoft.com/office/powerpoint/2010/main" val="1024086991"/>
-      </p:ext>
-    </p:extLst>
-  </p:cSld>
-  <p:clrMapOvr>
-    <a:masterClrMapping/>
-  </p:clrMapOvr>
-</p:notes>
-</file>
-
-<file path=ppt/notesSlides/notesSlide6.xml><?xml version="1.0" encoding="utf-8"?>
-<p:notes xmlns:a="http://schemas.openxmlformats.org/drawingml/2006/main" xmlns:r="http://schemas.openxmlformats.org/officeDocument/2006/relationships" xmlns:p="http://schemas.openxmlformats.org/presentationml/2006/main">
-  <p:cSld>
-    <p:spTree>
-      <p:nvGrpSpPr>
-        <p:cNvPr id="1" name=""/>
-        <p:cNvGrpSpPr/>
-        <p:nvPr/>
-      </p:nvGrpSpPr>
-      <p:grpSpPr>
-        <a:xfrm>
-          <a:off x="0" y="0"/>
-          <a:ext cx="0" cy="0"/>
-          <a:chOff x="0" y="0"/>
-          <a:chExt cx="0" cy="0"/>
-        </a:xfrm>
-      </p:grpSpPr>
-      <p:sp>
-        <p:nvSpPr>
-          <p:cNvPr id="2" name="Slide Image Placeholder 1"/>
-          <p:cNvSpPr>
-            <a:spLocks noGrp="1" noRot="1" noChangeAspect="1"/>
-          </p:cNvSpPr>
-          <p:nvPr>
-            <p:ph type="sldImg"/>
-          </p:nvPr>
-        </p:nvSpPr>
-        <p:spPr/>
-      </p:sp>
-      <p:sp>
-        <p:nvSpPr>
-          <p:cNvPr id="3" name="Notes Placeholder 2"/>
-          <p:cNvSpPr>
-            <a:spLocks noGrp="1"/>
-          </p:cNvSpPr>
-          <p:nvPr>
-            <p:ph type="body" idx="1"/>
-          </p:nvPr>
-        </p:nvSpPr>
-        <p:spPr/>
-        <p:txBody>
-          <a:bodyPr/>
-          <a:lstStyle/>
-          <a:p>
-            <a:r>
-              <a:rPr lang="en-US" dirty="0"/>
-              <a:t/>
-            </a:r>
-            <a:endParaRPr lang="en-US" dirty="0"/>
-          </a:p>
-        </p:txBody>
-      </p:sp>
-      <p:sp>
-        <p:nvSpPr>
-          <p:cNvPr id="4" name="Slide Number Placeholder 3"/>
-          <p:cNvSpPr>
-            <a:spLocks noGrp="1"/>
-          </p:cNvSpPr>
-          <p:nvPr>
-            <p:ph type="sldNum" sz="quarter" idx="10"/>
-          </p:nvPr>
-        </p:nvSpPr>
-        <p:spPr/>
-        <p:txBody>
-          <a:bodyPr/>
-          <a:lstStyle/>
-          <a:p>
-            <a:fld id="{F7021451-1387-4CA6-816F-3879F97B5CBC}" type="slidenum">
-              <a:rPr lang="en-US"/>
-              <a:t>6</a:t>
             </a:fld>
             <a:endParaRPr lang="en-US"/>
           </a:p>
@@ -2461,7 +1881,7 @@
                 <a:ea typeface="Calibri" pitchFamily="34" charset="-122"/>
                 <a:cs typeface="Calibri" pitchFamily="34" charset="-120"/>
               </a:rPr>
-              <a:t>1 / 6</a:t>
+              <a:t>1 / 5</a:t>
             </a:r>
             <a:endParaRPr lang="en-US" sz="1050" dirty="0"/>
           </a:p>
@@ -4559,7 +3979,7 @@
                 <a:ea typeface="Calibri" pitchFamily="34" charset="-122"/>
                 <a:cs typeface="Calibri" pitchFamily="34" charset="-120"/>
               </a:rPr>
-              <a:t>2 / 6</a:t>
+              <a:t>2 / 5</a:t>
             </a:r>
             <a:endParaRPr lang="en-US" sz="1050" dirty="0"/>
           </a:p>
@@ -4623,361 +4043,7 @@
                 <a:ea typeface="Calibri" pitchFamily="34" charset="-122"/>
                 <a:cs typeface="Calibri" pitchFamily="34" charset="-120"/>
               </a:rPr>
-              <a:t>2 · ДИАГРАММА ГАНТА</a:t>
-            </a:r>
-            <a:endParaRPr lang="en-US" sz="1100" dirty="0"/>
-          </a:p>
-        </p:txBody>
-      </p:sp>
-      <p:sp>
-        <p:nvSpPr>
-          <p:cNvPr id="3" name="Text 1"/>
-          <p:cNvSpPr txBox="1"/>
-          <p:nvPr/>
-        </p:nvSpPr>
-        <p:spPr>
-          <a:xfrm>
-            <a:off x="502920" y="621792"/>
-            <a:ext cx="11155680" cy="548640"/>
-          </a:xfrm>
-          <a:prstGeom prst="rect">
-            <a:avLst/>
-          </a:prstGeom>
-          <a:noFill/>
-          <a:ln/>
-        </p:spPr>
-        <p:txBody>
-          <a:bodyPr wrap="square" lIns="0" tIns="0" rIns="0" bIns="0" rtlCol="0" anchor="ctr"/>
-          <a:lstStyle/>
-          <a:p>
-            <a:pPr indent="0" marL="0">
-              <a:buNone/>
-            </a:pPr>
-            <a:r>
-              <a:rPr lang="en-US" sz="2700" b="1" dirty="0">
-                <a:solidFill>
-                  <a:srgbClr val="1A2733"/>
-                </a:solidFill>
-                <a:latin typeface="Cambria" pitchFamily="34" charset="0"/>
-                <a:ea typeface="Cambria" pitchFamily="34" charset="-122"/>
-                <a:cs typeface="Cambria" pitchFamily="34" charset="-120"/>
-              </a:rPr>
-              <a:t>Длительность этапов программы</a:t>
-            </a:r>
-            <a:endParaRPr lang="en-US" sz="2700" dirty="0"/>
-          </a:p>
-        </p:txBody>
-      </p:sp>
-      <p:sp>
-        <p:nvSpPr>
-          <p:cNvPr id="4" name="Text 2"/>
-          <p:cNvSpPr txBox="1"/>
-          <p:nvPr/>
-        </p:nvSpPr>
-        <p:spPr>
-          <a:xfrm>
-            <a:off x="502920" y="1170432"/>
-            <a:ext cx="11155680" cy="365760"/>
-          </a:xfrm>
-          <a:prstGeom prst="rect">
-            <a:avLst/>
-          </a:prstGeom>
-          <a:noFill/>
-          <a:ln/>
-        </p:spPr>
-        <p:txBody>
-          <a:bodyPr wrap="square" lIns="0" tIns="0" rIns="0" bIns="0" rtlCol="0" anchor="ctr"/>
-          <a:lstStyle/>
-          <a:p>
-            <a:pPr indent="0" marL="0">
-              <a:buNone/>
-            </a:pPr>
-            <a:r>
-              <a:rPr lang="en-US" sz="1300" dirty="0">
-                <a:solidFill>
-                  <a:srgbClr val="5B6B7A"/>
-                </a:solidFill>
-                <a:latin typeface="Calibri" pitchFamily="34" charset="0"/>
-                <a:ea typeface="Calibri" pitchFamily="34" charset="-122"/>
-                <a:cs typeface="Calibri" pitchFamily="34" charset="-120"/>
-              </a:rPr>
-              <a:t>Ориентировочные даты при условном старте в октябре 2026. Волна 3+, П4, П5 продолжаются в 2027 году — без фиксированного окончания (Кейс 2 методики)</a:t>
-            </a:r>
-            <a:endParaRPr lang="en-US" sz="1300" dirty="0"/>
-          </a:p>
-        </p:txBody>
-      </p:sp>
-      <p:graphicFrame>
-        <p:nvGraphicFramePr>
-          <p:cNvPr id="5" name="Chart 0" descr=""/>
-          <p:cNvGraphicFramePr/>
-          <p:nvPr/>
-        </p:nvGraphicFramePr>
-        <p:xfrm>
-          <a:off x="502920" y="1691640"/>
-          <a:ext cx="11155680" cy="4206240"/>
-        </p:xfrm>
-        <a:graphic xmlns:a="http://schemas.openxmlformats.org/drawingml/2006/main">
-          <a:graphicData uri="http://schemas.openxmlformats.org/drawingml/2006/chart">
-            <c:chart xmlns:c="http://schemas.openxmlformats.org/drawingml/2006/chart" r:id="rId1"/>
-          </a:graphicData>
-        </a:graphic>
-      </p:graphicFrame>
-      <p:sp>
-        <p:nvSpPr>
-          <p:cNvPr id="6" name="Shape 3"/>
-          <p:cNvSpPr/>
-          <p:nvPr/>
-        </p:nvSpPr>
-        <p:spPr>
-          <a:xfrm>
-            <a:off x="502920" y="6035040"/>
-            <a:ext cx="256032" cy="182880"/>
-          </a:xfrm>
-          <a:prstGeom prst="rect">
-            <a:avLst/>
-          </a:prstGeom>
-          <a:solidFill>
-            <a:srgbClr val="0E7C86"/>
-          </a:solidFill>
-          <a:ln/>
-        </p:spPr>
-      </p:sp>
-      <p:sp>
-        <p:nvSpPr>
-          <p:cNvPr id="7" name="Text 4"/>
-          <p:cNvSpPr txBox="1"/>
-          <p:nvPr/>
-        </p:nvSpPr>
-        <p:spPr>
-          <a:xfrm>
-            <a:off x="822960" y="5989320"/>
-            <a:ext cx="2926080" cy="274320"/>
-          </a:xfrm>
-          <a:prstGeom prst="rect">
-            <a:avLst/>
-          </a:prstGeom>
-          <a:noFill/>
-          <a:ln/>
-        </p:spPr>
-        <p:txBody>
-          <a:bodyPr wrap="square" lIns="0" tIns="0" rIns="0" bIns="0" rtlCol="0" anchor="ctr"/>
-          <a:lstStyle/>
-          <a:p>
-            <a:pPr indent="0" marL="0">
-              <a:buNone/>
-            </a:pPr>
-            <a:r>
-              <a:rPr lang="en-US" sz="1100" dirty="0">
-                <a:solidFill>
-                  <a:srgbClr val="5B6B7A"/>
-                </a:solidFill>
-                <a:latin typeface="Calibri" pitchFamily="34" charset="0"/>
-                <a:ea typeface="Calibri" pitchFamily="34" charset="-122"/>
-                <a:cs typeface="Calibri" pitchFamily="34" charset="-120"/>
-              </a:rPr>
-              <a:t>Подтверждено программой</a:t>
-            </a:r>
-            <a:endParaRPr lang="en-US" sz="1100" dirty="0"/>
-          </a:p>
-        </p:txBody>
-      </p:sp>
-      <p:sp>
-        <p:nvSpPr>
-          <p:cNvPr id="8" name="Shape 5"/>
-          <p:cNvSpPr/>
-          <p:nvPr/>
-        </p:nvSpPr>
-        <p:spPr>
-          <a:xfrm>
-            <a:off x="3931920" y="6035040"/>
-            <a:ext cx="256032" cy="182880"/>
-          </a:xfrm>
-          <a:prstGeom prst="rect">
-            <a:avLst/>
-          </a:prstGeom>
-          <a:solidFill>
-            <a:srgbClr val="8FC5C9"/>
-          </a:solidFill>
-          <a:ln/>
-        </p:spPr>
-      </p:sp>
-      <p:sp>
-        <p:nvSpPr>
-          <p:cNvPr id="9" name="Text 6"/>
-          <p:cNvSpPr txBox="1"/>
-          <p:nvPr/>
-        </p:nvSpPr>
-        <p:spPr>
-          <a:xfrm>
-            <a:off x="4251960" y="5989320"/>
-            <a:ext cx="3200400" cy="274320"/>
-          </a:xfrm>
-          <a:prstGeom prst="rect">
-            <a:avLst/>
-          </a:prstGeom>
-          <a:noFill/>
-          <a:ln/>
-        </p:spPr>
-        <p:txBody>
-          <a:bodyPr wrap="square" lIns="0" tIns="0" rIns="0" bIns="0" rtlCol="0" anchor="ctr"/>
-          <a:lstStyle/>
-          <a:p>
-            <a:pPr indent="0" marL="0">
-              <a:buNone/>
-            </a:pPr>
-            <a:r>
-              <a:rPr lang="en-US" sz="1100" dirty="0">
-                <a:solidFill>
-                  <a:srgbClr val="5B6B7A"/>
-                </a:solidFill>
-                <a:latin typeface="Calibri" pitchFamily="34" charset="0"/>
-                <a:ea typeface="Calibri" pitchFamily="34" charset="-122"/>
-                <a:cs typeface="Calibri" pitchFamily="34" charset="-120"/>
-              </a:rPr>
-              <a:t>Ориентировочно / открыто</a:t>
-            </a:r>
-            <a:endParaRPr lang="en-US" sz="1100" dirty="0"/>
-          </a:p>
-        </p:txBody>
-      </p:sp>
-      <p:sp>
-        <p:nvSpPr>
-          <p:cNvPr id="10" name="Text 7"/>
-          <p:cNvSpPr txBox="1"/>
-          <p:nvPr/>
-        </p:nvSpPr>
-        <p:spPr>
-          <a:xfrm>
-            <a:off x="502920" y="6355080"/>
-            <a:ext cx="11155680" cy="320040"/>
-          </a:xfrm>
-          <a:prstGeom prst="rect">
-            <a:avLst/>
-          </a:prstGeom>
-          <a:noFill/>
-          <a:ln/>
-        </p:spPr>
-        <p:txBody>
-          <a:bodyPr wrap="square" lIns="0" tIns="0" rIns="0" bIns="0" rtlCol="0" anchor="ctr"/>
-          <a:lstStyle/>
-          <a:p>
-            <a:pPr indent="0" marL="0">
-              <a:buNone/>
-            </a:pPr>
-            <a:r>
-              <a:rPr lang="en-US" sz="1050" i="1" dirty="0">
-                <a:solidFill>
-                  <a:srgbClr val="5B6B7A"/>
-                </a:solidFill>
-                <a:latin typeface="Calibri" pitchFamily="34" charset="0"/>
-                <a:ea typeface="Calibri" pitchFamily="34" charset="-122"/>
-                <a:cs typeface="Calibri" pitchFamily="34" charset="-120"/>
-              </a:rPr>
-              <a:t>→ Волна 3+, П4 и П5 продолжаются за пределами отображённого периода — переход в промышленную эксплуатацию и режим постоянных улучшений не имеет фиксированной даты завершения.</a:t>
-            </a:r>
-            <a:endParaRPr lang="en-US" sz="1050" dirty="0"/>
-          </a:p>
-        </p:txBody>
-      </p:sp>
-      <p:sp>
-        <p:nvSpPr>
-          <p:cNvPr id="11" name="Text 8"/>
-          <p:cNvSpPr txBox="1"/>
-          <p:nvPr/>
-        </p:nvSpPr>
-        <p:spPr>
-          <a:xfrm>
-            <a:off x="10881360" y="6473952"/>
-            <a:ext cx="822960" cy="274320"/>
-          </a:xfrm>
-          <a:prstGeom prst="rect">
-            <a:avLst/>
-          </a:prstGeom>
-          <a:noFill/>
-          <a:ln/>
-        </p:spPr>
-        <p:txBody>
-          <a:bodyPr wrap="square" lIns="0" tIns="0" rIns="0" bIns="0" rtlCol="0" anchor="ctr"/>
-          <a:lstStyle/>
-          <a:p>
-            <a:pPr algn="r" indent="0" marL="0">
-              <a:buNone/>
-            </a:pPr>
-            <a:r>
-              <a:rPr lang="en-US" sz="1050" dirty="0">
-                <a:solidFill>
-                  <a:srgbClr val="8C99A6"/>
-                </a:solidFill>
-                <a:latin typeface="Calibri" pitchFamily="34" charset="0"/>
-                <a:ea typeface="Calibri" pitchFamily="34" charset="-122"/>
-                <a:cs typeface="Calibri" pitchFamily="34" charset="-120"/>
-              </a:rPr>
-              <a:t>3 / 6</a:t>
-            </a:r>
-            <a:endParaRPr lang="en-US" sz="1050" dirty="0"/>
-          </a:p>
-        </p:txBody>
-      </p:sp>
-    </p:spTree>
-  </p:cSld>
-  <p:clrMapOvr>
-    <a:masterClrMapping/>
-  </p:clrMapOvr>
-</p:sld>
-</file>
-
-<file path=ppt/slides/slide4.xml><?xml version="1.0" encoding="utf-8"?>
-<p:sld xmlns:a="http://schemas.openxmlformats.org/drawingml/2006/main" xmlns:r="http://schemas.openxmlformats.org/officeDocument/2006/relationships" xmlns:p="http://schemas.openxmlformats.org/presentationml/2006/main">
-  <p:cSld name="Slide 4">
-    <p:spTree>
-      <p:nvGrpSpPr>
-        <p:cNvPr id="1" name=""/>
-        <p:cNvGrpSpPr/>
-        <p:nvPr/>
-      </p:nvGrpSpPr>
-      <p:grpSpPr>
-        <a:xfrm>
-          <a:off x="0" y="0"/>
-          <a:ext cx="0" cy="0"/>
-          <a:chOff x="0" y="0"/>
-          <a:chExt cx="0" cy="0"/>
-        </a:xfrm>
-      </p:grpSpPr>
-      <p:sp>
-        <p:nvSpPr>
-          <p:cNvPr id="2" name="Text 0"/>
-          <p:cNvSpPr txBox="1"/>
-          <p:nvPr/>
-        </p:nvSpPr>
-        <p:spPr>
-          <a:xfrm>
-            <a:off x="502920" y="320040"/>
-            <a:ext cx="11155680" cy="274320"/>
-          </a:xfrm>
-          <a:prstGeom prst="rect">
-            <a:avLst/>
-          </a:prstGeom>
-          <a:noFill/>
-          <a:ln/>
-        </p:spPr>
-        <p:txBody>
-          <a:bodyPr wrap="square" lIns="0" tIns="0" rIns="0" bIns="0" rtlCol="0" anchor="ctr"/>
-          <a:lstStyle/>
-          <a:p>
-            <a:pPr indent="0" marL="0">
-              <a:buNone/>
-            </a:pPr>
-            <a:r>
-              <a:rPr lang="en-US" sz="1100" b="1" spc="120" kern="0" dirty="0">
-                <a:solidFill>
-                  <a:srgbClr val="0E7C86"/>
-                </a:solidFill>
-                <a:latin typeface="Calibri" pitchFamily="34" charset="0"/>
-                <a:ea typeface="Calibri" pitchFamily="34" charset="-122"/>
-                <a:cs typeface="Calibri" pitchFamily="34" charset="-120"/>
-              </a:rPr>
-              <a:t>3 · ЗАФИКСИРОВАННЫЕ ПОЖЕЛАНИЯ ЗАКАЗЧИКА</a:t>
+              <a:t>2 · ЗАФИКСИРОВАННЫЕ ПОЖЕЛАНИЯ ЗАКАЗЧИКА</a:t>
             </a:r>
             <a:endParaRPr lang="en-US" sz="1100" dirty="0"/>
           </a:p>
@@ -5063,7 +4129,7 @@
       </p:sp>
       <p:graphicFrame>
         <p:nvGraphicFramePr>
-          <p:cNvPr id="5" name="Table 0"/>
+          <p:cNvPr id="4" name="Table 0"/>
           <p:cNvGraphicFramePr>
             <a:graphicFrameLocks noGrp="1"/>
           </p:cNvGraphicFramePr>
@@ -8216,7 +7282,7 @@
                 <a:ea typeface="Calibri" pitchFamily="34" charset="-122"/>
                 <a:cs typeface="Calibri" pitchFamily="34" charset="-120"/>
               </a:rPr>
-              <a:t>4 / 6</a:t>
+              <a:t>3 / 5</a:t>
             </a:r>
             <a:endParaRPr lang="en-US" sz="1050" dirty="0"/>
           </a:p>
@@ -8230,9 +7296,9 @@
 </p:sld>
 </file>
 
-<file path=ppt/slides/slide5.xml><?xml version="1.0" encoding="utf-8"?>
+<file path=ppt/slides/slide4.xml><?xml version="1.0" encoding="utf-8"?>
 <p:sld xmlns:a="http://schemas.openxmlformats.org/drawingml/2006/main" xmlns:r="http://schemas.openxmlformats.org/officeDocument/2006/relationships" xmlns:p="http://schemas.openxmlformats.org/presentationml/2006/main">
-  <p:cSld name="Slide 5">
+  <p:cSld name="Slide 4">
     <p:spTree>
       <p:nvGrpSpPr>
         <p:cNvPr id="1" name=""/>
@@ -8280,7 +7346,7 @@
                 <a:ea typeface="Calibri" pitchFamily="34" charset="-122"/>
                 <a:cs typeface="Calibri" pitchFamily="34" charset="-120"/>
               </a:rPr>
-              <a:t>4 · НАШИ ВОПРОСЫ · ПО НАПОЛНЕНИЮ ЭТАПОВ</a:t>
+              <a:t>3 · НАШИ ВОПРОСЫ · ПО НАПОЛНЕНИЮ ЭТАПОВ</a:t>
             </a:r>
             <a:endParaRPr lang="en-US" sz="1100" dirty="0"/>
           </a:p>
@@ -8366,7 +7432,7 @@
       </p:sp>
       <p:graphicFrame>
         <p:nvGraphicFramePr>
-          <p:cNvPr id="6" name="Table 0"/>
+          <p:cNvPr id="5" name="Table 0"/>
           <p:cNvGraphicFramePr>
             <a:graphicFrameLocks noGrp="1"/>
           </p:cNvGraphicFramePr>
@@ -10799,7 +9865,7 @@
                 <a:ea typeface="Calibri" pitchFamily="34" charset="-122"/>
                 <a:cs typeface="Calibri" pitchFamily="34" charset="-120"/>
               </a:rPr>
-              <a:t>5 / 6</a:t>
+              <a:t>4 / 5</a:t>
             </a:r>
             <a:endParaRPr lang="en-US" sz="1050" dirty="0"/>
           </a:p>
@@ -10813,9 +9879,9 @@
 </p:sld>
 </file>
 
-<file path=ppt/slides/slide6.xml><?xml version="1.0" encoding="utf-8"?>
+<file path=ppt/slides/slide5.xml><?xml version="1.0" encoding="utf-8"?>
 <p:sld xmlns:a="http://schemas.openxmlformats.org/drawingml/2006/main" xmlns:r="http://schemas.openxmlformats.org/officeDocument/2006/relationships" xmlns:p="http://schemas.openxmlformats.org/presentationml/2006/main">
-  <p:cSld name="Slide 6">
+  <p:cSld name="Slide 5">
     <p:spTree>
       <p:nvGrpSpPr>
         <p:cNvPr id="1" name=""/>
@@ -10863,7 +9929,7 @@
                 <a:ea typeface="Calibri" pitchFamily="34" charset="-122"/>
                 <a:cs typeface="Calibri" pitchFamily="34" charset="-120"/>
               </a:rPr>
-              <a:t>4 · НАШИ ВОПРОСЫ · ПО ПОЖЕЛАНИЯМ ЗАКАЗЧИКА</a:t>
+              <a:t>3 · НАШИ ВОПРОСЫ · ПО ПОЖЕЛАНИЯМ ЗАКАЗЧИКА</a:t>
             </a:r>
             <a:endParaRPr lang="en-US" sz="1100" dirty="0"/>
           </a:p>
@@ -10949,7 +10015,7 @@
       </p:sp>
       <p:graphicFrame>
         <p:nvGraphicFramePr>
-          <p:cNvPr id="7" name="Table 0"/>
+          <p:cNvPr id="6" name="Table 0"/>
           <p:cNvGraphicFramePr>
             <a:graphicFrameLocks noGrp="1"/>
           </p:cNvGraphicFramePr>
@@ -12663,7 +11729,7 @@
                 <a:ea typeface="Calibri" pitchFamily="34" charset="-122"/>
                 <a:cs typeface="Calibri" pitchFamily="34" charset="-120"/>
               </a:rPr>
-              <a:t>6 / 6</a:t>
+              <a:t>5 / 5</a:t>
             </a:r>
             <a:endParaRPr lang="en-US" sz="1050" dirty="0"/>
           </a:p>

--- a/docs/presentations/case-27-proekt-d8-skoup-i-voprosy.pptx
+++ b/docs/presentations/case-27-proekt-d8-skoup-i-voprosy.pptx
@@ -2479,7 +2479,7 @@
                           <a:ea typeface="Calibri" pitchFamily="34" charset="-122"/>
                           <a:cs typeface="Calibri" pitchFamily="34" charset="-120"/>
                         </a:rPr>
-                        <a:t>2–3 недели</a:t>
+                        <a:t>1–2 недели</a:t>
                       </a:r>
                       <a:endParaRPr lang="en-US" sz="1250" dirty="0">
                         <a:latin typeface="Calibri" charset="0"/>

--- a/docs/presentations/case-27-proekt-d8-skoup-i-voprosy.pptx
+++ b/docs/presentations/case-27-proekt-d8-skoup-i-voprosy.pptx
@@ -10,9 +10,10 @@
     <p:sldId id="258" r:id="rId4"/>
     <p:sldId id="259" r:id="rId5"/>
     <p:sldId id="260" r:id="rId6"/>
+    <p:sldId id="261" r:id="rId7"/>
   </p:sldIdLst>
   <p:notesMasterIdLst>
-    <p:notesMasterId r:id="rId7"/>
+    <p:notesMasterId r:id="rId8"/>
   </p:notesMasterIdLst>
   <p:sldSz cx="12192000" cy="6858000"/>
   <p:notesSz cx="6858000" cy="12192000"/>
@@ -900,6 +901,94 @@
 </p:notes>
 </file>
 
+<file path=ppt/notesSlides/notesSlide6.xml><?xml version="1.0" encoding="utf-8"?>
+<p:notes xmlns:a="http://schemas.openxmlformats.org/drawingml/2006/main" xmlns:r="http://schemas.openxmlformats.org/officeDocument/2006/relationships" xmlns:p="http://schemas.openxmlformats.org/presentationml/2006/main">
+  <p:cSld>
+    <p:spTree>
+      <p:nvGrpSpPr>
+        <p:cNvPr id="1" name=""/>
+        <p:cNvGrpSpPr/>
+        <p:nvPr/>
+      </p:nvGrpSpPr>
+      <p:grpSpPr>
+        <a:xfrm>
+          <a:off x="0" y="0"/>
+          <a:ext cx="0" cy="0"/>
+          <a:chOff x="0" y="0"/>
+          <a:chExt cx="0" cy="0"/>
+        </a:xfrm>
+      </p:grpSpPr>
+      <p:sp>
+        <p:nvSpPr>
+          <p:cNvPr id="2" name="Slide Image Placeholder 1"/>
+          <p:cNvSpPr>
+            <a:spLocks noGrp="1" noRot="1" noChangeAspect="1"/>
+          </p:cNvSpPr>
+          <p:nvPr>
+            <p:ph type="sldImg"/>
+          </p:nvPr>
+        </p:nvSpPr>
+        <p:spPr/>
+      </p:sp>
+      <p:sp>
+        <p:nvSpPr>
+          <p:cNvPr id="3" name="Notes Placeholder 2"/>
+          <p:cNvSpPr>
+            <a:spLocks noGrp="1"/>
+          </p:cNvSpPr>
+          <p:nvPr>
+            <p:ph type="body" idx="1"/>
+          </p:nvPr>
+        </p:nvSpPr>
+        <p:spPr/>
+        <p:txBody>
+          <a:bodyPr/>
+          <a:lstStyle/>
+          <a:p>
+            <a:r>
+              <a:rPr lang="en-US" dirty="0"/>
+              <a:t/>
+            </a:r>
+            <a:endParaRPr lang="en-US" dirty="0"/>
+          </a:p>
+        </p:txBody>
+      </p:sp>
+      <p:sp>
+        <p:nvSpPr>
+          <p:cNvPr id="4" name="Slide Number Placeholder 3"/>
+          <p:cNvSpPr>
+            <a:spLocks noGrp="1"/>
+          </p:cNvSpPr>
+          <p:nvPr>
+            <p:ph type="sldNum" sz="quarter" idx="10"/>
+          </p:nvPr>
+        </p:nvSpPr>
+        <p:spPr/>
+        <p:txBody>
+          <a:bodyPr/>
+          <a:lstStyle/>
+          <a:p>
+            <a:fld id="{F7021451-1387-4CA6-816F-3879F97B5CBC}" type="slidenum">
+              <a:rPr lang="en-US"/>
+              <a:t>6</a:t>
+            </a:fld>
+            <a:endParaRPr lang="en-US"/>
+          </a:p>
+        </p:txBody>
+      </p:sp>
+    </p:spTree>
+    <p:extLst>
+      <p:ext uri="{BB962C8B-B14F-4D97-AF65-F5344CB8AC3E}">
+        <p14:creationId xmlns:p14="http://schemas.microsoft.com/office/powerpoint/2010/main" val="1024086991"/>
+      </p:ext>
+    </p:extLst>
+  </p:cSld>
+  <p:clrMapOvr>
+    <a:masterClrMapping/>
+  </p:clrMapOvr>
+</p:notes>
+</file>
+
 <file path=ppt/slideLayouts/slideLayout1.xml><?xml version="1.0" encoding="utf-8"?>
 <p:sldLayout xmlns:a="http://schemas.openxmlformats.org/drawingml/2006/main" xmlns:r="http://schemas.openxmlformats.org/officeDocument/2006/relationships" xmlns:p="http://schemas.openxmlformats.org/presentationml/2006/main" preserve="1">
   <p:cSld name="DEFAULT">
@@ -1371,7 +1460,7 @@
                 <a:ea typeface="Calibri" pitchFamily="34" charset="-122"/>
                 <a:cs typeface="Calibri" pitchFamily="34" charset="-120"/>
               </a:rPr>
-              <a:t>Программа проекта, реестр зафиксированных пожеланий заказчика и наши вопросы — рабочий срез на 13–14.09.2026.</a:t>
+              <a:t>Программа проекта, реестр зафиксированных пожеланий заказчика и наши вопросы.</a:t>
             </a:r>
             <a:endParaRPr lang="en-US" sz="1450" dirty="0"/>
           </a:p>
@@ -1653,7 +1742,7 @@
                 <a:ea typeface="Cambria" pitchFamily="34" charset="-122"/>
                 <a:cs typeface="Cambria" pitchFamily="34" charset="-120"/>
               </a:rPr>
-              <a:t>8</a:t>
+              <a:t>3</a:t>
             </a:r>
             <a:endParaRPr lang="en-US" sz="3400" dirty="0"/>
           </a:p>
@@ -1695,7 +1784,7 @@
                 <a:ea typeface="Calibri" pitchFamily="34" charset="-122"/>
                 <a:cs typeface="Calibri" pitchFamily="34" charset="-120"/>
               </a:rPr>
-              <a:t>вопросов по наполнению этапов</a:t>
+              <a:t>волны требуют детализации</a:t>
             </a:r>
             <a:endParaRPr lang="en-US" sz="1200" dirty="0"/>
           </a:p>
@@ -1817,45 +1906,6 @@
         </p:nvSpPr>
         <p:spPr>
           <a:xfrm>
-            <a:off x="502920" y="6263640"/>
-            <a:ext cx="7315200" cy="274320"/>
-          </a:xfrm>
-          <a:prstGeom prst="rect">
-            <a:avLst/>
-          </a:prstGeom>
-          <a:noFill/>
-          <a:ln/>
-        </p:spPr>
-        <p:txBody>
-          <a:bodyPr wrap="square" lIns="0" tIns="0" rIns="0" bIns="0" rtlCol="0" anchor="ctr"/>
-          <a:lstStyle/>
-          <a:p>
-            <a:pPr indent="0" marL="0">
-              <a:buNone/>
-            </a:pPr>
-            <a:r>
-              <a:rPr lang="en-US" sz="1100" dirty="0">
-                <a:solidFill>
-                  <a:srgbClr val="8C99A6"/>
-                </a:solidFill>
-                <a:latin typeface="Calibri" pitchFamily="34" charset="0"/>
-                <a:ea typeface="Calibri" pitchFamily="34" charset="-122"/>
-                <a:cs typeface="Calibri" pitchFamily="34" charset="-120"/>
-              </a:rPr>
-              <a:t>docs/analysis/case-27-proekt-d8-skoup-i-voprosy.xlsx</a:t>
-            </a:r>
-            <a:endParaRPr lang="en-US" sz="1100" dirty="0"/>
-          </a:p>
-        </p:txBody>
-      </p:sp>
-      <p:sp>
-        <p:nvSpPr>
-          <p:cNvPr id="18" name="Text 16"/>
-          <p:cNvSpPr txBox="1"/>
-          <p:nvPr/>
-        </p:nvSpPr>
-        <p:spPr>
-          <a:xfrm>
             <a:off x="10881360" y="6473952"/>
             <a:ext cx="822960" cy="274320"/>
           </a:xfrm>
@@ -1881,7 +1931,7 @@
                 <a:ea typeface="Calibri" pitchFamily="34" charset="-122"/>
                 <a:cs typeface="Calibri" pitchFamily="34" charset="-120"/>
               </a:rPr>
-              <a:t>1 / 5</a:t>
+              <a:t>1 / 6</a:t>
             </a:r>
             <a:endParaRPr lang="en-US" sz="1050" dirty="0"/>
           </a:p>
@@ -1945,7 +1995,212 @@
                 <a:ea typeface="Calibri" pitchFamily="34" charset="-122"/>
                 <a:cs typeface="Calibri" pitchFamily="34" charset="-120"/>
               </a:rPr>
-              <a:t>1 · ПРОГРАММА ПРОЕКТА</a:t>
+              <a:t>1 · АРХИТЕКТУРА ПИЛОТА</a:t>
+            </a:r>
+            <a:endParaRPr lang="en-US" sz="1100" dirty="0"/>
+          </a:p>
+        </p:txBody>
+      </p:sp>
+      <p:sp>
+        <p:nvSpPr>
+          <p:cNvPr id="3" name="Text 1"/>
+          <p:cNvSpPr txBox="1"/>
+          <p:nvPr/>
+        </p:nvSpPr>
+        <p:spPr>
+          <a:xfrm>
+            <a:off x="502920" y="621792"/>
+            <a:ext cx="11155680" cy="548640"/>
+          </a:xfrm>
+          <a:prstGeom prst="rect">
+            <a:avLst/>
+          </a:prstGeom>
+          <a:noFill/>
+          <a:ln/>
+        </p:spPr>
+        <p:txBody>
+          <a:bodyPr wrap="square" lIns="0" tIns="0" rIns="0" bIns="0" rtlCol="0" anchor="ctr"/>
+          <a:lstStyle/>
+          <a:p>
+            <a:pPr indent="0" marL="0">
+              <a:buNone/>
+            </a:pPr>
+            <a:r>
+              <a:rPr lang="en-US" sz="2700" b="1" dirty="0">
+                <a:solidFill>
+                  <a:srgbClr val="1A2733"/>
+                </a:solidFill>
+                <a:latin typeface="Cambria" pitchFamily="34" charset="0"/>
+                <a:ea typeface="Cambria" pitchFamily="34" charset="-122"/>
+                <a:cs typeface="Cambria" pitchFamily="34" charset="-120"/>
+              </a:rPr>
+              <a:t>Источники и получатели данных</a:t>
+            </a:r>
+            <a:endParaRPr lang="en-US" sz="2700" dirty="0"/>
+          </a:p>
+        </p:txBody>
+      </p:sp>
+      <p:sp>
+        <p:nvSpPr>
+          <p:cNvPr id="4" name="Text 2"/>
+          <p:cNvSpPr txBox="1"/>
+          <p:nvPr/>
+        </p:nvSpPr>
+        <p:spPr>
+          <a:xfrm>
+            <a:off x="502920" y="1170432"/>
+            <a:ext cx="11155680" cy="365760"/>
+          </a:xfrm>
+          <a:prstGeom prst="rect">
+            <a:avLst/>
+          </a:prstGeom>
+          <a:noFill/>
+          <a:ln/>
+        </p:spPr>
+        <p:txBody>
+          <a:bodyPr wrap="square" lIns="0" tIns="0" rIns="0" bIns="0" rtlCol="0" anchor="ctr"/>
+          <a:lstStyle/>
+          <a:p>
+            <a:pPr indent="0" marL="0">
+              <a:buNone/>
+            </a:pPr>
+            <a:r>
+              <a:rPr lang="en-US" sz="1300" dirty="0">
+                <a:solidFill>
+                  <a:srgbClr val="5B6B7A"/>
+                </a:solidFill>
+                <a:latin typeface="Calibri" pitchFamily="34" charset="0"/>
+                <a:ea typeface="Calibri" pitchFamily="34" charset="-122"/>
+                <a:cs typeface="Calibri" pitchFamily="34" charset="-120"/>
+              </a:rPr>
+              <a:t>Платформа «Камерата» по фактам пилота (не проектный скоуп) — расширение на следующих слайдах</a:t>
+            </a:r>
+            <a:endParaRPr lang="en-US" sz="1300" dirty="0"/>
+          </a:p>
+        </p:txBody>
+      </p:sp>
+      <p:pic>
+        <p:nvPicPr>
+          <p:cNvPr id="5" name="Image 0" descr="arhitektura-pilota.png">    </p:cNvPr>
+          <p:cNvPicPr>
+            <a:picLocks noChangeAspect="1"/>
+          </p:cNvPicPr>
+          <p:nvPr/>
+        </p:nvPicPr>
+        <p:blipFill>
+          <a:blip r:embed="rId1"/>
+          <a:stretch>
+            <a:fillRect/>
+          </a:stretch>
+        </p:blipFill>
+        <p:spPr>
+          <a:xfrm>
+            <a:off x="2148840" y="1783080"/>
+            <a:ext cx="7863840" cy="4456176"/>
+          </a:xfrm>
+          <a:prstGeom prst="rect">
+            <a:avLst/>
+          </a:prstGeom>
+        </p:spPr>
+      </p:pic>
+      <p:sp>
+        <p:nvSpPr>
+          <p:cNvPr id="6" name="Text 3"/>
+          <p:cNvSpPr txBox="1"/>
+          <p:nvPr/>
+        </p:nvSpPr>
+        <p:spPr>
+          <a:xfrm>
+            <a:off x="10881360" y="6473952"/>
+            <a:ext cx="822960" cy="274320"/>
+          </a:xfrm>
+          <a:prstGeom prst="rect">
+            <a:avLst/>
+          </a:prstGeom>
+          <a:noFill/>
+          <a:ln/>
+        </p:spPr>
+        <p:txBody>
+          <a:bodyPr wrap="square" lIns="0" tIns="0" rIns="0" bIns="0" rtlCol="0" anchor="ctr"/>
+          <a:lstStyle/>
+          <a:p>
+            <a:pPr algn="r" indent="0" marL="0">
+              <a:buNone/>
+            </a:pPr>
+            <a:r>
+              <a:rPr lang="en-US" sz="1050" dirty="0">
+                <a:solidFill>
+                  <a:srgbClr val="8C99A6"/>
+                </a:solidFill>
+                <a:latin typeface="Calibri" pitchFamily="34" charset="0"/>
+                <a:ea typeface="Calibri" pitchFamily="34" charset="-122"/>
+                <a:cs typeface="Calibri" pitchFamily="34" charset="-120"/>
+              </a:rPr>
+              <a:t>2 / 6</a:t>
+            </a:r>
+            <a:endParaRPr lang="en-US" sz="1050" dirty="0"/>
+          </a:p>
+        </p:txBody>
+      </p:sp>
+    </p:spTree>
+  </p:cSld>
+  <p:clrMapOvr>
+    <a:masterClrMapping/>
+  </p:clrMapOvr>
+</p:sld>
+</file>
+
+<file path=ppt/slides/slide3.xml><?xml version="1.0" encoding="utf-8"?>
+<p:sld xmlns:a="http://schemas.openxmlformats.org/drawingml/2006/main" xmlns:r="http://schemas.openxmlformats.org/officeDocument/2006/relationships" xmlns:p="http://schemas.openxmlformats.org/presentationml/2006/main">
+  <p:cSld name="Slide 3">
+    <p:spTree>
+      <p:nvGrpSpPr>
+        <p:cNvPr id="1" name=""/>
+        <p:cNvGrpSpPr/>
+        <p:nvPr/>
+      </p:nvGrpSpPr>
+      <p:grpSpPr>
+        <a:xfrm>
+          <a:off x="0" y="0"/>
+          <a:ext cx="0" cy="0"/>
+          <a:chOff x="0" y="0"/>
+          <a:chExt cx="0" cy="0"/>
+        </a:xfrm>
+      </p:grpSpPr>
+      <p:sp>
+        <p:nvSpPr>
+          <p:cNvPr id="2" name="Text 0"/>
+          <p:cNvSpPr txBox="1"/>
+          <p:nvPr/>
+        </p:nvSpPr>
+        <p:spPr>
+          <a:xfrm>
+            <a:off x="502920" y="320040"/>
+            <a:ext cx="11155680" cy="274320"/>
+          </a:xfrm>
+          <a:prstGeom prst="rect">
+            <a:avLst/>
+          </a:prstGeom>
+          <a:noFill/>
+          <a:ln/>
+        </p:spPr>
+        <p:txBody>
+          <a:bodyPr wrap="square" lIns="0" tIns="0" rIns="0" bIns="0" rtlCol="0" anchor="ctr"/>
+          <a:lstStyle/>
+          <a:p>
+            <a:pPr indent="0" marL="0">
+              <a:buNone/>
+            </a:pPr>
+            <a:r>
+              <a:rPr lang="en-US" sz="1100" b="1" spc="120" kern="0" dirty="0">
+                <a:solidFill>
+                  <a:srgbClr val="0E7C86"/>
+                </a:solidFill>
+                <a:latin typeface="Calibri" pitchFamily="34" charset="0"/>
+                <a:ea typeface="Calibri" pitchFamily="34" charset="-122"/>
+                <a:cs typeface="Calibri" pitchFamily="34" charset="-120"/>
+              </a:rPr>
+              <a:t>2 · ПРОГРАММА ПРОЕКТА</a:t>
             </a:r>
             <a:endParaRPr lang="en-US" sz="1100" dirty="0"/>
           </a:p>
@@ -2031,7 +2286,7 @@
       </p:sp>
       <p:graphicFrame>
         <p:nvGraphicFramePr>
-          <p:cNvPr id="3" name="Table 0"/>
+          <p:cNvPr id="4" name="Table 0"/>
           <p:cNvGraphicFramePr>
             <a:graphicFrameLocks noGrp="1"/>
           </p:cNvGraphicFramePr>
@@ -3940,7 +4195,7 @@
                 <a:ea typeface="Calibri" pitchFamily="34" charset="-122"/>
                 <a:cs typeface="Calibri" pitchFamily="34" charset="-120"/>
               </a:rPr>
-              <a:t>Волна 2 требует отдельного детального состава работ (см. вопрос №2 к заказчику) — срок 4–6 недель ориентировочен на весь объём расширения ESB/КХД.</a:t>
+              <a:t>Волна 2 требует отдельного детального состава работ (см. «Наши вопросы» → Волна 2) — срок 4–6 недель ориентировочен на весь объём расширения ESB/КХД.</a:t>
             </a:r>
             <a:endParaRPr lang="en-US" sz="1150" dirty="0"/>
           </a:p>
@@ -3979,7 +4234,7 @@
                 <a:ea typeface="Calibri" pitchFamily="34" charset="-122"/>
                 <a:cs typeface="Calibri" pitchFamily="34" charset="-120"/>
               </a:rPr>
-              <a:t>2 / 5</a:t>
+              <a:t>3 / 6</a:t>
             </a:r>
             <a:endParaRPr lang="en-US" sz="1050" dirty="0"/>
           </a:p>
@@ -3993,9 +4248,9 @@
 </p:sld>
 </file>
 
-<file path=ppt/slides/slide3.xml><?xml version="1.0" encoding="utf-8"?>
+<file path=ppt/slides/slide4.xml><?xml version="1.0" encoding="utf-8"?>
 <p:sld xmlns:a="http://schemas.openxmlformats.org/drawingml/2006/main" xmlns:r="http://schemas.openxmlformats.org/officeDocument/2006/relationships" xmlns:p="http://schemas.openxmlformats.org/presentationml/2006/main">
-  <p:cSld name="Slide 3">
+  <p:cSld name="Slide 4">
     <p:spTree>
       <p:nvGrpSpPr>
         <p:cNvPr id="1" name=""/>
@@ -4043,7 +4298,7 @@
                 <a:ea typeface="Calibri" pitchFamily="34" charset="-122"/>
                 <a:cs typeface="Calibri" pitchFamily="34" charset="-120"/>
               </a:rPr>
-              <a:t>2 · ЗАФИКСИРОВАННЫЕ ПОЖЕЛАНИЯ ЗАКАЗЧИКА</a:t>
+              <a:t>3 · ЗАФИКСИРОВАННЫЕ ПОЖЕЛАНИЯ ЗАКАЗЧИКА</a:t>
             </a:r>
             <a:endParaRPr lang="en-US" sz="1100" dirty="0"/>
           </a:p>
@@ -4129,7 +4384,7 @@
       </p:sp>
       <p:graphicFrame>
         <p:nvGraphicFramePr>
-          <p:cNvPr id="4" name="Table 0"/>
+          <p:cNvPr id="5" name="Table 0"/>
           <p:cNvGraphicFramePr>
             <a:graphicFrameLocks noGrp="1"/>
           </p:cNvGraphicFramePr>
@@ -7282,2590 +7537,7 @@
                 <a:ea typeface="Calibri" pitchFamily="34" charset="-122"/>
                 <a:cs typeface="Calibri" pitchFamily="34" charset="-120"/>
               </a:rPr>
-              <a:t>3 / 5</a:t>
-            </a:r>
-            <a:endParaRPr lang="en-US" sz="1050" dirty="0"/>
-          </a:p>
-        </p:txBody>
-      </p:sp>
-    </p:spTree>
-  </p:cSld>
-  <p:clrMapOvr>
-    <a:masterClrMapping/>
-  </p:clrMapOvr>
-</p:sld>
-</file>
-
-<file path=ppt/slides/slide4.xml><?xml version="1.0" encoding="utf-8"?>
-<p:sld xmlns:a="http://schemas.openxmlformats.org/drawingml/2006/main" xmlns:r="http://schemas.openxmlformats.org/officeDocument/2006/relationships" xmlns:p="http://schemas.openxmlformats.org/presentationml/2006/main">
-  <p:cSld name="Slide 4">
-    <p:spTree>
-      <p:nvGrpSpPr>
-        <p:cNvPr id="1" name=""/>
-        <p:cNvGrpSpPr/>
-        <p:nvPr/>
-      </p:nvGrpSpPr>
-      <p:grpSpPr>
-        <a:xfrm>
-          <a:off x="0" y="0"/>
-          <a:ext cx="0" cy="0"/>
-          <a:chOff x="0" y="0"/>
-          <a:chExt cx="0" cy="0"/>
-        </a:xfrm>
-      </p:grpSpPr>
-      <p:sp>
-        <p:nvSpPr>
-          <p:cNvPr id="2" name="Text 0"/>
-          <p:cNvSpPr txBox="1"/>
-          <p:nvPr/>
-        </p:nvSpPr>
-        <p:spPr>
-          <a:xfrm>
-            <a:off x="502920" y="320040"/>
-            <a:ext cx="11155680" cy="274320"/>
-          </a:xfrm>
-          <a:prstGeom prst="rect">
-            <a:avLst/>
-          </a:prstGeom>
-          <a:noFill/>
-          <a:ln/>
-        </p:spPr>
-        <p:txBody>
-          <a:bodyPr wrap="square" lIns="0" tIns="0" rIns="0" bIns="0" rtlCol="0" anchor="ctr"/>
-          <a:lstStyle/>
-          <a:p>
-            <a:pPr indent="0" marL="0">
-              <a:buNone/>
-            </a:pPr>
-            <a:r>
-              <a:rPr lang="en-US" sz="1100" b="1" spc="120" kern="0" dirty="0">
-                <a:solidFill>
-                  <a:srgbClr val="0E7C86"/>
-                </a:solidFill>
-                <a:latin typeface="Calibri" pitchFamily="34" charset="0"/>
-                <a:ea typeface="Calibri" pitchFamily="34" charset="-122"/>
-                <a:cs typeface="Calibri" pitchFamily="34" charset="-120"/>
-              </a:rPr>
-              <a:t>3 · НАШИ ВОПРОСЫ · ПО НАПОЛНЕНИЮ ЭТАПОВ</a:t>
-            </a:r>
-            <a:endParaRPr lang="en-US" sz="1100" dirty="0"/>
-          </a:p>
-        </p:txBody>
-      </p:sp>
-      <p:sp>
-        <p:nvSpPr>
-          <p:cNvPr id="3" name="Text 1"/>
-          <p:cNvSpPr txBox="1"/>
-          <p:nvPr/>
-        </p:nvSpPr>
-        <p:spPr>
-          <a:xfrm>
-            <a:off x="502920" y="621792"/>
-            <a:ext cx="11155680" cy="548640"/>
-          </a:xfrm>
-          <a:prstGeom prst="rect">
-            <a:avLst/>
-          </a:prstGeom>
-          <a:noFill/>
-          <a:ln/>
-        </p:spPr>
-        <p:txBody>
-          <a:bodyPr wrap="square" lIns="0" tIns="0" rIns="0" bIns="0" rtlCol="0" anchor="ctr"/>
-          <a:lstStyle/>
-          <a:p>
-            <a:pPr indent="0" marL="0">
-              <a:buNone/>
-            </a:pPr>
-            <a:r>
-              <a:rPr lang="en-US" sz="2700" b="1" dirty="0">
-                <a:solidFill>
-                  <a:srgbClr val="1A2733"/>
-                </a:solidFill>
-                <a:latin typeface="Cambria" pitchFamily="34" charset="0"/>
-                <a:ea typeface="Cambria" pitchFamily="34" charset="-122"/>
-                <a:cs typeface="Cambria" pitchFamily="34" charset="-120"/>
-              </a:rPr>
-              <a:t>Вопросы к содержанию волн и этапов</a:t>
-            </a:r>
-            <a:endParaRPr lang="en-US" sz="2700" dirty="0"/>
-          </a:p>
-        </p:txBody>
-      </p:sp>
-      <p:sp>
-        <p:nvSpPr>
-          <p:cNvPr id="4" name="Text 2"/>
-          <p:cNvSpPr txBox="1"/>
-          <p:nvPr/>
-        </p:nvSpPr>
-        <p:spPr>
-          <a:xfrm>
-            <a:off x="502920" y="1170432"/>
-            <a:ext cx="11155680" cy="365760"/>
-          </a:xfrm>
-          <a:prstGeom prst="rect">
-            <a:avLst/>
-          </a:prstGeom>
-          <a:noFill/>
-          <a:ln/>
-        </p:spPr>
-        <p:txBody>
-          <a:bodyPr wrap="square" lIns="0" tIns="0" rIns="0" bIns="0" rtlCol="0" anchor="ctr"/>
-          <a:lstStyle/>
-          <a:p>
-            <a:pPr indent="0" marL="0">
-              <a:buNone/>
-            </a:pPr>
-            <a:r>
-              <a:rPr lang="en-US" sz="1300" dirty="0">
-                <a:solidFill>
-                  <a:srgbClr val="5B6B7A"/>
-                </a:solidFill>
-                <a:latin typeface="Calibri" pitchFamily="34" charset="0"/>
-                <a:ea typeface="Calibri" pitchFamily="34" charset="-122"/>
-                <a:cs typeface="Calibri" pitchFamily="34" charset="-120"/>
-              </a:rPr>
-              <a:t>Без ответов заказчика состав работ волны 2 и старт волны 3+ не оценить</a:t>
-            </a:r>
-            <a:endParaRPr lang="en-US" sz="1300" dirty="0"/>
-          </a:p>
-        </p:txBody>
-      </p:sp>
-      <p:graphicFrame>
-        <p:nvGraphicFramePr>
-          <p:cNvPr id="5" name="Table 0"/>
-          <p:cNvGraphicFramePr>
-            <a:graphicFrameLocks noGrp="1"/>
-          </p:cNvGraphicFramePr>
-          <p:nvPr>
-            <p:extLst>
-              <p:ext uri="{D42A27DB-BD31-4B8C-83A1-F6EECF244321}">
-                <p14:modId xmlns:p14="http://schemas.microsoft.com/office/powerpoint/2010/main" val="1579011935"/>
-              </p:ext>
-            </p:extLst>
-          </p:nvPr>
-        </p:nvGraphicFramePr>
-        <p:xfrm>
-          <a:off x="502920" y="1691640"/>
-          <a:ext cx="11155680" cy="4480560"/>
-        </p:xfrm>
-        <a:graphic>
-          <a:graphicData uri="http://schemas.openxmlformats.org/drawingml/2006/table">
-            <a:tbl>
-              <a:tblPr/>
-              <a:tblGrid>
-                <a:gridCol w="548640"/>
-                <a:gridCol w="1828800"/>
-                <a:gridCol w="1280160"/>
-                <a:gridCol w="7498080"/>
-              </a:tblGrid>
-              <a:tr h="497840">
-                <a:tc>
-                  <a:txBody>
-                    <a:bodyPr/>
-                    <a:lstStyle/>
-                    <a:p>
-                      <a:pPr algn="ctr" indent="0" marL="0">
-                        <a:buNone/>
-                      </a:pPr>
-                      <a:r>
-                        <a:rPr lang="en-US" sz="1100" b="1" dirty="0">
-                          <a:solidFill>
-                            <a:srgbClr val="FFFFFF"/>
-                          </a:solidFill>
-                          <a:latin typeface="Calibri" pitchFamily="34" charset="0"/>
-                          <a:ea typeface="Calibri" pitchFamily="34" charset="-122"/>
-                          <a:cs typeface="Calibri" pitchFamily="34" charset="-120"/>
-                        </a:rPr>
-                        <a:t>№</a:t>
-                      </a:r>
-                      <a:endParaRPr lang="en-US" sz="1100" dirty="0">
-                        <a:latin typeface="Calibri" charset="0"/>
-                        <a:ea typeface="Calibri" charset="0"/>
-                        <a:cs typeface="Calibri" charset="0"/>
-                      </a:endParaRPr>
-                    </a:p>
-                  </a:txBody>
-                  <a:tcPr marL="101600" marR="101600" marT="63500" marB="63500" anchor="ctr">
-                    <a:lnL w="9525" cap="flat" cmpd="sng" algn="ctr">
-                      <a:solidFill>
-                        <a:srgbClr val="D8DEE2"/>
-                      </a:solidFill>
-                      <a:prstDash val="solid"/>
-                      <a:round/>
-                      <a:headEnd type="none" w="med" len="med"/>
-                      <a:tailEnd type="none" w="med" len="med"/>
-                    </a:lnL>
-                    <a:lnR w="9525" cap="flat" cmpd="sng" algn="ctr">
-                      <a:solidFill>
-                        <a:srgbClr val="D8DEE2"/>
-                      </a:solidFill>
-                      <a:prstDash val="solid"/>
-                      <a:round/>
-                      <a:headEnd type="none" w="med" len="med"/>
-                      <a:tailEnd type="none" w="med" len="med"/>
-                    </a:lnR>
-                    <a:lnT w="9525" cap="flat" cmpd="sng" algn="ctr">
-                      <a:solidFill>
-                        <a:srgbClr val="D8DEE2"/>
-                      </a:solidFill>
-                      <a:prstDash val="solid"/>
-                      <a:round/>
-                      <a:headEnd type="none" w="med" len="med"/>
-                      <a:tailEnd type="none" w="med" len="med"/>
-                    </a:lnT>
-                    <a:lnB w="9525" cap="flat" cmpd="sng" algn="ctr">
-                      <a:solidFill>
-                        <a:srgbClr val="D8DEE2"/>
-                      </a:solidFill>
-                      <a:prstDash val="solid"/>
-                      <a:round/>
-                      <a:headEnd type="none" w="med" len="med"/>
-                      <a:tailEnd type="none" w="med" len="med"/>
-                    </a:lnB>
-                    <a:solidFill>
-                      <a:srgbClr val="1A2733"/>
-                    </a:solidFill>
-                  </a:tcPr>
-                </a:tc>
-                <a:tc>
-                  <a:txBody>
-                    <a:bodyPr/>
-                    <a:lstStyle/>
-                    <a:p>
-                      <a:pPr indent="0" marL="0">
-                        <a:buNone/>
-                      </a:pPr>
-                      <a:r>
-                        <a:rPr lang="en-US" sz="1100" b="1" dirty="0">
-                          <a:solidFill>
-                            <a:srgbClr val="FFFFFF"/>
-                          </a:solidFill>
-                          <a:latin typeface="Calibri" pitchFamily="34" charset="0"/>
-                          <a:ea typeface="Calibri" pitchFamily="34" charset="-122"/>
-                          <a:cs typeface="Calibri" pitchFamily="34" charset="-120"/>
-                        </a:rPr>
-                        <a:t>Категория</a:t>
-                      </a:r>
-                      <a:endParaRPr lang="en-US" sz="1100" dirty="0">
-                        <a:latin typeface="Calibri" charset="0"/>
-                        <a:ea typeface="Calibri" charset="0"/>
-                        <a:cs typeface="Calibri" charset="0"/>
-                      </a:endParaRPr>
-                    </a:p>
-                  </a:txBody>
-                  <a:tcPr marL="101600" marR="101600" marT="63500" marB="63500" anchor="ctr">
-                    <a:lnL w="9525" cap="flat" cmpd="sng" algn="ctr">
-                      <a:solidFill>
-                        <a:srgbClr val="D8DEE2"/>
-                      </a:solidFill>
-                      <a:prstDash val="solid"/>
-                      <a:round/>
-                      <a:headEnd type="none" w="med" len="med"/>
-                      <a:tailEnd type="none" w="med" len="med"/>
-                    </a:lnL>
-                    <a:lnR w="9525" cap="flat" cmpd="sng" algn="ctr">
-                      <a:solidFill>
-                        <a:srgbClr val="D8DEE2"/>
-                      </a:solidFill>
-                      <a:prstDash val="solid"/>
-                      <a:round/>
-                      <a:headEnd type="none" w="med" len="med"/>
-                      <a:tailEnd type="none" w="med" len="med"/>
-                    </a:lnR>
-                    <a:lnT w="9525" cap="flat" cmpd="sng" algn="ctr">
-                      <a:solidFill>
-                        <a:srgbClr val="D8DEE2"/>
-                      </a:solidFill>
-                      <a:prstDash val="solid"/>
-                      <a:round/>
-                      <a:headEnd type="none" w="med" len="med"/>
-                      <a:tailEnd type="none" w="med" len="med"/>
-                    </a:lnT>
-                    <a:lnB w="9525" cap="flat" cmpd="sng" algn="ctr">
-                      <a:solidFill>
-                        <a:srgbClr val="D8DEE2"/>
-                      </a:solidFill>
-                      <a:prstDash val="solid"/>
-                      <a:round/>
-                      <a:headEnd type="none" w="med" len="med"/>
-                      <a:tailEnd type="none" w="med" len="med"/>
-                    </a:lnB>
-                    <a:solidFill>
-                      <a:srgbClr val="1A2733"/>
-                    </a:solidFill>
-                  </a:tcPr>
-                </a:tc>
-                <a:tc>
-                  <a:txBody>
-                    <a:bodyPr/>
-                    <a:lstStyle/>
-                    <a:p>
-                      <a:pPr algn="ctr" indent="0" marL="0">
-                        <a:buNone/>
-                      </a:pPr>
-                      <a:r>
-                        <a:rPr lang="en-US" sz="1100" b="1" dirty="0">
-                          <a:solidFill>
-                            <a:srgbClr val="FFFFFF"/>
-                          </a:solidFill>
-                          <a:latin typeface="Calibri" pitchFamily="34" charset="0"/>
-                          <a:ea typeface="Calibri" pitchFamily="34" charset="-122"/>
-                          <a:cs typeface="Calibri" pitchFamily="34" charset="-120"/>
-                        </a:rPr>
-                        <a:t>Приоритет</a:t>
-                      </a:r>
-                      <a:endParaRPr lang="en-US" sz="1100" dirty="0">
-                        <a:latin typeface="Calibri" charset="0"/>
-                        <a:ea typeface="Calibri" charset="0"/>
-                        <a:cs typeface="Calibri" charset="0"/>
-                      </a:endParaRPr>
-                    </a:p>
-                  </a:txBody>
-                  <a:tcPr marL="101600" marR="101600" marT="63500" marB="63500" anchor="ctr">
-                    <a:lnL w="9525" cap="flat" cmpd="sng" algn="ctr">
-                      <a:solidFill>
-                        <a:srgbClr val="D8DEE2"/>
-                      </a:solidFill>
-                      <a:prstDash val="solid"/>
-                      <a:round/>
-                      <a:headEnd type="none" w="med" len="med"/>
-                      <a:tailEnd type="none" w="med" len="med"/>
-                    </a:lnL>
-                    <a:lnR w="9525" cap="flat" cmpd="sng" algn="ctr">
-                      <a:solidFill>
-                        <a:srgbClr val="D8DEE2"/>
-                      </a:solidFill>
-                      <a:prstDash val="solid"/>
-                      <a:round/>
-                      <a:headEnd type="none" w="med" len="med"/>
-                      <a:tailEnd type="none" w="med" len="med"/>
-                    </a:lnR>
-                    <a:lnT w="9525" cap="flat" cmpd="sng" algn="ctr">
-                      <a:solidFill>
-                        <a:srgbClr val="D8DEE2"/>
-                      </a:solidFill>
-                      <a:prstDash val="solid"/>
-                      <a:round/>
-                      <a:headEnd type="none" w="med" len="med"/>
-                      <a:tailEnd type="none" w="med" len="med"/>
-                    </a:lnT>
-                    <a:lnB w="9525" cap="flat" cmpd="sng" algn="ctr">
-                      <a:solidFill>
-                        <a:srgbClr val="D8DEE2"/>
-                      </a:solidFill>
-                      <a:prstDash val="solid"/>
-                      <a:round/>
-                      <a:headEnd type="none" w="med" len="med"/>
-                      <a:tailEnd type="none" w="med" len="med"/>
-                    </a:lnB>
-                    <a:solidFill>
-                      <a:srgbClr val="1A2733"/>
-                    </a:solidFill>
-                  </a:tcPr>
-                </a:tc>
-                <a:tc>
-                  <a:txBody>
-                    <a:bodyPr/>
-                    <a:lstStyle/>
-                    <a:p>
-                      <a:pPr indent="0" marL="0">
-                        <a:buNone/>
-                      </a:pPr>
-                      <a:r>
-                        <a:rPr lang="en-US" sz="1100" b="1" dirty="0">
-                          <a:solidFill>
-                            <a:srgbClr val="FFFFFF"/>
-                          </a:solidFill>
-                          <a:latin typeface="Calibri" pitchFamily="34" charset="0"/>
-                          <a:ea typeface="Calibri" pitchFamily="34" charset="-122"/>
-                          <a:cs typeface="Calibri" pitchFamily="34" charset="-120"/>
-                        </a:rPr>
-                        <a:t>Вопрос</a:t>
-                      </a:r>
-                      <a:endParaRPr lang="en-US" sz="1100" dirty="0">
-                        <a:latin typeface="Calibri" charset="0"/>
-                        <a:ea typeface="Calibri" charset="0"/>
-                        <a:cs typeface="Calibri" charset="0"/>
-                      </a:endParaRPr>
-                    </a:p>
-                  </a:txBody>
-                  <a:tcPr marL="101600" marR="101600" marT="63500" marB="63500" anchor="ctr">
-                    <a:lnL w="9525" cap="flat" cmpd="sng" algn="ctr">
-                      <a:solidFill>
-                        <a:srgbClr val="D8DEE2"/>
-                      </a:solidFill>
-                      <a:prstDash val="solid"/>
-                      <a:round/>
-                      <a:headEnd type="none" w="med" len="med"/>
-                      <a:tailEnd type="none" w="med" len="med"/>
-                    </a:lnL>
-                    <a:lnR w="9525" cap="flat" cmpd="sng" algn="ctr">
-                      <a:solidFill>
-                        <a:srgbClr val="D8DEE2"/>
-                      </a:solidFill>
-                      <a:prstDash val="solid"/>
-                      <a:round/>
-                      <a:headEnd type="none" w="med" len="med"/>
-                      <a:tailEnd type="none" w="med" len="med"/>
-                    </a:lnR>
-                    <a:lnT w="9525" cap="flat" cmpd="sng" algn="ctr">
-                      <a:solidFill>
-                        <a:srgbClr val="D8DEE2"/>
-                      </a:solidFill>
-                      <a:prstDash val="solid"/>
-                      <a:round/>
-                      <a:headEnd type="none" w="med" len="med"/>
-                      <a:tailEnd type="none" w="med" len="med"/>
-                    </a:lnT>
-                    <a:lnB w="9525" cap="flat" cmpd="sng" algn="ctr">
-                      <a:solidFill>
-                        <a:srgbClr val="D8DEE2"/>
-                      </a:solidFill>
-                      <a:prstDash val="solid"/>
-                      <a:round/>
-                      <a:headEnd type="none" w="med" len="med"/>
-                      <a:tailEnd type="none" w="med" len="med"/>
-                    </a:lnB>
-                    <a:solidFill>
-                      <a:srgbClr val="1A2733"/>
-                    </a:solidFill>
-                  </a:tcPr>
-                </a:tc>
-              </a:tr>
-              <a:tr h="497840">
-                <a:tc>
-                  <a:txBody>
-                    <a:bodyPr/>
-                    <a:lstStyle/>
-                    <a:p>
-                      <a:pPr algn="ctr" indent="0" marL="0">
-                        <a:buNone/>
-                      </a:pPr>
-                      <a:r>
-                        <a:rPr lang="en-US" sz="1100" dirty="0">
-                          <a:solidFill>
-                            <a:srgbClr val="5B6B7A"/>
-                          </a:solidFill>
-                          <a:latin typeface="Calibri" pitchFamily="34" charset="0"/>
-                          <a:ea typeface="Calibri" pitchFamily="34" charset="-122"/>
-                          <a:cs typeface="Calibri" pitchFamily="34" charset="-120"/>
-                        </a:rPr>
-                        <a:t>1</a:t>
-                      </a:r>
-                      <a:endParaRPr lang="en-US" sz="1100" dirty="0">
-                        <a:latin typeface="Calibri" charset="0"/>
-                        <a:ea typeface="Calibri" charset="0"/>
-                        <a:cs typeface="Calibri" charset="0"/>
-                      </a:endParaRPr>
-                    </a:p>
-                  </a:txBody>
-                  <a:tcPr marL="101600" marR="101600" marT="63500" marB="63500" anchor="ctr">
-                    <a:lnL w="9525" cap="flat" cmpd="sng" algn="ctr">
-                      <a:solidFill>
-                        <a:srgbClr val="D8DEE2"/>
-                      </a:solidFill>
-                      <a:prstDash val="solid"/>
-                      <a:round/>
-                      <a:headEnd type="none" w="med" len="med"/>
-                      <a:tailEnd type="none" w="med" len="med"/>
-                    </a:lnL>
-                    <a:lnR w="9525" cap="flat" cmpd="sng" algn="ctr">
-                      <a:solidFill>
-                        <a:srgbClr val="D8DEE2"/>
-                      </a:solidFill>
-                      <a:prstDash val="solid"/>
-                      <a:round/>
-                      <a:headEnd type="none" w="med" len="med"/>
-                      <a:tailEnd type="none" w="med" len="med"/>
-                    </a:lnR>
-                    <a:lnT w="9525" cap="flat" cmpd="sng" algn="ctr">
-                      <a:solidFill>
-                        <a:srgbClr val="D8DEE2"/>
-                      </a:solidFill>
-                      <a:prstDash val="solid"/>
-                      <a:round/>
-                      <a:headEnd type="none" w="med" len="med"/>
-                      <a:tailEnd type="none" w="med" len="med"/>
-                    </a:lnT>
-                    <a:lnB w="9525" cap="flat" cmpd="sng" algn="ctr">
-                      <a:solidFill>
-                        <a:srgbClr val="D8DEE2"/>
-                      </a:solidFill>
-                      <a:prstDash val="solid"/>
-                      <a:round/>
-                      <a:headEnd type="none" w="med" len="med"/>
-                      <a:tailEnd type="none" w="med" len="med"/>
-                    </a:lnB>
-                  </a:tcPr>
-                </a:tc>
-                <a:tc>
-                  <a:txBody>
-                    <a:bodyPr/>
-                    <a:lstStyle/>
-                    <a:p>
-                      <a:pPr indent="0" marL="0">
-                        <a:buNone/>
-                      </a:pPr>
-                      <a:r>
-                        <a:rPr lang="en-US" sz="1100" b="1" dirty="0">
-                          <a:solidFill>
-                            <a:srgbClr val="1A2733"/>
-                          </a:solidFill>
-                          <a:latin typeface="Calibri" pitchFamily="34" charset="0"/>
-                          <a:ea typeface="Calibri" pitchFamily="34" charset="-122"/>
-                          <a:cs typeface="Calibri" pitchFamily="34" charset="-120"/>
-                        </a:rPr>
-                        <a:t>Волны</a:t>
-                      </a:r>
-                      <a:endParaRPr lang="en-US" sz="1100" dirty="0">
-                        <a:latin typeface="Calibri" charset="0"/>
-                        <a:ea typeface="Calibri" charset="0"/>
-                        <a:cs typeface="Calibri" charset="0"/>
-                      </a:endParaRPr>
-                    </a:p>
-                  </a:txBody>
-                  <a:tcPr marL="101600" marR="101600" marT="63500" marB="63500" anchor="ctr">
-                    <a:lnL w="9525" cap="flat" cmpd="sng" algn="ctr">
-                      <a:solidFill>
-                        <a:srgbClr val="D8DEE2"/>
-                      </a:solidFill>
-                      <a:prstDash val="solid"/>
-                      <a:round/>
-                      <a:headEnd type="none" w="med" len="med"/>
-                      <a:tailEnd type="none" w="med" len="med"/>
-                    </a:lnL>
-                    <a:lnR w="9525" cap="flat" cmpd="sng" algn="ctr">
-                      <a:solidFill>
-                        <a:srgbClr val="D8DEE2"/>
-                      </a:solidFill>
-                      <a:prstDash val="solid"/>
-                      <a:round/>
-                      <a:headEnd type="none" w="med" len="med"/>
-                      <a:tailEnd type="none" w="med" len="med"/>
-                    </a:lnR>
-                    <a:lnT w="9525" cap="flat" cmpd="sng" algn="ctr">
-                      <a:solidFill>
-                        <a:srgbClr val="D8DEE2"/>
-                      </a:solidFill>
-                      <a:prstDash val="solid"/>
-                      <a:round/>
-                      <a:headEnd type="none" w="med" len="med"/>
-                      <a:tailEnd type="none" w="med" len="med"/>
-                    </a:lnT>
-                    <a:lnB w="9525" cap="flat" cmpd="sng" algn="ctr">
-                      <a:solidFill>
-                        <a:srgbClr val="D8DEE2"/>
-                      </a:solidFill>
-                      <a:prstDash val="solid"/>
-                      <a:round/>
-                      <a:headEnd type="none" w="med" len="med"/>
-                      <a:tailEnd type="none" w="med" len="med"/>
-                    </a:lnB>
-                  </a:tcPr>
-                </a:tc>
-                <a:tc>
-                  <a:txBody>
-                    <a:bodyPr/>
-                    <a:lstStyle/>
-                    <a:p>
-                      <a:pPr algn="ctr" indent="0" marL="0">
-                        <a:buNone/>
-                      </a:pPr>
-                      <a:r>
-                        <a:rPr lang="en-US" sz="1050" b="1" dirty="0">
-                          <a:solidFill>
-                            <a:srgbClr val="C0392B"/>
-                          </a:solidFill>
-                          <a:latin typeface="Calibri" pitchFamily="34" charset="0"/>
-                          <a:ea typeface="Calibri" pitchFamily="34" charset="-122"/>
-                          <a:cs typeface="Calibri" pitchFamily="34" charset="-120"/>
-                        </a:rPr>
-                        <a:t>Критичный</a:t>
-                      </a:r>
-                      <a:endParaRPr lang="en-US" sz="1050" dirty="0">
-                        <a:latin typeface="Calibri" charset="0"/>
-                        <a:ea typeface="Calibri" charset="0"/>
-                        <a:cs typeface="Calibri" charset="0"/>
-                      </a:endParaRPr>
-                    </a:p>
-                  </a:txBody>
-                  <a:tcPr marL="101600" marR="101600" marT="63500" marB="63500" anchor="ctr">
-                    <a:lnL w="9525" cap="flat" cmpd="sng" algn="ctr">
-                      <a:solidFill>
-                        <a:srgbClr val="D8DEE2"/>
-                      </a:solidFill>
-                      <a:prstDash val="solid"/>
-                      <a:round/>
-                      <a:headEnd type="none" w="med" len="med"/>
-                      <a:tailEnd type="none" w="med" len="med"/>
-                    </a:lnL>
-                    <a:lnR w="9525" cap="flat" cmpd="sng" algn="ctr">
-                      <a:solidFill>
-                        <a:srgbClr val="D8DEE2"/>
-                      </a:solidFill>
-                      <a:prstDash val="solid"/>
-                      <a:round/>
-                      <a:headEnd type="none" w="med" len="med"/>
-                      <a:tailEnd type="none" w="med" len="med"/>
-                    </a:lnR>
-                    <a:lnT w="9525" cap="flat" cmpd="sng" algn="ctr">
-                      <a:solidFill>
-                        <a:srgbClr val="D8DEE2"/>
-                      </a:solidFill>
-                      <a:prstDash val="solid"/>
-                      <a:round/>
-                      <a:headEnd type="none" w="med" len="med"/>
-                      <a:tailEnd type="none" w="med" len="med"/>
-                    </a:lnT>
-                    <a:lnB w="9525" cap="flat" cmpd="sng" algn="ctr">
-                      <a:solidFill>
-                        <a:srgbClr val="D8DEE2"/>
-                      </a:solidFill>
-                      <a:prstDash val="solid"/>
-                      <a:round/>
-                      <a:headEnd type="none" w="med" len="med"/>
-                      <a:tailEnd type="none" w="med" len="med"/>
-                    </a:lnB>
-                  </a:tcPr>
-                </a:tc>
-                <a:tc>
-                  <a:txBody>
-                    <a:bodyPr/>
-                    <a:lstStyle/>
-                    <a:p>
-                      <a:pPr indent="0" marL="0">
-                        <a:buNone/>
-                      </a:pPr>
-                      <a:r>
-                        <a:rPr lang="en-US" sz="1100" dirty="0">
-                          <a:solidFill>
-                            <a:srgbClr val="5B6B7A"/>
-                          </a:solidFill>
-                          <a:latin typeface="Calibri" pitchFamily="34" charset="0"/>
-                          <a:ea typeface="Calibri" pitchFamily="34" charset="-122"/>
-                          <a:cs typeface="Calibri" pitchFamily="34" charset="-120"/>
-                        </a:rPr>
-                        <a:t>Волна 1 «RAG-документы» — новые типы документов / улучшение качества существующих / отдельная новая коллекция?</a:t>
-                      </a:r>
-                      <a:endParaRPr lang="en-US" sz="1100" dirty="0">
-                        <a:latin typeface="Calibri" charset="0"/>
-                        <a:ea typeface="Calibri" charset="0"/>
-                        <a:cs typeface="Calibri" charset="0"/>
-                      </a:endParaRPr>
-                    </a:p>
-                  </a:txBody>
-                  <a:tcPr marL="101600" marR="101600" marT="63500" marB="63500" anchor="ctr">
-                    <a:lnL w="9525" cap="flat" cmpd="sng" algn="ctr">
-                      <a:solidFill>
-                        <a:srgbClr val="D8DEE2"/>
-                      </a:solidFill>
-                      <a:prstDash val="solid"/>
-                      <a:round/>
-                      <a:headEnd type="none" w="med" len="med"/>
-                      <a:tailEnd type="none" w="med" len="med"/>
-                    </a:lnL>
-                    <a:lnR w="9525" cap="flat" cmpd="sng" algn="ctr">
-                      <a:solidFill>
-                        <a:srgbClr val="D8DEE2"/>
-                      </a:solidFill>
-                      <a:prstDash val="solid"/>
-                      <a:round/>
-                      <a:headEnd type="none" w="med" len="med"/>
-                      <a:tailEnd type="none" w="med" len="med"/>
-                    </a:lnR>
-                    <a:lnT w="9525" cap="flat" cmpd="sng" algn="ctr">
-                      <a:solidFill>
-                        <a:srgbClr val="D8DEE2"/>
-                      </a:solidFill>
-                      <a:prstDash val="solid"/>
-                      <a:round/>
-                      <a:headEnd type="none" w="med" len="med"/>
-                      <a:tailEnd type="none" w="med" len="med"/>
-                    </a:lnT>
-                    <a:lnB w="9525" cap="flat" cmpd="sng" algn="ctr">
-                      <a:solidFill>
-                        <a:srgbClr val="D8DEE2"/>
-                      </a:solidFill>
-                      <a:prstDash val="solid"/>
-                      <a:round/>
-                      <a:headEnd type="none" w="med" len="med"/>
-                      <a:tailEnd type="none" w="med" len="med"/>
-                    </a:lnB>
-                  </a:tcPr>
-                </a:tc>
-              </a:tr>
-              <a:tr h="497840">
-                <a:tc>
-                  <a:txBody>
-                    <a:bodyPr/>
-                    <a:lstStyle/>
-                    <a:p>
-                      <a:pPr algn="ctr" indent="0" marL="0">
-                        <a:buNone/>
-                      </a:pPr>
-                      <a:r>
-                        <a:rPr lang="en-US" sz="1100" dirty="0">
-                          <a:solidFill>
-                            <a:srgbClr val="5B6B7A"/>
-                          </a:solidFill>
-                          <a:latin typeface="Calibri" pitchFamily="34" charset="0"/>
-                          <a:ea typeface="Calibri" pitchFamily="34" charset="-122"/>
-                          <a:cs typeface="Calibri" pitchFamily="34" charset="-120"/>
-                        </a:rPr>
-                        <a:t>2</a:t>
-                      </a:r>
-                      <a:endParaRPr lang="en-US" sz="1100" dirty="0">
-                        <a:latin typeface="Calibri" charset="0"/>
-                        <a:ea typeface="Calibri" charset="0"/>
-                        <a:cs typeface="Calibri" charset="0"/>
-                      </a:endParaRPr>
-                    </a:p>
-                  </a:txBody>
-                  <a:tcPr marL="101600" marR="101600" marT="63500" marB="63500" anchor="ctr">
-                    <a:lnL w="9525" cap="flat" cmpd="sng" algn="ctr">
-                      <a:solidFill>
-                        <a:srgbClr val="D8DEE2"/>
-                      </a:solidFill>
-                      <a:prstDash val="solid"/>
-                      <a:round/>
-                      <a:headEnd type="none" w="med" len="med"/>
-                      <a:tailEnd type="none" w="med" len="med"/>
-                    </a:lnL>
-                    <a:lnR w="9525" cap="flat" cmpd="sng" algn="ctr">
-                      <a:solidFill>
-                        <a:srgbClr val="D8DEE2"/>
-                      </a:solidFill>
-                      <a:prstDash val="solid"/>
-                      <a:round/>
-                      <a:headEnd type="none" w="med" len="med"/>
-                      <a:tailEnd type="none" w="med" len="med"/>
-                    </a:lnR>
-                    <a:lnT w="9525" cap="flat" cmpd="sng" algn="ctr">
-                      <a:solidFill>
-                        <a:srgbClr val="D8DEE2"/>
-                      </a:solidFill>
-                      <a:prstDash val="solid"/>
-                      <a:round/>
-                      <a:headEnd type="none" w="med" len="med"/>
-                      <a:tailEnd type="none" w="med" len="med"/>
-                    </a:lnT>
-                    <a:lnB w="9525" cap="flat" cmpd="sng" algn="ctr">
-                      <a:solidFill>
-                        <a:srgbClr val="D8DEE2"/>
-                      </a:solidFill>
-                      <a:prstDash val="solid"/>
-                      <a:round/>
-                      <a:headEnd type="none" w="med" len="med"/>
-                      <a:tailEnd type="none" w="med" len="med"/>
-                    </a:lnB>
-                  </a:tcPr>
-                </a:tc>
-                <a:tc>
-                  <a:txBody>
-                    <a:bodyPr/>
-                    <a:lstStyle/>
-                    <a:p>
-                      <a:pPr indent="0" marL="0">
-                        <a:buNone/>
-                      </a:pPr>
-                      <a:r>
-                        <a:rPr lang="en-US" sz="1100" b="1" dirty="0">
-                          <a:solidFill>
-                            <a:srgbClr val="1A2733"/>
-                          </a:solidFill>
-                          <a:latin typeface="Calibri" pitchFamily="34" charset="0"/>
-                          <a:ea typeface="Calibri" pitchFamily="34" charset="-122"/>
-                          <a:cs typeface="Calibri" pitchFamily="34" charset="-120"/>
-                        </a:rPr>
-                        <a:t>Волны</a:t>
-                      </a:r>
-                      <a:endParaRPr lang="en-US" sz="1100" dirty="0">
-                        <a:latin typeface="Calibri" charset="0"/>
-                        <a:ea typeface="Calibri" charset="0"/>
-                        <a:cs typeface="Calibri" charset="0"/>
-                      </a:endParaRPr>
-                    </a:p>
-                  </a:txBody>
-                  <a:tcPr marL="101600" marR="101600" marT="63500" marB="63500" anchor="ctr">
-                    <a:lnL w="9525" cap="flat" cmpd="sng" algn="ctr">
-                      <a:solidFill>
-                        <a:srgbClr val="D8DEE2"/>
-                      </a:solidFill>
-                      <a:prstDash val="solid"/>
-                      <a:round/>
-                      <a:headEnd type="none" w="med" len="med"/>
-                      <a:tailEnd type="none" w="med" len="med"/>
-                    </a:lnL>
-                    <a:lnR w="9525" cap="flat" cmpd="sng" algn="ctr">
-                      <a:solidFill>
-                        <a:srgbClr val="D8DEE2"/>
-                      </a:solidFill>
-                      <a:prstDash val="solid"/>
-                      <a:round/>
-                      <a:headEnd type="none" w="med" len="med"/>
-                      <a:tailEnd type="none" w="med" len="med"/>
-                    </a:lnR>
-                    <a:lnT w="9525" cap="flat" cmpd="sng" algn="ctr">
-                      <a:solidFill>
-                        <a:srgbClr val="D8DEE2"/>
-                      </a:solidFill>
-                      <a:prstDash val="solid"/>
-                      <a:round/>
-                      <a:headEnd type="none" w="med" len="med"/>
-                      <a:tailEnd type="none" w="med" len="med"/>
-                    </a:lnT>
-                    <a:lnB w="9525" cap="flat" cmpd="sng" algn="ctr">
-                      <a:solidFill>
-                        <a:srgbClr val="D8DEE2"/>
-                      </a:solidFill>
-                      <a:prstDash val="solid"/>
-                      <a:round/>
-                      <a:headEnd type="none" w="med" len="med"/>
-                      <a:tailEnd type="none" w="med" len="med"/>
-                    </a:lnB>
-                  </a:tcPr>
-                </a:tc>
-                <a:tc>
-                  <a:txBody>
-                    <a:bodyPr/>
-                    <a:lstStyle/>
-                    <a:p>
-                      <a:pPr algn="ctr" indent="0" marL="0">
-                        <a:buNone/>
-                      </a:pPr>
-                      <a:r>
-                        <a:rPr lang="en-US" sz="1050" b="1" dirty="0">
-                          <a:solidFill>
-                            <a:srgbClr val="C0392B"/>
-                          </a:solidFill>
-                          <a:latin typeface="Calibri" pitchFamily="34" charset="0"/>
-                          <a:ea typeface="Calibri" pitchFamily="34" charset="-122"/>
-                          <a:cs typeface="Calibri" pitchFamily="34" charset="-120"/>
-                        </a:rPr>
-                        <a:t>Критичный</a:t>
-                      </a:r>
-                      <a:endParaRPr lang="en-US" sz="1050" dirty="0">
-                        <a:latin typeface="Calibri" charset="0"/>
-                        <a:ea typeface="Calibri" charset="0"/>
-                        <a:cs typeface="Calibri" charset="0"/>
-                      </a:endParaRPr>
-                    </a:p>
-                  </a:txBody>
-                  <a:tcPr marL="101600" marR="101600" marT="63500" marB="63500" anchor="ctr">
-                    <a:lnL w="9525" cap="flat" cmpd="sng" algn="ctr">
-                      <a:solidFill>
-                        <a:srgbClr val="D8DEE2"/>
-                      </a:solidFill>
-                      <a:prstDash val="solid"/>
-                      <a:round/>
-                      <a:headEnd type="none" w="med" len="med"/>
-                      <a:tailEnd type="none" w="med" len="med"/>
-                    </a:lnL>
-                    <a:lnR w="9525" cap="flat" cmpd="sng" algn="ctr">
-                      <a:solidFill>
-                        <a:srgbClr val="D8DEE2"/>
-                      </a:solidFill>
-                      <a:prstDash val="solid"/>
-                      <a:round/>
-                      <a:headEnd type="none" w="med" len="med"/>
-                      <a:tailEnd type="none" w="med" len="med"/>
-                    </a:lnR>
-                    <a:lnT w="9525" cap="flat" cmpd="sng" algn="ctr">
-                      <a:solidFill>
-                        <a:srgbClr val="D8DEE2"/>
-                      </a:solidFill>
-                      <a:prstDash val="solid"/>
-                      <a:round/>
-                      <a:headEnd type="none" w="med" len="med"/>
-                      <a:tailEnd type="none" w="med" len="med"/>
-                    </a:lnT>
-                    <a:lnB w="9525" cap="flat" cmpd="sng" algn="ctr">
-                      <a:solidFill>
-                        <a:srgbClr val="D8DEE2"/>
-                      </a:solidFill>
-                      <a:prstDash val="solid"/>
-                      <a:round/>
-                      <a:headEnd type="none" w="med" len="med"/>
-                      <a:tailEnd type="none" w="med" len="med"/>
-                    </a:lnB>
-                  </a:tcPr>
-                </a:tc>
-                <a:tc>
-                  <a:txBody>
-                    <a:bodyPr/>
-                    <a:lstStyle/>
-                    <a:p>
-                      <a:pPr indent="0" marL="0">
-                        <a:buNone/>
-                      </a:pPr>
-                      <a:r>
-                        <a:rPr lang="en-US" sz="1100" dirty="0">
-                          <a:solidFill>
-                            <a:srgbClr val="5B6B7A"/>
-                          </a:solidFill>
-                          <a:latin typeface="Calibri" pitchFamily="34" charset="0"/>
-                          <a:ea typeface="Calibri" pitchFamily="34" charset="-122"/>
-                          <a:cs typeface="Calibri" pitchFamily="34" charset="-120"/>
-                        </a:rPr>
-                        <a:t>Волна 2 — нужен детальный состав работ: список конкретных витрин/API для ESB и КХД.</a:t>
-                      </a:r>
-                      <a:endParaRPr lang="en-US" sz="1100" dirty="0">
-                        <a:latin typeface="Calibri" charset="0"/>
-                        <a:ea typeface="Calibri" charset="0"/>
-                        <a:cs typeface="Calibri" charset="0"/>
-                      </a:endParaRPr>
-                    </a:p>
-                  </a:txBody>
-                  <a:tcPr marL="101600" marR="101600" marT="63500" marB="63500" anchor="ctr">
-                    <a:lnL w="9525" cap="flat" cmpd="sng" algn="ctr">
-                      <a:solidFill>
-                        <a:srgbClr val="D8DEE2"/>
-                      </a:solidFill>
-                      <a:prstDash val="solid"/>
-                      <a:round/>
-                      <a:headEnd type="none" w="med" len="med"/>
-                      <a:tailEnd type="none" w="med" len="med"/>
-                    </a:lnL>
-                    <a:lnR w="9525" cap="flat" cmpd="sng" algn="ctr">
-                      <a:solidFill>
-                        <a:srgbClr val="D8DEE2"/>
-                      </a:solidFill>
-                      <a:prstDash val="solid"/>
-                      <a:round/>
-                      <a:headEnd type="none" w="med" len="med"/>
-                      <a:tailEnd type="none" w="med" len="med"/>
-                    </a:lnR>
-                    <a:lnT w="9525" cap="flat" cmpd="sng" algn="ctr">
-                      <a:solidFill>
-                        <a:srgbClr val="D8DEE2"/>
-                      </a:solidFill>
-                      <a:prstDash val="solid"/>
-                      <a:round/>
-                      <a:headEnd type="none" w="med" len="med"/>
-                      <a:tailEnd type="none" w="med" len="med"/>
-                    </a:lnT>
-                    <a:lnB w="9525" cap="flat" cmpd="sng" algn="ctr">
-                      <a:solidFill>
-                        <a:srgbClr val="D8DEE2"/>
-                      </a:solidFill>
-                      <a:prstDash val="solid"/>
-                      <a:round/>
-                      <a:headEnd type="none" w="med" len="med"/>
-                      <a:tailEnd type="none" w="med" len="med"/>
-                    </a:lnB>
-                  </a:tcPr>
-                </a:tc>
-              </a:tr>
-              <a:tr h="497840">
-                <a:tc>
-                  <a:txBody>
-                    <a:bodyPr/>
-                    <a:lstStyle/>
-                    <a:p>
-                      <a:pPr algn="ctr" indent="0" marL="0">
-                        <a:buNone/>
-                      </a:pPr>
-                      <a:r>
-                        <a:rPr lang="en-US" sz="1100" dirty="0">
-                          <a:solidFill>
-                            <a:srgbClr val="5B6B7A"/>
-                          </a:solidFill>
-                          <a:latin typeface="Calibri" pitchFamily="34" charset="0"/>
-                          <a:ea typeface="Calibri" pitchFamily="34" charset="-122"/>
-                          <a:cs typeface="Calibri" pitchFamily="34" charset="-120"/>
-                        </a:rPr>
-                        <a:t>3</a:t>
-                      </a:r>
-                      <a:endParaRPr lang="en-US" sz="1100" dirty="0">
-                        <a:latin typeface="Calibri" charset="0"/>
-                        <a:ea typeface="Calibri" charset="0"/>
-                        <a:cs typeface="Calibri" charset="0"/>
-                      </a:endParaRPr>
-                    </a:p>
-                  </a:txBody>
-                  <a:tcPr marL="101600" marR="101600" marT="63500" marB="63500" anchor="ctr">
-                    <a:lnL w="9525" cap="flat" cmpd="sng" algn="ctr">
-                      <a:solidFill>
-                        <a:srgbClr val="D8DEE2"/>
-                      </a:solidFill>
-                      <a:prstDash val="solid"/>
-                      <a:round/>
-                      <a:headEnd type="none" w="med" len="med"/>
-                      <a:tailEnd type="none" w="med" len="med"/>
-                    </a:lnL>
-                    <a:lnR w="9525" cap="flat" cmpd="sng" algn="ctr">
-                      <a:solidFill>
-                        <a:srgbClr val="D8DEE2"/>
-                      </a:solidFill>
-                      <a:prstDash val="solid"/>
-                      <a:round/>
-                      <a:headEnd type="none" w="med" len="med"/>
-                      <a:tailEnd type="none" w="med" len="med"/>
-                    </a:lnR>
-                    <a:lnT w="9525" cap="flat" cmpd="sng" algn="ctr">
-                      <a:solidFill>
-                        <a:srgbClr val="D8DEE2"/>
-                      </a:solidFill>
-                      <a:prstDash val="solid"/>
-                      <a:round/>
-                      <a:headEnd type="none" w="med" len="med"/>
-                      <a:tailEnd type="none" w="med" len="med"/>
-                    </a:lnT>
-                    <a:lnB w="9525" cap="flat" cmpd="sng" algn="ctr">
-                      <a:solidFill>
-                        <a:srgbClr val="D8DEE2"/>
-                      </a:solidFill>
-                      <a:prstDash val="solid"/>
-                      <a:round/>
-                      <a:headEnd type="none" w="med" len="med"/>
-                      <a:tailEnd type="none" w="med" len="med"/>
-                    </a:lnB>
-                  </a:tcPr>
-                </a:tc>
-                <a:tc>
-                  <a:txBody>
-                    <a:bodyPr/>
-                    <a:lstStyle/>
-                    <a:p>
-                      <a:pPr indent="0" marL="0">
-                        <a:buNone/>
-                      </a:pPr>
-                      <a:r>
-                        <a:rPr lang="en-US" sz="1100" b="1" dirty="0">
-                          <a:solidFill>
-                            <a:srgbClr val="1A2733"/>
-                          </a:solidFill>
-                          <a:latin typeface="Calibri" pitchFamily="34" charset="0"/>
-                          <a:ea typeface="Calibri" pitchFamily="34" charset="-122"/>
-                          <a:cs typeface="Calibri" pitchFamily="34" charset="-120"/>
-                        </a:rPr>
-                        <a:t>Волны</a:t>
-                      </a:r>
-                      <a:endParaRPr lang="en-US" sz="1100" dirty="0">
-                        <a:latin typeface="Calibri" charset="0"/>
-                        <a:ea typeface="Calibri" charset="0"/>
-                        <a:cs typeface="Calibri" charset="0"/>
-                      </a:endParaRPr>
-                    </a:p>
-                  </a:txBody>
-                  <a:tcPr marL="101600" marR="101600" marT="63500" marB="63500" anchor="ctr">
-                    <a:lnL w="9525" cap="flat" cmpd="sng" algn="ctr">
-                      <a:solidFill>
-                        <a:srgbClr val="D8DEE2"/>
-                      </a:solidFill>
-                      <a:prstDash val="solid"/>
-                      <a:round/>
-                      <a:headEnd type="none" w="med" len="med"/>
-                      <a:tailEnd type="none" w="med" len="med"/>
-                    </a:lnL>
-                    <a:lnR w="9525" cap="flat" cmpd="sng" algn="ctr">
-                      <a:solidFill>
-                        <a:srgbClr val="D8DEE2"/>
-                      </a:solidFill>
-                      <a:prstDash val="solid"/>
-                      <a:round/>
-                      <a:headEnd type="none" w="med" len="med"/>
-                      <a:tailEnd type="none" w="med" len="med"/>
-                    </a:lnR>
-                    <a:lnT w="9525" cap="flat" cmpd="sng" algn="ctr">
-                      <a:solidFill>
-                        <a:srgbClr val="D8DEE2"/>
-                      </a:solidFill>
-                      <a:prstDash val="solid"/>
-                      <a:round/>
-                      <a:headEnd type="none" w="med" len="med"/>
-                      <a:tailEnd type="none" w="med" len="med"/>
-                    </a:lnT>
-                    <a:lnB w="9525" cap="flat" cmpd="sng" algn="ctr">
-                      <a:solidFill>
-                        <a:srgbClr val="D8DEE2"/>
-                      </a:solidFill>
-                      <a:prstDash val="solid"/>
-                      <a:round/>
-                      <a:headEnd type="none" w="med" len="med"/>
-                      <a:tailEnd type="none" w="med" len="med"/>
-                    </a:lnB>
-                  </a:tcPr>
-                </a:tc>
-                <a:tc>
-                  <a:txBody>
-                    <a:bodyPr/>
-                    <a:lstStyle/>
-                    <a:p>
-                      <a:pPr algn="ctr" indent="0" marL="0">
-                        <a:buNone/>
-                      </a:pPr>
-                      <a:r>
-                        <a:rPr lang="en-US" sz="1050" b="1" dirty="0">
-                          <a:solidFill>
-                            <a:srgbClr val="C97A1A"/>
-                          </a:solidFill>
-                          <a:latin typeface="Calibri" pitchFamily="34" charset="0"/>
-                          <a:ea typeface="Calibri" pitchFamily="34" charset="-122"/>
-                          <a:cs typeface="Calibri" pitchFamily="34" charset="-120"/>
-                        </a:rPr>
-                        <a:t>Высокий</a:t>
-                      </a:r>
-                      <a:endParaRPr lang="en-US" sz="1050" dirty="0">
-                        <a:latin typeface="Calibri" charset="0"/>
-                        <a:ea typeface="Calibri" charset="0"/>
-                        <a:cs typeface="Calibri" charset="0"/>
-                      </a:endParaRPr>
-                    </a:p>
-                  </a:txBody>
-                  <a:tcPr marL="101600" marR="101600" marT="63500" marB="63500" anchor="ctr">
-                    <a:lnL w="9525" cap="flat" cmpd="sng" algn="ctr">
-                      <a:solidFill>
-                        <a:srgbClr val="D8DEE2"/>
-                      </a:solidFill>
-                      <a:prstDash val="solid"/>
-                      <a:round/>
-                      <a:headEnd type="none" w="med" len="med"/>
-                      <a:tailEnd type="none" w="med" len="med"/>
-                    </a:lnL>
-                    <a:lnR w="9525" cap="flat" cmpd="sng" algn="ctr">
-                      <a:solidFill>
-                        <a:srgbClr val="D8DEE2"/>
-                      </a:solidFill>
-                      <a:prstDash val="solid"/>
-                      <a:round/>
-                      <a:headEnd type="none" w="med" len="med"/>
-                      <a:tailEnd type="none" w="med" len="med"/>
-                    </a:lnR>
-                    <a:lnT w="9525" cap="flat" cmpd="sng" algn="ctr">
-                      <a:solidFill>
-                        <a:srgbClr val="D8DEE2"/>
-                      </a:solidFill>
-                      <a:prstDash val="solid"/>
-                      <a:round/>
-                      <a:headEnd type="none" w="med" len="med"/>
-                      <a:tailEnd type="none" w="med" len="med"/>
-                    </a:lnT>
-                    <a:lnB w="9525" cap="flat" cmpd="sng" algn="ctr">
-                      <a:solidFill>
-                        <a:srgbClr val="D8DEE2"/>
-                      </a:solidFill>
-                      <a:prstDash val="solid"/>
-                      <a:round/>
-                      <a:headEnd type="none" w="med" len="med"/>
-                      <a:tailEnd type="none" w="med" len="med"/>
-                    </a:lnB>
-                  </a:tcPr>
-                </a:tc>
-                <a:tc>
-                  <a:txBody>
-                    <a:bodyPr/>
-                    <a:lstStyle/>
-                    <a:p>
-                      <a:pPr indent="0" marL="0">
-                        <a:buNone/>
-                      </a:pPr>
-                      <a:r>
-                        <a:rPr lang="en-US" sz="1100" dirty="0">
-                          <a:solidFill>
-                            <a:srgbClr val="5B6B7A"/>
-                          </a:solidFill>
-                          <a:latin typeface="Calibri" pitchFamily="34" charset="0"/>
-                          <a:ea typeface="Calibri" pitchFamily="34" charset="-122"/>
-                          <a:cs typeface="Calibri" pitchFamily="34" charset="-120"/>
-                        </a:rPr>
-                        <a:t>Волна 3 и далее — есть примерное направление, или открытый вопрос до завершения волны 2?</a:t>
-                      </a:r>
-                      <a:endParaRPr lang="en-US" sz="1100" dirty="0">
-                        <a:latin typeface="Calibri" charset="0"/>
-                        <a:ea typeface="Calibri" charset="0"/>
-                        <a:cs typeface="Calibri" charset="0"/>
-                      </a:endParaRPr>
-                    </a:p>
-                  </a:txBody>
-                  <a:tcPr marL="101600" marR="101600" marT="63500" marB="63500" anchor="ctr">
-                    <a:lnL w="9525" cap="flat" cmpd="sng" algn="ctr">
-                      <a:solidFill>
-                        <a:srgbClr val="D8DEE2"/>
-                      </a:solidFill>
-                      <a:prstDash val="solid"/>
-                      <a:round/>
-                      <a:headEnd type="none" w="med" len="med"/>
-                      <a:tailEnd type="none" w="med" len="med"/>
-                    </a:lnL>
-                    <a:lnR w="9525" cap="flat" cmpd="sng" algn="ctr">
-                      <a:solidFill>
-                        <a:srgbClr val="D8DEE2"/>
-                      </a:solidFill>
-                      <a:prstDash val="solid"/>
-                      <a:round/>
-                      <a:headEnd type="none" w="med" len="med"/>
-                      <a:tailEnd type="none" w="med" len="med"/>
-                    </a:lnR>
-                    <a:lnT w="9525" cap="flat" cmpd="sng" algn="ctr">
-                      <a:solidFill>
-                        <a:srgbClr val="D8DEE2"/>
-                      </a:solidFill>
-                      <a:prstDash val="solid"/>
-                      <a:round/>
-                      <a:headEnd type="none" w="med" len="med"/>
-                      <a:tailEnd type="none" w="med" len="med"/>
-                    </a:lnT>
-                    <a:lnB w="9525" cap="flat" cmpd="sng" algn="ctr">
-                      <a:solidFill>
-                        <a:srgbClr val="D8DEE2"/>
-                      </a:solidFill>
-                      <a:prstDash val="solid"/>
-                      <a:round/>
-                      <a:headEnd type="none" w="med" len="med"/>
-                      <a:tailEnd type="none" w="med" len="med"/>
-                    </a:lnB>
-                  </a:tcPr>
-                </a:tc>
-              </a:tr>
-              <a:tr h="497840">
-                <a:tc>
-                  <a:txBody>
-                    <a:bodyPr/>
-                    <a:lstStyle/>
-                    <a:p>
-                      <a:pPr algn="ctr" indent="0" marL="0">
-                        <a:buNone/>
-                      </a:pPr>
-                      <a:r>
-                        <a:rPr lang="en-US" sz="1100" dirty="0">
-                          <a:solidFill>
-                            <a:srgbClr val="5B6B7A"/>
-                          </a:solidFill>
-                          <a:latin typeface="Calibri" pitchFamily="34" charset="0"/>
-                          <a:ea typeface="Calibri" pitchFamily="34" charset="-122"/>
-                          <a:cs typeface="Calibri" pitchFamily="34" charset="-120"/>
-                        </a:rPr>
-                        <a:t>4</a:t>
-                      </a:r>
-                      <a:endParaRPr lang="en-US" sz="1100" dirty="0">
-                        <a:latin typeface="Calibri" charset="0"/>
-                        <a:ea typeface="Calibri" charset="0"/>
-                        <a:cs typeface="Calibri" charset="0"/>
-                      </a:endParaRPr>
-                    </a:p>
-                  </a:txBody>
-                  <a:tcPr marL="101600" marR="101600" marT="63500" marB="63500" anchor="ctr">
-                    <a:lnL w="9525" cap="flat" cmpd="sng" algn="ctr">
-                      <a:solidFill>
-                        <a:srgbClr val="D8DEE2"/>
-                      </a:solidFill>
-                      <a:prstDash val="solid"/>
-                      <a:round/>
-                      <a:headEnd type="none" w="med" len="med"/>
-                      <a:tailEnd type="none" w="med" len="med"/>
-                    </a:lnL>
-                    <a:lnR w="9525" cap="flat" cmpd="sng" algn="ctr">
-                      <a:solidFill>
-                        <a:srgbClr val="D8DEE2"/>
-                      </a:solidFill>
-                      <a:prstDash val="solid"/>
-                      <a:round/>
-                      <a:headEnd type="none" w="med" len="med"/>
-                      <a:tailEnd type="none" w="med" len="med"/>
-                    </a:lnR>
-                    <a:lnT w="9525" cap="flat" cmpd="sng" algn="ctr">
-                      <a:solidFill>
-                        <a:srgbClr val="D8DEE2"/>
-                      </a:solidFill>
-                      <a:prstDash val="solid"/>
-                      <a:round/>
-                      <a:headEnd type="none" w="med" len="med"/>
-                      <a:tailEnd type="none" w="med" len="med"/>
-                    </a:lnT>
-                    <a:lnB w="9525" cap="flat" cmpd="sng" algn="ctr">
-                      <a:solidFill>
-                        <a:srgbClr val="D8DEE2"/>
-                      </a:solidFill>
-                      <a:prstDash val="solid"/>
-                      <a:round/>
-                      <a:headEnd type="none" w="med" len="med"/>
-                      <a:tailEnd type="none" w="med" len="med"/>
-                    </a:lnB>
-                  </a:tcPr>
-                </a:tc>
-                <a:tc>
-                  <a:txBody>
-                    <a:bodyPr/>
-                    <a:lstStyle/>
-                    <a:p>
-                      <a:pPr indent="0" marL="0">
-                        <a:buNone/>
-                      </a:pPr>
-                      <a:r>
-                        <a:rPr lang="en-US" sz="1100" b="1" dirty="0">
-                          <a:solidFill>
-                            <a:srgbClr val="1A2733"/>
-                          </a:solidFill>
-                          <a:latin typeface="Calibri" pitchFamily="34" charset="0"/>
-                          <a:ea typeface="Calibri" pitchFamily="34" charset="-122"/>
-                          <a:cs typeface="Calibri" pitchFamily="34" charset="-120"/>
-                        </a:rPr>
-                        <a:t>Интеграция</a:t>
-                      </a:r>
-                      <a:endParaRPr lang="en-US" sz="1100" dirty="0">
-                        <a:latin typeface="Calibri" charset="0"/>
-                        <a:ea typeface="Calibri" charset="0"/>
-                        <a:cs typeface="Calibri" charset="0"/>
-                      </a:endParaRPr>
-                    </a:p>
-                  </a:txBody>
-                  <a:tcPr marL="101600" marR="101600" marT="63500" marB="63500" anchor="ctr">
-                    <a:lnL w="9525" cap="flat" cmpd="sng" algn="ctr">
-                      <a:solidFill>
-                        <a:srgbClr val="D8DEE2"/>
-                      </a:solidFill>
-                      <a:prstDash val="solid"/>
-                      <a:round/>
-                      <a:headEnd type="none" w="med" len="med"/>
-                      <a:tailEnd type="none" w="med" len="med"/>
-                    </a:lnL>
-                    <a:lnR w="9525" cap="flat" cmpd="sng" algn="ctr">
-                      <a:solidFill>
-                        <a:srgbClr val="D8DEE2"/>
-                      </a:solidFill>
-                      <a:prstDash val="solid"/>
-                      <a:round/>
-                      <a:headEnd type="none" w="med" len="med"/>
-                      <a:tailEnd type="none" w="med" len="med"/>
-                    </a:lnR>
-                    <a:lnT w="9525" cap="flat" cmpd="sng" algn="ctr">
-                      <a:solidFill>
-                        <a:srgbClr val="D8DEE2"/>
-                      </a:solidFill>
-                      <a:prstDash val="solid"/>
-                      <a:round/>
-                      <a:headEnd type="none" w="med" len="med"/>
-                      <a:tailEnd type="none" w="med" len="med"/>
-                    </a:lnT>
-                    <a:lnB w="9525" cap="flat" cmpd="sng" algn="ctr">
-                      <a:solidFill>
-                        <a:srgbClr val="D8DEE2"/>
-                      </a:solidFill>
-                      <a:prstDash val="solid"/>
-                      <a:round/>
-                      <a:headEnd type="none" w="med" len="med"/>
-                      <a:tailEnd type="none" w="med" len="med"/>
-                    </a:lnB>
-                  </a:tcPr>
-                </a:tc>
-                <a:tc>
-                  <a:txBody>
-                    <a:bodyPr/>
-                    <a:lstStyle/>
-                    <a:p>
-                      <a:pPr algn="ctr" indent="0" marL="0">
-                        <a:buNone/>
-                      </a:pPr>
-                      <a:r>
-                        <a:rPr lang="en-US" sz="1050" b="1" dirty="0">
-                          <a:solidFill>
-                            <a:srgbClr val="C97A1A"/>
-                          </a:solidFill>
-                          <a:latin typeface="Calibri" pitchFamily="34" charset="0"/>
-                          <a:ea typeface="Calibri" pitchFamily="34" charset="-122"/>
-                          <a:cs typeface="Calibri" pitchFamily="34" charset="-120"/>
-                        </a:rPr>
-                        <a:t>Высокий</a:t>
-                      </a:r>
-                      <a:endParaRPr lang="en-US" sz="1050" dirty="0">
-                        <a:latin typeface="Calibri" charset="0"/>
-                        <a:ea typeface="Calibri" charset="0"/>
-                        <a:cs typeface="Calibri" charset="0"/>
-                      </a:endParaRPr>
-                    </a:p>
-                  </a:txBody>
-                  <a:tcPr marL="101600" marR="101600" marT="63500" marB="63500" anchor="ctr">
-                    <a:lnL w="9525" cap="flat" cmpd="sng" algn="ctr">
-                      <a:solidFill>
-                        <a:srgbClr val="D8DEE2"/>
-                      </a:solidFill>
-                      <a:prstDash val="solid"/>
-                      <a:round/>
-                      <a:headEnd type="none" w="med" len="med"/>
-                      <a:tailEnd type="none" w="med" len="med"/>
-                    </a:lnL>
-                    <a:lnR w="9525" cap="flat" cmpd="sng" algn="ctr">
-                      <a:solidFill>
-                        <a:srgbClr val="D8DEE2"/>
-                      </a:solidFill>
-                      <a:prstDash val="solid"/>
-                      <a:round/>
-                      <a:headEnd type="none" w="med" len="med"/>
-                      <a:tailEnd type="none" w="med" len="med"/>
-                    </a:lnR>
-                    <a:lnT w="9525" cap="flat" cmpd="sng" algn="ctr">
-                      <a:solidFill>
-                        <a:srgbClr val="D8DEE2"/>
-                      </a:solidFill>
-                      <a:prstDash val="solid"/>
-                      <a:round/>
-                      <a:headEnd type="none" w="med" len="med"/>
-                      <a:tailEnd type="none" w="med" len="med"/>
-                    </a:lnT>
-                    <a:lnB w="9525" cap="flat" cmpd="sng" algn="ctr">
-                      <a:solidFill>
-                        <a:srgbClr val="D8DEE2"/>
-                      </a:solidFill>
-                      <a:prstDash val="solid"/>
-                      <a:round/>
-                      <a:headEnd type="none" w="med" len="med"/>
-                      <a:tailEnd type="none" w="med" len="med"/>
-                    </a:lnB>
-                  </a:tcPr>
-                </a:tc>
-                <a:tc>
-                  <a:txBody>
-                    <a:bodyPr/>
-                    <a:lstStyle/>
-                    <a:p>
-                      <a:pPr indent="0" marL="0">
-                        <a:buNone/>
-                      </a:pPr>
-                      <a:r>
-                        <a:rPr lang="en-US" sz="1100" dirty="0">
-                          <a:solidFill>
-                            <a:srgbClr val="5B6B7A"/>
-                          </a:solidFill>
-                          <a:latin typeface="Calibri" pitchFamily="34" charset="0"/>
-                          <a:ea typeface="Calibri" pitchFamily="34" charset="-122"/>
-                          <a:cs typeface="Calibri" pitchFamily="34" charset="-120"/>
-                        </a:rPr>
-                        <a:t>Какие конкретно витрины данных добавить в ESB сверх текущего среза CRM (Bitrix24)?</a:t>
-                      </a:r>
-                      <a:endParaRPr lang="en-US" sz="1100" dirty="0">
-                        <a:latin typeface="Calibri" charset="0"/>
-                        <a:ea typeface="Calibri" charset="0"/>
-                        <a:cs typeface="Calibri" charset="0"/>
-                      </a:endParaRPr>
-                    </a:p>
-                  </a:txBody>
-                  <a:tcPr marL="101600" marR="101600" marT="63500" marB="63500" anchor="ctr">
-                    <a:lnL w="9525" cap="flat" cmpd="sng" algn="ctr">
-                      <a:solidFill>
-                        <a:srgbClr val="D8DEE2"/>
-                      </a:solidFill>
-                      <a:prstDash val="solid"/>
-                      <a:round/>
-                      <a:headEnd type="none" w="med" len="med"/>
-                      <a:tailEnd type="none" w="med" len="med"/>
-                    </a:lnL>
-                    <a:lnR w="9525" cap="flat" cmpd="sng" algn="ctr">
-                      <a:solidFill>
-                        <a:srgbClr val="D8DEE2"/>
-                      </a:solidFill>
-                      <a:prstDash val="solid"/>
-                      <a:round/>
-                      <a:headEnd type="none" w="med" len="med"/>
-                      <a:tailEnd type="none" w="med" len="med"/>
-                    </a:lnR>
-                    <a:lnT w="9525" cap="flat" cmpd="sng" algn="ctr">
-                      <a:solidFill>
-                        <a:srgbClr val="D8DEE2"/>
-                      </a:solidFill>
-                      <a:prstDash val="solid"/>
-                      <a:round/>
-                      <a:headEnd type="none" w="med" len="med"/>
-                      <a:tailEnd type="none" w="med" len="med"/>
-                    </a:lnT>
-                    <a:lnB w="9525" cap="flat" cmpd="sng" algn="ctr">
-                      <a:solidFill>
-                        <a:srgbClr val="D8DEE2"/>
-                      </a:solidFill>
-                      <a:prstDash val="solid"/>
-                      <a:round/>
-                      <a:headEnd type="none" w="med" len="med"/>
-                      <a:tailEnd type="none" w="med" len="med"/>
-                    </a:lnB>
-                  </a:tcPr>
-                </a:tc>
-              </a:tr>
-              <a:tr h="497840">
-                <a:tc>
-                  <a:txBody>
-                    <a:bodyPr/>
-                    <a:lstStyle/>
-                    <a:p>
-                      <a:pPr algn="ctr" indent="0" marL="0">
-                        <a:buNone/>
-                      </a:pPr>
-                      <a:r>
-                        <a:rPr lang="en-US" sz="1100" dirty="0">
-                          <a:solidFill>
-                            <a:srgbClr val="5B6B7A"/>
-                          </a:solidFill>
-                          <a:latin typeface="Calibri" pitchFamily="34" charset="0"/>
-                          <a:ea typeface="Calibri" pitchFamily="34" charset="-122"/>
-                          <a:cs typeface="Calibri" pitchFamily="34" charset="-120"/>
-                        </a:rPr>
-                        <a:t>5</a:t>
-                      </a:r>
-                      <a:endParaRPr lang="en-US" sz="1100" dirty="0">
-                        <a:latin typeface="Calibri" charset="0"/>
-                        <a:ea typeface="Calibri" charset="0"/>
-                        <a:cs typeface="Calibri" charset="0"/>
-                      </a:endParaRPr>
-                    </a:p>
-                  </a:txBody>
-                  <a:tcPr marL="101600" marR="101600" marT="63500" marB="63500" anchor="ctr">
-                    <a:lnL w="9525" cap="flat" cmpd="sng" algn="ctr">
-                      <a:solidFill>
-                        <a:srgbClr val="D8DEE2"/>
-                      </a:solidFill>
-                      <a:prstDash val="solid"/>
-                      <a:round/>
-                      <a:headEnd type="none" w="med" len="med"/>
-                      <a:tailEnd type="none" w="med" len="med"/>
-                    </a:lnL>
-                    <a:lnR w="9525" cap="flat" cmpd="sng" algn="ctr">
-                      <a:solidFill>
-                        <a:srgbClr val="D8DEE2"/>
-                      </a:solidFill>
-                      <a:prstDash val="solid"/>
-                      <a:round/>
-                      <a:headEnd type="none" w="med" len="med"/>
-                      <a:tailEnd type="none" w="med" len="med"/>
-                    </a:lnR>
-                    <a:lnT w="9525" cap="flat" cmpd="sng" algn="ctr">
-                      <a:solidFill>
-                        <a:srgbClr val="D8DEE2"/>
-                      </a:solidFill>
-                      <a:prstDash val="solid"/>
-                      <a:round/>
-                      <a:headEnd type="none" w="med" len="med"/>
-                      <a:tailEnd type="none" w="med" len="med"/>
-                    </a:lnT>
-                    <a:lnB w="9525" cap="flat" cmpd="sng" algn="ctr">
-                      <a:solidFill>
-                        <a:srgbClr val="D8DEE2"/>
-                      </a:solidFill>
-                      <a:prstDash val="solid"/>
-                      <a:round/>
-                      <a:headEnd type="none" w="med" len="med"/>
-                      <a:tailEnd type="none" w="med" len="med"/>
-                    </a:lnB>
-                  </a:tcPr>
-                </a:tc>
-                <a:tc>
-                  <a:txBody>
-                    <a:bodyPr/>
-                    <a:lstStyle/>
-                    <a:p>
-                      <a:pPr indent="0" marL="0">
-                        <a:buNone/>
-                      </a:pPr>
-                      <a:r>
-                        <a:rPr lang="en-US" sz="1100" b="1" dirty="0">
-                          <a:solidFill>
-                            <a:srgbClr val="1A2733"/>
-                          </a:solidFill>
-                          <a:latin typeface="Calibri" pitchFamily="34" charset="0"/>
-                          <a:ea typeface="Calibri" pitchFamily="34" charset="-122"/>
-                          <a:cs typeface="Calibri" pitchFamily="34" charset="-120"/>
-                        </a:rPr>
-                        <a:t>Интеграция</a:t>
-                      </a:r>
-                      <a:endParaRPr lang="en-US" sz="1100" dirty="0">
-                        <a:latin typeface="Calibri" charset="0"/>
-                        <a:ea typeface="Calibri" charset="0"/>
-                        <a:cs typeface="Calibri" charset="0"/>
-                      </a:endParaRPr>
-                    </a:p>
-                  </a:txBody>
-                  <a:tcPr marL="101600" marR="101600" marT="63500" marB="63500" anchor="ctr">
-                    <a:lnL w="9525" cap="flat" cmpd="sng" algn="ctr">
-                      <a:solidFill>
-                        <a:srgbClr val="D8DEE2"/>
-                      </a:solidFill>
-                      <a:prstDash val="solid"/>
-                      <a:round/>
-                      <a:headEnd type="none" w="med" len="med"/>
-                      <a:tailEnd type="none" w="med" len="med"/>
-                    </a:lnL>
-                    <a:lnR w="9525" cap="flat" cmpd="sng" algn="ctr">
-                      <a:solidFill>
-                        <a:srgbClr val="D8DEE2"/>
-                      </a:solidFill>
-                      <a:prstDash val="solid"/>
-                      <a:round/>
-                      <a:headEnd type="none" w="med" len="med"/>
-                      <a:tailEnd type="none" w="med" len="med"/>
-                    </a:lnR>
-                    <a:lnT w="9525" cap="flat" cmpd="sng" algn="ctr">
-                      <a:solidFill>
-                        <a:srgbClr val="D8DEE2"/>
-                      </a:solidFill>
-                      <a:prstDash val="solid"/>
-                      <a:round/>
-                      <a:headEnd type="none" w="med" len="med"/>
-                      <a:tailEnd type="none" w="med" len="med"/>
-                    </a:lnT>
-                    <a:lnB w="9525" cap="flat" cmpd="sng" algn="ctr">
-                      <a:solidFill>
-                        <a:srgbClr val="D8DEE2"/>
-                      </a:solidFill>
-                      <a:prstDash val="solid"/>
-                      <a:round/>
-                      <a:headEnd type="none" w="med" len="med"/>
-                      <a:tailEnd type="none" w="med" len="med"/>
-                    </a:lnB>
-                  </a:tcPr>
-                </a:tc>
-                <a:tc>
-                  <a:txBody>
-                    <a:bodyPr/>
-                    <a:lstStyle/>
-                    <a:p>
-                      <a:pPr algn="ctr" indent="0" marL="0">
-                        <a:buNone/>
-                      </a:pPr>
-                      <a:r>
-                        <a:rPr lang="en-US" sz="1050" b="1" dirty="0">
-                          <a:solidFill>
-                            <a:srgbClr val="C97A1A"/>
-                          </a:solidFill>
-                          <a:latin typeface="Calibri" pitchFamily="34" charset="0"/>
-                          <a:ea typeface="Calibri" pitchFamily="34" charset="-122"/>
-                          <a:cs typeface="Calibri" pitchFamily="34" charset="-120"/>
-                        </a:rPr>
-                        <a:t>Высокий</a:t>
-                      </a:r>
-                      <a:endParaRPr lang="en-US" sz="1050" dirty="0">
-                        <a:latin typeface="Calibri" charset="0"/>
-                        <a:ea typeface="Calibri" charset="0"/>
-                        <a:cs typeface="Calibri" charset="0"/>
-                      </a:endParaRPr>
-                    </a:p>
-                  </a:txBody>
-                  <a:tcPr marL="101600" marR="101600" marT="63500" marB="63500" anchor="ctr">
-                    <a:lnL w="9525" cap="flat" cmpd="sng" algn="ctr">
-                      <a:solidFill>
-                        <a:srgbClr val="D8DEE2"/>
-                      </a:solidFill>
-                      <a:prstDash val="solid"/>
-                      <a:round/>
-                      <a:headEnd type="none" w="med" len="med"/>
-                      <a:tailEnd type="none" w="med" len="med"/>
-                    </a:lnL>
-                    <a:lnR w="9525" cap="flat" cmpd="sng" algn="ctr">
-                      <a:solidFill>
-                        <a:srgbClr val="D8DEE2"/>
-                      </a:solidFill>
-                      <a:prstDash val="solid"/>
-                      <a:round/>
-                      <a:headEnd type="none" w="med" len="med"/>
-                      <a:tailEnd type="none" w="med" len="med"/>
-                    </a:lnR>
-                    <a:lnT w="9525" cap="flat" cmpd="sng" algn="ctr">
-                      <a:solidFill>
-                        <a:srgbClr val="D8DEE2"/>
-                      </a:solidFill>
-                      <a:prstDash val="solid"/>
-                      <a:round/>
-                      <a:headEnd type="none" w="med" len="med"/>
-                      <a:tailEnd type="none" w="med" len="med"/>
-                    </a:lnT>
-                    <a:lnB w="9525" cap="flat" cmpd="sng" algn="ctr">
-                      <a:solidFill>
-                        <a:srgbClr val="D8DEE2"/>
-                      </a:solidFill>
-                      <a:prstDash val="solid"/>
-                      <a:round/>
-                      <a:headEnd type="none" w="med" len="med"/>
-                      <a:tailEnd type="none" w="med" len="med"/>
-                    </a:lnB>
-                  </a:tcPr>
-                </a:tc>
-                <a:tc>
-                  <a:txBody>
-                    <a:bodyPr/>
-                    <a:lstStyle/>
-                    <a:p>
-                      <a:pPr indent="0" marL="0">
-                        <a:buNone/>
-                      </a:pPr>
-                      <a:r>
-                        <a:rPr lang="en-US" sz="1100" dirty="0">
-                          <a:solidFill>
-                            <a:srgbClr val="5B6B7A"/>
-                          </a:solidFill>
-                          <a:latin typeface="Calibri" pitchFamily="34" charset="0"/>
-                          <a:ea typeface="Calibri" pitchFamily="34" charset="-122"/>
-                          <a:cs typeface="Calibri" pitchFamily="34" charset="-120"/>
-                        </a:rPr>
-                        <a:t>Какие конкретно API открыть через шину — система-источник, формат, ответственный на стороне Д8?</a:t>
-                      </a:r>
-                      <a:endParaRPr lang="en-US" sz="1100" dirty="0">
-                        <a:latin typeface="Calibri" charset="0"/>
-                        <a:ea typeface="Calibri" charset="0"/>
-                        <a:cs typeface="Calibri" charset="0"/>
-                      </a:endParaRPr>
-                    </a:p>
-                  </a:txBody>
-                  <a:tcPr marL="101600" marR="101600" marT="63500" marB="63500" anchor="ctr">
-                    <a:lnL w="9525" cap="flat" cmpd="sng" algn="ctr">
-                      <a:solidFill>
-                        <a:srgbClr val="D8DEE2"/>
-                      </a:solidFill>
-                      <a:prstDash val="solid"/>
-                      <a:round/>
-                      <a:headEnd type="none" w="med" len="med"/>
-                      <a:tailEnd type="none" w="med" len="med"/>
-                    </a:lnL>
-                    <a:lnR w="9525" cap="flat" cmpd="sng" algn="ctr">
-                      <a:solidFill>
-                        <a:srgbClr val="D8DEE2"/>
-                      </a:solidFill>
-                      <a:prstDash val="solid"/>
-                      <a:round/>
-                      <a:headEnd type="none" w="med" len="med"/>
-                      <a:tailEnd type="none" w="med" len="med"/>
-                    </a:lnR>
-                    <a:lnT w="9525" cap="flat" cmpd="sng" algn="ctr">
-                      <a:solidFill>
-                        <a:srgbClr val="D8DEE2"/>
-                      </a:solidFill>
-                      <a:prstDash val="solid"/>
-                      <a:round/>
-                      <a:headEnd type="none" w="med" len="med"/>
-                      <a:tailEnd type="none" w="med" len="med"/>
-                    </a:lnT>
-                    <a:lnB w="9525" cap="flat" cmpd="sng" algn="ctr">
-                      <a:solidFill>
-                        <a:srgbClr val="D8DEE2"/>
-                      </a:solidFill>
-                      <a:prstDash val="solid"/>
-                      <a:round/>
-                      <a:headEnd type="none" w="med" len="med"/>
-                      <a:tailEnd type="none" w="med" len="med"/>
-                    </a:lnB>
-                  </a:tcPr>
-                </a:tc>
-              </a:tr>
-              <a:tr h="497840">
-                <a:tc>
-                  <a:txBody>
-                    <a:bodyPr/>
-                    <a:lstStyle/>
-                    <a:p>
-                      <a:pPr algn="ctr" indent="0" marL="0">
-                        <a:buNone/>
-                      </a:pPr>
-                      <a:r>
-                        <a:rPr lang="en-US" sz="1100" dirty="0">
-                          <a:solidFill>
-                            <a:srgbClr val="5B6B7A"/>
-                          </a:solidFill>
-                          <a:latin typeface="Calibri" pitchFamily="34" charset="0"/>
-                          <a:ea typeface="Calibri" pitchFamily="34" charset="-122"/>
-                          <a:cs typeface="Calibri" pitchFamily="34" charset="-120"/>
-                        </a:rPr>
-                        <a:t>6</a:t>
-                      </a:r>
-                      <a:endParaRPr lang="en-US" sz="1100" dirty="0">
-                        <a:latin typeface="Calibri" charset="0"/>
-                        <a:ea typeface="Calibri" charset="0"/>
-                        <a:cs typeface="Calibri" charset="0"/>
-                      </a:endParaRPr>
-                    </a:p>
-                  </a:txBody>
-                  <a:tcPr marL="101600" marR="101600" marT="63500" marB="63500" anchor="ctr">
-                    <a:lnL w="9525" cap="flat" cmpd="sng" algn="ctr">
-                      <a:solidFill>
-                        <a:srgbClr val="D8DEE2"/>
-                      </a:solidFill>
-                      <a:prstDash val="solid"/>
-                      <a:round/>
-                      <a:headEnd type="none" w="med" len="med"/>
-                      <a:tailEnd type="none" w="med" len="med"/>
-                    </a:lnL>
-                    <a:lnR w="9525" cap="flat" cmpd="sng" algn="ctr">
-                      <a:solidFill>
-                        <a:srgbClr val="D8DEE2"/>
-                      </a:solidFill>
-                      <a:prstDash val="solid"/>
-                      <a:round/>
-                      <a:headEnd type="none" w="med" len="med"/>
-                      <a:tailEnd type="none" w="med" len="med"/>
-                    </a:lnR>
-                    <a:lnT w="9525" cap="flat" cmpd="sng" algn="ctr">
-                      <a:solidFill>
-                        <a:srgbClr val="D8DEE2"/>
-                      </a:solidFill>
-                      <a:prstDash val="solid"/>
-                      <a:round/>
-                      <a:headEnd type="none" w="med" len="med"/>
-                      <a:tailEnd type="none" w="med" len="med"/>
-                    </a:lnT>
-                    <a:lnB w="9525" cap="flat" cmpd="sng" algn="ctr">
-                      <a:solidFill>
-                        <a:srgbClr val="D8DEE2"/>
-                      </a:solidFill>
-                      <a:prstDash val="solid"/>
-                      <a:round/>
-                      <a:headEnd type="none" w="med" len="med"/>
-                      <a:tailEnd type="none" w="med" len="med"/>
-                    </a:lnB>
-                  </a:tcPr>
-                </a:tc>
-                <a:tc>
-                  <a:txBody>
-                    <a:bodyPr/>
-                    <a:lstStyle/>
-                    <a:p>
-                      <a:pPr indent="0" marL="0">
-                        <a:buNone/>
-                      </a:pPr>
-                      <a:r>
-                        <a:rPr lang="en-US" sz="1100" b="1" dirty="0">
-                          <a:solidFill>
-                            <a:srgbClr val="1A2733"/>
-                          </a:solidFill>
-                          <a:latin typeface="Calibri" pitchFamily="34" charset="0"/>
-                          <a:ea typeface="Calibri" pitchFamily="34" charset="-122"/>
-                          <a:cs typeface="Calibri" pitchFamily="34" charset="-120"/>
-                        </a:rPr>
-                        <a:t>Интеграция</a:t>
-                      </a:r>
-                      <a:endParaRPr lang="en-US" sz="1100" dirty="0">
-                        <a:latin typeface="Calibri" charset="0"/>
-                        <a:ea typeface="Calibri" charset="0"/>
-                        <a:cs typeface="Calibri" charset="0"/>
-                      </a:endParaRPr>
-                    </a:p>
-                  </a:txBody>
-                  <a:tcPr marL="101600" marR="101600" marT="63500" marB="63500" anchor="ctr">
-                    <a:lnL w="9525" cap="flat" cmpd="sng" algn="ctr">
-                      <a:solidFill>
-                        <a:srgbClr val="D8DEE2"/>
-                      </a:solidFill>
-                      <a:prstDash val="solid"/>
-                      <a:round/>
-                      <a:headEnd type="none" w="med" len="med"/>
-                      <a:tailEnd type="none" w="med" len="med"/>
-                    </a:lnL>
-                    <a:lnR w="9525" cap="flat" cmpd="sng" algn="ctr">
-                      <a:solidFill>
-                        <a:srgbClr val="D8DEE2"/>
-                      </a:solidFill>
-                      <a:prstDash val="solid"/>
-                      <a:round/>
-                      <a:headEnd type="none" w="med" len="med"/>
-                      <a:tailEnd type="none" w="med" len="med"/>
-                    </a:lnR>
-                    <a:lnT w="9525" cap="flat" cmpd="sng" algn="ctr">
-                      <a:solidFill>
-                        <a:srgbClr val="D8DEE2"/>
-                      </a:solidFill>
-                      <a:prstDash val="solid"/>
-                      <a:round/>
-                      <a:headEnd type="none" w="med" len="med"/>
-                      <a:tailEnd type="none" w="med" len="med"/>
-                    </a:lnT>
-                    <a:lnB w="9525" cap="flat" cmpd="sng" algn="ctr">
-                      <a:solidFill>
-                        <a:srgbClr val="D8DEE2"/>
-                      </a:solidFill>
-                      <a:prstDash val="solid"/>
-                      <a:round/>
-                      <a:headEnd type="none" w="med" len="med"/>
-                      <a:tailEnd type="none" w="med" len="med"/>
-                    </a:lnB>
-                  </a:tcPr>
-                </a:tc>
-                <a:tc>
-                  <a:txBody>
-                    <a:bodyPr/>
-                    <a:lstStyle/>
-                    <a:p>
-                      <a:pPr algn="ctr" indent="0" marL="0">
-                        <a:buNone/>
-                      </a:pPr>
-                      <a:r>
-                        <a:rPr lang="en-US" sz="1050" b="1" dirty="0">
-                          <a:solidFill>
-                            <a:srgbClr val="C97A1A"/>
-                          </a:solidFill>
-                          <a:latin typeface="Calibri" pitchFamily="34" charset="0"/>
-                          <a:ea typeface="Calibri" pitchFamily="34" charset="-122"/>
-                          <a:cs typeface="Calibri" pitchFamily="34" charset="-120"/>
-                        </a:rPr>
-                        <a:t>Высокий</a:t>
-                      </a:r>
-                      <a:endParaRPr lang="en-US" sz="1050" dirty="0">
-                        <a:latin typeface="Calibri" charset="0"/>
-                        <a:ea typeface="Calibri" charset="0"/>
-                        <a:cs typeface="Calibri" charset="0"/>
-                      </a:endParaRPr>
-                    </a:p>
-                  </a:txBody>
-                  <a:tcPr marL="101600" marR="101600" marT="63500" marB="63500" anchor="ctr">
-                    <a:lnL w="9525" cap="flat" cmpd="sng" algn="ctr">
-                      <a:solidFill>
-                        <a:srgbClr val="D8DEE2"/>
-                      </a:solidFill>
-                      <a:prstDash val="solid"/>
-                      <a:round/>
-                      <a:headEnd type="none" w="med" len="med"/>
-                      <a:tailEnd type="none" w="med" len="med"/>
-                    </a:lnL>
-                    <a:lnR w="9525" cap="flat" cmpd="sng" algn="ctr">
-                      <a:solidFill>
-                        <a:srgbClr val="D8DEE2"/>
-                      </a:solidFill>
-                      <a:prstDash val="solid"/>
-                      <a:round/>
-                      <a:headEnd type="none" w="med" len="med"/>
-                      <a:tailEnd type="none" w="med" len="med"/>
-                    </a:lnR>
-                    <a:lnT w="9525" cap="flat" cmpd="sng" algn="ctr">
-                      <a:solidFill>
-                        <a:srgbClr val="D8DEE2"/>
-                      </a:solidFill>
-                      <a:prstDash val="solid"/>
-                      <a:round/>
-                      <a:headEnd type="none" w="med" len="med"/>
-                      <a:tailEnd type="none" w="med" len="med"/>
-                    </a:lnT>
-                    <a:lnB w="9525" cap="flat" cmpd="sng" algn="ctr">
-                      <a:solidFill>
-                        <a:srgbClr val="D8DEE2"/>
-                      </a:solidFill>
-                      <a:prstDash val="solid"/>
-                      <a:round/>
-                      <a:headEnd type="none" w="med" len="med"/>
-                      <a:tailEnd type="none" w="med" len="med"/>
-                    </a:lnB>
-                  </a:tcPr>
-                </a:tc>
-                <a:tc>
-                  <a:txBody>
-                    <a:bodyPr/>
-                    <a:lstStyle/>
-                    <a:p>
-                      <a:pPr indent="0" marL="0">
-                        <a:buNone/>
-                      </a:pPr>
-                      <a:r>
-                        <a:rPr lang="en-US" sz="1100" dirty="0">
-                          <a:solidFill>
-                            <a:srgbClr val="5B6B7A"/>
-                          </a:solidFill>
-                          <a:latin typeface="Calibri" pitchFamily="34" charset="0"/>
-                          <a:ea typeface="Calibri" pitchFamily="34" charset="-122"/>
-                          <a:cs typeface="Calibri" pitchFamily="34" charset="-120"/>
-                        </a:rPr>
-                        <a:t>КХД — расширяется ли состав таблиц/витрин, или периметр остаётся как в пилоте?</a:t>
-                      </a:r>
-                      <a:endParaRPr lang="en-US" sz="1100" dirty="0">
-                        <a:latin typeface="Calibri" charset="0"/>
-                        <a:ea typeface="Calibri" charset="0"/>
-                        <a:cs typeface="Calibri" charset="0"/>
-                      </a:endParaRPr>
-                    </a:p>
-                  </a:txBody>
-                  <a:tcPr marL="101600" marR="101600" marT="63500" marB="63500" anchor="ctr">
-                    <a:lnL w="9525" cap="flat" cmpd="sng" algn="ctr">
-                      <a:solidFill>
-                        <a:srgbClr val="D8DEE2"/>
-                      </a:solidFill>
-                      <a:prstDash val="solid"/>
-                      <a:round/>
-                      <a:headEnd type="none" w="med" len="med"/>
-                      <a:tailEnd type="none" w="med" len="med"/>
-                    </a:lnL>
-                    <a:lnR w="9525" cap="flat" cmpd="sng" algn="ctr">
-                      <a:solidFill>
-                        <a:srgbClr val="D8DEE2"/>
-                      </a:solidFill>
-                      <a:prstDash val="solid"/>
-                      <a:round/>
-                      <a:headEnd type="none" w="med" len="med"/>
-                      <a:tailEnd type="none" w="med" len="med"/>
-                    </a:lnR>
-                    <a:lnT w="9525" cap="flat" cmpd="sng" algn="ctr">
-                      <a:solidFill>
-                        <a:srgbClr val="D8DEE2"/>
-                      </a:solidFill>
-                      <a:prstDash val="solid"/>
-                      <a:round/>
-                      <a:headEnd type="none" w="med" len="med"/>
-                      <a:tailEnd type="none" w="med" len="med"/>
-                    </a:lnT>
-                    <a:lnB w="9525" cap="flat" cmpd="sng" algn="ctr">
-                      <a:solidFill>
-                        <a:srgbClr val="D8DEE2"/>
-                      </a:solidFill>
-                      <a:prstDash val="solid"/>
-                      <a:round/>
-                      <a:headEnd type="none" w="med" len="med"/>
-                      <a:tailEnd type="none" w="med" len="med"/>
-                    </a:lnB>
-                  </a:tcPr>
-                </a:tc>
-              </a:tr>
-              <a:tr h="497840">
-                <a:tc>
-                  <a:txBody>
-                    <a:bodyPr/>
-                    <a:lstStyle/>
-                    <a:p>
-                      <a:pPr algn="ctr" indent="0" marL="0">
-                        <a:buNone/>
-                      </a:pPr>
-                      <a:r>
-                        <a:rPr lang="en-US" sz="1100" dirty="0">
-                          <a:solidFill>
-                            <a:srgbClr val="5B6B7A"/>
-                          </a:solidFill>
-                          <a:latin typeface="Calibri" pitchFamily="34" charset="0"/>
-                          <a:ea typeface="Calibri" pitchFamily="34" charset="-122"/>
-                          <a:cs typeface="Calibri" pitchFamily="34" charset="-120"/>
-                        </a:rPr>
-                        <a:t>7</a:t>
-                      </a:r>
-                      <a:endParaRPr lang="en-US" sz="1100" dirty="0">
-                        <a:latin typeface="Calibri" charset="0"/>
-                        <a:ea typeface="Calibri" charset="0"/>
-                        <a:cs typeface="Calibri" charset="0"/>
-                      </a:endParaRPr>
-                    </a:p>
-                  </a:txBody>
-                  <a:tcPr marL="101600" marR="101600" marT="63500" marB="63500" anchor="ctr">
-                    <a:lnL w="9525" cap="flat" cmpd="sng" algn="ctr">
-                      <a:solidFill>
-                        <a:srgbClr val="D8DEE2"/>
-                      </a:solidFill>
-                      <a:prstDash val="solid"/>
-                      <a:round/>
-                      <a:headEnd type="none" w="med" len="med"/>
-                      <a:tailEnd type="none" w="med" len="med"/>
-                    </a:lnL>
-                    <a:lnR w="9525" cap="flat" cmpd="sng" algn="ctr">
-                      <a:solidFill>
-                        <a:srgbClr val="D8DEE2"/>
-                      </a:solidFill>
-                      <a:prstDash val="solid"/>
-                      <a:round/>
-                      <a:headEnd type="none" w="med" len="med"/>
-                      <a:tailEnd type="none" w="med" len="med"/>
-                    </a:lnR>
-                    <a:lnT w="9525" cap="flat" cmpd="sng" algn="ctr">
-                      <a:solidFill>
-                        <a:srgbClr val="D8DEE2"/>
-                      </a:solidFill>
-                      <a:prstDash val="solid"/>
-                      <a:round/>
-                      <a:headEnd type="none" w="med" len="med"/>
-                      <a:tailEnd type="none" w="med" len="med"/>
-                    </a:lnT>
-                    <a:lnB w="9525" cap="flat" cmpd="sng" algn="ctr">
-                      <a:solidFill>
-                        <a:srgbClr val="D8DEE2"/>
-                      </a:solidFill>
-                      <a:prstDash val="solid"/>
-                      <a:round/>
-                      <a:headEnd type="none" w="med" len="med"/>
-                      <a:tailEnd type="none" w="med" len="med"/>
-                    </a:lnB>
-                  </a:tcPr>
-                </a:tc>
-                <a:tc>
-                  <a:txBody>
-                    <a:bodyPr/>
-                    <a:lstStyle/>
-                    <a:p>
-                      <a:pPr indent="0" marL="0">
-                        <a:buNone/>
-                      </a:pPr>
-                      <a:r>
-                        <a:rPr lang="en-US" sz="1100" b="1" dirty="0">
-                          <a:solidFill>
-                            <a:srgbClr val="1A2733"/>
-                          </a:solidFill>
-                          <a:latin typeface="Calibri" pitchFamily="34" charset="0"/>
-                          <a:ea typeface="Calibri" pitchFamily="34" charset="-122"/>
-                          <a:cs typeface="Calibri" pitchFamily="34" charset="-120"/>
-                        </a:rPr>
-                        <a:t>Доступ и роли</a:t>
-                      </a:r>
-                      <a:endParaRPr lang="en-US" sz="1100" dirty="0">
-                        <a:latin typeface="Calibri" charset="0"/>
-                        <a:ea typeface="Calibri" charset="0"/>
-                        <a:cs typeface="Calibri" charset="0"/>
-                      </a:endParaRPr>
-                    </a:p>
-                  </a:txBody>
-                  <a:tcPr marL="101600" marR="101600" marT="63500" marB="63500" anchor="ctr">
-                    <a:lnL w="9525" cap="flat" cmpd="sng" algn="ctr">
-                      <a:solidFill>
-                        <a:srgbClr val="D8DEE2"/>
-                      </a:solidFill>
-                      <a:prstDash val="solid"/>
-                      <a:round/>
-                      <a:headEnd type="none" w="med" len="med"/>
-                      <a:tailEnd type="none" w="med" len="med"/>
-                    </a:lnL>
-                    <a:lnR w="9525" cap="flat" cmpd="sng" algn="ctr">
-                      <a:solidFill>
-                        <a:srgbClr val="D8DEE2"/>
-                      </a:solidFill>
-                      <a:prstDash val="solid"/>
-                      <a:round/>
-                      <a:headEnd type="none" w="med" len="med"/>
-                      <a:tailEnd type="none" w="med" len="med"/>
-                    </a:lnR>
-                    <a:lnT w="9525" cap="flat" cmpd="sng" algn="ctr">
-                      <a:solidFill>
-                        <a:srgbClr val="D8DEE2"/>
-                      </a:solidFill>
-                      <a:prstDash val="solid"/>
-                      <a:round/>
-                      <a:headEnd type="none" w="med" len="med"/>
-                      <a:tailEnd type="none" w="med" len="med"/>
-                    </a:lnT>
-                    <a:lnB w="9525" cap="flat" cmpd="sng" algn="ctr">
-                      <a:solidFill>
-                        <a:srgbClr val="D8DEE2"/>
-                      </a:solidFill>
-                      <a:prstDash val="solid"/>
-                      <a:round/>
-                      <a:headEnd type="none" w="med" len="med"/>
-                      <a:tailEnd type="none" w="med" len="med"/>
-                    </a:lnB>
-                  </a:tcPr>
-                </a:tc>
-                <a:tc>
-                  <a:txBody>
-                    <a:bodyPr/>
-                    <a:lstStyle/>
-                    <a:p>
-                      <a:pPr algn="ctr" indent="0" marL="0">
-                        <a:buNone/>
-                      </a:pPr>
-                      <a:r>
-                        <a:rPr lang="en-US" sz="1050" b="1" dirty="0">
-                          <a:solidFill>
-                            <a:srgbClr val="5B6B7A"/>
-                          </a:solidFill>
-                          <a:latin typeface="Calibri" pitchFamily="34" charset="0"/>
-                          <a:ea typeface="Calibri" pitchFamily="34" charset="-122"/>
-                          <a:cs typeface="Calibri" pitchFamily="34" charset="-120"/>
-                        </a:rPr>
-                        <a:t>Нормальный</a:t>
-                      </a:r>
-                      <a:endParaRPr lang="en-US" sz="1050" dirty="0">
-                        <a:latin typeface="Calibri" charset="0"/>
-                        <a:ea typeface="Calibri" charset="0"/>
-                        <a:cs typeface="Calibri" charset="0"/>
-                      </a:endParaRPr>
-                    </a:p>
-                  </a:txBody>
-                  <a:tcPr marL="101600" marR="101600" marT="63500" marB="63500" anchor="ctr">
-                    <a:lnL w="9525" cap="flat" cmpd="sng" algn="ctr">
-                      <a:solidFill>
-                        <a:srgbClr val="D8DEE2"/>
-                      </a:solidFill>
-                      <a:prstDash val="solid"/>
-                      <a:round/>
-                      <a:headEnd type="none" w="med" len="med"/>
-                      <a:tailEnd type="none" w="med" len="med"/>
-                    </a:lnL>
-                    <a:lnR w="9525" cap="flat" cmpd="sng" algn="ctr">
-                      <a:solidFill>
-                        <a:srgbClr val="D8DEE2"/>
-                      </a:solidFill>
-                      <a:prstDash val="solid"/>
-                      <a:round/>
-                      <a:headEnd type="none" w="med" len="med"/>
-                      <a:tailEnd type="none" w="med" len="med"/>
-                    </a:lnR>
-                    <a:lnT w="9525" cap="flat" cmpd="sng" algn="ctr">
-                      <a:solidFill>
-                        <a:srgbClr val="D8DEE2"/>
-                      </a:solidFill>
-                      <a:prstDash val="solid"/>
-                      <a:round/>
-                      <a:headEnd type="none" w="med" len="med"/>
-                      <a:tailEnd type="none" w="med" len="med"/>
-                    </a:lnT>
-                    <a:lnB w="9525" cap="flat" cmpd="sng" algn="ctr">
-                      <a:solidFill>
-                        <a:srgbClr val="D8DEE2"/>
-                      </a:solidFill>
-                      <a:prstDash val="solid"/>
-                      <a:round/>
-                      <a:headEnd type="none" w="med" len="med"/>
-                      <a:tailEnd type="none" w="med" len="med"/>
-                    </a:lnB>
-                  </a:tcPr>
-                </a:tc>
-                <a:tc>
-                  <a:txBody>
-                    <a:bodyPr/>
-                    <a:lstStyle/>
-                    <a:p>
-                      <a:pPr indent="0" marL="0">
-                        <a:buNone/>
-                      </a:pPr>
-                      <a:r>
-                        <a:rPr lang="en-US" sz="1100" dirty="0">
-                          <a:solidFill>
-                            <a:srgbClr val="5B6B7A"/>
-                          </a:solidFill>
-                          <a:latin typeface="Calibri" pitchFamily="34" charset="0"/>
-                          <a:ea typeface="Calibri" pitchFamily="34" charset="-122"/>
-                          <a:cs typeface="Calibri" pitchFamily="34" charset="-120"/>
-                        </a:rPr>
-                        <a:t>Реальная оргструктура: подразделения/роли с числом пользователей — факт, не гипотеза из мастер-ТЗ.</a:t>
-                      </a:r>
-                      <a:endParaRPr lang="en-US" sz="1100" dirty="0">
-                        <a:latin typeface="Calibri" charset="0"/>
-                        <a:ea typeface="Calibri" charset="0"/>
-                        <a:cs typeface="Calibri" charset="0"/>
-                      </a:endParaRPr>
-                    </a:p>
-                  </a:txBody>
-                  <a:tcPr marL="101600" marR="101600" marT="63500" marB="63500" anchor="ctr">
-                    <a:lnL w="9525" cap="flat" cmpd="sng" algn="ctr">
-                      <a:solidFill>
-                        <a:srgbClr val="D8DEE2"/>
-                      </a:solidFill>
-                      <a:prstDash val="solid"/>
-                      <a:round/>
-                      <a:headEnd type="none" w="med" len="med"/>
-                      <a:tailEnd type="none" w="med" len="med"/>
-                    </a:lnL>
-                    <a:lnR w="9525" cap="flat" cmpd="sng" algn="ctr">
-                      <a:solidFill>
-                        <a:srgbClr val="D8DEE2"/>
-                      </a:solidFill>
-                      <a:prstDash val="solid"/>
-                      <a:round/>
-                      <a:headEnd type="none" w="med" len="med"/>
-                      <a:tailEnd type="none" w="med" len="med"/>
-                    </a:lnR>
-                    <a:lnT w="9525" cap="flat" cmpd="sng" algn="ctr">
-                      <a:solidFill>
-                        <a:srgbClr val="D8DEE2"/>
-                      </a:solidFill>
-                      <a:prstDash val="solid"/>
-                      <a:round/>
-                      <a:headEnd type="none" w="med" len="med"/>
-                      <a:tailEnd type="none" w="med" len="med"/>
-                    </a:lnT>
-                    <a:lnB w="9525" cap="flat" cmpd="sng" algn="ctr">
-                      <a:solidFill>
-                        <a:srgbClr val="D8DEE2"/>
-                      </a:solidFill>
-                      <a:prstDash val="solid"/>
-                      <a:round/>
-                      <a:headEnd type="none" w="med" len="med"/>
-                      <a:tailEnd type="none" w="med" len="med"/>
-                    </a:lnB>
-                  </a:tcPr>
-                </a:tc>
-              </a:tr>
-              <a:tr h="497840">
-                <a:tc>
-                  <a:txBody>
-                    <a:bodyPr/>
-                    <a:lstStyle/>
-                    <a:p>
-                      <a:pPr algn="ctr" indent="0" marL="0">
-                        <a:buNone/>
-                      </a:pPr>
-                      <a:r>
-                        <a:rPr lang="en-US" sz="1100" dirty="0">
-                          <a:solidFill>
-                            <a:srgbClr val="5B6B7A"/>
-                          </a:solidFill>
-                          <a:latin typeface="Calibri" pitchFamily="34" charset="0"/>
-                          <a:ea typeface="Calibri" pitchFamily="34" charset="-122"/>
-                          <a:cs typeface="Calibri" pitchFamily="34" charset="-120"/>
-                        </a:rPr>
-                        <a:t>12</a:t>
-                      </a:r>
-                      <a:endParaRPr lang="en-US" sz="1100" dirty="0">
-                        <a:latin typeface="Calibri" charset="0"/>
-                        <a:ea typeface="Calibri" charset="0"/>
-                        <a:cs typeface="Calibri" charset="0"/>
-                      </a:endParaRPr>
-                    </a:p>
-                  </a:txBody>
-                  <a:tcPr marL="101600" marR="101600" marT="63500" marB="63500" anchor="ctr">
-                    <a:lnL w="9525" cap="flat" cmpd="sng" algn="ctr">
-                      <a:solidFill>
-                        <a:srgbClr val="D8DEE2"/>
-                      </a:solidFill>
-                      <a:prstDash val="solid"/>
-                      <a:round/>
-                      <a:headEnd type="none" w="med" len="med"/>
-                      <a:tailEnd type="none" w="med" len="med"/>
-                    </a:lnL>
-                    <a:lnR w="9525" cap="flat" cmpd="sng" algn="ctr">
-                      <a:solidFill>
-                        <a:srgbClr val="D8DEE2"/>
-                      </a:solidFill>
-                      <a:prstDash val="solid"/>
-                      <a:round/>
-                      <a:headEnd type="none" w="med" len="med"/>
-                      <a:tailEnd type="none" w="med" len="med"/>
-                    </a:lnR>
-                    <a:lnT w="9525" cap="flat" cmpd="sng" algn="ctr">
-                      <a:solidFill>
-                        <a:srgbClr val="D8DEE2"/>
-                      </a:solidFill>
-                      <a:prstDash val="solid"/>
-                      <a:round/>
-                      <a:headEnd type="none" w="med" len="med"/>
-                      <a:tailEnd type="none" w="med" len="med"/>
-                    </a:lnT>
-                    <a:lnB w="9525" cap="flat" cmpd="sng" algn="ctr">
-                      <a:solidFill>
-                        <a:srgbClr val="D8DEE2"/>
-                      </a:solidFill>
-                      <a:prstDash val="solid"/>
-                      <a:round/>
-                      <a:headEnd type="none" w="med" len="med"/>
-                      <a:tailEnd type="none" w="med" len="med"/>
-                    </a:lnB>
-                  </a:tcPr>
-                </a:tc>
-                <a:tc>
-                  <a:txBody>
-                    <a:bodyPr/>
-                    <a:lstStyle/>
-                    <a:p>
-                      <a:pPr indent="0" marL="0">
-                        <a:buNone/>
-                      </a:pPr>
-                      <a:r>
-                        <a:rPr lang="en-US" sz="1100" b="1" dirty="0">
-                          <a:solidFill>
-                            <a:srgbClr val="1A2733"/>
-                          </a:solidFill>
-                          <a:latin typeface="Calibri" pitchFamily="34" charset="0"/>
-                          <a:ea typeface="Calibri" pitchFamily="34" charset="-122"/>
-                          <a:cs typeface="Calibri" pitchFamily="34" charset="-120"/>
-                        </a:rPr>
-                        <a:t>Общее</a:t>
-                      </a:r>
-                      <a:endParaRPr lang="en-US" sz="1100" dirty="0">
-                        <a:latin typeface="Calibri" charset="0"/>
-                        <a:ea typeface="Calibri" charset="0"/>
-                        <a:cs typeface="Calibri" charset="0"/>
-                      </a:endParaRPr>
-                    </a:p>
-                  </a:txBody>
-                  <a:tcPr marL="101600" marR="101600" marT="63500" marB="63500" anchor="ctr">
-                    <a:lnL w="9525" cap="flat" cmpd="sng" algn="ctr">
-                      <a:solidFill>
-                        <a:srgbClr val="D8DEE2"/>
-                      </a:solidFill>
-                      <a:prstDash val="solid"/>
-                      <a:round/>
-                      <a:headEnd type="none" w="med" len="med"/>
-                      <a:tailEnd type="none" w="med" len="med"/>
-                    </a:lnL>
-                    <a:lnR w="9525" cap="flat" cmpd="sng" algn="ctr">
-                      <a:solidFill>
-                        <a:srgbClr val="D8DEE2"/>
-                      </a:solidFill>
-                      <a:prstDash val="solid"/>
-                      <a:round/>
-                      <a:headEnd type="none" w="med" len="med"/>
-                      <a:tailEnd type="none" w="med" len="med"/>
-                    </a:lnR>
-                    <a:lnT w="9525" cap="flat" cmpd="sng" algn="ctr">
-                      <a:solidFill>
-                        <a:srgbClr val="D8DEE2"/>
-                      </a:solidFill>
-                      <a:prstDash val="solid"/>
-                      <a:round/>
-                      <a:headEnd type="none" w="med" len="med"/>
-                      <a:tailEnd type="none" w="med" len="med"/>
-                    </a:lnT>
-                    <a:lnB w="9525" cap="flat" cmpd="sng" algn="ctr">
-                      <a:solidFill>
-                        <a:srgbClr val="D8DEE2"/>
-                      </a:solidFill>
-                      <a:prstDash val="solid"/>
-                      <a:round/>
-                      <a:headEnd type="none" w="med" len="med"/>
-                      <a:tailEnd type="none" w="med" len="med"/>
-                    </a:lnB>
-                  </a:tcPr>
-                </a:tc>
-                <a:tc>
-                  <a:txBody>
-                    <a:bodyPr/>
-                    <a:lstStyle/>
-                    <a:p>
-                      <a:pPr algn="ctr" indent="0" marL="0">
-                        <a:buNone/>
-                      </a:pPr>
-                      <a:r>
-                        <a:rPr lang="en-US" sz="1050" b="1" dirty="0">
-                          <a:solidFill>
-                            <a:srgbClr val="5B6B7A"/>
-                          </a:solidFill>
-                          <a:latin typeface="Calibri" pitchFamily="34" charset="0"/>
-                          <a:ea typeface="Calibri" pitchFamily="34" charset="-122"/>
-                          <a:cs typeface="Calibri" pitchFamily="34" charset="-120"/>
-                        </a:rPr>
-                        <a:t>Нормальный</a:t>
-                      </a:r>
-                      <a:endParaRPr lang="en-US" sz="1050" dirty="0">
-                        <a:latin typeface="Calibri" charset="0"/>
-                        <a:ea typeface="Calibri" charset="0"/>
-                        <a:cs typeface="Calibri" charset="0"/>
-                      </a:endParaRPr>
-                    </a:p>
-                  </a:txBody>
-                  <a:tcPr marL="101600" marR="101600" marT="63500" marB="63500" anchor="ctr">
-                    <a:lnL w="9525" cap="flat" cmpd="sng" algn="ctr">
-                      <a:solidFill>
-                        <a:srgbClr val="D8DEE2"/>
-                      </a:solidFill>
-                      <a:prstDash val="solid"/>
-                      <a:round/>
-                      <a:headEnd type="none" w="med" len="med"/>
-                      <a:tailEnd type="none" w="med" len="med"/>
-                    </a:lnL>
-                    <a:lnR w="9525" cap="flat" cmpd="sng" algn="ctr">
-                      <a:solidFill>
-                        <a:srgbClr val="D8DEE2"/>
-                      </a:solidFill>
-                      <a:prstDash val="solid"/>
-                      <a:round/>
-                      <a:headEnd type="none" w="med" len="med"/>
-                      <a:tailEnd type="none" w="med" len="med"/>
-                    </a:lnR>
-                    <a:lnT w="9525" cap="flat" cmpd="sng" algn="ctr">
-                      <a:solidFill>
-                        <a:srgbClr val="D8DEE2"/>
-                      </a:solidFill>
-                      <a:prstDash val="solid"/>
-                      <a:round/>
-                      <a:headEnd type="none" w="med" len="med"/>
-                      <a:tailEnd type="none" w="med" len="med"/>
-                    </a:lnT>
-                    <a:lnB w="9525" cap="flat" cmpd="sng" algn="ctr">
-                      <a:solidFill>
-                        <a:srgbClr val="D8DEE2"/>
-                      </a:solidFill>
-                      <a:prstDash val="solid"/>
-                      <a:round/>
-                      <a:headEnd type="none" w="med" len="med"/>
-                      <a:tailEnd type="none" w="med" len="med"/>
-                    </a:lnB>
-                  </a:tcPr>
-                </a:tc>
-                <a:tc>
-                  <a:txBody>
-                    <a:bodyPr/>
-                    <a:lstStyle/>
-                    <a:p>
-                      <a:pPr indent="0" marL="0">
-                        <a:buNone/>
-                      </a:pPr>
-                      <a:r>
-                        <a:rPr lang="en-US" sz="1100" dirty="0">
-                          <a:solidFill>
-                            <a:srgbClr val="5B6B7A"/>
-                          </a:solidFill>
-                          <a:latin typeface="Calibri" pitchFamily="34" charset="0"/>
-                          <a:ea typeface="Calibri" pitchFamily="34" charset="-122"/>
-                          <a:cs typeface="Calibri" pitchFamily="34" charset="-120"/>
-                        </a:rPr>
-                        <a:t>Кто со стороны Д8 — владелец процесса на фазе П4 (промышленная эксплуатация)?</a:t>
-                      </a:r>
-                      <a:endParaRPr lang="en-US" sz="1100" dirty="0">
-                        <a:latin typeface="Calibri" charset="0"/>
-                        <a:ea typeface="Calibri" charset="0"/>
-                        <a:cs typeface="Calibri" charset="0"/>
-                      </a:endParaRPr>
-                    </a:p>
-                  </a:txBody>
-                  <a:tcPr marL="101600" marR="101600" marT="63500" marB="63500" anchor="ctr">
-                    <a:lnL w="9525" cap="flat" cmpd="sng" algn="ctr">
-                      <a:solidFill>
-                        <a:srgbClr val="D8DEE2"/>
-                      </a:solidFill>
-                      <a:prstDash val="solid"/>
-                      <a:round/>
-                      <a:headEnd type="none" w="med" len="med"/>
-                      <a:tailEnd type="none" w="med" len="med"/>
-                    </a:lnL>
-                    <a:lnR w="9525" cap="flat" cmpd="sng" algn="ctr">
-                      <a:solidFill>
-                        <a:srgbClr val="D8DEE2"/>
-                      </a:solidFill>
-                      <a:prstDash val="solid"/>
-                      <a:round/>
-                      <a:headEnd type="none" w="med" len="med"/>
-                      <a:tailEnd type="none" w="med" len="med"/>
-                    </a:lnR>
-                    <a:lnT w="9525" cap="flat" cmpd="sng" algn="ctr">
-                      <a:solidFill>
-                        <a:srgbClr val="D8DEE2"/>
-                      </a:solidFill>
-                      <a:prstDash val="solid"/>
-                      <a:round/>
-                      <a:headEnd type="none" w="med" len="med"/>
-                      <a:tailEnd type="none" w="med" len="med"/>
-                    </a:lnT>
-                    <a:lnB w="9525" cap="flat" cmpd="sng" algn="ctr">
-                      <a:solidFill>
-                        <a:srgbClr val="D8DEE2"/>
-                      </a:solidFill>
-                      <a:prstDash val="solid"/>
-                      <a:round/>
-                      <a:headEnd type="none" w="med" len="med"/>
-                      <a:tailEnd type="none" w="med" len="med"/>
-                    </a:lnB>
-                  </a:tcPr>
-                </a:tc>
-              </a:tr>
-            </a:tbl>
-          </a:graphicData>
-        </a:graphic>
-      </p:graphicFrame>
-      <p:sp>
-        <p:nvSpPr>
-          <p:cNvPr id="6" name="Text 3"/>
-          <p:cNvSpPr txBox="1"/>
-          <p:nvPr/>
-        </p:nvSpPr>
-        <p:spPr>
-          <a:xfrm>
-            <a:off x="10881360" y="6473952"/>
-            <a:ext cx="822960" cy="274320"/>
-          </a:xfrm>
-          <a:prstGeom prst="rect">
-            <a:avLst/>
-          </a:prstGeom>
-          <a:noFill/>
-          <a:ln/>
-        </p:spPr>
-        <p:txBody>
-          <a:bodyPr wrap="square" lIns="0" tIns="0" rIns="0" bIns="0" rtlCol="0" anchor="ctr"/>
-          <a:lstStyle/>
-          <a:p>
-            <a:pPr algn="r" indent="0" marL="0">
-              <a:buNone/>
-            </a:pPr>
-            <a:r>
-              <a:rPr lang="en-US" sz="1050" dirty="0">
-                <a:solidFill>
-                  <a:srgbClr val="8C99A6"/>
-                </a:solidFill>
-                <a:latin typeface="Calibri" pitchFamily="34" charset="0"/>
-                <a:ea typeface="Calibri" pitchFamily="34" charset="-122"/>
-                <a:cs typeface="Calibri" pitchFamily="34" charset="-120"/>
-              </a:rPr>
-              <a:t>4 / 5</a:t>
+              <a:t>4 / 6</a:t>
             </a:r>
             <a:endParaRPr lang="en-US" sz="1050" dirty="0"/>
           </a:p>
@@ -9929,7 +7601,866 @@
                 <a:ea typeface="Calibri" pitchFamily="34" charset="-122"/>
                 <a:cs typeface="Calibri" pitchFamily="34" charset="-120"/>
               </a:rPr>
-              <a:t>3 · НАШИ ВОПРОСЫ · ПО ПОЖЕЛАНИЯМ ЗАКАЗЧИКА</a:t>
+              <a:t>4 · НАШИ ВОПРОСЫ · ПО ВОЛНАМ</a:t>
+            </a:r>
+            <a:endParaRPr lang="en-US" sz="1100" dirty="0"/>
+          </a:p>
+        </p:txBody>
+      </p:sp>
+      <p:sp>
+        <p:nvSpPr>
+          <p:cNvPr id="3" name="Text 1"/>
+          <p:cNvSpPr txBox="1"/>
+          <p:nvPr/>
+        </p:nvSpPr>
+        <p:spPr>
+          <a:xfrm>
+            <a:off x="502920" y="621792"/>
+            <a:ext cx="11155680" cy="548640"/>
+          </a:xfrm>
+          <a:prstGeom prst="rect">
+            <a:avLst/>
+          </a:prstGeom>
+          <a:noFill/>
+          <a:ln/>
+        </p:spPr>
+        <p:txBody>
+          <a:bodyPr wrap="square" lIns="0" tIns="0" rIns="0" bIns="0" rtlCol="0" anchor="ctr"/>
+          <a:lstStyle/>
+          <a:p>
+            <a:pPr indent="0" marL="0">
+              <a:buNone/>
+            </a:pPr>
+            <a:r>
+              <a:rPr lang="en-US" sz="2700" b="1" dirty="0">
+                <a:solidFill>
+                  <a:srgbClr val="1A2733"/>
+                </a:solidFill>
+                <a:latin typeface="Cambria" pitchFamily="34" charset="0"/>
+                <a:ea typeface="Cambria" pitchFamily="34" charset="-122"/>
+                <a:cs typeface="Cambria" pitchFamily="34" charset="-120"/>
+              </a:rPr>
+              <a:t>Что нужно от заказчика по каждой волне</a:t>
+            </a:r>
+            <a:endParaRPr lang="en-US" sz="2700" dirty="0"/>
+          </a:p>
+        </p:txBody>
+      </p:sp>
+      <p:sp>
+        <p:nvSpPr>
+          <p:cNvPr id="4" name="Text 2"/>
+          <p:cNvSpPr txBox="1"/>
+          <p:nvPr/>
+        </p:nvSpPr>
+        <p:spPr>
+          <a:xfrm>
+            <a:off x="502920" y="1170432"/>
+            <a:ext cx="11155680" cy="365760"/>
+          </a:xfrm>
+          <a:prstGeom prst="rect">
+            <a:avLst/>
+          </a:prstGeom>
+          <a:noFill/>
+          <a:ln/>
+        </p:spPr>
+        <p:txBody>
+          <a:bodyPr wrap="square" lIns="0" tIns="0" rIns="0" bIns="0" rtlCol="0" anchor="ctr"/>
+          <a:lstStyle/>
+          <a:p>
+            <a:pPr indent="0" marL="0">
+              <a:buNone/>
+            </a:pPr>
+            <a:r>
+              <a:rPr lang="en-US" sz="1300" dirty="0">
+                <a:solidFill>
+                  <a:srgbClr val="5B6B7A"/>
+                </a:solidFill>
+                <a:latin typeface="Calibri" pitchFamily="34" charset="0"/>
+                <a:ea typeface="Calibri" pitchFamily="34" charset="-122"/>
+                <a:cs typeface="Calibri" pitchFamily="34" charset="-120"/>
+              </a:rPr>
+              <a:t>Один и тот же набор параметров на каждую волну: состав данных, витрины/коллекции, пользователи, роли</a:t>
+            </a:r>
+            <a:endParaRPr lang="en-US" sz="1300" dirty="0"/>
+          </a:p>
+        </p:txBody>
+      </p:sp>
+      <p:sp>
+        <p:nvSpPr>
+          <p:cNvPr id="5" name="Shape 3"/>
+          <p:cNvSpPr/>
+          <p:nvPr/>
+        </p:nvSpPr>
+        <p:spPr>
+          <a:xfrm>
+            <a:off x="502920" y="1691640"/>
+            <a:ext cx="3520440" cy="4526280"/>
+          </a:xfrm>
+          <a:prstGeom prst="roundRect">
+            <a:avLst>
+              <a:gd name="adj" fmla="val 1558"/>
+            </a:avLst>
+          </a:prstGeom>
+          <a:solidFill>
+            <a:srgbClr val="F4F6F7"/>
+          </a:solidFill>
+          <a:ln w="9525">
+            <a:solidFill>
+              <a:srgbClr val="D8DEE2"/>
+            </a:solidFill>
+            <a:prstDash val="solid"/>
+          </a:ln>
+        </p:spPr>
+      </p:sp>
+      <p:sp>
+        <p:nvSpPr>
+          <p:cNvPr id="6" name="Text 4"/>
+          <p:cNvSpPr txBox="1"/>
+          <p:nvPr/>
+        </p:nvSpPr>
+        <p:spPr>
+          <a:xfrm>
+            <a:off x="704088" y="1874520"/>
+            <a:ext cx="3118104" cy="256032"/>
+          </a:xfrm>
+          <a:prstGeom prst="rect">
+            <a:avLst/>
+          </a:prstGeom>
+          <a:noFill/>
+          <a:ln/>
+        </p:spPr>
+        <p:txBody>
+          <a:bodyPr wrap="square" lIns="0" tIns="0" rIns="0" bIns="0" rtlCol="0" anchor="ctr"/>
+          <a:lstStyle/>
+          <a:p>
+            <a:pPr indent="0" marL="0">
+              <a:buNone/>
+            </a:pPr>
+            <a:r>
+              <a:rPr lang="en-US" sz="1000" b="1" spc="100" kern="0" dirty="0">
+                <a:solidFill>
+                  <a:srgbClr val="C0392B"/>
+                </a:solidFill>
+                <a:latin typeface="Calibri" pitchFamily="34" charset="0"/>
+                <a:ea typeface="Calibri" pitchFamily="34" charset="-122"/>
+                <a:cs typeface="Calibri" pitchFamily="34" charset="-120"/>
+              </a:rPr>
+              <a:t>КРИТИЧНЫЙ</a:t>
+            </a:r>
+            <a:endParaRPr lang="en-US" sz="1000" dirty="0"/>
+          </a:p>
+        </p:txBody>
+      </p:sp>
+      <p:sp>
+        <p:nvSpPr>
+          <p:cNvPr id="7" name="Text 5"/>
+          <p:cNvSpPr txBox="1"/>
+          <p:nvPr/>
+        </p:nvSpPr>
+        <p:spPr>
+          <a:xfrm>
+            <a:off x="704088" y="2148840"/>
+            <a:ext cx="3118104" cy="594360"/>
+          </a:xfrm>
+          <a:prstGeom prst="rect">
+            <a:avLst/>
+          </a:prstGeom>
+          <a:noFill/>
+          <a:ln/>
+        </p:spPr>
+        <p:txBody>
+          <a:bodyPr wrap="square" lIns="0" tIns="0" rIns="0" bIns="0" rtlCol="0" anchor="ctr"/>
+          <a:lstStyle/>
+          <a:p>
+            <a:pPr indent="0" marL="0">
+              <a:lnSpc>
+                <a:spcPct val="105000"/>
+              </a:lnSpc>
+              <a:buNone/>
+            </a:pPr>
+            <a:r>
+              <a:rPr lang="en-US" sz="1550" b="1" dirty="0">
+                <a:solidFill>
+                  <a:srgbClr val="1A2733"/>
+                </a:solidFill>
+                <a:latin typeface="Cambria" pitchFamily="34" charset="0"/>
+                <a:ea typeface="Cambria" pitchFamily="34" charset="-122"/>
+                <a:cs typeface="Cambria" pitchFamily="34" charset="-120"/>
+              </a:rPr>
+              <a:t>Волна 1 — RAG-документы</a:t>
+            </a:r>
+            <a:endParaRPr lang="en-US" sz="1550" dirty="0"/>
+          </a:p>
+        </p:txBody>
+      </p:sp>
+      <p:sp>
+        <p:nvSpPr>
+          <p:cNvPr id="8" name="Text 6"/>
+          <p:cNvSpPr txBox="1"/>
+          <p:nvPr/>
+        </p:nvSpPr>
+        <p:spPr>
+          <a:xfrm>
+            <a:off x="704088" y="2834640"/>
+            <a:ext cx="3118104" cy="3200400"/>
+          </a:xfrm>
+          <a:prstGeom prst="rect">
+            <a:avLst/>
+          </a:prstGeom>
+          <a:noFill/>
+          <a:ln/>
+        </p:spPr>
+        <p:txBody>
+          <a:bodyPr wrap="square" lIns="0" tIns="0" rIns="0" bIns="0" rtlCol="0" anchor="t"/>
+          <a:lstStyle/>
+          <a:p>
+            <a:pPr marL="177800" indent="-177800">
+              <a:lnSpc>
+                <a:spcPct val="115000"/>
+              </a:lnSpc>
+              <a:spcAft>
+                <a:spcPts val="1000"/>
+              </a:spcAft>
+              <a:buSzPct val="100000"/>
+              <a:buChar char="•"/>
+            </a:pPr>
+            <a:r>
+              <a:rPr lang="en-US" sz="1100" dirty="0">
+                <a:solidFill>
+                  <a:srgbClr val="5B6B7A"/>
+                </a:solidFill>
+                <a:latin typeface="Calibri" pitchFamily="34" charset="0"/>
+                <a:ea typeface="Calibri" pitchFamily="34" charset="-122"/>
+                <a:cs typeface="Calibri" pitchFamily="34" charset="-120"/>
+              </a:rPr>
+              <a:t>Толкование: новые типы документов / улучшение существующих / отдельная новая коллекция?</a:t>
+            </a:r>
+            <a:endParaRPr lang="en-US" sz="1100" dirty="0"/>
+          </a:p>
+          <a:p>
+            <a:pPr marL="177800" indent="-177800">
+              <a:lnSpc>
+                <a:spcPct val="115000"/>
+              </a:lnSpc>
+              <a:spcAft>
+                <a:spcPts val="1000"/>
+              </a:spcAft>
+              <a:buSzPct val="100000"/>
+              <a:buChar char="•"/>
+            </a:pPr>
+            <a:r>
+              <a:rPr lang="en-US" sz="1100" dirty="0">
+                <a:solidFill>
+                  <a:srgbClr val="5B6B7A"/>
+                </a:solidFill>
+                <a:latin typeface="Calibri" pitchFamily="34" charset="0"/>
+                <a:ea typeface="Calibri" pitchFamily="34" charset="-122"/>
+                <a:cs typeface="Calibri" pitchFamily="34" charset="-120"/>
+              </a:rPr>
+              <a:t>Состав данных: какие темы/типы документов (если новые)</a:t>
+            </a:r>
+            <a:endParaRPr lang="en-US" sz="1100" dirty="0"/>
+          </a:p>
+          <a:p>
+            <a:pPr marL="177800" indent="-177800">
+              <a:lnSpc>
+                <a:spcPct val="115000"/>
+              </a:lnSpc>
+              <a:spcAft>
+                <a:spcPts val="1000"/>
+              </a:spcAft>
+              <a:buSzPct val="100000"/>
+              <a:buChar char="•"/>
+            </a:pPr>
+            <a:r>
+              <a:rPr lang="en-US" sz="1100" dirty="0">
+                <a:solidFill>
+                  <a:srgbClr val="5B6B7A"/>
+                </a:solidFill>
+                <a:latin typeface="Calibri" pitchFamily="34" charset="0"/>
+                <a:ea typeface="Calibri" pitchFamily="34" charset="-122"/>
+                <a:cs typeface="Calibri" pitchFamily="34" charset="-120"/>
+              </a:rPr>
+              <a:t>Количество коллекций: расширяются текущие 2, или новые — сколько</a:t>
+            </a:r>
+            <a:endParaRPr lang="en-US" sz="1100" dirty="0"/>
+          </a:p>
+          <a:p>
+            <a:pPr marL="177800" indent="-177800">
+              <a:lnSpc>
+                <a:spcPct val="115000"/>
+              </a:lnSpc>
+              <a:spcAft>
+                <a:spcPts val="1000"/>
+              </a:spcAft>
+              <a:buSzPct val="100000"/>
+              <a:buChar char="•"/>
+            </a:pPr>
+            <a:r>
+              <a:rPr lang="en-US" sz="1100" dirty="0">
+                <a:solidFill>
+                  <a:srgbClr val="5B6B7A"/>
+                </a:solidFill>
+                <a:latin typeface="Calibri" pitchFamily="34" charset="0"/>
+                <a:ea typeface="Calibri" pitchFamily="34" charset="-122"/>
+                <a:cs typeface="Calibri" pitchFamily="34" charset="-120"/>
+              </a:rPr>
+              <a:t>Объём: примерное число документов в корпусе</a:t>
+            </a:r>
+            <a:endParaRPr lang="en-US" sz="1100" dirty="0"/>
+          </a:p>
+          <a:p>
+            <a:pPr marL="177800" indent="-177800">
+              <a:lnSpc>
+                <a:spcPct val="115000"/>
+              </a:lnSpc>
+              <a:spcAft>
+                <a:spcPts val="1000"/>
+              </a:spcAft>
+              <a:buSzPct val="100000"/>
+              <a:buChar char="•"/>
+            </a:pPr>
+            <a:r>
+              <a:rPr lang="en-US" sz="1100" dirty="0">
+                <a:solidFill>
+                  <a:srgbClr val="5B6B7A"/>
+                </a:solidFill>
+                <a:latin typeface="Calibri" pitchFamily="34" charset="0"/>
+                <a:ea typeface="Calibri" pitchFamily="34" charset="-122"/>
+                <a:cs typeface="Calibri" pitchFamily="34" charset="-120"/>
+              </a:rPr>
+              <a:t>Пользователи и роли: кто получит доступ именно в этой волне</a:t>
+            </a:r>
+            <a:endParaRPr lang="en-US" sz="1100" dirty="0"/>
+          </a:p>
+        </p:txBody>
+      </p:sp>
+      <p:sp>
+        <p:nvSpPr>
+          <p:cNvPr id="9" name="Shape 7"/>
+          <p:cNvSpPr/>
+          <p:nvPr/>
+        </p:nvSpPr>
+        <p:spPr>
+          <a:xfrm>
+            <a:off x="4320540" y="1691640"/>
+            <a:ext cx="3520440" cy="4526280"/>
+          </a:xfrm>
+          <a:prstGeom prst="roundRect">
+            <a:avLst>
+              <a:gd name="adj" fmla="val 1558"/>
+            </a:avLst>
+          </a:prstGeom>
+          <a:solidFill>
+            <a:srgbClr val="F4F6F7"/>
+          </a:solidFill>
+          <a:ln w="9525">
+            <a:solidFill>
+              <a:srgbClr val="D8DEE2"/>
+            </a:solidFill>
+            <a:prstDash val="solid"/>
+          </a:ln>
+        </p:spPr>
+      </p:sp>
+      <p:sp>
+        <p:nvSpPr>
+          <p:cNvPr id="10" name="Text 8"/>
+          <p:cNvSpPr txBox="1"/>
+          <p:nvPr/>
+        </p:nvSpPr>
+        <p:spPr>
+          <a:xfrm>
+            <a:off x="4521708" y="1874520"/>
+            <a:ext cx="3118104" cy="256032"/>
+          </a:xfrm>
+          <a:prstGeom prst="rect">
+            <a:avLst/>
+          </a:prstGeom>
+          <a:noFill/>
+          <a:ln/>
+        </p:spPr>
+        <p:txBody>
+          <a:bodyPr wrap="square" lIns="0" tIns="0" rIns="0" bIns="0" rtlCol="0" anchor="ctr"/>
+          <a:lstStyle/>
+          <a:p>
+            <a:pPr indent="0" marL="0">
+              <a:buNone/>
+            </a:pPr>
+            <a:r>
+              <a:rPr lang="en-US" sz="1000" b="1" spc="100" kern="0" dirty="0">
+                <a:solidFill>
+                  <a:srgbClr val="C97A1A"/>
+                </a:solidFill>
+                <a:latin typeface="Calibri" pitchFamily="34" charset="0"/>
+                <a:ea typeface="Calibri" pitchFamily="34" charset="-122"/>
+                <a:cs typeface="Calibri" pitchFamily="34" charset="-120"/>
+              </a:rPr>
+              <a:t>ВЫСОКИЙ</a:t>
+            </a:r>
+            <a:endParaRPr lang="en-US" sz="1000" dirty="0"/>
+          </a:p>
+        </p:txBody>
+      </p:sp>
+      <p:sp>
+        <p:nvSpPr>
+          <p:cNvPr id="11" name="Text 9"/>
+          <p:cNvSpPr txBox="1"/>
+          <p:nvPr/>
+        </p:nvSpPr>
+        <p:spPr>
+          <a:xfrm>
+            <a:off x="4521708" y="2148840"/>
+            <a:ext cx="3118104" cy="594360"/>
+          </a:xfrm>
+          <a:prstGeom prst="rect">
+            <a:avLst/>
+          </a:prstGeom>
+          <a:noFill/>
+          <a:ln/>
+        </p:spPr>
+        <p:txBody>
+          <a:bodyPr wrap="square" lIns="0" tIns="0" rIns="0" bIns="0" rtlCol="0" anchor="ctr"/>
+          <a:lstStyle/>
+          <a:p>
+            <a:pPr indent="0" marL="0">
+              <a:lnSpc>
+                <a:spcPct val="105000"/>
+              </a:lnSpc>
+              <a:buNone/>
+            </a:pPr>
+            <a:r>
+              <a:rPr lang="en-US" sz="1550" b="1" dirty="0">
+                <a:solidFill>
+                  <a:srgbClr val="1A2733"/>
+                </a:solidFill>
+                <a:latin typeface="Cambria" pitchFamily="34" charset="0"/>
+                <a:ea typeface="Cambria" pitchFamily="34" charset="-122"/>
+                <a:cs typeface="Cambria" pitchFamily="34" charset="-120"/>
+              </a:rPr>
+              <a:t>Волна 2 — КХД / ESB</a:t>
+            </a:r>
+            <a:endParaRPr lang="en-US" sz="1550" dirty="0"/>
+          </a:p>
+        </p:txBody>
+      </p:sp>
+      <p:sp>
+        <p:nvSpPr>
+          <p:cNvPr id="12" name="Text 10"/>
+          <p:cNvSpPr txBox="1"/>
+          <p:nvPr/>
+        </p:nvSpPr>
+        <p:spPr>
+          <a:xfrm>
+            <a:off x="4521708" y="2834640"/>
+            <a:ext cx="3118104" cy="3200400"/>
+          </a:xfrm>
+          <a:prstGeom prst="rect">
+            <a:avLst/>
+          </a:prstGeom>
+          <a:noFill/>
+          <a:ln/>
+        </p:spPr>
+        <p:txBody>
+          <a:bodyPr wrap="square" lIns="0" tIns="0" rIns="0" bIns="0" rtlCol="0" anchor="t"/>
+          <a:lstStyle/>
+          <a:p>
+            <a:pPr marL="177800" indent="-177800">
+              <a:lnSpc>
+                <a:spcPct val="115000"/>
+              </a:lnSpc>
+              <a:spcAft>
+                <a:spcPts val="1000"/>
+              </a:spcAft>
+              <a:buSzPct val="100000"/>
+              <a:buChar char="•"/>
+            </a:pPr>
+            <a:r>
+              <a:rPr lang="en-US" sz="1100" dirty="0">
+                <a:solidFill>
+                  <a:srgbClr val="5B6B7A"/>
+                </a:solidFill>
+                <a:latin typeface="Calibri" pitchFamily="34" charset="0"/>
+                <a:ea typeface="Calibri" pitchFamily="34" charset="-122"/>
+                <a:cs typeface="Calibri" pitchFamily="34" charset="-120"/>
+              </a:rPr>
+              <a:t>Витрины: список с владельцами на стороне Д8 + точное число сверх пилотных 4</a:t>
+            </a:r>
+            <a:endParaRPr lang="en-US" sz="1100" dirty="0"/>
+          </a:p>
+          <a:p>
+            <a:pPr marL="177800" indent="-177800">
+              <a:lnSpc>
+                <a:spcPct val="115000"/>
+              </a:lnSpc>
+              <a:spcAft>
+                <a:spcPts val="1000"/>
+              </a:spcAft>
+              <a:buSzPct val="100000"/>
+              <a:buChar char="•"/>
+            </a:pPr>
+            <a:r>
+              <a:rPr lang="en-US" sz="1100" dirty="0">
+                <a:solidFill>
+                  <a:srgbClr val="5B6B7A"/>
+                </a:solidFill>
+                <a:latin typeface="Calibri" pitchFamily="34" charset="0"/>
+                <a:ea typeface="Calibri" pitchFamily="34" charset="-122"/>
+                <a:cs typeface="Calibri" pitchFamily="34" charset="-120"/>
+              </a:rPr>
+              <a:t>API шины: система-источник, формат, ответственный за контракт</a:t>
+            </a:r>
+            <a:endParaRPr lang="en-US" sz="1100" dirty="0"/>
+          </a:p>
+          <a:p>
+            <a:pPr marL="177800" indent="-177800">
+              <a:lnSpc>
+                <a:spcPct val="115000"/>
+              </a:lnSpc>
+              <a:spcAft>
+                <a:spcPts val="1000"/>
+              </a:spcAft>
+              <a:buSzPct val="100000"/>
+              <a:buChar char="•"/>
+            </a:pPr>
+            <a:r>
+              <a:rPr lang="en-US" sz="1100" dirty="0">
+                <a:solidFill>
+                  <a:srgbClr val="5B6B7A"/>
+                </a:solidFill>
+                <a:latin typeface="Calibri" pitchFamily="34" charset="0"/>
+                <a:ea typeface="Calibri" pitchFamily="34" charset="-122"/>
+                <a:cs typeface="Calibri" pitchFamily="34" charset="-120"/>
+              </a:rPr>
+              <a:t>КХД: расширяется ли периметр хранилища, или остаётся как в пилоте</a:t>
+            </a:r>
+            <a:endParaRPr lang="en-US" sz="1100" dirty="0"/>
+          </a:p>
+          <a:p>
+            <a:pPr marL="177800" indent="-177800">
+              <a:lnSpc>
+                <a:spcPct val="115000"/>
+              </a:lnSpc>
+              <a:spcAft>
+                <a:spcPts val="1000"/>
+              </a:spcAft>
+              <a:buSzPct val="100000"/>
+              <a:buChar char="•"/>
+            </a:pPr>
+            <a:r>
+              <a:rPr lang="en-US" sz="1100" dirty="0">
+                <a:solidFill>
+                  <a:srgbClr val="5B6B7A"/>
+                </a:solidFill>
+                <a:latin typeface="Calibri" pitchFamily="34" charset="0"/>
+                <a:ea typeface="Calibri" pitchFamily="34" charset="-122"/>
+                <a:cs typeface="Calibri" pitchFamily="34" charset="-120"/>
+              </a:rPr>
+              <a:t>Пользователи и роли: кто получит доступ к расширенным данным</a:t>
+            </a:r>
+            <a:endParaRPr lang="en-US" sz="1100" dirty="0"/>
+          </a:p>
+        </p:txBody>
+      </p:sp>
+      <p:sp>
+        <p:nvSpPr>
+          <p:cNvPr id="13" name="Shape 11"/>
+          <p:cNvSpPr/>
+          <p:nvPr/>
+        </p:nvSpPr>
+        <p:spPr>
+          <a:xfrm>
+            <a:off x="8138160" y="1691640"/>
+            <a:ext cx="3520440" cy="4526280"/>
+          </a:xfrm>
+          <a:prstGeom prst="roundRect">
+            <a:avLst>
+              <a:gd name="adj" fmla="val 1558"/>
+            </a:avLst>
+          </a:prstGeom>
+          <a:solidFill>
+            <a:srgbClr val="F4F6F7"/>
+          </a:solidFill>
+          <a:ln w="9525">
+            <a:solidFill>
+              <a:srgbClr val="D8DEE2"/>
+            </a:solidFill>
+            <a:prstDash val="solid"/>
+          </a:ln>
+        </p:spPr>
+      </p:sp>
+      <p:sp>
+        <p:nvSpPr>
+          <p:cNvPr id="14" name="Text 12"/>
+          <p:cNvSpPr txBox="1"/>
+          <p:nvPr/>
+        </p:nvSpPr>
+        <p:spPr>
+          <a:xfrm>
+            <a:off x="8339328" y="1874520"/>
+            <a:ext cx="3118104" cy="256032"/>
+          </a:xfrm>
+          <a:prstGeom prst="rect">
+            <a:avLst/>
+          </a:prstGeom>
+          <a:noFill/>
+          <a:ln/>
+        </p:spPr>
+        <p:txBody>
+          <a:bodyPr wrap="square" lIns="0" tIns="0" rIns="0" bIns="0" rtlCol="0" anchor="ctr"/>
+          <a:lstStyle/>
+          <a:p>
+            <a:pPr indent="0" marL="0">
+              <a:buNone/>
+            </a:pPr>
+            <a:r>
+              <a:rPr lang="en-US" sz="1000" b="1" spc="100" kern="0" dirty="0">
+                <a:solidFill>
+                  <a:srgbClr val="C97A1A"/>
+                </a:solidFill>
+                <a:latin typeface="Calibri" pitchFamily="34" charset="0"/>
+                <a:ea typeface="Calibri" pitchFamily="34" charset="-122"/>
+                <a:cs typeface="Calibri" pitchFamily="34" charset="-120"/>
+              </a:rPr>
+              <a:t>ОТКРЫТО</a:t>
+            </a:r>
+            <a:endParaRPr lang="en-US" sz="1000" dirty="0"/>
+          </a:p>
+        </p:txBody>
+      </p:sp>
+      <p:sp>
+        <p:nvSpPr>
+          <p:cNvPr id="15" name="Text 13"/>
+          <p:cNvSpPr txBox="1"/>
+          <p:nvPr/>
+        </p:nvSpPr>
+        <p:spPr>
+          <a:xfrm>
+            <a:off x="8339328" y="2148840"/>
+            <a:ext cx="3118104" cy="594360"/>
+          </a:xfrm>
+          <a:prstGeom prst="rect">
+            <a:avLst/>
+          </a:prstGeom>
+          <a:noFill/>
+          <a:ln/>
+        </p:spPr>
+        <p:txBody>
+          <a:bodyPr wrap="square" lIns="0" tIns="0" rIns="0" bIns="0" rtlCol="0" anchor="ctr"/>
+          <a:lstStyle/>
+          <a:p>
+            <a:pPr indent="0" marL="0">
+              <a:lnSpc>
+                <a:spcPct val="105000"/>
+              </a:lnSpc>
+              <a:buNone/>
+            </a:pPr>
+            <a:r>
+              <a:rPr lang="en-US" sz="1550" b="1" dirty="0">
+                <a:solidFill>
+                  <a:srgbClr val="1A2733"/>
+                </a:solidFill>
+                <a:latin typeface="Cambria" pitchFamily="34" charset="0"/>
+                <a:ea typeface="Cambria" pitchFamily="34" charset="-122"/>
+                <a:cs typeface="Cambria" pitchFamily="34" charset="-120"/>
+              </a:rPr>
+              <a:t>Волна 3+ — направление не определено</a:t>
+            </a:r>
+            <a:endParaRPr lang="en-US" sz="1550" dirty="0"/>
+          </a:p>
+        </p:txBody>
+      </p:sp>
+      <p:sp>
+        <p:nvSpPr>
+          <p:cNvPr id="16" name="Text 14"/>
+          <p:cNvSpPr txBox="1"/>
+          <p:nvPr/>
+        </p:nvSpPr>
+        <p:spPr>
+          <a:xfrm>
+            <a:off x="8339328" y="2834640"/>
+            <a:ext cx="3118104" cy="3200400"/>
+          </a:xfrm>
+          <a:prstGeom prst="rect">
+            <a:avLst/>
+          </a:prstGeom>
+          <a:noFill/>
+          <a:ln/>
+        </p:spPr>
+        <p:txBody>
+          <a:bodyPr wrap="square" lIns="0" tIns="0" rIns="0" bIns="0" rtlCol="0" anchor="t"/>
+          <a:lstStyle/>
+          <a:p>
+            <a:pPr marL="177800" indent="-177800">
+              <a:lnSpc>
+                <a:spcPct val="115000"/>
+              </a:lnSpc>
+              <a:spcAft>
+                <a:spcPts val="1000"/>
+              </a:spcAft>
+              <a:buSzPct val="100000"/>
+              <a:buChar char="•"/>
+            </a:pPr>
+            <a:r>
+              <a:rPr lang="en-US" sz="1100" dirty="0">
+                <a:solidFill>
+                  <a:srgbClr val="5B6B7A"/>
+                </a:solidFill>
+                <a:latin typeface="Calibri" pitchFamily="34" charset="0"/>
+                <a:ea typeface="Calibri" pitchFamily="34" charset="-122"/>
+                <a:cs typeface="Calibri" pitchFamily="34" charset="-120"/>
+              </a:rPr>
+              <a:t>Кандидаты: роллаут по ролям, динамические права, источники вне пилота</a:t>
+            </a:r>
+            <a:endParaRPr lang="en-US" sz="1100" dirty="0"/>
+          </a:p>
+          <a:p>
+            <a:pPr marL="177800" indent="-177800">
+              <a:lnSpc>
+                <a:spcPct val="115000"/>
+              </a:lnSpc>
+              <a:spcAft>
+                <a:spcPts val="1000"/>
+              </a:spcAft>
+              <a:buSzPct val="100000"/>
+              <a:buChar char="•"/>
+            </a:pPr>
+            <a:r>
+              <a:rPr lang="en-US" sz="1100" dirty="0">
+                <a:solidFill>
+                  <a:srgbClr val="5B6B7A"/>
+                </a:solidFill>
+                <a:latin typeface="Calibri" pitchFamily="34" charset="0"/>
+                <a:ea typeface="Calibri" pitchFamily="34" charset="-122"/>
+                <a:cs typeface="Calibri" pitchFamily="34" charset="-120"/>
+              </a:rPr>
+              <a:t>Реальная оргструктура: подразделения/роли с числом пользователей — факт, не гипотеза из мастер-ТЗ</a:t>
+            </a:r>
+            <a:endParaRPr lang="en-US" sz="1100" dirty="0"/>
+          </a:p>
+          <a:p>
+            <a:pPr marL="177800" indent="-177800">
+              <a:lnSpc>
+                <a:spcPct val="115000"/>
+              </a:lnSpc>
+              <a:spcAft>
+                <a:spcPts val="1000"/>
+              </a:spcAft>
+              <a:buSzPct val="100000"/>
+              <a:buChar char="•"/>
+            </a:pPr>
+            <a:r>
+              <a:rPr lang="en-US" sz="1100" dirty="0">
+                <a:solidFill>
+                  <a:srgbClr val="5B6B7A"/>
+                </a:solidFill>
+                <a:latin typeface="Calibri" pitchFamily="34" charset="0"/>
+                <a:ea typeface="Calibri" pitchFamily="34" charset="-122"/>
+                <a:cs typeface="Calibri" pitchFamily="34" charset="-120"/>
+              </a:rPr>
+              <a:t>Как только определится — тот же набор: данные, витрины/коллекции, пользователи, роли</a:t>
+            </a:r>
+            <a:endParaRPr lang="en-US" sz="1100" dirty="0"/>
+          </a:p>
+        </p:txBody>
+      </p:sp>
+      <p:sp>
+        <p:nvSpPr>
+          <p:cNvPr id="17" name="Text 15"/>
+          <p:cNvSpPr txBox="1"/>
+          <p:nvPr/>
+        </p:nvSpPr>
+        <p:spPr>
+          <a:xfrm>
+            <a:off x="10881360" y="6473952"/>
+            <a:ext cx="822960" cy="274320"/>
+          </a:xfrm>
+          <a:prstGeom prst="rect">
+            <a:avLst/>
+          </a:prstGeom>
+          <a:noFill/>
+          <a:ln/>
+        </p:spPr>
+        <p:txBody>
+          <a:bodyPr wrap="square" lIns="0" tIns="0" rIns="0" bIns="0" rtlCol="0" anchor="ctr"/>
+          <a:lstStyle/>
+          <a:p>
+            <a:pPr algn="r" indent="0" marL="0">
+              <a:buNone/>
+            </a:pPr>
+            <a:r>
+              <a:rPr lang="en-US" sz="1050" dirty="0">
+                <a:solidFill>
+                  <a:srgbClr val="8C99A6"/>
+                </a:solidFill>
+                <a:latin typeface="Calibri" pitchFamily="34" charset="0"/>
+                <a:ea typeface="Calibri" pitchFamily="34" charset="-122"/>
+                <a:cs typeface="Calibri" pitchFamily="34" charset="-120"/>
+              </a:rPr>
+              <a:t>5 / 6</a:t>
+            </a:r>
+            <a:endParaRPr lang="en-US" sz="1050" dirty="0"/>
+          </a:p>
+        </p:txBody>
+      </p:sp>
+    </p:spTree>
+  </p:cSld>
+  <p:clrMapOvr>
+    <a:masterClrMapping/>
+  </p:clrMapOvr>
+</p:sld>
+</file>
+
+<file path=ppt/slides/slide6.xml><?xml version="1.0" encoding="utf-8"?>
+<p:sld xmlns:a="http://schemas.openxmlformats.org/drawingml/2006/main" xmlns:r="http://schemas.openxmlformats.org/officeDocument/2006/relationships" xmlns:p="http://schemas.openxmlformats.org/presentationml/2006/main">
+  <p:cSld name="Slide 6">
+    <p:spTree>
+      <p:nvGrpSpPr>
+        <p:cNvPr id="1" name=""/>
+        <p:cNvGrpSpPr/>
+        <p:nvPr/>
+      </p:nvGrpSpPr>
+      <p:grpSpPr>
+        <a:xfrm>
+          <a:off x="0" y="0"/>
+          <a:ext cx="0" cy="0"/>
+          <a:chOff x="0" y="0"/>
+          <a:chExt cx="0" cy="0"/>
+        </a:xfrm>
+      </p:grpSpPr>
+      <p:sp>
+        <p:nvSpPr>
+          <p:cNvPr id="2" name="Text 0"/>
+          <p:cNvSpPr txBox="1"/>
+          <p:nvPr/>
+        </p:nvSpPr>
+        <p:spPr>
+          <a:xfrm>
+            <a:off x="502920" y="320040"/>
+            <a:ext cx="11155680" cy="274320"/>
+          </a:xfrm>
+          <a:prstGeom prst="rect">
+            <a:avLst/>
+          </a:prstGeom>
+          <a:noFill/>
+          <a:ln/>
+        </p:spPr>
+        <p:txBody>
+          <a:bodyPr wrap="square" lIns="0" tIns="0" rIns="0" bIns="0" rtlCol="0" anchor="ctr"/>
+          <a:lstStyle/>
+          <a:p>
+            <a:pPr indent="0" marL="0">
+              <a:buNone/>
+            </a:pPr>
+            <a:r>
+              <a:rPr lang="en-US" sz="1100" b="1" spc="120" kern="0" dirty="0">
+                <a:solidFill>
+                  <a:srgbClr val="0E7C86"/>
+                </a:solidFill>
+                <a:latin typeface="Calibri" pitchFamily="34" charset="0"/>
+                <a:ea typeface="Calibri" pitchFamily="34" charset="-122"/>
+                <a:cs typeface="Calibri" pitchFamily="34" charset="-120"/>
+              </a:rPr>
+              <a:t>4 · НАШИ ВОПРОСЫ · ПО ПОЖЕЛАНИЯМ ЗАКАЗЧИКА</a:t>
             </a:r>
             <a:endParaRPr lang="en-US" sz="1100" dirty="0"/>
           </a:p>
@@ -10015,7 +8546,7 @@
       </p:sp>
       <p:graphicFrame>
         <p:nvGraphicFramePr>
-          <p:cNvPr id="6" name="Table 0"/>
+          <p:cNvPr id="7" name="Table 0"/>
           <p:cNvGraphicFramePr>
             <a:graphicFrameLocks noGrp="1"/>
           </p:cNvGraphicFramePr>
@@ -10597,7 +9128,7 @@
                           <a:ea typeface="Calibri" pitchFamily="34" charset="-122"/>
                           <a:cs typeface="Calibri" pitchFamily="34" charset="-120"/>
                         </a:rPr>
-                        <a:t>Права доступа — переход на динамическую модель (через API)? Какая система — источник истины?</a:t>
+                        <a:t>Права доступа через API — где они хранятся и администрируются: внутри платформы, или платформа лишь получает их из внешней системы и применяет? Если второе — какая система источник и как часто обновляется?</a:t>
                       </a:r>
                       <a:endParaRPr lang="en-US" sz="1050" dirty="0">
                         <a:latin typeface="Calibri" charset="0"/>
@@ -10924,7 +9455,7 @@
                           <a:ea typeface="Calibri" pitchFamily="34" charset="-122"/>
                           <a:cs typeface="Calibri" pitchFamily="34" charset="-120"/>
                         </a:rPr>
-                        <a:t>Кастомизация выбора источников — нужно ли включать/отключать источники в чате и через API?</a:t>
+                        <a:t>Кастомизация выбора источников — что имеется в виду: (а) подключение/отключение целых каталогов данных внутри домена, или (б) выбор персоны/профиля с отдельным набором прав? Разный объём реализации.</a:t>
                       </a:r>
                       <a:endParaRPr lang="en-US" sz="1050" dirty="0">
                         <a:latin typeface="Calibri" charset="0"/>
@@ -11251,7 +9782,7 @@
                           <a:ea typeface="Calibri" pitchFamily="34" charset="-122"/>
                           <a:cs typeface="Calibri" pitchFamily="34" charset="-120"/>
                         </a:rPr>
-                        <a:t>Персональные RAG-коллекции — нужна ли пользователям возможность создавать свои и делиться?</a:t>
+                        <a:t>Персональные RAG-коллекции — механика: фильтр по документам внутри существующей коллекции, или отдельная новая коллекция, которую пользователь создаёт и наполняет сам?</a:t>
                       </a:r>
                       <a:endParaRPr lang="en-US" sz="1050" dirty="0">
                         <a:latin typeface="Calibri" charset="0"/>
@@ -11578,7 +10109,7 @@
                           <a:ea typeface="Calibri" pitchFamily="34" charset="-122"/>
                           <a:cs typeface="Calibri" pitchFamily="34" charset="-120"/>
                         </a:rPr>
-                        <a:t>Упрощение заведения пользователей — что именно неудобно сейчас? Нужен конкретный сценарий.</a:t>
+                        <a:t>Упрощение заведения пользователей — нужен конкретный кейс: как должен выглядеть процесс пошагово (кто инициирует, какие поля, кто подтверждает).</a:t>
                       </a:r>
                       <a:endParaRPr lang="en-US" sz="1050" dirty="0">
                         <a:latin typeface="Calibri" charset="0"/>
@@ -11729,7 +10260,7 @@
                 <a:ea typeface="Calibri" pitchFamily="34" charset="-122"/>
                 <a:cs typeface="Calibri" pitchFamily="34" charset="-120"/>
               </a:rPr>
-              <a:t>5 / 5</a:t>
+              <a:t>6 / 6</a:t>
             </a:r>
             <a:endParaRPr lang="en-US" sz="1050" dirty="0"/>
           </a:p>

--- a/docs/presentations/case-27-proekt-d8-skoup-i-voprosy.pptx
+++ b/docs/presentations/case-27-proekt-d8-skoup-i-voprosy.pptx
@@ -1995,7 +1995,7 @@
                 <a:ea typeface="Calibri" pitchFamily="34" charset="-122"/>
                 <a:cs typeface="Calibri" pitchFamily="34" charset="-120"/>
               </a:rPr>
-              <a:t>1 · АРХИТЕКТУРА ПИЛОТА</a:t>
+              <a:t>1 · ПРОГРАММА ПРОЕКТА</a:t>
             </a:r>
             <a:endParaRPr lang="en-US" sz="1100" dirty="0"/>
           </a:p>
@@ -2034,7 +2034,7 @@
                 <a:ea typeface="Cambria" pitchFamily="34" charset="-122"/>
                 <a:cs typeface="Cambria" pitchFamily="34" charset="-120"/>
               </a:rPr>
-              <a:t>Источники и получатели данных</a:t>
+              <a:t>Этапы и волны — цели, сроки, статус</a:t>
             </a:r>
             <a:endParaRPr lang="en-US" sz="2700" dirty="0"/>
           </a:p>
@@ -2073,39 +2073,1932 @@
                 <a:ea typeface="Calibri" pitchFamily="34" charset="-122"/>
                 <a:cs typeface="Calibri" pitchFamily="34" charset="-120"/>
               </a:rPr>
-              <a:t>Платформа «Камерата» по фактам пилота (не проектный скоуп) — расширение на следующих слайдах</a:t>
+              <a:t>Сроки ориентировочные — без реального прецедента (Кейс 2 методики)</a:t>
             </a:r>
             <a:endParaRPr lang="en-US" sz="1300" dirty="0"/>
           </a:p>
         </p:txBody>
       </p:sp>
-      <p:pic>
-        <p:nvPicPr>
-          <p:cNvPr id="5" name="Image 0" descr="arhitektura-pilota.png">    </p:cNvPr>
-          <p:cNvPicPr>
-            <a:picLocks noChangeAspect="1"/>
-          </p:cNvPicPr>
+      <p:graphicFrame>
+        <p:nvGraphicFramePr>
+          <p:cNvPr id="3" name="Table 0"/>
+          <p:cNvGraphicFramePr>
+            <a:graphicFrameLocks noGrp="1"/>
+          </p:cNvGraphicFramePr>
+          <p:nvPr>
+            <p:extLst>
+              <p:ext uri="{D42A27DB-BD31-4B8C-83A1-F6EECF244321}">
+                <p14:modId xmlns:p14="http://schemas.microsoft.com/office/powerpoint/2010/main" val="1579011935"/>
+              </p:ext>
+            </p:extLst>
+          </p:nvPr>
+        </p:nvGraphicFramePr>
+        <p:xfrm>
+          <a:off x="502920" y="1691640"/>
+          <a:ext cx="11155680" cy="4480560"/>
+        </p:xfrm>
+        <a:graphic>
+          <a:graphicData uri="http://schemas.openxmlformats.org/drawingml/2006/table">
+            <a:tbl>
+              <a:tblPr/>
+              <a:tblGrid>
+                <a:gridCol w="1463040"/>
+                <a:gridCol w="5120640"/>
+                <a:gridCol w="2743200"/>
+                <a:gridCol w="1828800"/>
+              </a:tblGrid>
+              <a:tr h="640080">
+                <a:tc>
+                  <a:txBody>
+                    <a:bodyPr/>
+                    <a:lstStyle/>
+                    <a:p>
+                      <a:pPr indent="0" marL="0">
+                        <a:buNone/>
+                      </a:pPr>
+                      <a:r>
+                        <a:rPr lang="en-US" sz="1150" b="1" dirty="0">
+                          <a:solidFill>
+                            <a:srgbClr val="FFFFFF"/>
+                          </a:solidFill>
+                          <a:latin typeface="Calibri" pitchFamily="34" charset="0"/>
+                          <a:ea typeface="Calibri" pitchFamily="34" charset="-122"/>
+                          <a:cs typeface="Calibri" pitchFamily="34" charset="-120"/>
+                        </a:rPr>
+                        <a:t>Этап</a:t>
+                      </a:r>
+                      <a:endParaRPr lang="en-US" sz="1150" dirty="0">
+                        <a:latin typeface="Calibri" charset="0"/>
+                        <a:ea typeface="Calibri" charset="0"/>
+                        <a:cs typeface="Calibri" charset="0"/>
+                      </a:endParaRPr>
+                    </a:p>
+                  </a:txBody>
+                  <a:tcPr marL="127000" marR="127000" marT="76200" marB="76200" anchor="ctr">
+                    <a:lnL w="9525" cap="flat" cmpd="sng" algn="ctr">
+                      <a:solidFill>
+                        <a:srgbClr val="D8DEE2"/>
+                      </a:solidFill>
+                      <a:prstDash val="solid"/>
+                      <a:round/>
+                      <a:headEnd type="none" w="med" len="med"/>
+                      <a:tailEnd type="none" w="med" len="med"/>
+                    </a:lnL>
+                    <a:lnR w="9525" cap="flat" cmpd="sng" algn="ctr">
+                      <a:solidFill>
+                        <a:srgbClr val="D8DEE2"/>
+                      </a:solidFill>
+                      <a:prstDash val="solid"/>
+                      <a:round/>
+                      <a:headEnd type="none" w="med" len="med"/>
+                      <a:tailEnd type="none" w="med" len="med"/>
+                    </a:lnR>
+                    <a:lnT w="9525" cap="flat" cmpd="sng" algn="ctr">
+                      <a:solidFill>
+                        <a:srgbClr val="D8DEE2"/>
+                      </a:solidFill>
+                      <a:prstDash val="solid"/>
+                      <a:round/>
+                      <a:headEnd type="none" w="med" len="med"/>
+                      <a:tailEnd type="none" w="med" len="med"/>
+                    </a:lnT>
+                    <a:lnB w="9525" cap="flat" cmpd="sng" algn="ctr">
+                      <a:solidFill>
+                        <a:srgbClr val="D8DEE2"/>
+                      </a:solidFill>
+                      <a:prstDash val="solid"/>
+                      <a:round/>
+                      <a:headEnd type="none" w="med" len="med"/>
+                      <a:tailEnd type="none" w="med" len="med"/>
+                    </a:lnB>
+                    <a:solidFill>
+                      <a:srgbClr val="1A2733"/>
+                    </a:solidFill>
+                  </a:tcPr>
+                </a:tc>
+                <a:tc>
+                  <a:txBody>
+                    <a:bodyPr/>
+                    <a:lstStyle/>
+                    <a:p>
+                      <a:pPr indent="0" marL="0">
+                        <a:buNone/>
+                      </a:pPr>
+                      <a:r>
+                        <a:rPr lang="en-US" sz="1150" b="1" dirty="0">
+                          <a:solidFill>
+                            <a:srgbClr val="FFFFFF"/>
+                          </a:solidFill>
+                          <a:latin typeface="Calibri" pitchFamily="34" charset="0"/>
+                          <a:ea typeface="Calibri" pitchFamily="34" charset="-122"/>
+                          <a:cs typeface="Calibri" pitchFamily="34" charset="-120"/>
+                        </a:rPr>
+                        <a:t>Содержание</a:t>
+                      </a:r>
+                      <a:endParaRPr lang="en-US" sz="1150" dirty="0">
+                        <a:latin typeface="Calibri" charset="0"/>
+                        <a:ea typeface="Calibri" charset="0"/>
+                        <a:cs typeface="Calibri" charset="0"/>
+                      </a:endParaRPr>
+                    </a:p>
+                  </a:txBody>
+                  <a:tcPr marL="127000" marR="127000" marT="76200" marB="76200" anchor="ctr">
+                    <a:lnL w="9525" cap="flat" cmpd="sng" algn="ctr">
+                      <a:solidFill>
+                        <a:srgbClr val="D8DEE2"/>
+                      </a:solidFill>
+                      <a:prstDash val="solid"/>
+                      <a:round/>
+                      <a:headEnd type="none" w="med" len="med"/>
+                      <a:tailEnd type="none" w="med" len="med"/>
+                    </a:lnL>
+                    <a:lnR w="9525" cap="flat" cmpd="sng" algn="ctr">
+                      <a:solidFill>
+                        <a:srgbClr val="D8DEE2"/>
+                      </a:solidFill>
+                      <a:prstDash val="solid"/>
+                      <a:round/>
+                      <a:headEnd type="none" w="med" len="med"/>
+                      <a:tailEnd type="none" w="med" len="med"/>
+                    </a:lnR>
+                    <a:lnT w="9525" cap="flat" cmpd="sng" algn="ctr">
+                      <a:solidFill>
+                        <a:srgbClr val="D8DEE2"/>
+                      </a:solidFill>
+                      <a:prstDash val="solid"/>
+                      <a:round/>
+                      <a:headEnd type="none" w="med" len="med"/>
+                      <a:tailEnd type="none" w="med" len="med"/>
+                    </a:lnT>
+                    <a:lnB w="9525" cap="flat" cmpd="sng" algn="ctr">
+                      <a:solidFill>
+                        <a:srgbClr val="D8DEE2"/>
+                      </a:solidFill>
+                      <a:prstDash val="solid"/>
+                      <a:round/>
+                      <a:headEnd type="none" w="med" len="med"/>
+                      <a:tailEnd type="none" w="med" len="med"/>
+                    </a:lnB>
+                    <a:solidFill>
+                      <a:srgbClr val="1A2733"/>
+                    </a:solidFill>
+                  </a:tcPr>
+                </a:tc>
+                <a:tc>
+                  <a:txBody>
+                    <a:bodyPr/>
+                    <a:lstStyle/>
+                    <a:p>
+                      <a:pPr indent="0" marL="0">
+                        <a:buNone/>
+                      </a:pPr>
+                      <a:r>
+                        <a:rPr lang="en-US" sz="1150" b="1" dirty="0">
+                          <a:solidFill>
+                            <a:srgbClr val="FFFFFF"/>
+                          </a:solidFill>
+                          <a:latin typeface="Calibri" pitchFamily="34" charset="0"/>
+                          <a:ea typeface="Calibri" pitchFamily="34" charset="-122"/>
+                          <a:cs typeface="Calibri" pitchFamily="34" charset="-120"/>
+                        </a:rPr>
+                        <a:t>Примерный срок</a:t>
+                      </a:r>
+                      <a:endParaRPr lang="en-US" sz="1150" dirty="0">
+                        <a:latin typeface="Calibri" charset="0"/>
+                        <a:ea typeface="Calibri" charset="0"/>
+                        <a:cs typeface="Calibri" charset="0"/>
+                      </a:endParaRPr>
+                    </a:p>
+                  </a:txBody>
+                  <a:tcPr marL="127000" marR="127000" marT="76200" marB="76200" anchor="ctr">
+                    <a:lnL w="9525" cap="flat" cmpd="sng" algn="ctr">
+                      <a:solidFill>
+                        <a:srgbClr val="D8DEE2"/>
+                      </a:solidFill>
+                      <a:prstDash val="solid"/>
+                      <a:round/>
+                      <a:headEnd type="none" w="med" len="med"/>
+                      <a:tailEnd type="none" w="med" len="med"/>
+                    </a:lnL>
+                    <a:lnR w="9525" cap="flat" cmpd="sng" algn="ctr">
+                      <a:solidFill>
+                        <a:srgbClr val="D8DEE2"/>
+                      </a:solidFill>
+                      <a:prstDash val="solid"/>
+                      <a:round/>
+                      <a:headEnd type="none" w="med" len="med"/>
+                      <a:tailEnd type="none" w="med" len="med"/>
+                    </a:lnR>
+                    <a:lnT w="9525" cap="flat" cmpd="sng" algn="ctr">
+                      <a:solidFill>
+                        <a:srgbClr val="D8DEE2"/>
+                      </a:solidFill>
+                      <a:prstDash val="solid"/>
+                      <a:round/>
+                      <a:headEnd type="none" w="med" len="med"/>
+                      <a:tailEnd type="none" w="med" len="med"/>
+                    </a:lnT>
+                    <a:lnB w="9525" cap="flat" cmpd="sng" algn="ctr">
+                      <a:solidFill>
+                        <a:srgbClr val="D8DEE2"/>
+                      </a:solidFill>
+                      <a:prstDash val="solid"/>
+                      <a:round/>
+                      <a:headEnd type="none" w="med" len="med"/>
+                      <a:tailEnd type="none" w="med" len="med"/>
+                    </a:lnB>
+                    <a:solidFill>
+                      <a:srgbClr val="1A2733"/>
+                    </a:solidFill>
+                  </a:tcPr>
+                </a:tc>
+                <a:tc>
+                  <a:txBody>
+                    <a:bodyPr/>
+                    <a:lstStyle/>
+                    <a:p>
+                      <a:pPr algn="ctr" indent="0" marL="0">
+                        <a:buNone/>
+                      </a:pPr>
+                      <a:r>
+                        <a:rPr lang="en-US" sz="1150" b="1" dirty="0">
+                          <a:solidFill>
+                            <a:srgbClr val="FFFFFF"/>
+                          </a:solidFill>
+                          <a:latin typeface="Calibri" pitchFamily="34" charset="0"/>
+                          <a:ea typeface="Calibri" pitchFamily="34" charset="-122"/>
+                          <a:cs typeface="Calibri" pitchFamily="34" charset="-120"/>
+                        </a:rPr>
+                        <a:t>Статус</a:t>
+                      </a:r>
+                      <a:endParaRPr lang="en-US" sz="1150" dirty="0">
+                        <a:latin typeface="Calibri" charset="0"/>
+                        <a:ea typeface="Calibri" charset="0"/>
+                        <a:cs typeface="Calibri" charset="0"/>
+                      </a:endParaRPr>
+                    </a:p>
+                  </a:txBody>
+                  <a:tcPr marL="127000" marR="127000" marT="76200" marB="76200" anchor="ctr">
+                    <a:lnL w="9525" cap="flat" cmpd="sng" algn="ctr">
+                      <a:solidFill>
+                        <a:srgbClr val="D8DEE2"/>
+                      </a:solidFill>
+                      <a:prstDash val="solid"/>
+                      <a:round/>
+                      <a:headEnd type="none" w="med" len="med"/>
+                      <a:tailEnd type="none" w="med" len="med"/>
+                    </a:lnL>
+                    <a:lnR w="9525" cap="flat" cmpd="sng" algn="ctr">
+                      <a:solidFill>
+                        <a:srgbClr val="D8DEE2"/>
+                      </a:solidFill>
+                      <a:prstDash val="solid"/>
+                      <a:round/>
+                      <a:headEnd type="none" w="med" len="med"/>
+                      <a:tailEnd type="none" w="med" len="med"/>
+                    </a:lnR>
+                    <a:lnT w="9525" cap="flat" cmpd="sng" algn="ctr">
+                      <a:solidFill>
+                        <a:srgbClr val="D8DEE2"/>
+                      </a:solidFill>
+                      <a:prstDash val="solid"/>
+                      <a:round/>
+                      <a:headEnd type="none" w="med" len="med"/>
+                      <a:tailEnd type="none" w="med" len="med"/>
+                    </a:lnT>
+                    <a:lnB w="9525" cap="flat" cmpd="sng" algn="ctr">
+                      <a:solidFill>
+                        <a:srgbClr val="D8DEE2"/>
+                      </a:solidFill>
+                      <a:prstDash val="solid"/>
+                      <a:round/>
+                      <a:headEnd type="none" w="med" len="med"/>
+                      <a:tailEnd type="none" w="med" len="med"/>
+                    </a:lnB>
+                    <a:solidFill>
+                      <a:srgbClr val="1A2733"/>
+                    </a:solidFill>
+                  </a:tcPr>
+                </a:tc>
+              </a:tr>
+              <a:tr h="640080">
+                <a:tc>
+                  <a:txBody>
+                    <a:bodyPr/>
+                    <a:lstStyle/>
+                    <a:p>
+                      <a:pPr indent="0" marL="0">
+                        <a:buNone/>
+                      </a:pPr>
+                      <a:r>
+                        <a:rPr lang="en-US" sz="1250" b="1" dirty="0">
+                          <a:solidFill>
+                            <a:srgbClr val="0A5F67"/>
+                          </a:solidFill>
+                          <a:latin typeface="Calibri" pitchFamily="34" charset="0"/>
+                          <a:ea typeface="Calibri" pitchFamily="34" charset="-122"/>
+                          <a:cs typeface="Calibri" pitchFamily="34" charset="-120"/>
+                        </a:rPr>
+                        <a:t>П2</a:t>
+                      </a:r>
+                      <a:endParaRPr lang="en-US" sz="1250" dirty="0">
+                        <a:latin typeface="Calibri" charset="0"/>
+                        <a:ea typeface="Calibri" charset="0"/>
+                        <a:cs typeface="Calibri" charset="0"/>
+                      </a:endParaRPr>
+                    </a:p>
+                  </a:txBody>
+                  <a:tcPr marL="127000" marR="127000" marT="76200" marB="76200" anchor="ctr">
+                    <a:lnL w="9525" cap="flat" cmpd="sng" algn="ctr">
+                      <a:solidFill>
+                        <a:srgbClr val="D8DEE2"/>
+                      </a:solidFill>
+                      <a:prstDash val="solid"/>
+                      <a:round/>
+                      <a:headEnd type="none" w="med" len="med"/>
+                      <a:tailEnd type="none" w="med" len="med"/>
+                    </a:lnL>
+                    <a:lnR w="9525" cap="flat" cmpd="sng" algn="ctr">
+                      <a:solidFill>
+                        <a:srgbClr val="D8DEE2"/>
+                      </a:solidFill>
+                      <a:prstDash val="solid"/>
+                      <a:round/>
+                      <a:headEnd type="none" w="med" len="med"/>
+                      <a:tailEnd type="none" w="med" len="med"/>
+                    </a:lnR>
+                    <a:lnT w="9525" cap="flat" cmpd="sng" algn="ctr">
+                      <a:solidFill>
+                        <a:srgbClr val="D8DEE2"/>
+                      </a:solidFill>
+                      <a:prstDash val="solid"/>
+                      <a:round/>
+                      <a:headEnd type="none" w="med" len="med"/>
+                      <a:tailEnd type="none" w="med" len="med"/>
+                    </a:lnT>
+                    <a:lnB w="9525" cap="flat" cmpd="sng" algn="ctr">
+                      <a:solidFill>
+                        <a:srgbClr val="D8DEE2"/>
+                      </a:solidFill>
+                      <a:prstDash val="solid"/>
+                      <a:round/>
+                      <a:headEnd type="none" w="med" len="med"/>
+                      <a:tailEnd type="none" w="med" len="med"/>
+                    </a:lnB>
+                  </a:tcPr>
+                </a:tc>
+                <a:tc>
+                  <a:txBody>
+                    <a:bodyPr/>
+                    <a:lstStyle/>
+                    <a:p>
+                      <a:pPr indent="0" marL="0">
+                        <a:buNone/>
+                      </a:pPr>
+                      <a:r>
+                        <a:rPr lang="en-US" sz="1250" dirty="0">
+                          <a:solidFill>
+                            <a:srgbClr val="1A2733"/>
+                          </a:solidFill>
+                          <a:latin typeface="Calibri" pitchFamily="34" charset="0"/>
+                          <a:ea typeface="Calibri" pitchFamily="34" charset="-122"/>
+                          <a:cs typeface="Calibri" pitchFamily="34" charset="-120"/>
+                        </a:rPr>
+                        <a:t>Целевая архитектура и карта волн</a:t>
+                      </a:r>
+                      <a:endParaRPr lang="en-US" sz="1250" dirty="0">
+                        <a:latin typeface="Calibri" charset="0"/>
+                        <a:ea typeface="Calibri" charset="0"/>
+                        <a:cs typeface="Calibri" charset="0"/>
+                      </a:endParaRPr>
+                    </a:p>
+                  </a:txBody>
+                  <a:tcPr marL="127000" marR="127000" marT="76200" marB="76200" anchor="ctr">
+                    <a:lnL w="9525" cap="flat" cmpd="sng" algn="ctr">
+                      <a:solidFill>
+                        <a:srgbClr val="D8DEE2"/>
+                      </a:solidFill>
+                      <a:prstDash val="solid"/>
+                      <a:round/>
+                      <a:headEnd type="none" w="med" len="med"/>
+                      <a:tailEnd type="none" w="med" len="med"/>
+                    </a:lnL>
+                    <a:lnR w="9525" cap="flat" cmpd="sng" algn="ctr">
+                      <a:solidFill>
+                        <a:srgbClr val="D8DEE2"/>
+                      </a:solidFill>
+                      <a:prstDash val="solid"/>
+                      <a:round/>
+                      <a:headEnd type="none" w="med" len="med"/>
+                      <a:tailEnd type="none" w="med" len="med"/>
+                    </a:lnR>
+                    <a:lnT w="9525" cap="flat" cmpd="sng" algn="ctr">
+                      <a:solidFill>
+                        <a:srgbClr val="D8DEE2"/>
+                      </a:solidFill>
+                      <a:prstDash val="solid"/>
+                      <a:round/>
+                      <a:headEnd type="none" w="med" len="med"/>
+                      <a:tailEnd type="none" w="med" len="med"/>
+                    </a:lnT>
+                    <a:lnB w="9525" cap="flat" cmpd="sng" algn="ctr">
+                      <a:solidFill>
+                        <a:srgbClr val="D8DEE2"/>
+                      </a:solidFill>
+                      <a:prstDash val="solid"/>
+                      <a:round/>
+                      <a:headEnd type="none" w="med" len="med"/>
+                      <a:tailEnd type="none" w="med" len="med"/>
+                    </a:lnB>
+                  </a:tcPr>
+                </a:tc>
+                <a:tc>
+                  <a:txBody>
+                    <a:bodyPr/>
+                    <a:lstStyle/>
+                    <a:p>
+                      <a:pPr indent="0" marL="0">
+                        <a:buNone/>
+                      </a:pPr>
+                      <a:r>
+                        <a:rPr lang="en-US" sz="1250" dirty="0">
+                          <a:solidFill>
+                            <a:srgbClr val="5B6B7A"/>
+                          </a:solidFill>
+                          <a:latin typeface="Calibri" pitchFamily="34" charset="0"/>
+                          <a:ea typeface="Calibri" pitchFamily="34" charset="-122"/>
+                          <a:cs typeface="Calibri" pitchFamily="34" charset="-120"/>
+                        </a:rPr>
+                        <a:t>1–2 недели</a:t>
+                      </a:r>
+                      <a:endParaRPr lang="en-US" sz="1250" dirty="0">
+                        <a:latin typeface="Calibri" charset="0"/>
+                        <a:ea typeface="Calibri" charset="0"/>
+                        <a:cs typeface="Calibri" charset="0"/>
+                      </a:endParaRPr>
+                    </a:p>
+                  </a:txBody>
+                  <a:tcPr marL="127000" marR="127000" marT="76200" marB="76200" anchor="ctr">
+                    <a:lnL w="9525" cap="flat" cmpd="sng" algn="ctr">
+                      <a:solidFill>
+                        <a:srgbClr val="D8DEE2"/>
+                      </a:solidFill>
+                      <a:prstDash val="solid"/>
+                      <a:round/>
+                      <a:headEnd type="none" w="med" len="med"/>
+                      <a:tailEnd type="none" w="med" len="med"/>
+                    </a:lnL>
+                    <a:lnR w="9525" cap="flat" cmpd="sng" algn="ctr">
+                      <a:solidFill>
+                        <a:srgbClr val="D8DEE2"/>
+                      </a:solidFill>
+                      <a:prstDash val="solid"/>
+                      <a:round/>
+                      <a:headEnd type="none" w="med" len="med"/>
+                      <a:tailEnd type="none" w="med" len="med"/>
+                    </a:lnR>
+                    <a:lnT w="9525" cap="flat" cmpd="sng" algn="ctr">
+                      <a:solidFill>
+                        <a:srgbClr val="D8DEE2"/>
+                      </a:solidFill>
+                      <a:prstDash val="solid"/>
+                      <a:round/>
+                      <a:headEnd type="none" w="med" len="med"/>
+                      <a:tailEnd type="none" w="med" len="med"/>
+                    </a:lnT>
+                    <a:lnB w="9525" cap="flat" cmpd="sng" algn="ctr">
+                      <a:solidFill>
+                        <a:srgbClr val="D8DEE2"/>
+                      </a:solidFill>
+                      <a:prstDash val="solid"/>
+                      <a:round/>
+                      <a:headEnd type="none" w="med" len="med"/>
+                      <a:tailEnd type="none" w="med" len="med"/>
+                    </a:lnB>
+                  </a:tcPr>
+                </a:tc>
+                <a:tc>
+                  <a:txBody>
+                    <a:bodyPr/>
+                    <a:lstStyle/>
+                    <a:p>
+                      <a:pPr algn="ctr" indent="0" marL="0">
+                        <a:buNone/>
+                      </a:pPr>
+                      <a:r>
+                        <a:rPr lang="en-US" sz="1200" b="1" dirty="0">
+                          <a:solidFill>
+                            <a:srgbClr val="5B6B7A"/>
+                          </a:solidFill>
+                          <a:latin typeface="Calibri" pitchFamily="34" charset="0"/>
+                          <a:ea typeface="Calibri" pitchFamily="34" charset="-122"/>
+                          <a:cs typeface="Calibri" pitchFamily="34" charset="-120"/>
+                        </a:rPr>
+                        <a:t>Не начато</a:t>
+                      </a:r>
+                      <a:endParaRPr lang="en-US" sz="1200" dirty="0">
+                        <a:latin typeface="Calibri" charset="0"/>
+                        <a:ea typeface="Calibri" charset="0"/>
+                        <a:cs typeface="Calibri" charset="0"/>
+                      </a:endParaRPr>
+                    </a:p>
+                  </a:txBody>
+                  <a:tcPr marL="127000" marR="127000" marT="76200" marB="76200" anchor="ctr">
+                    <a:lnL w="9525" cap="flat" cmpd="sng" algn="ctr">
+                      <a:solidFill>
+                        <a:srgbClr val="D8DEE2"/>
+                      </a:solidFill>
+                      <a:prstDash val="solid"/>
+                      <a:round/>
+                      <a:headEnd type="none" w="med" len="med"/>
+                      <a:tailEnd type="none" w="med" len="med"/>
+                    </a:lnL>
+                    <a:lnR w="9525" cap="flat" cmpd="sng" algn="ctr">
+                      <a:solidFill>
+                        <a:srgbClr val="D8DEE2"/>
+                      </a:solidFill>
+                      <a:prstDash val="solid"/>
+                      <a:round/>
+                      <a:headEnd type="none" w="med" len="med"/>
+                      <a:tailEnd type="none" w="med" len="med"/>
+                    </a:lnR>
+                    <a:lnT w="9525" cap="flat" cmpd="sng" algn="ctr">
+                      <a:solidFill>
+                        <a:srgbClr val="D8DEE2"/>
+                      </a:solidFill>
+                      <a:prstDash val="solid"/>
+                      <a:round/>
+                      <a:headEnd type="none" w="med" len="med"/>
+                      <a:tailEnd type="none" w="med" len="med"/>
+                    </a:lnT>
+                    <a:lnB w="9525" cap="flat" cmpd="sng" algn="ctr">
+                      <a:solidFill>
+                        <a:srgbClr val="D8DEE2"/>
+                      </a:solidFill>
+                      <a:prstDash val="solid"/>
+                      <a:round/>
+                      <a:headEnd type="none" w="med" len="med"/>
+                      <a:tailEnd type="none" w="med" len="med"/>
+                    </a:lnB>
+                  </a:tcPr>
+                </a:tc>
+              </a:tr>
+              <a:tr h="640080">
+                <a:tc>
+                  <a:txBody>
+                    <a:bodyPr/>
+                    <a:lstStyle/>
+                    <a:p>
+                      <a:pPr indent="0" marL="0">
+                        <a:buNone/>
+                      </a:pPr>
+                      <a:r>
+                        <a:rPr lang="en-US" sz="1250" b="1" dirty="0">
+                          <a:solidFill>
+                            <a:srgbClr val="0A5F67"/>
+                          </a:solidFill>
+                          <a:latin typeface="Calibri" pitchFamily="34" charset="0"/>
+                          <a:ea typeface="Calibri" pitchFamily="34" charset="-122"/>
+                          <a:cs typeface="Calibri" pitchFamily="34" charset="-120"/>
+                        </a:rPr>
+                        <a:t>Волна 1</a:t>
+                      </a:r>
+                      <a:endParaRPr lang="en-US" sz="1250" dirty="0">
+                        <a:latin typeface="Calibri" charset="0"/>
+                        <a:ea typeface="Calibri" charset="0"/>
+                        <a:cs typeface="Calibri" charset="0"/>
+                      </a:endParaRPr>
+                    </a:p>
+                  </a:txBody>
+                  <a:tcPr marL="127000" marR="127000" marT="76200" marB="76200" anchor="ctr">
+                    <a:lnL w="9525" cap="flat" cmpd="sng" algn="ctr">
+                      <a:solidFill>
+                        <a:srgbClr val="D8DEE2"/>
+                      </a:solidFill>
+                      <a:prstDash val="solid"/>
+                      <a:round/>
+                      <a:headEnd type="none" w="med" len="med"/>
+                      <a:tailEnd type="none" w="med" len="med"/>
+                    </a:lnL>
+                    <a:lnR w="9525" cap="flat" cmpd="sng" algn="ctr">
+                      <a:solidFill>
+                        <a:srgbClr val="D8DEE2"/>
+                      </a:solidFill>
+                      <a:prstDash val="solid"/>
+                      <a:round/>
+                      <a:headEnd type="none" w="med" len="med"/>
+                      <a:tailEnd type="none" w="med" len="med"/>
+                    </a:lnR>
+                    <a:lnT w="9525" cap="flat" cmpd="sng" algn="ctr">
+                      <a:solidFill>
+                        <a:srgbClr val="D8DEE2"/>
+                      </a:solidFill>
+                      <a:prstDash val="solid"/>
+                      <a:round/>
+                      <a:headEnd type="none" w="med" len="med"/>
+                      <a:tailEnd type="none" w="med" len="med"/>
+                    </a:lnT>
+                    <a:lnB w="9525" cap="flat" cmpd="sng" algn="ctr">
+                      <a:solidFill>
+                        <a:srgbClr val="D8DEE2"/>
+                      </a:solidFill>
+                      <a:prstDash val="solid"/>
+                      <a:round/>
+                      <a:headEnd type="none" w="med" len="med"/>
+                      <a:tailEnd type="none" w="med" len="med"/>
+                    </a:lnB>
+                  </a:tcPr>
+                </a:tc>
+                <a:tc>
+                  <a:txBody>
+                    <a:bodyPr/>
+                    <a:lstStyle/>
+                    <a:p>
+                      <a:pPr indent="0" marL="0">
+                        <a:buNone/>
+                      </a:pPr>
+                      <a:r>
+                        <a:rPr lang="en-US" sz="1250" dirty="0">
+                          <a:solidFill>
+                            <a:srgbClr val="1A2733"/>
+                          </a:solidFill>
+                          <a:latin typeface="Calibri" pitchFamily="34" charset="0"/>
+                          <a:ea typeface="Calibri" pitchFamily="34" charset="-122"/>
+                          <a:cs typeface="Calibri" pitchFamily="34" charset="-120"/>
+                        </a:rPr>
+                        <a:t>RAG-документы</a:t>
+                      </a:r>
+                      <a:endParaRPr lang="en-US" sz="1250" dirty="0">
+                        <a:latin typeface="Calibri" charset="0"/>
+                        <a:ea typeface="Calibri" charset="0"/>
+                        <a:cs typeface="Calibri" charset="0"/>
+                      </a:endParaRPr>
+                    </a:p>
+                  </a:txBody>
+                  <a:tcPr marL="127000" marR="127000" marT="76200" marB="76200" anchor="ctr">
+                    <a:lnL w="9525" cap="flat" cmpd="sng" algn="ctr">
+                      <a:solidFill>
+                        <a:srgbClr val="D8DEE2"/>
+                      </a:solidFill>
+                      <a:prstDash val="solid"/>
+                      <a:round/>
+                      <a:headEnd type="none" w="med" len="med"/>
+                      <a:tailEnd type="none" w="med" len="med"/>
+                    </a:lnL>
+                    <a:lnR w="9525" cap="flat" cmpd="sng" algn="ctr">
+                      <a:solidFill>
+                        <a:srgbClr val="D8DEE2"/>
+                      </a:solidFill>
+                      <a:prstDash val="solid"/>
+                      <a:round/>
+                      <a:headEnd type="none" w="med" len="med"/>
+                      <a:tailEnd type="none" w="med" len="med"/>
+                    </a:lnR>
+                    <a:lnT w="9525" cap="flat" cmpd="sng" algn="ctr">
+                      <a:solidFill>
+                        <a:srgbClr val="D8DEE2"/>
+                      </a:solidFill>
+                      <a:prstDash val="solid"/>
+                      <a:round/>
+                      <a:headEnd type="none" w="med" len="med"/>
+                      <a:tailEnd type="none" w="med" len="med"/>
+                    </a:lnT>
+                    <a:lnB w="9525" cap="flat" cmpd="sng" algn="ctr">
+                      <a:solidFill>
+                        <a:srgbClr val="D8DEE2"/>
+                      </a:solidFill>
+                      <a:prstDash val="solid"/>
+                      <a:round/>
+                      <a:headEnd type="none" w="med" len="med"/>
+                      <a:tailEnd type="none" w="med" len="med"/>
+                    </a:lnB>
+                  </a:tcPr>
+                </a:tc>
+                <a:tc>
+                  <a:txBody>
+                    <a:bodyPr/>
+                    <a:lstStyle/>
+                    <a:p>
+                      <a:pPr indent="0" marL="0">
+                        <a:buNone/>
+                      </a:pPr>
+                      <a:r>
+                        <a:rPr lang="en-US" sz="1250" dirty="0">
+                          <a:solidFill>
+                            <a:srgbClr val="5B6B7A"/>
+                          </a:solidFill>
+                          <a:latin typeface="Calibri" pitchFamily="34" charset="0"/>
+                          <a:ea typeface="Calibri" pitchFamily="34" charset="-122"/>
+                          <a:cs typeface="Calibri" pitchFamily="34" charset="-120"/>
+                        </a:rPr>
+                        <a:t>≈2–4 недели</a:t>
+                      </a:r>
+                      <a:endParaRPr lang="en-US" sz="1250" dirty="0">
+                        <a:latin typeface="Calibri" charset="0"/>
+                        <a:ea typeface="Calibri" charset="0"/>
+                        <a:cs typeface="Calibri" charset="0"/>
+                      </a:endParaRPr>
+                    </a:p>
+                  </a:txBody>
+                  <a:tcPr marL="127000" marR="127000" marT="76200" marB="76200" anchor="ctr">
+                    <a:lnL w="9525" cap="flat" cmpd="sng" algn="ctr">
+                      <a:solidFill>
+                        <a:srgbClr val="D8DEE2"/>
+                      </a:solidFill>
+                      <a:prstDash val="solid"/>
+                      <a:round/>
+                      <a:headEnd type="none" w="med" len="med"/>
+                      <a:tailEnd type="none" w="med" len="med"/>
+                    </a:lnL>
+                    <a:lnR w="9525" cap="flat" cmpd="sng" algn="ctr">
+                      <a:solidFill>
+                        <a:srgbClr val="D8DEE2"/>
+                      </a:solidFill>
+                      <a:prstDash val="solid"/>
+                      <a:round/>
+                      <a:headEnd type="none" w="med" len="med"/>
+                      <a:tailEnd type="none" w="med" len="med"/>
+                    </a:lnR>
+                    <a:lnT w="9525" cap="flat" cmpd="sng" algn="ctr">
+                      <a:solidFill>
+                        <a:srgbClr val="D8DEE2"/>
+                      </a:solidFill>
+                      <a:prstDash val="solid"/>
+                      <a:round/>
+                      <a:headEnd type="none" w="med" len="med"/>
+                      <a:tailEnd type="none" w="med" len="med"/>
+                    </a:lnT>
+                    <a:lnB w="9525" cap="flat" cmpd="sng" algn="ctr">
+                      <a:solidFill>
+                        <a:srgbClr val="D8DEE2"/>
+                      </a:solidFill>
+                      <a:prstDash val="solid"/>
+                      <a:round/>
+                      <a:headEnd type="none" w="med" len="med"/>
+                      <a:tailEnd type="none" w="med" len="med"/>
+                    </a:lnB>
+                  </a:tcPr>
+                </a:tc>
+                <a:tc>
+                  <a:txBody>
+                    <a:bodyPr/>
+                    <a:lstStyle/>
+                    <a:p>
+                      <a:pPr algn="ctr" indent="0" marL="0">
+                        <a:buNone/>
+                      </a:pPr>
+                      <a:r>
+                        <a:rPr lang="en-US" sz="1200" b="1" dirty="0">
+                          <a:solidFill>
+                            <a:srgbClr val="C97A1A"/>
+                          </a:solidFill>
+                          <a:latin typeface="Calibri" pitchFamily="34" charset="0"/>
+                          <a:ea typeface="Calibri" pitchFamily="34" charset="-122"/>
+                          <a:cs typeface="Calibri" pitchFamily="34" charset="-120"/>
+                        </a:rPr>
+                        <a:t>Ожидает уточнения</a:t>
+                      </a:r>
+                      <a:endParaRPr lang="en-US" sz="1200" dirty="0">
+                        <a:latin typeface="Calibri" charset="0"/>
+                        <a:ea typeface="Calibri" charset="0"/>
+                        <a:cs typeface="Calibri" charset="0"/>
+                      </a:endParaRPr>
+                    </a:p>
+                  </a:txBody>
+                  <a:tcPr marL="127000" marR="127000" marT="76200" marB="76200" anchor="ctr">
+                    <a:lnL w="9525" cap="flat" cmpd="sng" algn="ctr">
+                      <a:solidFill>
+                        <a:srgbClr val="D8DEE2"/>
+                      </a:solidFill>
+                      <a:prstDash val="solid"/>
+                      <a:round/>
+                      <a:headEnd type="none" w="med" len="med"/>
+                      <a:tailEnd type="none" w="med" len="med"/>
+                    </a:lnL>
+                    <a:lnR w="9525" cap="flat" cmpd="sng" algn="ctr">
+                      <a:solidFill>
+                        <a:srgbClr val="D8DEE2"/>
+                      </a:solidFill>
+                      <a:prstDash val="solid"/>
+                      <a:round/>
+                      <a:headEnd type="none" w="med" len="med"/>
+                      <a:tailEnd type="none" w="med" len="med"/>
+                    </a:lnR>
+                    <a:lnT w="9525" cap="flat" cmpd="sng" algn="ctr">
+                      <a:solidFill>
+                        <a:srgbClr val="D8DEE2"/>
+                      </a:solidFill>
+                      <a:prstDash val="solid"/>
+                      <a:round/>
+                      <a:headEnd type="none" w="med" len="med"/>
+                      <a:tailEnd type="none" w="med" len="med"/>
+                    </a:lnT>
+                    <a:lnB w="9525" cap="flat" cmpd="sng" algn="ctr">
+                      <a:solidFill>
+                        <a:srgbClr val="D8DEE2"/>
+                      </a:solidFill>
+                      <a:prstDash val="solid"/>
+                      <a:round/>
+                      <a:headEnd type="none" w="med" len="med"/>
+                      <a:tailEnd type="none" w="med" len="med"/>
+                    </a:lnB>
+                  </a:tcPr>
+                </a:tc>
+              </a:tr>
+              <a:tr h="640080">
+                <a:tc>
+                  <a:txBody>
+                    <a:bodyPr/>
+                    <a:lstStyle/>
+                    <a:p>
+                      <a:pPr indent="0" marL="0">
+                        <a:buNone/>
+                      </a:pPr>
+                      <a:r>
+                        <a:rPr lang="en-US" sz="1250" b="1" dirty="0">
+                          <a:solidFill>
+                            <a:srgbClr val="0A5F67"/>
+                          </a:solidFill>
+                          <a:latin typeface="Calibri" pitchFamily="34" charset="0"/>
+                          <a:ea typeface="Calibri" pitchFamily="34" charset="-122"/>
+                          <a:cs typeface="Calibri" pitchFamily="34" charset="-120"/>
+                        </a:rPr>
+                        <a:t>Волна 2</a:t>
+                      </a:r>
+                      <a:endParaRPr lang="en-US" sz="1250" dirty="0">
+                        <a:latin typeface="Calibri" charset="0"/>
+                        <a:ea typeface="Calibri" charset="0"/>
+                        <a:cs typeface="Calibri" charset="0"/>
+                      </a:endParaRPr>
+                    </a:p>
+                  </a:txBody>
+                  <a:tcPr marL="127000" marR="127000" marT="76200" marB="76200" anchor="ctr">
+                    <a:lnL w="9525" cap="flat" cmpd="sng" algn="ctr">
+                      <a:solidFill>
+                        <a:srgbClr val="D8DEE2"/>
+                      </a:solidFill>
+                      <a:prstDash val="solid"/>
+                      <a:round/>
+                      <a:headEnd type="none" w="med" len="med"/>
+                      <a:tailEnd type="none" w="med" len="med"/>
+                    </a:lnL>
+                    <a:lnR w="9525" cap="flat" cmpd="sng" algn="ctr">
+                      <a:solidFill>
+                        <a:srgbClr val="D8DEE2"/>
+                      </a:solidFill>
+                      <a:prstDash val="solid"/>
+                      <a:round/>
+                      <a:headEnd type="none" w="med" len="med"/>
+                      <a:tailEnd type="none" w="med" len="med"/>
+                    </a:lnR>
+                    <a:lnT w="9525" cap="flat" cmpd="sng" algn="ctr">
+                      <a:solidFill>
+                        <a:srgbClr val="D8DEE2"/>
+                      </a:solidFill>
+                      <a:prstDash val="solid"/>
+                      <a:round/>
+                      <a:headEnd type="none" w="med" len="med"/>
+                      <a:tailEnd type="none" w="med" len="med"/>
+                    </a:lnT>
+                    <a:lnB w="9525" cap="flat" cmpd="sng" algn="ctr">
+                      <a:solidFill>
+                        <a:srgbClr val="D8DEE2"/>
+                      </a:solidFill>
+                      <a:prstDash val="solid"/>
+                      <a:round/>
+                      <a:headEnd type="none" w="med" len="med"/>
+                      <a:tailEnd type="none" w="med" len="med"/>
+                    </a:lnB>
+                  </a:tcPr>
+                </a:tc>
+                <a:tc>
+                  <a:txBody>
+                    <a:bodyPr/>
+                    <a:lstStyle/>
+                    <a:p>
+                      <a:pPr indent="0" marL="0">
+                        <a:buNone/>
+                      </a:pPr>
+                      <a:r>
+                        <a:rPr lang="en-US" sz="1250" dirty="0">
+                          <a:solidFill>
+                            <a:srgbClr val="1A2733"/>
+                          </a:solidFill>
+                          <a:latin typeface="Calibri" pitchFamily="34" charset="0"/>
+                          <a:ea typeface="Calibri" pitchFamily="34" charset="-122"/>
+                          <a:cs typeface="Calibri" pitchFamily="34" charset="-120"/>
+                        </a:rPr>
+                        <a:t>Расширение КХД и ESB</a:t>
+                      </a:r>
+                      <a:endParaRPr lang="en-US" sz="1250" dirty="0">
+                        <a:latin typeface="Calibri" charset="0"/>
+                        <a:ea typeface="Calibri" charset="0"/>
+                        <a:cs typeface="Calibri" charset="0"/>
+                      </a:endParaRPr>
+                    </a:p>
+                  </a:txBody>
+                  <a:tcPr marL="127000" marR="127000" marT="76200" marB="76200" anchor="ctr">
+                    <a:lnL w="9525" cap="flat" cmpd="sng" algn="ctr">
+                      <a:solidFill>
+                        <a:srgbClr val="D8DEE2"/>
+                      </a:solidFill>
+                      <a:prstDash val="solid"/>
+                      <a:round/>
+                      <a:headEnd type="none" w="med" len="med"/>
+                      <a:tailEnd type="none" w="med" len="med"/>
+                    </a:lnL>
+                    <a:lnR w="9525" cap="flat" cmpd="sng" algn="ctr">
+                      <a:solidFill>
+                        <a:srgbClr val="D8DEE2"/>
+                      </a:solidFill>
+                      <a:prstDash val="solid"/>
+                      <a:round/>
+                      <a:headEnd type="none" w="med" len="med"/>
+                      <a:tailEnd type="none" w="med" len="med"/>
+                    </a:lnR>
+                    <a:lnT w="9525" cap="flat" cmpd="sng" algn="ctr">
+                      <a:solidFill>
+                        <a:srgbClr val="D8DEE2"/>
+                      </a:solidFill>
+                      <a:prstDash val="solid"/>
+                      <a:round/>
+                      <a:headEnd type="none" w="med" len="med"/>
+                      <a:tailEnd type="none" w="med" len="med"/>
+                    </a:lnT>
+                    <a:lnB w="9525" cap="flat" cmpd="sng" algn="ctr">
+                      <a:solidFill>
+                        <a:srgbClr val="D8DEE2"/>
+                      </a:solidFill>
+                      <a:prstDash val="solid"/>
+                      <a:round/>
+                      <a:headEnd type="none" w="med" len="med"/>
+                      <a:tailEnd type="none" w="med" len="med"/>
+                    </a:lnB>
+                  </a:tcPr>
+                </a:tc>
+                <a:tc>
+                  <a:txBody>
+                    <a:bodyPr/>
+                    <a:lstStyle/>
+                    <a:p>
+                      <a:pPr indent="0" marL="0">
+                        <a:buNone/>
+                      </a:pPr>
+                      <a:r>
+                        <a:rPr lang="en-US" sz="1250" dirty="0">
+                          <a:solidFill>
+                            <a:srgbClr val="5B6B7A"/>
+                          </a:solidFill>
+                          <a:latin typeface="Calibri" pitchFamily="34" charset="0"/>
+                          <a:ea typeface="Calibri" pitchFamily="34" charset="-122"/>
+                          <a:cs typeface="Calibri" pitchFamily="34" charset="-120"/>
+                        </a:rPr>
+                        <a:t>≈4–6 недель</a:t>
+                      </a:r>
+                      <a:endParaRPr lang="en-US" sz="1250" dirty="0">
+                        <a:latin typeface="Calibri" charset="0"/>
+                        <a:ea typeface="Calibri" charset="0"/>
+                        <a:cs typeface="Calibri" charset="0"/>
+                      </a:endParaRPr>
+                    </a:p>
+                  </a:txBody>
+                  <a:tcPr marL="127000" marR="127000" marT="76200" marB="76200" anchor="ctr">
+                    <a:lnL w="9525" cap="flat" cmpd="sng" algn="ctr">
+                      <a:solidFill>
+                        <a:srgbClr val="D8DEE2"/>
+                      </a:solidFill>
+                      <a:prstDash val="solid"/>
+                      <a:round/>
+                      <a:headEnd type="none" w="med" len="med"/>
+                      <a:tailEnd type="none" w="med" len="med"/>
+                    </a:lnL>
+                    <a:lnR w="9525" cap="flat" cmpd="sng" algn="ctr">
+                      <a:solidFill>
+                        <a:srgbClr val="D8DEE2"/>
+                      </a:solidFill>
+                      <a:prstDash val="solid"/>
+                      <a:round/>
+                      <a:headEnd type="none" w="med" len="med"/>
+                      <a:tailEnd type="none" w="med" len="med"/>
+                    </a:lnR>
+                    <a:lnT w="9525" cap="flat" cmpd="sng" algn="ctr">
+                      <a:solidFill>
+                        <a:srgbClr val="D8DEE2"/>
+                      </a:solidFill>
+                      <a:prstDash val="solid"/>
+                      <a:round/>
+                      <a:headEnd type="none" w="med" len="med"/>
+                      <a:tailEnd type="none" w="med" len="med"/>
+                    </a:lnT>
+                    <a:lnB w="9525" cap="flat" cmpd="sng" algn="ctr">
+                      <a:solidFill>
+                        <a:srgbClr val="D8DEE2"/>
+                      </a:solidFill>
+                      <a:prstDash val="solid"/>
+                      <a:round/>
+                      <a:headEnd type="none" w="med" len="med"/>
+                      <a:tailEnd type="none" w="med" len="med"/>
+                    </a:lnB>
+                  </a:tcPr>
+                </a:tc>
+                <a:tc>
+                  <a:txBody>
+                    <a:bodyPr/>
+                    <a:lstStyle/>
+                    <a:p>
+                      <a:pPr algn="ctr" indent="0" marL="0">
+                        <a:buNone/>
+                      </a:pPr>
+                      <a:r>
+                        <a:rPr lang="en-US" sz="1200" b="1" dirty="0">
+                          <a:solidFill>
+                            <a:srgbClr val="C97A1A"/>
+                          </a:solidFill>
+                          <a:latin typeface="Calibri" pitchFamily="34" charset="0"/>
+                          <a:ea typeface="Calibri" pitchFamily="34" charset="-122"/>
+                          <a:cs typeface="Calibri" pitchFamily="34" charset="-120"/>
+                        </a:rPr>
+                        <a:t>Ожидает уточнения</a:t>
+                      </a:r>
+                      <a:endParaRPr lang="en-US" sz="1200" dirty="0">
+                        <a:latin typeface="Calibri" charset="0"/>
+                        <a:ea typeface="Calibri" charset="0"/>
+                        <a:cs typeface="Calibri" charset="0"/>
+                      </a:endParaRPr>
+                    </a:p>
+                  </a:txBody>
+                  <a:tcPr marL="127000" marR="127000" marT="76200" marB="76200" anchor="ctr">
+                    <a:lnL w="9525" cap="flat" cmpd="sng" algn="ctr">
+                      <a:solidFill>
+                        <a:srgbClr val="D8DEE2"/>
+                      </a:solidFill>
+                      <a:prstDash val="solid"/>
+                      <a:round/>
+                      <a:headEnd type="none" w="med" len="med"/>
+                      <a:tailEnd type="none" w="med" len="med"/>
+                    </a:lnL>
+                    <a:lnR w="9525" cap="flat" cmpd="sng" algn="ctr">
+                      <a:solidFill>
+                        <a:srgbClr val="D8DEE2"/>
+                      </a:solidFill>
+                      <a:prstDash val="solid"/>
+                      <a:round/>
+                      <a:headEnd type="none" w="med" len="med"/>
+                      <a:tailEnd type="none" w="med" len="med"/>
+                    </a:lnR>
+                    <a:lnT w="9525" cap="flat" cmpd="sng" algn="ctr">
+                      <a:solidFill>
+                        <a:srgbClr val="D8DEE2"/>
+                      </a:solidFill>
+                      <a:prstDash val="solid"/>
+                      <a:round/>
+                      <a:headEnd type="none" w="med" len="med"/>
+                      <a:tailEnd type="none" w="med" len="med"/>
+                    </a:lnT>
+                    <a:lnB w="9525" cap="flat" cmpd="sng" algn="ctr">
+                      <a:solidFill>
+                        <a:srgbClr val="D8DEE2"/>
+                      </a:solidFill>
+                      <a:prstDash val="solid"/>
+                      <a:round/>
+                      <a:headEnd type="none" w="med" len="med"/>
+                      <a:tailEnd type="none" w="med" len="med"/>
+                    </a:lnB>
+                  </a:tcPr>
+                </a:tc>
+              </a:tr>
+              <a:tr h="640080">
+                <a:tc>
+                  <a:txBody>
+                    <a:bodyPr/>
+                    <a:lstStyle/>
+                    <a:p>
+                      <a:pPr indent="0" marL="0">
+                        <a:buNone/>
+                      </a:pPr>
+                      <a:r>
+                        <a:rPr lang="en-US" sz="1250" b="1" dirty="0">
+                          <a:solidFill>
+                            <a:srgbClr val="0A5F67"/>
+                          </a:solidFill>
+                          <a:latin typeface="Calibri" pitchFamily="34" charset="0"/>
+                          <a:ea typeface="Calibri" pitchFamily="34" charset="-122"/>
+                          <a:cs typeface="Calibri" pitchFamily="34" charset="-120"/>
+                        </a:rPr>
+                        <a:t>Волна 3+</a:t>
+                      </a:r>
+                      <a:endParaRPr lang="en-US" sz="1250" dirty="0">
+                        <a:latin typeface="Calibri" charset="0"/>
+                        <a:ea typeface="Calibri" charset="0"/>
+                        <a:cs typeface="Calibri" charset="0"/>
+                      </a:endParaRPr>
+                    </a:p>
+                  </a:txBody>
+                  <a:tcPr marL="127000" marR="127000" marT="76200" marB="76200" anchor="ctr">
+                    <a:lnL w="9525" cap="flat" cmpd="sng" algn="ctr">
+                      <a:solidFill>
+                        <a:srgbClr val="D8DEE2"/>
+                      </a:solidFill>
+                      <a:prstDash val="solid"/>
+                      <a:round/>
+                      <a:headEnd type="none" w="med" len="med"/>
+                      <a:tailEnd type="none" w="med" len="med"/>
+                    </a:lnL>
+                    <a:lnR w="9525" cap="flat" cmpd="sng" algn="ctr">
+                      <a:solidFill>
+                        <a:srgbClr val="D8DEE2"/>
+                      </a:solidFill>
+                      <a:prstDash val="solid"/>
+                      <a:round/>
+                      <a:headEnd type="none" w="med" len="med"/>
+                      <a:tailEnd type="none" w="med" len="med"/>
+                    </a:lnR>
+                    <a:lnT w="9525" cap="flat" cmpd="sng" algn="ctr">
+                      <a:solidFill>
+                        <a:srgbClr val="D8DEE2"/>
+                      </a:solidFill>
+                      <a:prstDash val="solid"/>
+                      <a:round/>
+                      <a:headEnd type="none" w="med" len="med"/>
+                      <a:tailEnd type="none" w="med" len="med"/>
+                    </a:lnT>
+                    <a:lnB w="9525" cap="flat" cmpd="sng" algn="ctr">
+                      <a:solidFill>
+                        <a:srgbClr val="D8DEE2"/>
+                      </a:solidFill>
+                      <a:prstDash val="solid"/>
+                      <a:round/>
+                      <a:headEnd type="none" w="med" len="med"/>
+                      <a:tailEnd type="none" w="med" len="med"/>
+                    </a:lnB>
+                  </a:tcPr>
+                </a:tc>
+                <a:tc>
+                  <a:txBody>
+                    <a:bodyPr/>
+                    <a:lstStyle/>
+                    <a:p>
+                      <a:pPr indent="0" marL="0">
+                        <a:buNone/>
+                      </a:pPr>
+                      <a:r>
+                        <a:rPr lang="en-US" sz="1250" dirty="0">
+                          <a:solidFill>
+                            <a:srgbClr val="1A2733"/>
+                          </a:solidFill>
+                          <a:latin typeface="Calibri" pitchFamily="34" charset="0"/>
+                          <a:ea typeface="Calibri" pitchFamily="34" charset="-122"/>
+                          <a:cs typeface="Calibri" pitchFamily="34" charset="-120"/>
+                        </a:rPr>
+                        <a:t>Не определено</a:t>
+                      </a:r>
+                      <a:endParaRPr lang="en-US" sz="1250" dirty="0">
+                        <a:latin typeface="Calibri" charset="0"/>
+                        <a:ea typeface="Calibri" charset="0"/>
+                        <a:cs typeface="Calibri" charset="0"/>
+                      </a:endParaRPr>
+                    </a:p>
+                  </a:txBody>
+                  <a:tcPr marL="127000" marR="127000" marT="76200" marB="76200" anchor="ctr">
+                    <a:lnL w="9525" cap="flat" cmpd="sng" algn="ctr">
+                      <a:solidFill>
+                        <a:srgbClr val="D8DEE2"/>
+                      </a:solidFill>
+                      <a:prstDash val="solid"/>
+                      <a:round/>
+                      <a:headEnd type="none" w="med" len="med"/>
+                      <a:tailEnd type="none" w="med" len="med"/>
+                    </a:lnL>
+                    <a:lnR w="9525" cap="flat" cmpd="sng" algn="ctr">
+                      <a:solidFill>
+                        <a:srgbClr val="D8DEE2"/>
+                      </a:solidFill>
+                      <a:prstDash val="solid"/>
+                      <a:round/>
+                      <a:headEnd type="none" w="med" len="med"/>
+                      <a:tailEnd type="none" w="med" len="med"/>
+                    </a:lnR>
+                    <a:lnT w="9525" cap="flat" cmpd="sng" algn="ctr">
+                      <a:solidFill>
+                        <a:srgbClr val="D8DEE2"/>
+                      </a:solidFill>
+                      <a:prstDash val="solid"/>
+                      <a:round/>
+                      <a:headEnd type="none" w="med" len="med"/>
+                      <a:tailEnd type="none" w="med" len="med"/>
+                    </a:lnT>
+                    <a:lnB w="9525" cap="flat" cmpd="sng" algn="ctr">
+                      <a:solidFill>
+                        <a:srgbClr val="D8DEE2"/>
+                      </a:solidFill>
+                      <a:prstDash val="solid"/>
+                      <a:round/>
+                      <a:headEnd type="none" w="med" len="med"/>
+                      <a:tailEnd type="none" w="med" len="med"/>
+                    </a:lnB>
+                  </a:tcPr>
+                </a:tc>
+                <a:tc>
+                  <a:txBody>
+                    <a:bodyPr/>
+                    <a:lstStyle/>
+                    <a:p>
+                      <a:pPr indent="0" marL="0">
+                        <a:buNone/>
+                      </a:pPr>
+                      <a:r>
+                        <a:rPr lang="en-US" sz="1250" dirty="0">
+                          <a:solidFill>
+                            <a:srgbClr val="5B6B7A"/>
+                          </a:solidFill>
+                          <a:latin typeface="Calibri" pitchFamily="34" charset="0"/>
+                          <a:ea typeface="Calibri" pitchFamily="34" charset="-122"/>
+                          <a:cs typeface="Calibri" pitchFamily="34" charset="-120"/>
+                        </a:rPr>
+                        <a:t>Не определено</a:t>
+                      </a:r>
+                      <a:endParaRPr lang="en-US" sz="1250" dirty="0">
+                        <a:latin typeface="Calibri" charset="0"/>
+                        <a:ea typeface="Calibri" charset="0"/>
+                        <a:cs typeface="Calibri" charset="0"/>
+                      </a:endParaRPr>
+                    </a:p>
+                  </a:txBody>
+                  <a:tcPr marL="127000" marR="127000" marT="76200" marB="76200" anchor="ctr">
+                    <a:lnL w="9525" cap="flat" cmpd="sng" algn="ctr">
+                      <a:solidFill>
+                        <a:srgbClr val="D8DEE2"/>
+                      </a:solidFill>
+                      <a:prstDash val="solid"/>
+                      <a:round/>
+                      <a:headEnd type="none" w="med" len="med"/>
+                      <a:tailEnd type="none" w="med" len="med"/>
+                    </a:lnL>
+                    <a:lnR w="9525" cap="flat" cmpd="sng" algn="ctr">
+                      <a:solidFill>
+                        <a:srgbClr val="D8DEE2"/>
+                      </a:solidFill>
+                      <a:prstDash val="solid"/>
+                      <a:round/>
+                      <a:headEnd type="none" w="med" len="med"/>
+                      <a:tailEnd type="none" w="med" len="med"/>
+                    </a:lnR>
+                    <a:lnT w="9525" cap="flat" cmpd="sng" algn="ctr">
+                      <a:solidFill>
+                        <a:srgbClr val="D8DEE2"/>
+                      </a:solidFill>
+                      <a:prstDash val="solid"/>
+                      <a:round/>
+                      <a:headEnd type="none" w="med" len="med"/>
+                      <a:tailEnd type="none" w="med" len="med"/>
+                    </a:lnT>
+                    <a:lnB w="9525" cap="flat" cmpd="sng" algn="ctr">
+                      <a:solidFill>
+                        <a:srgbClr val="D8DEE2"/>
+                      </a:solidFill>
+                      <a:prstDash val="solid"/>
+                      <a:round/>
+                      <a:headEnd type="none" w="med" len="med"/>
+                      <a:tailEnd type="none" w="med" len="med"/>
+                    </a:lnB>
+                  </a:tcPr>
+                </a:tc>
+                <a:tc>
+                  <a:txBody>
+                    <a:bodyPr/>
+                    <a:lstStyle/>
+                    <a:p>
+                      <a:pPr algn="ctr" indent="0" marL="0">
+                        <a:buNone/>
+                      </a:pPr>
+                      <a:r>
+                        <a:rPr lang="en-US" sz="1200" b="1" dirty="0">
+                          <a:solidFill>
+                            <a:srgbClr val="C97A1A"/>
+                          </a:solidFill>
+                          <a:latin typeface="Calibri" pitchFamily="34" charset="0"/>
+                          <a:ea typeface="Calibri" pitchFamily="34" charset="-122"/>
+                          <a:cs typeface="Calibri" pitchFamily="34" charset="-120"/>
+                        </a:rPr>
+                        <a:t>Открыто</a:t>
+                      </a:r>
+                      <a:endParaRPr lang="en-US" sz="1200" dirty="0">
+                        <a:latin typeface="Calibri" charset="0"/>
+                        <a:ea typeface="Calibri" charset="0"/>
+                        <a:cs typeface="Calibri" charset="0"/>
+                      </a:endParaRPr>
+                    </a:p>
+                  </a:txBody>
+                  <a:tcPr marL="127000" marR="127000" marT="76200" marB="76200" anchor="ctr">
+                    <a:lnL w="9525" cap="flat" cmpd="sng" algn="ctr">
+                      <a:solidFill>
+                        <a:srgbClr val="D8DEE2"/>
+                      </a:solidFill>
+                      <a:prstDash val="solid"/>
+                      <a:round/>
+                      <a:headEnd type="none" w="med" len="med"/>
+                      <a:tailEnd type="none" w="med" len="med"/>
+                    </a:lnL>
+                    <a:lnR w="9525" cap="flat" cmpd="sng" algn="ctr">
+                      <a:solidFill>
+                        <a:srgbClr val="D8DEE2"/>
+                      </a:solidFill>
+                      <a:prstDash val="solid"/>
+                      <a:round/>
+                      <a:headEnd type="none" w="med" len="med"/>
+                      <a:tailEnd type="none" w="med" len="med"/>
+                    </a:lnR>
+                    <a:lnT w="9525" cap="flat" cmpd="sng" algn="ctr">
+                      <a:solidFill>
+                        <a:srgbClr val="D8DEE2"/>
+                      </a:solidFill>
+                      <a:prstDash val="solid"/>
+                      <a:round/>
+                      <a:headEnd type="none" w="med" len="med"/>
+                      <a:tailEnd type="none" w="med" len="med"/>
+                    </a:lnT>
+                    <a:lnB w="9525" cap="flat" cmpd="sng" algn="ctr">
+                      <a:solidFill>
+                        <a:srgbClr val="D8DEE2"/>
+                      </a:solidFill>
+                      <a:prstDash val="solid"/>
+                      <a:round/>
+                      <a:headEnd type="none" w="med" len="med"/>
+                      <a:tailEnd type="none" w="med" len="med"/>
+                    </a:lnB>
+                  </a:tcPr>
+                </a:tc>
+              </a:tr>
+              <a:tr h="640080">
+                <a:tc>
+                  <a:txBody>
+                    <a:bodyPr/>
+                    <a:lstStyle/>
+                    <a:p>
+                      <a:pPr indent="0" marL="0">
+                        <a:buNone/>
+                      </a:pPr>
+                      <a:r>
+                        <a:rPr lang="en-US" sz="1250" b="1" dirty="0">
+                          <a:solidFill>
+                            <a:srgbClr val="0A5F67"/>
+                          </a:solidFill>
+                          <a:latin typeface="Calibri" pitchFamily="34" charset="0"/>
+                          <a:ea typeface="Calibri" pitchFamily="34" charset="-122"/>
+                          <a:cs typeface="Calibri" pitchFamily="34" charset="-120"/>
+                        </a:rPr>
+                        <a:t>П4</a:t>
+                      </a:r>
+                      <a:endParaRPr lang="en-US" sz="1250" dirty="0">
+                        <a:latin typeface="Calibri" charset="0"/>
+                        <a:ea typeface="Calibri" charset="0"/>
+                        <a:cs typeface="Calibri" charset="0"/>
+                      </a:endParaRPr>
+                    </a:p>
+                  </a:txBody>
+                  <a:tcPr marL="127000" marR="127000" marT="76200" marB="76200" anchor="ctr">
+                    <a:lnL w="9525" cap="flat" cmpd="sng" algn="ctr">
+                      <a:solidFill>
+                        <a:srgbClr val="D8DEE2"/>
+                      </a:solidFill>
+                      <a:prstDash val="solid"/>
+                      <a:round/>
+                      <a:headEnd type="none" w="med" len="med"/>
+                      <a:tailEnd type="none" w="med" len="med"/>
+                    </a:lnL>
+                    <a:lnR w="9525" cap="flat" cmpd="sng" algn="ctr">
+                      <a:solidFill>
+                        <a:srgbClr val="D8DEE2"/>
+                      </a:solidFill>
+                      <a:prstDash val="solid"/>
+                      <a:round/>
+                      <a:headEnd type="none" w="med" len="med"/>
+                      <a:tailEnd type="none" w="med" len="med"/>
+                    </a:lnR>
+                    <a:lnT w="9525" cap="flat" cmpd="sng" algn="ctr">
+                      <a:solidFill>
+                        <a:srgbClr val="D8DEE2"/>
+                      </a:solidFill>
+                      <a:prstDash val="solid"/>
+                      <a:round/>
+                      <a:headEnd type="none" w="med" len="med"/>
+                      <a:tailEnd type="none" w="med" len="med"/>
+                    </a:lnT>
+                    <a:lnB w="9525" cap="flat" cmpd="sng" algn="ctr">
+                      <a:solidFill>
+                        <a:srgbClr val="D8DEE2"/>
+                      </a:solidFill>
+                      <a:prstDash val="solid"/>
+                      <a:round/>
+                      <a:headEnd type="none" w="med" len="med"/>
+                      <a:tailEnd type="none" w="med" len="med"/>
+                    </a:lnB>
+                  </a:tcPr>
+                </a:tc>
+                <a:tc>
+                  <a:txBody>
+                    <a:bodyPr/>
+                    <a:lstStyle/>
+                    <a:p>
+                      <a:pPr indent="0" marL="0">
+                        <a:buNone/>
+                      </a:pPr>
+                      <a:r>
+                        <a:rPr lang="en-US" sz="1250" dirty="0">
+                          <a:solidFill>
+                            <a:srgbClr val="1A2733"/>
+                          </a:solidFill>
+                          <a:latin typeface="Calibri" pitchFamily="34" charset="0"/>
+                          <a:ea typeface="Calibri" pitchFamily="34" charset="-122"/>
+                          <a:cs typeface="Calibri" pitchFamily="34" charset="-120"/>
+                        </a:rPr>
+                        <a:t>Промышленная эксплуатация</a:t>
+                      </a:r>
+                      <a:endParaRPr lang="en-US" sz="1250" dirty="0">
+                        <a:latin typeface="Calibri" charset="0"/>
+                        <a:ea typeface="Calibri" charset="0"/>
+                        <a:cs typeface="Calibri" charset="0"/>
+                      </a:endParaRPr>
+                    </a:p>
+                  </a:txBody>
+                  <a:tcPr marL="127000" marR="127000" marT="76200" marB="76200" anchor="ctr">
+                    <a:lnL w="9525" cap="flat" cmpd="sng" algn="ctr">
+                      <a:solidFill>
+                        <a:srgbClr val="D8DEE2"/>
+                      </a:solidFill>
+                      <a:prstDash val="solid"/>
+                      <a:round/>
+                      <a:headEnd type="none" w="med" len="med"/>
+                      <a:tailEnd type="none" w="med" len="med"/>
+                    </a:lnL>
+                    <a:lnR w="9525" cap="flat" cmpd="sng" algn="ctr">
+                      <a:solidFill>
+                        <a:srgbClr val="D8DEE2"/>
+                      </a:solidFill>
+                      <a:prstDash val="solid"/>
+                      <a:round/>
+                      <a:headEnd type="none" w="med" len="med"/>
+                      <a:tailEnd type="none" w="med" len="med"/>
+                    </a:lnR>
+                    <a:lnT w="9525" cap="flat" cmpd="sng" algn="ctr">
+                      <a:solidFill>
+                        <a:srgbClr val="D8DEE2"/>
+                      </a:solidFill>
+                      <a:prstDash val="solid"/>
+                      <a:round/>
+                      <a:headEnd type="none" w="med" len="med"/>
+                      <a:tailEnd type="none" w="med" len="med"/>
+                    </a:lnT>
+                    <a:lnB w="9525" cap="flat" cmpd="sng" algn="ctr">
+                      <a:solidFill>
+                        <a:srgbClr val="D8DEE2"/>
+                      </a:solidFill>
+                      <a:prstDash val="solid"/>
+                      <a:round/>
+                      <a:headEnd type="none" w="med" len="med"/>
+                      <a:tailEnd type="none" w="med" len="med"/>
+                    </a:lnB>
+                  </a:tcPr>
+                </a:tc>
+                <a:tc>
+                  <a:txBody>
+                    <a:bodyPr/>
+                    <a:lstStyle/>
+                    <a:p>
+                      <a:pPr indent="0" marL="0">
+                        <a:buNone/>
+                      </a:pPr>
+                      <a:r>
+                        <a:rPr lang="en-US" sz="1250" dirty="0">
+                          <a:solidFill>
+                            <a:srgbClr val="5B6B7A"/>
+                          </a:solidFill>
+                          <a:latin typeface="Calibri" pitchFamily="34" charset="0"/>
+                          <a:ea typeface="Calibri" pitchFamily="34" charset="-122"/>
+                          <a:cs typeface="Calibri" pitchFamily="34" charset="-120"/>
+                        </a:rPr>
+                        <a:t>После приёмки волны 2</a:t>
+                      </a:r>
+                      <a:endParaRPr lang="en-US" sz="1250" dirty="0">
+                        <a:latin typeface="Calibri" charset="0"/>
+                        <a:ea typeface="Calibri" charset="0"/>
+                        <a:cs typeface="Calibri" charset="0"/>
+                      </a:endParaRPr>
+                    </a:p>
+                  </a:txBody>
+                  <a:tcPr marL="127000" marR="127000" marT="76200" marB="76200" anchor="ctr">
+                    <a:lnL w="9525" cap="flat" cmpd="sng" algn="ctr">
+                      <a:solidFill>
+                        <a:srgbClr val="D8DEE2"/>
+                      </a:solidFill>
+                      <a:prstDash val="solid"/>
+                      <a:round/>
+                      <a:headEnd type="none" w="med" len="med"/>
+                      <a:tailEnd type="none" w="med" len="med"/>
+                    </a:lnL>
+                    <a:lnR w="9525" cap="flat" cmpd="sng" algn="ctr">
+                      <a:solidFill>
+                        <a:srgbClr val="D8DEE2"/>
+                      </a:solidFill>
+                      <a:prstDash val="solid"/>
+                      <a:round/>
+                      <a:headEnd type="none" w="med" len="med"/>
+                      <a:tailEnd type="none" w="med" len="med"/>
+                    </a:lnR>
+                    <a:lnT w="9525" cap="flat" cmpd="sng" algn="ctr">
+                      <a:solidFill>
+                        <a:srgbClr val="D8DEE2"/>
+                      </a:solidFill>
+                      <a:prstDash val="solid"/>
+                      <a:round/>
+                      <a:headEnd type="none" w="med" len="med"/>
+                      <a:tailEnd type="none" w="med" len="med"/>
+                    </a:lnT>
+                    <a:lnB w="9525" cap="flat" cmpd="sng" algn="ctr">
+                      <a:solidFill>
+                        <a:srgbClr val="D8DEE2"/>
+                      </a:solidFill>
+                      <a:prstDash val="solid"/>
+                      <a:round/>
+                      <a:headEnd type="none" w="med" len="med"/>
+                      <a:tailEnd type="none" w="med" len="med"/>
+                    </a:lnB>
+                  </a:tcPr>
+                </a:tc>
+                <a:tc>
+                  <a:txBody>
+                    <a:bodyPr/>
+                    <a:lstStyle/>
+                    <a:p>
+                      <a:pPr algn="ctr" indent="0" marL="0">
+                        <a:buNone/>
+                      </a:pPr>
+                      <a:r>
+                        <a:rPr lang="en-US" sz="1200" b="1" dirty="0">
+                          <a:solidFill>
+                            <a:srgbClr val="5B6B7A"/>
+                          </a:solidFill>
+                          <a:latin typeface="Calibri" pitchFamily="34" charset="0"/>
+                          <a:ea typeface="Calibri" pitchFamily="34" charset="-122"/>
+                          <a:cs typeface="Calibri" pitchFamily="34" charset="-120"/>
+                        </a:rPr>
+                        <a:t>Не начато</a:t>
+                      </a:r>
+                      <a:endParaRPr lang="en-US" sz="1200" dirty="0">
+                        <a:latin typeface="Calibri" charset="0"/>
+                        <a:ea typeface="Calibri" charset="0"/>
+                        <a:cs typeface="Calibri" charset="0"/>
+                      </a:endParaRPr>
+                    </a:p>
+                  </a:txBody>
+                  <a:tcPr marL="127000" marR="127000" marT="76200" marB="76200" anchor="ctr">
+                    <a:lnL w="9525" cap="flat" cmpd="sng" algn="ctr">
+                      <a:solidFill>
+                        <a:srgbClr val="D8DEE2"/>
+                      </a:solidFill>
+                      <a:prstDash val="solid"/>
+                      <a:round/>
+                      <a:headEnd type="none" w="med" len="med"/>
+                      <a:tailEnd type="none" w="med" len="med"/>
+                    </a:lnL>
+                    <a:lnR w="9525" cap="flat" cmpd="sng" algn="ctr">
+                      <a:solidFill>
+                        <a:srgbClr val="D8DEE2"/>
+                      </a:solidFill>
+                      <a:prstDash val="solid"/>
+                      <a:round/>
+                      <a:headEnd type="none" w="med" len="med"/>
+                      <a:tailEnd type="none" w="med" len="med"/>
+                    </a:lnR>
+                    <a:lnT w="9525" cap="flat" cmpd="sng" algn="ctr">
+                      <a:solidFill>
+                        <a:srgbClr val="D8DEE2"/>
+                      </a:solidFill>
+                      <a:prstDash val="solid"/>
+                      <a:round/>
+                      <a:headEnd type="none" w="med" len="med"/>
+                      <a:tailEnd type="none" w="med" len="med"/>
+                    </a:lnT>
+                    <a:lnB w="9525" cap="flat" cmpd="sng" algn="ctr">
+                      <a:solidFill>
+                        <a:srgbClr val="D8DEE2"/>
+                      </a:solidFill>
+                      <a:prstDash val="solid"/>
+                      <a:round/>
+                      <a:headEnd type="none" w="med" len="med"/>
+                      <a:tailEnd type="none" w="med" len="med"/>
+                    </a:lnB>
+                  </a:tcPr>
+                </a:tc>
+              </a:tr>
+              <a:tr h="640080">
+                <a:tc>
+                  <a:txBody>
+                    <a:bodyPr/>
+                    <a:lstStyle/>
+                    <a:p>
+                      <a:pPr indent="0" marL="0">
+                        <a:buNone/>
+                      </a:pPr>
+                      <a:r>
+                        <a:rPr lang="en-US" sz="1250" b="1" dirty="0">
+                          <a:solidFill>
+                            <a:srgbClr val="0A5F67"/>
+                          </a:solidFill>
+                          <a:latin typeface="Calibri" pitchFamily="34" charset="0"/>
+                          <a:ea typeface="Calibri" pitchFamily="34" charset="-122"/>
+                          <a:cs typeface="Calibri" pitchFamily="34" charset="-120"/>
+                        </a:rPr>
+                        <a:t>П5</a:t>
+                      </a:r>
+                      <a:endParaRPr lang="en-US" sz="1250" dirty="0">
+                        <a:latin typeface="Calibri" charset="0"/>
+                        <a:ea typeface="Calibri" charset="0"/>
+                        <a:cs typeface="Calibri" charset="0"/>
+                      </a:endParaRPr>
+                    </a:p>
+                  </a:txBody>
+                  <a:tcPr marL="127000" marR="127000" marT="76200" marB="76200" anchor="ctr">
+                    <a:lnL w="9525" cap="flat" cmpd="sng" algn="ctr">
+                      <a:solidFill>
+                        <a:srgbClr val="D8DEE2"/>
+                      </a:solidFill>
+                      <a:prstDash val="solid"/>
+                      <a:round/>
+                      <a:headEnd type="none" w="med" len="med"/>
+                      <a:tailEnd type="none" w="med" len="med"/>
+                    </a:lnL>
+                    <a:lnR w="9525" cap="flat" cmpd="sng" algn="ctr">
+                      <a:solidFill>
+                        <a:srgbClr val="D8DEE2"/>
+                      </a:solidFill>
+                      <a:prstDash val="solid"/>
+                      <a:round/>
+                      <a:headEnd type="none" w="med" len="med"/>
+                      <a:tailEnd type="none" w="med" len="med"/>
+                    </a:lnR>
+                    <a:lnT w="9525" cap="flat" cmpd="sng" algn="ctr">
+                      <a:solidFill>
+                        <a:srgbClr val="D8DEE2"/>
+                      </a:solidFill>
+                      <a:prstDash val="solid"/>
+                      <a:round/>
+                      <a:headEnd type="none" w="med" len="med"/>
+                      <a:tailEnd type="none" w="med" len="med"/>
+                    </a:lnT>
+                    <a:lnB w="9525" cap="flat" cmpd="sng" algn="ctr">
+                      <a:solidFill>
+                        <a:srgbClr val="D8DEE2"/>
+                      </a:solidFill>
+                      <a:prstDash val="solid"/>
+                      <a:round/>
+                      <a:headEnd type="none" w="med" len="med"/>
+                      <a:tailEnd type="none" w="med" len="med"/>
+                    </a:lnB>
+                  </a:tcPr>
+                </a:tc>
+                <a:tc>
+                  <a:txBody>
+                    <a:bodyPr/>
+                    <a:lstStyle/>
+                    <a:p>
+                      <a:pPr indent="0" marL="0">
+                        <a:buNone/>
+                      </a:pPr>
+                      <a:r>
+                        <a:rPr lang="en-US" sz="1250" dirty="0">
+                          <a:solidFill>
+                            <a:srgbClr val="1A2733"/>
+                          </a:solidFill>
+                          <a:latin typeface="Calibri" pitchFamily="34" charset="0"/>
+                          <a:ea typeface="Calibri" pitchFamily="34" charset="-122"/>
+                          <a:cs typeface="Calibri" pitchFamily="34" charset="-120"/>
+                        </a:rPr>
+                        <a:t>Постоянные улучшения</a:t>
+                      </a:r>
+                      <a:endParaRPr lang="en-US" sz="1250" dirty="0">
+                        <a:latin typeface="Calibri" charset="0"/>
+                        <a:ea typeface="Calibri" charset="0"/>
+                        <a:cs typeface="Calibri" charset="0"/>
+                      </a:endParaRPr>
+                    </a:p>
+                  </a:txBody>
+                  <a:tcPr marL="127000" marR="127000" marT="76200" marB="76200" anchor="ctr">
+                    <a:lnL w="9525" cap="flat" cmpd="sng" algn="ctr">
+                      <a:solidFill>
+                        <a:srgbClr val="D8DEE2"/>
+                      </a:solidFill>
+                      <a:prstDash val="solid"/>
+                      <a:round/>
+                      <a:headEnd type="none" w="med" len="med"/>
+                      <a:tailEnd type="none" w="med" len="med"/>
+                    </a:lnL>
+                    <a:lnR w="9525" cap="flat" cmpd="sng" algn="ctr">
+                      <a:solidFill>
+                        <a:srgbClr val="D8DEE2"/>
+                      </a:solidFill>
+                      <a:prstDash val="solid"/>
+                      <a:round/>
+                      <a:headEnd type="none" w="med" len="med"/>
+                      <a:tailEnd type="none" w="med" len="med"/>
+                    </a:lnR>
+                    <a:lnT w="9525" cap="flat" cmpd="sng" algn="ctr">
+                      <a:solidFill>
+                        <a:srgbClr val="D8DEE2"/>
+                      </a:solidFill>
+                      <a:prstDash val="solid"/>
+                      <a:round/>
+                      <a:headEnd type="none" w="med" len="med"/>
+                      <a:tailEnd type="none" w="med" len="med"/>
+                    </a:lnT>
+                    <a:lnB w="9525" cap="flat" cmpd="sng" algn="ctr">
+                      <a:solidFill>
+                        <a:srgbClr val="D8DEE2"/>
+                      </a:solidFill>
+                      <a:prstDash val="solid"/>
+                      <a:round/>
+                      <a:headEnd type="none" w="med" len="med"/>
+                      <a:tailEnd type="none" w="med" len="med"/>
+                    </a:lnB>
+                  </a:tcPr>
+                </a:tc>
+                <a:tc>
+                  <a:txBody>
+                    <a:bodyPr/>
+                    <a:lstStyle/>
+                    <a:p>
+                      <a:pPr indent="0" marL="0">
+                        <a:buNone/>
+                      </a:pPr>
+                      <a:r>
+                        <a:rPr lang="en-US" sz="1250" dirty="0">
+                          <a:solidFill>
+                            <a:srgbClr val="5B6B7A"/>
+                          </a:solidFill>
+                          <a:latin typeface="Calibri" pitchFamily="34" charset="0"/>
+                          <a:ea typeface="Calibri" pitchFamily="34" charset="-122"/>
+                          <a:cs typeface="Calibri" pitchFamily="34" charset="-120"/>
+                        </a:rPr>
+                        <a:t>Без формального конца</a:t>
+                      </a:r>
+                      <a:endParaRPr lang="en-US" sz="1250" dirty="0">
+                        <a:latin typeface="Calibri" charset="0"/>
+                        <a:ea typeface="Calibri" charset="0"/>
+                        <a:cs typeface="Calibri" charset="0"/>
+                      </a:endParaRPr>
+                    </a:p>
+                  </a:txBody>
+                  <a:tcPr marL="127000" marR="127000" marT="76200" marB="76200" anchor="ctr">
+                    <a:lnL w="9525" cap="flat" cmpd="sng" algn="ctr">
+                      <a:solidFill>
+                        <a:srgbClr val="D8DEE2"/>
+                      </a:solidFill>
+                      <a:prstDash val="solid"/>
+                      <a:round/>
+                      <a:headEnd type="none" w="med" len="med"/>
+                      <a:tailEnd type="none" w="med" len="med"/>
+                    </a:lnL>
+                    <a:lnR w="9525" cap="flat" cmpd="sng" algn="ctr">
+                      <a:solidFill>
+                        <a:srgbClr val="D8DEE2"/>
+                      </a:solidFill>
+                      <a:prstDash val="solid"/>
+                      <a:round/>
+                      <a:headEnd type="none" w="med" len="med"/>
+                      <a:tailEnd type="none" w="med" len="med"/>
+                    </a:lnR>
+                    <a:lnT w="9525" cap="flat" cmpd="sng" algn="ctr">
+                      <a:solidFill>
+                        <a:srgbClr val="D8DEE2"/>
+                      </a:solidFill>
+                      <a:prstDash val="solid"/>
+                      <a:round/>
+                      <a:headEnd type="none" w="med" len="med"/>
+                      <a:tailEnd type="none" w="med" len="med"/>
+                    </a:lnT>
+                    <a:lnB w="9525" cap="flat" cmpd="sng" algn="ctr">
+                      <a:solidFill>
+                        <a:srgbClr val="D8DEE2"/>
+                      </a:solidFill>
+                      <a:prstDash val="solid"/>
+                      <a:round/>
+                      <a:headEnd type="none" w="med" len="med"/>
+                      <a:tailEnd type="none" w="med" len="med"/>
+                    </a:lnB>
+                  </a:tcPr>
+                </a:tc>
+                <a:tc>
+                  <a:txBody>
+                    <a:bodyPr/>
+                    <a:lstStyle/>
+                    <a:p>
+                      <a:pPr algn="ctr" indent="0" marL="0">
+                        <a:buNone/>
+                      </a:pPr>
+                      <a:r>
+                        <a:rPr lang="en-US" sz="1200" b="1" dirty="0">
+                          <a:solidFill>
+                            <a:srgbClr val="5B6B7A"/>
+                          </a:solidFill>
+                          <a:latin typeface="Calibri" pitchFamily="34" charset="0"/>
+                          <a:ea typeface="Calibri" pitchFamily="34" charset="-122"/>
+                          <a:cs typeface="Calibri" pitchFamily="34" charset="-120"/>
+                        </a:rPr>
+                        <a:t>Не начато</a:t>
+                      </a:r>
+                      <a:endParaRPr lang="en-US" sz="1200" dirty="0">
+                        <a:latin typeface="Calibri" charset="0"/>
+                        <a:ea typeface="Calibri" charset="0"/>
+                        <a:cs typeface="Calibri" charset="0"/>
+                      </a:endParaRPr>
+                    </a:p>
+                  </a:txBody>
+                  <a:tcPr marL="127000" marR="127000" marT="76200" marB="76200" anchor="ctr">
+                    <a:lnL w="9525" cap="flat" cmpd="sng" algn="ctr">
+                      <a:solidFill>
+                        <a:srgbClr val="D8DEE2"/>
+                      </a:solidFill>
+                      <a:prstDash val="solid"/>
+                      <a:round/>
+                      <a:headEnd type="none" w="med" len="med"/>
+                      <a:tailEnd type="none" w="med" len="med"/>
+                    </a:lnL>
+                    <a:lnR w="9525" cap="flat" cmpd="sng" algn="ctr">
+                      <a:solidFill>
+                        <a:srgbClr val="D8DEE2"/>
+                      </a:solidFill>
+                      <a:prstDash val="solid"/>
+                      <a:round/>
+                      <a:headEnd type="none" w="med" len="med"/>
+                      <a:tailEnd type="none" w="med" len="med"/>
+                    </a:lnR>
+                    <a:lnT w="9525" cap="flat" cmpd="sng" algn="ctr">
+                      <a:solidFill>
+                        <a:srgbClr val="D8DEE2"/>
+                      </a:solidFill>
+                      <a:prstDash val="solid"/>
+                      <a:round/>
+                      <a:headEnd type="none" w="med" len="med"/>
+                      <a:tailEnd type="none" w="med" len="med"/>
+                    </a:lnT>
+                    <a:lnB w="9525" cap="flat" cmpd="sng" algn="ctr">
+                      <a:solidFill>
+                        <a:srgbClr val="D8DEE2"/>
+                      </a:solidFill>
+                      <a:prstDash val="solid"/>
+                      <a:round/>
+                      <a:headEnd type="none" w="med" len="med"/>
+                      <a:tailEnd type="none" w="med" len="med"/>
+                    </a:lnB>
+                  </a:tcPr>
+                </a:tc>
+              </a:tr>
+            </a:tbl>
+          </a:graphicData>
+        </a:graphic>
+      </p:graphicFrame>
+      <p:sp>
+        <p:nvSpPr>
+          <p:cNvPr id="6" name="Text 3"/>
+          <p:cNvSpPr txBox="1"/>
           <p:nvPr/>
-        </p:nvPicPr>
-        <p:blipFill>
-          <a:blip r:embed="rId1"/>
-          <a:stretch>
-            <a:fillRect/>
-          </a:stretch>
-        </p:blipFill>
+        </p:nvSpPr>
         <p:spPr>
           <a:xfrm>
-            <a:off x="2148840" y="1783080"/>
-            <a:ext cx="7863840" cy="4456176"/>
+            <a:off x="502920" y="6309360"/>
+            <a:ext cx="11155680" cy="320040"/>
           </a:xfrm>
           <a:prstGeom prst="rect">
             <a:avLst/>
           </a:prstGeom>
+          <a:noFill/>
+          <a:ln/>
         </p:spPr>
-      </p:pic>
+        <p:txBody>
+          <a:bodyPr wrap="square" lIns="0" tIns="0" rIns="0" bIns="0" rtlCol="0" anchor="ctr"/>
+          <a:lstStyle/>
+          <a:p>
+            <a:pPr indent="0" marL="0">
+              <a:buNone/>
+            </a:pPr>
+            <a:r>
+              <a:rPr lang="en-US" sz="1150" i="1" dirty="0">
+                <a:solidFill>
+                  <a:srgbClr val="5B6B7A"/>
+                </a:solidFill>
+                <a:latin typeface="Calibri" pitchFamily="34" charset="0"/>
+                <a:ea typeface="Calibri" pitchFamily="34" charset="-122"/>
+                <a:cs typeface="Calibri" pitchFamily="34" charset="-120"/>
+              </a:rPr>
+              <a:t>Волна 2 требует отдельного детального состава работ (см. «Наши вопросы» → Волна 2) — срок 4–6 недель ориентировочен на весь объём расширения ESB/КХД.</a:t>
+            </a:r>
+            <a:endParaRPr lang="en-US" sz="1150" dirty="0"/>
+          </a:p>
+        </p:txBody>
+      </p:sp>
       <p:sp>
         <p:nvSpPr>
-          <p:cNvPr id="6" name="Text 3"/>
+          <p:cNvPr id="7" name="Text 4"/>
           <p:cNvSpPr txBox="1"/>
           <p:nvPr/>
         </p:nvSpPr>
@@ -2200,7 +4093,7 @@
                 <a:ea typeface="Calibri" pitchFamily="34" charset="-122"/>
                 <a:cs typeface="Calibri" pitchFamily="34" charset="-120"/>
               </a:rPr>
-              <a:t>2 · ПРОГРАММА ПРОЕКТА</a:t>
+              <a:t>2 · ЗАФИКСИРОВАННЫЕ ПОЖЕЛАНИЯ ЗАКАЗЧИКА</a:t>
             </a:r>
             <a:endParaRPr lang="en-US" sz="1100" dirty="0"/>
           </a:p>
@@ -2239,7 +4132,7 @@
                 <a:ea typeface="Cambria" pitchFamily="34" charset="-122"/>
                 <a:cs typeface="Cambria" pitchFamily="34" charset="-120"/>
               </a:rPr>
-              <a:t>Этапы и волны — цели, сроки, статус</a:t>
+              <a:t>Реестр предложений</a:t>
             </a:r>
             <a:endParaRPr lang="en-US" sz="2700" dirty="0"/>
           </a:p>
@@ -2278,7 +4171,7 @@
                 <a:ea typeface="Calibri" pitchFamily="34" charset="-122"/>
                 <a:cs typeface="Calibri" pitchFamily="34" charset="-120"/>
               </a:rPr>
-              <a:t>Сроки ориентировочные — без реального прецедента (Кейс 2 методики)</a:t>
+              <a:t>11 пунктов backlog платформы. 4 пункта требуют ответа от Д8 — остальные уже в плане платформы или решаются внутри команды</a:t>
             </a:r>
             <a:endParaRPr lang="en-US" sz="1300" dirty="0"/>
           </a:p>
@@ -2307,12 +4200,12 @@
             <a:tbl>
               <a:tblPr/>
               <a:tblGrid>
-                <a:gridCol w="1463040"/>
-                <a:gridCol w="5120640"/>
-                <a:gridCol w="2743200"/>
+                <a:gridCol w="5669280"/>
+                <a:gridCol w="1554480"/>
                 <a:gridCol w="1828800"/>
+                <a:gridCol w="2103120"/>
               </a:tblGrid>
-              <a:tr h="640080">
+              <a:tr h="373380">
                 <a:tc>
                   <a:txBody>
                     <a:bodyPr/>
@@ -2322,7 +4215,7 @@
                         <a:buNone/>
                       </a:pPr>
                       <a:r>
-                        <a:rPr lang="en-US" sz="1150" b="1" dirty="0">
+                        <a:rPr lang="en-US" sz="1100" b="1" dirty="0">
                           <a:solidFill>
                             <a:srgbClr val="FFFFFF"/>
                           </a:solidFill>
@@ -2330,16 +4223,152 @@
                           <a:ea typeface="Calibri" pitchFamily="34" charset="-122"/>
                           <a:cs typeface="Calibri" pitchFamily="34" charset="-120"/>
                         </a:rPr>
-                        <a:t>Этап</a:t>
+                        <a:t>Пункт</a:t>
                       </a:r>
-                      <a:endParaRPr lang="en-US" sz="1150" dirty="0">
+                      <a:endParaRPr lang="en-US" sz="1100" dirty="0">
                         <a:latin typeface="Calibri" charset="0"/>
                         <a:ea typeface="Calibri" charset="0"/>
                         <a:cs typeface="Calibri" charset="0"/>
                       </a:endParaRPr>
                     </a:p>
                   </a:txBody>
-                  <a:tcPr marL="127000" marR="127000" marT="76200" marB="76200" anchor="ctr">
+                  <a:tcPr marL="101600" marR="101600" marT="63500" marB="63500" anchor="ctr">
+                    <a:lnL w="9525" cap="flat" cmpd="sng" algn="ctr">
+                      <a:solidFill>
+                        <a:srgbClr val="D8DEE2"/>
+                      </a:solidFill>
+                      <a:prstDash val="solid"/>
+                      <a:round/>
+                      <a:headEnd type="none" w="med" len="med"/>
+                      <a:tailEnd type="none" w="med" len="med"/>
+                    </a:lnL>
+                    <a:lnR w="9525" cap="flat" cmpd="sng" algn="ctr">
+                      <a:solidFill>
+                        <a:srgbClr val="D8DEE2"/>
+                      </a:solidFill>
+                      <a:prstDash val="solid"/>
+                      <a:round/>
+                      <a:headEnd type="none" w="med" len="med"/>
+                      <a:tailEnd type="none" w="med" len="med"/>
+                    </a:lnR>
+                    <a:lnT w="9525" cap="flat" cmpd="sng" algn="ctr">
+                      <a:solidFill>
+                        <a:srgbClr val="D8DEE2"/>
+                      </a:solidFill>
+                      <a:prstDash val="solid"/>
+                      <a:round/>
+                      <a:headEnd type="none" w="med" len="med"/>
+                      <a:tailEnd type="none" w="med" len="med"/>
+                    </a:lnT>
+                    <a:lnB w="9525" cap="flat" cmpd="sng" algn="ctr">
+                      <a:solidFill>
+                        <a:srgbClr val="D8DEE2"/>
+                      </a:solidFill>
+                      <a:prstDash val="solid"/>
+                      <a:round/>
+                      <a:headEnd type="none" w="med" len="med"/>
+                      <a:tailEnd type="none" w="med" len="med"/>
+                    </a:lnB>
+                    <a:solidFill>
+                      <a:srgbClr val="1A2733"/>
+                    </a:solidFill>
+                  </a:tcPr>
+                </a:tc>
+                <a:tc>
+                  <a:txBody>
+                    <a:bodyPr/>
+                    <a:lstStyle/>
+                    <a:p>
+                      <a:pPr algn="ctr" indent="0" marL="0">
+                        <a:buNone/>
+                      </a:pPr>
+                      <a:r>
+                        <a:rPr lang="en-US" sz="1100" b="1" dirty="0">
+                          <a:solidFill>
+                            <a:srgbClr val="FFFFFF"/>
+                          </a:solidFill>
+                          <a:latin typeface="Calibri" pitchFamily="34" charset="0"/>
+                          <a:ea typeface="Calibri" pitchFamily="34" charset="-122"/>
+                          <a:cs typeface="Calibri" pitchFamily="34" charset="-120"/>
+                        </a:rPr>
+                        <a:t>Приоритет</a:t>
+                      </a:r>
+                      <a:endParaRPr lang="en-US" sz="1100" dirty="0">
+                        <a:latin typeface="Calibri" charset="0"/>
+                        <a:ea typeface="Calibri" charset="0"/>
+                        <a:cs typeface="Calibri" charset="0"/>
+                      </a:endParaRPr>
+                    </a:p>
+                  </a:txBody>
+                  <a:tcPr marL="101600" marR="101600" marT="63500" marB="63500" anchor="ctr">
+                    <a:lnL w="9525" cap="flat" cmpd="sng" algn="ctr">
+                      <a:solidFill>
+                        <a:srgbClr val="D8DEE2"/>
+                      </a:solidFill>
+                      <a:prstDash val="solid"/>
+                      <a:round/>
+                      <a:headEnd type="none" w="med" len="med"/>
+                      <a:tailEnd type="none" w="med" len="med"/>
+                    </a:lnL>
+                    <a:lnR w="9525" cap="flat" cmpd="sng" algn="ctr">
+                      <a:solidFill>
+                        <a:srgbClr val="D8DEE2"/>
+                      </a:solidFill>
+                      <a:prstDash val="solid"/>
+                      <a:round/>
+                      <a:headEnd type="none" w="med" len="med"/>
+                      <a:tailEnd type="none" w="med" len="med"/>
+                    </a:lnR>
+                    <a:lnT w="9525" cap="flat" cmpd="sng" algn="ctr">
+                      <a:solidFill>
+                        <a:srgbClr val="D8DEE2"/>
+                      </a:solidFill>
+                      <a:prstDash val="solid"/>
+                      <a:round/>
+                      <a:headEnd type="none" w="med" len="med"/>
+                      <a:tailEnd type="none" w="med" len="med"/>
+                    </a:lnT>
+                    <a:lnB w="9525" cap="flat" cmpd="sng" algn="ctr">
+                      <a:solidFill>
+                        <a:srgbClr val="D8DEE2"/>
+                      </a:solidFill>
+                      <a:prstDash val="solid"/>
+                      <a:round/>
+                      <a:headEnd type="none" w="med" len="med"/>
+                      <a:tailEnd type="none" w="med" len="med"/>
+                    </a:lnB>
+                    <a:solidFill>
+                      <a:srgbClr val="1A2733"/>
+                    </a:solidFill>
+                  </a:tcPr>
+                </a:tc>
+                <a:tc>
+                  <a:txBody>
+                    <a:bodyPr/>
+                    <a:lstStyle/>
+                    <a:p>
+                      <a:pPr algn="ctr" indent="0" marL="0">
+                        <a:buNone/>
+                      </a:pPr>
+                      <a:r>
+                        <a:rPr lang="en-US" sz="1100" b="1" dirty="0">
+                          <a:solidFill>
+                            <a:srgbClr val="FFFFFF"/>
+                          </a:solidFill>
+                          <a:latin typeface="Calibri" pitchFamily="34" charset="0"/>
+                          <a:ea typeface="Calibri" pitchFamily="34" charset="-122"/>
+                          <a:cs typeface="Calibri" pitchFamily="34" charset="-120"/>
+                        </a:rPr>
+                        <a:t>Реализация</a:t>
+                      </a:r>
+                      <a:endParaRPr lang="en-US" sz="1100" dirty="0">
+                        <a:latin typeface="Calibri" charset="0"/>
+                        <a:ea typeface="Calibri" charset="0"/>
+                        <a:cs typeface="Calibri" charset="0"/>
+                      </a:endParaRPr>
+                    </a:p>
+                  </a:txBody>
+                  <a:tcPr marL="101600" marR="101600" marT="63500" marB="63500" anchor="ctr">
                     <a:lnL w="9525" cap="flat" cmpd="sng" algn="ctr">
                       <a:solidFill>
                         <a:srgbClr val="D8DEE2"/>
@@ -2390,7 +4419,7 @@
                         <a:buNone/>
                       </a:pPr>
                       <a:r>
-                        <a:rPr lang="en-US" sz="1150" b="1" dirty="0">
+                        <a:rPr lang="en-US" sz="1100" b="1" dirty="0">
                           <a:solidFill>
                             <a:srgbClr val="FFFFFF"/>
                           </a:solidFill>
@@ -2398,16 +4427,16 @@
                           <a:ea typeface="Calibri" pitchFamily="34" charset="-122"/>
                           <a:cs typeface="Calibri" pitchFamily="34" charset="-120"/>
                         </a:rPr>
-                        <a:t>Содержание</a:t>
+                        <a:t>Уточнение</a:t>
                       </a:r>
-                      <a:endParaRPr lang="en-US" sz="1150" dirty="0">
+                      <a:endParaRPr lang="en-US" sz="1100" dirty="0">
                         <a:latin typeface="Calibri" charset="0"/>
                         <a:ea typeface="Calibri" charset="0"/>
                         <a:cs typeface="Calibri" charset="0"/>
                       </a:endParaRPr>
                     </a:p>
                   </a:txBody>
-                  <a:tcPr marL="127000" marR="127000" marT="76200" marB="76200" anchor="ctr">
+                  <a:tcPr marL="101600" marR="101600" marT="63500" marB="63500" anchor="ctr">
                     <a:lnL w="9525" cap="flat" cmpd="sng" algn="ctr">
                       <a:solidFill>
                         <a:srgbClr val="D8DEE2"/>
@@ -2449,6 +4478,8 @@
                     </a:solidFill>
                   </a:tcPr>
                 </a:tc>
+              </a:tr>
+              <a:tr h="373380">
                 <a:tc>
                   <a:txBody>
                     <a:bodyPr/>
@@ -2458,24 +4489,24 @@
                         <a:buNone/>
                       </a:pPr>
                       <a:r>
-                        <a:rPr lang="en-US" sz="1150" b="1" dirty="0">
+                        <a:rPr lang="en-US" sz="1080" dirty="0">
                           <a:solidFill>
-                            <a:srgbClr val="FFFFFF"/>
+                            <a:srgbClr val="1A2733"/>
                           </a:solidFill>
                           <a:latin typeface="Calibri" pitchFamily="34" charset="0"/>
                           <a:ea typeface="Calibri" pitchFamily="34" charset="-122"/>
                           <a:cs typeface="Calibri" pitchFamily="34" charset="-120"/>
                         </a:rPr>
-                        <a:t>Примерный срок</a:t>
+                        <a:t>Мультидоменная авторизация</a:t>
                       </a:r>
-                      <a:endParaRPr lang="en-US" sz="1150" dirty="0">
+                      <a:endParaRPr lang="en-US" sz="1080" dirty="0">
                         <a:latin typeface="Calibri" charset="0"/>
                         <a:ea typeface="Calibri" charset="0"/>
                         <a:cs typeface="Calibri" charset="0"/>
                       </a:endParaRPr>
                     </a:p>
                   </a:txBody>
-                  <a:tcPr marL="127000" marR="127000" marT="76200" marB="76200" anchor="ctr">
+                  <a:tcPr marL="101600" marR="101600" marT="63500" marB="63500" anchor="ctr">
                     <a:lnL w="9525" cap="flat" cmpd="sng" algn="ctr">
                       <a:solidFill>
                         <a:srgbClr val="D8DEE2"/>
@@ -2512,9 +4543,6 @@
                       <a:headEnd type="none" w="med" len="med"/>
                       <a:tailEnd type="none" w="med" len="med"/>
                     </a:lnB>
-                    <a:solidFill>
-                      <a:srgbClr val="1A2733"/>
-                    </a:solidFill>
                   </a:tcPr>
                 </a:tc>
                 <a:tc>
@@ -2526,24 +4554,24 @@
                         <a:buNone/>
                       </a:pPr>
                       <a:r>
-                        <a:rPr lang="en-US" sz="1150" b="1" dirty="0">
+                        <a:rPr lang="en-US" sz="1050" b="1" dirty="0">
                           <a:solidFill>
-                            <a:srgbClr val="FFFFFF"/>
+                            <a:srgbClr val="C0392B"/>
                           </a:solidFill>
                           <a:latin typeface="Calibri" pitchFamily="34" charset="0"/>
                           <a:ea typeface="Calibri" pitchFamily="34" charset="-122"/>
                           <a:cs typeface="Calibri" pitchFamily="34" charset="-120"/>
                         </a:rPr>
-                        <a:t>Статус</a:t>
+                        <a:t>Критичный</a:t>
                       </a:r>
-                      <a:endParaRPr lang="en-US" sz="1150" dirty="0">
+                      <a:endParaRPr lang="en-US" sz="1050" dirty="0">
                         <a:latin typeface="Calibri" charset="0"/>
                         <a:ea typeface="Calibri" charset="0"/>
                         <a:cs typeface="Calibri" charset="0"/>
                       </a:endParaRPr>
                     </a:p>
                   </a:txBody>
-                  <a:tcPr marL="127000" marR="127000" marT="76200" marB="76200" anchor="ctr">
+                  <a:tcPr marL="101600" marR="101600" marT="63500" marB="63500" anchor="ctr">
                     <a:lnL w="9525" cap="flat" cmpd="sng" algn="ctr">
                       <a:solidFill>
                         <a:srgbClr val="D8DEE2"/>
@@ -2580,13 +4608,129 @@
                       <a:headEnd type="none" w="med" len="med"/>
                       <a:tailEnd type="none" w="med" len="med"/>
                     </a:lnB>
-                    <a:solidFill>
-                      <a:srgbClr val="1A2733"/>
-                    </a:solidFill>
+                  </a:tcPr>
+                </a:tc>
+                <a:tc>
+                  <a:txBody>
+                    <a:bodyPr/>
+                    <a:lstStyle/>
+                    <a:p>
+                      <a:pPr algn="ctr" indent="0" marL="0">
+                        <a:buNone/>
+                      </a:pPr>
+                      <a:r>
+                        <a:rPr lang="en-US" sz="1050" dirty="0">
+                          <a:solidFill>
+                            <a:srgbClr val="5B6B7A"/>
+                          </a:solidFill>
+                          <a:latin typeface="Calibri" pitchFamily="34" charset="0"/>
+                          <a:ea typeface="Calibri" pitchFamily="34" charset="-122"/>
+                          <a:cs typeface="Calibri" pitchFamily="34" charset="-120"/>
+                        </a:rPr>
+                        <a:t>4 квартал</a:t>
+                      </a:r>
+                      <a:endParaRPr lang="en-US" sz="1050" dirty="0">
+                        <a:latin typeface="Calibri" charset="0"/>
+                        <a:ea typeface="Calibri" charset="0"/>
+                        <a:cs typeface="Calibri" charset="0"/>
+                      </a:endParaRPr>
+                    </a:p>
+                  </a:txBody>
+                  <a:tcPr marL="101600" marR="101600" marT="63500" marB="63500" anchor="ctr">
+                    <a:lnL w="9525" cap="flat" cmpd="sng" algn="ctr">
+                      <a:solidFill>
+                        <a:srgbClr val="D8DEE2"/>
+                      </a:solidFill>
+                      <a:prstDash val="solid"/>
+                      <a:round/>
+                      <a:headEnd type="none" w="med" len="med"/>
+                      <a:tailEnd type="none" w="med" len="med"/>
+                    </a:lnL>
+                    <a:lnR w="9525" cap="flat" cmpd="sng" algn="ctr">
+                      <a:solidFill>
+                        <a:srgbClr val="D8DEE2"/>
+                      </a:solidFill>
+                      <a:prstDash val="solid"/>
+                      <a:round/>
+                      <a:headEnd type="none" w="med" len="med"/>
+                      <a:tailEnd type="none" w="med" len="med"/>
+                    </a:lnR>
+                    <a:lnT w="9525" cap="flat" cmpd="sng" algn="ctr">
+                      <a:solidFill>
+                        <a:srgbClr val="D8DEE2"/>
+                      </a:solidFill>
+                      <a:prstDash val="solid"/>
+                      <a:round/>
+                      <a:headEnd type="none" w="med" len="med"/>
+                      <a:tailEnd type="none" w="med" len="med"/>
+                    </a:lnT>
+                    <a:lnB w="9525" cap="flat" cmpd="sng" algn="ctr">
+                      <a:solidFill>
+                        <a:srgbClr val="D8DEE2"/>
+                      </a:solidFill>
+                      <a:prstDash val="solid"/>
+                      <a:round/>
+                      <a:headEnd type="none" w="med" len="med"/>
+                      <a:tailEnd type="none" w="med" len="med"/>
+                    </a:lnB>
+                  </a:tcPr>
+                </a:tc>
+                <a:tc>
+                  <a:txBody>
+                    <a:bodyPr/>
+                    <a:lstStyle/>
+                    <a:p>
+                      <a:pPr indent="0" marL="0">
+                        <a:buNone/>
+                      </a:pPr>
+                      <a:endParaRPr lang="en-US" sz="1050" dirty="0">
+                        <a:latin typeface="Calibri" charset="0"/>
+                        <a:ea typeface="Calibri" charset="0"/>
+                        <a:cs typeface="Calibri" charset="0"/>
+                      </a:endParaRPr>
+                    </a:p>
+                  </a:txBody>
+                  <a:tcPr marL="101600" marR="101600" marT="63500" marB="63500" anchor="ctr">
+                    <a:lnL w="9525" cap="flat" cmpd="sng" algn="ctr">
+                      <a:solidFill>
+                        <a:srgbClr val="D8DEE2"/>
+                      </a:solidFill>
+                      <a:prstDash val="solid"/>
+                      <a:round/>
+                      <a:headEnd type="none" w="med" len="med"/>
+                      <a:tailEnd type="none" w="med" len="med"/>
+                    </a:lnL>
+                    <a:lnR w="9525" cap="flat" cmpd="sng" algn="ctr">
+                      <a:solidFill>
+                        <a:srgbClr val="D8DEE2"/>
+                      </a:solidFill>
+                      <a:prstDash val="solid"/>
+                      <a:round/>
+                      <a:headEnd type="none" w="med" len="med"/>
+                      <a:tailEnd type="none" w="med" len="med"/>
+                    </a:lnR>
+                    <a:lnT w="9525" cap="flat" cmpd="sng" algn="ctr">
+                      <a:solidFill>
+                        <a:srgbClr val="D8DEE2"/>
+                      </a:solidFill>
+                      <a:prstDash val="solid"/>
+                      <a:round/>
+                      <a:headEnd type="none" w="med" len="med"/>
+                      <a:tailEnd type="none" w="med" len="med"/>
+                    </a:lnT>
+                    <a:lnB w="9525" cap="flat" cmpd="sng" algn="ctr">
+                      <a:solidFill>
+                        <a:srgbClr val="D8DEE2"/>
+                      </a:solidFill>
+                      <a:prstDash val="solid"/>
+                      <a:round/>
+                      <a:headEnd type="none" w="med" len="med"/>
+                      <a:tailEnd type="none" w="med" len="med"/>
+                    </a:lnB>
                   </a:tcPr>
                 </a:tc>
               </a:tr>
-              <a:tr h="640080">
+              <a:tr h="373380">
                 <a:tc>
                   <a:txBody>
                     <a:bodyPr/>
@@ -2596,24 +4740,405 @@
                         <a:buNone/>
                       </a:pPr>
                       <a:r>
-                        <a:rPr lang="en-US" sz="1250" b="1" dirty="0">
+                        <a:rPr lang="en-US" sz="1080" dirty="0">
                           <a:solidFill>
-                            <a:srgbClr val="0A5F67"/>
+                            <a:srgbClr val="1A2733"/>
                           </a:solidFill>
                           <a:latin typeface="Calibri" pitchFamily="34" charset="0"/>
                           <a:ea typeface="Calibri" pitchFamily="34" charset="-122"/>
                           <a:cs typeface="Calibri" pitchFamily="34" charset="-120"/>
                         </a:rPr>
-                        <a:t>П2</a:t>
+                        <a:t>Работа с MS Office 365</a:t>
                       </a:r>
-                      <a:endParaRPr lang="en-US" sz="1250" dirty="0">
+                      <a:endParaRPr lang="en-US" sz="1080" dirty="0">
                         <a:latin typeface="Calibri" charset="0"/>
                         <a:ea typeface="Calibri" charset="0"/>
                         <a:cs typeface="Calibri" charset="0"/>
                       </a:endParaRPr>
                     </a:p>
                   </a:txBody>
-                  <a:tcPr marL="127000" marR="127000" marT="76200" marB="76200" anchor="ctr">
+                  <a:tcPr marL="101600" marR="101600" marT="63500" marB="63500" anchor="ctr">
+                    <a:lnL w="9525" cap="flat" cmpd="sng" algn="ctr">
+                      <a:solidFill>
+                        <a:srgbClr val="D8DEE2"/>
+                      </a:solidFill>
+                      <a:prstDash val="solid"/>
+                      <a:round/>
+                      <a:headEnd type="none" w="med" len="med"/>
+                      <a:tailEnd type="none" w="med" len="med"/>
+                    </a:lnL>
+                    <a:lnR w="9525" cap="flat" cmpd="sng" algn="ctr">
+                      <a:solidFill>
+                        <a:srgbClr val="D8DEE2"/>
+                      </a:solidFill>
+                      <a:prstDash val="solid"/>
+                      <a:round/>
+                      <a:headEnd type="none" w="med" len="med"/>
+                      <a:tailEnd type="none" w="med" len="med"/>
+                    </a:lnR>
+                    <a:lnT w="9525" cap="flat" cmpd="sng" algn="ctr">
+                      <a:solidFill>
+                        <a:srgbClr val="D8DEE2"/>
+                      </a:solidFill>
+                      <a:prstDash val="solid"/>
+                      <a:round/>
+                      <a:headEnd type="none" w="med" len="med"/>
+                      <a:tailEnd type="none" w="med" len="med"/>
+                    </a:lnT>
+                    <a:lnB w="9525" cap="flat" cmpd="sng" algn="ctr">
+                      <a:solidFill>
+                        <a:srgbClr val="D8DEE2"/>
+                      </a:solidFill>
+                      <a:prstDash val="solid"/>
+                      <a:round/>
+                      <a:headEnd type="none" w="med" len="med"/>
+                      <a:tailEnd type="none" w="med" len="med"/>
+                    </a:lnB>
+                  </a:tcPr>
+                </a:tc>
+                <a:tc>
+                  <a:txBody>
+                    <a:bodyPr/>
+                    <a:lstStyle/>
+                    <a:p>
+                      <a:pPr algn="ctr" indent="0" marL="0">
+                        <a:buNone/>
+                      </a:pPr>
+                      <a:r>
+                        <a:rPr lang="en-US" sz="1050" b="1" dirty="0">
+                          <a:solidFill>
+                            <a:srgbClr val="5B6B7A"/>
+                          </a:solidFill>
+                          <a:latin typeface="Calibri" pitchFamily="34" charset="0"/>
+                          <a:ea typeface="Calibri" pitchFamily="34" charset="-122"/>
+                          <a:cs typeface="Calibri" pitchFamily="34" charset="-120"/>
+                        </a:rPr>
+                        <a:t>Нормальный</a:t>
+                      </a:r>
+                      <a:endParaRPr lang="en-US" sz="1050" dirty="0">
+                        <a:latin typeface="Calibri" charset="0"/>
+                        <a:ea typeface="Calibri" charset="0"/>
+                        <a:cs typeface="Calibri" charset="0"/>
+                      </a:endParaRPr>
+                    </a:p>
+                  </a:txBody>
+                  <a:tcPr marL="101600" marR="101600" marT="63500" marB="63500" anchor="ctr">
+                    <a:lnL w="9525" cap="flat" cmpd="sng" algn="ctr">
+                      <a:solidFill>
+                        <a:srgbClr val="D8DEE2"/>
+                      </a:solidFill>
+                      <a:prstDash val="solid"/>
+                      <a:round/>
+                      <a:headEnd type="none" w="med" len="med"/>
+                      <a:tailEnd type="none" w="med" len="med"/>
+                    </a:lnL>
+                    <a:lnR w="9525" cap="flat" cmpd="sng" algn="ctr">
+                      <a:solidFill>
+                        <a:srgbClr val="D8DEE2"/>
+                      </a:solidFill>
+                      <a:prstDash val="solid"/>
+                      <a:round/>
+                      <a:headEnd type="none" w="med" len="med"/>
+                      <a:tailEnd type="none" w="med" len="med"/>
+                    </a:lnR>
+                    <a:lnT w="9525" cap="flat" cmpd="sng" algn="ctr">
+                      <a:solidFill>
+                        <a:srgbClr val="D8DEE2"/>
+                      </a:solidFill>
+                      <a:prstDash val="solid"/>
+                      <a:round/>
+                      <a:headEnd type="none" w="med" len="med"/>
+                      <a:tailEnd type="none" w="med" len="med"/>
+                    </a:lnT>
+                    <a:lnB w="9525" cap="flat" cmpd="sng" algn="ctr">
+                      <a:solidFill>
+                        <a:srgbClr val="D8DEE2"/>
+                      </a:solidFill>
+                      <a:prstDash val="solid"/>
+                      <a:round/>
+                      <a:headEnd type="none" w="med" len="med"/>
+                      <a:tailEnd type="none" w="med" len="med"/>
+                    </a:lnB>
+                  </a:tcPr>
+                </a:tc>
+                <a:tc>
+                  <a:txBody>
+                    <a:bodyPr/>
+                    <a:lstStyle/>
+                    <a:p>
+                      <a:pPr algn="ctr" indent="0" marL="0">
+                        <a:buNone/>
+                      </a:pPr>
+                      <a:r>
+                        <a:rPr lang="en-US" sz="1050" dirty="0">
+                          <a:solidFill>
+                            <a:srgbClr val="5B6B7A"/>
+                          </a:solidFill>
+                          <a:latin typeface="Calibri" pitchFamily="34" charset="0"/>
+                          <a:ea typeface="Calibri" pitchFamily="34" charset="-122"/>
+                          <a:cs typeface="Calibri" pitchFamily="34" charset="-120"/>
+                        </a:rPr>
+                        <a:t>4 квартал</a:t>
+                      </a:r>
+                      <a:endParaRPr lang="en-US" sz="1050" dirty="0">
+                        <a:latin typeface="Calibri" charset="0"/>
+                        <a:ea typeface="Calibri" charset="0"/>
+                        <a:cs typeface="Calibri" charset="0"/>
+                      </a:endParaRPr>
+                    </a:p>
+                  </a:txBody>
+                  <a:tcPr marL="101600" marR="101600" marT="63500" marB="63500" anchor="ctr">
+                    <a:lnL w="9525" cap="flat" cmpd="sng" algn="ctr">
+                      <a:solidFill>
+                        <a:srgbClr val="D8DEE2"/>
+                      </a:solidFill>
+                      <a:prstDash val="solid"/>
+                      <a:round/>
+                      <a:headEnd type="none" w="med" len="med"/>
+                      <a:tailEnd type="none" w="med" len="med"/>
+                    </a:lnL>
+                    <a:lnR w="9525" cap="flat" cmpd="sng" algn="ctr">
+                      <a:solidFill>
+                        <a:srgbClr val="D8DEE2"/>
+                      </a:solidFill>
+                      <a:prstDash val="solid"/>
+                      <a:round/>
+                      <a:headEnd type="none" w="med" len="med"/>
+                      <a:tailEnd type="none" w="med" len="med"/>
+                    </a:lnR>
+                    <a:lnT w="9525" cap="flat" cmpd="sng" algn="ctr">
+                      <a:solidFill>
+                        <a:srgbClr val="D8DEE2"/>
+                      </a:solidFill>
+                      <a:prstDash val="solid"/>
+                      <a:round/>
+                      <a:headEnd type="none" w="med" len="med"/>
+                      <a:tailEnd type="none" w="med" len="med"/>
+                    </a:lnT>
+                    <a:lnB w="9525" cap="flat" cmpd="sng" algn="ctr">
+                      <a:solidFill>
+                        <a:srgbClr val="D8DEE2"/>
+                      </a:solidFill>
+                      <a:prstDash val="solid"/>
+                      <a:round/>
+                      <a:headEnd type="none" w="med" len="med"/>
+                      <a:tailEnd type="none" w="med" len="med"/>
+                    </a:lnB>
+                  </a:tcPr>
+                </a:tc>
+                <a:tc>
+                  <a:txBody>
+                    <a:bodyPr/>
+                    <a:lstStyle/>
+                    <a:p>
+                      <a:pPr indent="0" marL="0">
+                        <a:buNone/>
+                      </a:pPr>
+                      <a:endParaRPr lang="en-US" sz="1050" dirty="0">
+                        <a:latin typeface="Calibri" charset="0"/>
+                        <a:ea typeface="Calibri" charset="0"/>
+                        <a:cs typeface="Calibri" charset="0"/>
+                      </a:endParaRPr>
+                    </a:p>
+                  </a:txBody>
+                  <a:tcPr marL="101600" marR="101600" marT="63500" marB="63500" anchor="ctr">
+                    <a:lnL w="9525" cap="flat" cmpd="sng" algn="ctr">
+                      <a:solidFill>
+                        <a:srgbClr val="D8DEE2"/>
+                      </a:solidFill>
+                      <a:prstDash val="solid"/>
+                      <a:round/>
+                      <a:headEnd type="none" w="med" len="med"/>
+                      <a:tailEnd type="none" w="med" len="med"/>
+                    </a:lnL>
+                    <a:lnR w="9525" cap="flat" cmpd="sng" algn="ctr">
+                      <a:solidFill>
+                        <a:srgbClr val="D8DEE2"/>
+                      </a:solidFill>
+                      <a:prstDash val="solid"/>
+                      <a:round/>
+                      <a:headEnd type="none" w="med" len="med"/>
+                      <a:tailEnd type="none" w="med" len="med"/>
+                    </a:lnR>
+                    <a:lnT w="9525" cap="flat" cmpd="sng" algn="ctr">
+                      <a:solidFill>
+                        <a:srgbClr val="D8DEE2"/>
+                      </a:solidFill>
+                      <a:prstDash val="solid"/>
+                      <a:round/>
+                      <a:headEnd type="none" w="med" len="med"/>
+                      <a:tailEnd type="none" w="med" len="med"/>
+                    </a:lnT>
+                    <a:lnB w="9525" cap="flat" cmpd="sng" algn="ctr">
+                      <a:solidFill>
+                        <a:srgbClr val="D8DEE2"/>
+                      </a:solidFill>
+                      <a:prstDash val="solid"/>
+                      <a:round/>
+                      <a:headEnd type="none" w="med" len="med"/>
+                      <a:tailEnd type="none" w="med" len="med"/>
+                    </a:lnB>
+                  </a:tcPr>
+                </a:tc>
+              </a:tr>
+              <a:tr h="373380">
+                <a:tc>
+                  <a:txBody>
+                    <a:bodyPr/>
+                    <a:lstStyle/>
+                    <a:p>
+                      <a:pPr indent="0" marL="0">
+                        <a:buNone/>
+                      </a:pPr>
+                      <a:r>
+                        <a:rPr lang="en-US" sz="1080" dirty="0">
+                          <a:solidFill>
+                            <a:srgbClr val="1A2733"/>
+                          </a:solidFill>
+                          <a:latin typeface="Calibri" pitchFamily="34" charset="0"/>
+                          <a:ea typeface="Calibri" pitchFamily="34" charset="-122"/>
+                          <a:cs typeface="Calibri" pitchFamily="34" charset="-120"/>
+                        </a:rPr>
+                        <a:t>Поддержка актуальной версии API (web search)</a:t>
+                      </a:r>
+                      <a:endParaRPr lang="en-US" sz="1080" dirty="0">
+                        <a:latin typeface="Calibri" charset="0"/>
+                        <a:ea typeface="Calibri" charset="0"/>
+                        <a:cs typeface="Calibri" charset="0"/>
+                      </a:endParaRPr>
+                    </a:p>
+                  </a:txBody>
+                  <a:tcPr marL="101600" marR="101600" marT="63500" marB="63500" anchor="ctr">
+                    <a:lnL w="9525" cap="flat" cmpd="sng" algn="ctr">
+                      <a:solidFill>
+                        <a:srgbClr val="D8DEE2"/>
+                      </a:solidFill>
+                      <a:prstDash val="solid"/>
+                      <a:round/>
+                      <a:headEnd type="none" w="med" len="med"/>
+                      <a:tailEnd type="none" w="med" len="med"/>
+                    </a:lnL>
+                    <a:lnR w="9525" cap="flat" cmpd="sng" algn="ctr">
+                      <a:solidFill>
+                        <a:srgbClr val="D8DEE2"/>
+                      </a:solidFill>
+                      <a:prstDash val="solid"/>
+                      <a:round/>
+                      <a:headEnd type="none" w="med" len="med"/>
+                      <a:tailEnd type="none" w="med" len="med"/>
+                    </a:lnR>
+                    <a:lnT w="9525" cap="flat" cmpd="sng" algn="ctr">
+                      <a:solidFill>
+                        <a:srgbClr val="D8DEE2"/>
+                      </a:solidFill>
+                      <a:prstDash val="solid"/>
+                      <a:round/>
+                      <a:headEnd type="none" w="med" len="med"/>
+                      <a:tailEnd type="none" w="med" len="med"/>
+                    </a:lnT>
+                    <a:lnB w="9525" cap="flat" cmpd="sng" algn="ctr">
+                      <a:solidFill>
+                        <a:srgbClr val="D8DEE2"/>
+                      </a:solidFill>
+                      <a:prstDash val="solid"/>
+                      <a:round/>
+                      <a:headEnd type="none" w="med" len="med"/>
+                      <a:tailEnd type="none" w="med" len="med"/>
+                    </a:lnB>
+                  </a:tcPr>
+                </a:tc>
+                <a:tc>
+                  <a:txBody>
+                    <a:bodyPr/>
+                    <a:lstStyle/>
+                    <a:p>
+                      <a:pPr algn="ctr" indent="0" marL="0">
+                        <a:buNone/>
+                      </a:pPr>
+                      <a:r>
+                        <a:rPr lang="en-US" sz="1050" b="1" dirty="0">
+                          <a:solidFill>
+                            <a:srgbClr val="C0392B"/>
+                          </a:solidFill>
+                          <a:latin typeface="Calibri" pitchFamily="34" charset="0"/>
+                          <a:ea typeface="Calibri" pitchFamily="34" charset="-122"/>
+                          <a:cs typeface="Calibri" pitchFamily="34" charset="-120"/>
+                        </a:rPr>
+                        <a:t>Критичный</a:t>
+                      </a:r>
+                      <a:endParaRPr lang="en-US" sz="1050" dirty="0">
+                        <a:latin typeface="Calibri" charset="0"/>
+                        <a:ea typeface="Calibri" charset="0"/>
+                        <a:cs typeface="Calibri" charset="0"/>
+                      </a:endParaRPr>
+                    </a:p>
+                  </a:txBody>
+                  <a:tcPr marL="101600" marR="101600" marT="63500" marB="63500" anchor="ctr">
+                    <a:lnL w="9525" cap="flat" cmpd="sng" algn="ctr">
+                      <a:solidFill>
+                        <a:srgbClr val="D8DEE2"/>
+                      </a:solidFill>
+                      <a:prstDash val="solid"/>
+                      <a:round/>
+                      <a:headEnd type="none" w="med" len="med"/>
+                      <a:tailEnd type="none" w="med" len="med"/>
+                    </a:lnL>
+                    <a:lnR w="9525" cap="flat" cmpd="sng" algn="ctr">
+                      <a:solidFill>
+                        <a:srgbClr val="D8DEE2"/>
+                      </a:solidFill>
+                      <a:prstDash val="solid"/>
+                      <a:round/>
+                      <a:headEnd type="none" w="med" len="med"/>
+                      <a:tailEnd type="none" w="med" len="med"/>
+                    </a:lnR>
+                    <a:lnT w="9525" cap="flat" cmpd="sng" algn="ctr">
+                      <a:solidFill>
+                        <a:srgbClr val="D8DEE2"/>
+                      </a:solidFill>
+                      <a:prstDash val="solid"/>
+                      <a:round/>
+                      <a:headEnd type="none" w="med" len="med"/>
+                      <a:tailEnd type="none" w="med" len="med"/>
+                    </a:lnT>
+                    <a:lnB w="9525" cap="flat" cmpd="sng" algn="ctr">
+                      <a:solidFill>
+                        <a:srgbClr val="D8DEE2"/>
+                      </a:solidFill>
+                      <a:prstDash val="solid"/>
+                      <a:round/>
+                      <a:headEnd type="none" w="med" len="med"/>
+                      <a:tailEnd type="none" w="med" len="med"/>
+                    </a:lnB>
+                  </a:tcPr>
+                </a:tc>
+                <a:tc>
+                  <a:txBody>
+                    <a:bodyPr/>
+                    <a:lstStyle/>
+                    <a:p>
+                      <a:pPr algn="ctr" indent="0" marL="0">
+                        <a:buNone/>
+                      </a:pPr>
+                      <a:r>
+                        <a:rPr lang="en-US" sz="1050" dirty="0">
+                          <a:solidFill>
+                            <a:srgbClr val="5B6B7A"/>
+                          </a:solidFill>
+                          <a:latin typeface="Calibri" pitchFamily="34" charset="0"/>
+                          <a:ea typeface="Calibri" pitchFamily="34" charset="-122"/>
+                          <a:cs typeface="Calibri" pitchFamily="34" charset="-120"/>
+                        </a:rPr>
+                        <a:t>—</a:t>
+                      </a:r>
+                      <a:endParaRPr lang="en-US" sz="1050" dirty="0">
+                        <a:latin typeface="Calibri" charset="0"/>
+                        <a:ea typeface="Calibri" charset="0"/>
+                        <a:cs typeface="Calibri" charset="0"/>
+                      </a:endParaRPr>
+                    </a:p>
+                  </a:txBody>
+                  <a:tcPr marL="101600" marR="101600" marT="63500" marB="63500" anchor="ctr">
                     <a:lnL w="9525" cap="flat" cmpd="sng" algn="ctr">
                       <a:solidFill>
                         <a:srgbClr val="D8DEE2"/>
@@ -2661,7 +5186,74 @@
                         <a:buNone/>
                       </a:pPr>
                       <a:r>
-                        <a:rPr lang="en-US" sz="1250" dirty="0">
+                        <a:rPr lang="en-US" sz="1050" dirty="0">
+                          <a:solidFill>
+                            <a:srgbClr val="8C99A6"/>
+                          </a:solidFill>
+                          <a:latin typeface="Calibri" pitchFamily="34" charset="0"/>
+                          <a:ea typeface="Calibri" pitchFamily="34" charset="-122"/>
+                          <a:cs typeface="Calibri" pitchFamily="34" charset="-120"/>
+                        </a:rPr>
+                        <a:t>Уточняем сами</a:t>
+                      </a:r>
+                      <a:endParaRPr lang="en-US" sz="1050" dirty="0">
+                        <a:latin typeface="Calibri" charset="0"/>
+                        <a:ea typeface="Calibri" charset="0"/>
+                        <a:cs typeface="Calibri" charset="0"/>
+                      </a:endParaRPr>
+                    </a:p>
+                  </a:txBody>
+                  <a:tcPr marL="101600" marR="101600" marT="63500" marB="63500" anchor="ctr">
+                    <a:lnL w="9525" cap="flat" cmpd="sng" algn="ctr">
+                      <a:solidFill>
+                        <a:srgbClr val="D8DEE2"/>
+                      </a:solidFill>
+                      <a:prstDash val="solid"/>
+                      <a:round/>
+                      <a:headEnd type="none" w="med" len="med"/>
+                      <a:tailEnd type="none" w="med" len="med"/>
+                    </a:lnL>
+                    <a:lnR w="9525" cap="flat" cmpd="sng" algn="ctr">
+                      <a:solidFill>
+                        <a:srgbClr val="D8DEE2"/>
+                      </a:solidFill>
+                      <a:prstDash val="solid"/>
+                      <a:round/>
+                      <a:headEnd type="none" w="med" len="med"/>
+                      <a:tailEnd type="none" w="med" len="med"/>
+                    </a:lnR>
+                    <a:lnT w="9525" cap="flat" cmpd="sng" algn="ctr">
+                      <a:solidFill>
+                        <a:srgbClr val="D8DEE2"/>
+                      </a:solidFill>
+                      <a:prstDash val="solid"/>
+                      <a:round/>
+                      <a:headEnd type="none" w="med" len="med"/>
+                      <a:tailEnd type="none" w="med" len="med"/>
+                    </a:lnT>
+                    <a:lnB w="9525" cap="flat" cmpd="sng" algn="ctr">
+                      <a:solidFill>
+                        <a:srgbClr val="D8DEE2"/>
+                      </a:solidFill>
+                      <a:prstDash val="solid"/>
+                      <a:round/>
+                      <a:headEnd type="none" w="med" len="med"/>
+                      <a:tailEnd type="none" w="med" len="med"/>
+                    </a:lnB>
+                  </a:tcPr>
+                </a:tc>
+              </a:tr>
+              <a:tr h="373380">
+                <a:tc>
+                  <a:txBody>
+                    <a:bodyPr/>
+                    <a:lstStyle/>
+                    <a:p>
+                      <a:pPr indent="0" marL="0">
+                        <a:buNone/>
+                      </a:pPr>
+                      <a:r>
+                        <a:rPr lang="en-US" sz="1080" dirty="0">
                           <a:solidFill>
                             <a:srgbClr val="1A2733"/>
                           </a:solidFill>
@@ -2669,16 +5261,146 @@
                           <a:ea typeface="Calibri" pitchFamily="34" charset="-122"/>
                           <a:cs typeface="Calibri" pitchFamily="34" charset="-120"/>
                         </a:rPr>
-                        <a:t>Целевая архитектура и карта волн</a:t>
+                        <a:t>Кастомизация выбора источников</a:t>
                       </a:r>
-                      <a:endParaRPr lang="en-US" sz="1250" dirty="0">
+                      <a:endParaRPr lang="en-US" sz="1080" dirty="0">
                         <a:latin typeface="Calibri" charset="0"/>
                         <a:ea typeface="Calibri" charset="0"/>
                         <a:cs typeface="Calibri" charset="0"/>
                       </a:endParaRPr>
                     </a:p>
                   </a:txBody>
-                  <a:tcPr marL="127000" marR="127000" marT="76200" marB="76200" anchor="ctr">
+                  <a:tcPr marL="101600" marR="101600" marT="63500" marB="63500" anchor="ctr">
+                    <a:lnL w="9525" cap="flat" cmpd="sng" algn="ctr">
+                      <a:solidFill>
+                        <a:srgbClr val="D8DEE2"/>
+                      </a:solidFill>
+                      <a:prstDash val="solid"/>
+                      <a:round/>
+                      <a:headEnd type="none" w="med" len="med"/>
+                      <a:tailEnd type="none" w="med" len="med"/>
+                    </a:lnL>
+                    <a:lnR w="9525" cap="flat" cmpd="sng" algn="ctr">
+                      <a:solidFill>
+                        <a:srgbClr val="D8DEE2"/>
+                      </a:solidFill>
+                      <a:prstDash val="solid"/>
+                      <a:round/>
+                      <a:headEnd type="none" w="med" len="med"/>
+                      <a:tailEnd type="none" w="med" len="med"/>
+                    </a:lnR>
+                    <a:lnT w="9525" cap="flat" cmpd="sng" algn="ctr">
+                      <a:solidFill>
+                        <a:srgbClr val="D8DEE2"/>
+                      </a:solidFill>
+                      <a:prstDash val="solid"/>
+                      <a:round/>
+                      <a:headEnd type="none" w="med" len="med"/>
+                      <a:tailEnd type="none" w="med" len="med"/>
+                    </a:lnT>
+                    <a:lnB w="9525" cap="flat" cmpd="sng" algn="ctr">
+                      <a:solidFill>
+                        <a:srgbClr val="D8DEE2"/>
+                      </a:solidFill>
+                      <a:prstDash val="solid"/>
+                      <a:round/>
+                      <a:headEnd type="none" w="med" len="med"/>
+                      <a:tailEnd type="none" w="med" len="med"/>
+                    </a:lnB>
+                  </a:tcPr>
+                </a:tc>
+                <a:tc>
+                  <a:txBody>
+                    <a:bodyPr/>
+                    <a:lstStyle/>
+                    <a:p>
+                      <a:pPr algn="ctr" indent="0" marL="0">
+                        <a:buNone/>
+                      </a:pPr>
+                      <a:r>
+                        <a:rPr lang="en-US" sz="1050" b="1" dirty="0">
+                          <a:solidFill>
+                            <a:srgbClr val="5B6B7A"/>
+                          </a:solidFill>
+                          <a:latin typeface="Calibri" pitchFamily="34" charset="0"/>
+                          <a:ea typeface="Calibri" pitchFamily="34" charset="-122"/>
+                          <a:cs typeface="Calibri" pitchFamily="34" charset="-120"/>
+                        </a:rPr>
+                        <a:t>Нормальный</a:t>
+                      </a:r>
+                      <a:endParaRPr lang="en-US" sz="1050" dirty="0">
+                        <a:latin typeface="Calibri" charset="0"/>
+                        <a:ea typeface="Calibri" charset="0"/>
+                        <a:cs typeface="Calibri" charset="0"/>
+                      </a:endParaRPr>
+                    </a:p>
+                  </a:txBody>
+                  <a:tcPr marL="101600" marR="101600" marT="63500" marB="63500" anchor="ctr">
+                    <a:lnL w="9525" cap="flat" cmpd="sng" algn="ctr">
+                      <a:solidFill>
+                        <a:srgbClr val="D8DEE2"/>
+                      </a:solidFill>
+                      <a:prstDash val="solid"/>
+                      <a:round/>
+                      <a:headEnd type="none" w="med" len="med"/>
+                      <a:tailEnd type="none" w="med" len="med"/>
+                    </a:lnL>
+                    <a:lnR w="9525" cap="flat" cmpd="sng" algn="ctr">
+                      <a:solidFill>
+                        <a:srgbClr val="D8DEE2"/>
+                      </a:solidFill>
+                      <a:prstDash val="solid"/>
+                      <a:round/>
+                      <a:headEnd type="none" w="med" len="med"/>
+                      <a:tailEnd type="none" w="med" len="med"/>
+                    </a:lnR>
+                    <a:lnT w="9525" cap="flat" cmpd="sng" algn="ctr">
+                      <a:solidFill>
+                        <a:srgbClr val="D8DEE2"/>
+                      </a:solidFill>
+                      <a:prstDash val="solid"/>
+                      <a:round/>
+                      <a:headEnd type="none" w="med" len="med"/>
+                      <a:tailEnd type="none" w="med" len="med"/>
+                    </a:lnT>
+                    <a:lnB w="9525" cap="flat" cmpd="sng" algn="ctr">
+                      <a:solidFill>
+                        <a:srgbClr val="D8DEE2"/>
+                      </a:solidFill>
+                      <a:prstDash val="solid"/>
+                      <a:round/>
+                      <a:headEnd type="none" w="med" len="med"/>
+                      <a:tailEnd type="none" w="med" len="med"/>
+                    </a:lnB>
+                  </a:tcPr>
+                </a:tc>
+                <a:tc>
+                  <a:txBody>
+                    <a:bodyPr/>
+                    <a:lstStyle/>
+                    <a:p>
+                      <a:pPr algn="ctr" indent="0" marL="0">
+                        <a:buNone/>
+                      </a:pPr>
+                      <a:r>
+                        <a:rPr lang="en-US" sz="1050" dirty="0">
+                          <a:solidFill>
+                            <a:srgbClr val="5B6B7A"/>
+                          </a:solidFill>
+                          <a:latin typeface="Calibri" pitchFamily="34" charset="0"/>
+                          <a:ea typeface="Calibri" pitchFamily="34" charset="-122"/>
+                          <a:cs typeface="Calibri" pitchFamily="34" charset="-120"/>
+                        </a:rPr>
+                        <a:t>—</a:t>
+                      </a:r>
+                      <a:endParaRPr lang="en-US" sz="1050" dirty="0">
+                        <a:latin typeface="Calibri" charset="0"/>
+                        <a:ea typeface="Calibri" charset="0"/>
+                        <a:cs typeface="Calibri" charset="0"/>
+                      </a:endParaRPr>
+                    </a:p>
+                  </a:txBody>
+                  <a:tcPr marL="101600" marR="101600" marT="63500" marB="63500" anchor="ctr">
                     <a:lnL w="9525" cap="flat" cmpd="sng" algn="ctr">
                       <a:solidFill>
                         <a:srgbClr val="D8DEE2"/>
@@ -2726,24 +5448,91 @@
                         <a:buNone/>
                       </a:pPr>
                       <a:r>
-                        <a:rPr lang="en-US" sz="1250" dirty="0">
+                        <a:rPr lang="en-US" sz="1050" b="1" dirty="0">
                           <a:solidFill>
-                            <a:srgbClr val="5B6B7A"/>
+                            <a:srgbClr val="C97A1A"/>
                           </a:solidFill>
                           <a:latin typeface="Calibri" pitchFamily="34" charset="0"/>
                           <a:ea typeface="Calibri" pitchFamily="34" charset="-122"/>
                           <a:cs typeface="Calibri" pitchFamily="34" charset="-120"/>
                         </a:rPr>
-                        <a:t>1–2 недели</a:t>
+                        <a:t>Требуется от Д8</a:t>
                       </a:r>
-                      <a:endParaRPr lang="en-US" sz="1250" dirty="0">
+                      <a:endParaRPr lang="en-US" sz="1050" dirty="0">
                         <a:latin typeface="Calibri" charset="0"/>
                         <a:ea typeface="Calibri" charset="0"/>
                         <a:cs typeface="Calibri" charset="0"/>
                       </a:endParaRPr>
                     </a:p>
                   </a:txBody>
-                  <a:tcPr marL="127000" marR="127000" marT="76200" marB="76200" anchor="ctr">
+                  <a:tcPr marL="101600" marR="101600" marT="63500" marB="63500" anchor="ctr">
+                    <a:lnL w="9525" cap="flat" cmpd="sng" algn="ctr">
+                      <a:solidFill>
+                        <a:srgbClr val="D8DEE2"/>
+                      </a:solidFill>
+                      <a:prstDash val="solid"/>
+                      <a:round/>
+                      <a:headEnd type="none" w="med" len="med"/>
+                      <a:tailEnd type="none" w="med" len="med"/>
+                    </a:lnL>
+                    <a:lnR w="9525" cap="flat" cmpd="sng" algn="ctr">
+                      <a:solidFill>
+                        <a:srgbClr val="D8DEE2"/>
+                      </a:solidFill>
+                      <a:prstDash val="solid"/>
+                      <a:round/>
+                      <a:headEnd type="none" w="med" len="med"/>
+                      <a:tailEnd type="none" w="med" len="med"/>
+                    </a:lnR>
+                    <a:lnT w="9525" cap="flat" cmpd="sng" algn="ctr">
+                      <a:solidFill>
+                        <a:srgbClr val="D8DEE2"/>
+                      </a:solidFill>
+                      <a:prstDash val="solid"/>
+                      <a:round/>
+                      <a:headEnd type="none" w="med" len="med"/>
+                      <a:tailEnd type="none" w="med" len="med"/>
+                    </a:lnT>
+                    <a:lnB w="9525" cap="flat" cmpd="sng" algn="ctr">
+                      <a:solidFill>
+                        <a:srgbClr val="D8DEE2"/>
+                      </a:solidFill>
+                      <a:prstDash val="solid"/>
+                      <a:round/>
+                      <a:headEnd type="none" w="med" len="med"/>
+                      <a:tailEnd type="none" w="med" len="med"/>
+                    </a:lnB>
+                  </a:tcPr>
+                </a:tc>
+              </a:tr>
+              <a:tr h="373380">
+                <a:tc>
+                  <a:txBody>
+                    <a:bodyPr/>
+                    <a:lstStyle/>
+                    <a:p>
+                      <a:pPr indent="0" marL="0">
+                        <a:buNone/>
+                      </a:pPr>
+                      <a:r>
+                        <a:rPr lang="en-US" sz="1080" dirty="0">
+                          <a:solidFill>
+                            <a:srgbClr val="1A2733"/>
+                          </a:solidFill>
+                          <a:latin typeface="Calibri" pitchFamily="34" charset="0"/>
+                          <a:ea typeface="Calibri" pitchFamily="34" charset="-122"/>
+                          <a:cs typeface="Calibri" pitchFamily="34" charset="-120"/>
+                        </a:rPr>
+                        <a:t>Замены в анонимизируемых данных — именованные правила</a:t>
+                      </a:r>
+                      <a:endParaRPr lang="en-US" sz="1080" dirty="0">
+                        <a:latin typeface="Calibri" charset="0"/>
+                        <a:ea typeface="Calibri" charset="0"/>
+                        <a:cs typeface="Calibri" charset="0"/>
+                      </a:endParaRPr>
+                    </a:p>
+                  </a:txBody>
+                  <a:tcPr marL="101600" marR="101600" marT="63500" marB="63500" anchor="ctr">
                     <a:lnL w="9525" cap="flat" cmpd="sng" algn="ctr">
                       <a:solidFill>
                         <a:srgbClr val="D8DEE2"/>
@@ -2791,7 +5580,7 @@
                         <a:buNone/>
                       </a:pPr>
                       <a:r>
-                        <a:rPr lang="en-US" sz="1200" b="1" dirty="0">
+                        <a:rPr lang="en-US" sz="1050" b="1" dirty="0">
                           <a:solidFill>
                             <a:srgbClr val="5B6B7A"/>
                           </a:solidFill>
@@ -2799,16 +5588,135 @@
                           <a:ea typeface="Calibri" pitchFamily="34" charset="-122"/>
                           <a:cs typeface="Calibri" pitchFamily="34" charset="-120"/>
                         </a:rPr>
-                        <a:t>Не начато</a:t>
+                        <a:t>Нормальный</a:t>
                       </a:r>
-                      <a:endParaRPr lang="en-US" sz="1200" dirty="0">
+                      <a:endParaRPr lang="en-US" sz="1050" dirty="0">
                         <a:latin typeface="Calibri" charset="0"/>
                         <a:ea typeface="Calibri" charset="0"/>
                         <a:cs typeface="Calibri" charset="0"/>
                       </a:endParaRPr>
                     </a:p>
                   </a:txBody>
-                  <a:tcPr marL="127000" marR="127000" marT="76200" marB="76200" anchor="ctr">
+                  <a:tcPr marL="101600" marR="101600" marT="63500" marB="63500" anchor="ctr">
+                    <a:lnL w="9525" cap="flat" cmpd="sng" algn="ctr">
+                      <a:solidFill>
+                        <a:srgbClr val="D8DEE2"/>
+                      </a:solidFill>
+                      <a:prstDash val="solid"/>
+                      <a:round/>
+                      <a:headEnd type="none" w="med" len="med"/>
+                      <a:tailEnd type="none" w="med" len="med"/>
+                    </a:lnL>
+                    <a:lnR w="9525" cap="flat" cmpd="sng" algn="ctr">
+                      <a:solidFill>
+                        <a:srgbClr val="D8DEE2"/>
+                      </a:solidFill>
+                      <a:prstDash val="solid"/>
+                      <a:round/>
+                      <a:headEnd type="none" w="med" len="med"/>
+                      <a:tailEnd type="none" w="med" len="med"/>
+                    </a:lnR>
+                    <a:lnT w="9525" cap="flat" cmpd="sng" algn="ctr">
+                      <a:solidFill>
+                        <a:srgbClr val="D8DEE2"/>
+                      </a:solidFill>
+                      <a:prstDash val="solid"/>
+                      <a:round/>
+                      <a:headEnd type="none" w="med" len="med"/>
+                      <a:tailEnd type="none" w="med" len="med"/>
+                    </a:lnT>
+                    <a:lnB w="9525" cap="flat" cmpd="sng" algn="ctr">
+                      <a:solidFill>
+                        <a:srgbClr val="D8DEE2"/>
+                      </a:solidFill>
+                      <a:prstDash val="solid"/>
+                      <a:round/>
+                      <a:headEnd type="none" w="med" len="med"/>
+                      <a:tailEnd type="none" w="med" len="med"/>
+                    </a:lnB>
+                  </a:tcPr>
+                </a:tc>
+                <a:tc>
+                  <a:txBody>
+                    <a:bodyPr/>
+                    <a:lstStyle/>
+                    <a:p>
+                      <a:pPr algn="ctr" indent="0" marL="0">
+                        <a:buNone/>
+                      </a:pPr>
+                      <a:r>
+                        <a:rPr lang="en-US" sz="1050" dirty="0">
+                          <a:solidFill>
+                            <a:srgbClr val="5B6B7A"/>
+                          </a:solidFill>
+                          <a:latin typeface="Calibri" pitchFamily="34" charset="0"/>
+                          <a:ea typeface="Calibri" pitchFamily="34" charset="-122"/>
+                          <a:cs typeface="Calibri" pitchFamily="34" charset="-120"/>
+                        </a:rPr>
+                        <a:t>4 квартал</a:t>
+                      </a:r>
+                      <a:endParaRPr lang="en-US" sz="1050" dirty="0">
+                        <a:latin typeface="Calibri" charset="0"/>
+                        <a:ea typeface="Calibri" charset="0"/>
+                        <a:cs typeface="Calibri" charset="0"/>
+                      </a:endParaRPr>
+                    </a:p>
+                  </a:txBody>
+                  <a:tcPr marL="101600" marR="101600" marT="63500" marB="63500" anchor="ctr">
+                    <a:lnL w="9525" cap="flat" cmpd="sng" algn="ctr">
+                      <a:solidFill>
+                        <a:srgbClr val="D8DEE2"/>
+                      </a:solidFill>
+                      <a:prstDash val="solid"/>
+                      <a:round/>
+                      <a:headEnd type="none" w="med" len="med"/>
+                      <a:tailEnd type="none" w="med" len="med"/>
+                    </a:lnL>
+                    <a:lnR w="9525" cap="flat" cmpd="sng" algn="ctr">
+                      <a:solidFill>
+                        <a:srgbClr val="D8DEE2"/>
+                      </a:solidFill>
+                      <a:prstDash val="solid"/>
+                      <a:round/>
+                      <a:headEnd type="none" w="med" len="med"/>
+                      <a:tailEnd type="none" w="med" len="med"/>
+                    </a:lnR>
+                    <a:lnT w="9525" cap="flat" cmpd="sng" algn="ctr">
+                      <a:solidFill>
+                        <a:srgbClr val="D8DEE2"/>
+                      </a:solidFill>
+                      <a:prstDash val="solid"/>
+                      <a:round/>
+                      <a:headEnd type="none" w="med" len="med"/>
+                      <a:tailEnd type="none" w="med" len="med"/>
+                    </a:lnT>
+                    <a:lnB w="9525" cap="flat" cmpd="sng" algn="ctr">
+                      <a:solidFill>
+                        <a:srgbClr val="D8DEE2"/>
+                      </a:solidFill>
+                      <a:prstDash val="solid"/>
+                      <a:round/>
+                      <a:headEnd type="none" w="med" len="med"/>
+                      <a:tailEnd type="none" w="med" len="med"/>
+                    </a:lnB>
+                  </a:tcPr>
+                </a:tc>
+                <a:tc>
+                  <a:txBody>
+                    <a:bodyPr/>
+                    <a:lstStyle/>
+                    <a:p>
+                      <a:pPr indent="0" marL="0">
+                        <a:buNone/>
+                      </a:pPr>
+                      <a:endParaRPr lang="en-US" sz="1050" dirty="0">
+                        <a:latin typeface="Calibri" charset="0"/>
+                        <a:ea typeface="Calibri" charset="0"/>
+                        <a:cs typeface="Calibri" charset="0"/>
+                      </a:endParaRPr>
+                    </a:p>
+                  </a:txBody>
+                  <a:tcPr marL="101600" marR="101600" marT="63500" marB="63500" anchor="ctr">
                     <a:lnL w="9525" cap="flat" cmpd="sng" algn="ctr">
                       <a:solidFill>
                         <a:srgbClr val="D8DEE2"/>
@@ -2848,7 +5756,7 @@
                   </a:tcPr>
                 </a:tc>
               </a:tr>
-              <a:tr h="640080">
+              <a:tr h="373380">
                 <a:tc>
                   <a:txBody>
                     <a:bodyPr/>
@@ -2858,24 +5766,405 @@
                         <a:buNone/>
                       </a:pPr>
                       <a:r>
-                        <a:rPr lang="en-US" sz="1250" b="1" dirty="0">
+                        <a:rPr lang="en-US" sz="1080" dirty="0">
                           <a:solidFill>
-                            <a:srgbClr val="0A5F67"/>
+                            <a:srgbClr val="1A2733"/>
                           </a:solidFill>
                           <a:latin typeface="Calibri" pitchFamily="34" charset="0"/>
                           <a:ea typeface="Calibri" pitchFamily="34" charset="-122"/>
                           <a:cs typeface="Calibri" pitchFamily="34" charset="-120"/>
                         </a:rPr>
-                        <a:t>Волна 1</a:t>
+                        <a:t>Обновление данных в RAG через API</a:t>
                       </a:r>
-                      <a:endParaRPr lang="en-US" sz="1250" dirty="0">
+                      <a:endParaRPr lang="en-US" sz="1080" dirty="0">
                         <a:latin typeface="Calibri" charset="0"/>
                         <a:ea typeface="Calibri" charset="0"/>
                         <a:cs typeface="Calibri" charset="0"/>
                       </a:endParaRPr>
                     </a:p>
                   </a:txBody>
-                  <a:tcPr marL="127000" marR="127000" marT="76200" marB="76200" anchor="ctr">
+                  <a:tcPr marL="101600" marR="101600" marT="63500" marB="63500" anchor="ctr">
+                    <a:lnL w="9525" cap="flat" cmpd="sng" algn="ctr">
+                      <a:solidFill>
+                        <a:srgbClr val="D8DEE2"/>
+                      </a:solidFill>
+                      <a:prstDash val="solid"/>
+                      <a:round/>
+                      <a:headEnd type="none" w="med" len="med"/>
+                      <a:tailEnd type="none" w="med" len="med"/>
+                    </a:lnL>
+                    <a:lnR w="9525" cap="flat" cmpd="sng" algn="ctr">
+                      <a:solidFill>
+                        <a:srgbClr val="D8DEE2"/>
+                      </a:solidFill>
+                      <a:prstDash val="solid"/>
+                      <a:round/>
+                      <a:headEnd type="none" w="med" len="med"/>
+                      <a:tailEnd type="none" w="med" len="med"/>
+                    </a:lnR>
+                    <a:lnT w="9525" cap="flat" cmpd="sng" algn="ctr">
+                      <a:solidFill>
+                        <a:srgbClr val="D8DEE2"/>
+                      </a:solidFill>
+                      <a:prstDash val="solid"/>
+                      <a:round/>
+                      <a:headEnd type="none" w="med" len="med"/>
+                      <a:tailEnd type="none" w="med" len="med"/>
+                    </a:lnT>
+                    <a:lnB w="9525" cap="flat" cmpd="sng" algn="ctr">
+                      <a:solidFill>
+                        <a:srgbClr val="D8DEE2"/>
+                      </a:solidFill>
+                      <a:prstDash val="solid"/>
+                      <a:round/>
+                      <a:headEnd type="none" w="med" len="med"/>
+                      <a:tailEnd type="none" w="med" len="med"/>
+                    </a:lnB>
+                  </a:tcPr>
+                </a:tc>
+                <a:tc>
+                  <a:txBody>
+                    <a:bodyPr/>
+                    <a:lstStyle/>
+                    <a:p>
+                      <a:pPr algn="ctr" indent="0" marL="0">
+                        <a:buNone/>
+                      </a:pPr>
+                      <a:r>
+                        <a:rPr lang="en-US" sz="1050" b="1" dirty="0">
+                          <a:solidFill>
+                            <a:srgbClr val="C97A1A"/>
+                          </a:solidFill>
+                          <a:latin typeface="Calibri" pitchFamily="34" charset="0"/>
+                          <a:ea typeface="Calibri" pitchFamily="34" charset="-122"/>
+                          <a:cs typeface="Calibri" pitchFamily="34" charset="-120"/>
+                        </a:rPr>
+                        <a:t>Высокий</a:t>
+                      </a:r>
+                      <a:endParaRPr lang="en-US" sz="1050" dirty="0">
+                        <a:latin typeface="Calibri" charset="0"/>
+                        <a:ea typeface="Calibri" charset="0"/>
+                        <a:cs typeface="Calibri" charset="0"/>
+                      </a:endParaRPr>
+                    </a:p>
+                  </a:txBody>
+                  <a:tcPr marL="101600" marR="101600" marT="63500" marB="63500" anchor="ctr">
+                    <a:lnL w="9525" cap="flat" cmpd="sng" algn="ctr">
+                      <a:solidFill>
+                        <a:srgbClr val="D8DEE2"/>
+                      </a:solidFill>
+                      <a:prstDash val="solid"/>
+                      <a:round/>
+                      <a:headEnd type="none" w="med" len="med"/>
+                      <a:tailEnd type="none" w="med" len="med"/>
+                    </a:lnL>
+                    <a:lnR w="9525" cap="flat" cmpd="sng" algn="ctr">
+                      <a:solidFill>
+                        <a:srgbClr val="D8DEE2"/>
+                      </a:solidFill>
+                      <a:prstDash val="solid"/>
+                      <a:round/>
+                      <a:headEnd type="none" w="med" len="med"/>
+                      <a:tailEnd type="none" w="med" len="med"/>
+                    </a:lnR>
+                    <a:lnT w="9525" cap="flat" cmpd="sng" algn="ctr">
+                      <a:solidFill>
+                        <a:srgbClr val="D8DEE2"/>
+                      </a:solidFill>
+                      <a:prstDash val="solid"/>
+                      <a:round/>
+                      <a:headEnd type="none" w="med" len="med"/>
+                      <a:tailEnd type="none" w="med" len="med"/>
+                    </a:lnT>
+                    <a:lnB w="9525" cap="flat" cmpd="sng" algn="ctr">
+                      <a:solidFill>
+                        <a:srgbClr val="D8DEE2"/>
+                      </a:solidFill>
+                      <a:prstDash val="solid"/>
+                      <a:round/>
+                      <a:headEnd type="none" w="med" len="med"/>
+                      <a:tailEnd type="none" w="med" len="med"/>
+                    </a:lnB>
+                  </a:tcPr>
+                </a:tc>
+                <a:tc>
+                  <a:txBody>
+                    <a:bodyPr/>
+                    <a:lstStyle/>
+                    <a:p>
+                      <a:pPr algn="ctr" indent="0" marL="0">
+                        <a:buNone/>
+                      </a:pPr>
+                      <a:r>
+                        <a:rPr lang="en-US" sz="1050" dirty="0">
+                          <a:solidFill>
+                            <a:srgbClr val="5B6B7A"/>
+                          </a:solidFill>
+                          <a:latin typeface="Calibri" pitchFamily="34" charset="0"/>
+                          <a:ea typeface="Calibri" pitchFamily="34" charset="-122"/>
+                          <a:cs typeface="Calibri" pitchFamily="34" charset="-120"/>
+                        </a:rPr>
+                        <a:t>4 квартал</a:t>
+                      </a:r>
+                      <a:endParaRPr lang="en-US" sz="1050" dirty="0">
+                        <a:latin typeface="Calibri" charset="0"/>
+                        <a:ea typeface="Calibri" charset="0"/>
+                        <a:cs typeface="Calibri" charset="0"/>
+                      </a:endParaRPr>
+                    </a:p>
+                  </a:txBody>
+                  <a:tcPr marL="101600" marR="101600" marT="63500" marB="63500" anchor="ctr">
+                    <a:lnL w="9525" cap="flat" cmpd="sng" algn="ctr">
+                      <a:solidFill>
+                        <a:srgbClr val="D8DEE2"/>
+                      </a:solidFill>
+                      <a:prstDash val="solid"/>
+                      <a:round/>
+                      <a:headEnd type="none" w="med" len="med"/>
+                      <a:tailEnd type="none" w="med" len="med"/>
+                    </a:lnL>
+                    <a:lnR w="9525" cap="flat" cmpd="sng" algn="ctr">
+                      <a:solidFill>
+                        <a:srgbClr val="D8DEE2"/>
+                      </a:solidFill>
+                      <a:prstDash val="solid"/>
+                      <a:round/>
+                      <a:headEnd type="none" w="med" len="med"/>
+                      <a:tailEnd type="none" w="med" len="med"/>
+                    </a:lnR>
+                    <a:lnT w="9525" cap="flat" cmpd="sng" algn="ctr">
+                      <a:solidFill>
+                        <a:srgbClr val="D8DEE2"/>
+                      </a:solidFill>
+                      <a:prstDash val="solid"/>
+                      <a:round/>
+                      <a:headEnd type="none" w="med" len="med"/>
+                      <a:tailEnd type="none" w="med" len="med"/>
+                    </a:lnT>
+                    <a:lnB w="9525" cap="flat" cmpd="sng" algn="ctr">
+                      <a:solidFill>
+                        <a:srgbClr val="D8DEE2"/>
+                      </a:solidFill>
+                      <a:prstDash val="solid"/>
+                      <a:round/>
+                      <a:headEnd type="none" w="med" len="med"/>
+                      <a:tailEnd type="none" w="med" len="med"/>
+                    </a:lnB>
+                  </a:tcPr>
+                </a:tc>
+                <a:tc>
+                  <a:txBody>
+                    <a:bodyPr/>
+                    <a:lstStyle/>
+                    <a:p>
+                      <a:pPr indent="0" marL="0">
+                        <a:buNone/>
+                      </a:pPr>
+                      <a:endParaRPr lang="en-US" sz="1050" dirty="0">
+                        <a:latin typeface="Calibri" charset="0"/>
+                        <a:ea typeface="Calibri" charset="0"/>
+                        <a:cs typeface="Calibri" charset="0"/>
+                      </a:endParaRPr>
+                    </a:p>
+                  </a:txBody>
+                  <a:tcPr marL="101600" marR="101600" marT="63500" marB="63500" anchor="ctr">
+                    <a:lnL w="9525" cap="flat" cmpd="sng" algn="ctr">
+                      <a:solidFill>
+                        <a:srgbClr val="D8DEE2"/>
+                      </a:solidFill>
+                      <a:prstDash val="solid"/>
+                      <a:round/>
+                      <a:headEnd type="none" w="med" len="med"/>
+                      <a:tailEnd type="none" w="med" len="med"/>
+                    </a:lnL>
+                    <a:lnR w="9525" cap="flat" cmpd="sng" algn="ctr">
+                      <a:solidFill>
+                        <a:srgbClr val="D8DEE2"/>
+                      </a:solidFill>
+                      <a:prstDash val="solid"/>
+                      <a:round/>
+                      <a:headEnd type="none" w="med" len="med"/>
+                      <a:tailEnd type="none" w="med" len="med"/>
+                    </a:lnR>
+                    <a:lnT w="9525" cap="flat" cmpd="sng" algn="ctr">
+                      <a:solidFill>
+                        <a:srgbClr val="D8DEE2"/>
+                      </a:solidFill>
+                      <a:prstDash val="solid"/>
+                      <a:round/>
+                      <a:headEnd type="none" w="med" len="med"/>
+                      <a:tailEnd type="none" w="med" len="med"/>
+                    </a:lnT>
+                    <a:lnB w="9525" cap="flat" cmpd="sng" algn="ctr">
+                      <a:solidFill>
+                        <a:srgbClr val="D8DEE2"/>
+                      </a:solidFill>
+                      <a:prstDash val="solid"/>
+                      <a:round/>
+                      <a:headEnd type="none" w="med" len="med"/>
+                      <a:tailEnd type="none" w="med" len="med"/>
+                    </a:lnB>
+                  </a:tcPr>
+                </a:tc>
+              </a:tr>
+              <a:tr h="373380">
+                <a:tc>
+                  <a:txBody>
+                    <a:bodyPr/>
+                    <a:lstStyle/>
+                    <a:p>
+                      <a:pPr indent="0" marL="0">
+                        <a:buNone/>
+                      </a:pPr>
+                      <a:r>
+                        <a:rPr lang="en-US" sz="1080" dirty="0">
+                          <a:solidFill>
+                            <a:srgbClr val="1A2733"/>
+                          </a:solidFill>
+                          <a:latin typeface="Calibri" pitchFamily="34" charset="0"/>
+                          <a:ea typeface="Calibri" pitchFamily="34" charset="-122"/>
+                          <a:cs typeface="Calibri" pitchFamily="34" charset="-120"/>
+                        </a:rPr>
+                        <a:t>Динамические права доступа через таблицы/API</a:t>
+                      </a:r>
+                      <a:endParaRPr lang="en-US" sz="1080" dirty="0">
+                        <a:latin typeface="Calibri" charset="0"/>
+                        <a:ea typeface="Calibri" charset="0"/>
+                        <a:cs typeface="Calibri" charset="0"/>
+                      </a:endParaRPr>
+                    </a:p>
+                  </a:txBody>
+                  <a:tcPr marL="101600" marR="101600" marT="63500" marB="63500" anchor="ctr">
+                    <a:lnL w="9525" cap="flat" cmpd="sng" algn="ctr">
+                      <a:solidFill>
+                        <a:srgbClr val="D8DEE2"/>
+                      </a:solidFill>
+                      <a:prstDash val="solid"/>
+                      <a:round/>
+                      <a:headEnd type="none" w="med" len="med"/>
+                      <a:tailEnd type="none" w="med" len="med"/>
+                    </a:lnL>
+                    <a:lnR w="9525" cap="flat" cmpd="sng" algn="ctr">
+                      <a:solidFill>
+                        <a:srgbClr val="D8DEE2"/>
+                      </a:solidFill>
+                      <a:prstDash val="solid"/>
+                      <a:round/>
+                      <a:headEnd type="none" w="med" len="med"/>
+                      <a:tailEnd type="none" w="med" len="med"/>
+                    </a:lnR>
+                    <a:lnT w="9525" cap="flat" cmpd="sng" algn="ctr">
+                      <a:solidFill>
+                        <a:srgbClr val="D8DEE2"/>
+                      </a:solidFill>
+                      <a:prstDash val="solid"/>
+                      <a:round/>
+                      <a:headEnd type="none" w="med" len="med"/>
+                      <a:tailEnd type="none" w="med" len="med"/>
+                    </a:lnT>
+                    <a:lnB w="9525" cap="flat" cmpd="sng" algn="ctr">
+                      <a:solidFill>
+                        <a:srgbClr val="D8DEE2"/>
+                      </a:solidFill>
+                      <a:prstDash val="solid"/>
+                      <a:round/>
+                      <a:headEnd type="none" w="med" len="med"/>
+                      <a:tailEnd type="none" w="med" len="med"/>
+                    </a:lnB>
+                  </a:tcPr>
+                </a:tc>
+                <a:tc>
+                  <a:txBody>
+                    <a:bodyPr/>
+                    <a:lstStyle/>
+                    <a:p>
+                      <a:pPr algn="ctr" indent="0" marL="0">
+                        <a:buNone/>
+                      </a:pPr>
+                      <a:r>
+                        <a:rPr lang="en-US" sz="1050" b="1" dirty="0">
+                          <a:solidFill>
+                            <a:srgbClr val="C97A1A"/>
+                          </a:solidFill>
+                          <a:latin typeface="Calibri" pitchFamily="34" charset="0"/>
+                          <a:ea typeface="Calibri" pitchFamily="34" charset="-122"/>
+                          <a:cs typeface="Calibri" pitchFamily="34" charset="-120"/>
+                        </a:rPr>
+                        <a:t>Высокий</a:t>
+                      </a:r>
+                      <a:endParaRPr lang="en-US" sz="1050" dirty="0">
+                        <a:latin typeface="Calibri" charset="0"/>
+                        <a:ea typeface="Calibri" charset="0"/>
+                        <a:cs typeface="Calibri" charset="0"/>
+                      </a:endParaRPr>
+                    </a:p>
+                  </a:txBody>
+                  <a:tcPr marL="101600" marR="101600" marT="63500" marB="63500" anchor="ctr">
+                    <a:lnL w="9525" cap="flat" cmpd="sng" algn="ctr">
+                      <a:solidFill>
+                        <a:srgbClr val="D8DEE2"/>
+                      </a:solidFill>
+                      <a:prstDash val="solid"/>
+                      <a:round/>
+                      <a:headEnd type="none" w="med" len="med"/>
+                      <a:tailEnd type="none" w="med" len="med"/>
+                    </a:lnL>
+                    <a:lnR w="9525" cap="flat" cmpd="sng" algn="ctr">
+                      <a:solidFill>
+                        <a:srgbClr val="D8DEE2"/>
+                      </a:solidFill>
+                      <a:prstDash val="solid"/>
+                      <a:round/>
+                      <a:headEnd type="none" w="med" len="med"/>
+                      <a:tailEnd type="none" w="med" len="med"/>
+                    </a:lnR>
+                    <a:lnT w="9525" cap="flat" cmpd="sng" algn="ctr">
+                      <a:solidFill>
+                        <a:srgbClr val="D8DEE2"/>
+                      </a:solidFill>
+                      <a:prstDash val="solid"/>
+                      <a:round/>
+                      <a:headEnd type="none" w="med" len="med"/>
+                      <a:tailEnd type="none" w="med" len="med"/>
+                    </a:lnT>
+                    <a:lnB w="9525" cap="flat" cmpd="sng" algn="ctr">
+                      <a:solidFill>
+                        <a:srgbClr val="D8DEE2"/>
+                      </a:solidFill>
+                      <a:prstDash val="solid"/>
+                      <a:round/>
+                      <a:headEnd type="none" w="med" len="med"/>
+                      <a:tailEnd type="none" w="med" len="med"/>
+                    </a:lnB>
+                  </a:tcPr>
+                </a:tc>
+                <a:tc>
+                  <a:txBody>
+                    <a:bodyPr/>
+                    <a:lstStyle/>
+                    <a:p>
+                      <a:pPr algn="ctr" indent="0" marL="0">
+                        <a:buNone/>
+                      </a:pPr>
+                      <a:r>
+                        <a:rPr lang="en-US" sz="1050" dirty="0">
+                          <a:solidFill>
+                            <a:srgbClr val="5B6B7A"/>
+                          </a:solidFill>
+                          <a:latin typeface="Calibri" pitchFamily="34" charset="0"/>
+                          <a:ea typeface="Calibri" pitchFamily="34" charset="-122"/>
+                          <a:cs typeface="Calibri" pitchFamily="34" charset="-120"/>
+                        </a:rPr>
+                        <a:t>—</a:t>
+                      </a:r>
+                      <a:endParaRPr lang="en-US" sz="1050" dirty="0">
+                        <a:latin typeface="Calibri" charset="0"/>
+                        <a:ea typeface="Calibri" charset="0"/>
+                        <a:cs typeface="Calibri" charset="0"/>
+                      </a:endParaRPr>
+                    </a:p>
+                  </a:txBody>
+                  <a:tcPr marL="101600" marR="101600" marT="63500" marB="63500" anchor="ctr">
                     <a:lnL w="9525" cap="flat" cmpd="sng" algn="ctr">
                       <a:solidFill>
                         <a:srgbClr val="D8DEE2"/>
@@ -2923,7 +6212,74 @@
                         <a:buNone/>
                       </a:pPr>
                       <a:r>
-                        <a:rPr lang="en-US" sz="1250" dirty="0">
+                        <a:rPr lang="en-US" sz="1050" b="1" dirty="0">
+                          <a:solidFill>
+                            <a:srgbClr val="C97A1A"/>
+                          </a:solidFill>
+                          <a:latin typeface="Calibri" pitchFamily="34" charset="0"/>
+                          <a:ea typeface="Calibri" pitchFamily="34" charset="-122"/>
+                          <a:cs typeface="Calibri" pitchFamily="34" charset="-120"/>
+                        </a:rPr>
+                        <a:t>Требуется от Д8</a:t>
+                      </a:r>
+                      <a:endParaRPr lang="en-US" sz="1050" dirty="0">
+                        <a:latin typeface="Calibri" charset="0"/>
+                        <a:ea typeface="Calibri" charset="0"/>
+                        <a:cs typeface="Calibri" charset="0"/>
+                      </a:endParaRPr>
+                    </a:p>
+                  </a:txBody>
+                  <a:tcPr marL="101600" marR="101600" marT="63500" marB="63500" anchor="ctr">
+                    <a:lnL w="9525" cap="flat" cmpd="sng" algn="ctr">
+                      <a:solidFill>
+                        <a:srgbClr val="D8DEE2"/>
+                      </a:solidFill>
+                      <a:prstDash val="solid"/>
+                      <a:round/>
+                      <a:headEnd type="none" w="med" len="med"/>
+                      <a:tailEnd type="none" w="med" len="med"/>
+                    </a:lnL>
+                    <a:lnR w="9525" cap="flat" cmpd="sng" algn="ctr">
+                      <a:solidFill>
+                        <a:srgbClr val="D8DEE2"/>
+                      </a:solidFill>
+                      <a:prstDash val="solid"/>
+                      <a:round/>
+                      <a:headEnd type="none" w="med" len="med"/>
+                      <a:tailEnd type="none" w="med" len="med"/>
+                    </a:lnR>
+                    <a:lnT w="9525" cap="flat" cmpd="sng" algn="ctr">
+                      <a:solidFill>
+                        <a:srgbClr val="D8DEE2"/>
+                      </a:solidFill>
+                      <a:prstDash val="solid"/>
+                      <a:round/>
+                      <a:headEnd type="none" w="med" len="med"/>
+                      <a:tailEnd type="none" w="med" len="med"/>
+                    </a:lnT>
+                    <a:lnB w="9525" cap="flat" cmpd="sng" algn="ctr">
+                      <a:solidFill>
+                        <a:srgbClr val="D8DEE2"/>
+                      </a:solidFill>
+                      <a:prstDash val="solid"/>
+                      <a:round/>
+                      <a:headEnd type="none" w="med" len="med"/>
+                      <a:tailEnd type="none" w="med" len="med"/>
+                    </a:lnB>
+                  </a:tcPr>
+                </a:tc>
+              </a:tr>
+              <a:tr h="373380">
+                <a:tc>
+                  <a:txBody>
+                    <a:bodyPr/>
+                    <a:lstStyle/>
+                    <a:p>
+                      <a:pPr indent="0" marL="0">
+                        <a:buNone/>
+                      </a:pPr>
+                      <a:r>
+                        <a:rPr lang="en-US" sz="1080" dirty="0">
                           <a:solidFill>
                             <a:srgbClr val="1A2733"/>
                           </a:solidFill>
@@ -2931,16 +6287,397 @@
                           <a:ea typeface="Calibri" pitchFamily="34" charset="-122"/>
                           <a:cs typeface="Calibri" pitchFamily="34" charset="-120"/>
                         </a:rPr>
-                        <a:t>RAG-документы</a:t>
+                        <a:t>Работа с графиками (визуал)</a:t>
                       </a:r>
-                      <a:endParaRPr lang="en-US" sz="1250" dirty="0">
+                      <a:endParaRPr lang="en-US" sz="1080" dirty="0">
                         <a:latin typeface="Calibri" charset="0"/>
                         <a:ea typeface="Calibri" charset="0"/>
                         <a:cs typeface="Calibri" charset="0"/>
                       </a:endParaRPr>
                     </a:p>
                   </a:txBody>
-                  <a:tcPr marL="127000" marR="127000" marT="76200" marB="76200" anchor="ctr">
+                  <a:tcPr marL="101600" marR="101600" marT="63500" marB="63500" anchor="ctr">
+                    <a:lnL w="9525" cap="flat" cmpd="sng" algn="ctr">
+                      <a:solidFill>
+                        <a:srgbClr val="D8DEE2"/>
+                      </a:solidFill>
+                      <a:prstDash val="solid"/>
+                      <a:round/>
+                      <a:headEnd type="none" w="med" len="med"/>
+                      <a:tailEnd type="none" w="med" len="med"/>
+                    </a:lnL>
+                    <a:lnR w="9525" cap="flat" cmpd="sng" algn="ctr">
+                      <a:solidFill>
+                        <a:srgbClr val="D8DEE2"/>
+                      </a:solidFill>
+                      <a:prstDash val="solid"/>
+                      <a:round/>
+                      <a:headEnd type="none" w="med" len="med"/>
+                      <a:tailEnd type="none" w="med" len="med"/>
+                    </a:lnR>
+                    <a:lnT w="9525" cap="flat" cmpd="sng" algn="ctr">
+                      <a:solidFill>
+                        <a:srgbClr val="D8DEE2"/>
+                      </a:solidFill>
+                      <a:prstDash val="solid"/>
+                      <a:round/>
+                      <a:headEnd type="none" w="med" len="med"/>
+                      <a:tailEnd type="none" w="med" len="med"/>
+                    </a:lnT>
+                    <a:lnB w="9525" cap="flat" cmpd="sng" algn="ctr">
+                      <a:solidFill>
+                        <a:srgbClr val="D8DEE2"/>
+                      </a:solidFill>
+                      <a:prstDash val="solid"/>
+                      <a:round/>
+                      <a:headEnd type="none" w="med" len="med"/>
+                      <a:tailEnd type="none" w="med" len="med"/>
+                    </a:lnB>
+                  </a:tcPr>
+                </a:tc>
+                <a:tc>
+                  <a:txBody>
+                    <a:bodyPr/>
+                    <a:lstStyle/>
+                    <a:p>
+                      <a:pPr algn="ctr" indent="0" marL="0">
+                        <a:buNone/>
+                      </a:pPr>
+                      <a:r>
+                        <a:rPr lang="en-US" sz="1050" b="1" dirty="0">
+                          <a:solidFill>
+                            <a:srgbClr val="5B6B7A"/>
+                          </a:solidFill>
+                          <a:latin typeface="Calibri" pitchFamily="34" charset="0"/>
+                          <a:ea typeface="Calibri" pitchFamily="34" charset="-122"/>
+                          <a:cs typeface="Calibri" pitchFamily="34" charset="-120"/>
+                        </a:rPr>
+                        <a:t>Нормальный</a:t>
+                      </a:r>
+                      <a:endParaRPr lang="en-US" sz="1050" dirty="0">
+                        <a:latin typeface="Calibri" charset="0"/>
+                        <a:ea typeface="Calibri" charset="0"/>
+                        <a:cs typeface="Calibri" charset="0"/>
+                      </a:endParaRPr>
+                    </a:p>
+                  </a:txBody>
+                  <a:tcPr marL="101600" marR="101600" marT="63500" marB="63500" anchor="ctr">
+                    <a:lnL w="9525" cap="flat" cmpd="sng" algn="ctr">
+                      <a:solidFill>
+                        <a:srgbClr val="D8DEE2"/>
+                      </a:solidFill>
+                      <a:prstDash val="solid"/>
+                      <a:round/>
+                      <a:headEnd type="none" w="med" len="med"/>
+                      <a:tailEnd type="none" w="med" len="med"/>
+                    </a:lnL>
+                    <a:lnR w="9525" cap="flat" cmpd="sng" algn="ctr">
+                      <a:solidFill>
+                        <a:srgbClr val="D8DEE2"/>
+                      </a:solidFill>
+                      <a:prstDash val="solid"/>
+                      <a:round/>
+                      <a:headEnd type="none" w="med" len="med"/>
+                      <a:tailEnd type="none" w="med" len="med"/>
+                    </a:lnR>
+                    <a:lnT w="9525" cap="flat" cmpd="sng" algn="ctr">
+                      <a:solidFill>
+                        <a:srgbClr val="D8DEE2"/>
+                      </a:solidFill>
+                      <a:prstDash val="solid"/>
+                      <a:round/>
+                      <a:headEnd type="none" w="med" len="med"/>
+                      <a:tailEnd type="none" w="med" len="med"/>
+                    </a:lnT>
+                    <a:lnB w="9525" cap="flat" cmpd="sng" algn="ctr">
+                      <a:solidFill>
+                        <a:srgbClr val="D8DEE2"/>
+                      </a:solidFill>
+                      <a:prstDash val="solid"/>
+                      <a:round/>
+                      <a:headEnd type="none" w="med" len="med"/>
+                      <a:tailEnd type="none" w="med" len="med"/>
+                    </a:lnB>
+                  </a:tcPr>
+                </a:tc>
+                <a:tc>
+                  <a:txBody>
+                    <a:bodyPr/>
+                    <a:lstStyle/>
+                    <a:p>
+                      <a:pPr algn="ctr" indent="0" marL="0">
+                        <a:buNone/>
+                      </a:pPr>
+                      <a:r>
+                        <a:rPr lang="en-US" sz="1050" dirty="0">
+                          <a:solidFill>
+                            <a:srgbClr val="5B6B7A"/>
+                          </a:solidFill>
+                          <a:latin typeface="Calibri" pitchFamily="34" charset="0"/>
+                          <a:ea typeface="Calibri" pitchFamily="34" charset="-122"/>
+                          <a:cs typeface="Calibri" pitchFamily="34" charset="-120"/>
+                        </a:rPr>
+                        <a:t>4 кв. — 1 кв. 2027</a:t>
+                      </a:r>
+                      <a:endParaRPr lang="en-US" sz="1050" dirty="0">
+                        <a:latin typeface="Calibri" charset="0"/>
+                        <a:ea typeface="Calibri" charset="0"/>
+                        <a:cs typeface="Calibri" charset="0"/>
+                      </a:endParaRPr>
+                    </a:p>
+                  </a:txBody>
+                  <a:tcPr marL="101600" marR="101600" marT="63500" marB="63500" anchor="ctr">
+                    <a:lnL w="9525" cap="flat" cmpd="sng" algn="ctr">
+                      <a:solidFill>
+                        <a:srgbClr val="D8DEE2"/>
+                      </a:solidFill>
+                      <a:prstDash val="solid"/>
+                      <a:round/>
+                      <a:headEnd type="none" w="med" len="med"/>
+                      <a:tailEnd type="none" w="med" len="med"/>
+                    </a:lnL>
+                    <a:lnR w="9525" cap="flat" cmpd="sng" algn="ctr">
+                      <a:solidFill>
+                        <a:srgbClr val="D8DEE2"/>
+                      </a:solidFill>
+                      <a:prstDash val="solid"/>
+                      <a:round/>
+                      <a:headEnd type="none" w="med" len="med"/>
+                      <a:tailEnd type="none" w="med" len="med"/>
+                    </a:lnR>
+                    <a:lnT w="9525" cap="flat" cmpd="sng" algn="ctr">
+                      <a:solidFill>
+                        <a:srgbClr val="D8DEE2"/>
+                      </a:solidFill>
+                      <a:prstDash val="solid"/>
+                      <a:round/>
+                      <a:headEnd type="none" w="med" len="med"/>
+                      <a:tailEnd type="none" w="med" len="med"/>
+                    </a:lnT>
+                    <a:lnB w="9525" cap="flat" cmpd="sng" algn="ctr">
+                      <a:solidFill>
+                        <a:srgbClr val="D8DEE2"/>
+                      </a:solidFill>
+                      <a:prstDash val="solid"/>
+                      <a:round/>
+                      <a:headEnd type="none" w="med" len="med"/>
+                      <a:tailEnd type="none" w="med" len="med"/>
+                    </a:lnB>
+                  </a:tcPr>
+                </a:tc>
+                <a:tc>
+                  <a:txBody>
+                    <a:bodyPr/>
+                    <a:lstStyle/>
+                    <a:p>
+                      <a:pPr indent="0" marL="0">
+                        <a:buNone/>
+                      </a:pPr>
+                      <a:endParaRPr lang="en-US" sz="1050" dirty="0">
+                        <a:latin typeface="Calibri" charset="0"/>
+                        <a:ea typeface="Calibri" charset="0"/>
+                        <a:cs typeface="Calibri" charset="0"/>
+                      </a:endParaRPr>
+                    </a:p>
+                  </a:txBody>
+                  <a:tcPr marL="101600" marR="101600" marT="63500" marB="63500" anchor="ctr">
+                    <a:lnL w="9525" cap="flat" cmpd="sng" algn="ctr">
+                      <a:solidFill>
+                        <a:srgbClr val="D8DEE2"/>
+                      </a:solidFill>
+                      <a:prstDash val="solid"/>
+                      <a:round/>
+                      <a:headEnd type="none" w="med" len="med"/>
+                      <a:tailEnd type="none" w="med" len="med"/>
+                    </a:lnL>
+                    <a:lnR w="9525" cap="flat" cmpd="sng" algn="ctr">
+                      <a:solidFill>
+                        <a:srgbClr val="D8DEE2"/>
+                      </a:solidFill>
+                      <a:prstDash val="solid"/>
+                      <a:round/>
+                      <a:headEnd type="none" w="med" len="med"/>
+                      <a:tailEnd type="none" w="med" len="med"/>
+                    </a:lnR>
+                    <a:lnT w="9525" cap="flat" cmpd="sng" algn="ctr">
+                      <a:solidFill>
+                        <a:srgbClr val="D8DEE2"/>
+                      </a:solidFill>
+                      <a:prstDash val="solid"/>
+                      <a:round/>
+                      <a:headEnd type="none" w="med" len="med"/>
+                      <a:tailEnd type="none" w="med" len="med"/>
+                    </a:lnT>
+                    <a:lnB w="9525" cap="flat" cmpd="sng" algn="ctr">
+                      <a:solidFill>
+                        <a:srgbClr val="D8DEE2"/>
+                      </a:solidFill>
+                      <a:prstDash val="solid"/>
+                      <a:round/>
+                      <a:headEnd type="none" w="med" len="med"/>
+                      <a:tailEnd type="none" w="med" len="med"/>
+                    </a:lnB>
+                  </a:tcPr>
+                </a:tc>
+              </a:tr>
+              <a:tr h="373380">
+                <a:tc>
+                  <a:txBody>
+                    <a:bodyPr/>
+                    <a:lstStyle/>
+                    <a:p>
+                      <a:pPr indent="0" marL="0">
+                        <a:buNone/>
+                      </a:pPr>
+                      <a:r>
+                        <a:rPr lang="en-US" sz="1080" dirty="0">
+                          <a:solidFill>
+                            <a:srgbClr val="1A2733"/>
+                          </a:solidFill>
+                          <a:latin typeface="Calibri" pitchFamily="34" charset="0"/>
+                          <a:ea typeface="Calibri" pitchFamily="34" charset="-122"/>
+                          <a:cs typeface="Calibri" pitchFamily="34" charset="-120"/>
+                        </a:rPr>
+                        <a:t>Персональные RAG-коллекции пользователей</a:t>
+                      </a:r>
+                      <a:endParaRPr lang="en-US" sz="1080" dirty="0">
+                        <a:latin typeface="Calibri" charset="0"/>
+                        <a:ea typeface="Calibri" charset="0"/>
+                        <a:cs typeface="Calibri" charset="0"/>
+                      </a:endParaRPr>
+                    </a:p>
+                  </a:txBody>
+                  <a:tcPr marL="101600" marR="101600" marT="63500" marB="63500" anchor="ctr">
+                    <a:lnL w="9525" cap="flat" cmpd="sng" algn="ctr">
+                      <a:solidFill>
+                        <a:srgbClr val="D8DEE2"/>
+                      </a:solidFill>
+                      <a:prstDash val="solid"/>
+                      <a:round/>
+                      <a:headEnd type="none" w="med" len="med"/>
+                      <a:tailEnd type="none" w="med" len="med"/>
+                    </a:lnL>
+                    <a:lnR w="9525" cap="flat" cmpd="sng" algn="ctr">
+                      <a:solidFill>
+                        <a:srgbClr val="D8DEE2"/>
+                      </a:solidFill>
+                      <a:prstDash val="solid"/>
+                      <a:round/>
+                      <a:headEnd type="none" w="med" len="med"/>
+                      <a:tailEnd type="none" w="med" len="med"/>
+                    </a:lnR>
+                    <a:lnT w="9525" cap="flat" cmpd="sng" algn="ctr">
+                      <a:solidFill>
+                        <a:srgbClr val="D8DEE2"/>
+                      </a:solidFill>
+                      <a:prstDash val="solid"/>
+                      <a:round/>
+                      <a:headEnd type="none" w="med" len="med"/>
+                      <a:tailEnd type="none" w="med" len="med"/>
+                    </a:lnT>
+                    <a:lnB w="9525" cap="flat" cmpd="sng" algn="ctr">
+                      <a:solidFill>
+                        <a:srgbClr val="D8DEE2"/>
+                      </a:solidFill>
+                      <a:prstDash val="solid"/>
+                      <a:round/>
+                      <a:headEnd type="none" w="med" len="med"/>
+                      <a:tailEnd type="none" w="med" len="med"/>
+                    </a:lnB>
+                  </a:tcPr>
+                </a:tc>
+                <a:tc>
+                  <a:txBody>
+                    <a:bodyPr/>
+                    <a:lstStyle/>
+                    <a:p>
+                      <a:pPr algn="ctr" indent="0" marL="0">
+                        <a:buNone/>
+                      </a:pPr>
+                      <a:r>
+                        <a:rPr lang="en-US" sz="1050" b="1" dirty="0">
+                          <a:solidFill>
+                            <a:srgbClr val="5B6B7A"/>
+                          </a:solidFill>
+                          <a:latin typeface="Calibri" pitchFamily="34" charset="0"/>
+                          <a:ea typeface="Calibri" pitchFamily="34" charset="-122"/>
+                          <a:cs typeface="Calibri" pitchFamily="34" charset="-120"/>
+                        </a:rPr>
+                        <a:t>Нормальный</a:t>
+                      </a:r>
+                      <a:endParaRPr lang="en-US" sz="1050" dirty="0">
+                        <a:latin typeface="Calibri" charset="0"/>
+                        <a:ea typeface="Calibri" charset="0"/>
+                        <a:cs typeface="Calibri" charset="0"/>
+                      </a:endParaRPr>
+                    </a:p>
+                  </a:txBody>
+                  <a:tcPr marL="101600" marR="101600" marT="63500" marB="63500" anchor="ctr">
+                    <a:lnL w="9525" cap="flat" cmpd="sng" algn="ctr">
+                      <a:solidFill>
+                        <a:srgbClr val="D8DEE2"/>
+                      </a:solidFill>
+                      <a:prstDash val="solid"/>
+                      <a:round/>
+                      <a:headEnd type="none" w="med" len="med"/>
+                      <a:tailEnd type="none" w="med" len="med"/>
+                    </a:lnL>
+                    <a:lnR w="9525" cap="flat" cmpd="sng" algn="ctr">
+                      <a:solidFill>
+                        <a:srgbClr val="D8DEE2"/>
+                      </a:solidFill>
+                      <a:prstDash val="solid"/>
+                      <a:round/>
+                      <a:headEnd type="none" w="med" len="med"/>
+                      <a:tailEnd type="none" w="med" len="med"/>
+                    </a:lnR>
+                    <a:lnT w="9525" cap="flat" cmpd="sng" algn="ctr">
+                      <a:solidFill>
+                        <a:srgbClr val="D8DEE2"/>
+                      </a:solidFill>
+                      <a:prstDash val="solid"/>
+                      <a:round/>
+                      <a:headEnd type="none" w="med" len="med"/>
+                      <a:tailEnd type="none" w="med" len="med"/>
+                    </a:lnT>
+                    <a:lnB w="9525" cap="flat" cmpd="sng" algn="ctr">
+                      <a:solidFill>
+                        <a:srgbClr val="D8DEE2"/>
+                      </a:solidFill>
+                      <a:prstDash val="solid"/>
+                      <a:round/>
+                      <a:headEnd type="none" w="med" len="med"/>
+                      <a:tailEnd type="none" w="med" len="med"/>
+                    </a:lnB>
+                  </a:tcPr>
+                </a:tc>
+                <a:tc>
+                  <a:txBody>
+                    <a:bodyPr/>
+                    <a:lstStyle/>
+                    <a:p>
+                      <a:pPr algn="ctr" indent="0" marL="0">
+                        <a:buNone/>
+                      </a:pPr>
+                      <a:r>
+                        <a:rPr lang="en-US" sz="1050" dirty="0">
+                          <a:solidFill>
+                            <a:srgbClr val="5B6B7A"/>
+                          </a:solidFill>
+                          <a:latin typeface="Calibri" pitchFamily="34" charset="0"/>
+                          <a:ea typeface="Calibri" pitchFamily="34" charset="-122"/>
+                          <a:cs typeface="Calibri" pitchFamily="34" charset="-120"/>
+                        </a:rPr>
+                        <a:t>—</a:t>
+                      </a:r>
+                      <a:endParaRPr lang="en-US" sz="1050" dirty="0">
+                        <a:latin typeface="Calibri" charset="0"/>
+                        <a:ea typeface="Calibri" charset="0"/>
+                        <a:cs typeface="Calibri" charset="0"/>
+                      </a:endParaRPr>
+                    </a:p>
+                  </a:txBody>
+                  <a:tcPr marL="101600" marR="101600" marT="63500" marB="63500" anchor="ctr">
                     <a:lnL w="9525" cap="flat" cmpd="sng" algn="ctr">
                       <a:solidFill>
                         <a:srgbClr val="D8DEE2"/>
@@ -2988,24 +6725,91 @@
                         <a:buNone/>
                       </a:pPr>
                       <a:r>
-                        <a:rPr lang="en-US" sz="1250" dirty="0">
+                        <a:rPr lang="en-US" sz="1050" b="1" dirty="0">
                           <a:solidFill>
-                            <a:srgbClr val="5B6B7A"/>
+                            <a:srgbClr val="C97A1A"/>
                           </a:solidFill>
                           <a:latin typeface="Calibri" pitchFamily="34" charset="0"/>
                           <a:ea typeface="Calibri" pitchFamily="34" charset="-122"/>
                           <a:cs typeface="Calibri" pitchFamily="34" charset="-120"/>
                         </a:rPr>
-                        <a:t>≈2–4 недели</a:t>
+                        <a:t>Требуется от Д8</a:t>
                       </a:r>
-                      <a:endParaRPr lang="en-US" sz="1250" dirty="0">
+                      <a:endParaRPr lang="en-US" sz="1050" dirty="0">
                         <a:latin typeface="Calibri" charset="0"/>
                         <a:ea typeface="Calibri" charset="0"/>
                         <a:cs typeface="Calibri" charset="0"/>
                       </a:endParaRPr>
                     </a:p>
                   </a:txBody>
-                  <a:tcPr marL="127000" marR="127000" marT="76200" marB="76200" anchor="ctr">
+                  <a:tcPr marL="101600" marR="101600" marT="63500" marB="63500" anchor="ctr">
+                    <a:lnL w="9525" cap="flat" cmpd="sng" algn="ctr">
+                      <a:solidFill>
+                        <a:srgbClr val="D8DEE2"/>
+                      </a:solidFill>
+                      <a:prstDash val="solid"/>
+                      <a:round/>
+                      <a:headEnd type="none" w="med" len="med"/>
+                      <a:tailEnd type="none" w="med" len="med"/>
+                    </a:lnL>
+                    <a:lnR w="9525" cap="flat" cmpd="sng" algn="ctr">
+                      <a:solidFill>
+                        <a:srgbClr val="D8DEE2"/>
+                      </a:solidFill>
+                      <a:prstDash val="solid"/>
+                      <a:round/>
+                      <a:headEnd type="none" w="med" len="med"/>
+                      <a:tailEnd type="none" w="med" len="med"/>
+                    </a:lnR>
+                    <a:lnT w="9525" cap="flat" cmpd="sng" algn="ctr">
+                      <a:solidFill>
+                        <a:srgbClr val="D8DEE2"/>
+                      </a:solidFill>
+                      <a:prstDash val="solid"/>
+                      <a:round/>
+                      <a:headEnd type="none" w="med" len="med"/>
+                      <a:tailEnd type="none" w="med" len="med"/>
+                    </a:lnT>
+                    <a:lnB w="9525" cap="flat" cmpd="sng" algn="ctr">
+                      <a:solidFill>
+                        <a:srgbClr val="D8DEE2"/>
+                      </a:solidFill>
+                      <a:prstDash val="solid"/>
+                      <a:round/>
+                      <a:headEnd type="none" w="med" len="med"/>
+                      <a:tailEnd type="none" w="med" len="med"/>
+                    </a:lnB>
+                  </a:tcPr>
+                </a:tc>
+              </a:tr>
+              <a:tr h="373380">
+                <a:tc>
+                  <a:txBody>
+                    <a:bodyPr/>
+                    <a:lstStyle/>
+                    <a:p>
+                      <a:pPr indent="0" marL="0">
+                        <a:buNone/>
+                      </a:pPr>
+                      <a:r>
+                        <a:rPr lang="en-US" sz="1080" dirty="0">
+                          <a:solidFill>
+                            <a:srgbClr val="1A2733"/>
+                          </a:solidFill>
+                          <a:latin typeface="Calibri" pitchFamily="34" charset="0"/>
+                          <a:ea typeface="Calibri" pitchFamily="34" charset="-122"/>
+                          <a:cs typeface="Calibri" pitchFamily="34" charset="-120"/>
+                        </a:rPr>
+                        <a:t>Пользовательская и админская документация</a:t>
+                      </a:r>
+                      <a:endParaRPr lang="en-US" sz="1080" dirty="0">
+                        <a:latin typeface="Calibri" charset="0"/>
+                        <a:ea typeface="Calibri" charset="0"/>
+                        <a:cs typeface="Calibri" charset="0"/>
+                      </a:endParaRPr>
+                    </a:p>
+                  </a:txBody>
+                  <a:tcPr marL="101600" marR="101600" marT="63500" marB="63500" anchor="ctr">
                     <a:lnL w="9525" cap="flat" cmpd="sng" algn="ctr">
                       <a:solidFill>
                         <a:srgbClr val="D8DEE2"/>
@@ -3053,7 +6857,7 @@
                         <a:buNone/>
                       </a:pPr>
                       <a:r>
-                        <a:rPr lang="en-US" sz="1200" b="1" dirty="0">
+                        <a:rPr lang="en-US" sz="1050" b="1" dirty="0">
                           <a:solidFill>
                             <a:srgbClr val="C97A1A"/>
                           </a:solidFill>
@@ -3061,16 +6865,135 @@
                           <a:ea typeface="Calibri" pitchFamily="34" charset="-122"/>
                           <a:cs typeface="Calibri" pitchFamily="34" charset="-120"/>
                         </a:rPr>
-                        <a:t>Ожидает уточнения</a:t>
+                        <a:t>Высокий</a:t>
                       </a:r>
-                      <a:endParaRPr lang="en-US" sz="1200" dirty="0">
+                      <a:endParaRPr lang="en-US" sz="1050" dirty="0">
                         <a:latin typeface="Calibri" charset="0"/>
                         <a:ea typeface="Calibri" charset="0"/>
                         <a:cs typeface="Calibri" charset="0"/>
                       </a:endParaRPr>
                     </a:p>
                   </a:txBody>
-                  <a:tcPr marL="127000" marR="127000" marT="76200" marB="76200" anchor="ctr">
+                  <a:tcPr marL="101600" marR="101600" marT="63500" marB="63500" anchor="ctr">
+                    <a:lnL w="9525" cap="flat" cmpd="sng" algn="ctr">
+                      <a:solidFill>
+                        <a:srgbClr val="D8DEE2"/>
+                      </a:solidFill>
+                      <a:prstDash val="solid"/>
+                      <a:round/>
+                      <a:headEnd type="none" w="med" len="med"/>
+                      <a:tailEnd type="none" w="med" len="med"/>
+                    </a:lnL>
+                    <a:lnR w="9525" cap="flat" cmpd="sng" algn="ctr">
+                      <a:solidFill>
+                        <a:srgbClr val="D8DEE2"/>
+                      </a:solidFill>
+                      <a:prstDash val="solid"/>
+                      <a:round/>
+                      <a:headEnd type="none" w="med" len="med"/>
+                      <a:tailEnd type="none" w="med" len="med"/>
+                    </a:lnR>
+                    <a:lnT w="9525" cap="flat" cmpd="sng" algn="ctr">
+                      <a:solidFill>
+                        <a:srgbClr val="D8DEE2"/>
+                      </a:solidFill>
+                      <a:prstDash val="solid"/>
+                      <a:round/>
+                      <a:headEnd type="none" w="med" len="med"/>
+                      <a:tailEnd type="none" w="med" len="med"/>
+                    </a:lnT>
+                    <a:lnB w="9525" cap="flat" cmpd="sng" algn="ctr">
+                      <a:solidFill>
+                        <a:srgbClr val="D8DEE2"/>
+                      </a:solidFill>
+                      <a:prstDash val="solid"/>
+                      <a:round/>
+                      <a:headEnd type="none" w="med" len="med"/>
+                      <a:tailEnd type="none" w="med" len="med"/>
+                    </a:lnB>
+                  </a:tcPr>
+                </a:tc>
+                <a:tc>
+                  <a:txBody>
+                    <a:bodyPr/>
+                    <a:lstStyle/>
+                    <a:p>
+                      <a:pPr algn="ctr" indent="0" marL="0">
+                        <a:buNone/>
+                      </a:pPr>
+                      <a:r>
+                        <a:rPr lang="en-US" sz="1050" dirty="0">
+                          <a:solidFill>
+                            <a:srgbClr val="5B6B7A"/>
+                          </a:solidFill>
+                          <a:latin typeface="Calibri" pitchFamily="34" charset="0"/>
+                          <a:ea typeface="Calibri" pitchFamily="34" charset="-122"/>
+                          <a:cs typeface="Calibri" pitchFamily="34" charset="-120"/>
+                        </a:rPr>
+                        <a:t>4 квартал</a:t>
+                      </a:r>
+                      <a:endParaRPr lang="en-US" sz="1050" dirty="0">
+                        <a:latin typeface="Calibri" charset="0"/>
+                        <a:ea typeface="Calibri" charset="0"/>
+                        <a:cs typeface="Calibri" charset="0"/>
+                      </a:endParaRPr>
+                    </a:p>
+                  </a:txBody>
+                  <a:tcPr marL="101600" marR="101600" marT="63500" marB="63500" anchor="ctr">
+                    <a:lnL w="9525" cap="flat" cmpd="sng" algn="ctr">
+                      <a:solidFill>
+                        <a:srgbClr val="D8DEE2"/>
+                      </a:solidFill>
+                      <a:prstDash val="solid"/>
+                      <a:round/>
+                      <a:headEnd type="none" w="med" len="med"/>
+                      <a:tailEnd type="none" w="med" len="med"/>
+                    </a:lnL>
+                    <a:lnR w="9525" cap="flat" cmpd="sng" algn="ctr">
+                      <a:solidFill>
+                        <a:srgbClr val="D8DEE2"/>
+                      </a:solidFill>
+                      <a:prstDash val="solid"/>
+                      <a:round/>
+                      <a:headEnd type="none" w="med" len="med"/>
+                      <a:tailEnd type="none" w="med" len="med"/>
+                    </a:lnR>
+                    <a:lnT w="9525" cap="flat" cmpd="sng" algn="ctr">
+                      <a:solidFill>
+                        <a:srgbClr val="D8DEE2"/>
+                      </a:solidFill>
+                      <a:prstDash val="solid"/>
+                      <a:round/>
+                      <a:headEnd type="none" w="med" len="med"/>
+                      <a:tailEnd type="none" w="med" len="med"/>
+                    </a:lnT>
+                    <a:lnB w="9525" cap="flat" cmpd="sng" algn="ctr">
+                      <a:solidFill>
+                        <a:srgbClr val="D8DEE2"/>
+                      </a:solidFill>
+                      <a:prstDash val="solid"/>
+                      <a:round/>
+                      <a:headEnd type="none" w="med" len="med"/>
+                      <a:tailEnd type="none" w="med" len="med"/>
+                    </a:lnB>
+                  </a:tcPr>
+                </a:tc>
+                <a:tc>
+                  <a:txBody>
+                    <a:bodyPr/>
+                    <a:lstStyle/>
+                    <a:p>
+                      <a:pPr indent="0" marL="0">
+                        <a:buNone/>
+                      </a:pPr>
+                      <a:endParaRPr lang="en-US" sz="1050" dirty="0">
+                        <a:latin typeface="Calibri" charset="0"/>
+                        <a:ea typeface="Calibri" charset="0"/>
+                        <a:cs typeface="Calibri" charset="0"/>
+                      </a:endParaRPr>
+                    </a:p>
+                  </a:txBody>
+                  <a:tcPr marL="101600" marR="101600" marT="63500" marB="63500" anchor="ctr">
                     <a:lnL w="9525" cap="flat" cmpd="sng" algn="ctr">
                       <a:solidFill>
                         <a:srgbClr val="D8DEE2"/>
@@ -3110,7 +7033,7 @@
                   </a:tcPr>
                 </a:tc>
               </a:tr>
-              <a:tr h="640080">
+              <a:tr h="373380">
                 <a:tc>
                   <a:txBody>
                     <a:bodyPr/>
@@ -3120,24 +7043,154 @@
                         <a:buNone/>
                       </a:pPr>
                       <a:r>
-                        <a:rPr lang="en-US" sz="1250" b="1" dirty="0">
+                        <a:rPr lang="en-US" sz="1080" dirty="0">
                           <a:solidFill>
-                            <a:srgbClr val="0A5F67"/>
+                            <a:srgbClr val="1A2733"/>
                           </a:solidFill>
                           <a:latin typeface="Calibri" pitchFamily="34" charset="0"/>
                           <a:ea typeface="Calibri" pitchFamily="34" charset="-122"/>
                           <a:cs typeface="Calibri" pitchFamily="34" charset="-120"/>
                         </a:rPr>
-                        <a:t>Волна 2</a:t>
+                        <a:t>Упрощение заведения пользователей</a:t>
                       </a:r>
-                      <a:endParaRPr lang="en-US" sz="1250" dirty="0">
+                      <a:endParaRPr lang="en-US" sz="1080" dirty="0">
                         <a:latin typeface="Calibri" charset="0"/>
                         <a:ea typeface="Calibri" charset="0"/>
                         <a:cs typeface="Calibri" charset="0"/>
                       </a:endParaRPr>
                     </a:p>
                   </a:txBody>
-                  <a:tcPr marL="127000" marR="127000" marT="76200" marB="76200" anchor="ctr">
+                  <a:tcPr marL="101600" marR="101600" marT="63500" marB="63500" anchor="ctr">
+                    <a:lnL w="9525" cap="flat" cmpd="sng" algn="ctr">
+                      <a:solidFill>
+                        <a:srgbClr val="D8DEE2"/>
+                      </a:solidFill>
+                      <a:prstDash val="solid"/>
+                      <a:round/>
+                      <a:headEnd type="none" w="med" len="med"/>
+                      <a:tailEnd type="none" w="med" len="med"/>
+                    </a:lnL>
+                    <a:lnR w="9525" cap="flat" cmpd="sng" algn="ctr">
+                      <a:solidFill>
+                        <a:srgbClr val="D8DEE2"/>
+                      </a:solidFill>
+                      <a:prstDash val="solid"/>
+                      <a:round/>
+                      <a:headEnd type="none" w="med" len="med"/>
+                      <a:tailEnd type="none" w="med" len="med"/>
+                    </a:lnR>
+                    <a:lnT w="9525" cap="flat" cmpd="sng" algn="ctr">
+                      <a:solidFill>
+                        <a:srgbClr val="D8DEE2"/>
+                      </a:solidFill>
+                      <a:prstDash val="solid"/>
+                      <a:round/>
+                      <a:headEnd type="none" w="med" len="med"/>
+                      <a:tailEnd type="none" w="med" len="med"/>
+                    </a:lnT>
+                    <a:lnB w="9525" cap="flat" cmpd="sng" algn="ctr">
+                      <a:solidFill>
+                        <a:srgbClr val="D8DEE2"/>
+                      </a:solidFill>
+                      <a:prstDash val="solid"/>
+                      <a:round/>
+                      <a:headEnd type="none" w="med" len="med"/>
+                      <a:tailEnd type="none" w="med" len="med"/>
+                    </a:lnB>
+                  </a:tcPr>
+                </a:tc>
+                <a:tc>
+                  <a:txBody>
+                    <a:bodyPr/>
+                    <a:lstStyle/>
+                    <a:p>
+                      <a:pPr algn="ctr" indent="0" marL="0">
+                        <a:buNone/>
+                      </a:pPr>
+                      <a:r>
+                        <a:rPr lang="en-US" sz="1050" b="1" dirty="0">
+                          <a:solidFill>
+                            <a:srgbClr val="5B6B7A"/>
+                          </a:solidFill>
+                          <a:latin typeface="Calibri" pitchFamily="34" charset="0"/>
+                          <a:ea typeface="Calibri" pitchFamily="34" charset="-122"/>
+                          <a:cs typeface="Calibri" pitchFamily="34" charset="-120"/>
+                        </a:rPr>
+                        <a:t>Нормальный</a:t>
+                      </a:r>
+                      <a:endParaRPr lang="en-US" sz="1050" dirty="0">
+                        <a:latin typeface="Calibri" charset="0"/>
+                        <a:ea typeface="Calibri" charset="0"/>
+                        <a:cs typeface="Calibri" charset="0"/>
+                      </a:endParaRPr>
+                    </a:p>
+                  </a:txBody>
+                  <a:tcPr marL="101600" marR="101600" marT="63500" marB="63500" anchor="ctr">
+                    <a:lnL w="9525" cap="flat" cmpd="sng" algn="ctr">
+                      <a:solidFill>
+                        <a:srgbClr val="D8DEE2"/>
+                      </a:solidFill>
+                      <a:prstDash val="solid"/>
+                      <a:round/>
+                      <a:headEnd type="none" w="med" len="med"/>
+                      <a:tailEnd type="none" w="med" len="med"/>
+                    </a:lnL>
+                    <a:lnR w="9525" cap="flat" cmpd="sng" algn="ctr">
+                      <a:solidFill>
+                        <a:srgbClr val="D8DEE2"/>
+                      </a:solidFill>
+                      <a:prstDash val="solid"/>
+                      <a:round/>
+                      <a:headEnd type="none" w="med" len="med"/>
+                      <a:tailEnd type="none" w="med" len="med"/>
+                    </a:lnR>
+                    <a:lnT w="9525" cap="flat" cmpd="sng" algn="ctr">
+                      <a:solidFill>
+                        <a:srgbClr val="D8DEE2"/>
+                      </a:solidFill>
+                      <a:prstDash val="solid"/>
+                      <a:round/>
+                      <a:headEnd type="none" w="med" len="med"/>
+                      <a:tailEnd type="none" w="med" len="med"/>
+                    </a:lnT>
+                    <a:lnB w="9525" cap="flat" cmpd="sng" algn="ctr">
+                      <a:solidFill>
+                        <a:srgbClr val="D8DEE2"/>
+                      </a:solidFill>
+                      <a:prstDash val="solid"/>
+                      <a:round/>
+                      <a:headEnd type="none" w="med" len="med"/>
+                      <a:tailEnd type="none" w="med" len="med"/>
+                    </a:lnB>
+                  </a:tcPr>
+                </a:tc>
+                <a:tc>
+                  <a:txBody>
+                    <a:bodyPr/>
+                    <a:lstStyle/>
+                    <a:p>
+                      <a:pPr algn="ctr" indent="0" marL="0">
+                        <a:buNone/>
+                      </a:pPr>
+                      <a:r>
+                        <a:rPr lang="en-US" sz="1050" dirty="0">
+                          <a:solidFill>
+                            <a:srgbClr val="5B6B7A"/>
+                          </a:solidFill>
+                          <a:latin typeface="Calibri" pitchFamily="34" charset="0"/>
+                          <a:ea typeface="Calibri" pitchFamily="34" charset="-122"/>
+                          <a:cs typeface="Calibri" pitchFamily="34" charset="-120"/>
+                        </a:rPr>
+                        <a:t>—</a:t>
+                      </a:r>
+                      <a:endParaRPr lang="en-US" sz="1050" dirty="0">
+                        <a:latin typeface="Calibri" charset="0"/>
+                        <a:ea typeface="Calibri" charset="0"/>
+                        <a:cs typeface="Calibri" charset="0"/>
+                      </a:endParaRPr>
+                    </a:p>
+                  </a:txBody>
+                  <a:tcPr marL="101600" marR="101600" marT="63500" marB="63500" anchor="ctr">
                     <a:lnL w="9525" cap="flat" cmpd="sng" algn="ctr">
                       <a:solidFill>
                         <a:srgbClr val="D8DEE2"/>
@@ -3185,137 +7238,7 @@
                         <a:buNone/>
                       </a:pPr>
                       <a:r>
-                        <a:rPr lang="en-US" sz="1250" dirty="0">
-                          <a:solidFill>
-                            <a:srgbClr val="1A2733"/>
-                          </a:solidFill>
-                          <a:latin typeface="Calibri" pitchFamily="34" charset="0"/>
-                          <a:ea typeface="Calibri" pitchFamily="34" charset="-122"/>
-                          <a:cs typeface="Calibri" pitchFamily="34" charset="-120"/>
-                        </a:rPr>
-                        <a:t>Расширение КХД и ESB</a:t>
-                      </a:r>
-                      <a:endParaRPr lang="en-US" sz="1250" dirty="0">
-                        <a:latin typeface="Calibri" charset="0"/>
-                        <a:ea typeface="Calibri" charset="0"/>
-                        <a:cs typeface="Calibri" charset="0"/>
-                      </a:endParaRPr>
-                    </a:p>
-                  </a:txBody>
-                  <a:tcPr marL="127000" marR="127000" marT="76200" marB="76200" anchor="ctr">
-                    <a:lnL w="9525" cap="flat" cmpd="sng" algn="ctr">
-                      <a:solidFill>
-                        <a:srgbClr val="D8DEE2"/>
-                      </a:solidFill>
-                      <a:prstDash val="solid"/>
-                      <a:round/>
-                      <a:headEnd type="none" w="med" len="med"/>
-                      <a:tailEnd type="none" w="med" len="med"/>
-                    </a:lnL>
-                    <a:lnR w="9525" cap="flat" cmpd="sng" algn="ctr">
-                      <a:solidFill>
-                        <a:srgbClr val="D8DEE2"/>
-                      </a:solidFill>
-                      <a:prstDash val="solid"/>
-                      <a:round/>
-                      <a:headEnd type="none" w="med" len="med"/>
-                      <a:tailEnd type="none" w="med" len="med"/>
-                    </a:lnR>
-                    <a:lnT w="9525" cap="flat" cmpd="sng" algn="ctr">
-                      <a:solidFill>
-                        <a:srgbClr val="D8DEE2"/>
-                      </a:solidFill>
-                      <a:prstDash val="solid"/>
-                      <a:round/>
-                      <a:headEnd type="none" w="med" len="med"/>
-                      <a:tailEnd type="none" w="med" len="med"/>
-                    </a:lnT>
-                    <a:lnB w="9525" cap="flat" cmpd="sng" algn="ctr">
-                      <a:solidFill>
-                        <a:srgbClr val="D8DEE2"/>
-                      </a:solidFill>
-                      <a:prstDash val="solid"/>
-                      <a:round/>
-                      <a:headEnd type="none" w="med" len="med"/>
-                      <a:tailEnd type="none" w="med" len="med"/>
-                    </a:lnB>
-                  </a:tcPr>
-                </a:tc>
-                <a:tc>
-                  <a:txBody>
-                    <a:bodyPr/>
-                    <a:lstStyle/>
-                    <a:p>
-                      <a:pPr indent="0" marL="0">
-                        <a:buNone/>
-                      </a:pPr>
-                      <a:r>
-                        <a:rPr lang="en-US" sz="1250" dirty="0">
-                          <a:solidFill>
-                            <a:srgbClr val="5B6B7A"/>
-                          </a:solidFill>
-                          <a:latin typeface="Calibri" pitchFamily="34" charset="0"/>
-                          <a:ea typeface="Calibri" pitchFamily="34" charset="-122"/>
-                          <a:cs typeface="Calibri" pitchFamily="34" charset="-120"/>
-                        </a:rPr>
-                        <a:t>≈4–6 недель</a:t>
-                      </a:r>
-                      <a:endParaRPr lang="en-US" sz="1250" dirty="0">
-                        <a:latin typeface="Calibri" charset="0"/>
-                        <a:ea typeface="Calibri" charset="0"/>
-                        <a:cs typeface="Calibri" charset="0"/>
-                      </a:endParaRPr>
-                    </a:p>
-                  </a:txBody>
-                  <a:tcPr marL="127000" marR="127000" marT="76200" marB="76200" anchor="ctr">
-                    <a:lnL w="9525" cap="flat" cmpd="sng" algn="ctr">
-                      <a:solidFill>
-                        <a:srgbClr val="D8DEE2"/>
-                      </a:solidFill>
-                      <a:prstDash val="solid"/>
-                      <a:round/>
-                      <a:headEnd type="none" w="med" len="med"/>
-                      <a:tailEnd type="none" w="med" len="med"/>
-                    </a:lnL>
-                    <a:lnR w="9525" cap="flat" cmpd="sng" algn="ctr">
-                      <a:solidFill>
-                        <a:srgbClr val="D8DEE2"/>
-                      </a:solidFill>
-                      <a:prstDash val="solid"/>
-                      <a:round/>
-                      <a:headEnd type="none" w="med" len="med"/>
-                      <a:tailEnd type="none" w="med" len="med"/>
-                    </a:lnR>
-                    <a:lnT w="9525" cap="flat" cmpd="sng" algn="ctr">
-                      <a:solidFill>
-                        <a:srgbClr val="D8DEE2"/>
-                      </a:solidFill>
-                      <a:prstDash val="solid"/>
-                      <a:round/>
-                      <a:headEnd type="none" w="med" len="med"/>
-                      <a:tailEnd type="none" w="med" len="med"/>
-                    </a:lnT>
-                    <a:lnB w="9525" cap="flat" cmpd="sng" algn="ctr">
-                      <a:solidFill>
-                        <a:srgbClr val="D8DEE2"/>
-                      </a:solidFill>
-                      <a:prstDash val="solid"/>
-                      <a:round/>
-                      <a:headEnd type="none" w="med" len="med"/>
-                      <a:tailEnd type="none" w="med" len="med"/>
-                    </a:lnB>
-                  </a:tcPr>
-                </a:tc>
-                <a:tc>
-                  <a:txBody>
-                    <a:bodyPr/>
-                    <a:lstStyle/>
-                    <a:p>
-                      <a:pPr algn="ctr" indent="0" marL="0">
-                        <a:buNone/>
-                      </a:pPr>
-                      <a:r>
-                        <a:rPr lang="en-US" sz="1200" b="1" dirty="0">
+                        <a:rPr lang="en-US" sz="1050" b="1" dirty="0">
                           <a:solidFill>
                             <a:srgbClr val="C97A1A"/>
                           </a:solidFill>
@@ -3323,802 +7246,16 @@
                           <a:ea typeface="Calibri" pitchFamily="34" charset="-122"/>
                           <a:cs typeface="Calibri" pitchFamily="34" charset="-120"/>
                         </a:rPr>
-                        <a:t>Ожидает уточнения</a:t>
+                        <a:t>Требуется от Д8</a:t>
                       </a:r>
-                      <a:endParaRPr lang="en-US" sz="1200" dirty="0">
+                      <a:endParaRPr lang="en-US" sz="1050" dirty="0">
                         <a:latin typeface="Calibri" charset="0"/>
                         <a:ea typeface="Calibri" charset="0"/>
                         <a:cs typeface="Calibri" charset="0"/>
                       </a:endParaRPr>
                     </a:p>
                   </a:txBody>
-                  <a:tcPr marL="127000" marR="127000" marT="76200" marB="76200" anchor="ctr">
-                    <a:lnL w="9525" cap="flat" cmpd="sng" algn="ctr">
-                      <a:solidFill>
-                        <a:srgbClr val="D8DEE2"/>
-                      </a:solidFill>
-                      <a:prstDash val="solid"/>
-                      <a:round/>
-                      <a:headEnd type="none" w="med" len="med"/>
-                      <a:tailEnd type="none" w="med" len="med"/>
-                    </a:lnL>
-                    <a:lnR w="9525" cap="flat" cmpd="sng" algn="ctr">
-                      <a:solidFill>
-                        <a:srgbClr val="D8DEE2"/>
-                      </a:solidFill>
-                      <a:prstDash val="solid"/>
-                      <a:round/>
-                      <a:headEnd type="none" w="med" len="med"/>
-                      <a:tailEnd type="none" w="med" len="med"/>
-                    </a:lnR>
-                    <a:lnT w="9525" cap="flat" cmpd="sng" algn="ctr">
-                      <a:solidFill>
-                        <a:srgbClr val="D8DEE2"/>
-                      </a:solidFill>
-                      <a:prstDash val="solid"/>
-                      <a:round/>
-                      <a:headEnd type="none" w="med" len="med"/>
-                      <a:tailEnd type="none" w="med" len="med"/>
-                    </a:lnT>
-                    <a:lnB w="9525" cap="flat" cmpd="sng" algn="ctr">
-                      <a:solidFill>
-                        <a:srgbClr val="D8DEE2"/>
-                      </a:solidFill>
-                      <a:prstDash val="solid"/>
-                      <a:round/>
-                      <a:headEnd type="none" w="med" len="med"/>
-                      <a:tailEnd type="none" w="med" len="med"/>
-                    </a:lnB>
-                  </a:tcPr>
-                </a:tc>
-              </a:tr>
-              <a:tr h="640080">
-                <a:tc>
-                  <a:txBody>
-                    <a:bodyPr/>
-                    <a:lstStyle/>
-                    <a:p>
-                      <a:pPr indent="0" marL="0">
-                        <a:buNone/>
-                      </a:pPr>
-                      <a:r>
-                        <a:rPr lang="en-US" sz="1250" b="1" dirty="0">
-                          <a:solidFill>
-                            <a:srgbClr val="0A5F67"/>
-                          </a:solidFill>
-                          <a:latin typeface="Calibri" pitchFamily="34" charset="0"/>
-                          <a:ea typeface="Calibri" pitchFamily="34" charset="-122"/>
-                          <a:cs typeface="Calibri" pitchFamily="34" charset="-120"/>
-                        </a:rPr>
-                        <a:t>Волна 3+</a:t>
-                      </a:r>
-                      <a:endParaRPr lang="en-US" sz="1250" dirty="0">
-                        <a:latin typeface="Calibri" charset="0"/>
-                        <a:ea typeface="Calibri" charset="0"/>
-                        <a:cs typeface="Calibri" charset="0"/>
-                      </a:endParaRPr>
-                    </a:p>
-                  </a:txBody>
-                  <a:tcPr marL="127000" marR="127000" marT="76200" marB="76200" anchor="ctr">
-                    <a:lnL w="9525" cap="flat" cmpd="sng" algn="ctr">
-                      <a:solidFill>
-                        <a:srgbClr val="D8DEE2"/>
-                      </a:solidFill>
-                      <a:prstDash val="solid"/>
-                      <a:round/>
-                      <a:headEnd type="none" w="med" len="med"/>
-                      <a:tailEnd type="none" w="med" len="med"/>
-                    </a:lnL>
-                    <a:lnR w="9525" cap="flat" cmpd="sng" algn="ctr">
-                      <a:solidFill>
-                        <a:srgbClr val="D8DEE2"/>
-                      </a:solidFill>
-                      <a:prstDash val="solid"/>
-                      <a:round/>
-                      <a:headEnd type="none" w="med" len="med"/>
-                      <a:tailEnd type="none" w="med" len="med"/>
-                    </a:lnR>
-                    <a:lnT w="9525" cap="flat" cmpd="sng" algn="ctr">
-                      <a:solidFill>
-                        <a:srgbClr val="D8DEE2"/>
-                      </a:solidFill>
-                      <a:prstDash val="solid"/>
-                      <a:round/>
-                      <a:headEnd type="none" w="med" len="med"/>
-                      <a:tailEnd type="none" w="med" len="med"/>
-                    </a:lnT>
-                    <a:lnB w="9525" cap="flat" cmpd="sng" algn="ctr">
-                      <a:solidFill>
-                        <a:srgbClr val="D8DEE2"/>
-                      </a:solidFill>
-                      <a:prstDash val="solid"/>
-                      <a:round/>
-                      <a:headEnd type="none" w="med" len="med"/>
-                      <a:tailEnd type="none" w="med" len="med"/>
-                    </a:lnB>
-                  </a:tcPr>
-                </a:tc>
-                <a:tc>
-                  <a:txBody>
-                    <a:bodyPr/>
-                    <a:lstStyle/>
-                    <a:p>
-                      <a:pPr indent="0" marL="0">
-                        <a:buNone/>
-                      </a:pPr>
-                      <a:r>
-                        <a:rPr lang="en-US" sz="1250" dirty="0">
-                          <a:solidFill>
-                            <a:srgbClr val="1A2733"/>
-                          </a:solidFill>
-                          <a:latin typeface="Calibri" pitchFamily="34" charset="0"/>
-                          <a:ea typeface="Calibri" pitchFamily="34" charset="-122"/>
-                          <a:cs typeface="Calibri" pitchFamily="34" charset="-120"/>
-                        </a:rPr>
-                        <a:t>Не определено</a:t>
-                      </a:r>
-                      <a:endParaRPr lang="en-US" sz="1250" dirty="0">
-                        <a:latin typeface="Calibri" charset="0"/>
-                        <a:ea typeface="Calibri" charset="0"/>
-                        <a:cs typeface="Calibri" charset="0"/>
-                      </a:endParaRPr>
-                    </a:p>
-                  </a:txBody>
-                  <a:tcPr marL="127000" marR="127000" marT="76200" marB="76200" anchor="ctr">
-                    <a:lnL w="9525" cap="flat" cmpd="sng" algn="ctr">
-                      <a:solidFill>
-                        <a:srgbClr val="D8DEE2"/>
-                      </a:solidFill>
-                      <a:prstDash val="solid"/>
-                      <a:round/>
-                      <a:headEnd type="none" w="med" len="med"/>
-                      <a:tailEnd type="none" w="med" len="med"/>
-                    </a:lnL>
-                    <a:lnR w="9525" cap="flat" cmpd="sng" algn="ctr">
-                      <a:solidFill>
-                        <a:srgbClr val="D8DEE2"/>
-                      </a:solidFill>
-                      <a:prstDash val="solid"/>
-                      <a:round/>
-                      <a:headEnd type="none" w="med" len="med"/>
-                      <a:tailEnd type="none" w="med" len="med"/>
-                    </a:lnR>
-                    <a:lnT w="9525" cap="flat" cmpd="sng" algn="ctr">
-                      <a:solidFill>
-                        <a:srgbClr val="D8DEE2"/>
-                      </a:solidFill>
-                      <a:prstDash val="solid"/>
-                      <a:round/>
-                      <a:headEnd type="none" w="med" len="med"/>
-                      <a:tailEnd type="none" w="med" len="med"/>
-                    </a:lnT>
-                    <a:lnB w="9525" cap="flat" cmpd="sng" algn="ctr">
-                      <a:solidFill>
-                        <a:srgbClr val="D8DEE2"/>
-                      </a:solidFill>
-                      <a:prstDash val="solid"/>
-                      <a:round/>
-                      <a:headEnd type="none" w="med" len="med"/>
-                      <a:tailEnd type="none" w="med" len="med"/>
-                    </a:lnB>
-                  </a:tcPr>
-                </a:tc>
-                <a:tc>
-                  <a:txBody>
-                    <a:bodyPr/>
-                    <a:lstStyle/>
-                    <a:p>
-                      <a:pPr indent="0" marL="0">
-                        <a:buNone/>
-                      </a:pPr>
-                      <a:r>
-                        <a:rPr lang="en-US" sz="1250" dirty="0">
-                          <a:solidFill>
-                            <a:srgbClr val="5B6B7A"/>
-                          </a:solidFill>
-                          <a:latin typeface="Calibri" pitchFamily="34" charset="0"/>
-                          <a:ea typeface="Calibri" pitchFamily="34" charset="-122"/>
-                          <a:cs typeface="Calibri" pitchFamily="34" charset="-120"/>
-                        </a:rPr>
-                        <a:t>Не определено</a:t>
-                      </a:r>
-                      <a:endParaRPr lang="en-US" sz="1250" dirty="0">
-                        <a:latin typeface="Calibri" charset="0"/>
-                        <a:ea typeface="Calibri" charset="0"/>
-                        <a:cs typeface="Calibri" charset="0"/>
-                      </a:endParaRPr>
-                    </a:p>
-                  </a:txBody>
-                  <a:tcPr marL="127000" marR="127000" marT="76200" marB="76200" anchor="ctr">
-                    <a:lnL w="9525" cap="flat" cmpd="sng" algn="ctr">
-                      <a:solidFill>
-                        <a:srgbClr val="D8DEE2"/>
-                      </a:solidFill>
-                      <a:prstDash val="solid"/>
-                      <a:round/>
-                      <a:headEnd type="none" w="med" len="med"/>
-                      <a:tailEnd type="none" w="med" len="med"/>
-                    </a:lnL>
-                    <a:lnR w="9525" cap="flat" cmpd="sng" algn="ctr">
-                      <a:solidFill>
-                        <a:srgbClr val="D8DEE2"/>
-                      </a:solidFill>
-                      <a:prstDash val="solid"/>
-                      <a:round/>
-                      <a:headEnd type="none" w="med" len="med"/>
-                      <a:tailEnd type="none" w="med" len="med"/>
-                    </a:lnR>
-                    <a:lnT w="9525" cap="flat" cmpd="sng" algn="ctr">
-                      <a:solidFill>
-                        <a:srgbClr val="D8DEE2"/>
-                      </a:solidFill>
-                      <a:prstDash val="solid"/>
-                      <a:round/>
-                      <a:headEnd type="none" w="med" len="med"/>
-                      <a:tailEnd type="none" w="med" len="med"/>
-                    </a:lnT>
-                    <a:lnB w="9525" cap="flat" cmpd="sng" algn="ctr">
-                      <a:solidFill>
-                        <a:srgbClr val="D8DEE2"/>
-                      </a:solidFill>
-                      <a:prstDash val="solid"/>
-                      <a:round/>
-                      <a:headEnd type="none" w="med" len="med"/>
-                      <a:tailEnd type="none" w="med" len="med"/>
-                    </a:lnB>
-                  </a:tcPr>
-                </a:tc>
-                <a:tc>
-                  <a:txBody>
-                    <a:bodyPr/>
-                    <a:lstStyle/>
-                    <a:p>
-                      <a:pPr algn="ctr" indent="0" marL="0">
-                        <a:buNone/>
-                      </a:pPr>
-                      <a:r>
-                        <a:rPr lang="en-US" sz="1200" b="1" dirty="0">
-                          <a:solidFill>
-                            <a:srgbClr val="C97A1A"/>
-                          </a:solidFill>
-                          <a:latin typeface="Calibri" pitchFamily="34" charset="0"/>
-                          <a:ea typeface="Calibri" pitchFamily="34" charset="-122"/>
-                          <a:cs typeface="Calibri" pitchFamily="34" charset="-120"/>
-                        </a:rPr>
-                        <a:t>Открыто</a:t>
-                      </a:r>
-                      <a:endParaRPr lang="en-US" sz="1200" dirty="0">
-                        <a:latin typeface="Calibri" charset="0"/>
-                        <a:ea typeface="Calibri" charset="0"/>
-                        <a:cs typeface="Calibri" charset="0"/>
-                      </a:endParaRPr>
-                    </a:p>
-                  </a:txBody>
-                  <a:tcPr marL="127000" marR="127000" marT="76200" marB="76200" anchor="ctr">
-                    <a:lnL w="9525" cap="flat" cmpd="sng" algn="ctr">
-                      <a:solidFill>
-                        <a:srgbClr val="D8DEE2"/>
-                      </a:solidFill>
-                      <a:prstDash val="solid"/>
-                      <a:round/>
-                      <a:headEnd type="none" w="med" len="med"/>
-                      <a:tailEnd type="none" w="med" len="med"/>
-                    </a:lnL>
-                    <a:lnR w="9525" cap="flat" cmpd="sng" algn="ctr">
-                      <a:solidFill>
-                        <a:srgbClr val="D8DEE2"/>
-                      </a:solidFill>
-                      <a:prstDash val="solid"/>
-                      <a:round/>
-                      <a:headEnd type="none" w="med" len="med"/>
-                      <a:tailEnd type="none" w="med" len="med"/>
-                    </a:lnR>
-                    <a:lnT w="9525" cap="flat" cmpd="sng" algn="ctr">
-                      <a:solidFill>
-                        <a:srgbClr val="D8DEE2"/>
-                      </a:solidFill>
-                      <a:prstDash val="solid"/>
-                      <a:round/>
-                      <a:headEnd type="none" w="med" len="med"/>
-                      <a:tailEnd type="none" w="med" len="med"/>
-                    </a:lnT>
-                    <a:lnB w="9525" cap="flat" cmpd="sng" algn="ctr">
-                      <a:solidFill>
-                        <a:srgbClr val="D8DEE2"/>
-                      </a:solidFill>
-                      <a:prstDash val="solid"/>
-                      <a:round/>
-                      <a:headEnd type="none" w="med" len="med"/>
-                      <a:tailEnd type="none" w="med" len="med"/>
-                    </a:lnB>
-                  </a:tcPr>
-                </a:tc>
-              </a:tr>
-              <a:tr h="640080">
-                <a:tc>
-                  <a:txBody>
-                    <a:bodyPr/>
-                    <a:lstStyle/>
-                    <a:p>
-                      <a:pPr indent="0" marL="0">
-                        <a:buNone/>
-                      </a:pPr>
-                      <a:r>
-                        <a:rPr lang="en-US" sz="1250" b="1" dirty="0">
-                          <a:solidFill>
-                            <a:srgbClr val="0A5F67"/>
-                          </a:solidFill>
-                          <a:latin typeface="Calibri" pitchFamily="34" charset="0"/>
-                          <a:ea typeface="Calibri" pitchFamily="34" charset="-122"/>
-                          <a:cs typeface="Calibri" pitchFamily="34" charset="-120"/>
-                        </a:rPr>
-                        <a:t>П4</a:t>
-                      </a:r>
-                      <a:endParaRPr lang="en-US" sz="1250" dirty="0">
-                        <a:latin typeface="Calibri" charset="0"/>
-                        <a:ea typeface="Calibri" charset="0"/>
-                        <a:cs typeface="Calibri" charset="0"/>
-                      </a:endParaRPr>
-                    </a:p>
-                  </a:txBody>
-                  <a:tcPr marL="127000" marR="127000" marT="76200" marB="76200" anchor="ctr">
-                    <a:lnL w="9525" cap="flat" cmpd="sng" algn="ctr">
-                      <a:solidFill>
-                        <a:srgbClr val="D8DEE2"/>
-                      </a:solidFill>
-                      <a:prstDash val="solid"/>
-                      <a:round/>
-                      <a:headEnd type="none" w="med" len="med"/>
-                      <a:tailEnd type="none" w="med" len="med"/>
-                    </a:lnL>
-                    <a:lnR w="9525" cap="flat" cmpd="sng" algn="ctr">
-                      <a:solidFill>
-                        <a:srgbClr val="D8DEE2"/>
-                      </a:solidFill>
-                      <a:prstDash val="solid"/>
-                      <a:round/>
-                      <a:headEnd type="none" w="med" len="med"/>
-                      <a:tailEnd type="none" w="med" len="med"/>
-                    </a:lnR>
-                    <a:lnT w="9525" cap="flat" cmpd="sng" algn="ctr">
-                      <a:solidFill>
-                        <a:srgbClr val="D8DEE2"/>
-                      </a:solidFill>
-                      <a:prstDash val="solid"/>
-                      <a:round/>
-                      <a:headEnd type="none" w="med" len="med"/>
-                      <a:tailEnd type="none" w="med" len="med"/>
-                    </a:lnT>
-                    <a:lnB w="9525" cap="flat" cmpd="sng" algn="ctr">
-                      <a:solidFill>
-                        <a:srgbClr val="D8DEE2"/>
-                      </a:solidFill>
-                      <a:prstDash val="solid"/>
-                      <a:round/>
-                      <a:headEnd type="none" w="med" len="med"/>
-                      <a:tailEnd type="none" w="med" len="med"/>
-                    </a:lnB>
-                  </a:tcPr>
-                </a:tc>
-                <a:tc>
-                  <a:txBody>
-                    <a:bodyPr/>
-                    <a:lstStyle/>
-                    <a:p>
-                      <a:pPr indent="0" marL="0">
-                        <a:buNone/>
-                      </a:pPr>
-                      <a:r>
-                        <a:rPr lang="en-US" sz="1250" dirty="0">
-                          <a:solidFill>
-                            <a:srgbClr val="1A2733"/>
-                          </a:solidFill>
-                          <a:latin typeface="Calibri" pitchFamily="34" charset="0"/>
-                          <a:ea typeface="Calibri" pitchFamily="34" charset="-122"/>
-                          <a:cs typeface="Calibri" pitchFamily="34" charset="-120"/>
-                        </a:rPr>
-                        <a:t>Промышленная эксплуатация</a:t>
-                      </a:r>
-                      <a:endParaRPr lang="en-US" sz="1250" dirty="0">
-                        <a:latin typeface="Calibri" charset="0"/>
-                        <a:ea typeface="Calibri" charset="0"/>
-                        <a:cs typeface="Calibri" charset="0"/>
-                      </a:endParaRPr>
-                    </a:p>
-                  </a:txBody>
-                  <a:tcPr marL="127000" marR="127000" marT="76200" marB="76200" anchor="ctr">
-                    <a:lnL w="9525" cap="flat" cmpd="sng" algn="ctr">
-                      <a:solidFill>
-                        <a:srgbClr val="D8DEE2"/>
-                      </a:solidFill>
-                      <a:prstDash val="solid"/>
-                      <a:round/>
-                      <a:headEnd type="none" w="med" len="med"/>
-                      <a:tailEnd type="none" w="med" len="med"/>
-                    </a:lnL>
-                    <a:lnR w="9525" cap="flat" cmpd="sng" algn="ctr">
-                      <a:solidFill>
-                        <a:srgbClr val="D8DEE2"/>
-                      </a:solidFill>
-                      <a:prstDash val="solid"/>
-                      <a:round/>
-                      <a:headEnd type="none" w="med" len="med"/>
-                      <a:tailEnd type="none" w="med" len="med"/>
-                    </a:lnR>
-                    <a:lnT w="9525" cap="flat" cmpd="sng" algn="ctr">
-                      <a:solidFill>
-                        <a:srgbClr val="D8DEE2"/>
-                      </a:solidFill>
-                      <a:prstDash val="solid"/>
-                      <a:round/>
-                      <a:headEnd type="none" w="med" len="med"/>
-                      <a:tailEnd type="none" w="med" len="med"/>
-                    </a:lnT>
-                    <a:lnB w="9525" cap="flat" cmpd="sng" algn="ctr">
-                      <a:solidFill>
-                        <a:srgbClr val="D8DEE2"/>
-                      </a:solidFill>
-                      <a:prstDash val="solid"/>
-                      <a:round/>
-                      <a:headEnd type="none" w="med" len="med"/>
-                      <a:tailEnd type="none" w="med" len="med"/>
-                    </a:lnB>
-                  </a:tcPr>
-                </a:tc>
-                <a:tc>
-                  <a:txBody>
-                    <a:bodyPr/>
-                    <a:lstStyle/>
-                    <a:p>
-                      <a:pPr indent="0" marL="0">
-                        <a:buNone/>
-                      </a:pPr>
-                      <a:r>
-                        <a:rPr lang="en-US" sz="1250" dirty="0">
-                          <a:solidFill>
-                            <a:srgbClr val="5B6B7A"/>
-                          </a:solidFill>
-                          <a:latin typeface="Calibri" pitchFamily="34" charset="0"/>
-                          <a:ea typeface="Calibri" pitchFamily="34" charset="-122"/>
-                          <a:cs typeface="Calibri" pitchFamily="34" charset="-120"/>
-                        </a:rPr>
-                        <a:t>После приёмки волны 2</a:t>
-                      </a:r>
-                      <a:endParaRPr lang="en-US" sz="1250" dirty="0">
-                        <a:latin typeface="Calibri" charset="0"/>
-                        <a:ea typeface="Calibri" charset="0"/>
-                        <a:cs typeface="Calibri" charset="0"/>
-                      </a:endParaRPr>
-                    </a:p>
-                  </a:txBody>
-                  <a:tcPr marL="127000" marR="127000" marT="76200" marB="76200" anchor="ctr">
-                    <a:lnL w="9525" cap="flat" cmpd="sng" algn="ctr">
-                      <a:solidFill>
-                        <a:srgbClr val="D8DEE2"/>
-                      </a:solidFill>
-                      <a:prstDash val="solid"/>
-                      <a:round/>
-                      <a:headEnd type="none" w="med" len="med"/>
-                      <a:tailEnd type="none" w="med" len="med"/>
-                    </a:lnL>
-                    <a:lnR w="9525" cap="flat" cmpd="sng" algn="ctr">
-                      <a:solidFill>
-                        <a:srgbClr val="D8DEE2"/>
-                      </a:solidFill>
-                      <a:prstDash val="solid"/>
-                      <a:round/>
-                      <a:headEnd type="none" w="med" len="med"/>
-                      <a:tailEnd type="none" w="med" len="med"/>
-                    </a:lnR>
-                    <a:lnT w="9525" cap="flat" cmpd="sng" algn="ctr">
-                      <a:solidFill>
-                        <a:srgbClr val="D8DEE2"/>
-                      </a:solidFill>
-                      <a:prstDash val="solid"/>
-                      <a:round/>
-                      <a:headEnd type="none" w="med" len="med"/>
-                      <a:tailEnd type="none" w="med" len="med"/>
-                    </a:lnT>
-                    <a:lnB w="9525" cap="flat" cmpd="sng" algn="ctr">
-                      <a:solidFill>
-                        <a:srgbClr val="D8DEE2"/>
-                      </a:solidFill>
-                      <a:prstDash val="solid"/>
-                      <a:round/>
-                      <a:headEnd type="none" w="med" len="med"/>
-                      <a:tailEnd type="none" w="med" len="med"/>
-                    </a:lnB>
-                  </a:tcPr>
-                </a:tc>
-                <a:tc>
-                  <a:txBody>
-                    <a:bodyPr/>
-                    <a:lstStyle/>
-                    <a:p>
-                      <a:pPr algn="ctr" indent="0" marL="0">
-                        <a:buNone/>
-                      </a:pPr>
-                      <a:r>
-                        <a:rPr lang="en-US" sz="1200" b="1" dirty="0">
-                          <a:solidFill>
-                            <a:srgbClr val="5B6B7A"/>
-                          </a:solidFill>
-                          <a:latin typeface="Calibri" pitchFamily="34" charset="0"/>
-                          <a:ea typeface="Calibri" pitchFamily="34" charset="-122"/>
-                          <a:cs typeface="Calibri" pitchFamily="34" charset="-120"/>
-                        </a:rPr>
-                        <a:t>Не начато</a:t>
-                      </a:r>
-                      <a:endParaRPr lang="en-US" sz="1200" dirty="0">
-                        <a:latin typeface="Calibri" charset="0"/>
-                        <a:ea typeface="Calibri" charset="0"/>
-                        <a:cs typeface="Calibri" charset="0"/>
-                      </a:endParaRPr>
-                    </a:p>
-                  </a:txBody>
-                  <a:tcPr marL="127000" marR="127000" marT="76200" marB="76200" anchor="ctr">
-                    <a:lnL w="9525" cap="flat" cmpd="sng" algn="ctr">
-                      <a:solidFill>
-                        <a:srgbClr val="D8DEE2"/>
-                      </a:solidFill>
-                      <a:prstDash val="solid"/>
-                      <a:round/>
-                      <a:headEnd type="none" w="med" len="med"/>
-                      <a:tailEnd type="none" w="med" len="med"/>
-                    </a:lnL>
-                    <a:lnR w="9525" cap="flat" cmpd="sng" algn="ctr">
-                      <a:solidFill>
-                        <a:srgbClr val="D8DEE2"/>
-                      </a:solidFill>
-                      <a:prstDash val="solid"/>
-                      <a:round/>
-                      <a:headEnd type="none" w="med" len="med"/>
-                      <a:tailEnd type="none" w="med" len="med"/>
-                    </a:lnR>
-                    <a:lnT w="9525" cap="flat" cmpd="sng" algn="ctr">
-                      <a:solidFill>
-                        <a:srgbClr val="D8DEE2"/>
-                      </a:solidFill>
-                      <a:prstDash val="solid"/>
-                      <a:round/>
-                      <a:headEnd type="none" w="med" len="med"/>
-                      <a:tailEnd type="none" w="med" len="med"/>
-                    </a:lnT>
-                    <a:lnB w="9525" cap="flat" cmpd="sng" algn="ctr">
-                      <a:solidFill>
-                        <a:srgbClr val="D8DEE2"/>
-                      </a:solidFill>
-                      <a:prstDash val="solid"/>
-                      <a:round/>
-                      <a:headEnd type="none" w="med" len="med"/>
-                      <a:tailEnd type="none" w="med" len="med"/>
-                    </a:lnB>
-                  </a:tcPr>
-                </a:tc>
-              </a:tr>
-              <a:tr h="640080">
-                <a:tc>
-                  <a:txBody>
-                    <a:bodyPr/>
-                    <a:lstStyle/>
-                    <a:p>
-                      <a:pPr indent="0" marL="0">
-                        <a:buNone/>
-                      </a:pPr>
-                      <a:r>
-                        <a:rPr lang="en-US" sz="1250" b="1" dirty="0">
-                          <a:solidFill>
-                            <a:srgbClr val="0A5F67"/>
-                          </a:solidFill>
-                          <a:latin typeface="Calibri" pitchFamily="34" charset="0"/>
-                          <a:ea typeface="Calibri" pitchFamily="34" charset="-122"/>
-                          <a:cs typeface="Calibri" pitchFamily="34" charset="-120"/>
-                        </a:rPr>
-                        <a:t>П5</a:t>
-                      </a:r>
-                      <a:endParaRPr lang="en-US" sz="1250" dirty="0">
-                        <a:latin typeface="Calibri" charset="0"/>
-                        <a:ea typeface="Calibri" charset="0"/>
-                        <a:cs typeface="Calibri" charset="0"/>
-                      </a:endParaRPr>
-                    </a:p>
-                  </a:txBody>
-                  <a:tcPr marL="127000" marR="127000" marT="76200" marB="76200" anchor="ctr">
-                    <a:lnL w="9525" cap="flat" cmpd="sng" algn="ctr">
-                      <a:solidFill>
-                        <a:srgbClr val="D8DEE2"/>
-                      </a:solidFill>
-                      <a:prstDash val="solid"/>
-                      <a:round/>
-                      <a:headEnd type="none" w="med" len="med"/>
-                      <a:tailEnd type="none" w="med" len="med"/>
-                    </a:lnL>
-                    <a:lnR w="9525" cap="flat" cmpd="sng" algn="ctr">
-                      <a:solidFill>
-                        <a:srgbClr val="D8DEE2"/>
-                      </a:solidFill>
-                      <a:prstDash val="solid"/>
-                      <a:round/>
-                      <a:headEnd type="none" w="med" len="med"/>
-                      <a:tailEnd type="none" w="med" len="med"/>
-                    </a:lnR>
-                    <a:lnT w="9525" cap="flat" cmpd="sng" algn="ctr">
-                      <a:solidFill>
-                        <a:srgbClr val="D8DEE2"/>
-                      </a:solidFill>
-                      <a:prstDash val="solid"/>
-                      <a:round/>
-                      <a:headEnd type="none" w="med" len="med"/>
-                      <a:tailEnd type="none" w="med" len="med"/>
-                    </a:lnT>
-                    <a:lnB w="9525" cap="flat" cmpd="sng" algn="ctr">
-                      <a:solidFill>
-                        <a:srgbClr val="D8DEE2"/>
-                      </a:solidFill>
-                      <a:prstDash val="solid"/>
-                      <a:round/>
-                      <a:headEnd type="none" w="med" len="med"/>
-                      <a:tailEnd type="none" w="med" len="med"/>
-                    </a:lnB>
-                  </a:tcPr>
-                </a:tc>
-                <a:tc>
-                  <a:txBody>
-                    <a:bodyPr/>
-                    <a:lstStyle/>
-                    <a:p>
-                      <a:pPr indent="0" marL="0">
-                        <a:buNone/>
-                      </a:pPr>
-                      <a:r>
-                        <a:rPr lang="en-US" sz="1250" dirty="0">
-                          <a:solidFill>
-                            <a:srgbClr val="1A2733"/>
-                          </a:solidFill>
-                          <a:latin typeface="Calibri" pitchFamily="34" charset="0"/>
-                          <a:ea typeface="Calibri" pitchFamily="34" charset="-122"/>
-                          <a:cs typeface="Calibri" pitchFamily="34" charset="-120"/>
-                        </a:rPr>
-                        <a:t>Постоянные улучшения</a:t>
-                      </a:r>
-                      <a:endParaRPr lang="en-US" sz="1250" dirty="0">
-                        <a:latin typeface="Calibri" charset="0"/>
-                        <a:ea typeface="Calibri" charset="0"/>
-                        <a:cs typeface="Calibri" charset="0"/>
-                      </a:endParaRPr>
-                    </a:p>
-                  </a:txBody>
-                  <a:tcPr marL="127000" marR="127000" marT="76200" marB="76200" anchor="ctr">
-                    <a:lnL w="9525" cap="flat" cmpd="sng" algn="ctr">
-                      <a:solidFill>
-                        <a:srgbClr val="D8DEE2"/>
-                      </a:solidFill>
-                      <a:prstDash val="solid"/>
-                      <a:round/>
-                      <a:headEnd type="none" w="med" len="med"/>
-                      <a:tailEnd type="none" w="med" len="med"/>
-                    </a:lnL>
-                    <a:lnR w="9525" cap="flat" cmpd="sng" algn="ctr">
-                      <a:solidFill>
-                        <a:srgbClr val="D8DEE2"/>
-                      </a:solidFill>
-                      <a:prstDash val="solid"/>
-                      <a:round/>
-                      <a:headEnd type="none" w="med" len="med"/>
-                      <a:tailEnd type="none" w="med" len="med"/>
-                    </a:lnR>
-                    <a:lnT w="9525" cap="flat" cmpd="sng" algn="ctr">
-                      <a:solidFill>
-                        <a:srgbClr val="D8DEE2"/>
-                      </a:solidFill>
-                      <a:prstDash val="solid"/>
-                      <a:round/>
-                      <a:headEnd type="none" w="med" len="med"/>
-                      <a:tailEnd type="none" w="med" len="med"/>
-                    </a:lnT>
-                    <a:lnB w="9525" cap="flat" cmpd="sng" algn="ctr">
-                      <a:solidFill>
-                        <a:srgbClr val="D8DEE2"/>
-                      </a:solidFill>
-                      <a:prstDash val="solid"/>
-                      <a:round/>
-                      <a:headEnd type="none" w="med" len="med"/>
-                      <a:tailEnd type="none" w="med" len="med"/>
-                    </a:lnB>
-                  </a:tcPr>
-                </a:tc>
-                <a:tc>
-                  <a:txBody>
-                    <a:bodyPr/>
-                    <a:lstStyle/>
-                    <a:p>
-                      <a:pPr indent="0" marL="0">
-                        <a:buNone/>
-                      </a:pPr>
-                      <a:r>
-                        <a:rPr lang="en-US" sz="1250" dirty="0">
-                          <a:solidFill>
-                            <a:srgbClr val="5B6B7A"/>
-                          </a:solidFill>
-                          <a:latin typeface="Calibri" pitchFamily="34" charset="0"/>
-                          <a:ea typeface="Calibri" pitchFamily="34" charset="-122"/>
-                          <a:cs typeface="Calibri" pitchFamily="34" charset="-120"/>
-                        </a:rPr>
-                        <a:t>Без формального конца</a:t>
-                      </a:r>
-                      <a:endParaRPr lang="en-US" sz="1250" dirty="0">
-                        <a:latin typeface="Calibri" charset="0"/>
-                        <a:ea typeface="Calibri" charset="0"/>
-                        <a:cs typeface="Calibri" charset="0"/>
-                      </a:endParaRPr>
-                    </a:p>
-                  </a:txBody>
-                  <a:tcPr marL="127000" marR="127000" marT="76200" marB="76200" anchor="ctr">
-                    <a:lnL w="9525" cap="flat" cmpd="sng" algn="ctr">
-                      <a:solidFill>
-                        <a:srgbClr val="D8DEE2"/>
-                      </a:solidFill>
-                      <a:prstDash val="solid"/>
-                      <a:round/>
-                      <a:headEnd type="none" w="med" len="med"/>
-                      <a:tailEnd type="none" w="med" len="med"/>
-                    </a:lnL>
-                    <a:lnR w="9525" cap="flat" cmpd="sng" algn="ctr">
-                      <a:solidFill>
-                        <a:srgbClr val="D8DEE2"/>
-                      </a:solidFill>
-                      <a:prstDash val="solid"/>
-                      <a:round/>
-                      <a:headEnd type="none" w="med" len="med"/>
-                      <a:tailEnd type="none" w="med" len="med"/>
-                    </a:lnR>
-                    <a:lnT w="9525" cap="flat" cmpd="sng" algn="ctr">
-                      <a:solidFill>
-                        <a:srgbClr val="D8DEE2"/>
-                      </a:solidFill>
-                      <a:prstDash val="solid"/>
-                      <a:round/>
-                      <a:headEnd type="none" w="med" len="med"/>
-                      <a:tailEnd type="none" w="med" len="med"/>
-                    </a:lnT>
-                    <a:lnB w="9525" cap="flat" cmpd="sng" algn="ctr">
-                      <a:solidFill>
-                        <a:srgbClr val="D8DEE2"/>
-                      </a:solidFill>
-                      <a:prstDash val="solid"/>
-                      <a:round/>
-                      <a:headEnd type="none" w="med" len="med"/>
-                      <a:tailEnd type="none" w="med" len="med"/>
-                    </a:lnB>
-                  </a:tcPr>
-                </a:tc>
-                <a:tc>
-                  <a:txBody>
-                    <a:bodyPr/>
-                    <a:lstStyle/>
-                    <a:p>
-                      <a:pPr algn="ctr" indent="0" marL="0">
-                        <a:buNone/>
-                      </a:pPr>
-                      <a:r>
-                        <a:rPr lang="en-US" sz="1200" b="1" dirty="0">
-                          <a:solidFill>
-                            <a:srgbClr val="5B6B7A"/>
-                          </a:solidFill>
-                          <a:latin typeface="Calibri" pitchFamily="34" charset="0"/>
-                          <a:ea typeface="Calibri" pitchFamily="34" charset="-122"/>
-                          <a:cs typeface="Calibri" pitchFamily="34" charset="-120"/>
-                        </a:rPr>
-                        <a:t>Не начато</a:t>
-                      </a:r>
-                      <a:endParaRPr lang="en-US" sz="1200" dirty="0">
-                        <a:latin typeface="Calibri" charset="0"/>
-                        <a:ea typeface="Calibri" charset="0"/>
-                        <a:cs typeface="Calibri" charset="0"/>
-                      </a:endParaRPr>
-                    </a:p>
-                  </a:txBody>
-                  <a:tcPr marL="127000" marR="127000" marT="76200" marB="76200" anchor="ctr">
+                  <a:tcPr marL="101600" marR="101600" marT="63500" marB="63500" anchor="ctr">
                     <a:lnL w="9525" cap="flat" cmpd="sng" algn="ctr">
                       <a:solidFill>
                         <a:srgbClr val="D8DEE2"/>
@@ -4165,45 +7302,6 @@
       <p:sp>
         <p:nvSpPr>
           <p:cNvPr id="6" name="Text 3"/>
-          <p:cNvSpPr txBox="1"/>
-          <p:nvPr/>
-        </p:nvSpPr>
-        <p:spPr>
-          <a:xfrm>
-            <a:off x="502920" y="6309360"/>
-            <a:ext cx="11155680" cy="320040"/>
-          </a:xfrm>
-          <a:prstGeom prst="rect">
-            <a:avLst/>
-          </a:prstGeom>
-          <a:noFill/>
-          <a:ln/>
-        </p:spPr>
-        <p:txBody>
-          <a:bodyPr wrap="square" lIns="0" tIns="0" rIns="0" bIns="0" rtlCol="0" anchor="ctr"/>
-          <a:lstStyle/>
-          <a:p>
-            <a:pPr indent="0" marL="0">
-              <a:buNone/>
-            </a:pPr>
-            <a:r>
-              <a:rPr lang="en-US" sz="1150" i="1" dirty="0">
-                <a:solidFill>
-                  <a:srgbClr val="5B6B7A"/>
-                </a:solidFill>
-                <a:latin typeface="Calibri" pitchFamily="34" charset="0"/>
-                <a:ea typeface="Calibri" pitchFamily="34" charset="-122"/>
-                <a:cs typeface="Calibri" pitchFamily="34" charset="-120"/>
-              </a:rPr>
-              <a:t>Волна 2 требует отдельного детального состава работ (см. «Наши вопросы» → Волна 2) — срок 4–6 недель ориентировочен на весь объём расширения ESB/КХД.</a:t>
-            </a:r>
-            <a:endParaRPr lang="en-US" sz="1150" dirty="0"/>
-          </a:p>
-        </p:txBody>
-      </p:sp>
-      <p:sp>
-        <p:nvSpPr>
-          <p:cNvPr id="7" name="Text 4"/>
           <p:cNvSpPr txBox="1"/>
           <p:nvPr/>
         </p:nvSpPr>
@@ -4298,3310 +7396,7 @@
                 <a:ea typeface="Calibri" pitchFamily="34" charset="-122"/>
                 <a:cs typeface="Calibri" pitchFamily="34" charset="-120"/>
               </a:rPr>
-              <a:t>3 · ЗАФИКСИРОВАННЫЕ ПОЖЕЛАНИЯ ЗАКАЗЧИКА</a:t>
-            </a:r>
-            <a:endParaRPr lang="en-US" sz="1100" dirty="0"/>
-          </a:p>
-        </p:txBody>
-      </p:sp>
-      <p:sp>
-        <p:nvSpPr>
-          <p:cNvPr id="3" name="Text 1"/>
-          <p:cNvSpPr txBox="1"/>
-          <p:nvPr/>
-        </p:nvSpPr>
-        <p:spPr>
-          <a:xfrm>
-            <a:off x="502920" y="621792"/>
-            <a:ext cx="11155680" cy="548640"/>
-          </a:xfrm>
-          <a:prstGeom prst="rect">
-            <a:avLst/>
-          </a:prstGeom>
-          <a:noFill/>
-          <a:ln/>
-        </p:spPr>
-        <p:txBody>
-          <a:bodyPr wrap="square" lIns="0" tIns="0" rIns="0" bIns="0" rtlCol="0" anchor="ctr"/>
-          <a:lstStyle/>
-          <a:p>
-            <a:pPr indent="0" marL="0">
-              <a:buNone/>
-            </a:pPr>
-            <a:r>
-              <a:rPr lang="en-US" sz="2700" b="1" dirty="0">
-                <a:solidFill>
-                  <a:srgbClr val="1A2733"/>
-                </a:solidFill>
-                <a:latin typeface="Cambria" pitchFamily="34" charset="0"/>
-                <a:ea typeface="Cambria" pitchFamily="34" charset="-122"/>
-                <a:cs typeface="Cambria" pitchFamily="34" charset="-120"/>
-              </a:rPr>
-              <a:t>Реестр предложений</a:t>
-            </a:r>
-            <a:endParaRPr lang="en-US" sz="2700" dirty="0"/>
-          </a:p>
-        </p:txBody>
-      </p:sp>
-      <p:sp>
-        <p:nvSpPr>
-          <p:cNvPr id="4" name="Text 2"/>
-          <p:cNvSpPr txBox="1"/>
-          <p:nvPr/>
-        </p:nvSpPr>
-        <p:spPr>
-          <a:xfrm>
-            <a:off x="502920" y="1170432"/>
-            <a:ext cx="11155680" cy="365760"/>
-          </a:xfrm>
-          <a:prstGeom prst="rect">
-            <a:avLst/>
-          </a:prstGeom>
-          <a:noFill/>
-          <a:ln/>
-        </p:spPr>
-        <p:txBody>
-          <a:bodyPr wrap="square" lIns="0" tIns="0" rIns="0" bIns="0" rtlCol="0" anchor="ctr"/>
-          <a:lstStyle/>
-          <a:p>
-            <a:pPr indent="0" marL="0">
-              <a:buNone/>
-            </a:pPr>
-            <a:r>
-              <a:rPr lang="en-US" sz="1300" dirty="0">
-                <a:solidFill>
-                  <a:srgbClr val="5B6B7A"/>
-                </a:solidFill>
-                <a:latin typeface="Calibri" pitchFamily="34" charset="0"/>
-                <a:ea typeface="Calibri" pitchFamily="34" charset="-122"/>
-                <a:cs typeface="Calibri" pitchFamily="34" charset="-120"/>
-              </a:rPr>
-              <a:t>11 пунктов backlog платформы. 4 пункта требуют ответа от Д8 — остальные уже в плане платформы или решаются внутри команды</a:t>
-            </a:r>
-            <a:endParaRPr lang="en-US" sz="1300" dirty="0"/>
-          </a:p>
-        </p:txBody>
-      </p:sp>
-      <p:graphicFrame>
-        <p:nvGraphicFramePr>
-          <p:cNvPr id="5" name="Table 0"/>
-          <p:cNvGraphicFramePr>
-            <a:graphicFrameLocks noGrp="1"/>
-          </p:cNvGraphicFramePr>
-          <p:nvPr>
-            <p:extLst>
-              <p:ext uri="{D42A27DB-BD31-4B8C-83A1-F6EECF244321}">
-                <p14:modId xmlns:p14="http://schemas.microsoft.com/office/powerpoint/2010/main" val="1579011935"/>
-              </p:ext>
-            </p:extLst>
-          </p:nvPr>
-        </p:nvGraphicFramePr>
-        <p:xfrm>
-          <a:off x="502920" y="1691640"/>
-          <a:ext cx="11155680" cy="4480560"/>
-        </p:xfrm>
-        <a:graphic>
-          <a:graphicData uri="http://schemas.openxmlformats.org/drawingml/2006/table">
-            <a:tbl>
-              <a:tblPr/>
-              <a:tblGrid>
-                <a:gridCol w="5669280"/>
-                <a:gridCol w="1554480"/>
-                <a:gridCol w="1828800"/>
-                <a:gridCol w="2103120"/>
-              </a:tblGrid>
-              <a:tr h="373380">
-                <a:tc>
-                  <a:txBody>
-                    <a:bodyPr/>
-                    <a:lstStyle/>
-                    <a:p>
-                      <a:pPr indent="0" marL="0">
-                        <a:buNone/>
-                      </a:pPr>
-                      <a:r>
-                        <a:rPr lang="en-US" sz="1100" b="1" dirty="0">
-                          <a:solidFill>
-                            <a:srgbClr val="FFFFFF"/>
-                          </a:solidFill>
-                          <a:latin typeface="Calibri" pitchFamily="34" charset="0"/>
-                          <a:ea typeface="Calibri" pitchFamily="34" charset="-122"/>
-                          <a:cs typeface="Calibri" pitchFamily="34" charset="-120"/>
-                        </a:rPr>
-                        <a:t>Пункт</a:t>
-                      </a:r>
-                      <a:endParaRPr lang="en-US" sz="1100" dirty="0">
-                        <a:latin typeface="Calibri" charset="0"/>
-                        <a:ea typeface="Calibri" charset="0"/>
-                        <a:cs typeface="Calibri" charset="0"/>
-                      </a:endParaRPr>
-                    </a:p>
-                  </a:txBody>
-                  <a:tcPr marL="101600" marR="101600" marT="63500" marB="63500" anchor="ctr">
-                    <a:lnL w="9525" cap="flat" cmpd="sng" algn="ctr">
-                      <a:solidFill>
-                        <a:srgbClr val="D8DEE2"/>
-                      </a:solidFill>
-                      <a:prstDash val="solid"/>
-                      <a:round/>
-                      <a:headEnd type="none" w="med" len="med"/>
-                      <a:tailEnd type="none" w="med" len="med"/>
-                    </a:lnL>
-                    <a:lnR w="9525" cap="flat" cmpd="sng" algn="ctr">
-                      <a:solidFill>
-                        <a:srgbClr val="D8DEE2"/>
-                      </a:solidFill>
-                      <a:prstDash val="solid"/>
-                      <a:round/>
-                      <a:headEnd type="none" w="med" len="med"/>
-                      <a:tailEnd type="none" w="med" len="med"/>
-                    </a:lnR>
-                    <a:lnT w="9525" cap="flat" cmpd="sng" algn="ctr">
-                      <a:solidFill>
-                        <a:srgbClr val="D8DEE2"/>
-                      </a:solidFill>
-                      <a:prstDash val="solid"/>
-                      <a:round/>
-                      <a:headEnd type="none" w="med" len="med"/>
-                      <a:tailEnd type="none" w="med" len="med"/>
-                    </a:lnT>
-                    <a:lnB w="9525" cap="flat" cmpd="sng" algn="ctr">
-                      <a:solidFill>
-                        <a:srgbClr val="D8DEE2"/>
-                      </a:solidFill>
-                      <a:prstDash val="solid"/>
-                      <a:round/>
-                      <a:headEnd type="none" w="med" len="med"/>
-                      <a:tailEnd type="none" w="med" len="med"/>
-                    </a:lnB>
-                    <a:solidFill>
-                      <a:srgbClr val="1A2733"/>
-                    </a:solidFill>
-                  </a:tcPr>
-                </a:tc>
-                <a:tc>
-                  <a:txBody>
-                    <a:bodyPr/>
-                    <a:lstStyle/>
-                    <a:p>
-                      <a:pPr algn="ctr" indent="0" marL="0">
-                        <a:buNone/>
-                      </a:pPr>
-                      <a:r>
-                        <a:rPr lang="en-US" sz="1100" b="1" dirty="0">
-                          <a:solidFill>
-                            <a:srgbClr val="FFFFFF"/>
-                          </a:solidFill>
-                          <a:latin typeface="Calibri" pitchFamily="34" charset="0"/>
-                          <a:ea typeface="Calibri" pitchFamily="34" charset="-122"/>
-                          <a:cs typeface="Calibri" pitchFamily="34" charset="-120"/>
-                        </a:rPr>
-                        <a:t>Приоритет</a:t>
-                      </a:r>
-                      <a:endParaRPr lang="en-US" sz="1100" dirty="0">
-                        <a:latin typeface="Calibri" charset="0"/>
-                        <a:ea typeface="Calibri" charset="0"/>
-                        <a:cs typeface="Calibri" charset="0"/>
-                      </a:endParaRPr>
-                    </a:p>
-                  </a:txBody>
-                  <a:tcPr marL="101600" marR="101600" marT="63500" marB="63500" anchor="ctr">
-                    <a:lnL w="9525" cap="flat" cmpd="sng" algn="ctr">
-                      <a:solidFill>
-                        <a:srgbClr val="D8DEE2"/>
-                      </a:solidFill>
-                      <a:prstDash val="solid"/>
-                      <a:round/>
-                      <a:headEnd type="none" w="med" len="med"/>
-                      <a:tailEnd type="none" w="med" len="med"/>
-                    </a:lnL>
-                    <a:lnR w="9525" cap="flat" cmpd="sng" algn="ctr">
-                      <a:solidFill>
-                        <a:srgbClr val="D8DEE2"/>
-                      </a:solidFill>
-                      <a:prstDash val="solid"/>
-                      <a:round/>
-                      <a:headEnd type="none" w="med" len="med"/>
-                      <a:tailEnd type="none" w="med" len="med"/>
-                    </a:lnR>
-                    <a:lnT w="9525" cap="flat" cmpd="sng" algn="ctr">
-                      <a:solidFill>
-                        <a:srgbClr val="D8DEE2"/>
-                      </a:solidFill>
-                      <a:prstDash val="solid"/>
-                      <a:round/>
-                      <a:headEnd type="none" w="med" len="med"/>
-                      <a:tailEnd type="none" w="med" len="med"/>
-                    </a:lnT>
-                    <a:lnB w="9525" cap="flat" cmpd="sng" algn="ctr">
-                      <a:solidFill>
-                        <a:srgbClr val="D8DEE2"/>
-                      </a:solidFill>
-                      <a:prstDash val="solid"/>
-                      <a:round/>
-                      <a:headEnd type="none" w="med" len="med"/>
-                      <a:tailEnd type="none" w="med" len="med"/>
-                    </a:lnB>
-                    <a:solidFill>
-                      <a:srgbClr val="1A2733"/>
-                    </a:solidFill>
-                  </a:tcPr>
-                </a:tc>
-                <a:tc>
-                  <a:txBody>
-                    <a:bodyPr/>
-                    <a:lstStyle/>
-                    <a:p>
-                      <a:pPr algn="ctr" indent="0" marL="0">
-                        <a:buNone/>
-                      </a:pPr>
-                      <a:r>
-                        <a:rPr lang="en-US" sz="1100" b="1" dirty="0">
-                          <a:solidFill>
-                            <a:srgbClr val="FFFFFF"/>
-                          </a:solidFill>
-                          <a:latin typeface="Calibri" pitchFamily="34" charset="0"/>
-                          <a:ea typeface="Calibri" pitchFamily="34" charset="-122"/>
-                          <a:cs typeface="Calibri" pitchFamily="34" charset="-120"/>
-                        </a:rPr>
-                        <a:t>Реализация</a:t>
-                      </a:r>
-                      <a:endParaRPr lang="en-US" sz="1100" dirty="0">
-                        <a:latin typeface="Calibri" charset="0"/>
-                        <a:ea typeface="Calibri" charset="0"/>
-                        <a:cs typeface="Calibri" charset="0"/>
-                      </a:endParaRPr>
-                    </a:p>
-                  </a:txBody>
-                  <a:tcPr marL="101600" marR="101600" marT="63500" marB="63500" anchor="ctr">
-                    <a:lnL w="9525" cap="flat" cmpd="sng" algn="ctr">
-                      <a:solidFill>
-                        <a:srgbClr val="D8DEE2"/>
-                      </a:solidFill>
-                      <a:prstDash val="solid"/>
-                      <a:round/>
-                      <a:headEnd type="none" w="med" len="med"/>
-                      <a:tailEnd type="none" w="med" len="med"/>
-                    </a:lnL>
-                    <a:lnR w="9525" cap="flat" cmpd="sng" algn="ctr">
-                      <a:solidFill>
-                        <a:srgbClr val="D8DEE2"/>
-                      </a:solidFill>
-                      <a:prstDash val="solid"/>
-                      <a:round/>
-                      <a:headEnd type="none" w="med" len="med"/>
-                      <a:tailEnd type="none" w="med" len="med"/>
-                    </a:lnR>
-                    <a:lnT w="9525" cap="flat" cmpd="sng" algn="ctr">
-                      <a:solidFill>
-                        <a:srgbClr val="D8DEE2"/>
-                      </a:solidFill>
-                      <a:prstDash val="solid"/>
-                      <a:round/>
-                      <a:headEnd type="none" w="med" len="med"/>
-                      <a:tailEnd type="none" w="med" len="med"/>
-                    </a:lnT>
-                    <a:lnB w="9525" cap="flat" cmpd="sng" algn="ctr">
-                      <a:solidFill>
-                        <a:srgbClr val="D8DEE2"/>
-                      </a:solidFill>
-                      <a:prstDash val="solid"/>
-                      <a:round/>
-                      <a:headEnd type="none" w="med" len="med"/>
-                      <a:tailEnd type="none" w="med" len="med"/>
-                    </a:lnB>
-                    <a:solidFill>
-                      <a:srgbClr val="1A2733"/>
-                    </a:solidFill>
-                  </a:tcPr>
-                </a:tc>
-                <a:tc>
-                  <a:txBody>
-                    <a:bodyPr/>
-                    <a:lstStyle/>
-                    <a:p>
-                      <a:pPr indent="0" marL="0">
-                        <a:buNone/>
-                      </a:pPr>
-                      <a:r>
-                        <a:rPr lang="en-US" sz="1100" b="1" dirty="0">
-                          <a:solidFill>
-                            <a:srgbClr val="FFFFFF"/>
-                          </a:solidFill>
-                          <a:latin typeface="Calibri" pitchFamily="34" charset="0"/>
-                          <a:ea typeface="Calibri" pitchFamily="34" charset="-122"/>
-                          <a:cs typeface="Calibri" pitchFamily="34" charset="-120"/>
-                        </a:rPr>
-                        <a:t>Уточнение</a:t>
-                      </a:r>
-                      <a:endParaRPr lang="en-US" sz="1100" dirty="0">
-                        <a:latin typeface="Calibri" charset="0"/>
-                        <a:ea typeface="Calibri" charset="0"/>
-                        <a:cs typeface="Calibri" charset="0"/>
-                      </a:endParaRPr>
-                    </a:p>
-                  </a:txBody>
-                  <a:tcPr marL="101600" marR="101600" marT="63500" marB="63500" anchor="ctr">
-                    <a:lnL w="9525" cap="flat" cmpd="sng" algn="ctr">
-                      <a:solidFill>
-                        <a:srgbClr val="D8DEE2"/>
-                      </a:solidFill>
-                      <a:prstDash val="solid"/>
-                      <a:round/>
-                      <a:headEnd type="none" w="med" len="med"/>
-                      <a:tailEnd type="none" w="med" len="med"/>
-                    </a:lnL>
-                    <a:lnR w="9525" cap="flat" cmpd="sng" algn="ctr">
-                      <a:solidFill>
-                        <a:srgbClr val="D8DEE2"/>
-                      </a:solidFill>
-                      <a:prstDash val="solid"/>
-                      <a:round/>
-                      <a:headEnd type="none" w="med" len="med"/>
-                      <a:tailEnd type="none" w="med" len="med"/>
-                    </a:lnR>
-                    <a:lnT w="9525" cap="flat" cmpd="sng" algn="ctr">
-                      <a:solidFill>
-                        <a:srgbClr val="D8DEE2"/>
-                      </a:solidFill>
-                      <a:prstDash val="solid"/>
-                      <a:round/>
-                      <a:headEnd type="none" w="med" len="med"/>
-                      <a:tailEnd type="none" w="med" len="med"/>
-                    </a:lnT>
-                    <a:lnB w="9525" cap="flat" cmpd="sng" algn="ctr">
-                      <a:solidFill>
-                        <a:srgbClr val="D8DEE2"/>
-                      </a:solidFill>
-                      <a:prstDash val="solid"/>
-                      <a:round/>
-                      <a:headEnd type="none" w="med" len="med"/>
-                      <a:tailEnd type="none" w="med" len="med"/>
-                    </a:lnB>
-                    <a:solidFill>
-                      <a:srgbClr val="1A2733"/>
-                    </a:solidFill>
-                  </a:tcPr>
-                </a:tc>
-              </a:tr>
-              <a:tr h="373380">
-                <a:tc>
-                  <a:txBody>
-                    <a:bodyPr/>
-                    <a:lstStyle/>
-                    <a:p>
-                      <a:pPr indent="0" marL="0">
-                        <a:buNone/>
-                      </a:pPr>
-                      <a:r>
-                        <a:rPr lang="en-US" sz="1080" dirty="0">
-                          <a:solidFill>
-                            <a:srgbClr val="1A2733"/>
-                          </a:solidFill>
-                          <a:latin typeface="Calibri" pitchFamily="34" charset="0"/>
-                          <a:ea typeface="Calibri" pitchFamily="34" charset="-122"/>
-                          <a:cs typeface="Calibri" pitchFamily="34" charset="-120"/>
-                        </a:rPr>
-                        <a:t>Мультидоменная авторизация</a:t>
-                      </a:r>
-                      <a:endParaRPr lang="en-US" sz="1080" dirty="0">
-                        <a:latin typeface="Calibri" charset="0"/>
-                        <a:ea typeface="Calibri" charset="0"/>
-                        <a:cs typeface="Calibri" charset="0"/>
-                      </a:endParaRPr>
-                    </a:p>
-                  </a:txBody>
-                  <a:tcPr marL="101600" marR="101600" marT="63500" marB="63500" anchor="ctr">
-                    <a:lnL w="9525" cap="flat" cmpd="sng" algn="ctr">
-                      <a:solidFill>
-                        <a:srgbClr val="D8DEE2"/>
-                      </a:solidFill>
-                      <a:prstDash val="solid"/>
-                      <a:round/>
-                      <a:headEnd type="none" w="med" len="med"/>
-                      <a:tailEnd type="none" w="med" len="med"/>
-                    </a:lnL>
-                    <a:lnR w="9525" cap="flat" cmpd="sng" algn="ctr">
-                      <a:solidFill>
-                        <a:srgbClr val="D8DEE2"/>
-                      </a:solidFill>
-                      <a:prstDash val="solid"/>
-                      <a:round/>
-                      <a:headEnd type="none" w="med" len="med"/>
-                      <a:tailEnd type="none" w="med" len="med"/>
-                    </a:lnR>
-                    <a:lnT w="9525" cap="flat" cmpd="sng" algn="ctr">
-                      <a:solidFill>
-                        <a:srgbClr val="D8DEE2"/>
-                      </a:solidFill>
-                      <a:prstDash val="solid"/>
-                      <a:round/>
-                      <a:headEnd type="none" w="med" len="med"/>
-                      <a:tailEnd type="none" w="med" len="med"/>
-                    </a:lnT>
-                    <a:lnB w="9525" cap="flat" cmpd="sng" algn="ctr">
-                      <a:solidFill>
-                        <a:srgbClr val="D8DEE2"/>
-                      </a:solidFill>
-                      <a:prstDash val="solid"/>
-                      <a:round/>
-                      <a:headEnd type="none" w="med" len="med"/>
-                      <a:tailEnd type="none" w="med" len="med"/>
-                    </a:lnB>
-                  </a:tcPr>
-                </a:tc>
-                <a:tc>
-                  <a:txBody>
-                    <a:bodyPr/>
-                    <a:lstStyle/>
-                    <a:p>
-                      <a:pPr algn="ctr" indent="0" marL="0">
-                        <a:buNone/>
-                      </a:pPr>
-                      <a:r>
-                        <a:rPr lang="en-US" sz="1050" b="1" dirty="0">
-                          <a:solidFill>
-                            <a:srgbClr val="C0392B"/>
-                          </a:solidFill>
-                          <a:latin typeface="Calibri" pitchFamily="34" charset="0"/>
-                          <a:ea typeface="Calibri" pitchFamily="34" charset="-122"/>
-                          <a:cs typeface="Calibri" pitchFamily="34" charset="-120"/>
-                        </a:rPr>
-                        <a:t>Критичный</a:t>
-                      </a:r>
-                      <a:endParaRPr lang="en-US" sz="1050" dirty="0">
-                        <a:latin typeface="Calibri" charset="0"/>
-                        <a:ea typeface="Calibri" charset="0"/>
-                        <a:cs typeface="Calibri" charset="0"/>
-                      </a:endParaRPr>
-                    </a:p>
-                  </a:txBody>
-                  <a:tcPr marL="101600" marR="101600" marT="63500" marB="63500" anchor="ctr">
-                    <a:lnL w="9525" cap="flat" cmpd="sng" algn="ctr">
-                      <a:solidFill>
-                        <a:srgbClr val="D8DEE2"/>
-                      </a:solidFill>
-                      <a:prstDash val="solid"/>
-                      <a:round/>
-                      <a:headEnd type="none" w="med" len="med"/>
-                      <a:tailEnd type="none" w="med" len="med"/>
-                    </a:lnL>
-                    <a:lnR w="9525" cap="flat" cmpd="sng" algn="ctr">
-                      <a:solidFill>
-                        <a:srgbClr val="D8DEE2"/>
-                      </a:solidFill>
-                      <a:prstDash val="solid"/>
-                      <a:round/>
-                      <a:headEnd type="none" w="med" len="med"/>
-                      <a:tailEnd type="none" w="med" len="med"/>
-                    </a:lnR>
-                    <a:lnT w="9525" cap="flat" cmpd="sng" algn="ctr">
-                      <a:solidFill>
-                        <a:srgbClr val="D8DEE2"/>
-                      </a:solidFill>
-                      <a:prstDash val="solid"/>
-                      <a:round/>
-                      <a:headEnd type="none" w="med" len="med"/>
-                      <a:tailEnd type="none" w="med" len="med"/>
-                    </a:lnT>
-                    <a:lnB w="9525" cap="flat" cmpd="sng" algn="ctr">
-                      <a:solidFill>
-                        <a:srgbClr val="D8DEE2"/>
-                      </a:solidFill>
-                      <a:prstDash val="solid"/>
-                      <a:round/>
-                      <a:headEnd type="none" w="med" len="med"/>
-                      <a:tailEnd type="none" w="med" len="med"/>
-                    </a:lnB>
-                  </a:tcPr>
-                </a:tc>
-                <a:tc>
-                  <a:txBody>
-                    <a:bodyPr/>
-                    <a:lstStyle/>
-                    <a:p>
-                      <a:pPr algn="ctr" indent="0" marL="0">
-                        <a:buNone/>
-                      </a:pPr>
-                      <a:r>
-                        <a:rPr lang="en-US" sz="1050" dirty="0">
-                          <a:solidFill>
-                            <a:srgbClr val="5B6B7A"/>
-                          </a:solidFill>
-                          <a:latin typeface="Calibri" pitchFamily="34" charset="0"/>
-                          <a:ea typeface="Calibri" pitchFamily="34" charset="-122"/>
-                          <a:cs typeface="Calibri" pitchFamily="34" charset="-120"/>
-                        </a:rPr>
-                        <a:t>4 квартал</a:t>
-                      </a:r>
-                      <a:endParaRPr lang="en-US" sz="1050" dirty="0">
-                        <a:latin typeface="Calibri" charset="0"/>
-                        <a:ea typeface="Calibri" charset="0"/>
-                        <a:cs typeface="Calibri" charset="0"/>
-                      </a:endParaRPr>
-                    </a:p>
-                  </a:txBody>
-                  <a:tcPr marL="101600" marR="101600" marT="63500" marB="63500" anchor="ctr">
-                    <a:lnL w="9525" cap="flat" cmpd="sng" algn="ctr">
-                      <a:solidFill>
-                        <a:srgbClr val="D8DEE2"/>
-                      </a:solidFill>
-                      <a:prstDash val="solid"/>
-                      <a:round/>
-                      <a:headEnd type="none" w="med" len="med"/>
-                      <a:tailEnd type="none" w="med" len="med"/>
-                    </a:lnL>
-                    <a:lnR w="9525" cap="flat" cmpd="sng" algn="ctr">
-                      <a:solidFill>
-                        <a:srgbClr val="D8DEE2"/>
-                      </a:solidFill>
-                      <a:prstDash val="solid"/>
-                      <a:round/>
-                      <a:headEnd type="none" w="med" len="med"/>
-                      <a:tailEnd type="none" w="med" len="med"/>
-                    </a:lnR>
-                    <a:lnT w="9525" cap="flat" cmpd="sng" algn="ctr">
-                      <a:solidFill>
-                        <a:srgbClr val="D8DEE2"/>
-                      </a:solidFill>
-                      <a:prstDash val="solid"/>
-                      <a:round/>
-                      <a:headEnd type="none" w="med" len="med"/>
-                      <a:tailEnd type="none" w="med" len="med"/>
-                    </a:lnT>
-                    <a:lnB w="9525" cap="flat" cmpd="sng" algn="ctr">
-                      <a:solidFill>
-                        <a:srgbClr val="D8DEE2"/>
-                      </a:solidFill>
-                      <a:prstDash val="solid"/>
-                      <a:round/>
-                      <a:headEnd type="none" w="med" len="med"/>
-                      <a:tailEnd type="none" w="med" len="med"/>
-                    </a:lnB>
-                  </a:tcPr>
-                </a:tc>
-                <a:tc>
-                  <a:txBody>
-                    <a:bodyPr/>
-                    <a:lstStyle/>
-                    <a:p>
-                      <a:pPr indent="0" marL="0">
-                        <a:buNone/>
-                      </a:pPr>
-                      <a:endParaRPr lang="en-US" sz="1050" dirty="0">
-                        <a:latin typeface="Calibri" charset="0"/>
-                        <a:ea typeface="Calibri" charset="0"/>
-                        <a:cs typeface="Calibri" charset="0"/>
-                      </a:endParaRPr>
-                    </a:p>
-                  </a:txBody>
-                  <a:tcPr marL="101600" marR="101600" marT="63500" marB="63500" anchor="ctr">
-                    <a:lnL w="9525" cap="flat" cmpd="sng" algn="ctr">
-                      <a:solidFill>
-                        <a:srgbClr val="D8DEE2"/>
-                      </a:solidFill>
-                      <a:prstDash val="solid"/>
-                      <a:round/>
-                      <a:headEnd type="none" w="med" len="med"/>
-                      <a:tailEnd type="none" w="med" len="med"/>
-                    </a:lnL>
-                    <a:lnR w="9525" cap="flat" cmpd="sng" algn="ctr">
-                      <a:solidFill>
-                        <a:srgbClr val="D8DEE2"/>
-                      </a:solidFill>
-                      <a:prstDash val="solid"/>
-                      <a:round/>
-                      <a:headEnd type="none" w="med" len="med"/>
-                      <a:tailEnd type="none" w="med" len="med"/>
-                    </a:lnR>
-                    <a:lnT w="9525" cap="flat" cmpd="sng" algn="ctr">
-                      <a:solidFill>
-                        <a:srgbClr val="D8DEE2"/>
-                      </a:solidFill>
-                      <a:prstDash val="solid"/>
-                      <a:round/>
-                      <a:headEnd type="none" w="med" len="med"/>
-                      <a:tailEnd type="none" w="med" len="med"/>
-                    </a:lnT>
-                    <a:lnB w="9525" cap="flat" cmpd="sng" algn="ctr">
-                      <a:solidFill>
-                        <a:srgbClr val="D8DEE2"/>
-                      </a:solidFill>
-                      <a:prstDash val="solid"/>
-                      <a:round/>
-                      <a:headEnd type="none" w="med" len="med"/>
-                      <a:tailEnd type="none" w="med" len="med"/>
-                    </a:lnB>
-                  </a:tcPr>
-                </a:tc>
-              </a:tr>
-              <a:tr h="373380">
-                <a:tc>
-                  <a:txBody>
-                    <a:bodyPr/>
-                    <a:lstStyle/>
-                    <a:p>
-                      <a:pPr indent="0" marL="0">
-                        <a:buNone/>
-                      </a:pPr>
-                      <a:r>
-                        <a:rPr lang="en-US" sz="1080" dirty="0">
-                          <a:solidFill>
-                            <a:srgbClr val="1A2733"/>
-                          </a:solidFill>
-                          <a:latin typeface="Calibri" pitchFamily="34" charset="0"/>
-                          <a:ea typeface="Calibri" pitchFamily="34" charset="-122"/>
-                          <a:cs typeface="Calibri" pitchFamily="34" charset="-120"/>
-                        </a:rPr>
-                        <a:t>Работа с MS Office 365</a:t>
-                      </a:r>
-                      <a:endParaRPr lang="en-US" sz="1080" dirty="0">
-                        <a:latin typeface="Calibri" charset="0"/>
-                        <a:ea typeface="Calibri" charset="0"/>
-                        <a:cs typeface="Calibri" charset="0"/>
-                      </a:endParaRPr>
-                    </a:p>
-                  </a:txBody>
-                  <a:tcPr marL="101600" marR="101600" marT="63500" marB="63500" anchor="ctr">
-                    <a:lnL w="9525" cap="flat" cmpd="sng" algn="ctr">
-                      <a:solidFill>
-                        <a:srgbClr val="D8DEE2"/>
-                      </a:solidFill>
-                      <a:prstDash val="solid"/>
-                      <a:round/>
-                      <a:headEnd type="none" w="med" len="med"/>
-                      <a:tailEnd type="none" w="med" len="med"/>
-                    </a:lnL>
-                    <a:lnR w="9525" cap="flat" cmpd="sng" algn="ctr">
-                      <a:solidFill>
-                        <a:srgbClr val="D8DEE2"/>
-                      </a:solidFill>
-                      <a:prstDash val="solid"/>
-                      <a:round/>
-                      <a:headEnd type="none" w="med" len="med"/>
-                      <a:tailEnd type="none" w="med" len="med"/>
-                    </a:lnR>
-                    <a:lnT w="9525" cap="flat" cmpd="sng" algn="ctr">
-                      <a:solidFill>
-                        <a:srgbClr val="D8DEE2"/>
-                      </a:solidFill>
-                      <a:prstDash val="solid"/>
-                      <a:round/>
-                      <a:headEnd type="none" w="med" len="med"/>
-                      <a:tailEnd type="none" w="med" len="med"/>
-                    </a:lnT>
-                    <a:lnB w="9525" cap="flat" cmpd="sng" algn="ctr">
-                      <a:solidFill>
-                        <a:srgbClr val="D8DEE2"/>
-                      </a:solidFill>
-                      <a:prstDash val="solid"/>
-                      <a:round/>
-                      <a:headEnd type="none" w="med" len="med"/>
-                      <a:tailEnd type="none" w="med" len="med"/>
-                    </a:lnB>
-                  </a:tcPr>
-                </a:tc>
-                <a:tc>
-                  <a:txBody>
-                    <a:bodyPr/>
-                    <a:lstStyle/>
-                    <a:p>
-                      <a:pPr algn="ctr" indent="0" marL="0">
-                        <a:buNone/>
-                      </a:pPr>
-                      <a:r>
-                        <a:rPr lang="en-US" sz="1050" b="1" dirty="0">
-                          <a:solidFill>
-                            <a:srgbClr val="5B6B7A"/>
-                          </a:solidFill>
-                          <a:latin typeface="Calibri" pitchFamily="34" charset="0"/>
-                          <a:ea typeface="Calibri" pitchFamily="34" charset="-122"/>
-                          <a:cs typeface="Calibri" pitchFamily="34" charset="-120"/>
-                        </a:rPr>
-                        <a:t>Нормальный</a:t>
-                      </a:r>
-                      <a:endParaRPr lang="en-US" sz="1050" dirty="0">
-                        <a:latin typeface="Calibri" charset="0"/>
-                        <a:ea typeface="Calibri" charset="0"/>
-                        <a:cs typeface="Calibri" charset="0"/>
-                      </a:endParaRPr>
-                    </a:p>
-                  </a:txBody>
-                  <a:tcPr marL="101600" marR="101600" marT="63500" marB="63500" anchor="ctr">
-                    <a:lnL w="9525" cap="flat" cmpd="sng" algn="ctr">
-                      <a:solidFill>
-                        <a:srgbClr val="D8DEE2"/>
-                      </a:solidFill>
-                      <a:prstDash val="solid"/>
-                      <a:round/>
-                      <a:headEnd type="none" w="med" len="med"/>
-                      <a:tailEnd type="none" w="med" len="med"/>
-                    </a:lnL>
-                    <a:lnR w="9525" cap="flat" cmpd="sng" algn="ctr">
-                      <a:solidFill>
-                        <a:srgbClr val="D8DEE2"/>
-                      </a:solidFill>
-                      <a:prstDash val="solid"/>
-                      <a:round/>
-                      <a:headEnd type="none" w="med" len="med"/>
-                      <a:tailEnd type="none" w="med" len="med"/>
-                    </a:lnR>
-                    <a:lnT w="9525" cap="flat" cmpd="sng" algn="ctr">
-                      <a:solidFill>
-                        <a:srgbClr val="D8DEE2"/>
-                      </a:solidFill>
-                      <a:prstDash val="solid"/>
-                      <a:round/>
-                      <a:headEnd type="none" w="med" len="med"/>
-                      <a:tailEnd type="none" w="med" len="med"/>
-                    </a:lnT>
-                    <a:lnB w="9525" cap="flat" cmpd="sng" algn="ctr">
-                      <a:solidFill>
-                        <a:srgbClr val="D8DEE2"/>
-                      </a:solidFill>
-                      <a:prstDash val="solid"/>
-                      <a:round/>
-                      <a:headEnd type="none" w="med" len="med"/>
-                      <a:tailEnd type="none" w="med" len="med"/>
-                    </a:lnB>
-                  </a:tcPr>
-                </a:tc>
-                <a:tc>
-                  <a:txBody>
-                    <a:bodyPr/>
-                    <a:lstStyle/>
-                    <a:p>
-                      <a:pPr algn="ctr" indent="0" marL="0">
-                        <a:buNone/>
-                      </a:pPr>
-                      <a:r>
-                        <a:rPr lang="en-US" sz="1050" dirty="0">
-                          <a:solidFill>
-                            <a:srgbClr val="5B6B7A"/>
-                          </a:solidFill>
-                          <a:latin typeface="Calibri" pitchFamily="34" charset="0"/>
-                          <a:ea typeface="Calibri" pitchFamily="34" charset="-122"/>
-                          <a:cs typeface="Calibri" pitchFamily="34" charset="-120"/>
-                        </a:rPr>
-                        <a:t>4 квартал</a:t>
-                      </a:r>
-                      <a:endParaRPr lang="en-US" sz="1050" dirty="0">
-                        <a:latin typeface="Calibri" charset="0"/>
-                        <a:ea typeface="Calibri" charset="0"/>
-                        <a:cs typeface="Calibri" charset="0"/>
-                      </a:endParaRPr>
-                    </a:p>
-                  </a:txBody>
-                  <a:tcPr marL="101600" marR="101600" marT="63500" marB="63500" anchor="ctr">
-                    <a:lnL w="9525" cap="flat" cmpd="sng" algn="ctr">
-                      <a:solidFill>
-                        <a:srgbClr val="D8DEE2"/>
-                      </a:solidFill>
-                      <a:prstDash val="solid"/>
-                      <a:round/>
-                      <a:headEnd type="none" w="med" len="med"/>
-                      <a:tailEnd type="none" w="med" len="med"/>
-                    </a:lnL>
-                    <a:lnR w="9525" cap="flat" cmpd="sng" algn="ctr">
-                      <a:solidFill>
-                        <a:srgbClr val="D8DEE2"/>
-                      </a:solidFill>
-                      <a:prstDash val="solid"/>
-                      <a:round/>
-                      <a:headEnd type="none" w="med" len="med"/>
-                      <a:tailEnd type="none" w="med" len="med"/>
-                    </a:lnR>
-                    <a:lnT w="9525" cap="flat" cmpd="sng" algn="ctr">
-                      <a:solidFill>
-                        <a:srgbClr val="D8DEE2"/>
-                      </a:solidFill>
-                      <a:prstDash val="solid"/>
-                      <a:round/>
-                      <a:headEnd type="none" w="med" len="med"/>
-                      <a:tailEnd type="none" w="med" len="med"/>
-                    </a:lnT>
-                    <a:lnB w="9525" cap="flat" cmpd="sng" algn="ctr">
-                      <a:solidFill>
-                        <a:srgbClr val="D8DEE2"/>
-                      </a:solidFill>
-                      <a:prstDash val="solid"/>
-                      <a:round/>
-                      <a:headEnd type="none" w="med" len="med"/>
-                      <a:tailEnd type="none" w="med" len="med"/>
-                    </a:lnB>
-                  </a:tcPr>
-                </a:tc>
-                <a:tc>
-                  <a:txBody>
-                    <a:bodyPr/>
-                    <a:lstStyle/>
-                    <a:p>
-                      <a:pPr indent="0" marL="0">
-                        <a:buNone/>
-                      </a:pPr>
-                      <a:endParaRPr lang="en-US" sz="1050" dirty="0">
-                        <a:latin typeface="Calibri" charset="0"/>
-                        <a:ea typeface="Calibri" charset="0"/>
-                        <a:cs typeface="Calibri" charset="0"/>
-                      </a:endParaRPr>
-                    </a:p>
-                  </a:txBody>
-                  <a:tcPr marL="101600" marR="101600" marT="63500" marB="63500" anchor="ctr">
-                    <a:lnL w="9525" cap="flat" cmpd="sng" algn="ctr">
-                      <a:solidFill>
-                        <a:srgbClr val="D8DEE2"/>
-                      </a:solidFill>
-                      <a:prstDash val="solid"/>
-                      <a:round/>
-                      <a:headEnd type="none" w="med" len="med"/>
-                      <a:tailEnd type="none" w="med" len="med"/>
-                    </a:lnL>
-                    <a:lnR w="9525" cap="flat" cmpd="sng" algn="ctr">
-                      <a:solidFill>
-                        <a:srgbClr val="D8DEE2"/>
-                      </a:solidFill>
-                      <a:prstDash val="solid"/>
-                      <a:round/>
-                      <a:headEnd type="none" w="med" len="med"/>
-                      <a:tailEnd type="none" w="med" len="med"/>
-                    </a:lnR>
-                    <a:lnT w="9525" cap="flat" cmpd="sng" algn="ctr">
-                      <a:solidFill>
-                        <a:srgbClr val="D8DEE2"/>
-                      </a:solidFill>
-                      <a:prstDash val="solid"/>
-                      <a:round/>
-                      <a:headEnd type="none" w="med" len="med"/>
-                      <a:tailEnd type="none" w="med" len="med"/>
-                    </a:lnT>
-                    <a:lnB w="9525" cap="flat" cmpd="sng" algn="ctr">
-                      <a:solidFill>
-                        <a:srgbClr val="D8DEE2"/>
-                      </a:solidFill>
-                      <a:prstDash val="solid"/>
-                      <a:round/>
-                      <a:headEnd type="none" w="med" len="med"/>
-                      <a:tailEnd type="none" w="med" len="med"/>
-                    </a:lnB>
-                  </a:tcPr>
-                </a:tc>
-              </a:tr>
-              <a:tr h="373380">
-                <a:tc>
-                  <a:txBody>
-                    <a:bodyPr/>
-                    <a:lstStyle/>
-                    <a:p>
-                      <a:pPr indent="0" marL="0">
-                        <a:buNone/>
-                      </a:pPr>
-                      <a:r>
-                        <a:rPr lang="en-US" sz="1080" dirty="0">
-                          <a:solidFill>
-                            <a:srgbClr val="1A2733"/>
-                          </a:solidFill>
-                          <a:latin typeface="Calibri" pitchFamily="34" charset="0"/>
-                          <a:ea typeface="Calibri" pitchFamily="34" charset="-122"/>
-                          <a:cs typeface="Calibri" pitchFamily="34" charset="-120"/>
-                        </a:rPr>
-                        <a:t>Поддержка актуальной версии API (web search)</a:t>
-                      </a:r>
-                      <a:endParaRPr lang="en-US" sz="1080" dirty="0">
-                        <a:latin typeface="Calibri" charset="0"/>
-                        <a:ea typeface="Calibri" charset="0"/>
-                        <a:cs typeface="Calibri" charset="0"/>
-                      </a:endParaRPr>
-                    </a:p>
-                  </a:txBody>
-                  <a:tcPr marL="101600" marR="101600" marT="63500" marB="63500" anchor="ctr">
-                    <a:lnL w="9525" cap="flat" cmpd="sng" algn="ctr">
-                      <a:solidFill>
-                        <a:srgbClr val="D8DEE2"/>
-                      </a:solidFill>
-                      <a:prstDash val="solid"/>
-                      <a:round/>
-                      <a:headEnd type="none" w="med" len="med"/>
-                      <a:tailEnd type="none" w="med" len="med"/>
-                    </a:lnL>
-                    <a:lnR w="9525" cap="flat" cmpd="sng" algn="ctr">
-                      <a:solidFill>
-                        <a:srgbClr val="D8DEE2"/>
-                      </a:solidFill>
-                      <a:prstDash val="solid"/>
-                      <a:round/>
-                      <a:headEnd type="none" w="med" len="med"/>
-                      <a:tailEnd type="none" w="med" len="med"/>
-                    </a:lnR>
-                    <a:lnT w="9525" cap="flat" cmpd="sng" algn="ctr">
-                      <a:solidFill>
-                        <a:srgbClr val="D8DEE2"/>
-                      </a:solidFill>
-                      <a:prstDash val="solid"/>
-                      <a:round/>
-                      <a:headEnd type="none" w="med" len="med"/>
-                      <a:tailEnd type="none" w="med" len="med"/>
-                    </a:lnT>
-                    <a:lnB w="9525" cap="flat" cmpd="sng" algn="ctr">
-                      <a:solidFill>
-                        <a:srgbClr val="D8DEE2"/>
-                      </a:solidFill>
-                      <a:prstDash val="solid"/>
-                      <a:round/>
-                      <a:headEnd type="none" w="med" len="med"/>
-                      <a:tailEnd type="none" w="med" len="med"/>
-                    </a:lnB>
-                  </a:tcPr>
-                </a:tc>
-                <a:tc>
-                  <a:txBody>
-                    <a:bodyPr/>
-                    <a:lstStyle/>
-                    <a:p>
-                      <a:pPr algn="ctr" indent="0" marL="0">
-                        <a:buNone/>
-                      </a:pPr>
-                      <a:r>
-                        <a:rPr lang="en-US" sz="1050" b="1" dirty="0">
-                          <a:solidFill>
-                            <a:srgbClr val="C0392B"/>
-                          </a:solidFill>
-                          <a:latin typeface="Calibri" pitchFamily="34" charset="0"/>
-                          <a:ea typeface="Calibri" pitchFamily="34" charset="-122"/>
-                          <a:cs typeface="Calibri" pitchFamily="34" charset="-120"/>
-                        </a:rPr>
-                        <a:t>Критичный</a:t>
-                      </a:r>
-                      <a:endParaRPr lang="en-US" sz="1050" dirty="0">
-                        <a:latin typeface="Calibri" charset="0"/>
-                        <a:ea typeface="Calibri" charset="0"/>
-                        <a:cs typeface="Calibri" charset="0"/>
-                      </a:endParaRPr>
-                    </a:p>
-                  </a:txBody>
-                  <a:tcPr marL="101600" marR="101600" marT="63500" marB="63500" anchor="ctr">
-                    <a:lnL w="9525" cap="flat" cmpd="sng" algn="ctr">
-                      <a:solidFill>
-                        <a:srgbClr val="D8DEE2"/>
-                      </a:solidFill>
-                      <a:prstDash val="solid"/>
-                      <a:round/>
-                      <a:headEnd type="none" w="med" len="med"/>
-                      <a:tailEnd type="none" w="med" len="med"/>
-                    </a:lnL>
-                    <a:lnR w="9525" cap="flat" cmpd="sng" algn="ctr">
-                      <a:solidFill>
-                        <a:srgbClr val="D8DEE2"/>
-                      </a:solidFill>
-                      <a:prstDash val="solid"/>
-                      <a:round/>
-                      <a:headEnd type="none" w="med" len="med"/>
-                      <a:tailEnd type="none" w="med" len="med"/>
-                    </a:lnR>
-                    <a:lnT w="9525" cap="flat" cmpd="sng" algn="ctr">
-                      <a:solidFill>
-                        <a:srgbClr val="D8DEE2"/>
-                      </a:solidFill>
-                      <a:prstDash val="solid"/>
-                      <a:round/>
-                      <a:headEnd type="none" w="med" len="med"/>
-                      <a:tailEnd type="none" w="med" len="med"/>
-                    </a:lnT>
-                    <a:lnB w="9525" cap="flat" cmpd="sng" algn="ctr">
-                      <a:solidFill>
-                        <a:srgbClr val="D8DEE2"/>
-                      </a:solidFill>
-                      <a:prstDash val="solid"/>
-                      <a:round/>
-                      <a:headEnd type="none" w="med" len="med"/>
-                      <a:tailEnd type="none" w="med" len="med"/>
-                    </a:lnB>
-                  </a:tcPr>
-                </a:tc>
-                <a:tc>
-                  <a:txBody>
-                    <a:bodyPr/>
-                    <a:lstStyle/>
-                    <a:p>
-                      <a:pPr algn="ctr" indent="0" marL="0">
-                        <a:buNone/>
-                      </a:pPr>
-                      <a:r>
-                        <a:rPr lang="en-US" sz="1050" dirty="0">
-                          <a:solidFill>
-                            <a:srgbClr val="5B6B7A"/>
-                          </a:solidFill>
-                          <a:latin typeface="Calibri" pitchFamily="34" charset="0"/>
-                          <a:ea typeface="Calibri" pitchFamily="34" charset="-122"/>
-                          <a:cs typeface="Calibri" pitchFamily="34" charset="-120"/>
-                        </a:rPr>
-                        <a:t>—</a:t>
-                      </a:r>
-                      <a:endParaRPr lang="en-US" sz="1050" dirty="0">
-                        <a:latin typeface="Calibri" charset="0"/>
-                        <a:ea typeface="Calibri" charset="0"/>
-                        <a:cs typeface="Calibri" charset="0"/>
-                      </a:endParaRPr>
-                    </a:p>
-                  </a:txBody>
-                  <a:tcPr marL="101600" marR="101600" marT="63500" marB="63500" anchor="ctr">
-                    <a:lnL w="9525" cap="flat" cmpd="sng" algn="ctr">
-                      <a:solidFill>
-                        <a:srgbClr val="D8DEE2"/>
-                      </a:solidFill>
-                      <a:prstDash val="solid"/>
-                      <a:round/>
-                      <a:headEnd type="none" w="med" len="med"/>
-                      <a:tailEnd type="none" w="med" len="med"/>
-                    </a:lnL>
-                    <a:lnR w="9525" cap="flat" cmpd="sng" algn="ctr">
-                      <a:solidFill>
-                        <a:srgbClr val="D8DEE2"/>
-                      </a:solidFill>
-                      <a:prstDash val="solid"/>
-                      <a:round/>
-                      <a:headEnd type="none" w="med" len="med"/>
-                      <a:tailEnd type="none" w="med" len="med"/>
-                    </a:lnR>
-                    <a:lnT w="9525" cap="flat" cmpd="sng" algn="ctr">
-                      <a:solidFill>
-                        <a:srgbClr val="D8DEE2"/>
-                      </a:solidFill>
-                      <a:prstDash val="solid"/>
-                      <a:round/>
-                      <a:headEnd type="none" w="med" len="med"/>
-                      <a:tailEnd type="none" w="med" len="med"/>
-                    </a:lnT>
-                    <a:lnB w="9525" cap="flat" cmpd="sng" algn="ctr">
-                      <a:solidFill>
-                        <a:srgbClr val="D8DEE2"/>
-                      </a:solidFill>
-                      <a:prstDash val="solid"/>
-                      <a:round/>
-                      <a:headEnd type="none" w="med" len="med"/>
-                      <a:tailEnd type="none" w="med" len="med"/>
-                    </a:lnB>
-                  </a:tcPr>
-                </a:tc>
-                <a:tc>
-                  <a:txBody>
-                    <a:bodyPr/>
-                    <a:lstStyle/>
-                    <a:p>
-                      <a:pPr indent="0" marL="0">
-                        <a:buNone/>
-                      </a:pPr>
-                      <a:r>
-                        <a:rPr lang="en-US" sz="1050" dirty="0">
-                          <a:solidFill>
-                            <a:srgbClr val="8C99A6"/>
-                          </a:solidFill>
-                          <a:latin typeface="Calibri" pitchFamily="34" charset="0"/>
-                          <a:ea typeface="Calibri" pitchFamily="34" charset="-122"/>
-                          <a:cs typeface="Calibri" pitchFamily="34" charset="-120"/>
-                        </a:rPr>
-                        <a:t>Уточняем сами</a:t>
-                      </a:r>
-                      <a:endParaRPr lang="en-US" sz="1050" dirty="0">
-                        <a:latin typeface="Calibri" charset="0"/>
-                        <a:ea typeface="Calibri" charset="0"/>
-                        <a:cs typeface="Calibri" charset="0"/>
-                      </a:endParaRPr>
-                    </a:p>
-                  </a:txBody>
-                  <a:tcPr marL="101600" marR="101600" marT="63500" marB="63500" anchor="ctr">
-                    <a:lnL w="9525" cap="flat" cmpd="sng" algn="ctr">
-                      <a:solidFill>
-                        <a:srgbClr val="D8DEE2"/>
-                      </a:solidFill>
-                      <a:prstDash val="solid"/>
-                      <a:round/>
-                      <a:headEnd type="none" w="med" len="med"/>
-                      <a:tailEnd type="none" w="med" len="med"/>
-                    </a:lnL>
-                    <a:lnR w="9525" cap="flat" cmpd="sng" algn="ctr">
-                      <a:solidFill>
-                        <a:srgbClr val="D8DEE2"/>
-                      </a:solidFill>
-                      <a:prstDash val="solid"/>
-                      <a:round/>
-                      <a:headEnd type="none" w="med" len="med"/>
-                      <a:tailEnd type="none" w="med" len="med"/>
-                    </a:lnR>
-                    <a:lnT w="9525" cap="flat" cmpd="sng" algn="ctr">
-                      <a:solidFill>
-                        <a:srgbClr val="D8DEE2"/>
-                      </a:solidFill>
-                      <a:prstDash val="solid"/>
-                      <a:round/>
-                      <a:headEnd type="none" w="med" len="med"/>
-                      <a:tailEnd type="none" w="med" len="med"/>
-                    </a:lnT>
-                    <a:lnB w="9525" cap="flat" cmpd="sng" algn="ctr">
-                      <a:solidFill>
-                        <a:srgbClr val="D8DEE2"/>
-                      </a:solidFill>
-                      <a:prstDash val="solid"/>
-                      <a:round/>
-                      <a:headEnd type="none" w="med" len="med"/>
-                      <a:tailEnd type="none" w="med" len="med"/>
-                    </a:lnB>
-                  </a:tcPr>
-                </a:tc>
-              </a:tr>
-              <a:tr h="373380">
-                <a:tc>
-                  <a:txBody>
-                    <a:bodyPr/>
-                    <a:lstStyle/>
-                    <a:p>
-                      <a:pPr indent="0" marL="0">
-                        <a:buNone/>
-                      </a:pPr>
-                      <a:r>
-                        <a:rPr lang="en-US" sz="1080" dirty="0">
-                          <a:solidFill>
-                            <a:srgbClr val="1A2733"/>
-                          </a:solidFill>
-                          <a:latin typeface="Calibri" pitchFamily="34" charset="0"/>
-                          <a:ea typeface="Calibri" pitchFamily="34" charset="-122"/>
-                          <a:cs typeface="Calibri" pitchFamily="34" charset="-120"/>
-                        </a:rPr>
-                        <a:t>Кастомизация выбора источников</a:t>
-                      </a:r>
-                      <a:endParaRPr lang="en-US" sz="1080" dirty="0">
-                        <a:latin typeface="Calibri" charset="0"/>
-                        <a:ea typeface="Calibri" charset="0"/>
-                        <a:cs typeface="Calibri" charset="0"/>
-                      </a:endParaRPr>
-                    </a:p>
-                  </a:txBody>
-                  <a:tcPr marL="101600" marR="101600" marT="63500" marB="63500" anchor="ctr">
-                    <a:lnL w="9525" cap="flat" cmpd="sng" algn="ctr">
-                      <a:solidFill>
-                        <a:srgbClr val="D8DEE2"/>
-                      </a:solidFill>
-                      <a:prstDash val="solid"/>
-                      <a:round/>
-                      <a:headEnd type="none" w="med" len="med"/>
-                      <a:tailEnd type="none" w="med" len="med"/>
-                    </a:lnL>
-                    <a:lnR w="9525" cap="flat" cmpd="sng" algn="ctr">
-                      <a:solidFill>
-                        <a:srgbClr val="D8DEE2"/>
-                      </a:solidFill>
-                      <a:prstDash val="solid"/>
-                      <a:round/>
-                      <a:headEnd type="none" w="med" len="med"/>
-                      <a:tailEnd type="none" w="med" len="med"/>
-                    </a:lnR>
-                    <a:lnT w="9525" cap="flat" cmpd="sng" algn="ctr">
-                      <a:solidFill>
-                        <a:srgbClr val="D8DEE2"/>
-                      </a:solidFill>
-                      <a:prstDash val="solid"/>
-                      <a:round/>
-                      <a:headEnd type="none" w="med" len="med"/>
-                      <a:tailEnd type="none" w="med" len="med"/>
-                    </a:lnT>
-                    <a:lnB w="9525" cap="flat" cmpd="sng" algn="ctr">
-                      <a:solidFill>
-                        <a:srgbClr val="D8DEE2"/>
-                      </a:solidFill>
-                      <a:prstDash val="solid"/>
-                      <a:round/>
-                      <a:headEnd type="none" w="med" len="med"/>
-                      <a:tailEnd type="none" w="med" len="med"/>
-                    </a:lnB>
-                  </a:tcPr>
-                </a:tc>
-                <a:tc>
-                  <a:txBody>
-                    <a:bodyPr/>
-                    <a:lstStyle/>
-                    <a:p>
-                      <a:pPr algn="ctr" indent="0" marL="0">
-                        <a:buNone/>
-                      </a:pPr>
-                      <a:r>
-                        <a:rPr lang="en-US" sz="1050" b="1" dirty="0">
-                          <a:solidFill>
-                            <a:srgbClr val="5B6B7A"/>
-                          </a:solidFill>
-                          <a:latin typeface="Calibri" pitchFamily="34" charset="0"/>
-                          <a:ea typeface="Calibri" pitchFamily="34" charset="-122"/>
-                          <a:cs typeface="Calibri" pitchFamily="34" charset="-120"/>
-                        </a:rPr>
-                        <a:t>Нормальный</a:t>
-                      </a:r>
-                      <a:endParaRPr lang="en-US" sz="1050" dirty="0">
-                        <a:latin typeface="Calibri" charset="0"/>
-                        <a:ea typeface="Calibri" charset="0"/>
-                        <a:cs typeface="Calibri" charset="0"/>
-                      </a:endParaRPr>
-                    </a:p>
-                  </a:txBody>
-                  <a:tcPr marL="101600" marR="101600" marT="63500" marB="63500" anchor="ctr">
-                    <a:lnL w="9525" cap="flat" cmpd="sng" algn="ctr">
-                      <a:solidFill>
-                        <a:srgbClr val="D8DEE2"/>
-                      </a:solidFill>
-                      <a:prstDash val="solid"/>
-                      <a:round/>
-                      <a:headEnd type="none" w="med" len="med"/>
-                      <a:tailEnd type="none" w="med" len="med"/>
-                    </a:lnL>
-                    <a:lnR w="9525" cap="flat" cmpd="sng" algn="ctr">
-                      <a:solidFill>
-                        <a:srgbClr val="D8DEE2"/>
-                      </a:solidFill>
-                      <a:prstDash val="solid"/>
-                      <a:round/>
-                      <a:headEnd type="none" w="med" len="med"/>
-                      <a:tailEnd type="none" w="med" len="med"/>
-                    </a:lnR>
-                    <a:lnT w="9525" cap="flat" cmpd="sng" algn="ctr">
-                      <a:solidFill>
-                        <a:srgbClr val="D8DEE2"/>
-                      </a:solidFill>
-                      <a:prstDash val="solid"/>
-                      <a:round/>
-                      <a:headEnd type="none" w="med" len="med"/>
-                      <a:tailEnd type="none" w="med" len="med"/>
-                    </a:lnT>
-                    <a:lnB w="9525" cap="flat" cmpd="sng" algn="ctr">
-                      <a:solidFill>
-                        <a:srgbClr val="D8DEE2"/>
-                      </a:solidFill>
-                      <a:prstDash val="solid"/>
-                      <a:round/>
-                      <a:headEnd type="none" w="med" len="med"/>
-                      <a:tailEnd type="none" w="med" len="med"/>
-                    </a:lnB>
-                  </a:tcPr>
-                </a:tc>
-                <a:tc>
-                  <a:txBody>
-                    <a:bodyPr/>
-                    <a:lstStyle/>
-                    <a:p>
-                      <a:pPr algn="ctr" indent="0" marL="0">
-                        <a:buNone/>
-                      </a:pPr>
-                      <a:r>
-                        <a:rPr lang="en-US" sz="1050" dirty="0">
-                          <a:solidFill>
-                            <a:srgbClr val="5B6B7A"/>
-                          </a:solidFill>
-                          <a:latin typeface="Calibri" pitchFamily="34" charset="0"/>
-                          <a:ea typeface="Calibri" pitchFamily="34" charset="-122"/>
-                          <a:cs typeface="Calibri" pitchFamily="34" charset="-120"/>
-                        </a:rPr>
-                        <a:t>—</a:t>
-                      </a:r>
-                      <a:endParaRPr lang="en-US" sz="1050" dirty="0">
-                        <a:latin typeface="Calibri" charset="0"/>
-                        <a:ea typeface="Calibri" charset="0"/>
-                        <a:cs typeface="Calibri" charset="0"/>
-                      </a:endParaRPr>
-                    </a:p>
-                  </a:txBody>
-                  <a:tcPr marL="101600" marR="101600" marT="63500" marB="63500" anchor="ctr">
-                    <a:lnL w="9525" cap="flat" cmpd="sng" algn="ctr">
-                      <a:solidFill>
-                        <a:srgbClr val="D8DEE2"/>
-                      </a:solidFill>
-                      <a:prstDash val="solid"/>
-                      <a:round/>
-                      <a:headEnd type="none" w="med" len="med"/>
-                      <a:tailEnd type="none" w="med" len="med"/>
-                    </a:lnL>
-                    <a:lnR w="9525" cap="flat" cmpd="sng" algn="ctr">
-                      <a:solidFill>
-                        <a:srgbClr val="D8DEE2"/>
-                      </a:solidFill>
-                      <a:prstDash val="solid"/>
-                      <a:round/>
-                      <a:headEnd type="none" w="med" len="med"/>
-                      <a:tailEnd type="none" w="med" len="med"/>
-                    </a:lnR>
-                    <a:lnT w="9525" cap="flat" cmpd="sng" algn="ctr">
-                      <a:solidFill>
-                        <a:srgbClr val="D8DEE2"/>
-                      </a:solidFill>
-                      <a:prstDash val="solid"/>
-                      <a:round/>
-                      <a:headEnd type="none" w="med" len="med"/>
-                      <a:tailEnd type="none" w="med" len="med"/>
-                    </a:lnT>
-                    <a:lnB w="9525" cap="flat" cmpd="sng" algn="ctr">
-                      <a:solidFill>
-                        <a:srgbClr val="D8DEE2"/>
-                      </a:solidFill>
-                      <a:prstDash val="solid"/>
-                      <a:round/>
-                      <a:headEnd type="none" w="med" len="med"/>
-                      <a:tailEnd type="none" w="med" len="med"/>
-                    </a:lnB>
-                  </a:tcPr>
-                </a:tc>
-                <a:tc>
-                  <a:txBody>
-                    <a:bodyPr/>
-                    <a:lstStyle/>
-                    <a:p>
-                      <a:pPr indent="0" marL="0">
-                        <a:buNone/>
-                      </a:pPr>
-                      <a:r>
-                        <a:rPr lang="en-US" sz="1050" b="1" dirty="0">
-                          <a:solidFill>
-                            <a:srgbClr val="C97A1A"/>
-                          </a:solidFill>
-                          <a:latin typeface="Calibri" pitchFamily="34" charset="0"/>
-                          <a:ea typeface="Calibri" pitchFamily="34" charset="-122"/>
-                          <a:cs typeface="Calibri" pitchFamily="34" charset="-120"/>
-                        </a:rPr>
-                        <a:t>Требуется от Д8</a:t>
-                      </a:r>
-                      <a:endParaRPr lang="en-US" sz="1050" dirty="0">
-                        <a:latin typeface="Calibri" charset="0"/>
-                        <a:ea typeface="Calibri" charset="0"/>
-                        <a:cs typeface="Calibri" charset="0"/>
-                      </a:endParaRPr>
-                    </a:p>
-                  </a:txBody>
-                  <a:tcPr marL="101600" marR="101600" marT="63500" marB="63500" anchor="ctr">
-                    <a:lnL w="9525" cap="flat" cmpd="sng" algn="ctr">
-                      <a:solidFill>
-                        <a:srgbClr val="D8DEE2"/>
-                      </a:solidFill>
-                      <a:prstDash val="solid"/>
-                      <a:round/>
-                      <a:headEnd type="none" w="med" len="med"/>
-                      <a:tailEnd type="none" w="med" len="med"/>
-                    </a:lnL>
-                    <a:lnR w="9525" cap="flat" cmpd="sng" algn="ctr">
-                      <a:solidFill>
-                        <a:srgbClr val="D8DEE2"/>
-                      </a:solidFill>
-                      <a:prstDash val="solid"/>
-                      <a:round/>
-                      <a:headEnd type="none" w="med" len="med"/>
-                      <a:tailEnd type="none" w="med" len="med"/>
-                    </a:lnR>
-                    <a:lnT w="9525" cap="flat" cmpd="sng" algn="ctr">
-                      <a:solidFill>
-                        <a:srgbClr val="D8DEE2"/>
-                      </a:solidFill>
-                      <a:prstDash val="solid"/>
-                      <a:round/>
-                      <a:headEnd type="none" w="med" len="med"/>
-                      <a:tailEnd type="none" w="med" len="med"/>
-                    </a:lnT>
-                    <a:lnB w="9525" cap="flat" cmpd="sng" algn="ctr">
-                      <a:solidFill>
-                        <a:srgbClr val="D8DEE2"/>
-                      </a:solidFill>
-                      <a:prstDash val="solid"/>
-                      <a:round/>
-                      <a:headEnd type="none" w="med" len="med"/>
-                      <a:tailEnd type="none" w="med" len="med"/>
-                    </a:lnB>
-                  </a:tcPr>
-                </a:tc>
-              </a:tr>
-              <a:tr h="373380">
-                <a:tc>
-                  <a:txBody>
-                    <a:bodyPr/>
-                    <a:lstStyle/>
-                    <a:p>
-                      <a:pPr indent="0" marL="0">
-                        <a:buNone/>
-                      </a:pPr>
-                      <a:r>
-                        <a:rPr lang="en-US" sz="1080" dirty="0">
-                          <a:solidFill>
-                            <a:srgbClr val="1A2733"/>
-                          </a:solidFill>
-                          <a:latin typeface="Calibri" pitchFamily="34" charset="0"/>
-                          <a:ea typeface="Calibri" pitchFamily="34" charset="-122"/>
-                          <a:cs typeface="Calibri" pitchFamily="34" charset="-120"/>
-                        </a:rPr>
-                        <a:t>Замены в анонимизируемых данных — именованные правила</a:t>
-                      </a:r>
-                      <a:endParaRPr lang="en-US" sz="1080" dirty="0">
-                        <a:latin typeface="Calibri" charset="0"/>
-                        <a:ea typeface="Calibri" charset="0"/>
-                        <a:cs typeface="Calibri" charset="0"/>
-                      </a:endParaRPr>
-                    </a:p>
-                  </a:txBody>
-                  <a:tcPr marL="101600" marR="101600" marT="63500" marB="63500" anchor="ctr">
-                    <a:lnL w="9525" cap="flat" cmpd="sng" algn="ctr">
-                      <a:solidFill>
-                        <a:srgbClr val="D8DEE2"/>
-                      </a:solidFill>
-                      <a:prstDash val="solid"/>
-                      <a:round/>
-                      <a:headEnd type="none" w="med" len="med"/>
-                      <a:tailEnd type="none" w="med" len="med"/>
-                    </a:lnL>
-                    <a:lnR w="9525" cap="flat" cmpd="sng" algn="ctr">
-                      <a:solidFill>
-                        <a:srgbClr val="D8DEE2"/>
-                      </a:solidFill>
-                      <a:prstDash val="solid"/>
-                      <a:round/>
-                      <a:headEnd type="none" w="med" len="med"/>
-                      <a:tailEnd type="none" w="med" len="med"/>
-                    </a:lnR>
-                    <a:lnT w="9525" cap="flat" cmpd="sng" algn="ctr">
-                      <a:solidFill>
-                        <a:srgbClr val="D8DEE2"/>
-                      </a:solidFill>
-                      <a:prstDash val="solid"/>
-                      <a:round/>
-                      <a:headEnd type="none" w="med" len="med"/>
-                      <a:tailEnd type="none" w="med" len="med"/>
-                    </a:lnT>
-                    <a:lnB w="9525" cap="flat" cmpd="sng" algn="ctr">
-                      <a:solidFill>
-                        <a:srgbClr val="D8DEE2"/>
-                      </a:solidFill>
-                      <a:prstDash val="solid"/>
-                      <a:round/>
-                      <a:headEnd type="none" w="med" len="med"/>
-                      <a:tailEnd type="none" w="med" len="med"/>
-                    </a:lnB>
-                  </a:tcPr>
-                </a:tc>
-                <a:tc>
-                  <a:txBody>
-                    <a:bodyPr/>
-                    <a:lstStyle/>
-                    <a:p>
-                      <a:pPr algn="ctr" indent="0" marL="0">
-                        <a:buNone/>
-                      </a:pPr>
-                      <a:r>
-                        <a:rPr lang="en-US" sz="1050" b="1" dirty="0">
-                          <a:solidFill>
-                            <a:srgbClr val="5B6B7A"/>
-                          </a:solidFill>
-                          <a:latin typeface="Calibri" pitchFamily="34" charset="0"/>
-                          <a:ea typeface="Calibri" pitchFamily="34" charset="-122"/>
-                          <a:cs typeface="Calibri" pitchFamily="34" charset="-120"/>
-                        </a:rPr>
-                        <a:t>Нормальный</a:t>
-                      </a:r>
-                      <a:endParaRPr lang="en-US" sz="1050" dirty="0">
-                        <a:latin typeface="Calibri" charset="0"/>
-                        <a:ea typeface="Calibri" charset="0"/>
-                        <a:cs typeface="Calibri" charset="0"/>
-                      </a:endParaRPr>
-                    </a:p>
-                  </a:txBody>
-                  <a:tcPr marL="101600" marR="101600" marT="63500" marB="63500" anchor="ctr">
-                    <a:lnL w="9525" cap="flat" cmpd="sng" algn="ctr">
-                      <a:solidFill>
-                        <a:srgbClr val="D8DEE2"/>
-                      </a:solidFill>
-                      <a:prstDash val="solid"/>
-                      <a:round/>
-                      <a:headEnd type="none" w="med" len="med"/>
-                      <a:tailEnd type="none" w="med" len="med"/>
-                    </a:lnL>
-                    <a:lnR w="9525" cap="flat" cmpd="sng" algn="ctr">
-                      <a:solidFill>
-                        <a:srgbClr val="D8DEE2"/>
-                      </a:solidFill>
-                      <a:prstDash val="solid"/>
-                      <a:round/>
-                      <a:headEnd type="none" w="med" len="med"/>
-                      <a:tailEnd type="none" w="med" len="med"/>
-                    </a:lnR>
-                    <a:lnT w="9525" cap="flat" cmpd="sng" algn="ctr">
-                      <a:solidFill>
-                        <a:srgbClr val="D8DEE2"/>
-                      </a:solidFill>
-                      <a:prstDash val="solid"/>
-                      <a:round/>
-                      <a:headEnd type="none" w="med" len="med"/>
-                      <a:tailEnd type="none" w="med" len="med"/>
-                    </a:lnT>
-                    <a:lnB w="9525" cap="flat" cmpd="sng" algn="ctr">
-                      <a:solidFill>
-                        <a:srgbClr val="D8DEE2"/>
-                      </a:solidFill>
-                      <a:prstDash val="solid"/>
-                      <a:round/>
-                      <a:headEnd type="none" w="med" len="med"/>
-                      <a:tailEnd type="none" w="med" len="med"/>
-                    </a:lnB>
-                  </a:tcPr>
-                </a:tc>
-                <a:tc>
-                  <a:txBody>
-                    <a:bodyPr/>
-                    <a:lstStyle/>
-                    <a:p>
-                      <a:pPr algn="ctr" indent="0" marL="0">
-                        <a:buNone/>
-                      </a:pPr>
-                      <a:r>
-                        <a:rPr lang="en-US" sz="1050" dirty="0">
-                          <a:solidFill>
-                            <a:srgbClr val="5B6B7A"/>
-                          </a:solidFill>
-                          <a:latin typeface="Calibri" pitchFamily="34" charset="0"/>
-                          <a:ea typeface="Calibri" pitchFamily="34" charset="-122"/>
-                          <a:cs typeface="Calibri" pitchFamily="34" charset="-120"/>
-                        </a:rPr>
-                        <a:t>4 квартал</a:t>
-                      </a:r>
-                      <a:endParaRPr lang="en-US" sz="1050" dirty="0">
-                        <a:latin typeface="Calibri" charset="0"/>
-                        <a:ea typeface="Calibri" charset="0"/>
-                        <a:cs typeface="Calibri" charset="0"/>
-                      </a:endParaRPr>
-                    </a:p>
-                  </a:txBody>
-                  <a:tcPr marL="101600" marR="101600" marT="63500" marB="63500" anchor="ctr">
-                    <a:lnL w="9525" cap="flat" cmpd="sng" algn="ctr">
-                      <a:solidFill>
-                        <a:srgbClr val="D8DEE2"/>
-                      </a:solidFill>
-                      <a:prstDash val="solid"/>
-                      <a:round/>
-                      <a:headEnd type="none" w="med" len="med"/>
-                      <a:tailEnd type="none" w="med" len="med"/>
-                    </a:lnL>
-                    <a:lnR w="9525" cap="flat" cmpd="sng" algn="ctr">
-                      <a:solidFill>
-                        <a:srgbClr val="D8DEE2"/>
-                      </a:solidFill>
-                      <a:prstDash val="solid"/>
-                      <a:round/>
-                      <a:headEnd type="none" w="med" len="med"/>
-                      <a:tailEnd type="none" w="med" len="med"/>
-                    </a:lnR>
-                    <a:lnT w="9525" cap="flat" cmpd="sng" algn="ctr">
-                      <a:solidFill>
-                        <a:srgbClr val="D8DEE2"/>
-                      </a:solidFill>
-                      <a:prstDash val="solid"/>
-                      <a:round/>
-                      <a:headEnd type="none" w="med" len="med"/>
-                      <a:tailEnd type="none" w="med" len="med"/>
-                    </a:lnT>
-                    <a:lnB w="9525" cap="flat" cmpd="sng" algn="ctr">
-                      <a:solidFill>
-                        <a:srgbClr val="D8DEE2"/>
-                      </a:solidFill>
-                      <a:prstDash val="solid"/>
-                      <a:round/>
-                      <a:headEnd type="none" w="med" len="med"/>
-                      <a:tailEnd type="none" w="med" len="med"/>
-                    </a:lnB>
-                  </a:tcPr>
-                </a:tc>
-                <a:tc>
-                  <a:txBody>
-                    <a:bodyPr/>
-                    <a:lstStyle/>
-                    <a:p>
-                      <a:pPr indent="0" marL="0">
-                        <a:buNone/>
-                      </a:pPr>
-                      <a:endParaRPr lang="en-US" sz="1050" dirty="0">
-                        <a:latin typeface="Calibri" charset="0"/>
-                        <a:ea typeface="Calibri" charset="0"/>
-                        <a:cs typeface="Calibri" charset="0"/>
-                      </a:endParaRPr>
-                    </a:p>
-                  </a:txBody>
-                  <a:tcPr marL="101600" marR="101600" marT="63500" marB="63500" anchor="ctr">
-                    <a:lnL w="9525" cap="flat" cmpd="sng" algn="ctr">
-                      <a:solidFill>
-                        <a:srgbClr val="D8DEE2"/>
-                      </a:solidFill>
-                      <a:prstDash val="solid"/>
-                      <a:round/>
-                      <a:headEnd type="none" w="med" len="med"/>
-                      <a:tailEnd type="none" w="med" len="med"/>
-                    </a:lnL>
-                    <a:lnR w="9525" cap="flat" cmpd="sng" algn="ctr">
-                      <a:solidFill>
-                        <a:srgbClr val="D8DEE2"/>
-                      </a:solidFill>
-                      <a:prstDash val="solid"/>
-                      <a:round/>
-                      <a:headEnd type="none" w="med" len="med"/>
-                      <a:tailEnd type="none" w="med" len="med"/>
-                    </a:lnR>
-                    <a:lnT w="9525" cap="flat" cmpd="sng" algn="ctr">
-                      <a:solidFill>
-                        <a:srgbClr val="D8DEE2"/>
-                      </a:solidFill>
-                      <a:prstDash val="solid"/>
-                      <a:round/>
-                      <a:headEnd type="none" w="med" len="med"/>
-                      <a:tailEnd type="none" w="med" len="med"/>
-                    </a:lnT>
-                    <a:lnB w="9525" cap="flat" cmpd="sng" algn="ctr">
-                      <a:solidFill>
-                        <a:srgbClr val="D8DEE2"/>
-                      </a:solidFill>
-                      <a:prstDash val="solid"/>
-                      <a:round/>
-                      <a:headEnd type="none" w="med" len="med"/>
-                      <a:tailEnd type="none" w="med" len="med"/>
-                    </a:lnB>
-                  </a:tcPr>
-                </a:tc>
-              </a:tr>
-              <a:tr h="373380">
-                <a:tc>
-                  <a:txBody>
-                    <a:bodyPr/>
-                    <a:lstStyle/>
-                    <a:p>
-                      <a:pPr indent="0" marL="0">
-                        <a:buNone/>
-                      </a:pPr>
-                      <a:r>
-                        <a:rPr lang="en-US" sz="1080" dirty="0">
-                          <a:solidFill>
-                            <a:srgbClr val="1A2733"/>
-                          </a:solidFill>
-                          <a:latin typeface="Calibri" pitchFamily="34" charset="0"/>
-                          <a:ea typeface="Calibri" pitchFamily="34" charset="-122"/>
-                          <a:cs typeface="Calibri" pitchFamily="34" charset="-120"/>
-                        </a:rPr>
-                        <a:t>Обновление данных в RAG через API</a:t>
-                      </a:r>
-                      <a:endParaRPr lang="en-US" sz="1080" dirty="0">
-                        <a:latin typeface="Calibri" charset="0"/>
-                        <a:ea typeface="Calibri" charset="0"/>
-                        <a:cs typeface="Calibri" charset="0"/>
-                      </a:endParaRPr>
-                    </a:p>
-                  </a:txBody>
-                  <a:tcPr marL="101600" marR="101600" marT="63500" marB="63500" anchor="ctr">
-                    <a:lnL w="9525" cap="flat" cmpd="sng" algn="ctr">
-                      <a:solidFill>
-                        <a:srgbClr val="D8DEE2"/>
-                      </a:solidFill>
-                      <a:prstDash val="solid"/>
-                      <a:round/>
-                      <a:headEnd type="none" w="med" len="med"/>
-                      <a:tailEnd type="none" w="med" len="med"/>
-                    </a:lnL>
-                    <a:lnR w="9525" cap="flat" cmpd="sng" algn="ctr">
-                      <a:solidFill>
-                        <a:srgbClr val="D8DEE2"/>
-                      </a:solidFill>
-                      <a:prstDash val="solid"/>
-                      <a:round/>
-                      <a:headEnd type="none" w="med" len="med"/>
-                      <a:tailEnd type="none" w="med" len="med"/>
-                    </a:lnR>
-                    <a:lnT w="9525" cap="flat" cmpd="sng" algn="ctr">
-                      <a:solidFill>
-                        <a:srgbClr val="D8DEE2"/>
-                      </a:solidFill>
-                      <a:prstDash val="solid"/>
-                      <a:round/>
-                      <a:headEnd type="none" w="med" len="med"/>
-                      <a:tailEnd type="none" w="med" len="med"/>
-                    </a:lnT>
-                    <a:lnB w="9525" cap="flat" cmpd="sng" algn="ctr">
-                      <a:solidFill>
-                        <a:srgbClr val="D8DEE2"/>
-                      </a:solidFill>
-                      <a:prstDash val="solid"/>
-                      <a:round/>
-                      <a:headEnd type="none" w="med" len="med"/>
-                      <a:tailEnd type="none" w="med" len="med"/>
-                    </a:lnB>
-                  </a:tcPr>
-                </a:tc>
-                <a:tc>
-                  <a:txBody>
-                    <a:bodyPr/>
-                    <a:lstStyle/>
-                    <a:p>
-                      <a:pPr algn="ctr" indent="0" marL="0">
-                        <a:buNone/>
-                      </a:pPr>
-                      <a:r>
-                        <a:rPr lang="en-US" sz="1050" b="1" dirty="0">
-                          <a:solidFill>
-                            <a:srgbClr val="C97A1A"/>
-                          </a:solidFill>
-                          <a:latin typeface="Calibri" pitchFamily="34" charset="0"/>
-                          <a:ea typeface="Calibri" pitchFamily="34" charset="-122"/>
-                          <a:cs typeface="Calibri" pitchFamily="34" charset="-120"/>
-                        </a:rPr>
-                        <a:t>Высокий</a:t>
-                      </a:r>
-                      <a:endParaRPr lang="en-US" sz="1050" dirty="0">
-                        <a:latin typeface="Calibri" charset="0"/>
-                        <a:ea typeface="Calibri" charset="0"/>
-                        <a:cs typeface="Calibri" charset="0"/>
-                      </a:endParaRPr>
-                    </a:p>
-                  </a:txBody>
-                  <a:tcPr marL="101600" marR="101600" marT="63500" marB="63500" anchor="ctr">
-                    <a:lnL w="9525" cap="flat" cmpd="sng" algn="ctr">
-                      <a:solidFill>
-                        <a:srgbClr val="D8DEE2"/>
-                      </a:solidFill>
-                      <a:prstDash val="solid"/>
-                      <a:round/>
-                      <a:headEnd type="none" w="med" len="med"/>
-                      <a:tailEnd type="none" w="med" len="med"/>
-                    </a:lnL>
-                    <a:lnR w="9525" cap="flat" cmpd="sng" algn="ctr">
-                      <a:solidFill>
-                        <a:srgbClr val="D8DEE2"/>
-                      </a:solidFill>
-                      <a:prstDash val="solid"/>
-                      <a:round/>
-                      <a:headEnd type="none" w="med" len="med"/>
-                      <a:tailEnd type="none" w="med" len="med"/>
-                    </a:lnR>
-                    <a:lnT w="9525" cap="flat" cmpd="sng" algn="ctr">
-                      <a:solidFill>
-                        <a:srgbClr val="D8DEE2"/>
-                      </a:solidFill>
-                      <a:prstDash val="solid"/>
-                      <a:round/>
-                      <a:headEnd type="none" w="med" len="med"/>
-                      <a:tailEnd type="none" w="med" len="med"/>
-                    </a:lnT>
-                    <a:lnB w="9525" cap="flat" cmpd="sng" algn="ctr">
-                      <a:solidFill>
-                        <a:srgbClr val="D8DEE2"/>
-                      </a:solidFill>
-                      <a:prstDash val="solid"/>
-                      <a:round/>
-                      <a:headEnd type="none" w="med" len="med"/>
-                      <a:tailEnd type="none" w="med" len="med"/>
-                    </a:lnB>
-                  </a:tcPr>
-                </a:tc>
-                <a:tc>
-                  <a:txBody>
-                    <a:bodyPr/>
-                    <a:lstStyle/>
-                    <a:p>
-                      <a:pPr algn="ctr" indent="0" marL="0">
-                        <a:buNone/>
-                      </a:pPr>
-                      <a:r>
-                        <a:rPr lang="en-US" sz="1050" dirty="0">
-                          <a:solidFill>
-                            <a:srgbClr val="5B6B7A"/>
-                          </a:solidFill>
-                          <a:latin typeface="Calibri" pitchFamily="34" charset="0"/>
-                          <a:ea typeface="Calibri" pitchFamily="34" charset="-122"/>
-                          <a:cs typeface="Calibri" pitchFamily="34" charset="-120"/>
-                        </a:rPr>
-                        <a:t>4 квартал</a:t>
-                      </a:r>
-                      <a:endParaRPr lang="en-US" sz="1050" dirty="0">
-                        <a:latin typeface="Calibri" charset="0"/>
-                        <a:ea typeface="Calibri" charset="0"/>
-                        <a:cs typeface="Calibri" charset="0"/>
-                      </a:endParaRPr>
-                    </a:p>
-                  </a:txBody>
-                  <a:tcPr marL="101600" marR="101600" marT="63500" marB="63500" anchor="ctr">
-                    <a:lnL w="9525" cap="flat" cmpd="sng" algn="ctr">
-                      <a:solidFill>
-                        <a:srgbClr val="D8DEE2"/>
-                      </a:solidFill>
-                      <a:prstDash val="solid"/>
-                      <a:round/>
-                      <a:headEnd type="none" w="med" len="med"/>
-                      <a:tailEnd type="none" w="med" len="med"/>
-                    </a:lnL>
-                    <a:lnR w="9525" cap="flat" cmpd="sng" algn="ctr">
-                      <a:solidFill>
-                        <a:srgbClr val="D8DEE2"/>
-                      </a:solidFill>
-                      <a:prstDash val="solid"/>
-                      <a:round/>
-                      <a:headEnd type="none" w="med" len="med"/>
-                      <a:tailEnd type="none" w="med" len="med"/>
-                    </a:lnR>
-                    <a:lnT w="9525" cap="flat" cmpd="sng" algn="ctr">
-                      <a:solidFill>
-                        <a:srgbClr val="D8DEE2"/>
-                      </a:solidFill>
-                      <a:prstDash val="solid"/>
-                      <a:round/>
-                      <a:headEnd type="none" w="med" len="med"/>
-                      <a:tailEnd type="none" w="med" len="med"/>
-                    </a:lnT>
-                    <a:lnB w="9525" cap="flat" cmpd="sng" algn="ctr">
-                      <a:solidFill>
-                        <a:srgbClr val="D8DEE2"/>
-                      </a:solidFill>
-                      <a:prstDash val="solid"/>
-                      <a:round/>
-                      <a:headEnd type="none" w="med" len="med"/>
-                      <a:tailEnd type="none" w="med" len="med"/>
-                    </a:lnB>
-                  </a:tcPr>
-                </a:tc>
-                <a:tc>
-                  <a:txBody>
-                    <a:bodyPr/>
-                    <a:lstStyle/>
-                    <a:p>
-                      <a:pPr indent="0" marL="0">
-                        <a:buNone/>
-                      </a:pPr>
-                      <a:endParaRPr lang="en-US" sz="1050" dirty="0">
-                        <a:latin typeface="Calibri" charset="0"/>
-                        <a:ea typeface="Calibri" charset="0"/>
-                        <a:cs typeface="Calibri" charset="0"/>
-                      </a:endParaRPr>
-                    </a:p>
-                  </a:txBody>
-                  <a:tcPr marL="101600" marR="101600" marT="63500" marB="63500" anchor="ctr">
-                    <a:lnL w="9525" cap="flat" cmpd="sng" algn="ctr">
-                      <a:solidFill>
-                        <a:srgbClr val="D8DEE2"/>
-                      </a:solidFill>
-                      <a:prstDash val="solid"/>
-                      <a:round/>
-                      <a:headEnd type="none" w="med" len="med"/>
-                      <a:tailEnd type="none" w="med" len="med"/>
-                    </a:lnL>
-                    <a:lnR w="9525" cap="flat" cmpd="sng" algn="ctr">
-                      <a:solidFill>
-                        <a:srgbClr val="D8DEE2"/>
-                      </a:solidFill>
-                      <a:prstDash val="solid"/>
-                      <a:round/>
-                      <a:headEnd type="none" w="med" len="med"/>
-                      <a:tailEnd type="none" w="med" len="med"/>
-                    </a:lnR>
-                    <a:lnT w="9525" cap="flat" cmpd="sng" algn="ctr">
-                      <a:solidFill>
-                        <a:srgbClr val="D8DEE2"/>
-                      </a:solidFill>
-                      <a:prstDash val="solid"/>
-                      <a:round/>
-                      <a:headEnd type="none" w="med" len="med"/>
-                      <a:tailEnd type="none" w="med" len="med"/>
-                    </a:lnT>
-                    <a:lnB w="9525" cap="flat" cmpd="sng" algn="ctr">
-                      <a:solidFill>
-                        <a:srgbClr val="D8DEE2"/>
-                      </a:solidFill>
-                      <a:prstDash val="solid"/>
-                      <a:round/>
-                      <a:headEnd type="none" w="med" len="med"/>
-                      <a:tailEnd type="none" w="med" len="med"/>
-                    </a:lnB>
-                  </a:tcPr>
-                </a:tc>
-              </a:tr>
-              <a:tr h="373380">
-                <a:tc>
-                  <a:txBody>
-                    <a:bodyPr/>
-                    <a:lstStyle/>
-                    <a:p>
-                      <a:pPr indent="0" marL="0">
-                        <a:buNone/>
-                      </a:pPr>
-                      <a:r>
-                        <a:rPr lang="en-US" sz="1080" dirty="0">
-                          <a:solidFill>
-                            <a:srgbClr val="1A2733"/>
-                          </a:solidFill>
-                          <a:latin typeface="Calibri" pitchFamily="34" charset="0"/>
-                          <a:ea typeface="Calibri" pitchFamily="34" charset="-122"/>
-                          <a:cs typeface="Calibri" pitchFamily="34" charset="-120"/>
-                        </a:rPr>
-                        <a:t>Динамические права доступа через таблицы/API</a:t>
-                      </a:r>
-                      <a:endParaRPr lang="en-US" sz="1080" dirty="0">
-                        <a:latin typeface="Calibri" charset="0"/>
-                        <a:ea typeface="Calibri" charset="0"/>
-                        <a:cs typeface="Calibri" charset="0"/>
-                      </a:endParaRPr>
-                    </a:p>
-                  </a:txBody>
-                  <a:tcPr marL="101600" marR="101600" marT="63500" marB="63500" anchor="ctr">
-                    <a:lnL w="9525" cap="flat" cmpd="sng" algn="ctr">
-                      <a:solidFill>
-                        <a:srgbClr val="D8DEE2"/>
-                      </a:solidFill>
-                      <a:prstDash val="solid"/>
-                      <a:round/>
-                      <a:headEnd type="none" w="med" len="med"/>
-                      <a:tailEnd type="none" w="med" len="med"/>
-                    </a:lnL>
-                    <a:lnR w="9525" cap="flat" cmpd="sng" algn="ctr">
-                      <a:solidFill>
-                        <a:srgbClr val="D8DEE2"/>
-                      </a:solidFill>
-                      <a:prstDash val="solid"/>
-                      <a:round/>
-                      <a:headEnd type="none" w="med" len="med"/>
-                      <a:tailEnd type="none" w="med" len="med"/>
-                    </a:lnR>
-                    <a:lnT w="9525" cap="flat" cmpd="sng" algn="ctr">
-                      <a:solidFill>
-                        <a:srgbClr val="D8DEE2"/>
-                      </a:solidFill>
-                      <a:prstDash val="solid"/>
-                      <a:round/>
-                      <a:headEnd type="none" w="med" len="med"/>
-                      <a:tailEnd type="none" w="med" len="med"/>
-                    </a:lnT>
-                    <a:lnB w="9525" cap="flat" cmpd="sng" algn="ctr">
-                      <a:solidFill>
-                        <a:srgbClr val="D8DEE2"/>
-                      </a:solidFill>
-                      <a:prstDash val="solid"/>
-                      <a:round/>
-                      <a:headEnd type="none" w="med" len="med"/>
-                      <a:tailEnd type="none" w="med" len="med"/>
-                    </a:lnB>
-                  </a:tcPr>
-                </a:tc>
-                <a:tc>
-                  <a:txBody>
-                    <a:bodyPr/>
-                    <a:lstStyle/>
-                    <a:p>
-                      <a:pPr algn="ctr" indent="0" marL="0">
-                        <a:buNone/>
-                      </a:pPr>
-                      <a:r>
-                        <a:rPr lang="en-US" sz="1050" b="1" dirty="0">
-                          <a:solidFill>
-                            <a:srgbClr val="C97A1A"/>
-                          </a:solidFill>
-                          <a:latin typeface="Calibri" pitchFamily="34" charset="0"/>
-                          <a:ea typeface="Calibri" pitchFamily="34" charset="-122"/>
-                          <a:cs typeface="Calibri" pitchFamily="34" charset="-120"/>
-                        </a:rPr>
-                        <a:t>Высокий</a:t>
-                      </a:r>
-                      <a:endParaRPr lang="en-US" sz="1050" dirty="0">
-                        <a:latin typeface="Calibri" charset="0"/>
-                        <a:ea typeface="Calibri" charset="0"/>
-                        <a:cs typeface="Calibri" charset="0"/>
-                      </a:endParaRPr>
-                    </a:p>
-                  </a:txBody>
-                  <a:tcPr marL="101600" marR="101600" marT="63500" marB="63500" anchor="ctr">
-                    <a:lnL w="9525" cap="flat" cmpd="sng" algn="ctr">
-                      <a:solidFill>
-                        <a:srgbClr val="D8DEE2"/>
-                      </a:solidFill>
-                      <a:prstDash val="solid"/>
-                      <a:round/>
-                      <a:headEnd type="none" w="med" len="med"/>
-                      <a:tailEnd type="none" w="med" len="med"/>
-                    </a:lnL>
-                    <a:lnR w="9525" cap="flat" cmpd="sng" algn="ctr">
-                      <a:solidFill>
-                        <a:srgbClr val="D8DEE2"/>
-                      </a:solidFill>
-                      <a:prstDash val="solid"/>
-                      <a:round/>
-                      <a:headEnd type="none" w="med" len="med"/>
-                      <a:tailEnd type="none" w="med" len="med"/>
-                    </a:lnR>
-                    <a:lnT w="9525" cap="flat" cmpd="sng" algn="ctr">
-                      <a:solidFill>
-                        <a:srgbClr val="D8DEE2"/>
-                      </a:solidFill>
-                      <a:prstDash val="solid"/>
-                      <a:round/>
-                      <a:headEnd type="none" w="med" len="med"/>
-                      <a:tailEnd type="none" w="med" len="med"/>
-                    </a:lnT>
-                    <a:lnB w="9525" cap="flat" cmpd="sng" algn="ctr">
-                      <a:solidFill>
-                        <a:srgbClr val="D8DEE2"/>
-                      </a:solidFill>
-                      <a:prstDash val="solid"/>
-                      <a:round/>
-                      <a:headEnd type="none" w="med" len="med"/>
-                      <a:tailEnd type="none" w="med" len="med"/>
-                    </a:lnB>
-                  </a:tcPr>
-                </a:tc>
-                <a:tc>
-                  <a:txBody>
-                    <a:bodyPr/>
-                    <a:lstStyle/>
-                    <a:p>
-                      <a:pPr algn="ctr" indent="0" marL="0">
-                        <a:buNone/>
-                      </a:pPr>
-                      <a:r>
-                        <a:rPr lang="en-US" sz="1050" dirty="0">
-                          <a:solidFill>
-                            <a:srgbClr val="5B6B7A"/>
-                          </a:solidFill>
-                          <a:latin typeface="Calibri" pitchFamily="34" charset="0"/>
-                          <a:ea typeface="Calibri" pitchFamily="34" charset="-122"/>
-                          <a:cs typeface="Calibri" pitchFamily="34" charset="-120"/>
-                        </a:rPr>
-                        <a:t>—</a:t>
-                      </a:r>
-                      <a:endParaRPr lang="en-US" sz="1050" dirty="0">
-                        <a:latin typeface="Calibri" charset="0"/>
-                        <a:ea typeface="Calibri" charset="0"/>
-                        <a:cs typeface="Calibri" charset="0"/>
-                      </a:endParaRPr>
-                    </a:p>
-                  </a:txBody>
-                  <a:tcPr marL="101600" marR="101600" marT="63500" marB="63500" anchor="ctr">
-                    <a:lnL w="9525" cap="flat" cmpd="sng" algn="ctr">
-                      <a:solidFill>
-                        <a:srgbClr val="D8DEE2"/>
-                      </a:solidFill>
-                      <a:prstDash val="solid"/>
-                      <a:round/>
-                      <a:headEnd type="none" w="med" len="med"/>
-                      <a:tailEnd type="none" w="med" len="med"/>
-                    </a:lnL>
-                    <a:lnR w="9525" cap="flat" cmpd="sng" algn="ctr">
-                      <a:solidFill>
-                        <a:srgbClr val="D8DEE2"/>
-                      </a:solidFill>
-                      <a:prstDash val="solid"/>
-                      <a:round/>
-                      <a:headEnd type="none" w="med" len="med"/>
-                      <a:tailEnd type="none" w="med" len="med"/>
-                    </a:lnR>
-                    <a:lnT w="9525" cap="flat" cmpd="sng" algn="ctr">
-                      <a:solidFill>
-                        <a:srgbClr val="D8DEE2"/>
-                      </a:solidFill>
-                      <a:prstDash val="solid"/>
-                      <a:round/>
-                      <a:headEnd type="none" w="med" len="med"/>
-                      <a:tailEnd type="none" w="med" len="med"/>
-                    </a:lnT>
-                    <a:lnB w="9525" cap="flat" cmpd="sng" algn="ctr">
-                      <a:solidFill>
-                        <a:srgbClr val="D8DEE2"/>
-                      </a:solidFill>
-                      <a:prstDash val="solid"/>
-                      <a:round/>
-                      <a:headEnd type="none" w="med" len="med"/>
-                      <a:tailEnd type="none" w="med" len="med"/>
-                    </a:lnB>
-                  </a:tcPr>
-                </a:tc>
-                <a:tc>
-                  <a:txBody>
-                    <a:bodyPr/>
-                    <a:lstStyle/>
-                    <a:p>
-                      <a:pPr indent="0" marL="0">
-                        <a:buNone/>
-                      </a:pPr>
-                      <a:r>
-                        <a:rPr lang="en-US" sz="1050" b="1" dirty="0">
-                          <a:solidFill>
-                            <a:srgbClr val="C97A1A"/>
-                          </a:solidFill>
-                          <a:latin typeface="Calibri" pitchFamily="34" charset="0"/>
-                          <a:ea typeface="Calibri" pitchFamily="34" charset="-122"/>
-                          <a:cs typeface="Calibri" pitchFamily="34" charset="-120"/>
-                        </a:rPr>
-                        <a:t>Требуется от Д8</a:t>
-                      </a:r>
-                      <a:endParaRPr lang="en-US" sz="1050" dirty="0">
-                        <a:latin typeface="Calibri" charset="0"/>
-                        <a:ea typeface="Calibri" charset="0"/>
-                        <a:cs typeface="Calibri" charset="0"/>
-                      </a:endParaRPr>
-                    </a:p>
-                  </a:txBody>
-                  <a:tcPr marL="101600" marR="101600" marT="63500" marB="63500" anchor="ctr">
-                    <a:lnL w="9525" cap="flat" cmpd="sng" algn="ctr">
-                      <a:solidFill>
-                        <a:srgbClr val="D8DEE2"/>
-                      </a:solidFill>
-                      <a:prstDash val="solid"/>
-                      <a:round/>
-                      <a:headEnd type="none" w="med" len="med"/>
-                      <a:tailEnd type="none" w="med" len="med"/>
-                    </a:lnL>
-                    <a:lnR w="9525" cap="flat" cmpd="sng" algn="ctr">
-                      <a:solidFill>
-                        <a:srgbClr val="D8DEE2"/>
-                      </a:solidFill>
-                      <a:prstDash val="solid"/>
-                      <a:round/>
-                      <a:headEnd type="none" w="med" len="med"/>
-                      <a:tailEnd type="none" w="med" len="med"/>
-                    </a:lnR>
-                    <a:lnT w="9525" cap="flat" cmpd="sng" algn="ctr">
-                      <a:solidFill>
-                        <a:srgbClr val="D8DEE2"/>
-                      </a:solidFill>
-                      <a:prstDash val="solid"/>
-                      <a:round/>
-                      <a:headEnd type="none" w="med" len="med"/>
-                      <a:tailEnd type="none" w="med" len="med"/>
-                    </a:lnT>
-                    <a:lnB w="9525" cap="flat" cmpd="sng" algn="ctr">
-                      <a:solidFill>
-                        <a:srgbClr val="D8DEE2"/>
-                      </a:solidFill>
-                      <a:prstDash val="solid"/>
-                      <a:round/>
-                      <a:headEnd type="none" w="med" len="med"/>
-                      <a:tailEnd type="none" w="med" len="med"/>
-                    </a:lnB>
-                  </a:tcPr>
-                </a:tc>
-              </a:tr>
-              <a:tr h="373380">
-                <a:tc>
-                  <a:txBody>
-                    <a:bodyPr/>
-                    <a:lstStyle/>
-                    <a:p>
-                      <a:pPr indent="0" marL="0">
-                        <a:buNone/>
-                      </a:pPr>
-                      <a:r>
-                        <a:rPr lang="en-US" sz="1080" dirty="0">
-                          <a:solidFill>
-                            <a:srgbClr val="1A2733"/>
-                          </a:solidFill>
-                          <a:latin typeface="Calibri" pitchFamily="34" charset="0"/>
-                          <a:ea typeface="Calibri" pitchFamily="34" charset="-122"/>
-                          <a:cs typeface="Calibri" pitchFamily="34" charset="-120"/>
-                        </a:rPr>
-                        <a:t>Работа с графиками (визуал)</a:t>
-                      </a:r>
-                      <a:endParaRPr lang="en-US" sz="1080" dirty="0">
-                        <a:latin typeface="Calibri" charset="0"/>
-                        <a:ea typeface="Calibri" charset="0"/>
-                        <a:cs typeface="Calibri" charset="0"/>
-                      </a:endParaRPr>
-                    </a:p>
-                  </a:txBody>
-                  <a:tcPr marL="101600" marR="101600" marT="63500" marB="63500" anchor="ctr">
-                    <a:lnL w="9525" cap="flat" cmpd="sng" algn="ctr">
-                      <a:solidFill>
-                        <a:srgbClr val="D8DEE2"/>
-                      </a:solidFill>
-                      <a:prstDash val="solid"/>
-                      <a:round/>
-                      <a:headEnd type="none" w="med" len="med"/>
-                      <a:tailEnd type="none" w="med" len="med"/>
-                    </a:lnL>
-                    <a:lnR w="9525" cap="flat" cmpd="sng" algn="ctr">
-                      <a:solidFill>
-                        <a:srgbClr val="D8DEE2"/>
-                      </a:solidFill>
-                      <a:prstDash val="solid"/>
-                      <a:round/>
-                      <a:headEnd type="none" w="med" len="med"/>
-                      <a:tailEnd type="none" w="med" len="med"/>
-                    </a:lnR>
-                    <a:lnT w="9525" cap="flat" cmpd="sng" algn="ctr">
-                      <a:solidFill>
-                        <a:srgbClr val="D8DEE2"/>
-                      </a:solidFill>
-                      <a:prstDash val="solid"/>
-                      <a:round/>
-                      <a:headEnd type="none" w="med" len="med"/>
-                      <a:tailEnd type="none" w="med" len="med"/>
-                    </a:lnT>
-                    <a:lnB w="9525" cap="flat" cmpd="sng" algn="ctr">
-                      <a:solidFill>
-                        <a:srgbClr val="D8DEE2"/>
-                      </a:solidFill>
-                      <a:prstDash val="solid"/>
-                      <a:round/>
-                      <a:headEnd type="none" w="med" len="med"/>
-                      <a:tailEnd type="none" w="med" len="med"/>
-                    </a:lnB>
-                  </a:tcPr>
-                </a:tc>
-                <a:tc>
-                  <a:txBody>
-                    <a:bodyPr/>
-                    <a:lstStyle/>
-                    <a:p>
-                      <a:pPr algn="ctr" indent="0" marL="0">
-                        <a:buNone/>
-                      </a:pPr>
-                      <a:r>
-                        <a:rPr lang="en-US" sz="1050" b="1" dirty="0">
-                          <a:solidFill>
-                            <a:srgbClr val="5B6B7A"/>
-                          </a:solidFill>
-                          <a:latin typeface="Calibri" pitchFamily="34" charset="0"/>
-                          <a:ea typeface="Calibri" pitchFamily="34" charset="-122"/>
-                          <a:cs typeface="Calibri" pitchFamily="34" charset="-120"/>
-                        </a:rPr>
-                        <a:t>Нормальный</a:t>
-                      </a:r>
-                      <a:endParaRPr lang="en-US" sz="1050" dirty="0">
-                        <a:latin typeface="Calibri" charset="0"/>
-                        <a:ea typeface="Calibri" charset="0"/>
-                        <a:cs typeface="Calibri" charset="0"/>
-                      </a:endParaRPr>
-                    </a:p>
-                  </a:txBody>
-                  <a:tcPr marL="101600" marR="101600" marT="63500" marB="63500" anchor="ctr">
-                    <a:lnL w="9525" cap="flat" cmpd="sng" algn="ctr">
-                      <a:solidFill>
-                        <a:srgbClr val="D8DEE2"/>
-                      </a:solidFill>
-                      <a:prstDash val="solid"/>
-                      <a:round/>
-                      <a:headEnd type="none" w="med" len="med"/>
-                      <a:tailEnd type="none" w="med" len="med"/>
-                    </a:lnL>
-                    <a:lnR w="9525" cap="flat" cmpd="sng" algn="ctr">
-                      <a:solidFill>
-                        <a:srgbClr val="D8DEE2"/>
-                      </a:solidFill>
-                      <a:prstDash val="solid"/>
-                      <a:round/>
-                      <a:headEnd type="none" w="med" len="med"/>
-                      <a:tailEnd type="none" w="med" len="med"/>
-                    </a:lnR>
-                    <a:lnT w="9525" cap="flat" cmpd="sng" algn="ctr">
-                      <a:solidFill>
-                        <a:srgbClr val="D8DEE2"/>
-                      </a:solidFill>
-                      <a:prstDash val="solid"/>
-                      <a:round/>
-                      <a:headEnd type="none" w="med" len="med"/>
-                      <a:tailEnd type="none" w="med" len="med"/>
-                    </a:lnT>
-                    <a:lnB w="9525" cap="flat" cmpd="sng" algn="ctr">
-                      <a:solidFill>
-                        <a:srgbClr val="D8DEE2"/>
-                      </a:solidFill>
-                      <a:prstDash val="solid"/>
-                      <a:round/>
-                      <a:headEnd type="none" w="med" len="med"/>
-                      <a:tailEnd type="none" w="med" len="med"/>
-                    </a:lnB>
-                  </a:tcPr>
-                </a:tc>
-                <a:tc>
-                  <a:txBody>
-                    <a:bodyPr/>
-                    <a:lstStyle/>
-                    <a:p>
-                      <a:pPr algn="ctr" indent="0" marL="0">
-                        <a:buNone/>
-                      </a:pPr>
-                      <a:r>
-                        <a:rPr lang="en-US" sz="1050" dirty="0">
-                          <a:solidFill>
-                            <a:srgbClr val="5B6B7A"/>
-                          </a:solidFill>
-                          <a:latin typeface="Calibri" pitchFamily="34" charset="0"/>
-                          <a:ea typeface="Calibri" pitchFamily="34" charset="-122"/>
-                          <a:cs typeface="Calibri" pitchFamily="34" charset="-120"/>
-                        </a:rPr>
-                        <a:t>4 кв. — 1 кв. 2027</a:t>
-                      </a:r>
-                      <a:endParaRPr lang="en-US" sz="1050" dirty="0">
-                        <a:latin typeface="Calibri" charset="0"/>
-                        <a:ea typeface="Calibri" charset="0"/>
-                        <a:cs typeface="Calibri" charset="0"/>
-                      </a:endParaRPr>
-                    </a:p>
-                  </a:txBody>
-                  <a:tcPr marL="101600" marR="101600" marT="63500" marB="63500" anchor="ctr">
-                    <a:lnL w="9525" cap="flat" cmpd="sng" algn="ctr">
-                      <a:solidFill>
-                        <a:srgbClr val="D8DEE2"/>
-                      </a:solidFill>
-                      <a:prstDash val="solid"/>
-                      <a:round/>
-                      <a:headEnd type="none" w="med" len="med"/>
-                      <a:tailEnd type="none" w="med" len="med"/>
-                    </a:lnL>
-                    <a:lnR w="9525" cap="flat" cmpd="sng" algn="ctr">
-                      <a:solidFill>
-                        <a:srgbClr val="D8DEE2"/>
-                      </a:solidFill>
-                      <a:prstDash val="solid"/>
-                      <a:round/>
-                      <a:headEnd type="none" w="med" len="med"/>
-                      <a:tailEnd type="none" w="med" len="med"/>
-                    </a:lnR>
-                    <a:lnT w="9525" cap="flat" cmpd="sng" algn="ctr">
-                      <a:solidFill>
-                        <a:srgbClr val="D8DEE2"/>
-                      </a:solidFill>
-                      <a:prstDash val="solid"/>
-                      <a:round/>
-                      <a:headEnd type="none" w="med" len="med"/>
-                      <a:tailEnd type="none" w="med" len="med"/>
-                    </a:lnT>
-                    <a:lnB w="9525" cap="flat" cmpd="sng" algn="ctr">
-                      <a:solidFill>
-                        <a:srgbClr val="D8DEE2"/>
-                      </a:solidFill>
-                      <a:prstDash val="solid"/>
-                      <a:round/>
-                      <a:headEnd type="none" w="med" len="med"/>
-                      <a:tailEnd type="none" w="med" len="med"/>
-                    </a:lnB>
-                  </a:tcPr>
-                </a:tc>
-                <a:tc>
-                  <a:txBody>
-                    <a:bodyPr/>
-                    <a:lstStyle/>
-                    <a:p>
-                      <a:pPr indent="0" marL="0">
-                        <a:buNone/>
-                      </a:pPr>
-                      <a:endParaRPr lang="en-US" sz="1050" dirty="0">
-                        <a:latin typeface="Calibri" charset="0"/>
-                        <a:ea typeface="Calibri" charset="0"/>
-                        <a:cs typeface="Calibri" charset="0"/>
-                      </a:endParaRPr>
-                    </a:p>
-                  </a:txBody>
-                  <a:tcPr marL="101600" marR="101600" marT="63500" marB="63500" anchor="ctr">
-                    <a:lnL w="9525" cap="flat" cmpd="sng" algn="ctr">
-                      <a:solidFill>
-                        <a:srgbClr val="D8DEE2"/>
-                      </a:solidFill>
-                      <a:prstDash val="solid"/>
-                      <a:round/>
-                      <a:headEnd type="none" w="med" len="med"/>
-                      <a:tailEnd type="none" w="med" len="med"/>
-                    </a:lnL>
-                    <a:lnR w="9525" cap="flat" cmpd="sng" algn="ctr">
-                      <a:solidFill>
-                        <a:srgbClr val="D8DEE2"/>
-                      </a:solidFill>
-                      <a:prstDash val="solid"/>
-                      <a:round/>
-                      <a:headEnd type="none" w="med" len="med"/>
-                      <a:tailEnd type="none" w="med" len="med"/>
-                    </a:lnR>
-                    <a:lnT w="9525" cap="flat" cmpd="sng" algn="ctr">
-                      <a:solidFill>
-                        <a:srgbClr val="D8DEE2"/>
-                      </a:solidFill>
-                      <a:prstDash val="solid"/>
-                      <a:round/>
-                      <a:headEnd type="none" w="med" len="med"/>
-                      <a:tailEnd type="none" w="med" len="med"/>
-                    </a:lnT>
-                    <a:lnB w="9525" cap="flat" cmpd="sng" algn="ctr">
-                      <a:solidFill>
-                        <a:srgbClr val="D8DEE2"/>
-                      </a:solidFill>
-                      <a:prstDash val="solid"/>
-                      <a:round/>
-                      <a:headEnd type="none" w="med" len="med"/>
-                      <a:tailEnd type="none" w="med" len="med"/>
-                    </a:lnB>
-                  </a:tcPr>
-                </a:tc>
-              </a:tr>
-              <a:tr h="373380">
-                <a:tc>
-                  <a:txBody>
-                    <a:bodyPr/>
-                    <a:lstStyle/>
-                    <a:p>
-                      <a:pPr indent="0" marL="0">
-                        <a:buNone/>
-                      </a:pPr>
-                      <a:r>
-                        <a:rPr lang="en-US" sz="1080" dirty="0">
-                          <a:solidFill>
-                            <a:srgbClr val="1A2733"/>
-                          </a:solidFill>
-                          <a:latin typeface="Calibri" pitchFamily="34" charset="0"/>
-                          <a:ea typeface="Calibri" pitchFamily="34" charset="-122"/>
-                          <a:cs typeface="Calibri" pitchFamily="34" charset="-120"/>
-                        </a:rPr>
-                        <a:t>Персональные RAG-коллекции пользователей</a:t>
-                      </a:r>
-                      <a:endParaRPr lang="en-US" sz="1080" dirty="0">
-                        <a:latin typeface="Calibri" charset="0"/>
-                        <a:ea typeface="Calibri" charset="0"/>
-                        <a:cs typeface="Calibri" charset="0"/>
-                      </a:endParaRPr>
-                    </a:p>
-                  </a:txBody>
-                  <a:tcPr marL="101600" marR="101600" marT="63500" marB="63500" anchor="ctr">
-                    <a:lnL w="9525" cap="flat" cmpd="sng" algn="ctr">
-                      <a:solidFill>
-                        <a:srgbClr val="D8DEE2"/>
-                      </a:solidFill>
-                      <a:prstDash val="solid"/>
-                      <a:round/>
-                      <a:headEnd type="none" w="med" len="med"/>
-                      <a:tailEnd type="none" w="med" len="med"/>
-                    </a:lnL>
-                    <a:lnR w="9525" cap="flat" cmpd="sng" algn="ctr">
-                      <a:solidFill>
-                        <a:srgbClr val="D8DEE2"/>
-                      </a:solidFill>
-                      <a:prstDash val="solid"/>
-                      <a:round/>
-                      <a:headEnd type="none" w="med" len="med"/>
-                      <a:tailEnd type="none" w="med" len="med"/>
-                    </a:lnR>
-                    <a:lnT w="9525" cap="flat" cmpd="sng" algn="ctr">
-                      <a:solidFill>
-                        <a:srgbClr val="D8DEE2"/>
-                      </a:solidFill>
-                      <a:prstDash val="solid"/>
-                      <a:round/>
-                      <a:headEnd type="none" w="med" len="med"/>
-                      <a:tailEnd type="none" w="med" len="med"/>
-                    </a:lnT>
-                    <a:lnB w="9525" cap="flat" cmpd="sng" algn="ctr">
-                      <a:solidFill>
-                        <a:srgbClr val="D8DEE2"/>
-                      </a:solidFill>
-                      <a:prstDash val="solid"/>
-                      <a:round/>
-                      <a:headEnd type="none" w="med" len="med"/>
-                      <a:tailEnd type="none" w="med" len="med"/>
-                    </a:lnB>
-                  </a:tcPr>
-                </a:tc>
-                <a:tc>
-                  <a:txBody>
-                    <a:bodyPr/>
-                    <a:lstStyle/>
-                    <a:p>
-                      <a:pPr algn="ctr" indent="0" marL="0">
-                        <a:buNone/>
-                      </a:pPr>
-                      <a:r>
-                        <a:rPr lang="en-US" sz="1050" b="1" dirty="0">
-                          <a:solidFill>
-                            <a:srgbClr val="5B6B7A"/>
-                          </a:solidFill>
-                          <a:latin typeface="Calibri" pitchFamily="34" charset="0"/>
-                          <a:ea typeface="Calibri" pitchFamily="34" charset="-122"/>
-                          <a:cs typeface="Calibri" pitchFamily="34" charset="-120"/>
-                        </a:rPr>
-                        <a:t>Нормальный</a:t>
-                      </a:r>
-                      <a:endParaRPr lang="en-US" sz="1050" dirty="0">
-                        <a:latin typeface="Calibri" charset="0"/>
-                        <a:ea typeface="Calibri" charset="0"/>
-                        <a:cs typeface="Calibri" charset="0"/>
-                      </a:endParaRPr>
-                    </a:p>
-                  </a:txBody>
-                  <a:tcPr marL="101600" marR="101600" marT="63500" marB="63500" anchor="ctr">
-                    <a:lnL w="9525" cap="flat" cmpd="sng" algn="ctr">
-                      <a:solidFill>
-                        <a:srgbClr val="D8DEE2"/>
-                      </a:solidFill>
-                      <a:prstDash val="solid"/>
-                      <a:round/>
-                      <a:headEnd type="none" w="med" len="med"/>
-                      <a:tailEnd type="none" w="med" len="med"/>
-                    </a:lnL>
-                    <a:lnR w="9525" cap="flat" cmpd="sng" algn="ctr">
-                      <a:solidFill>
-                        <a:srgbClr val="D8DEE2"/>
-                      </a:solidFill>
-                      <a:prstDash val="solid"/>
-                      <a:round/>
-                      <a:headEnd type="none" w="med" len="med"/>
-                      <a:tailEnd type="none" w="med" len="med"/>
-                    </a:lnR>
-                    <a:lnT w="9525" cap="flat" cmpd="sng" algn="ctr">
-                      <a:solidFill>
-                        <a:srgbClr val="D8DEE2"/>
-                      </a:solidFill>
-                      <a:prstDash val="solid"/>
-                      <a:round/>
-                      <a:headEnd type="none" w="med" len="med"/>
-                      <a:tailEnd type="none" w="med" len="med"/>
-                    </a:lnT>
-                    <a:lnB w="9525" cap="flat" cmpd="sng" algn="ctr">
-                      <a:solidFill>
-                        <a:srgbClr val="D8DEE2"/>
-                      </a:solidFill>
-                      <a:prstDash val="solid"/>
-                      <a:round/>
-                      <a:headEnd type="none" w="med" len="med"/>
-                      <a:tailEnd type="none" w="med" len="med"/>
-                    </a:lnB>
-                  </a:tcPr>
-                </a:tc>
-                <a:tc>
-                  <a:txBody>
-                    <a:bodyPr/>
-                    <a:lstStyle/>
-                    <a:p>
-                      <a:pPr algn="ctr" indent="0" marL="0">
-                        <a:buNone/>
-                      </a:pPr>
-                      <a:r>
-                        <a:rPr lang="en-US" sz="1050" dirty="0">
-                          <a:solidFill>
-                            <a:srgbClr val="5B6B7A"/>
-                          </a:solidFill>
-                          <a:latin typeface="Calibri" pitchFamily="34" charset="0"/>
-                          <a:ea typeface="Calibri" pitchFamily="34" charset="-122"/>
-                          <a:cs typeface="Calibri" pitchFamily="34" charset="-120"/>
-                        </a:rPr>
-                        <a:t>—</a:t>
-                      </a:r>
-                      <a:endParaRPr lang="en-US" sz="1050" dirty="0">
-                        <a:latin typeface="Calibri" charset="0"/>
-                        <a:ea typeface="Calibri" charset="0"/>
-                        <a:cs typeface="Calibri" charset="0"/>
-                      </a:endParaRPr>
-                    </a:p>
-                  </a:txBody>
-                  <a:tcPr marL="101600" marR="101600" marT="63500" marB="63500" anchor="ctr">
-                    <a:lnL w="9525" cap="flat" cmpd="sng" algn="ctr">
-                      <a:solidFill>
-                        <a:srgbClr val="D8DEE2"/>
-                      </a:solidFill>
-                      <a:prstDash val="solid"/>
-                      <a:round/>
-                      <a:headEnd type="none" w="med" len="med"/>
-                      <a:tailEnd type="none" w="med" len="med"/>
-                    </a:lnL>
-                    <a:lnR w="9525" cap="flat" cmpd="sng" algn="ctr">
-                      <a:solidFill>
-                        <a:srgbClr val="D8DEE2"/>
-                      </a:solidFill>
-                      <a:prstDash val="solid"/>
-                      <a:round/>
-                      <a:headEnd type="none" w="med" len="med"/>
-                      <a:tailEnd type="none" w="med" len="med"/>
-                    </a:lnR>
-                    <a:lnT w="9525" cap="flat" cmpd="sng" algn="ctr">
-                      <a:solidFill>
-                        <a:srgbClr val="D8DEE2"/>
-                      </a:solidFill>
-                      <a:prstDash val="solid"/>
-                      <a:round/>
-                      <a:headEnd type="none" w="med" len="med"/>
-                      <a:tailEnd type="none" w="med" len="med"/>
-                    </a:lnT>
-                    <a:lnB w="9525" cap="flat" cmpd="sng" algn="ctr">
-                      <a:solidFill>
-                        <a:srgbClr val="D8DEE2"/>
-                      </a:solidFill>
-                      <a:prstDash val="solid"/>
-                      <a:round/>
-                      <a:headEnd type="none" w="med" len="med"/>
-                      <a:tailEnd type="none" w="med" len="med"/>
-                    </a:lnB>
-                  </a:tcPr>
-                </a:tc>
-                <a:tc>
-                  <a:txBody>
-                    <a:bodyPr/>
-                    <a:lstStyle/>
-                    <a:p>
-                      <a:pPr indent="0" marL="0">
-                        <a:buNone/>
-                      </a:pPr>
-                      <a:r>
-                        <a:rPr lang="en-US" sz="1050" b="1" dirty="0">
-                          <a:solidFill>
-                            <a:srgbClr val="C97A1A"/>
-                          </a:solidFill>
-                          <a:latin typeface="Calibri" pitchFamily="34" charset="0"/>
-                          <a:ea typeface="Calibri" pitchFamily="34" charset="-122"/>
-                          <a:cs typeface="Calibri" pitchFamily="34" charset="-120"/>
-                        </a:rPr>
-                        <a:t>Требуется от Д8</a:t>
-                      </a:r>
-                      <a:endParaRPr lang="en-US" sz="1050" dirty="0">
-                        <a:latin typeface="Calibri" charset="0"/>
-                        <a:ea typeface="Calibri" charset="0"/>
-                        <a:cs typeface="Calibri" charset="0"/>
-                      </a:endParaRPr>
-                    </a:p>
-                  </a:txBody>
-                  <a:tcPr marL="101600" marR="101600" marT="63500" marB="63500" anchor="ctr">
-                    <a:lnL w="9525" cap="flat" cmpd="sng" algn="ctr">
-                      <a:solidFill>
-                        <a:srgbClr val="D8DEE2"/>
-                      </a:solidFill>
-                      <a:prstDash val="solid"/>
-                      <a:round/>
-                      <a:headEnd type="none" w="med" len="med"/>
-                      <a:tailEnd type="none" w="med" len="med"/>
-                    </a:lnL>
-                    <a:lnR w="9525" cap="flat" cmpd="sng" algn="ctr">
-                      <a:solidFill>
-                        <a:srgbClr val="D8DEE2"/>
-                      </a:solidFill>
-                      <a:prstDash val="solid"/>
-                      <a:round/>
-                      <a:headEnd type="none" w="med" len="med"/>
-                      <a:tailEnd type="none" w="med" len="med"/>
-                    </a:lnR>
-                    <a:lnT w="9525" cap="flat" cmpd="sng" algn="ctr">
-                      <a:solidFill>
-                        <a:srgbClr val="D8DEE2"/>
-                      </a:solidFill>
-                      <a:prstDash val="solid"/>
-                      <a:round/>
-                      <a:headEnd type="none" w="med" len="med"/>
-                      <a:tailEnd type="none" w="med" len="med"/>
-                    </a:lnT>
-                    <a:lnB w="9525" cap="flat" cmpd="sng" algn="ctr">
-                      <a:solidFill>
-                        <a:srgbClr val="D8DEE2"/>
-                      </a:solidFill>
-                      <a:prstDash val="solid"/>
-                      <a:round/>
-                      <a:headEnd type="none" w="med" len="med"/>
-                      <a:tailEnd type="none" w="med" len="med"/>
-                    </a:lnB>
-                  </a:tcPr>
-                </a:tc>
-              </a:tr>
-              <a:tr h="373380">
-                <a:tc>
-                  <a:txBody>
-                    <a:bodyPr/>
-                    <a:lstStyle/>
-                    <a:p>
-                      <a:pPr indent="0" marL="0">
-                        <a:buNone/>
-                      </a:pPr>
-                      <a:r>
-                        <a:rPr lang="en-US" sz="1080" dirty="0">
-                          <a:solidFill>
-                            <a:srgbClr val="1A2733"/>
-                          </a:solidFill>
-                          <a:latin typeface="Calibri" pitchFamily="34" charset="0"/>
-                          <a:ea typeface="Calibri" pitchFamily="34" charset="-122"/>
-                          <a:cs typeface="Calibri" pitchFamily="34" charset="-120"/>
-                        </a:rPr>
-                        <a:t>Пользовательская и админская документация</a:t>
-                      </a:r>
-                      <a:endParaRPr lang="en-US" sz="1080" dirty="0">
-                        <a:latin typeface="Calibri" charset="0"/>
-                        <a:ea typeface="Calibri" charset="0"/>
-                        <a:cs typeface="Calibri" charset="0"/>
-                      </a:endParaRPr>
-                    </a:p>
-                  </a:txBody>
-                  <a:tcPr marL="101600" marR="101600" marT="63500" marB="63500" anchor="ctr">
-                    <a:lnL w="9525" cap="flat" cmpd="sng" algn="ctr">
-                      <a:solidFill>
-                        <a:srgbClr val="D8DEE2"/>
-                      </a:solidFill>
-                      <a:prstDash val="solid"/>
-                      <a:round/>
-                      <a:headEnd type="none" w="med" len="med"/>
-                      <a:tailEnd type="none" w="med" len="med"/>
-                    </a:lnL>
-                    <a:lnR w="9525" cap="flat" cmpd="sng" algn="ctr">
-                      <a:solidFill>
-                        <a:srgbClr val="D8DEE2"/>
-                      </a:solidFill>
-                      <a:prstDash val="solid"/>
-                      <a:round/>
-                      <a:headEnd type="none" w="med" len="med"/>
-                      <a:tailEnd type="none" w="med" len="med"/>
-                    </a:lnR>
-                    <a:lnT w="9525" cap="flat" cmpd="sng" algn="ctr">
-                      <a:solidFill>
-                        <a:srgbClr val="D8DEE2"/>
-                      </a:solidFill>
-                      <a:prstDash val="solid"/>
-                      <a:round/>
-                      <a:headEnd type="none" w="med" len="med"/>
-                      <a:tailEnd type="none" w="med" len="med"/>
-                    </a:lnT>
-                    <a:lnB w="9525" cap="flat" cmpd="sng" algn="ctr">
-                      <a:solidFill>
-                        <a:srgbClr val="D8DEE2"/>
-                      </a:solidFill>
-                      <a:prstDash val="solid"/>
-                      <a:round/>
-                      <a:headEnd type="none" w="med" len="med"/>
-                      <a:tailEnd type="none" w="med" len="med"/>
-                    </a:lnB>
-                  </a:tcPr>
-                </a:tc>
-                <a:tc>
-                  <a:txBody>
-                    <a:bodyPr/>
-                    <a:lstStyle/>
-                    <a:p>
-                      <a:pPr algn="ctr" indent="0" marL="0">
-                        <a:buNone/>
-                      </a:pPr>
-                      <a:r>
-                        <a:rPr lang="en-US" sz="1050" b="1" dirty="0">
-                          <a:solidFill>
-                            <a:srgbClr val="C97A1A"/>
-                          </a:solidFill>
-                          <a:latin typeface="Calibri" pitchFamily="34" charset="0"/>
-                          <a:ea typeface="Calibri" pitchFamily="34" charset="-122"/>
-                          <a:cs typeface="Calibri" pitchFamily="34" charset="-120"/>
-                        </a:rPr>
-                        <a:t>Высокий</a:t>
-                      </a:r>
-                      <a:endParaRPr lang="en-US" sz="1050" dirty="0">
-                        <a:latin typeface="Calibri" charset="0"/>
-                        <a:ea typeface="Calibri" charset="0"/>
-                        <a:cs typeface="Calibri" charset="0"/>
-                      </a:endParaRPr>
-                    </a:p>
-                  </a:txBody>
-                  <a:tcPr marL="101600" marR="101600" marT="63500" marB="63500" anchor="ctr">
-                    <a:lnL w="9525" cap="flat" cmpd="sng" algn="ctr">
-                      <a:solidFill>
-                        <a:srgbClr val="D8DEE2"/>
-                      </a:solidFill>
-                      <a:prstDash val="solid"/>
-                      <a:round/>
-                      <a:headEnd type="none" w="med" len="med"/>
-                      <a:tailEnd type="none" w="med" len="med"/>
-                    </a:lnL>
-                    <a:lnR w="9525" cap="flat" cmpd="sng" algn="ctr">
-                      <a:solidFill>
-                        <a:srgbClr val="D8DEE2"/>
-                      </a:solidFill>
-                      <a:prstDash val="solid"/>
-                      <a:round/>
-                      <a:headEnd type="none" w="med" len="med"/>
-                      <a:tailEnd type="none" w="med" len="med"/>
-                    </a:lnR>
-                    <a:lnT w="9525" cap="flat" cmpd="sng" algn="ctr">
-                      <a:solidFill>
-                        <a:srgbClr val="D8DEE2"/>
-                      </a:solidFill>
-                      <a:prstDash val="solid"/>
-                      <a:round/>
-                      <a:headEnd type="none" w="med" len="med"/>
-                      <a:tailEnd type="none" w="med" len="med"/>
-                    </a:lnT>
-                    <a:lnB w="9525" cap="flat" cmpd="sng" algn="ctr">
-                      <a:solidFill>
-                        <a:srgbClr val="D8DEE2"/>
-                      </a:solidFill>
-                      <a:prstDash val="solid"/>
-                      <a:round/>
-                      <a:headEnd type="none" w="med" len="med"/>
-                      <a:tailEnd type="none" w="med" len="med"/>
-                    </a:lnB>
-                  </a:tcPr>
-                </a:tc>
-                <a:tc>
-                  <a:txBody>
-                    <a:bodyPr/>
-                    <a:lstStyle/>
-                    <a:p>
-                      <a:pPr algn="ctr" indent="0" marL="0">
-                        <a:buNone/>
-                      </a:pPr>
-                      <a:r>
-                        <a:rPr lang="en-US" sz="1050" dirty="0">
-                          <a:solidFill>
-                            <a:srgbClr val="5B6B7A"/>
-                          </a:solidFill>
-                          <a:latin typeface="Calibri" pitchFamily="34" charset="0"/>
-                          <a:ea typeface="Calibri" pitchFamily="34" charset="-122"/>
-                          <a:cs typeface="Calibri" pitchFamily="34" charset="-120"/>
-                        </a:rPr>
-                        <a:t>4 квартал</a:t>
-                      </a:r>
-                      <a:endParaRPr lang="en-US" sz="1050" dirty="0">
-                        <a:latin typeface="Calibri" charset="0"/>
-                        <a:ea typeface="Calibri" charset="0"/>
-                        <a:cs typeface="Calibri" charset="0"/>
-                      </a:endParaRPr>
-                    </a:p>
-                  </a:txBody>
-                  <a:tcPr marL="101600" marR="101600" marT="63500" marB="63500" anchor="ctr">
-                    <a:lnL w="9525" cap="flat" cmpd="sng" algn="ctr">
-                      <a:solidFill>
-                        <a:srgbClr val="D8DEE2"/>
-                      </a:solidFill>
-                      <a:prstDash val="solid"/>
-                      <a:round/>
-                      <a:headEnd type="none" w="med" len="med"/>
-                      <a:tailEnd type="none" w="med" len="med"/>
-                    </a:lnL>
-                    <a:lnR w="9525" cap="flat" cmpd="sng" algn="ctr">
-                      <a:solidFill>
-                        <a:srgbClr val="D8DEE2"/>
-                      </a:solidFill>
-                      <a:prstDash val="solid"/>
-                      <a:round/>
-                      <a:headEnd type="none" w="med" len="med"/>
-                      <a:tailEnd type="none" w="med" len="med"/>
-                    </a:lnR>
-                    <a:lnT w="9525" cap="flat" cmpd="sng" algn="ctr">
-                      <a:solidFill>
-                        <a:srgbClr val="D8DEE2"/>
-                      </a:solidFill>
-                      <a:prstDash val="solid"/>
-                      <a:round/>
-                      <a:headEnd type="none" w="med" len="med"/>
-                      <a:tailEnd type="none" w="med" len="med"/>
-                    </a:lnT>
-                    <a:lnB w="9525" cap="flat" cmpd="sng" algn="ctr">
-                      <a:solidFill>
-                        <a:srgbClr val="D8DEE2"/>
-                      </a:solidFill>
-                      <a:prstDash val="solid"/>
-                      <a:round/>
-                      <a:headEnd type="none" w="med" len="med"/>
-                      <a:tailEnd type="none" w="med" len="med"/>
-                    </a:lnB>
-                  </a:tcPr>
-                </a:tc>
-                <a:tc>
-                  <a:txBody>
-                    <a:bodyPr/>
-                    <a:lstStyle/>
-                    <a:p>
-                      <a:pPr indent="0" marL="0">
-                        <a:buNone/>
-                      </a:pPr>
-                      <a:endParaRPr lang="en-US" sz="1050" dirty="0">
-                        <a:latin typeface="Calibri" charset="0"/>
-                        <a:ea typeface="Calibri" charset="0"/>
-                        <a:cs typeface="Calibri" charset="0"/>
-                      </a:endParaRPr>
-                    </a:p>
-                  </a:txBody>
-                  <a:tcPr marL="101600" marR="101600" marT="63500" marB="63500" anchor="ctr">
-                    <a:lnL w="9525" cap="flat" cmpd="sng" algn="ctr">
-                      <a:solidFill>
-                        <a:srgbClr val="D8DEE2"/>
-                      </a:solidFill>
-                      <a:prstDash val="solid"/>
-                      <a:round/>
-                      <a:headEnd type="none" w="med" len="med"/>
-                      <a:tailEnd type="none" w="med" len="med"/>
-                    </a:lnL>
-                    <a:lnR w="9525" cap="flat" cmpd="sng" algn="ctr">
-                      <a:solidFill>
-                        <a:srgbClr val="D8DEE2"/>
-                      </a:solidFill>
-                      <a:prstDash val="solid"/>
-                      <a:round/>
-                      <a:headEnd type="none" w="med" len="med"/>
-                      <a:tailEnd type="none" w="med" len="med"/>
-                    </a:lnR>
-                    <a:lnT w="9525" cap="flat" cmpd="sng" algn="ctr">
-                      <a:solidFill>
-                        <a:srgbClr val="D8DEE2"/>
-                      </a:solidFill>
-                      <a:prstDash val="solid"/>
-                      <a:round/>
-                      <a:headEnd type="none" w="med" len="med"/>
-                      <a:tailEnd type="none" w="med" len="med"/>
-                    </a:lnT>
-                    <a:lnB w="9525" cap="flat" cmpd="sng" algn="ctr">
-                      <a:solidFill>
-                        <a:srgbClr val="D8DEE2"/>
-                      </a:solidFill>
-                      <a:prstDash val="solid"/>
-                      <a:round/>
-                      <a:headEnd type="none" w="med" len="med"/>
-                      <a:tailEnd type="none" w="med" len="med"/>
-                    </a:lnB>
-                  </a:tcPr>
-                </a:tc>
-              </a:tr>
-              <a:tr h="373380">
-                <a:tc>
-                  <a:txBody>
-                    <a:bodyPr/>
-                    <a:lstStyle/>
-                    <a:p>
-                      <a:pPr indent="0" marL="0">
-                        <a:buNone/>
-                      </a:pPr>
-                      <a:r>
-                        <a:rPr lang="en-US" sz="1080" dirty="0">
-                          <a:solidFill>
-                            <a:srgbClr val="1A2733"/>
-                          </a:solidFill>
-                          <a:latin typeface="Calibri" pitchFamily="34" charset="0"/>
-                          <a:ea typeface="Calibri" pitchFamily="34" charset="-122"/>
-                          <a:cs typeface="Calibri" pitchFamily="34" charset="-120"/>
-                        </a:rPr>
-                        <a:t>Упрощение заведения пользователей</a:t>
-                      </a:r>
-                      <a:endParaRPr lang="en-US" sz="1080" dirty="0">
-                        <a:latin typeface="Calibri" charset="0"/>
-                        <a:ea typeface="Calibri" charset="0"/>
-                        <a:cs typeface="Calibri" charset="0"/>
-                      </a:endParaRPr>
-                    </a:p>
-                  </a:txBody>
-                  <a:tcPr marL="101600" marR="101600" marT="63500" marB="63500" anchor="ctr">
-                    <a:lnL w="9525" cap="flat" cmpd="sng" algn="ctr">
-                      <a:solidFill>
-                        <a:srgbClr val="D8DEE2"/>
-                      </a:solidFill>
-                      <a:prstDash val="solid"/>
-                      <a:round/>
-                      <a:headEnd type="none" w="med" len="med"/>
-                      <a:tailEnd type="none" w="med" len="med"/>
-                    </a:lnL>
-                    <a:lnR w="9525" cap="flat" cmpd="sng" algn="ctr">
-                      <a:solidFill>
-                        <a:srgbClr val="D8DEE2"/>
-                      </a:solidFill>
-                      <a:prstDash val="solid"/>
-                      <a:round/>
-                      <a:headEnd type="none" w="med" len="med"/>
-                      <a:tailEnd type="none" w="med" len="med"/>
-                    </a:lnR>
-                    <a:lnT w="9525" cap="flat" cmpd="sng" algn="ctr">
-                      <a:solidFill>
-                        <a:srgbClr val="D8DEE2"/>
-                      </a:solidFill>
-                      <a:prstDash val="solid"/>
-                      <a:round/>
-                      <a:headEnd type="none" w="med" len="med"/>
-                      <a:tailEnd type="none" w="med" len="med"/>
-                    </a:lnT>
-                    <a:lnB w="9525" cap="flat" cmpd="sng" algn="ctr">
-                      <a:solidFill>
-                        <a:srgbClr val="D8DEE2"/>
-                      </a:solidFill>
-                      <a:prstDash val="solid"/>
-                      <a:round/>
-                      <a:headEnd type="none" w="med" len="med"/>
-                      <a:tailEnd type="none" w="med" len="med"/>
-                    </a:lnB>
-                  </a:tcPr>
-                </a:tc>
-                <a:tc>
-                  <a:txBody>
-                    <a:bodyPr/>
-                    <a:lstStyle/>
-                    <a:p>
-                      <a:pPr algn="ctr" indent="0" marL="0">
-                        <a:buNone/>
-                      </a:pPr>
-                      <a:r>
-                        <a:rPr lang="en-US" sz="1050" b="1" dirty="0">
-                          <a:solidFill>
-                            <a:srgbClr val="5B6B7A"/>
-                          </a:solidFill>
-                          <a:latin typeface="Calibri" pitchFamily="34" charset="0"/>
-                          <a:ea typeface="Calibri" pitchFamily="34" charset="-122"/>
-                          <a:cs typeface="Calibri" pitchFamily="34" charset="-120"/>
-                        </a:rPr>
-                        <a:t>Нормальный</a:t>
-                      </a:r>
-                      <a:endParaRPr lang="en-US" sz="1050" dirty="0">
-                        <a:latin typeface="Calibri" charset="0"/>
-                        <a:ea typeface="Calibri" charset="0"/>
-                        <a:cs typeface="Calibri" charset="0"/>
-                      </a:endParaRPr>
-                    </a:p>
-                  </a:txBody>
-                  <a:tcPr marL="101600" marR="101600" marT="63500" marB="63500" anchor="ctr">
-                    <a:lnL w="9525" cap="flat" cmpd="sng" algn="ctr">
-                      <a:solidFill>
-                        <a:srgbClr val="D8DEE2"/>
-                      </a:solidFill>
-                      <a:prstDash val="solid"/>
-                      <a:round/>
-                      <a:headEnd type="none" w="med" len="med"/>
-                      <a:tailEnd type="none" w="med" len="med"/>
-                    </a:lnL>
-                    <a:lnR w="9525" cap="flat" cmpd="sng" algn="ctr">
-                      <a:solidFill>
-                        <a:srgbClr val="D8DEE2"/>
-                      </a:solidFill>
-                      <a:prstDash val="solid"/>
-                      <a:round/>
-                      <a:headEnd type="none" w="med" len="med"/>
-                      <a:tailEnd type="none" w="med" len="med"/>
-                    </a:lnR>
-                    <a:lnT w="9525" cap="flat" cmpd="sng" algn="ctr">
-                      <a:solidFill>
-                        <a:srgbClr val="D8DEE2"/>
-                      </a:solidFill>
-                      <a:prstDash val="solid"/>
-                      <a:round/>
-                      <a:headEnd type="none" w="med" len="med"/>
-                      <a:tailEnd type="none" w="med" len="med"/>
-                    </a:lnT>
-                    <a:lnB w="9525" cap="flat" cmpd="sng" algn="ctr">
-                      <a:solidFill>
-                        <a:srgbClr val="D8DEE2"/>
-                      </a:solidFill>
-                      <a:prstDash val="solid"/>
-                      <a:round/>
-                      <a:headEnd type="none" w="med" len="med"/>
-                      <a:tailEnd type="none" w="med" len="med"/>
-                    </a:lnB>
-                  </a:tcPr>
-                </a:tc>
-                <a:tc>
-                  <a:txBody>
-                    <a:bodyPr/>
-                    <a:lstStyle/>
-                    <a:p>
-                      <a:pPr algn="ctr" indent="0" marL="0">
-                        <a:buNone/>
-                      </a:pPr>
-                      <a:r>
-                        <a:rPr lang="en-US" sz="1050" dirty="0">
-                          <a:solidFill>
-                            <a:srgbClr val="5B6B7A"/>
-                          </a:solidFill>
-                          <a:latin typeface="Calibri" pitchFamily="34" charset="0"/>
-                          <a:ea typeface="Calibri" pitchFamily="34" charset="-122"/>
-                          <a:cs typeface="Calibri" pitchFamily="34" charset="-120"/>
-                        </a:rPr>
-                        <a:t>—</a:t>
-                      </a:r>
-                      <a:endParaRPr lang="en-US" sz="1050" dirty="0">
-                        <a:latin typeface="Calibri" charset="0"/>
-                        <a:ea typeface="Calibri" charset="0"/>
-                        <a:cs typeface="Calibri" charset="0"/>
-                      </a:endParaRPr>
-                    </a:p>
-                  </a:txBody>
-                  <a:tcPr marL="101600" marR="101600" marT="63500" marB="63500" anchor="ctr">
-                    <a:lnL w="9525" cap="flat" cmpd="sng" algn="ctr">
-                      <a:solidFill>
-                        <a:srgbClr val="D8DEE2"/>
-                      </a:solidFill>
-                      <a:prstDash val="solid"/>
-                      <a:round/>
-                      <a:headEnd type="none" w="med" len="med"/>
-                      <a:tailEnd type="none" w="med" len="med"/>
-                    </a:lnL>
-                    <a:lnR w="9525" cap="flat" cmpd="sng" algn="ctr">
-                      <a:solidFill>
-                        <a:srgbClr val="D8DEE2"/>
-                      </a:solidFill>
-                      <a:prstDash val="solid"/>
-                      <a:round/>
-                      <a:headEnd type="none" w="med" len="med"/>
-                      <a:tailEnd type="none" w="med" len="med"/>
-                    </a:lnR>
-                    <a:lnT w="9525" cap="flat" cmpd="sng" algn="ctr">
-                      <a:solidFill>
-                        <a:srgbClr val="D8DEE2"/>
-                      </a:solidFill>
-                      <a:prstDash val="solid"/>
-                      <a:round/>
-                      <a:headEnd type="none" w="med" len="med"/>
-                      <a:tailEnd type="none" w="med" len="med"/>
-                    </a:lnT>
-                    <a:lnB w="9525" cap="flat" cmpd="sng" algn="ctr">
-                      <a:solidFill>
-                        <a:srgbClr val="D8DEE2"/>
-                      </a:solidFill>
-                      <a:prstDash val="solid"/>
-                      <a:round/>
-                      <a:headEnd type="none" w="med" len="med"/>
-                      <a:tailEnd type="none" w="med" len="med"/>
-                    </a:lnB>
-                  </a:tcPr>
-                </a:tc>
-                <a:tc>
-                  <a:txBody>
-                    <a:bodyPr/>
-                    <a:lstStyle/>
-                    <a:p>
-                      <a:pPr indent="0" marL="0">
-                        <a:buNone/>
-                      </a:pPr>
-                      <a:r>
-                        <a:rPr lang="en-US" sz="1050" b="1" dirty="0">
-                          <a:solidFill>
-                            <a:srgbClr val="C97A1A"/>
-                          </a:solidFill>
-                          <a:latin typeface="Calibri" pitchFamily="34" charset="0"/>
-                          <a:ea typeface="Calibri" pitchFamily="34" charset="-122"/>
-                          <a:cs typeface="Calibri" pitchFamily="34" charset="-120"/>
-                        </a:rPr>
-                        <a:t>Требуется от Д8</a:t>
-                      </a:r>
-                      <a:endParaRPr lang="en-US" sz="1050" dirty="0">
-                        <a:latin typeface="Calibri" charset="0"/>
-                        <a:ea typeface="Calibri" charset="0"/>
-                        <a:cs typeface="Calibri" charset="0"/>
-                      </a:endParaRPr>
-                    </a:p>
-                  </a:txBody>
-                  <a:tcPr marL="101600" marR="101600" marT="63500" marB="63500" anchor="ctr">
-                    <a:lnL w="9525" cap="flat" cmpd="sng" algn="ctr">
-                      <a:solidFill>
-                        <a:srgbClr val="D8DEE2"/>
-                      </a:solidFill>
-                      <a:prstDash val="solid"/>
-                      <a:round/>
-                      <a:headEnd type="none" w="med" len="med"/>
-                      <a:tailEnd type="none" w="med" len="med"/>
-                    </a:lnL>
-                    <a:lnR w="9525" cap="flat" cmpd="sng" algn="ctr">
-                      <a:solidFill>
-                        <a:srgbClr val="D8DEE2"/>
-                      </a:solidFill>
-                      <a:prstDash val="solid"/>
-                      <a:round/>
-                      <a:headEnd type="none" w="med" len="med"/>
-                      <a:tailEnd type="none" w="med" len="med"/>
-                    </a:lnR>
-                    <a:lnT w="9525" cap="flat" cmpd="sng" algn="ctr">
-                      <a:solidFill>
-                        <a:srgbClr val="D8DEE2"/>
-                      </a:solidFill>
-                      <a:prstDash val="solid"/>
-                      <a:round/>
-                      <a:headEnd type="none" w="med" len="med"/>
-                      <a:tailEnd type="none" w="med" len="med"/>
-                    </a:lnT>
-                    <a:lnB w="9525" cap="flat" cmpd="sng" algn="ctr">
-                      <a:solidFill>
-                        <a:srgbClr val="D8DEE2"/>
-                      </a:solidFill>
-                      <a:prstDash val="solid"/>
-                      <a:round/>
-                      <a:headEnd type="none" w="med" len="med"/>
-                      <a:tailEnd type="none" w="med" len="med"/>
-                    </a:lnB>
-                  </a:tcPr>
-                </a:tc>
-              </a:tr>
-            </a:tbl>
-          </a:graphicData>
-        </a:graphic>
-      </p:graphicFrame>
-      <p:sp>
-        <p:nvSpPr>
-          <p:cNvPr id="6" name="Text 3"/>
-          <p:cNvSpPr txBox="1"/>
-          <p:nvPr/>
-        </p:nvSpPr>
-        <p:spPr>
-          <a:xfrm>
-            <a:off x="10881360" y="6473952"/>
-            <a:ext cx="822960" cy="274320"/>
-          </a:xfrm>
-          <a:prstGeom prst="rect">
-            <a:avLst/>
-          </a:prstGeom>
-          <a:noFill/>
-          <a:ln/>
-        </p:spPr>
-        <p:txBody>
-          <a:bodyPr wrap="square" lIns="0" tIns="0" rIns="0" bIns="0" rtlCol="0" anchor="ctr"/>
-          <a:lstStyle/>
-          <a:p>
-            <a:pPr algn="r" indent="0" marL="0">
-              <a:buNone/>
-            </a:pPr>
-            <a:r>
-              <a:rPr lang="en-US" sz="1050" dirty="0">
-                <a:solidFill>
-                  <a:srgbClr val="8C99A6"/>
-                </a:solidFill>
-                <a:latin typeface="Calibri" pitchFamily="34" charset="0"/>
-                <a:ea typeface="Calibri" pitchFamily="34" charset="-122"/>
-                <a:cs typeface="Calibri" pitchFamily="34" charset="-120"/>
-              </a:rPr>
-              <a:t>4 / 6</a:t>
-            </a:r>
-            <a:endParaRPr lang="en-US" sz="1050" dirty="0"/>
-          </a:p>
-        </p:txBody>
-      </p:sp>
-    </p:spTree>
-  </p:cSld>
-  <p:clrMapOvr>
-    <a:masterClrMapping/>
-  </p:clrMapOvr>
-</p:sld>
-</file>
-
-<file path=ppt/slides/slide5.xml><?xml version="1.0" encoding="utf-8"?>
-<p:sld xmlns:a="http://schemas.openxmlformats.org/drawingml/2006/main" xmlns:r="http://schemas.openxmlformats.org/officeDocument/2006/relationships" xmlns:p="http://schemas.openxmlformats.org/presentationml/2006/main">
-  <p:cSld name="Slide 5">
-    <p:spTree>
-      <p:nvGrpSpPr>
-        <p:cNvPr id="1" name=""/>
-        <p:cNvGrpSpPr/>
-        <p:nvPr/>
-      </p:nvGrpSpPr>
-      <p:grpSpPr>
-        <a:xfrm>
-          <a:off x="0" y="0"/>
-          <a:ext cx="0" cy="0"/>
-          <a:chOff x="0" y="0"/>
-          <a:chExt cx="0" cy="0"/>
-        </a:xfrm>
-      </p:grpSpPr>
-      <p:sp>
-        <p:nvSpPr>
-          <p:cNvPr id="2" name="Text 0"/>
-          <p:cNvSpPr txBox="1"/>
-          <p:nvPr/>
-        </p:nvSpPr>
-        <p:spPr>
-          <a:xfrm>
-            <a:off x="502920" y="320040"/>
-            <a:ext cx="11155680" cy="274320"/>
-          </a:xfrm>
-          <a:prstGeom prst="rect">
-            <a:avLst/>
-          </a:prstGeom>
-          <a:noFill/>
-          <a:ln/>
-        </p:spPr>
-        <p:txBody>
-          <a:bodyPr wrap="square" lIns="0" tIns="0" rIns="0" bIns="0" rtlCol="0" anchor="ctr"/>
-          <a:lstStyle/>
-          <a:p>
-            <a:pPr indent="0" marL="0">
-              <a:buNone/>
-            </a:pPr>
-            <a:r>
-              <a:rPr lang="en-US" sz="1100" b="1" spc="120" kern="0" dirty="0">
-                <a:solidFill>
-                  <a:srgbClr val="0E7C86"/>
-                </a:solidFill>
-                <a:latin typeface="Calibri" pitchFamily="34" charset="0"/>
-                <a:ea typeface="Calibri" pitchFamily="34" charset="-122"/>
-                <a:cs typeface="Calibri" pitchFamily="34" charset="-120"/>
-              </a:rPr>
-              <a:t>4 · НАШИ ВОПРОСЫ · ПО ВОЛНАМ</a:t>
+              <a:t>3 · НАШИ ВОПРОСЫ · ПО ВОЛНАМ</a:t>
             </a:r>
             <a:endParaRPr lang="en-US" sz="1100" dirty="0"/>
           </a:p>
@@ -8396,7 +8191,7 @@
                 <a:ea typeface="Calibri" pitchFamily="34" charset="-122"/>
                 <a:cs typeface="Calibri" pitchFamily="34" charset="-120"/>
               </a:rPr>
-              <a:t>5 / 6</a:t>
+              <a:t>4 / 6</a:t>
             </a:r>
             <a:endParaRPr lang="en-US" sz="1050" dirty="0"/>
           </a:p>
@@ -8410,9 +8205,9 @@
 </p:sld>
 </file>
 
-<file path=ppt/slides/slide6.xml><?xml version="1.0" encoding="utf-8"?>
+<file path=ppt/slides/slide5.xml><?xml version="1.0" encoding="utf-8"?>
 <p:sld xmlns:a="http://schemas.openxmlformats.org/drawingml/2006/main" xmlns:r="http://schemas.openxmlformats.org/officeDocument/2006/relationships" xmlns:p="http://schemas.openxmlformats.org/presentationml/2006/main">
-  <p:cSld name="Slide 6">
+  <p:cSld name="Slide 5">
     <p:spTree>
       <p:nvGrpSpPr>
         <p:cNvPr id="1" name=""/>
@@ -8460,7 +8255,7 @@
                 <a:ea typeface="Calibri" pitchFamily="34" charset="-122"/>
                 <a:cs typeface="Calibri" pitchFamily="34" charset="-120"/>
               </a:rPr>
-              <a:t>4 · НАШИ ВОПРОСЫ · ПО ПОЖЕЛАНИЯМ ЗАКАЗЧИКА</a:t>
+              <a:t>3 · НАШИ ВОПРОСЫ · ПО ПОЖЕЛАНИЯМ ЗАКАЗЧИКА</a:t>
             </a:r>
             <a:endParaRPr lang="en-US" sz="1100" dirty="0"/>
           </a:p>
@@ -8546,7 +8341,7 @@
       </p:sp>
       <p:graphicFrame>
         <p:nvGraphicFramePr>
-          <p:cNvPr id="7" name="Table 0"/>
+          <p:cNvPr id="6" name="Table 0"/>
           <p:cNvGraphicFramePr>
             <a:graphicFrameLocks noGrp="1"/>
           </p:cNvGraphicFramePr>
@@ -10227,6 +10022,211 @@
           </a:graphicData>
         </a:graphic>
       </p:graphicFrame>
+      <p:sp>
+        <p:nvSpPr>
+          <p:cNvPr id="6" name="Text 3"/>
+          <p:cNvSpPr txBox="1"/>
+          <p:nvPr/>
+        </p:nvSpPr>
+        <p:spPr>
+          <a:xfrm>
+            <a:off x="10881360" y="6473952"/>
+            <a:ext cx="822960" cy="274320"/>
+          </a:xfrm>
+          <a:prstGeom prst="rect">
+            <a:avLst/>
+          </a:prstGeom>
+          <a:noFill/>
+          <a:ln/>
+        </p:spPr>
+        <p:txBody>
+          <a:bodyPr wrap="square" lIns="0" tIns="0" rIns="0" bIns="0" rtlCol="0" anchor="ctr"/>
+          <a:lstStyle/>
+          <a:p>
+            <a:pPr algn="r" indent="0" marL="0">
+              <a:buNone/>
+            </a:pPr>
+            <a:r>
+              <a:rPr lang="en-US" sz="1050" dirty="0">
+                <a:solidFill>
+                  <a:srgbClr val="8C99A6"/>
+                </a:solidFill>
+                <a:latin typeface="Calibri" pitchFamily="34" charset="0"/>
+                <a:ea typeface="Calibri" pitchFamily="34" charset="-122"/>
+                <a:cs typeface="Calibri" pitchFamily="34" charset="-120"/>
+              </a:rPr>
+              <a:t>5 / 6</a:t>
+            </a:r>
+            <a:endParaRPr lang="en-US" sz="1050" dirty="0"/>
+          </a:p>
+        </p:txBody>
+      </p:sp>
+    </p:spTree>
+  </p:cSld>
+  <p:clrMapOvr>
+    <a:masterClrMapping/>
+  </p:clrMapOvr>
+</p:sld>
+</file>
+
+<file path=ppt/slides/slide6.xml><?xml version="1.0" encoding="utf-8"?>
+<p:sld xmlns:a="http://schemas.openxmlformats.org/drawingml/2006/main" xmlns:r="http://schemas.openxmlformats.org/officeDocument/2006/relationships" xmlns:p="http://schemas.openxmlformats.org/presentationml/2006/main">
+  <p:cSld name="Slide 6">
+    <p:spTree>
+      <p:nvGrpSpPr>
+        <p:cNvPr id="1" name=""/>
+        <p:cNvGrpSpPr/>
+        <p:nvPr/>
+      </p:nvGrpSpPr>
+      <p:grpSpPr>
+        <a:xfrm>
+          <a:off x="0" y="0"/>
+          <a:ext cx="0" cy="0"/>
+          <a:chOff x="0" y="0"/>
+          <a:chExt cx="0" cy="0"/>
+        </a:xfrm>
+      </p:grpSpPr>
+      <p:sp>
+        <p:nvSpPr>
+          <p:cNvPr id="2" name="Text 0"/>
+          <p:cNvSpPr txBox="1"/>
+          <p:nvPr/>
+        </p:nvSpPr>
+        <p:spPr>
+          <a:xfrm>
+            <a:off x="502920" y="320040"/>
+            <a:ext cx="11155680" cy="274320"/>
+          </a:xfrm>
+          <a:prstGeom prst="rect">
+            <a:avLst/>
+          </a:prstGeom>
+          <a:noFill/>
+          <a:ln/>
+        </p:spPr>
+        <p:txBody>
+          <a:bodyPr wrap="square" lIns="0" tIns="0" rIns="0" bIns="0" rtlCol="0" anchor="ctr"/>
+          <a:lstStyle/>
+          <a:p>
+            <a:pPr indent="0" marL="0">
+              <a:buNone/>
+            </a:pPr>
+            <a:r>
+              <a:rPr lang="en-US" sz="1100" b="1" spc="120" kern="0" dirty="0">
+                <a:solidFill>
+                  <a:srgbClr val="0E7C86"/>
+                </a:solidFill>
+                <a:latin typeface="Calibri" pitchFamily="34" charset="0"/>
+                <a:ea typeface="Calibri" pitchFamily="34" charset="-122"/>
+                <a:cs typeface="Calibri" pitchFamily="34" charset="-120"/>
+              </a:rPr>
+              <a:t>4 · АРХИТЕКТУРА ПИЛОТА</a:t>
+            </a:r>
+            <a:endParaRPr lang="en-US" sz="1100" dirty="0"/>
+          </a:p>
+        </p:txBody>
+      </p:sp>
+      <p:sp>
+        <p:nvSpPr>
+          <p:cNvPr id="3" name="Text 1"/>
+          <p:cNvSpPr txBox="1"/>
+          <p:nvPr/>
+        </p:nvSpPr>
+        <p:spPr>
+          <a:xfrm>
+            <a:off x="502920" y="621792"/>
+            <a:ext cx="11155680" cy="548640"/>
+          </a:xfrm>
+          <a:prstGeom prst="rect">
+            <a:avLst/>
+          </a:prstGeom>
+          <a:noFill/>
+          <a:ln/>
+        </p:spPr>
+        <p:txBody>
+          <a:bodyPr wrap="square" lIns="0" tIns="0" rIns="0" bIns="0" rtlCol="0" anchor="ctr"/>
+          <a:lstStyle/>
+          <a:p>
+            <a:pPr indent="0" marL="0">
+              <a:buNone/>
+            </a:pPr>
+            <a:r>
+              <a:rPr lang="en-US" sz="2700" b="1" dirty="0">
+                <a:solidFill>
+                  <a:srgbClr val="1A2733"/>
+                </a:solidFill>
+                <a:latin typeface="Cambria" pitchFamily="34" charset="0"/>
+                <a:ea typeface="Cambria" pitchFamily="34" charset="-122"/>
+                <a:cs typeface="Cambria" pitchFamily="34" charset="-120"/>
+              </a:rPr>
+              <a:t>Источники и получатели данных</a:t>
+            </a:r>
+            <a:endParaRPr lang="en-US" sz="2700" dirty="0"/>
+          </a:p>
+        </p:txBody>
+      </p:sp>
+      <p:sp>
+        <p:nvSpPr>
+          <p:cNvPr id="4" name="Text 2"/>
+          <p:cNvSpPr txBox="1"/>
+          <p:nvPr/>
+        </p:nvSpPr>
+        <p:spPr>
+          <a:xfrm>
+            <a:off x="502920" y="1170432"/>
+            <a:ext cx="11155680" cy="365760"/>
+          </a:xfrm>
+          <a:prstGeom prst="rect">
+            <a:avLst/>
+          </a:prstGeom>
+          <a:noFill/>
+          <a:ln/>
+        </p:spPr>
+        <p:txBody>
+          <a:bodyPr wrap="square" lIns="0" tIns="0" rIns="0" bIns="0" rtlCol="0" anchor="ctr"/>
+          <a:lstStyle/>
+          <a:p>
+            <a:pPr indent="0" marL="0">
+              <a:buNone/>
+            </a:pPr>
+            <a:r>
+              <a:rPr lang="en-US" sz="1300" dirty="0">
+                <a:solidFill>
+                  <a:srgbClr val="5B6B7A"/>
+                </a:solidFill>
+                <a:latin typeface="Calibri" pitchFamily="34" charset="0"/>
+                <a:ea typeface="Calibri" pitchFamily="34" charset="-122"/>
+                <a:cs typeface="Calibri" pitchFamily="34" charset="-120"/>
+              </a:rPr>
+              <a:t>Платформа «Камерата» по фактам пилота (не проектный скоуп) — расширение см. в разделе «Программа проекта»</a:t>
+            </a:r>
+            <a:endParaRPr lang="en-US" sz="1300" dirty="0"/>
+          </a:p>
+        </p:txBody>
+      </p:sp>
+      <p:pic>
+        <p:nvPicPr>
+          <p:cNvPr id="5" name="Image 0" descr="arhitektura-pilota.png">    </p:cNvPr>
+          <p:cNvPicPr>
+            <a:picLocks noChangeAspect="1"/>
+          </p:cNvPicPr>
+          <p:nvPr/>
+        </p:nvPicPr>
+        <p:blipFill>
+          <a:blip r:embed="rId1"/>
+          <a:stretch>
+            <a:fillRect/>
+          </a:stretch>
+        </p:blipFill>
+        <p:spPr>
+          <a:xfrm>
+            <a:off x="2148840" y="1783080"/>
+            <a:ext cx="7863840" cy="4456176"/>
+          </a:xfrm>
+          <a:prstGeom prst="rect">
+            <a:avLst/>
+          </a:prstGeom>
+        </p:spPr>
+      </p:pic>
       <p:sp>
         <p:nvSpPr>
           <p:cNvPr id="6" name="Text 3"/>

--- a/docs/presentations/case-27-proekt-d8-skoup-i-voprosy.pptx
+++ b/docs/presentations/case-27-proekt-d8-skoup-i-voprosy.pptx
@@ -11,9 +11,10 @@
     <p:sldId id="259" r:id="rId5"/>
     <p:sldId id="260" r:id="rId6"/>
     <p:sldId id="261" r:id="rId7"/>
+    <p:sldId id="262" r:id="rId8"/>
   </p:sldIdLst>
   <p:notesMasterIdLst>
-    <p:notesMasterId r:id="rId8"/>
+    <p:notesMasterId r:id="rId9"/>
   </p:notesMasterIdLst>
   <p:sldSz cx="12192000" cy="6858000"/>
   <p:notesSz cx="6858000" cy="12192000"/>
@@ -989,6 +990,94 @@
 </p:notes>
 </file>
 
+<file path=ppt/notesSlides/notesSlide7.xml><?xml version="1.0" encoding="utf-8"?>
+<p:notes xmlns:a="http://schemas.openxmlformats.org/drawingml/2006/main" xmlns:r="http://schemas.openxmlformats.org/officeDocument/2006/relationships" xmlns:p="http://schemas.openxmlformats.org/presentationml/2006/main">
+  <p:cSld>
+    <p:spTree>
+      <p:nvGrpSpPr>
+        <p:cNvPr id="1" name=""/>
+        <p:cNvGrpSpPr/>
+        <p:nvPr/>
+      </p:nvGrpSpPr>
+      <p:grpSpPr>
+        <a:xfrm>
+          <a:off x="0" y="0"/>
+          <a:ext cx="0" cy="0"/>
+          <a:chOff x="0" y="0"/>
+          <a:chExt cx="0" cy="0"/>
+        </a:xfrm>
+      </p:grpSpPr>
+      <p:sp>
+        <p:nvSpPr>
+          <p:cNvPr id="2" name="Slide Image Placeholder 1"/>
+          <p:cNvSpPr>
+            <a:spLocks noGrp="1" noRot="1" noChangeAspect="1"/>
+          </p:cNvSpPr>
+          <p:nvPr>
+            <p:ph type="sldImg"/>
+          </p:nvPr>
+        </p:nvSpPr>
+        <p:spPr/>
+      </p:sp>
+      <p:sp>
+        <p:nvSpPr>
+          <p:cNvPr id="3" name="Notes Placeholder 2"/>
+          <p:cNvSpPr>
+            <a:spLocks noGrp="1"/>
+          </p:cNvSpPr>
+          <p:nvPr>
+            <p:ph type="body" idx="1"/>
+          </p:nvPr>
+        </p:nvSpPr>
+        <p:spPr/>
+        <p:txBody>
+          <a:bodyPr/>
+          <a:lstStyle/>
+          <a:p>
+            <a:r>
+              <a:rPr lang="en-US" dirty="0"/>
+              <a:t/>
+            </a:r>
+            <a:endParaRPr lang="en-US" dirty="0"/>
+          </a:p>
+        </p:txBody>
+      </p:sp>
+      <p:sp>
+        <p:nvSpPr>
+          <p:cNvPr id="4" name="Slide Number Placeholder 3"/>
+          <p:cNvSpPr>
+            <a:spLocks noGrp="1"/>
+          </p:cNvSpPr>
+          <p:nvPr>
+            <p:ph type="sldNum" sz="quarter" idx="10"/>
+          </p:nvPr>
+        </p:nvSpPr>
+        <p:spPr/>
+        <p:txBody>
+          <a:bodyPr/>
+          <a:lstStyle/>
+          <a:p>
+            <a:fld id="{F7021451-1387-4CA6-816F-3879F97B5CBC}" type="slidenum">
+              <a:rPr lang="en-US"/>
+              <a:t>7</a:t>
+            </a:fld>
+            <a:endParaRPr lang="en-US"/>
+          </a:p>
+        </p:txBody>
+      </p:sp>
+    </p:spTree>
+    <p:extLst>
+      <p:ext uri="{BB962C8B-B14F-4D97-AF65-F5344CB8AC3E}">
+        <p14:creationId xmlns:p14="http://schemas.microsoft.com/office/powerpoint/2010/main" val="1024086991"/>
+      </p:ext>
+    </p:extLst>
+  </p:cSld>
+  <p:clrMapOvr>
+    <a:masterClrMapping/>
+  </p:clrMapOvr>
+</p:notes>
+</file>
+
 <file path=ppt/slideLayouts/slideLayout1.xml><?xml version="1.0" encoding="utf-8"?>
 <p:sldLayout xmlns:a="http://schemas.openxmlformats.org/drawingml/2006/main" xmlns:r="http://schemas.openxmlformats.org/officeDocument/2006/relationships" xmlns:p="http://schemas.openxmlformats.org/presentationml/2006/main" preserve="1">
   <p:cSld name="DEFAULT">
@@ -1931,7 +2020,7 @@
                 <a:ea typeface="Calibri" pitchFamily="34" charset="-122"/>
                 <a:cs typeface="Calibri" pitchFamily="34" charset="-120"/>
               </a:rPr>
-              <a:t>1 / 6</a:t>
+              <a:t>1 / 7</a:t>
             </a:r>
             <a:endParaRPr lang="en-US" sz="1050" dirty="0"/>
           </a:p>
@@ -2073,7 +2162,7 @@
                 <a:ea typeface="Calibri" pitchFamily="34" charset="-122"/>
                 <a:cs typeface="Calibri" pitchFamily="34" charset="-120"/>
               </a:rPr>
-              <a:t>Цель, что нужно уточнить и критерий достижения — единый формат для каждой волны</a:t>
+              <a:t>Цель и критерий достижения — вопросы к Д8, не наши формулировки. Плюс что нужно уточнить по содержанию</a:t>
             </a:r>
             <a:endParaRPr lang="en-US" sz="1300" dirty="0"/>
           </a:p>
@@ -2196,7 +2285,7 @@
         <p:spPr>
           <a:xfrm>
             <a:off x="704088" y="2697480"/>
-            <a:ext cx="3118104" cy="182880"/>
+            <a:ext cx="3118104" cy="292608"/>
           </a:xfrm>
           <a:prstGeom prst="rect">
             <a:avLst/>
@@ -2205,7 +2294,7 @@
           <a:ln/>
         </p:spPr>
         <p:txBody>
-          <a:bodyPr wrap="square" lIns="0" tIns="0" rIns="0" bIns="0" rtlCol="0" anchor="ctr"/>
+          <a:bodyPr wrap="square" lIns="0" tIns="0" rIns="0" bIns="0" rtlCol="0" anchor="t"/>
           <a:lstStyle/>
           <a:p>
             <a:pPr indent="0" marL="0">
@@ -2220,7 +2309,7 @@
                 <a:ea typeface="Calibri" pitchFamily="34" charset="-122"/>
                 <a:cs typeface="Calibri" pitchFamily="34" charset="-120"/>
               </a:rPr>
-              <a:t>ЦЕЛЬ</a:t>
+              <a:t>ВОПРОС — ЦЕЛЬ ВОЛНЫ</a:t>
             </a:r>
             <a:endParaRPr lang="en-US" sz="900" dirty="0"/>
           </a:p>
@@ -2234,8 +2323,8 @@
         </p:nvSpPr>
         <p:spPr>
           <a:xfrm>
-            <a:off x="704088" y="2880360"/>
-            <a:ext cx="3118104" cy="566928"/>
+            <a:off x="704088" y="2990088"/>
+            <a:ext cx="3118104" cy="475488"/>
           </a:xfrm>
           <a:prstGeom prst="rect">
             <a:avLst/>
@@ -2262,7 +2351,7 @@
                 <a:ea typeface="Calibri" pitchFamily="34" charset="-122"/>
                 <a:cs typeface="Calibri" pitchFamily="34" charset="-120"/>
               </a:rPr>
-              <a:t>Рабочий RAG-поиск по новому/расширенному документному корпусу для затронутой роли.</a:t>
+              <a:t>Какой результат для бизнеса должна дать волна 1? Что изменится для пользователей/процессов?</a:t>
             </a:r>
             <a:endParaRPr lang="en-US" sz="1050" dirty="0"/>
           </a:p>
@@ -2393,7 +2482,7 @@
         <p:spPr>
           <a:xfrm>
             <a:off x="795528" y="5166360"/>
-            <a:ext cx="2935224" cy="182880"/>
+            <a:ext cx="2935224" cy="292608"/>
           </a:xfrm>
           <a:prstGeom prst="rect">
             <a:avLst/>
@@ -2402,7 +2491,7 @@
           <a:ln/>
         </p:spPr>
         <p:txBody>
-          <a:bodyPr wrap="square" lIns="0" tIns="0" rIns="0" bIns="0" rtlCol="0" anchor="ctr"/>
+          <a:bodyPr wrap="square" lIns="0" tIns="0" rIns="0" bIns="0" rtlCol="0" anchor="t"/>
           <a:lstStyle/>
           <a:p>
             <a:pPr indent="0" marL="0">
@@ -2417,7 +2506,7 @@
                 <a:ea typeface="Calibri" pitchFamily="34" charset="-122"/>
                 <a:cs typeface="Calibri" pitchFamily="34" charset="-120"/>
               </a:rPr>
-              <a:t>КРИТЕРИЙ ДОСТИЖЕНИЯ</a:t>
+              <a:t>ВОПРОС — КРИТЕРИЙ ДОСТИЖЕНИЯ</a:t>
             </a:r>
             <a:endParaRPr lang="en-US" sz="900" dirty="0"/>
           </a:p>
@@ -2431,8 +2520,8 @@
         </p:nvSpPr>
         <p:spPr>
           <a:xfrm>
-            <a:off x="795528" y="5367528"/>
-            <a:ext cx="2935224" cy="594360"/>
+            <a:off x="795528" y="5477256"/>
+            <a:ext cx="2935224" cy="484632"/>
           </a:xfrm>
           <a:prstGeom prst="rect">
             <a:avLst/>
@@ -2459,7 +2548,7 @@
                 <a:ea typeface="Calibri" pitchFamily="34" charset="-122"/>
                 <a:cs typeface="Calibri" pitchFamily="34" charset="-120"/>
               </a:rPr>
-              <a:t>Пороги точности как в пилоте (см. критерии сценариев, case-21) достигнуты на новом корпусе; заказчик подтвердил полноту контента.</a:t>
+              <a:t>По каким признакам вы будете считать волну 1 завершённой и успешной?</a:t>
             </a:r>
             <a:endParaRPr lang="en-US" sz="1000" dirty="0"/>
           </a:p>
@@ -2582,7 +2671,7 @@
         <p:spPr>
           <a:xfrm>
             <a:off x="4521708" y="2697480"/>
-            <a:ext cx="3118104" cy="182880"/>
+            <a:ext cx="3118104" cy="292608"/>
           </a:xfrm>
           <a:prstGeom prst="rect">
             <a:avLst/>
@@ -2591,7 +2680,7 @@
           <a:ln/>
         </p:spPr>
         <p:txBody>
-          <a:bodyPr wrap="square" lIns="0" tIns="0" rIns="0" bIns="0" rtlCol="0" anchor="ctr"/>
+          <a:bodyPr wrap="square" lIns="0" tIns="0" rIns="0" bIns="0" rtlCol="0" anchor="t"/>
           <a:lstStyle/>
           <a:p>
             <a:pPr indent="0" marL="0">
@@ -2606,7 +2695,7 @@
                 <a:ea typeface="Calibri" pitchFamily="34" charset="-122"/>
                 <a:cs typeface="Calibri" pitchFamily="34" charset="-120"/>
               </a:rPr>
-              <a:t>ЦЕЛЬ</a:t>
+              <a:t>ВОПРОС — ЦЕЛЬ ВОЛНЫ</a:t>
             </a:r>
             <a:endParaRPr lang="en-US" sz="900" dirty="0"/>
           </a:p>
@@ -2620,8 +2709,8 @@
         </p:nvSpPr>
         <p:spPr>
           <a:xfrm>
-            <a:off x="4521708" y="2880360"/>
-            <a:ext cx="3118104" cy="566928"/>
+            <a:off x="4521708" y="2990088"/>
+            <a:ext cx="3118104" cy="475488"/>
           </a:xfrm>
           <a:prstGeom prst="rect">
             <a:avLst/>
@@ -2648,7 +2737,7 @@
                 <a:ea typeface="Calibri" pitchFamily="34" charset="-122"/>
                 <a:cs typeface="Calibri" pitchFamily="34" charset="-120"/>
               </a:rPr>
-              <a:t>Подключить согласованные витрины КХД и API шины сверх пилотных 4 источников.</a:t>
+              <a:t>Какую бизнес-задачу решает расширение ESB/КХД? Что станет возможным, чего нет сейчас?</a:t>
             </a:r>
             <a:endParaRPr lang="en-US" sz="1050" dirty="0"/>
           </a:p>
@@ -2779,7 +2868,7 @@
         <p:spPr>
           <a:xfrm>
             <a:off x="4613148" y="5166360"/>
-            <a:ext cx="2935224" cy="182880"/>
+            <a:ext cx="2935224" cy="292608"/>
           </a:xfrm>
           <a:prstGeom prst="rect">
             <a:avLst/>
@@ -2788,7 +2877,7 @@
           <a:ln/>
         </p:spPr>
         <p:txBody>
-          <a:bodyPr wrap="square" lIns="0" tIns="0" rIns="0" bIns="0" rtlCol="0" anchor="ctr"/>
+          <a:bodyPr wrap="square" lIns="0" tIns="0" rIns="0" bIns="0" rtlCol="0" anchor="t"/>
           <a:lstStyle/>
           <a:p>
             <a:pPr indent="0" marL="0">
@@ -2803,7 +2892,7 @@
                 <a:ea typeface="Calibri" pitchFamily="34" charset="-122"/>
                 <a:cs typeface="Calibri" pitchFamily="34" charset="-120"/>
               </a:rPr>
-              <a:t>КРИТЕРИЙ ДОСТИЖЕНИЯ</a:t>
+              <a:t>ВОПРОС — КРИТЕРИЙ ДОСТИЖЕНИЯ</a:t>
             </a:r>
             <a:endParaRPr lang="en-US" sz="900" dirty="0"/>
           </a:p>
@@ -2817,8 +2906,8 @@
         </p:nvSpPr>
         <p:spPr>
           <a:xfrm>
-            <a:off x="4613148" y="5367528"/>
-            <a:ext cx="2935224" cy="594360"/>
+            <a:off x="4613148" y="5477256"/>
+            <a:ext cx="2935224" cy="484632"/>
           </a:xfrm>
           <a:prstGeom prst="rect">
             <a:avLst/>
@@ -2845,7 +2934,7 @@
                 <a:ea typeface="Calibri" pitchFamily="34" charset="-122"/>
                 <a:cs typeface="Calibri" pitchFamily="34" charset="-120"/>
               </a:rPr>
-              <a:t>Витрины/API подключены и проходят приёмку по тем же сценариям, что пилот, на новом периметре данных.</a:t>
+              <a:t>По какому набору проверок/сценариев вы примете волну 2 как завершённую?</a:t>
             </a:r>
             <a:endParaRPr lang="en-US" sz="1000" dirty="0"/>
           </a:p>
@@ -2968,7 +3057,7 @@
         <p:spPr>
           <a:xfrm>
             <a:off x="8339328" y="2697480"/>
-            <a:ext cx="3118104" cy="182880"/>
+            <a:ext cx="3118104" cy="292608"/>
           </a:xfrm>
           <a:prstGeom prst="rect">
             <a:avLst/>
@@ -2977,7 +3066,7 @@
           <a:ln/>
         </p:spPr>
         <p:txBody>
-          <a:bodyPr wrap="square" lIns="0" tIns="0" rIns="0" bIns="0" rtlCol="0" anchor="ctr"/>
+          <a:bodyPr wrap="square" lIns="0" tIns="0" rIns="0" bIns="0" rtlCol="0" anchor="t"/>
           <a:lstStyle/>
           <a:p>
             <a:pPr indent="0" marL="0">
@@ -2992,7 +3081,7 @@
                 <a:ea typeface="Calibri" pitchFamily="34" charset="-122"/>
                 <a:cs typeface="Calibri" pitchFamily="34" charset="-120"/>
               </a:rPr>
-              <a:t>ЦЕЛЬ</a:t>
+              <a:t>ВОПРОС — ЦЕЛЬ ВОЛНЫ</a:t>
             </a:r>
             <a:endParaRPr lang="en-US" sz="900" dirty="0"/>
           </a:p>
@@ -3006,8 +3095,8 @@
         </p:nvSpPr>
         <p:spPr>
           <a:xfrm>
-            <a:off x="8339328" y="2880360"/>
-            <a:ext cx="3118104" cy="566928"/>
+            <a:off x="8339328" y="2990088"/>
+            <a:ext cx="3118104" cy="475488"/>
           </a:xfrm>
           <a:prstGeom prst="rect">
             <a:avLst/>
@@ -3034,7 +3123,7 @@
                 <a:ea typeface="Calibri" pitchFamily="34" charset="-122"/>
                 <a:cs typeface="Calibri" pitchFamily="34" charset="-120"/>
               </a:rPr>
-              <a:t>Не определена — зависит от исхода волны 2 (см. кандидаты).</a:t>
+              <a:t>Когда направление определится — какая бизнес-цель будет стоять за волной 3+?</a:t>
             </a:r>
             <a:endParaRPr lang="en-US" sz="1050" dirty="0"/>
           </a:p>
@@ -3165,7 +3254,7 @@
         <p:spPr>
           <a:xfrm>
             <a:off x="8430768" y="5166360"/>
-            <a:ext cx="2935224" cy="182880"/>
+            <a:ext cx="2935224" cy="292608"/>
           </a:xfrm>
           <a:prstGeom prst="rect">
             <a:avLst/>
@@ -3174,7 +3263,7 @@
           <a:ln/>
         </p:spPr>
         <p:txBody>
-          <a:bodyPr wrap="square" lIns="0" tIns="0" rIns="0" bIns="0" rtlCol="0" anchor="ctr"/>
+          <a:bodyPr wrap="square" lIns="0" tIns="0" rIns="0" bIns="0" rtlCol="0" anchor="t"/>
           <a:lstStyle/>
           <a:p>
             <a:pPr indent="0" marL="0">
@@ -3189,7 +3278,7 @@
                 <a:ea typeface="Calibri" pitchFamily="34" charset="-122"/>
                 <a:cs typeface="Calibri" pitchFamily="34" charset="-120"/>
               </a:rPr>
-              <a:t>КРИТЕРИЙ ДОСТИЖЕНИЯ</a:t>
+              <a:t>ВОПРОС — КРИТЕРИЙ ДОСТИЖЕНИЯ</a:t>
             </a:r>
             <a:endParaRPr lang="en-US" sz="900" dirty="0"/>
           </a:p>
@@ -3203,8 +3292,8 @@
         </p:nvSpPr>
         <p:spPr>
           <a:xfrm>
-            <a:off x="8430768" y="5367528"/>
-            <a:ext cx="2935224" cy="594360"/>
+            <a:off x="8430768" y="5477256"/>
+            <a:ext cx="2935224" cy="484632"/>
           </a:xfrm>
           <a:prstGeom prst="rect">
             <a:avLst/>
@@ -3231,7 +3320,7 @@
                 <a:ea typeface="Calibri" pitchFamily="34" charset="-122"/>
                 <a:cs typeface="Calibri" pitchFamily="34" charset="-120"/>
               </a:rPr>
-              <a:t>Будет сформулирован вместе с направлением волны — тот же принцип: тестовые сценарии + приёмка на новом периметре (методика, П3).</a:t>
+              <a:t>Какими критериями вы будете руководствоваться при выборе направления?</a:t>
             </a:r>
             <a:endParaRPr lang="en-US" sz="1000" dirty="0"/>
           </a:p>
@@ -3270,7 +3359,7 @@
                 <a:ea typeface="Calibri" pitchFamily="34" charset="-122"/>
                 <a:cs typeface="Calibri" pitchFamily="34" charset="-120"/>
               </a:rPr>
-              <a:t>2 / 6</a:t>
+              <a:t>2 / 7</a:t>
             </a:r>
             <a:endParaRPr lang="en-US" sz="1050" dirty="0"/>
           </a:p>
@@ -5368,7 +5457,7 @@
                 <a:ea typeface="Calibri" pitchFamily="34" charset="-122"/>
                 <a:cs typeface="Calibri" pitchFamily="34" charset="-120"/>
               </a:rPr>
-              <a:t>3 / 6</a:t>
+              <a:t>3 / 7</a:t>
             </a:r>
             <a:endParaRPr lang="en-US" sz="1050" dirty="0"/>
           </a:p>
@@ -8671,7 +8760,7 @@
                 <a:ea typeface="Calibri" pitchFamily="34" charset="-122"/>
                 <a:cs typeface="Calibri" pitchFamily="34" charset="-120"/>
               </a:rPr>
-              <a:t>4 / 6</a:t>
+              <a:t>4 / 7</a:t>
             </a:r>
             <a:endParaRPr lang="en-US" sz="1050" dirty="0"/>
           </a:p>
@@ -9208,7 +9297,7 @@
                           <a:ea typeface="Calibri" pitchFamily="34" charset="-122"/>
                           <a:cs typeface="Calibri" pitchFamily="34" charset="-120"/>
                         </a:rPr>
-                        <a:t>8</a:t>
+                        <a:t>11</a:t>
                       </a:r>
                       <a:endParaRPr lang="en-US" sz="1100" dirty="0">
                         <a:latin typeface="Calibri" charset="0"/>
@@ -9535,7 +9624,7 @@
                           <a:ea typeface="Calibri" pitchFamily="34" charset="-122"/>
                           <a:cs typeface="Calibri" pitchFamily="34" charset="-120"/>
                         </a:rPr>
-                        <a:t>9</a:t>
+                        <a:t>14</a:t>
                       </a:r>
                       <a:endParaRPr lang="en-US" sz="1100" dirty="0">
                         <a:latin typeface="Calibri" charset="0"/>
@@ -9862,7 +9951,7 @@
                           <a:ea typeface="Calibri" pitchFamily="34" charset="-122"/>
                           <a:cs typeface="Calibri" pitchFamily="34" charset="-120"/>
                         </a:rPr>
-                        <a:t>10</a:t>
+                        <a:t>15</a:t>
                       </a:r>
                       <a:endParaRPr lang="en-US" sz="1100" dirty="0">
                         <a:latin typeface="Calibri" charset="0"/>
@@ -10189,7 +10278,7 @@
                           <a:ea typeface="Calibri" pitchFamily="34" charset="-122"/>
                           <a:cs typeface="Calibri" pitchFamily="34" charset="-120"/>
                         </a:rPr>
-                        <a:t>11</a:t>
+                        <a:t>16</a:t>
                       </a:r>
                       <a:endParaRPr lang="en-US" sz="1100" dirty="0">
                         <a:latin typeface="Calibri" charset="0"/>
@@ -10535,7 +10624,7 @@
                 <a:ea typeface="Calibri" pitchFamily="34" charset="-122"/>
                 <a:cs typeface="Calibri" pitchFamily="34" charset="-120"/>
               </a:rPr>
-              <a:t>5 / 6</a:t>
+              <a:t>5 / 7</a:t>
             </a:r>
             <a:endParaRPr lang="en-US" sz="1050" dirty="0"/>
           </a:p>
@@ -10599,7 +10688,1607 @@
                 <a:ea typeface="Calibri" pitchFamily="34" charset="-122"/>
                 <a:cs typeface="Calibri" pitchFamily="34" charset="-120"/>
               </a:rPr>
-              <a:t>5 · АРХИТЕКТУРА ПИЛОТА</a:t>
+              <a:t>5 · НАШИ ПРЕДЛОЖЕНИЯ</a:t>
+            </a:r>
+            <a:endParaRPr lang="en-US" sz="1100" dirty="0"/>
+          </a:p>
+        </p:txBody>
+      </p:sp>
+      <p:sp>
+        <p:nvSpPr>
+          <p:cNvPr id="3" name="Text 1"/>
+          <p:cNvSpPr txBox="1"/>
+          <p:nvPr/>
+        </p:nvSpPr>
+        <p:spPr>
+          <a:xfrm>
+            <a:off x="502920" y="621792"/>
+            <a:ext cx="11155680" cy="548640"/>
+          </a:xfrm>
+          <a:prstGeom prst="rect">
+            <a:avLst/>
+          </a:prstGeom>
+          <a:noFill/>
+          <a:ln/>
+        </p:spPr>
+        <p:txBody>
+          <a:bodyPr wrap="square" lIns="0" tIns="0" rIns="0" bIns="0" rtlCol="0" anchor="ctr"/>
+          <a:lstStyle/>
+          <a:p>
+            <a:pPr indent="0" marL="0">
+              <a:buNone/>
+            </a:pPr>
+            <a:r>
+              <a:rPr lang="en-US" sz="2700" b="1" dirty="0">
+                <a:solidFill>
+                  <a:srgbClr val="1A2733"/>
+                </a:solidFill>
+                <a:latin typeface="Cambria" pitchFamily="34" charset="0"/>
+                <a:ea typeface="Cambria" pitchFamily="34" charset="-122"/>
+                <a:cs typeface="Cambria" pitchFamily="34" charset="-120"/>
+              </a:rPr>
+              <a:t>Рабочая позиция по умолчанию</a:t>
+            </a:r>
+            <a:endParaRPr lang="en-US" sz="2700" dirty="0"/>
+          </a:p>
+        </p:txBody>
+      </p:sp>
+      <p:sp>
+        <p:nvSpPr>
+          <p:cNvPr id="4" name="Text 2"/>
+          <p:cNvSpPr txBox="1"/>
+          <p:nvPr/>
+        </p:nvSpPr>
+        <p:spPr>
+          <a:xfrm>
+            <a:off x="502920" y="1170432"/>
+            <a:ext cx="11155680" cy="365760"/>
+          </a:xfrm>
+          <a:prstGeom prst="rect">
+            <a:avLst/>
+          </a:prstGeom>
+          <a:noFill/>
+          <a:ln/>
+        </p:spPr>
+        <p:txBody>
+          <a:bodyPr wrap="square" lIns="0" tIns="0" rIns="0" bIns="0" rtlCol="0" anchor="ctr"/>
+          <a:lstStyle/>
+          <a:p>
+            <a:pPr indent="0" marL="0">
+              <a:buNone/>
+            </a:pPr>
+            <a:r>
+              <a:rPr lang="en-US" sz="1300" dirty="0">
+                <a:solidFill>
+                  <a:srgbClr val="5B6B7A"/>
+                </a:solidFill>
+                <a:latin typeface="Calibri" pitchFamily="34" charset="0"/>
+                <a:ea typeface="Calibri" pitchFamily="34" charset="-122"/>
+                <a:cs typeface="Calibri" pitchFamily="34" charset="-120"/>
+              </a:rPr>
+              <a:t>На основе программы проекта — проще поправить готовое предложение, чем отвечать на открытый вопрос с нуля</a:t>
+            </a:r>
+            <a:endParaRPr lang="en-US" sz="1300" dirty="0"/>
+          </a:p>
+        </p:txBody>
+      </p:sp>
+      <p:graphicFrame>
+        <p:nvGraphicFramePr>
+          <p:cNvPr id="7" name="Table 0"/>
+          <p:cNvGraphicFramePr>
+            <a:graphicFrameLocks noGrp="1"/>
+          </p:cNvGraphicFramePr>
+          <p:nvPr>
+            <p:extLst>
+              <p:ext uri="{D42A27DB-BD31-4B8C-83A1-F6EECF244321}">
+                <p14:modId xmlns:p14="http://schemas.microsoft.com/office/powerpoint/2010/main" val="1579011935"/>
+              </p:ext>
+            </p:extLst>
+          </p:nvPr>
+        </p:nvGraphicFramePr>
+        <p:xfrm>
+          <a:off x="502920" y="1691640"/>
+          <a:ext cx="11155680" cy="4480560"/>
+        </p:xfrm>
+        <a:graphic>
+          <a:graphicData uri="http://schemas.openxmlformats.org/drawingml/2006/table">
+            <a:tbl>
+              <a:tblPr/>
+              <a:tblGrid>
+                <a:gridCol w="548640"/>
+                <a:gridCol w="4754880"/>
+                <a:gridCol w="5852160"/>
+              </a:tblGrid>
+              <a:tr h="640080">
+                <a:tc>
+                  <a:txBody>
+                    <a:bodyPr/>
+                    <a:lstStyle/>
+                    <a:p>
+                      <a:pPr algn="ctr" indent="0" marL="0">
+                        <a:buNone/>
+                      </a:pPr>
+                      <a:r>
+                        <a:rPr lang="en-US" sz="1100" b="1" dirty="0">
+                          <a:solidFill>
+                            <a:srgbClr val="FFFFFF"/>
+                          </a:solidFill>
+                          <a:latin typeface="Calibri" pitchFamily="34" charset="0"/>
+                          <a:ea typeface="Calibri" pitchFamily="34" charset="-122"/>
+                          <a:cs typeface="Calibri" pitchFamily="34" charset="-120"/>
+                        </a:rPr>
+                        <a:t>№</a:t>
+                      </a:r>
+                      <a:endParaRPr lang="en-US" sz="1100" dirty="0">
+                        <a:latin typeface="Calibri" charset="0"/>
+                        <a:ea typeface="Calibri" charset="0"/>
+                        <a:cs typeface="Calibri" charset="0"/>
+                      </a:endParaRPr>
+                    </a:p>
+                  </a:txBody>
+                  <a:tcPr marL="114300" marR="114300" marT="76200" marB="76200" anchor="ctr">
+                    <a:lnL w="9525" cap="flat" cmpd="sng" algn="ctr">
+                      <a:solidFill>
+                        <a:srgbClr val="D8DEE2"/>
+                      </a:solidFill>
+                      <a:prstDash val="solid"/>
+                      <a:round/>
+                      <a:headEnd type="none" w="med" len="med"/>
+                      <a:tailEnd type="none" w="med" len="med"/>
+                    </a:lnL>
+                    <a:lnR w="9525" cap="flat" cmpd="sng" algn="ctr">
+                      <a:solidFill>
+                        <a:srgbClr val="D8DEE2"/>
+                      </a:solidFill>
+                      <a:prstDash val="solid"/>
+                      <a:round/>
+                      <a:headEnd type="none" w="med" len="med"/>
+                      <a:tailEnd type="none" w="med" len="med"/>
+                    </a:lnR>
+                    <a:lnT w="9525" cap="flat" cmpd="sng" algn="ctr">
+                      <a:solidFill>
+                        <a:srgbClr val="D8DEE2"/>
+                      </a:solidFill>
+                      <a:prstDash val="solid"/>
+                      <a:round/>
+                      <a:headEnd type="none" w="med" len="med"/>
+                      <a:tailEnd type="none" w="med" len="med"/>
+                    </a:lnT>
+                    <a:lnB w="9525" cap="flat" cmpd="sng" algn="ctr">
+                      <a:solidFill>
+                        <a:srgbClr val="D8DEE2"/>
+                      </a:solidFill>
+                      <a:prstDash val="solid"/>
+                      <a:round/>
+                      <a:headEnd type="none" w="med" len="med"/>
+                      <a:tailEnd type="none" w="med" len="med"/>
+                    </a:lnB>
+                    <a:solidFill>
+                      <a:srgbClr val="1A2733"/>
+                    </a:solidFill>
+                  </a:tcPr>
+                </a:tc>
+                <a:tc>
+                  <a:txBody>
+                    <a:bodyPr/>
+                    <a:lstStyle/>
+                    <a:p>
+                      <a:pPr indent="0" marL="0">
+                        <a:buNone/>
+                      </a:pPr>
+                      <a:r>
+                        <a:rPr lang="en-US" sz="1100" b="1" dirty="0">
+                          <a:solidFill>
+                            <a:srgbClr val="FFFFFF"/>
+                          </a:solidFill>
+                          <a:latin typeface="Calibri" pitchFamily="34" charset="0"/>
+                          <a:ea typeface="Calibri" pitchFamily="34" charset="-122"/>
+                          <a:cs typeface="Calibri" pitchFamily="34" charset="-120"/>
+                        </a:rPr>
+                        <a:t>Предложение</a:t>
+                      </a:r>
+                      <a:endParaRPr lang="en-US" sz="1100" dirty="0">
+                        <a:latin typeface="Calibri" charset="0"/>
+                        <a:ea typeface="Calibri" charset="0"/>
+                        <a:cs typeface="Calibri" charset="0"/>
+                      </a:endParaRPr>
+                    </a:p>
+                  </a:txBody>
+                  <a:tcPr marL="114300" marR="114300" marT="76200" marB="76200" anchor="ctr">
+                    <a:lnL w="9525" cap="flat" cmpd="sng" algn="ctr">
+                      <a:solidFill>
+                        <a:srgbClr val="D8DEE2"/>
+                      </a:solidFill>
+                      <a:prstDash val="solid"/>
+                      <a:round/>
+                      <a:headEnd type="none" w="med" len="med"/>
+                      <a:tailEnd type="none" w="med" len="med"/>
+                    </a:lnL>
+                    <a:lnR w="9525" cap="flat" cmpd="sng" algn="ctr">
+                      <a:solidFill>
+                        <a:srgbClr val="D8DEE2"/>
+                      </a:solidFill>
+                      <a:prstDash val="solid"/>
+                      <a:round/>
+                      <a:headEnd type="none" w="med" len="med"/>
+                      <a:tailEnd type="none" w="med" len="med"/>
+                    </a:lnR>
+                    <a:lnT w="9525" cap="flat" cmpd="sng" algn="ctr">
+                      <a:solidFill>
+                        <a:srgbClr val="D8DEE2"/>
+                      </a:solidFill>
+                      <a:prstDash val="solid"/>
+                      <a:round/>
+                      <a:headEnd type="none" w="med" len="med"/>
+                      <a:tailEnd type="none" w="med" len="med"/>
+                    </a:lnT>
+                    <a:lnB w="9525" cap="flat" cmpd="sng" algn="ctr">
+                      <a:solidFill>
+                        <a:srgbClr val="D8DEE2"/>
+                      </a:solidFill>
+                      <a:prstDash val="solid"/>
+                      <a:round/>
+                      <a:headEnd type="none" w="med" len="med"/>
+                      <a:tailEnd type="none" w="med" len="med"/>
+                    </a:lnB>
+                    <a:solidFill>
+                      <a:srgbClr val="1A2733"/>
+                    </a:solidFill>
+                  </a:tcPr>
+                </a:tc>
+                <a:tc>
+                  <a:txBody>
+                    <a:bodyPr/>
+                    <a:lstStyle/>
+                    <a:p>
+                      <a:pPr indent="0" marL="0">
+                        <a:buNone/>
+                      </a:pPr>
+                      <a:r>
+                        <a:rPr lang="en-US" sz="1100" b="1" dirty="0">
+                          <a:solidFill>
+                            <a:srgbClr val="FFFFFF"/>
+                          </a:solidFill>
+                          <a:latin typeface="Calibri" pitchFamily="34" charset="0"/>
+                          <a:ea typeface="Calibri" pitchFamily="34" charset="-122"/>
+                          <a:cs typeface="Calibri" pitchFamily="34" charset="-120"/>
+                        </a:rPr>
+                        <a:t>Обоснование</a:t>
+                      </a:r>
+                      <a:endParaRPr lang="en-US" sz="1100" dirty="0">
+                        <a:latin typeface="Calibri" charset="0"/>
+                        <a:ea typeface="Calibri" charset="0"/>
+                        <a:cs typeface="Calibri" charset="0"/>
+                      </a:endParaRPr>
+                    </a:p>
+                  </a:txBody>
+                  <a:tcPr marL="114300" marR="114300" marT="76200" marB="76200" anchor="ctr">
+                    <a:lnL w="9525" cap="flat" cmpd="sng" algn="ctr">
+                      <a:solidFill>
+                        <a:srgbClr val="D8DEE2"/>
+                      </a:solidFill>
+                      <a:prstDash val="solid"/>
+                      <a:round/>
+                      <a:headEnd type="none" w="med" len="med"/>
+                      <a:tailEnd type="none" w="med" len="med"/>
+                    </a:lnL>
+                    <a:lnR w="9525" cap="flat" cmpd="sng" algn="ctr">
+                      <a:solidFill>
+                        <a:srgbClr val="D8DEE2"/>
+                      </a:solidFill>
+                      <a:prstDash val="solid"/>
+                      <a:round/>
+                      <a:headEnd type="none" w="med" len="med"/>
+                      <a:tailEnd type="none" w="med" len="med"/>
+                    </a:lnR>
+                    <a:lnT w="9525" cap="flat" cmpd="sng" algn="ctr">
+                      <a:solidFill>
+                        <a:srgbClr val="D8DEE2"/>
+                      </a:solidFill>
+                      <a:prstDash val="solid"/>
+                      <a:round/>
+                      <a:headEnd type="none" w="med" len="med"/>
+                      <a:tailEnd type="none" w="med" len="med"/>
+                    </a:lnT>
+                    <a:lnB w="9525" cap="flat" cmpd="sng" algn="ctr">
+                      <a:solidFill>
+                        <a:srgbClr val="D8DEE2"/>
+                      </a:solidFill>
+                      <a:prstDash val="solid"/>
+                      <a:round/>
+                      <a:headEnd type="none" w="med" len="med"/>
+                      <a:tailEnd type="none" w="med" len="med"/>
+                    </a:lnB>
+                    <a:solidFill>
+                      <a:srgbClr val="1A2733"/>
+                    </a:solidFill>
+                  </a:tcPr>
+                </a:tc>
+              </a:tr>
+              <a:tr h="640080">
+                <a:tc>
+                  <a:txBody>
+                    <a:bodyPr/>
+                    <a:lstStyle/>
+                    <a:p>
+                      <a:pPr algn="ctr" indent="0" marL="0">
+                        <a:buNone/>
+                      </a:pPr>
+                      <a:r>
+                        <a:rPr lang="en-US" sz="1100" dirty="0">
+                          <a:solidFill>
+                            <a:srgbClr val="5B6B7A"/>
+                          </a:solidFill>
+                          <a:latin typeface="Calibri" pitchFamily="34" charset="0"/>
+                          <a:ea typeface="Calibri" pitchFamily="34" charset="-122"/>
+                          <a:cs typeface="Calibri" pitchFamily="34" charset="-120"/>
+                        </a:rPr>
+                        <a:t>1</a:t>
+                      </a:r>
+                      <a:endParaRPr lang="en-US" sz="1100" dirty="0">
+                        <a:latin typeface="Calibri" charset="0"/>
+                        <a:ea typeface="Calibri" charset="0"/>
+                        <a:cs typeface="Calibri" charset="0"/>
+                      </a:endParaRPr>
+                    </a:p>
+                  </a:txBody>
+                  <a:tcPr marL="114300" marR="114300" marT="76200" marB="76200" anchor="ctr">
+                    <a:lnL w="9525" cap="flat" cmpd="sng" algn="ctr">
+                      <a:solidFill>
+                        <a:srgbClr val="D8DEE2"/>
+                      </a:solidFill>
+                      <a:prstDash val="solid"/>
+                      <a:round/>
+                      <a:headEnd type="none" w="med" len="med"/>
+                      <a:tailEnd type="none" w="med" len="med"/>
+                    </a:lnL>
+                    <a:lnR w="9525" cap="flat" cmpd="sng" algn="ctr">
+                      <a:solidFill>
+                        <a:srgbClr val="D8DEE2"/>
+                      </a:solidFill>
+                      <a:prstDash val="solid"/>
+                      <a:round/>
+                      <a:headEnd type="none" w="med" len="med"/>
+                      <a:tailEnd type="none" w="med" len="med"/>
+                    </a:lnR>
+                    <a:lnT w="9525" cap="flat" cmpd="sng" algn="ctr">
+                      <a:solidFill>
+                        <a:srgbClr val="D8DEE2"/>
+                      </a:solidFill>
+                      <a:prstDash val="solid"/>
+                      <a:round/>
+                      <a:headEnd type="none" w="med" len="med"/>
+                      <a:tailEnd type="none" w="med" len="med"/>
+                    </a:lnT>
+                    <a:lnB w="9525" cap="flat" cmpd="sng" algn="ctr">
+                      <a:solidFill>
+                        <a:srgbClr val="D8DEE2"/>
+                      </a:solidFill>
+                      <a:prstDash val="solid"/>
+                      <a:round/>
+                      <a:headEnd type="none" w="med" len="med"/>
+                      <a:tailEnd type="none" w="med" len="med"/>
+                    </a:lnB>
+                  </a:tcPr>
+                </a:tc>
+                <a:tc>
+                  <a:txBody>
+                    <a:bodyPr/>
+                    <a:lstStyle/>
+                    <a:p>
+                      <a:pPr indent="0" marL="0">
+                        <a:buNone/>
+                      </a:pPr>
+                      <a:r>
+                        <a:rPr lang="en-US" sz="1100" b="1" dirty="0">
+                          <a:solidFill>
+                            <a:srgbClr val="1A2733"/>
+                          </a:solidFill>
+                          <a:latin typeface="Calibri" pitchFamily="34" charset="0"/>
+                          <a:ea typeface="Calibri" pitchFamily="34" charset="-122"/>
+                          <a:cs typeface="Calibri" pitchFamily="34" charset="-120"/>
+                        </a:rPr>
+                        <a:t>Волна 1 — закрыть звонком, не перепиской</a:t>
+                      </a:r>
+                      <a:endParaRPr lang="en-US" sz="1100" dirty="0">
+                        <a:latin typeface="Calibri" charset="0"/>
+                        <a:ea typeface="Calibri" charset="0"/>
+                        <a:cs typeface="Calibri" charset="0"/>
+                      </a:endParaRPr>
+                    </a:p>
+                  </a:txBody>
+                  <a:tcPr marL="114300" marR="114300" marT="76200" marB="76200" anchor="ctr">
+                    <a:lnL w="9525" cap="flat" cmpd="sng" algn="ctr">
+                      <a:solidFill>
+                        <a:srgbClr val="D8DEE2"/>
+                      </a:solidFill>
+                      <a:prstDash val="solid"/>
+                      <a:round/>
+                      <a:headEnd type="none" w="med" len="med"/>
+                      <a:tailEnd type="none" w="med" len="med"/>
+                    </a:lnL>
+                    <a:lnR w="9525" cap="flat" cmpd="sng" algn="ctr">
+                      <a:solidFill>
+                        <a:srgbClr val="D8DEE2"/>
+                      </a:solidFill>
+                      <a:prstDash val="solid"/>
+                      <a:round/>
+                      <a:headEnd type="none" w="med" len="med"/>
+                      <a:tailEnd type="none" w="med" len="med"/>
+                    </a:lnR>
+                    <a:lnT w="9525" cap="flat" cmpd="sng" algn="ctr">
+                      <a:solidFill>
+                        <a:srgbClr val="D8DEE2"/>
+                      </a:solidFill>
+                      <a:prstDash val="solid"/>
+                      <a:round/>
+                      <a:headEnd type="none" w="med" len="med"/>
+                      <a:tailEnd type="none" w="med" len="med"/>
+                    </a:lnT>
+                    <a:lnB w="9525" cap="flat" cmpd="sng" algn="ctr">
+                      <a:solidFill>
+                        <a:srgbClr val="D8DEE2"/>
+                      </a:solidFill>
+                      <a:prstDash val="solid"/>
+                      <a:round/>
+                      <a:headEnd type="none" w="med" len="med"/>
+                      <a:tailEnd type="none" w="med" len="med"/>
+                    </a:lnB>
+                  </a:tcPr>
+                </a:tc>
+                <a:tc>
+                  <a:txBody>
+                    <a:bodyPr/>
+                    <a:lstStyle/>
+                    <a:p>
+                      <a:pPr indent="0" marL="0">
+                        <a:buNone/>
+                      </a:pPr>
+                      <a:r>
+                        <a:rPr lang="en-US" sz="1050" dirty="0">
+                          <a:solidFill>
+                            <a:srgbClr val="5B6B7A"/>
+                          </a:solidFill>
+                          <a:latin typeface="Calibri" pitchFamily="34" charset="0"/>
+                          <a:ea typeface="Calibri" pitchFamily="34" charset="-122"/>
+                          <a:cs typeface="Calibri" pitchFamily="34" charset="-120"/>
+                        </a:rPr>
+                        <a:t>Три толкования слишком разные по объёму работ, чтобы гадать — первый вопрос из всего списка.</a:t>
+                      </a:r>
+                      <a:endParaRPr lang="en-US" sz="1050" dirty="0">
+                        <a:latin typeface="Calibri" charset="0"/>
+                        <a:ea typeface="Calibri" charset="0"/>
+                        <a:cs typeface="Calibri" charset="0"/>
+                      </a:endParaRPr>
+                    </a:p>
+                  </a:txBody>
+                  <a:tcPr marL="114300" marR="114300" marT="76200" marB="76200" anchor="ctr">
+                    <a:lnL w="9525" cap="flat" cmpd="sng" algn="ctr">
+                      <a:solidFill>
+                        <a:srgbClr val="D8DEE2"/>
+                      </a:solidFill>
+                      <a:prstDash val="solid"/>
+                      <a:round/>
+                      <a:headEnd type="none" w="med" len="med"/>
+                      <a:tailEnd type="none" w="med" len="med"/>
+                    </a:lnL>
+                    <a:lnR w="9525" cap="flat" cmpd="sng" algn="ctr">
+                      <a:solidFill>
+                        <a:srgbClr val="D8DEE2"/>
+                      </a:solidFill>
+                      <a:prstDash val="solid"/>
+                      <a:round/>
+                      <a:headEnd type="none" w="med" len="med"/>
+                      <a:tailEnd type="none" w="med" len="med"/>
+                    </a:lnR>
+                    <a:lnT w="9525" cap="flat" cmpd="sng" algn="ctr">
+                      <a:solidFill>
+                        <a:srgbClr val="D8DEE2"/>
+                      </a:solidFill>
+                      <a:prstDash val="solid"/>
+                      <a:round/>
+                      <a:headEnd type="none" w="med" len="med"/>
+                      <a:tailEnd type="none" w="med" len="med"/>
+                    </a:lnT>
+                    <a:lnB w="9525" cap="flat" cmpd="sng" algn="ctr">
+                      <a:solidFill>
+                        <a:srgbClr val="D8DEE2"/>
+                      </a:solidFill>
+                      <a:prstDash val="solid"/>
+                      <a:round/>
+                      <a:headEnd type="none" w="med" len="med"/>
+                      <a:tailEnd type="none" w="med" len="med"/>
+                    </a:lnB>
+                  </a:tcPr>
+                </a:tc>
+              </a:tr>
+              <a:tr h="640080">
+                <a:tc>
+                  <a:txBody>
+                    <a:bodyPr/>
+                    <a:lstStyle/>
+                    <a:p>
+                      <a:pPr algn="ctr" indent="0" marL="0">
+                        <a:buNone/>
+                      </a:pPr>
+                      <a:r>
+                        <a:rPr lang="en-US" sz="1100" dirty="0">
+                          <a:solidFill>
+                            <a:srgbClr val="5B6B7A"/>
+                          </a:solidFill>
+                          <a:latin typeface="Calibri" pitchFamily="34" charset="0"/>
+                          <a:ea typeface="Calibri" pitchFamily="34" charset="-122"/>
+                          <a:cs typeface="Calibri" pitchFamily="34" charset="-120"/>
+                        </a:rPr>
+                        <a:t>2</a:t>
+                      </a:r>
+                      <a:endParaRPr lang="en-US" sz="1100" dirty="0">
+                        <a:latin typeface="Calibri" charset="0"/>
+                        <a:ea typeface="Calibri" charset="0"/>
+                        <a:cs typeface="Calibri" charset="0"/>
+                      </a:endParaRPr>
+                    </a:p>
+                  </a:txBody>
+                  <a:tcPr marL="114300" marR="114300" marT="76200" marB="76200" anchor="ctr">
+                    <a:lnL w="9525" cap="flat" cmpd="sng" algn="ctr">
+                      <a:solidFill>
+                        <a:srgbClr val="D8DEE2"/>
+                      </a:solidFill>
+                      <a:prstDash val="solid"/>
+                      <a:round/>
+                      <a:headEnd type="none" w="med" len="med"/>
+                      <a:tailEnd type="none" w="med" len="med"/>
+                    </a:lnL>
+                    <a:lnR w="9525" cap="flat" cmpd="sng" algn="ctr">
+                      <a:solidFill>
+                        <a:srgbClr val="D8DEE2"/>
+                      </a:solidFill>
+                      <a:prstDash val="solid"/>
+                      <a:round/>
+                      <a:headEnd type="none" w="med" len="med"/>
+                      <a:tailEnd type="none" w="med" len="med"/>
+                    </a:lnR>
+                    <a:lnT w="9525" cap="flat" cmpd="sng" algn="ctr">
+                      <a:solidFill>
+                        <a:srgbClr val="D8DEE2"/>
+                      </a:solidFill>
+                      <a:prstDash val="solid"/>
+                      <a:round/>
+                      <a:headEnd type="none" w="med" len="med"/>
+                      <a:tailEnd type="none" w="med" len="med"/>
+                    </a:lnT>
+                    <a:lnB w="9525" cap="flat" cmpd="sng" algn="ctr">
+                      <a:solidFill>
+                        <a:srgbClr val="D8DEE2"/>
+                      </a:solidFill>
+                      <a:prstDash val="solid"/>
+                      <a:round/>
+                      <a:headEnd type="none" w="med" len="med"/>
+                      <a:tailEnd type="none" w="med" len="med"/>
+                    </a:lnB>
+                  </a:tcPr>
+                </a:tc>
+                <a:tc>
+                  <a:txBody>
+                    <a:bodyPr/>
+                    <a:lstStyle/>
+                    <a:p>
+                      <a:pPr indent="0" marL="0">
+                        <a:buNone/>
+                      </a:pPr>
+                      <a:r>
+                        <a:rPr lang="en-US" sz="1100" b="1" dirty="0">
+                          <a:solidFill>
+                            <a:srgbClr val="1A2733"/>
+                          </a:solidFill>
+                          <a:latin typeface="Calibri" pitchFamily="34" charset="0"/>
+                          <a:ea typeface="Calibri" pitchFamily="34" charset="-122"/>
+                          <a:cs typeface="Calibri" pitchFamily="34" charset="-120"/>
+                        </a:rPr>
+                        <a:t>ESB/КХД (волна 2) зафиксировать письменно как есть — расширение, не сужение</a:t>
+                      </a:r>
+                      <a:endParaRPr lang="en-US" sz="1100" dirty="0">
+                        <a:latin typeface="Calibri" charset="0"/>
+                        <a:ea typeface="Calibri" charset="0"/>
+                        <a:cs typeface="Calibri" charset="0"/>
+                      </a:endParaRPr>
+                    </a:p>
+                  </a:txBody>
+                  <a:tcPr marL="114300" marR="114300" marT="76200" marB="76200" anchor="ctr">
+                    <a:lnL w="9525" cap="flat" cmpd="sng" algn="ctr">
+                      <a:solidFill>
+                        <a:srgbClr val="D8DEE2"/>
+                      </a:solidFill>
+                      <a:prstDash val="solid"/>
+                      <a:round/>
+                      <a:headEnd type="none" w="med" len="med"/>
+                      <a:tailEnd type="none" w="med" len="med"/>
+                    </a:lnL>
+                    <a:lnR w="9525" cap="flat" cmpd="sng" algn="ctr">
+                      <a:solidFill>
+                        <a:srgbClr val="D8DEE2"/>
+                      </a:solidFill>
+                      <a:prstDash val="solid"/>
+                      <a:round/>
+                      <a:headEnd type="none" w="med" len="med"/>
+                      <a:tailEnd type="none" w="med" len="med"/>
+                    </a:lnR>
+                    <a:lnT w="9525" cap="flat" cmpd="sng" algn="ctr">
+                      <a:solidFill>
+                        <a:srgbClr val="D8DEE2"/>
+                      </a:solidFill>
+                      <a:prstDash val="solid"/>
+                      <a:round/>
+                      <a:headEnd type="none" w="med" len="med"/>
+                      <a:tailEnd type="none" w="med" len="med"/>
+                    </a:lnT>
+                    <a:lnB w="9525" cap="flat" cmpd="sng" algn="ctr">
+                      <a:solidFill>
+                        <a:srgbClr val="D8DEE2"/>
+                      </a:solidFill>
+                      <a:prstDash val="solid"/>
+                      <a:round/>
+                      <a:headEnd type="none" w="med" len="med"/>
+                      <a:tailEnd type="none" w="med" len="med"/>
+                    </a:lnB>
+                  </a:tcPr>
+                </a:tc>
+                <a:tc>
+                  <a:txBody>
+                    <a:bodyPr/>
+                    <a:lstStyle/>
+                    <a:p>
+                      <a:pPr indent="0" marL="0">
+                        <a:buNone/>
+                      </a:pPr>
+                      <a:r>
+                        <a:rPr lang="en-US" sz="1050" dirty="0">
+                          <a:solidFill>
+                            <a:srgbClr val="5B6B7A"/>
+                          </a:solidFill>
+                          <a:latin typeface="Calibri" pitchFamily="34" charset="0"/>
+                          <a:ea typeface="Calibri" pitchFamily="34" charset="-122"/>
+                          <a:cs typeface="Calibri" pitchFamily="34" charset="-120"/>
+                        </a:rPr>
+                        <a:t>Все 3 пилотных источника остаются; ESB и КХД получают расширение, MCP-сервер — на пилотном уровне.</a:t>
+                      </a:r>
+                      <a:endParaRPr lang="en-US" sz="1050" dirty="0">
+                        <a:latin typeface="Calibri" charset="0"/>
+                        <a:ea typeface="Calibri" charset="0"/>
+                        <a:cs typeface="Calibri" charset="0"/>
+                      </a:endParaRPr>
+                    </a:p>
+                  </a:txBody>
+                  <a:tcPr marL="114300" marR="114300" marT="76200" marB="76200" anchor="ctr">
+                    <a:lnL w="9525" cap="flat" cmpd="sng" algn="ctr">
+                      <a:solidFill>
+                        <a:srgbClr val="D8DEE2"/>
+                      </a:solidFill>
+                      <a:prstDash val="solid"/>
+                      <a:round/>
+                      <a:headEnd type="none" w="med" len="med"/>
+                      <a:tailEnd type="none" w="med" len="med"/>
+                    </a:lnL>
+                    <a:lnR w="9525" cap="flat" cmpd="sng" algn="ctr">
+                      <a:solidFill>
+                        <a:srgbClr val="D8DEE2"/>
+                      </a:solidFill>
+                      <a:prstDash val="solid"/>
+                      <a:round/>
+                      <a:headEnd type="none" w="med" len="med"/>
+                      <a:tailEnd type="none" w="med" len="med"/>
+                    </a:lnR>
+                    <a:lnT w="9525" cap="flat" cmpd="sng" algn="ctr">
+                      <a:solidFill>
+                        <a:srgbClr val="D8DEE2"/>
+                      </a:solidFill>
+                      <a:prstDash val="solid"/>
+                      <a:round/>
+                      <a:headEnd type="none" w="med" len="med"/>
+                      <a:tailEnd type="none" w="med" len="med"/>
+                    </a:lnT>
+                    <a:lnB w="9525" cap="flat" cmpd="sng" algn="ctr">
+                      <a:solidFill>
+                        <a:srgbClr val="D8DEE2"/>
+                      </a:solidFill>
+                      <a:prstDash val="solid"/>
+                      <a:round/>
+                      <a:headEnd type="none" w="med" len="med"/>
+                      <a:tailEnd type="none" w="med" len="med"/>
+                    </a:lnB>
+                  </a:tcPr>
+                </a:tc>
+              </a:tr>
+              <a:tr h="640080">
+                <a:tc>
+                  <a:txBody>
+                    <a:bodyPr/>
+                    <a:lstStyle/>
+                    <a:p>
+                      <a:pPr algn="ctr" indent="0" marL="0">
+                        <a:buNone/>
+                      </a:pPr>
+                      <a:r>
+                        <a:rPr lang="en-US" sz="1100" dirty="0">
+                          <a:solidFill>
+                            <a:srgbClr val="5B6B7A"/>
+                          </a:solidFill>
+                          <a:latin typeface="Calibri" pitchFamily="34" charset="0"/>
+                          <a:ea typeface="Calibri" pitchFamily="34" charset="-122"/>
+                          <a:cs typeface="Calibri" pitchFamily="34" charset="-120"/>
+                        </a:rPr>
+                        <a:t>3</a:t>
+                      </a:r>
+                      <a:endParaRPr lang="en-US" sz="1100" dirty="0">
+                        <a:latin typeface="Calibri" charset="0"/>
+                        <a:ea typeface="Calibri" charset="0"/>
+                        <a:cs typeface="Calibri" charset="0"/>
+                      </a:endParaRPr>
+                    </a:p>
+                  </a:txBody>
+                  <a:tcPr marL="114300" marR="114300" marT="76200" marB="76200" anchor="ctr">
+                    <a:lnL w="9525" cap="flat" cmpd="sng" algn="ctr">
+                      <a:solidFill>
+                        <a:srgbClr val="D8DEE2"/>
+                      </a:solidFill>
+                      <a:prstDash val="solid"/>
+                      <a:round/>
+                      <a:headEnd type="none" w="med" len="med"/>
+                      <a:tailEnd type="none" w="med" len="med"/>
+                    </a:lnL>
+                    <a:lnR w="9525" cap="flat" cmpd="sng" algn="ctr">
+                      <a:solidFill>
+                        <a:srgbClr val="D8DEE2"/>
+                      </a:solidFill>
+                      <a:prstDash val="solid"/>
+                      <a:round/>
+                      <a:headEnd type="none" w="med" len="med"/>
+                      <a:tailEnd type="none" w="med" len="med"/>
+                    </a:lnR>
+                    <a:lnT w="9525" cap="flat" cmpd="sng" algn="ctr">
+                      <a:solidFill>
+                        <a:srgbClr val="D8DEE2"/>
+                      </a:solidFill>
+                      <a:prstDash val="solid"/>
+                      <a:round/>
+                      <a:headEnd type="none" w="med" len="med"/>
+                      <a:tailEnd type="none" w="med" len="med"/>
+                    </a:lnT>
+                    <a:lnB w="9525" cap="flat" cmpd="sng" algn="ctr">
+                      <a:solidFill>
+                        <a:srgbClr val="D8DEE2"/>
+                      </a:solidFill>
+                      <a:prstDash val="solid"/>
+                      <a:round/>
+                      <a:headEnd type="none" w="med" len="med"/>
+                      <a:tailEnd type="none" w="med" len="med"/>
+                    </a:lnB>
+                  </a:tcPr>
+                </a:tc>
+                <a:tc>
+                  <a:txBody>
+                    <a:bodyPr/>
+                    <a:lstStyle/>
+                    <a:p>
+                      <a:pPr indent="0" marL="0">
+                        <a:buNone/>
+                      </a:pPr>
+                      <a:r>
+                        <a:rPr lang="en-US" sz="1100" b="1" dirty="0">
+                          <a:solidFill>
+                            <a:srgbClr val="1A2733"/>
+                          </a:solidFill>
+                          <a:latin typeface="Calibri" pitchFamily="34" charset="0"/>
+                          <a:ea typeface="Calibri" pitchFamily="34" charset="-122"/>
+                          <a:cs typeface="Calibri" pitchFamily="34" charset="-120"/>
+                        </a:rPr>
+                        <a:t>Разграничение прав compliance/менеджер — сделать обязательным для проекта</a:t>
+                      </a:r>
+                      <a:endParaRPr lang="en-US" sz="1100" dirty="0">
+                        <a:latin typeface="Calibri" charset="0"/>
+                        <a:ea typeface="Calibri" charset="0"/>
+                        <a:cs typeface="Calibri" charset="0"/>
+                      </a:endParaRPr>
+                    </a:p>
+                  </a:txBody>
+                  <a:tcPr marL="114300" marR="114300" marT="76200" marB="76200" anchor="ctr">
+                    <a:lnL w="9525" cap="flat" cmpd="sng" algn="ctr">
+                      <a:solidFill>
+                        <a:srgbClr val="D8DEE2"/>
+                      </a:solidFill>
+                      <a:prstDash val="solid"/>
+                      <a:round/>
+                      <a:headEnd type="none" w="med" len="med"/>
+                      <a:tailEnd type="none" w="med" len="med"/>
+                    </a:lnL>
+                    <a:lnR w="9525" cap="flat" cmpd="sng" algn="ctr">
+                      <a:solidFill>
+                        <a:srgbClr val="D8DEE2"/>
+                      </a:solidFill>
+                      <a:prstDash val="solid"/>
+                      <a:round/>
+                      <a:headEnd type="none" w="med" len="med"/>
+                      <a:tailEnd type="none" w="med" len="med"/>
+                    </a:lnR>
+                    <a:lnT w="9525" cap="flat" cmpd="sng" algn="ctr">
+                      <a:solidFill>
+                        <a:srgbClr val="D8DEE2"/>
+                      </a:solidFill>
+                      <a:prstDash val="solid"/>
+                      <a:round/>
+                      <a:headEnd type="none" w="med" len="med"/>
+                      <a:tailEnd type="none" w="med" len="med"/>
+                    </a:lnT>
+                    <a:lnB w="9525" cap="flat" cmpd="sng" algn="ctr">
+                      <a:solidFill>
+                        <a:srgbClr val="D8DEE2"/>
+                      </a:solidFill>
+                      <a:prstDash val="solid"/>
+                      <a:round/>
+                      <a:headEnd type="none" w="med" len="med"/>
+                      <a:tailEnd type="none" w="med" len="med"/>
+                    </a:lnB>
+                  </a:tcPr>
+                </a:tc>
+                <a:tc>
+                  <a:txBody>
+                    <a:bodyPr/>
+                    <a:lstStyle/>
+                    <a:p>
+                      <a:pPr indent="0" marL="0">
+                        <a:buNone/>
+                      </a:pPr>
+                      <a:r>
+                        <a:rPr lang="en-US" sz="1050" dirty="0">
+                          <a:solidFill>
+                            <a:srgbClr val="5B6B7A"/>
+                          </a:solidFill>
+                          <a:latin typeface="Calibri" pitchFamily="34" charset="0"/>
+                          <a:ea typeface="Calibri" pitchFamily="34" charset="-122"/>
+                          <a:cs typeface="Calibri" pitchFamily="34" charset="-120"/>
+                        </a:rPr>
+                        <a:t>Д8 — брокер/инвесткомпания: доступ менеджера к чужим клиентам — комплаенс-риск, не UX-неудобство.</a:t>
+                      </a:r>
+                      <a:endParaRPr lang="en-US" sz="1050" dirty="0">
+                        <a:latin typeface="Calibri" charset="0"/>
+                        <a:ea typeface="Calibri" charset="0"/>
+                        <a:cs typeface="Calibri" charset="0"/>
+                      </a:endParaRPr>
+                    </a:p>
+                  </a:txBody>
+                  <a:tcPr marL="114300" marR="114300" marT="76200" marB="76200" anchor="ctr">
+                    <a:lnL w="9525" cap="flat" cmpd="sng" algn="ctr">
+                      <a:solidFill>
+                        <a:srgbClr val="D8DEE2"/>
+                      </a:solidFill>
+                      <a:prstDash val="solid"/>
+                      <a:round/>
+                      <a:headEnd type="none" w="med" len="med"/>
+                      <a:tailEnd type="none" w="med" len="med"/>
+                    </a:lnL>
+                    <a:lnR w="9525" cap="flat" cmpd="sng" algn="ctr">
+                      <a:solidFill>
+                        <a:srgbClr val="D8DEE2"/>
+                      </a:solidFill>
+                      <a:prstDash val="solid"/>
+                      <a:round/>
+                      <a:headEnd type="none" w="med" len="med"/>
+                      <a:tailEnd type="none" w="med" len="med"/>
+                    </a:lnR>
+                    <a:lnT w="9525" cap="flat" cmpd="sng" algn="ctr">
+                      <a:solidFill>
+                        <a:srgbClr val="D8DEE2"/>
+                      </a:solidFill>
+                      <a:prstDash val="solid"/>
+                      <a:round/>
+                      <a:headEnd type="none" w="med" len="med"/>
+                      <a:tailEnd type="none" w="med" len="med"/>
+                    </a:lnT>
+                    <a:lnB w="9525" cap="flat" cmpd="sng" algn="ctr">
+                      <a:solidFill>
+                        <a:srgbClr val="D8DEE2"/>
+                      </a:solidFill>
+                      <a:prstDash val="solid"/>
+                      <a:round/>
+                      <a:headEnd type="none" w="med" len="med"/>
+                      <a:tailEnd type="none" w="med" len="med"/>
+                    </a:lnB>
+                  </a:tcPr>
+                </a:tc>
+              </a:tr>
+              <a:tr h="640080">
+                <a:tc>
+                  <a:txBody>
+                    <a:bodyPr/>
+                    <a:lstStyle/>
+                    <a:p>
+                      <a:pPr algn="ctr" indent="0" marL="0">
+                        <a:buNone/>
+                      </a:pPr>
+                      <a:r>
+                        <a:rPr lang="en-US" sz="1100" dirty="0">
+                          <a:solidFill>
+                            <a:srgbClr val="5B6B7A"/>
+                          </a:solidFill>
+                          <a:latin typeface="Calibri" pitchFamily="34" charset="0"/>
+                          <a:ea typeface="Calibri" pitchFamily="34" charset="-122"/>
+                          <a:cs typeface="Calibri" pitchFamily="34" charset="-120"/>
+                        </a:rPr>
+                        <a:t>4</a:t>
+                      </a:r>
+                      <a:endParaRPr lang="en-US" sz="1100" dirty="0">
+                        <a:latin typeface="Calibri" charset="0"/>
+                        <a:ea typeface="Calibri" charset="0"/>
+                        <a:cs typeface="Calibri" charset="0"/>
+                      </a:endParaRPr>
+                    </a:p>
+                  </a:txBody>
+                  <a:tcPr marL="114300" marR="114300" marT="76200" marB="76200" anchor="ctr">
+                    <a:lnL w="9525" cap="flat" cmpd="sng" algn="ctr">
+                      <a:solidFill>
+                        <a:srgbClr val="D8DEE2"/>
+                      </a:solidFill>
+                      <a:prstDash val="solid"/>
+                      <a:round/>
+                      <a:headEnd type="none" w="med" len="med"/>
+                      <a:tailEnd type="none" w="med" len="med"/>
+                    </a:lnL>
+                    <a:lnR w="9525" cap="flat" cmpd="sng" algn="ctr">
+                      <a:solidFill>
+                        <a:srgbClr val="D8DEE2"/>
+                      </a:solidFill>
+                      <a:prstDash val="solid"/>
+                      <a:round/>
+                      <a:headEnd type="none" w="med" len="med"/>
+                      <a:tailEnd type="none" w="med" len="med"/>
+                    </a:lnR>
+                    <a:lnT w="9525" cap="flat" cmpd="sng" algn="ctr">
+                      <a:solidFill>
+                        <a:srgbClr val="D8DEE2"/>
+                      </a:solidFill>
+                      <a:prstDash val="solid"/>
+                      <a:round/>
+                      <a:headEnd type="none" w="med" len="med"/>
+                      <a:tailEnd type="none" w="med" len="med"/>
+                    </a:lnT>
+                    <a:lnB w="9525" cap="flat" cmpd="sng" algn="ctr">
+                      <a:solidFill>
+                        <a:srgbClr val="D8DEE2"/>
+                      </a:solidFill>
+                      <a:prstDash val="solid"/>
+                      <a:round/>
+                      <a:headEnd type="none" w="med" len="med"/>
+                      <a:tailEnd type="none" w="med" len="med"/>
+                    </a:lnB>
+                  </a:tcPr>
+                </a:tc>
+                <a:tc>
+                  <a:txBody>
+                    <a:bodyPr/>
+                    <a:lstStyle/>
+                    <a:p>
+                      <a:pPr indent="0" marL="0">
+                        <a:buNone/>
+                      </a:pPr>
+                      <a:r>
+                        <a:rPr lang="en-US" sz="1100" b="1" dirty="0">
+                          <a:solidFill>
+                            <a:srgbClr val="1A2733"/>
+                          </a:solidFill>
+                          <a:latin typeface="Calibri" pitchFamily="34" charset="0"/>
+                          <a:ea typeface="Calibri" pitchFamily="34" charset="-122"/>
+                          <a:cs typeface="Calibri" pitchFamily="34" charset="-120"/>
+                        </a:rPr>
+                        <a:t>Динамические права доступа — не блокировать волну 2, но зафиксировать как gate</a:t>
+                      </a:r>
+                      <a:endParaRPr lang="en-US" sz="1100" dirty="0">
+                        <a:latin typeface="Calibri" charset="0"/>
+                        <a:ea typeface="Calibri" charset="0"/>
+                        <a:cs typeface="Calibri" charset="0"/>
+                      </a:endParaRPr>
+                    </a:p>
+                  </a:txBody>
+                  <a:tcPr marL="114300" marR="114300" marT="76200" marB="76200" anchor="ctr">
+                    <a:lnL w="9525" cap="flat" cmpd="sng" algn="ctr">
+                      <a:solidFill>
+                        <a:srgbClr val="D8DEE2"/>
+                      </a:solidFill>
+                      <a:prstDash val="solid"/>
+                      <a:round/>
+                      <a:headEnd type="none" w="med" len="med"/>
+                      <a:tailEnd type="none" w="med" len="med"/>
+                    </a:lnL>
+                    <a:lnR w="9525" cap="flat" cmpd="sng" algn="ctr">
+                      <a:solidFill>
+                        <a:srgbClr val="D8DEE2"/>
+                      </a:solidFill>
+                      <a:prstDash val="solid"/>
+                      <a:round/>
+                      <a:headEnd type="none" w="med" len="med"/>
+                      <a:tailEnd type="none" w="med" len="med"/>
+                    </a:lnR>
+                    <a:lnT w="9525" cap="flat" cmpd="sng" algn="ctr">
+                      <a:solidFill>
+                        <a:srgbClr val="D8DEE2"/>
+                      </a:solidFill>
+                      <a:prstDash val="solid"/>
+                      <a:round/>
+                      <a:headEnd type="none" w="med" len="med"/>
+                      <a:tailEnd type="none" w="med" len="med"/>
+                    </a:lnT>
+                    <a:lnB w="9525" cap="flat" cmpd="sng" algn="ctr">
+                      <a:solidFill>
+                        <a:srgbClr val="D8DEE2"/>
+                      </a:solidFill>
+                      <a:prstDash val="solid"/>
+                      <a:round/>
+                      <a:headEnd type="none" w="med" len="med"/>
+                      <a:tailEnd type="none" w="med" len="med"/>
+                    </a:lnB>
+                  </a:tcPr>
+                </a:tc>
+                <a:tc>
+                  <a:txBody>
+                    <a:bodyPr/>
+                    <a:lstStyle/>
+                    <a:p>
+                      <a:pPr indent="0" marL="0">
+                        <a:buNone/>
+                      </a:pPr>
+                      <a:r>
+                        <a:rPr lang="en-US" sz="1050" dirty="0">
+                          <a:solidFill>
+                            <a:srgbClr val="5B6B7A"/>
+                          </a:solidFill>
+                          <a:latin typeface="Calibri" pitchFamily="34" charset="0"/>
+                          <a:ea typeface="Calibri" pitchFamily="34" charset="-122"/>
+                          <a:cs typeface="Calibri" pitchFamily="34" charset="-120"/>
+                        </a:rPr>
+                        <a:t>Волну 2 запускать на статичной модели (как в пилоте); чувствительные волны — только когда готово с обеих сторон.</a:t>
+                      </a:r>
+                      <a:endParaRPr lang="en-US" sz="1050" dirty="0">
+                        <a:latin typeface="Calibri" charset="0"/>
+                        <a:ea typeface="Calibri" charset="0"/>
+                        <a:cs typeface="Calibri" charset="0"/>
+                      </a:endParaRPr>
+                    </a:p>
+                  </a:txBody>
+                  <a:tcPr marL="114300" marR="114300" marT="76200" marB="76200" anchor="ctr">
+                    <a:lnL w="9525" cap="flat" cmpd="sng" algn="ctr">
+                      <a:solidFill>
+                        <a:srgbClr val="D8DEE2"/>
+                      </a:solidFill>
+                      <a:prstDash val="solid"/>
+                      <a:round/>
+                      <a:headEnd type="none" w="med" len="med"/>
+                      <a:tailEnd type="none" w="med" len="med"/>
+                    </a:lnL>
+                    <a:lnR w="9525" cap="flat" cmpd="sng" algn="ctr">
+                      <a:solidFill>
+                        <a:srgbClr val="D8DEE2"/>
+                      </a:solidFill>
+                      <a:prstDash val="solid"/>
+                      <a:round/>
+                      <a:headEnd type="none" w="med" len="med"/>
+                      <a:tailEnd type="none" w="med" len="med"/>
+                    </a:lnR>
+                    <a:lnT w="9525" cap="flat" cmpd="sng" algn="ctr">
+                      <a:solidFill>
+                        <a:srgbClr val="D8DEE2"/>
+                      </a:solidFill>
+                      <a:prstDash val="solid"/>
+                      <a:round/>
+                      <a:headEnd type="none" w="med" len="med"/>
+                      <a:tailEnd type="none" w="med" len="med"/>
+                    </a:lnT>
+                    <a:lnB w="9525" cap="flat" cmpd="sng" algn="ctr">
+                      <a:solidFill>
+                        <a:srgbClr val="D8DEE2"/>
+                      </a:solidFill>
+                      <a:prstDash val="solid"/>
+                      <a:round/>
+                      <a:headEnd type="none" w="med" len="med"/>
+                      <a:tailEnd type="none" w="med" len="med"/>
+                    </a:lnB>
+                  </a:tcPr>
+                </a:tc>
+              </a:tr>
+              <a:tr h="640080">
+                <a:tc>
+                  <a:txBody>
+                    <a:bodyPr/>
+                    <a:lstStyle/>
+                    <a:p>
+                      <a:pPr algn="ctr" indent="0" marL="0">
+                        <a:buNone/>
+                      </a:pPr>
+                      <a:r>
+                        <a:rPr lang="en-US" sz="1100" dirty="0">
+                          <a:solidFill>
+                            <a:srgbClr val="5B6B7A"/>
+                          </a:solidFill>
+                          <a:latin typeface="Calibri" pitchFamily="34" charset="0"/>
+                          <a:ea typeface="Calibri" pitchFamily="34" charset="-122"/>
+                          <a:cs typeface="Calibri" pitchFamily="34" charset="-120"/>
+                        </a:rPr>
+                        <a:t>5</a:t>
+                      </a:r>
+                      <a:endParaRPr lang="en-US" sz="1100" dirty="0">
+                        <a:latin typeface="Calibri" charset="0"/>
+                        <a:ea typeface="Calibri" charset="0"/>
+                        <a:cs typeface="Calibri" charset="0"/>
+                      </a:endParaRPr>
+                    </a:p>
+                  </a:txBody>
+                  <a:tcPr marL="114300" marR="114300" marT="76200" marB="76200" anchor="ctr">
+                    <a:lnL w="9525" cap="flat" cmpd="sng" algn="ctr">
+                      <a:solidFill>
+                        <a:srgbClr val="D8DEE2"/>
+                      </a:solidFill>
+                      <a:prstDash val="solid"/>
+                      <a:round/>
+                      <a:headEnd type="none" w="med" len="med"/>
+                      <a:tailEnd type="none" w="med" len="med"/>
+                    </a:lnL>
+                    <a:lnR w="9525" cap="flat" cmpd="sng" algn="ctr">
+                      <a:solidFill>
+                        <a:srgbClr val="D8DEE2"/>
+                      </a:solidFill>
+                      <a:prstDash val="solid"/>
+                      <a:round/>
+                      <a:headEnd type="none" w="med" len="med"/>
+                      <a:tailEnd type="none" w="med" len="med"/>
+                    </a:lnR>
+                    <a:lnT w="9525" cap="flat" cmpd="sng" algn="ctr">
+                      <a:solidFill>
+                        <a:srgbClr val="D8DEE2"/>
+                      </a:solidFill>
+                      <a:prstDash val="solid"/>
+                      <a:round/>
+                      <a:headEnd type="none" w="med" len="med"/>
+                      <a:tailEnd type="none" w="med" len="med"/>
+                    </a:lnT>
+                    <a:lnB w="9525" cap="flat" cmpd="sng" algn="ctr">
+                      <a:solidFill>
+                        <a:srgbClr val="D8DEE2"/>
+                      </a:solidFill>
+                      <a:prstDash val="solid"/>
+                      <a:round/>
+                      <a:headEnd type="none" w="med" len="med"/>
+                      <a:tailEnd type="none" w="med" len="med"/>
+                    </a:lnB>
+                  </a:tcPr>
+                </a:tc>
+                <a:tc>
+                  <a:txBody>
+                    <a:bodyPr/>
+                    <a:lstStyle/>
+                    <a:p>
+                      <a:pPr indent="0" marL="0">
+                        <a:buNone/>
+                      </a:pPr>
+                      <a:r>
+                        <a:rPr lang="en-US" sz="1100" b="1" dirty="0">
+                          <a:solidFill>
+                            <a:srgbClr val="1A2733"/>
+                          </a:solidFill>
+                          <a:latin typeface="Calibri" pitchFamily="34" charset="0"/>
+                          <a:ea typeface="Calibri" pitchFamily="34" charset="-122"/>
+                          <a:cs typeface="Calibri" pitchFamily="34" charset="-120"/>
+                        </a:rPr>
+                        <a:t>Волна 3+ (роллаут по ролям) — порядок по умолчанию: фронт-офис → аналитики/УК → руководство → бэк-офис</a:t>
+                      </a:r>
+                      <a:endParaRPr lang="en-US" sz="1100" dirty="0">
+                        <a:latin typeface="Calibri" charset="0"/>
+                        <a:ea typeface="Calibri" charset="0"/>
+                        <a:cs typeface="Calibri" charset="0"/>
+                      </a:endParaRPr>
+                    </a:p>
+                  </a:txBody>
+                  <a:tcPr marL="114300" marR="114300" marT="76200" marB="76200" anchor="ctr">
+                    <a:lnL w="9525" cap="flat" cmpd="sng" algn="ctr">
+                      <a:solidFill>
+                        <a:srgbClr val="D8DEE2"/>
+                      </a:solidFill>
+                      <a:prstDash val="solid"/>
+                      <a:round/>
+                      <a:headEnd type="none" w="med" len="med"/>
+                      <a:tailEnd type="none" w="med" len="med"/>
+                    </a:lnL>
+                    <a:lnR w="9525" cap="flat" cmpd="sng" algn="ctr">
+                      <a:solidFill>
+                        <a:srgbClr val="D8DEE2"/>
+                      </a:solidFill>
+                      <a:prstDash val="solid"/>
+                      <a:round/>
+                      <a:headEnd type="none" w="med" len="med"/>
+                      <a:tailEnd type="none" w="med" len="med"/>
+                    </a:lnR>
+                    <a:lnT w="9525" cap="flat" cmpd="sng" algn="ctr">
+                      <a:solidFill>
+                        <a:srgbClr val="D8DEE2"/>
+                      </a:solidFill>
+                      <a:prstDash val="solid"/>
+                      <a:round/>
+                      <a:headEnd type="none" w="med" len="med"/>
+                      <a:tailEnd type="none" w="med" len="med"/>
+                    </a:lnT>
+                    <a:lnB w="9525" cap="flat" cmpd="sng" algn="ctr">
+                      <a:solidFill>
+                        <a:srgbClr val="D8DEE2"/>
+                      </a:solidFill>
+                      <a:prstDash val="solid"/>
+                      <a:round/>
+                      <a:headEnd type="none" w="med" len="med"/>
+                      <a:tailEnd type="none" w="med" len="med"/>
+                    </a:lnB>
+                  </a:tcPr>
+                </a:tc>
+                <a:tc>
+                  <a:txBody>
+                    <a:bodyPr/>
+                    <a:lstStyle/>
+                    <a:p>
+                      <a:pPr indent="0" marL="0">
+                        <a:buNone/>
+                      </a:pPr>
+                      <a:r>
+                        <a:rPr lang="en-US" sz="1050" dirty="0">
+                          <a:solidFill>
+                            <a:srgbClr val="5B6B7A"/>
+                          </a:solidFill>
+                          <a:latin typeface="Calibri" pitchFamily="34" charset="0"/>
+                          <a:ea typeface="Calibri" pitchFamily="34" charset="-122"/>
+                          <a:cs typeface="Calibri" pitchFamily="34" charset="-120"/>
+                        </a:rPr>
+                        <a:t>Фронт-офис уже протестирован в пилоте — наименьший риск; бэк-офис — самые чувствительные данные, последним.</a:t>
+                      </a:r>
+                      <a:endParaRPr lang="en-US" sz="1050" dirty="0">
+                        <a:latin typeface="Calibri" charset="0"/>
+                        <a:ea typeface="Calibri" charset="0"/>
+                        <a:cs typeface="Calibri" charset="0"/>
+                      </a:endParaRPr>
+                    </a:p>
+                  </a:txBody>
+                  <a:tcPr marL="114300" marR="114300" marT="76200" marB="76200" anchor="ctr">
+                    <a:lnL w="9525" cap="flat" cmpd="sng" algn="ctr">
+                      <a:solidFill>
+                        <a:srgbClr val="D8DEE2"/>
+                      </a:solidFill>
+                      <a:prstDash val="solid"/>
+                      <a:round/>
+                      <a:headEnd type="none" w="med" len="med"/>
+                      <a:tailEnd type="none" w="med" len="med"/>
+                    </a:lnL>
+                    <a:lnR w="9525" cap="flat" cmpd="sng" algn="ctr">
+                      <a:solidFill>
+                        <a:srgbClr val="D8DEE2"/>
+                      </a:solidFill>
+                      <a:prstDash val="solid"/>
+                      <a:round/>
+                      <a:headEnd type="none" w="med" len="med"/>
+                      <a:tailEnd type="none" w="med" len="med"/>
+                    </a:lnR>
+                    <a:lnT w="9525" cap="flat" cmpd="sng" algn="ctr">
+                      <a:solidFill>
+                        <a:srgbClr val="D8DEE2"/>
+                      </a:solidFill>
+                      <a:prstDash val="solid"/>
+                      <a:round/>
+                      <a:headEnd type="none" w="med" len="med"/>
+                      <a:tailEnd type="none" w="med" len="med"/>
+                    </a:lnT>
+                    <a:lnB w="9525" cap="flat" cmpd="sng" algn="ctr">
+                      <a:solidFill>
+                        <a:srgbClr val="D8DEE2"/>
+                      </a:solidFill>
+                      <a:prstDash val="solid"/>
+                      <a:round/>
+                      <a:headEnd type="none" w="med" len="med"/>
+                      <a:tailEnd type="none" w="med" len="med"/>
+                    </a:lnB>
+                  </a:tcPr>
+                </a:tc>
+              </a:tr>
+              <a:tr h="640080">
+                <a:tc>
+                  <a:txBody>
+                    <a:bodyPr/>
+                    <a:lstStyle/>
+                    <a:p>
+                      <a:pPr algn="ctr" indent="0" marL="0">
+                        <a:buNone/>
+                      </a:pPr>
+                      <a:r>
+                        <a:rPr lang="en-US" sz="1100" dirty="0">
+                          <a:solidFill>
+                            <a:srgbClr val="5B6B7A"/>
+                          </a:solidFill>
+                          <a:latin typeface="Calibri" pitchFamily="34" charset="0"/>
+                          <a:ea typeface="Calibri" pitchFamily="34" charset="-122"/>
+                          <a:cs typeface="Calibri" pitchFamily="34" charset="-120"/>
+                        </a:rPr>
+                        <a:t>6</a:t>
+                      </a:r>
+                      <a:endParaRPr lang="en-US" sz="1100" dirty="0">
+                        <a:latin typeface="Calibri" charset="0"/>
+                        <a:ea typeface="Calibri" charset="0"/>
+                        <a:cs typeface="Calibri" charset="0"/>
+                      </a:endParaRPr>
+                    </a:p>
+                  </a:txBody>
+                  <a:tcPr marL="114300" marR="114300" marT="76200" marB="76200" anchor="ctr">
+                    <a:lnL w="9525" cap="flat" cmpd="sng" algn="ctr">
+                      <a:solidFill>
+                        <a:srgbClr val="D8DEE2"/>
+                      </a:solidFill>
+                      <a:prstDash val="solid"/>
+                      <a:round/>
+                      <a:headEnd type="none" w="med" len="med"/>
+                      <a:tailEnd type="none" w="med" len="med"/>
+                    </a:lnL>
+                    <a:lnR w="9525" cap="flat" cmpd="sng" algn="ctr">
+                      <a:solidFill>
+                        <a:srgbClr val="D8DEE2"/>
+                      </a:solidFill>
+                      <a:prstDash val="solid"/>
+                      <a:round/>
+                      <a:headEnd type="none" w="med" len="med"/>
+                      <a:tailEnd type="none" w="med" len="med"/>
+                    </a:lnR>
+                    <a:lnT w="9525" cap="flat" cmpd="sng" algn="ctr">
+                      <a:solidFill>
+                        <a:srgbClr val="D8DEE2"/>
+                      </a:solidFill>
+                      <a:prstDash val="solid"/>
+                      <a:round/>
+                      <a:headEnd type="none" w="med" len="med"/>
+                      <a:tailEnd type="none" w="med" len="med"/>
+                    </a:lnT>
+                    <a:lnB w="9525" cap="flat" cmpd="sng" algn="ctr">
+                      <a:solidFill>
+                        <a:srgbClr val="D8DEE2"/>
+                      </a:solidFill>
+                      <a:prstDash val="solid"/>
+                      <a:round/>
+                      <a:headEnd type="none" w="med" len="med"/>
+                      <a:tailEnd type="none" w="med" len="med"/>
+                    </a:lnB>
+                  </a:tcPr>
+                </a:tc>
+                <a:tc>
+                  <a:txBody>
+                    <a:bodyPr/>
+                    <a:lstStyle/>
+                    <a:p>
+                      <a:pPr indent="0" marL="0">
+                        <a:buNone/>
+                      </a:pPr>
+                      <a:r>
+                        <a:rPr lang="en-US" sz="1100" b="1" dirty="0">
+                          <a:solidFill>
+                            <a:srgbClr val="1A2733"/>
+                          </a:solidFill>
+                          <a:latin typeface="Calibri" pitchFamily="34" charset="0"/>
+                          <a:ea typeface="Calibri" pitchFamily="34" charset="-122"/>
+                          <a:cs typeface="Calibri" pitchFamily="34" charset="-120"/>
+                        </a:rPr>
+                        <a:t>Критерий перехода — не ждать дозакрытия сценариев 6 и 4</a:t>
+                      </a:r>
+                      <a:endParaRPr lang="en-US" sz="1100" dirty="0">
+                        <a:latin typeface="Calibri" charset="0"/>
+                        <a:ea typeface="Calibri" charset="0"/>
+                        <a:cs typeface="Calibri" charset="0"/>
+                      </a:endParaRPr>
+                    </a:p>
+                  </a:txBody>
+                  <a:tcPr marL="114300" marR="114300" marT="76200" marB="76200" anchor="ctr">
+                    <a:lnL w="9525" cap="flat" cmpd="sng" algn="ctr">
+                      <a:solidFill>
+                        <a:srgbClr val="D8DEE2"/>
+                      </a:solidFill>
+                      <a:prstDash val="solid"/>
+                      <a:round/>
+                      <a:headEnd type="none" w="med" len="med"/>
+                      <a:tailEnd type="none" w="med" len="med"/>
+                    </a:lnL>
+                    <a:lnR w="9525" cap="flat" cmpd="sng" algn="ctr">
+                      <a:solidFill>
+                        <a:srgbClr val="D8DEE2"/>
+                      </a:solidFill>
+                      <a:prstDash val="solid"/>
+                      <a:round/>
+                      <a:headEnd type="none" w="med" len="med"/>
+                      <a:tailEnd type="none" w="med" len="med"/>
+                    </a:lnR>
+                    <a:lnT w="9525" cap="flat" cmpd="sng" algn="ctr">
+                      <a:solidFill>
+                        <a:srgbClr val="D8DEE2"/>
+                      </a:solidFill>
+                      <a:prstDash val="solid"/>
+                      <a:round/>
+                      <a:headEnd type="none" w="med" len="med"/>
+                      <a:tailEnd type="none" w="med" len="med"/>
+                    </a:lnT>
+                    <a:lnB w="9525" cap="flat" cmpd="sng" algn="ctr">
+                      <a:solidFill>
+                        <a:srgbClr val="D8DEE2"/>
+                      </a:solidFill>
+                      <a:prstDash val="solid"/>
+                      <a:round/>
+                      <a:headEnd type="none" w="med" len="med"/>
+                      <a:tailEnd type="none" w="med" len="med"/>
+                    </a:lnB>
+                  </a:tcPr>
+                </a:tc>
+                <a:tc>
+                  <a:txBody>
+                    <a:bodyPr/>
+                    <a:lstStyle/>
+                    <a:p>
+                      <a:pPr indent="0" marL="0">
+                        <a:buNone/>
+                      </a:pPr>
+                      <a:r>
+                        <a:rPr lang="en-US" sz="1050" dirty="0">
+                          <a:solidFill>
+                            <a:srgbClr val="5B6B7A"/>
+                          </a:solidFill>
+                          <a:latin typeface="Calibri" pitchFamily="34" charset="0"/>
+                          <a:ea typeface="Calibri" pitchFamily="34" charset="-122"/>
+                          <a:cs typeface="Calibri" pitchFamily="34" charset="-120"/>
+                        </a:rPr>
+                        <a:t>Перенести оба пункта в список долга бизнес-кейса П1, а не тихо забыть при переходе в проект.</a:t>
+                      </a:r>
+                      <a:endParaRPr lang="en-US" sz="1050" dirty="0">
+                        <a:latin typeface="Calibri" charset="0"/>
+                        <a:ea typeface="Calibri" charset="0"/>
+                        <a:cs typeface="Calibri" charset="0"/>
+                      </a:endParaRPr>
+                    </a:p>
+                  </a:txBody>
+                  <a:tcPr marL="114300" marR="114300" marT="76200" marB="76200" anchor="ctr">
+                    <a:lnL w="9525" cap="flat" cmpd="sng" algn="ctr">
+                      <a:solidFill>
+                        <a:srgbClr val="D8DEE2"/>
+                      </a:solidFill>
+                      <a:prstDash val="solid"/>
+                      <a:round/>
+                      <a:headEnd type="none" w="med" len="med"/>
+                      <a:tailEnd type="none" w="med" len="med"/>
+                    </a:lnL>
+                    <a:lnR w="9525" cap="flat" cmpd="sng" algn="ctr">
+                      <a:solidFill>
+                        <a:srgbClr val="D8DEE2"/>
+                      </a:solidFill>
+                      <a:prstDash val="solid"/>
+                      <a:round/>
+                      <a:headEnd type="none" w="med" len="med"/>
+                      <a:tailEnd type="none" w="med" len="med"/>
+                    </a:lnR>
+                    <a:lnT w="9525" cap="flat" cmpd="sng" algn="ctr">
+                      <a:solidFill>
+                        <a:srgbClr val="D8DEE2"/>
+                      </a:solidFill>
+                      <a:prstDash val="solid"/>
+                      <a:round/>
+                      <a:headEnd type="none" w="med" len="med"/>
+                      <a:tailEnd type="none" w="med" len="med"/>
+                    </a:lnT>
+                    <a:lnB w="9525" cap="flat" cmpd="sng" algn="ctr">
+                      <a:solidFill>
+                        <a:srgbClr val="D8DEE2"/>
+                      </a:solidFill>
+                      <a:prstDash val="solid"/>
+                      <a:round/>
+                      <a:headEnd type="none" w="med" len="med"/>
+                      <a:tailEnd type="none" w="med" len="med"/>
+                    </a:lnB>
+                  </a:tcPr>
+                </a:tc>
+              </a:tr>
+            </a:tbl>
+          </a:graphicData>
+        </a:graphic>
+      </p:graphicFrame>
+      <p:sp>
+        <p:nvSpPr>
+          <p:cNvPr id="6" name="Text 3"/>
+          <p:cNvSpPr txBox="1"/>
+          <p:nvPr/>
+        </p:nvSpPr>
+        <p:spPr>
+          <a:xfrm>
+            <a:off x="10881360" y="6473952"/>
+            <a:ext cx="822960" cy="274320"/>
+          </a:xfrm>
+          <a:prstGeom prst="rect">
+            <a:avLst/>
+          </a:prstGeom>
+          <a:noFill/>
+          <a:ln/>
+        </p:spPr>
+        <p:txBody>
+          <a:bodyPr wrap="square" lIns="0" tIns="0" rIns="0" bIns="0" rtlCol="0" anchor="ctr"/>
+          <a:lstStyle/>
+          <a:p>
+            <a:pPr algn="r" indent="0" marL="0">
+              <a:buNone/>
+            </a:pPr>
+            <a:r>
+              <a:rPr lang="en-US" sz="1050" dirty="0">
+                <a:solidFill>
+                  <a:srgbClr val="8C99A6"/>
+                </a:solidFill>
+                <a:latin typeface="Calibri" pitchFamily="34" charset="0"/>
+                <a:ea typeface="Calibri" pitchFamily="34" charset="-122"/>
+                <a:cs typeface="Calibri" pitchFamily="34" charset="-120"/>
+              </a:rPr>
+              <a:t>6 / 7</a:t>
+            </a:r>
+            <a:endParaRPr lang="en-US" sz="1050" dirty="0"/>
+          </a:p>
+        </p:txBody>
+      </p:sp>
+    </p:spTree>
+  </p:cSld>
+  <p:clrMapOvr>
+    <a:masterClrMapping/>
+  </p:clrMapOvr>
+</p:sld>
+</file>
+
+<file path=ppt/slides/slide7.xml><?xml version="1.0" encoding="utf-8"?>
+<p:sld xmlns:a="http://schemas.openxmlformats.org/drawingml/2006/main" xmlns:r="http://schemas.openxmlformats.org/officeDocument/2006/relationships" xmlns:p="http://schemas.openxmlformats.org/presentationml/2006/main">
+  <p:cSld name="Slide 7">
+    <p:spTree>
+      <p:nvGrpSpPr>
+        <p:cNvPr id="1" name=""/>
+        <p:cNvGrpSpPr/>
+        <p:nvPr/>
+      </p:nvGrpSpPr>
+      <p:grpSpPr>
+        <a:xfrm>
+          <a:off x="0" y="0"/>
+          <a:ext cx="0" cy="0"/>
+          <a:chOff x="0" y="0"/>
+          <a:chExt cx="0" cy="0"/>
+        </a:xfrm>
+      </p:grpSpPr>
+      <p:sp>
+        <p:nvSpPr>
+          <p:cNvPr id="2" name="Text 0"/>
+          <p:cNvSpPr txBox="1"/>
+          <p:nvPr/>
+        </p:nvSpPr>
+        <p:spPr>
+          <a:xfrm>
+            <a:off x="502920" y="320040"/>
+            <a:ext cx="11155680" cy="274320"/>
+          </a:xfrm>
+          <a:prstGeom prst="rect">
+            <a:avLst/>
+          </a:prstGeom>
+          <a:noFill/>
+          <a:ln/>
+        </p:spPr>
+        <p:txBody>
+          <a:bodyPr wrap="square" lIns="0" tIns="0" rIns="0" bIns="0" rtlCol="0" anchor="ctr"/>
+          <a:lstStyle/>
+          <a:p>
+            <a:pPr indent="0" marL="0">
+              <a:buNone/>
+            </a:pPr>
+            <a:r>
+              <a:rPr lang="en-US" sz="1100" b="1" spc="120" kern="0" dirty="0">
+                <a:solidFill>
+                  <a:srgbClr val="0E7C86"/>
+                </a:solidFill>
+                <a:latin typeface="Calibri" pitchFamily="34" charset="0"/>
+                <a:ea typeface="Calibri" pitchFamily="34" charset="-122"/>
+                <a:cs typeface="Calibri" pitchFamily="34" charset="-120"/>
+              </a:rPr>
+              <a:t>6 · АРХИТЕКТУРА ПИЛОТА</a:t>
             </a:r>
             <a:endParaRPr lang="en-US" sz="1100" dirty="0"/>
           </a:p>
@@ -10740,7 +12429,7 @@
                 <a:ea typeface="Calibri" pitchFamily="34" charset="-122"/>
                 <a:cs typeface="Calibri" pitchFamily="34" charset="-120"/>
               </a:rPr>
-              <a:t>6 / 6</a:t>
+              <a:t>7 / 7</a:t>
             </a:r>
             <a:endParaRPr lang="en-US" sz="1050" dirty="0"/>
           </a:p>

--- a/docs/presentations/case-27-proekt-d8-skoup-i-voprosy.pptx
+++ b/docs/presentations/case-27-proekt-d8-skoup-i-voprosy.pptx
@@ -11,10 +11,9 @@
     <p:sldId id="259" r:id="rId5"/>
     <p:sldId id="260" r:id="rId6"/>
     <p:sldId id="261" r:id="rId7"/>
-    <p:sldId id="262" r:id="rId8"/>
   </p:sldIdLst>
   <p:notesMasterIdLst>
-    <p:notesMasterId r:id="rId9"/>
+    <p:notesMasterId r:id="rId8"/>
   </p:notesMasterIdLst>
   <p:sldSz cx="12192000" cy="6858000"/>
   <p:notesSz cx="6858000" cy="12192000"/>
@@ -990,94 +989,6 @@
 </p:notes>
 </file>
 
-<file path=ppt/notesSlides/notesSlide7.xml><?xml version="1.0" encoding="utf-8"?>
-<p:notes xmlns:a="http://schemas.openxmlformats.org/drawingml/2006/main" xmlns:r="http://schemas.openxmlformats.org/officeDocument/2006/relationships" xmlns:p="http://schemas.openxmlformats.org/presentationml/2006/main">
-  <p:cSld>
-    <p:spTree>
-      <p:nvGrpSpPr>
-        <p:cNvPr id="1" name=""/>
-        <p:cNvGrpSpPr/>
-        <p:nvPr/>
-      </p:nvGrpSpPr>
-      <p:grpSpPr>
-        <a:xfrm>
-          <a:off x="0" y="0"/>
-          <a:ext cx="0" cy="0"/>
-          <a:chOff x="0" y="0"/>
-          <a:chExt cx="0" cy="0"/>
-        </a:xfrm>
-      </p:grpSpPr>
-      <p:sp>
-        <p:nvSpPr>
-          <p:cNvPr id="2" name="Slide Image Placeholder 1"/>
-          <p:cNvSpPr>
-            <a:spLocks noGrp="1" noRot="1" noChangeAspect="1"/>
-          </p:cNvSpPr>
-          <p:nvPr>
-            <p:ph type="sldImg"/>
-          </p:nvPr>
-        </p:nvSpPr>
-        <p:spPr/>
-      </p:sp>
-      <p:sp>
-        <p:nvSpPr>
-          <p:cNvPr id="3" name="Notes Placeholder 2"/>
-          <p:cNvSpPr>
-            <a:spLocks noGrp="1"/>
-          </p:cNvSpPr>
-          <p:nvPr>
-            <p:ph type="body" idx="1"/>
-          </p:nvPr>
-        </p:nvSpPr>
-        <p:spPr/>
-        <p:txBody>
-          <a:bodyPr/>
-          <a:lstStyle/>
-          <a:p>
-            <a:r>
-              <a:rPr lang="en-US" dirty="0"/>
-              <a:t/>
-            </a:r>
-            <a:endParaRPr lang="en-US" dirty="0"/>
-          </a:p>
-        </p:txBody>
-      </p:sp>
-      <p:sp>
-        <p:nvSpPr>
-          <p:cNvPr id="4" name="Slide Number Placeholder 3"/>
-          <p:cNvSpPr>
-            <a:spLocks noGrp="1"/>
-          </p:cNvSpPr>
-          <p:nvPr>
-            <p:ph type="sldNum" sz="quarter" idx="10"/>
-          </p:nvPr>
-        </p:nvSpPr>
-        <p:spPr/>
-        <p:txBody>
-          <a:bodyPr/>
-          <a:lstStyle/>
-          <a:p>
-            <a:fld id="{F7021451-1387-4CA6-816F-3879F97B5CBC}" type="slidenum">
-              <a:rPr lang="en-US"/>
-              <a:t>7</a:t>
-            </a:fld>
-            <a:endParaRPr lang="en-US"/>
-          </a:p>
-        </p:txBody>
-      </p:sp>
-    </p:spTree>
-    <p:extLst>
-      <p:ext uri="{BB962C8B-B14F-4D97-AF65-F5344CB8AC3E}">
-        <p14:creationId xmlns:p14="http://schemas.microsoft.com/office/powerpoint/2010/main" val="1024086991"/>
-      </p:ext>
-    </p:extLst>
-  </p:cSld>
-  <p:clrMapOvr>
-    <a:masterClrMapping/>
-  </p:clrMapOvr>
-</p:notes>
-</file>
-
 <file path=ppt/slideLayouts/slideLayout1.xml><?xml version="1.0" encoding="utf-8"?>
 <p:sldLayout xmlns:a="http://schemas.openxmlformats.org/drawingml/2006/main" xmlns:r="http://schemas.openxmlformats.org/officeDocument/2006/relationships" xmlns:p="http://schemas.openxmlformats.org/presentationml/2006/main" preserve="1">
   <p:cSld name="DEFAULT">
@@ -2020,7 +1931,7 @@
                 <a:ea typeface="Calibri" pitchFamily="34" charset="-122"/>
                 <a:cs typeface="Calibri" pitchFamily="34" charset="-120"/>
               </a:rPr>
-              <a:t>1 / 7</a:t>
+              <a:t>1 / 6</a:t>
             </a:r>
             <a:endParaRPr lang="en-US" sz="1050" dirty="0"/>
           </a:p>
@@ -3359,7 +3270,7 @@
                 <a:ea typeface="Calibri" pitchFamily="34" charset="-122"/>
                 <a:cs typeface="Calibri" pitchFamily="34" charset="-120"/>
               </a:rPr>
-              <a:t>2 / 7</a:t>
+              <a:t>2 / 6</a:t>
             </a:r>
             <a:endParaRPr lang="en-US" sz="1050" dirty="0"/>
           </a:p>
@@ -5457,7 +5368,7 @@
                 <a:ea typeface="Calibri" pitchFamily="34" charset="-122"/>
                 <a:cs typeface="Calibri" pitchFamily="34" charset="-120"/>
               </a:rPr>
-              <a:t>3 / 7</a:t>
+              <a:t>3 / 6</a:t>
             </a:r>
             <a:endParaRPr lang="en-US" sz="1050" dirty="0"/>
           </a:p>
@@ -8760,7 +8671,7 @@
                 <a:ea typeface="Calibri" pitchFamily="34" charset="-122"/>
                 <a:cs typeface="Calibri" pitchFamily="34" charset="-120"/>
               </a:rPr>
-              <a:t>4 / 7</a:t>
+              <a:t>4 / 6</a:t>
             </a:r>
             <a:endParaRPr lang="en-US" sz="1050" dirty="0"/>
           </a:p>
@@ -10624,7 +10535,7 @@
                 <a:ea typeface="Calibri" pitchFamily="34" charset="-122"/>
                 <a:cs typeface="Calibri" pitchFamily="34" charset="-120"/>
               </a:rPr>
-              <a:t>5 / 7</a:t>
+              <a:t>5 / 6</a:t>
             </a:r>
             <a:endParaRPr lang="en-US" sz="1050" dirty="0"/>
           </a:p>
@@ -10688,1607 +10599,7 @@
                 <a:ea typeface="Calibri" pitchFamily="34" charset="-122"/>
                 <a:cs typeface="Calibri" pitchFamily="34" charset="-120"/>
               </a:rPr>
-              <a:t>5 · НАШИ ПРЕДЛОЖЕНИЯ</a:t>
-            </a:r>
-            <a:endParaRPr lang="en-US" sz="1100" dirty="0"/>
-          </a:p>
-        </p:txBody>
-      </p:sp>
-      <p:sp>
-        <p:nvSpPr>
-          <p:cNvPr id="3" name="Text 1"/>
-          <p:cNvSpPr txBox="1"/>
-          <p:nvPr/>
-        </p:nvSpPr>
-        <p:spPr>
-          <a:xfrm>
-            <a:off x="502920" y="621792"/>
-            <a:ext cx="11155680" cy="548640"/>
-          </a:xfrm>
-          <a:prstGeom prst="rect">
-            <a:avLst/>
-          </a:prstGeom>
-          <a:noFill/>
-          <a:ln/>
-        </p:spPr>
-        <p:txBody>
-          <a:bodyPr wrap="square" lIns="0" tIns="0" rIns="0" bIns="0" rtlCol="0" anchor="ctr"/>
-          <a:lstStyle/>
-          <a:p>
-            <a:pPr indent="0" marL="0">
-              <a:buNone/>
-            </a:pPr>
-            <a:r>
-              <a:rPr lang="en-US" sz="2700" b="1" dirty="0">
-                <a:solidFill>
-                  <a:srgbClr val="1A2733"/>
-                </a:solidFill>
-                <a:latin typeface="Cambria" pitchFamily="34" charset="0"/>
-                <a:ea typeface="Cambria" pitchFamily="34" charset="-122"/>
-                <a:cs typeface="Cambria" pitchFamily="34" charset="-120"/>
-              </a:rPr>
-              <a:t>Рабочая позиция по умолчанию</a:t>
-            </a:r>
-            <a:endParaRPr lang="en-US" sz="2700" dirty="0"/>
-          </a:p>
-        </p:txBody>
-      </p:sp>
-      <p:sp>
-        <p:nvSpPr>
-          <p:cNvPr id="4" name="Text 2"/>
-          <p:cNvSpPr txBox="1"/>
-          <p:nvPr/>
-        </p:nvSpPr>
-        <p:spPr>
-          <a:xfrm>
-            <a:off x="502920" y="1170432"/>
-            <a:ext cx="11155680" cy="365760"/>
-          </a:xfrm>
-          <a:prstGeom prst="rect">
-            <a:avLst/>
-          </a:prstGeom>
-          <a:noFill/>
-          <a:ln/>
-        </p:spPr>
-        <p:txBody>
-          <a:bodyPr wrap="square" lIns="0" tIns="0" rIns="0" bIns="0" rtlCol="0" anchor="ctr"/>
-          <a:lstStyle/>
-          <a:p>
-            <a:pPr indent="0" marL="0">
-              <a:buNone/>
-            </a:pPr>
-            <a:r>
-              <a:rPr lang="en-US" sz="1300" dirty="0">
-                <a:solidFill>
-                  <a:srgbClr val="5B6B7A"/>
-                </a:solidFill>
-                <a:latin typeface="Calibri" pitchFamily="34" charset="0"/>
-                <a:ea typeface="Calibri" pitchFamily="34" charset="-122"/>
-                <a:cs typeface="Calibri" pitchFamily="34" charset="-120"/>
-              </a:rPr>
-              <a:t>На основе программы проекта — проще поправить готовое предложение, чем отвечать на открытый вопрос с нуля</a:t>
-            </a:r>
-            <a:endParaRPr lang="en-US" sz="1300" dirty="0"/>
-          </a:p>
-        </p:txBody>
-      </p:sp>
-      <p:graphicFrame>
-        <p:nvGraphicFramePr>
-          <p:cNvPr id="7" name="Table 0"/>
-          <p:cNvGraphicFramePr>
-            <a:graphicFrameLocks noGrp="1"/>
-          </p:cNvGraphicFramePr>
-          <p:nvPr>
-            <p:extLst>
-              <p:ext uri="{D42A27DB-BD31-4B8C-83A1-F6EECF244321}">
-                <p14:modId xmlns:p14="http://schemas.microsoft.com/office/powerpoint/2010/main" val="1579011935"/>
-              </p:ext>
-            </p:extLst>
-          </p:nvPr>
-        </p:nvGraphicFramePr>
-        <p:xfrm>
-          <a:off x="502920" y="1691640"/>
-          <a:ext cx="11155680" cy="4480560"/>
-        </p:xfrm>
-        <a:graphic>
-          <a:graphicData uri="http://schemas.openxmlformats.org/drawingml/2006/table">
-            <a:tbl>
-              <a:tblPr/>
-              <a:tblGrid>
-                <a:gridCol w="548640"/>
-                <a:gridCol w="4754880"/>
-                <a:gridCol w="5852160"/>
-              </a:tblGrid>
-              <a:tr h="640080">
-                <a:tc>
-                  <a:txBody>
-                    <a:bodyPr/>
-                    <a:lstStyle/>
-                    <a:p>
-                      <a:pPr algn="ctr" indent="0" marL="0">
-                        <a:buNone/>
-                      </a:pPr>
-                      <a:r>
-                        <a:rPr lang="en-US" sz="1100" b="1" dirty="0">
-                          <a:solidFill>
-                            <a:srgbClr val="FFFFFF"/>
-                          </a:solidFill>
-                          <a:latin typeface="Calibri" pitchFamily="34" charset="0"/>
-                          <a:ea typeface="Calibri" pitchFamily="34" charset="-122"/>
-                          <a:cs typeface="Calibri" pitchFamily="34" charset="-120"/>
-                        </a:rPr>
-                        <a:t>№</a:t>
-                      </a:r>
-                      <a:endParaRPr lang="en-US" sz="1100" dirty="0">
-                        <a:latin typeface="Calibri" charset="0"/>
-                        <a:ea typeface="Calibri" charset="0"/>
-                        <a:cs typeface="Calibri" charset="0"/>
-                      </a:endParaRPr>
-                    </a:p>
-                  </a:txBody>
-                  <a:tcPr marL="114300" marR="114300" marT="76200" marB="76200" anchor="ctr">
-                    <a:lnL w="9525" cap="flat" cmpd="sng" algn="ctr">
-                      <a:solidFill>
-                        <a:srgbClr val="D8DEE2"/>
-                      </a:solidFill>
-                      <a:prstDash val="solid"/>
-                      <a:round/>
-                      <a:headEnd type="none" w="med" len="med"/>
-                      <a:tailEnd type="none" w="med" len="med"/>
-                    </a:lnL>
-                    <a:lnR w="9525" cap="flat" cmpd="sng" algn="ctr">
-                      <a:solidFill>
-                        <a:srgbClr val="D8DEE2"/>
-                      </a:solidFill>
-                      <a:prstDash val="solid"/>
-                      <a:round/>
-                      <a:headEnd type="none" w="med" len="med"/>
-                      <a:tailEnd type="none" w="med" len="med"/>
-                    </a:lnR>
-                    <a:lnT w="9525" cap="flat" cmpd="sng" algn="ctr">
-                      <a:solidFill>
-                        <a:srgbClr val="D8DEE2"/>
-                      </a:solidFill>
-                      <a:prstDash val="solid"/>
-                      <a:round/>
-                      <a:headEnd type="none" w="med" len="med"/>
-                      <a:tailEnd type="none" w="med" len="med"/>
-                    </a:lnT>
-                    <a:lnB w="9525" cap="flat" cmpd="sng" algn="ctr">
-                      <a:solidFill>
-                        <a:srgbClr val="D8DEE2"/>
-                      </a:solidFill>
-                      <a:prstDash val="solid"/>
-                      <a:round/>
-                      <a:headEnd type="none" w="med" len="med"/>
-                      <a:tailEnd type="none" w="med" len="med"/>
-                    </a:lnB>
-                    <a:solidFill>
-                      <a:srgbClr val="1A2733"/>
-                    </a:solidFill>
-                  </a:tcPr>
-                </a:tc>
-                <a:tc>
-                  <a:txBody>
-                    <a:bodyPr/>
-                    <a:lstStyle/>
-                    <a:p>
-                      <a:pPr indent="0" marL="0">
-                        <a:buNone/>
-                      </a:pPr>
-                      <a:r>
-                        <a:rPr lang="en-US" sz="1100" b="1" dirty="0">
-                          <a:solidFill>
-                            <a:srgbClr val="FFFFFF"/>
-                          </a:solidFill>
-                          <a:latin typeface="Calibri" pitchFamily="34" charset="0"/>
-                          <a:ea typeface="Calibri" pitchFamily="34" charset="-122"/>
-                          <a:cs typeface="Calibri" pitchFamily="34" charset="-120"/>
-                        </a:rPr>
-                        <a:t>Предложение</a:t>
-                      </a:r>
-                      <a:endParaRPr lang="en-US" sz="1100" dirty="0">
-                        <a:latin typeface="Calibri" charset="0"/>
-                        <a:ea typeface="Calibri" charset="0"/>
-                        <a:cs typeface="Calibri" charset="0"/>
-                      </a:endParaRPr>
-                    </a:p>
-                  </a:txBody>
-                  <a:tcPr marL="114300" marR="114300" marT="76200" marB="76200" anchor="ctr">
-                    <a:lnL w="9525" cap="flat" cmpd="sng" algn="ctr">
-                      <a:solidFill>
-                        <a:srgbClr val="D8DEE2"/>
-                      </a:solidFill>
-                      <a:prstDash val="solid"/>
-                      <a:round/>
-                      <a:headEnd type="none" w="med" len="med"/>
-                      <a:tailEnd type="none" w="med" len="med"/>
-                    </a:lnL>
-                    <a:lnR w="9525" cap="flat" cmpd="sng" algn="ctr">
-                      <a:solidFill>
-                        <a:srgbClr val="D8DEE2"/>
-                      </a:solidFill>
-                      <a:prstDash val="solid"/>
-                      <a:round/>
-                      <a:headEnd type="none" w="med" len="med"/>
-                      <a:tailEnd type="none" w="med" len="med"/>
-                    </a:lnR>
-                    <a:lnT w="9525" cap="flat" cmpd="sng" algn="ctr">
-                      <a:solidFill>
-                        <a:srgbClr val="D8DEE2"/>
-                      </a:solidFill>
-                      <a:prstDash val="solid"/>
-                      <a:round/>
-                      <a:headEnd type="none" w="med" len="med"/>
-                      <a:tailEnd type="none" w="med" len="med"/>
-                    </a:lnT>
-                    <a:lnB w="9525" cap="flat" cmpd="sng" algn="ctr">
-                      <a:solidFill>
-                        <a:srgbClr val="D8DEE2"/>
-                      </a:solidFill>
-                      <a:prstDash val="solid"/>
-                      <a:round/>
-                      <a:headEnd type="none" w="med" len="med"/>
-                      <a:tailEnd type="none" w="med" len="med"/>
-                    </a:lnB>
-                    <a:solidFill>
-                      <a:srgbClr val="1A2733"/>
-                    </a:solidFill>
-                  </a:tcPr>
-                </a:tc>
-                <a:tc>
-                  <a:txBody>
-                    <a:bodyPr/>
-                    <a:lstStyle/>
-                    <a:p>
-                      <a:pPr indent="0" marL="0">
-                        <a:buNone/>
-                      </a:pPr>
-                      <a:r>
-                        <a:rPr lang="en-US" sz="1100" b="1" dirty="0">
-                          <a:solidFill>
-                            <a:srgbClr val="FFFFFF"/>
-                          </a:solidFill>
-                          <a:latin typeface="Calibri" pitchFamily="34" charset="0"/>
-                          <a:ea typeface="Calibri" pitchFamily="34" charset="-122"/>
-                          <a:cs typeface="Calibri" pitchFamily="34" charset="-120"/>
-                        </a:rPr>
-                        <a:t>Обоснование</a:t>
-                      </a:r>
-                      <a:endParaRPr lang="en-US" sz="1100" dirty="0">
-                        <a:latin typeface="Calibri" charset="0"/>
-                        <a:ea typeface="Calibri" charset="0"/>
-                        <a:cs typeface="Calibri" charset="0"/>
-                      </a:endParaRPr>
-                    </a:p>
-                  </a:txBody>
-                  <a:tcPr marL="114300" marR="114300" marT="76200" marB="76200" anchor="ctr">
-                    <a:lnL w="9525" cap="flat" cmpd="sng" algn="ctr">
-                      <a:solidFill>
-                        <a:srgbClr val="D8DEE2"/>
-                      </a:solidFill>
-                      <a:prstDash val="solid"/>
-                      <a:round/>
-                      <a:headEnd type="none" w="med" len="med"/>
-                      <a:tailEnd type="none" w="med" len="med"/>
-                    </a:lnL>
-                    <a:lnR w="9525" cap="flat" cmpd="sng" algn="ctr">
-                      <a:solidFill>
-                        <a:srgbClr val="D8DEE2"/>
-                      </a:solidFill>
-                      <a:prstDash val="solid"/>
-                      <a:round/>
-                      <a:headEnd type="none" w="med" len="med"/>
-                      <a:tailEnd type="none" w="med" len="med"/>
-                    </a:lnR>
-                    <a:lnT w="9525" cap="flat" cmpd="sng" algn="ctr">
-                      <a:solidFill>
-                        <a:srgbClr val="D8DEE2"/>
-                      </a:solidFill>
-                      <a:prstDash val="solid"/>
-                      <a:round/>
-                      <a:headEnd type="none" w="med" len="med"/>
-                      <a:tailEnd type="none" w="med" len="med"/>
-                    </a:lnT>
-                    <a:lnB w="9525" cap="flat" cmpd="sng" algn="ctr">
-                      <a:solidFill>
-                        <a:srgbClr val="D8DEE2"/>
-                      </a:solidFill>
-                      <a:prstDash val="solid"/>
-                      <a:round/>
-                      <a:headEnd type="none" w="med" len="med"/>
-                      <a:tailEnd type="none" w="med" len="med"/>
-                    </a:lnB>
-                    <a:solidFill>
-                      <a:srgbClr val="1A2733"/>
-                    </a:solidFill>
-                  </a:tcPr>
-                </a:tc>
-              </a:tr>
-              <a:tr h="640080">
-                <a:tc>
-                  <a:txBody>
-                    <a:bodyPr/>
-                    <a:lstStyle/>
-                    <a:p>
-                      <a:pPr algn="ctr" indent="0" marL="0">
-                        <a:buNone/>
-                      </a:pPr>
-                      <a:r>
-                        <a:rPr lang="en-US" sz="1100" dirty="0">
-                          <a:solidFill>
-                            <a:srgbClr val="5B6B7A"/>
-                          </a:solidFill>
-                          <a:latin typeface="Calibri" pitchFamily="34" charset="0"/>
-                          <a:ea typeface="Calibri" pitchFamily="34" charset="-122"/>
-                          <a:cs typeface="Calibri" pitchFamily="34" charset="-120"/>
-                        </a:rPr>
-                        <a:t>1</a:t>
-                      </a:r>
-                      <a:endParaRPr lang="en-US" sz="1100" dirty="0">
-                        <a:latin typeface="Calibri" charset="0"/>
-                        <a:ea typeface="Calibri" charset="0"/>
-                        <a:cs typeface="Calibri" charset="0"/>
-                      </a:endParaRPr>
-                    </a:p>
-                  </a:txBody>
-                  <a:tcPr marL="114300" marR="114300" marT="76200" marB="76200" anchor="ctr">
-                    <a:lnL w="9525" cap="flat" cmpd="sng" algn="ctr">
-                      <a:solidFill>
-                        <a:srgbClr val="D8DEE2"/>
-                      </a:solidFill>
-                      <a:prstDash val="solid"/>
-                      <a:round/>
-                      <a:headEnd type="none" w="med" len="med"/>
-                      <a:tailEnd type="none" w="med" len="med"/>
-                    </a:lnL>
-                    <a:lnR w="9525" cap="flat" cmpd="sng" algn="ctr">
-                      <a:solidFill>
-                        <a:srgbClr val="D8DEE2"/>
-                      </a:solidFill>
-                      <a:prstDash val="solid"/>
-                      <a:round/>
-                      <a:headEnd type="none" w="med" len="med"/>
-                      <a:tailEnd type="none" w="med" len="med"/>
-                    </a:lnR>
-                    <a:lnT w="9525" cap="flat" cmpd="sng" algn="ctr">
-                      <a:solidFill>
-                        <a:srgbClr val="D8DEE2"/>
-                      </a:solidFill>
-                      <a:prstDash val="solid"/>
-                      <a:round/>
-                      <a:headEnd type="none" w="med" len="med"/>
-                      <a:tailEnd type="none" w="med" len="med"/>
-                    </a:lnT>
-                    <a:lnB w="9525" cap="flat" cmpd="sng" algn="ctr">
-                      <a:solidFill>
-                        <a:srgbClr val="D8DEE2"/>
-                      </a:solidFill>
-                      <a:prstDash val="solid"/>
-                      <a:round/>
-                      <a:headEnd type="none" w="med" len="med"/>
-                      <a:tailEnd type="none" w="med" len="med"/>
-                    </a:lnB>
-                  </a:tcPr>
-                </a:tc>
-                <a:tc>
-                  <a:txBody>
-                    <a:bodyPr/>
-                    <a:lstStyle/>
-                    <a:p>
-                      <a:pPr indent="0" marL="0">
-                        <a:buNone/>
-                      </a:pPr>
-                      <a:r>
-                        <a:rPr lang="en-US" sz="1100" b="1" dirty="0">
-                          <a:solidFill>
-                            <a:srgbClr val="1A2733"/>
-                          </a:solidFill>
-                          <a:latin typeface="Calibri" pitchFamily="34" charset="0"/>
-                          <a:ea typeface="Calibri" pitchFamily="34" charset="-122"/>
-                          <a:cs typeface="Calibri" pitchFamily="34" charset="-120"/>
-                        </a:rPr>
-                        <a:t>Волна 1 — закрыть звонком, не перепиской</a:t>
-                      </a:r>
-                      <a:endParaRPr lang="en-US" sz="1100" dirty="0">
-                        <a:latin typeface="Calibri" charset="0"/>
-                        <a:ea typeface="Calibri" charset="0"/>
-                        <a:cs typeface="Calibri" charset="0"/>
-                      </a:endParaRPr>
-                    </a:p>
-                  </a:txBody>
-                  <a:tcPr marL="114300" marR="114300" marT="76200" marB="76200" anchor="ctr">
-                    <a:lnL w="9525" cap="flat" cmpd="sng" algn="ctr">
-                      <a:solidFill>
-                        <a:srgbClr val="D8DEE2"/>
-                      </a:solidFill>
-                      <a:prstDash val="solid"/>
-                      <a:round/>
-                      <a:headEnd type="none" w="med" len="med"/>
-                      <a:tailEnd type="none" w="med" len="med"/>
-                    </a:lnL>
-                    <a:lnR w="9525" cap="flat" cmpd="sng" algn="ctr">
-                      <a:solidFill>
-                        <a:srgbClr val="D8DEE2"/>
-                      </a:solidFill>
-                      <a:prstDash val="solid"/>
-                      <a:round/>
-                      <a:headEnd type="none" w="med" len="med"/>
-                      <a:tailEnd type="none" w="med" len="med"/>
-                    </a:lnR>
-                    <a:lnT w="9525" cap="flat" cmpd="sng" algn="ctr">
-                      <a:solidFill>
-                        <a:srgbClr val="D8DEE2"/>
-                      </a:solidFill>
-                      <a:prstDash val="solid"/>
-                      <a:round/>
-                      <a:headEnd type="none" w="med" len="med"/>
-                      <a:tailEnd type="none" w="med" len="med"/>
-                    </a:lnT>
-                    <a:lnB w="9525" cap="flat" cmpd="sng" algn="ctr">
-                      <a:solidFill>
-                        <a:srgbClr val="D8DEE2"/>
-                      </a:solidFill>
-                      <a:prstDash val="solid"/>
-                      <a:round/>
-                      <a:headEnd type="none" w="med" len="med"/>
-                      <a:tailEnd type="none" w="med" len="med"/>
-                    </a:lnB>
-                  </a:tcPr>
-                </a:tc>
-                <a:tc>
-                  <a:txBody>
-                    <a:bodyPr/>
-                    <a:lstStyle/>
-                    <a:p>
-                      <a:pPr indent="0" marL="0">
-                        <a:buNone/>
-                      </a:pPr>
-                      <a:r>
-                        <a:rPr lang="en-US" sz="1050" dirty="0">
-                          <a:solidFill>
-                            <a:srgbClr val="5B6B7A"/>
-                          </a:solidFill>
-                          <a:latin typeface="Calibri" pitchFamily="34" charset="0"/>
-                          <a:ea typeface="Calibri" pitchFamily="34" charset="-122"/>
-                          <a:cs typeface="Calibri" pitchFamily="34" charset="-120"/>
-                        </a:rPr>
-                        <a:t>Три толкования слишком разные по объёму работ, чтобы гадать — первый вопрос из всего списка.</a:t>
-                      </a:r>
-                      <a:endParaRPr lang="en-US" sz="1050" dirty="0">
-                        <a:latin typeface="Calibri" charset="0"/>
-                        <a:ea typeface="Calibri" charset="0"/>
-                        <a:cs typeface="Calibri" charset="0"/>
-                      </a:endParaRPr>
-                    </a:p>
-                  </a:txBody>
-                  <a:tcPr marL="114300" marR="114300" marT="76200" marB="76200" anchor="ctr">
-                    <a:lnL w="9525" cap="flat" cmpd="sng" algn="ctr">
-                      <a:solidFill>
-                        <a:srgbClr val="D8DEE2"/>
-                      </a:solidFill>
-                      <a:prstDash val="solid"/>
-                      <a:round/>
-                      <a:headEnd type="none" w="med" len="med"/>
-                      <a:tailEnd type="none" w="med" len="med"/>
-                    </a:lnL>
-                    <a:lnR w="9525" cap="flat" cmpd="sng" algn="ctr">
-                      <a:solidFill>
-                        <a:srgbClr val="D8DEE2"/>
-                      </a:solidFill>
-                      <a:prstDash val="solid"/>
-                      <a:round/>
-                      <a:headEnd type="none" w="med" len="med"/>
-                      <a:tailEnd type="none" w="med" len="med"/>
-                    </a:lnR>
-                    <a:lnT w="9525" cap="flat" cmpd="sng" algn="ctr">
-                      <a:solidFill>
-                        <a:srgbClr val="D8DEE2"/>
-                      </a:solidFill>
-                      <a:prstDash val="solid"/>
-                      <a:round/>
-                      <a:headEnd type="none" w="med" len="med"/>
-                      <a:tailEnd type="none" w="med" len="med"/>
-                    </a:lnT>
-                    <a:lnB w="9525" cap="flat" cmpd="sng" algn="ctr">
-                      <a:solidFill>
-                        <a:srgbClr val="D8DEE2"/>
-                      </a:solidFill>
-                      <a:prstDash val="solid"/>
-                      <a:round/>
-                      <a:headEnd type="none" w="med" len="med"/>
-                      <a:tailEnd type="none" w="med" len="med"/>
-                    </a:lnB>
-                  </a:tcPr>
-                </a:tc>
-              </a:tr>
-              <a:tr h="640080">
-                <a:tc>
-                  <a:txBody>
-                    <a:bodyPr/>
-                    <a:lstStyle/>
-                    <a:p>
-                      <a:pPr algn="ctr" indent="0" marL="0">
-                        <a:buNone/>
-                      </a:pPr>
-                      <a:r>
-                        <a:rPr lang="en-US" sz="1100" dirty="0">
-                          <a:solidFill>
-                            <a:srgbClr val="5B6B7A"/>
-                          </a:solidFill>
-                          <a:latin typeface="Calibri" pitchFamily="34" charset="0"/>
-                          <a:ea typeface="Calibri" pitchFamily="34" charset="-122"/>
-                          <a:cs typeface="Calibri" pitchFamily="34" charset="-120"/>
-                        </a:rPr>
-                        <a:t>2</a:t>
-                      </a:r>
-                      <a:endParaRPr lang="en-US" sz="1100" dirty="0">
-                        <a:latin typeface="Calibri" charset="0"/>
-                        <a:ea typeface="Calibri" charset="0"/>
-                        <a:cs typeface="Calibri" charset="0"/>
-                      </a:endParaRPr>
-                    </a:p>
-                  </a:txBody>
-                  <a:tcPr marL="114300" marR="114300" marT="76200" marB="76200" anchor="ctr">
-                    <a:lnL w="9525" cap="flat" cmpd="sng" algn="ctr">
-                      <a:solidFill>
-                        <a:srgbClr val="D8DEE2"/>
-                      </a:solidFill>
-                      <a:prstDash val="solid"/>
-                      <a:round/>
-                      <a:headEnd type="none" w="med" len="med"/>
-                      <a:tailEnd type="none" w="med" len="med"/>
-                    </a:lnL>
-                    <a:lnR w="9525" cap="flat" cmpd="sng" algn="ctr">
-                      <a:solidFill>
-                        <a:srgbClr val="D8DEE2"/>
-                      </a:solidFill>
-                      <a:prstDash val="solid"/>
-                      <a:round/>
-                      <a:headEnd type="none" w="med" len="med"/>
-                      <a:tailEnd type="none" w="med" len="med"/>
-                    </a:lnR>
-                    <a:lnT w="9525" cap="flat" cmpd="sng" algn="ctr">
-                      <a:solidFill>
-                        <a:srgbClr val="D8DEE2"/>
-                      </a:solidFill>
-                      <a:prstDash val="solid"/>
-                      <a:round/>
-                      <a:headEnd type="none" w="med" len="med"/>
-                      <a:tailEnd type="none" w="med" len="med"/>
-                    </a:lnT>
-                    <a:lnB w="9525" cap="flat" cmpd="sng" algn="ctr">
-                      <a:solidFill>
-                        <a:srgbClr val="D8DEE2"/>
-                      </a:solidFill>
-                      <a:prstDash val="solid"/>
-                      <a:round/>
-                      <a:headEnd type="none" w="med" len="med"/>
-                      <a:tailEnd type="none" w="med" len="med"/>
-                    </a:lnB>
-                  </a:tcPr>
-                </a:tc>
-                <a:tc>
-                  <a:txBody>
-                    <a:bodyPr/>
-                    <a:lstStyle/>
-                    <a:p>
-                      <a:pPr indent="0" marL="0">
-                        <a:buNone/>
-                      </a:pPr>
-                      <a:r>
-                        <a:rPr lang="en-US" sz="1100" b="1" dirty="0">
-                          <a:solidFill>
-                            <a:srgbClr val="1A2733"/>
-                          </a:solidFill>
-                          <a:latin typeface="Calibri" pitchFamily="34" charset="0"/>
-                          <a:ea typeface="Calibri" pitchFamily="34" charset="-122"/>
-                          <a:cs typeface="Calibri" pitchFamily="34" charset="-120"/>
-                        </a:rPr>
-                        <a:t>ESB/КХД (волна 2) зафиксировать письменно как есть — расширение, не сужение</a:t>
-                      </a:r>
-                      <a:endParaRPr lang="en-US" sz="1100" dirty="0">
-                        <a:latin typeface="Calibri" charset="0"/>
-                        <a:ea typeface="Calibri" charset="0"/>
-                        <a:cs typeface="Calibri" charset="0"/>
-                      </a:endParaRPr>
-                    </a:p>
-                  </a:txBody>
-                  <a:tcPr marL="114300" marR="114300" marT="76200" marB="76200" anchor="ctr">
-                    <a:lnL w="9525" cap="flat" cmpd="sng" algn="ctr">
-                      <a:solidFill>
-                        <a:srgbClr val="D8DEE2"/>
-                      </a:solidFill>
-                      <a:prstDash val="solid"/>
-                      <a:round/>
-                      <a:headEnd type="none" w="med" len="med"/>
-                      <a:tailEnd type="none" w="med" len="med"/>
-                    </a:lnL>
-                    <a:lnR w="9525" cap="flat" cmpd="sng" algn="ctr">
-                      <a:solidFill>
-                        <a:srgbClr val="D8DEE2"/>
-                      </a:solidFill>
-                      <a:prstDash val="solid"/>
-                      <a:round/>
-                      <a:headEnd type="none" w="med" len="med"/>
-                      <a:tailEnd type="none" w="med" len="med"/>
-                    </a:lnR>
-                    <a:lnT w="9525" cap="flat" cmpd="sng" algn="ctr">
-                      <a:solidFill>
-                        <a:srgbClr val="D8DEE2"/>
-                      </a:solidFill>
-                      <a:prstDash val="solid"/>
-                      <a:round/>
-                      <a:headEnd type="none" w="med" len="med"/>
-                      <a:tailEnd type="none" w="med" len="med"/>
-                    </a:lnT>
-                    <a:lnB w="9525" cap="flat" cmpd="sng" algn="ctr">
-                      <a:solidFill>
-                        <a:srgbClr val="D8DEE2"/>
-                      </a:solidFill>
-                      <a:prstDash val="solid"/>
-                      <a:round/>
-                      <a:headEnd type="none" w="med" len="med"/>
-                      <a:tailEnd type="none" w="med" len="med"/>
-                    </a:lnB>
-                  </a:tcPr>
-                </a:tc>
-                <a:tc>
-                  <a:txBody>
-                    <a:bodyPr/>
-                    <a:lstStyle/>
-                    <a:p>
-                      <a:pPr indent="0" marL="0">
-                        <a:buNone/>
-                      </a:pPr>
-                      <a:r>
-                        <a:rPr lang="en-US" sz="1050" dirty="0">
-                          <a:solidFill>
-                            <a:srgbClr val="5B6B7A"/>
-                          </a:solidFill>
-                          <a:latin typeface="Calibri" pitchFamily="34" charset="0"/>
-                          <a:ea typeface="Calibri" pitchFamily="34" charset="-122"/>
-                          <a:cs typeface="Calibri" pitchFamily="34" charset="-120"/>
-                        </a:rPr>
-                        <a:t>Все 3 пилотных источника остаются; ESB и КХД получают расширение, MCP-сервер — на пилотном уровне.</a:t>
-                      </a:r>
-                      <a:endParaRPr lang="en-US" sz="1050" dirty="0">
-                        <a:latin typeface="Calibri" charset="0"/>
-                        <a:ea typeface="Calibri" charset="0"/>
-                        <a:cs typeface="Calibri" charset="0"/>
-                      </a:endParaRPr>
-                    </a:p>
-                  </a:txBody>
-                  <a:tcPr marL="114300" marR="114300" marT="76200" marB="76200" anchor="ctr">
-                    <a:lnL w="9525" cap="flat" cmpd="sng" algn="ctr">
-                      <a:solidFill>
-                        <a:srgbClr val="D8DEE2"/>
-                      </a:solidFill>
-                      <a:prstDash val="solid"/>
-                      <a:round/>
-                      <a:headEnd type="none" w="med" len="med"/>
-                      <a:tailEnd type="none" w="med" len="med"/>
-                    </a:lnL>
-                    <a:lnR w="9525" cap="flat" cmpd="sng" algn="ctr">
-                      <a:solidFill>
-                        <a:srgbClr val="D8DEE2"/>
-                      </a:solidFill>
-                      <a:prstDash val="solid"/>
-                      <a:round/>
-                      <a:headEnd type="none" w="med" len="med"/>
-                      <a:tailEnd type="none" w="med" len="med"/>
-                    </a:lnR>
-                    <a:lnT w="9525" cap="flat" cmpd="sng" algn="ctr">
-                      <a:solidFill>
-                        <a:srgbClr val="D8DEE2"/>
-                      </a:solidFill>
-                      <a:prstDash val="solid"/>
-                      <a:round/>
-                      <a:headEnd type="none" w="med" len="med"/>
-                      <a:tailEnd type="none" w="med" len="med"/>
-                    </a:lnT>
-                    <a:lnB w="9525" cap="flat" cmpd="sng" algn="ctr">
-                      <a:solidFill>
-                        <a:srgbClr val="D8DEE2"/>
-                      </a:solidFill>
-                      <a:prstDash val="solid"/>
-                      <a:round/>
-                      <a:headEnd type="none" w="med" len="med"/>
-                      <a:tailEnd type="none" w="med" len="med"/>
-                    </a:lnB>
-                  </a:tcPr>
-                </a:tc>
-              </a:tr>
-              <a:tr h="640080">
-                <a:tc>
-                  <a:txBody>
-                    <a:bodyPr/>
-                    <a:lstStyle/>
-                    <a:p>
-                      <a:pPr algn="ctr" indent="0" marL="0">
-                        <a:buNone/>
-                      </a:pPr>
-                      <a:r>
-                        <a:rPr lang="en-US" sz="1100" dirty="0">
-                          <a:solidFill>
-                            <a:srgbClr val="5B6B7A"/>
-                          </a:solidFill>
-                          <a:latin typeface="Calibri" pitchFamily="34" charset="0"/>
-                          <a:ea typeface="Calibri" pitchFamily="34" charset="-122"/>
-                          <a:cs typeface="Calibri" pitchFamily="34" charset="-120"/>
-                        </a:rPr>
-                        <a:t>3</a:t>
-                      </a:r>
-                      <a:endParaRPr lang="en-US" sz="1100" dirty="0">
-                        <a:latin typeface="Calibri" charset="0"/>
-                        <a:ea typeface="Calibri" charset="0"/>
-                        <a:cs typeface="Calibri" charset="0"/>
-                      </a:endParaRPr>
-                    </a:p>
-                  </a:txBody>
-                  <a:tcPr marL="114300" marR="114300" marT="76200" marB="76200" anchor="ctr">
-                    <a:lnL w="9525" cap="flat" cmpd="sng" algn="ctr">
-                      <a:solidFill>
-                        <a:srgbClr val="D8DEE2"/>
-                      </a:solidFill>
-                      <a:prstDash val="solid"/>
-                      <a:round/>
-                      <a:headEnd type="none" w="med" len="med"/>
-                      <a:tailEnd type="none" w="med" len="med"/>
-                    </a:lnL>
-                    <a:lnR w="9525" cap="flat" cmpd="sng" algn="ctr">
-                      <a:solidFill>
-                        <a:srgbClr val="D8DEE2"/>
-                      </a:solidFill>
-                      <a:prstDash val="solid"/>
-                      <a:round/>
-                      <a:headEnd type="none" w="med" len="med"/>
-                      <a:tailEnd type="none" w="med" len="med"/>
-                    </a:lnR>
-                    <a:lnT w="9525" cap="flat" cmpd="sng" algn="ctr">
-                      <a:solidFill>
-                        <a:srgbClr val="D8DEE2"/>
-                      </a:solidFill>
-                      <a:prstDash val="solid"/>
-                      <a:round/>
-                      <a:headEnd type="none" w="med" len="med"/>
-                      <a:tailEnd type="none" w="med" len="med"/>
-                    </a:lnT>
-                    <a:lnB w="9525" cap="flat" cmpd="sng" algn="ctr">
-                      <a:solidFill>
-                        <a:srgbClr val="D8DEE2"/>
-                      </a:solidFill>
-                      <a:prstDash val="solid"/>
-                      <a:round/>
-                      <a:headEnd type="none" w="med" len="med"/>
-                      <a:tailEnd type="none" w="med" len="med"/>
-                    </a:lnB>
-                  </a:tcPr>
-                </a:tc>
-                <a:tc>
-                  <a:txBody>
-                    <a:bodyPr/>
-                    <a:lstStyle/>
-                    <a:p>
-                      <a:pPr indent="0" marL="0">
-                        <a:buNone/>
-                      </a:pPr>
-                      <a:r>
-                        <a:rPr lang="en-US" sz="1100" b="1" dirty="0">
-                          <a:solidFill>
-                            <a:srgbClr val="1A2733"/>
-                          </a:solidFill>
-                          <a:latin typeface="Calibri" pitchFamily="34" charset="0"/>
-                          <a:ea typeface="Calibri" pitchFamily="34" charset="-122"/>
-                          <a:cs typeface="Calibri" pitchFamily="34" charset="-120"/>
-                        </a:rPr>
-                        <a:t>Разграничение прав compliance/менеджер — сделать обязательным для проекта</a:t>
-                      </a:r>
-                      <a:endParaRPr lang="en-US" sz="1100" dirty="0">
-                        <a:latin typeface="Calibri" charset="0"/>
-                        <a:ea typeface="Calibri" charset="0"/>
-                        <a:cs typeface="Calibri" charset="0"/>
-                      </a:endParaRPr>
-                    </a:p>
-                  </a:txBody>
-                  <a:tcPr marL="114300" marR="114300" marT="76200" marB="76200" anchor="ctr">
-                    <a:lnL w="9525" cap="flat" cmpd="sng" algn="ctr">
-                      <a:solidFill>
-                        <a:srgbClr val="D8DEE2"/>
-                      </a:solidFill>
-                      <a:prstDash val="solid"/>
-                      <a:round/>
-                      <a:headEnd type="none" w="med" len="med"/>
-                      <a:tailEnd type="none" w="med" len="med"/>
-                    </a:lnL>
-                    <a:lnR w="9525" cap="flat" cmpd="sng" algn="ctr">
-                      <a:solidFill>
-                        <a:srgbClr val="D8DEE2"/>
-                      </a:solidFill>
-                      <a:prstDash val="solid"/>
-                      <a:round/>
-                      <a:headEnd type="none" w="med" len="med"/>
-                      <a:tailEnd type="none" w="med" len="med"/>
-                    </a:lnR>
-                    <a:lnT w="9525" cap="flat" cmpd="sng" algn="ctr">
-                      <a:solidFill>
-                        <a:srgbClr val="D8DEE2"/>
-                      </a:solidFill>
-                      <a:prstDash val="solid"/>
-                      <a:round/>
-                      <a:headEnd type="none" w="med" len="med"/>
-                      <a:tailEnd type="none" w="med" len="med"/>
-                    </a:lnT>
-                    <a:lnB w="9525" cap="flat" cmpd="sng" algn="ctr">
-                      <a:solidFill>
-                        <a:srgbClr val="D8DEE2"/>
-                      </a:solidFill>
-                      <a:prstDash val="solid"/>
-                      <a:round/>
-                      <a:headEnd type="none" w="med" len="med"/>
-                      <a:tailEnd type="none" w="med" len="med"/>
-                    </a:lnB>
-                  </a:tcPr>
-                </a:tc>
-                <a:tc>
-                  <a:txBody>
-                    <a:bodyPr/>
-                    <a:lstStyle/>
-                    <a:p>
-                      <a:pPr indent="0" marL="0">
-                        <a:buNone/>
-                      </a:pPr>
-                      <a:r>
-                        <a:rPr lang="en-US" sz="1050" dirty="0">
-                          <a:solidFill>
-                            <a:srgbClr val="5B6B7A"/>
-                          </a:solidFill>
-                          <a:latin typeface="Calibri" pitchFamily="34" charset="0"/>
-                          <a:ea typeface="Calibri" pitchFamily="34" charset="-122"/>
-                          <a:cs typeface="Calibri" pitchFamily="34" charset="-120"/>
-                        </a:rPr>
-                        <a:t>Д8 — брокер/инвесткомпания: доступ менеджера к чужим клиентам — комплаенс-риск, не UX-неудобство.</a:t>
-                      </a:r>
-                      <a:endParaRPr lang="en-US" sz="1050" dirty="0">
-                        <a:latin typeface="Calibri" charset="0"/>
-                        <a:ea typeface="Calibri" charset="0"/>
-                        <a:cs typeface="Calibri" charset="0"/>
-                      </a:endParaRPr>
-                    </a:p>
-                  </a:txBody>
-                  <a:tcPr marL="114300" marR="114300" marT="76200" marB="76200" anchor="ctr">
-                    <a:lnL w="9525" cap="flat" cmpd="sng" algn="ctr">
-                      <a:solidFill>
-                        <a:srgbClr val="D8DEE2"/>
-                      </a:solidFill>
-                      <a:prstDash val="solid"/>
-                      <a:round/>
-                      <a:headEnd type="none" w="med" len="med"/>
-                      <a:tailEnd type="none" w="med" len="med"/>
-                    </a:lnL>
-                    <a:lnR w="9525" cap="flat" cmpd="sng" algn="ctr">
-                      <a:solidFill>
-                        <a:srgbClr val="D8DEE2"/>
-                      </a:solidFill>
-                      <a:prstDash val="solid"/>
-                      <a:round/>
-                      <a:headEnd type="none" w="med" len="med"/>
-                      <a:tailEnd type="none" w="med" len="med"/>
-                    </a:lnR>
-                    <a:lnT w="9525" cap="flat" cmpd="sng" algn="ctr">
-                      <a:solidFill>
-                        <a:srgbClr val="D8DEE2"/>
-                      </a:solidFill>
-                      <a:prstDash val="solid"/>
-                      <a:round/>
-                      <a:headEnd type="none" w="med" len="med"/>
-                      <a:tailEnd type="none" w="med" len="med"/>
-                    </a:lnT>
-                    <a:lnB w="9525" cap="flat" cmpd="sng" algn="ctr">
-                      <a:solidFill>
-                        <a:srgbClr val="D8DEE2"/>
-                      </a:solidFill>
-                      <a:prstDash val="solid"/>
-                      <a:round/>
-                      <a:headEnd type="none" w="med" len="med"/>
-                      <a:tailEnd type="none" w="med" len="med"/>
-                    </a:lnB>
-                  </a:tcPr>
-                </a:tc>
-              </a:tr>
-              <a:tr h="640080">
-                <a:tc>
-                  <a:txBody>
-                    <a:bodyPr/>
-                    <a:lstStyle/>
-                    <a:p>
-                      <a:pPr algn="ctr" indent="0" marL="0">
-                        <a:buNone/>
-                      </a:pPr>
-                      <a:r>
-                        <a:rPr lang="en-US" sz="1100" dirty="0">
-                          <a:solidFill>
-                            <a:srgbClr val="5B6B7A"/>
-                          </a:solidFill>
-                          <a:latin typeface="Calibri" pitchFamily="34" charset="0"/>
-                          <a:ea typeface="Calibri" pitchFamily="34" charset="-122"/>
-                          <a:cs typeface="Calibri" pitchFamily="34" charset="-120"/>
-                        </a:rPr>
-                        <a:t>4</a:t>
-                      </a:r>
-                      <a:endParaRPr lang="en-US" sz="1100" dirty="0">
-                        <a:latin typeface="Calibri" charset="0"/>
-                        <a:ea typeface="Calibri" charset="0"/>
-                        <a:cs typeface="Calibri" charset="0"/>
-                      </a:endParaRPr>
-                    </a:p>
-                  </a:txBody>
-                  <a:tcPr marL="114300" marR="114300" marT="76200" marB="76200" anchor="ctr">
-                    <a:lnL w="9525" cap="flat" cmpd="sng" algn="ctr">
-                      <a:solidFill>
-                        <a:srgbClr val="D8DEE2"/>
-                      </a:solidFill>
-                      <a:prstDash val="solid"/>
-                      <a:round/>
-                      <a:headEnd type="none" w="med" len="med"/>
-                      <a:tailEnd type="none" w="med" len="med"/>
-                    </a:lnL>
-                    <a:lnR w="9525" cap="flat" cmpd="sng" algn="ctr">
-                      <a:solidFill>
-                        <a:srgbClr val="D8DEE2"/>
-                      </a:solidFill>
-                      <a:prstDash val="solid"/>
-                      <a:round/>
-                      <a:headEnd type="none" w="med" len="med"/>
-                      <a:tailEnd type="none" w="med" len="med"/>
-                    </a:lnR>
-                    <a:lnT w="9525" cap="flat" cmpd="sng" algn="ctr">
-                      <a:solidFill>
-                        <a:srgbClr val="D8DEE2"/>
-                      </a:solidFill>
-                      <a:prstDash val="solid"/>
-                      <a:round/>
-                      <a:headEnd type="none" w="med" len="med"/>
-                      <a:tailEnd type="none" w="med" len="med"/>
-                    </a:lnT>
-                    <a:lnB w="9525" cap="flat" cmpd="sng" algn="ctr">
-                      <a:solidFill>
-                        <a:srgbClr val="D8DEE2"/>
-                      </a:solidFill>
-                      <a:prstDash val="solid"/>
-                      <a:round/>
-                      <a:headEnd type="none" w="med" len="med"/>
-                      <a:tailEnd type="none" w="med" len="med"/>
-                    </a:lnB>
-                  </a:tcPr>
-                </a:tc>
-                <a:tc>
-                  <a:txBody>
-                    <a:bodyPr/>
-                    <a:lstStyle/>
-                    <a:p>
-                      <a:pPr indent="0" marL="0">
-                        <a:buNone/>
-                      </a:pPr>
-                      <a:r>
-                        <a:rPr lang="en-US" sz="1100" b="1" dirty="0">
-                          <a:solidFill>
-                            <a:srgbClr val="1A2733"/>
-                          </a:solidFill>
-                          <a:latin typeface="Calibri" pitchFamily="34" charset="0"/>
-                          <a:ea typeface="Calibri" pitchFamily="34" charset="-122"/>
-                          <a:cs typeface="Calibri" pitchFamily="34" charset="-120"/>
-                        </a:rPr>
-                        <a:t>Динамические права доступа — не блокировать волну 2, но зафиксировать как gate</a:t>
-                      </a:r>
-                      <a:endParaRPr lang="en-US" sz="1100" dirty="0">
-                        <a:latin typeface="Calibri" charset="0"/>
-                        <a:ea typeface="Calibri" charset="0"/>
-                        <a:cs typeface="Calibri" charset="0"/>
-                      </a:endParaRPr>
-                    </a:p>
-                  </a:txBody>
-                  <a:tcPr marL="114300" marR="114300" marT="76200" marB="76200" anchor="ctr">
-                    <a:lnL w="9525" cap="flat" cmpd="sng" algn="ctr">
-                      <a:solidFill>
-                        <a:srgbClr val="D8DEE2"/>
-                      </a:solidFill>
-                      <a:prstDash val="solid"/>
-                      <a:round/>
-                      <a:headEnd type="none" w="med" len="med"/>
-                      <a:tailEnd type="none" w="med" len="med"/>
-                    </a:lnL>
-                    <a:lnR w="9525" cap="flat" cmpd="sng" algn="ctr">
-                      <a:solidFill>
-                        <a:srgbClr val="D8DEE2"/>
-                      </a:solidFill>
-                      <a:prstDash val="solid"/>
-                      <a:round/>
-                      <a:headEnd type="none" w="med" len="med"/>
-                      <a:tailEnd type="none" w="med" len="med"/>
-                    </a:lnR>
-                    <a:lnT w="9525" cap="flat" cmpd="sng" algn="ctr">
-                      <a:solidFill>
-                        <a:srgbClr val="D8DEE2"/>
-                      </a:solidFill>
-                      <a:prstDash val="solid"/>
-                      <a:round/>
-                      <a:headEnd type="none" w="med" len="med"/>
-                      <a:tailEnd type="none" w="med" len="med"/>
-                    </a:lnT>
-                    <a:lnB w="9525" cap="flat" cmpd="sng" algn="ctr">
-                      <a:solidFill>
-                        <a:srgbClr val="D8DEE2"/>
-                      </a:solidFill>
-                      <a:prstDash val="solid"/>
-                      <a:round/>
-                      <a:headEnd type="none" w="med" len="med"/>
-                      <a:tailEnd type="none" w="med" len="med"/>
-                    </a:lnB>
-                  </a:tcPr>
-                </a:tc>
-                <a:tc>
-                  <a:txBody>
-                    <a:bodyPr/>
-                    <a:lstStyle/>
-                    <a:p>
-                      <a:pPr indent="0" marL="0">
-                        <a:buNone/>
-                      </a:pPr>
-                      <a:r>
-                        <a:rPr lang="en-US" sz="1050" dirty="0">
-                          <a:solidFill>
-                            <a:srgbClr val="5B6B7A"/>
-                          </a:solidFill>
-                          <a:latin typeface="Calibri" pitchFamily="34" charset="0"/>
-                          <a:ea typeface="Calibri" pitchFamily="34" charset="-122"/>
-                          <a:cs typeface="Calibri" pitchFamily="34" charset="-120"/>
-                        </a:rPr>
-                        <a:t>Волну 2 запускать на статичной модели (как в пилоте); чувствительные волны — только когда готово с обеих сторон.</a:t>
-                      </a:r>
-                      <a:endParaRPr lang="en-US" sz="1050" dirty="0">
-                        <a:latin typeface="Calibri" charset="0"/>
-                        <a:ea typeface="Calibri" charset="0"/>
-                        <a:cs typeface="Calibri" charset="0"/>
-                      </a:endParaRPr>
-                    </a:p>
-                  </a:txBody>
-                  <a:tcPr marL="114300" marR="114300" marT="76200" marB="76200" anchor="ctr">
-                    <a:lnL w="9525" cap="flat" cmpd="sng" algn="ctr">
-                      <a:solidFill>
-                        <a:srgbClr val="D8DEE2"/>
-                      </a:solidFill>
-                      <a:prstDash val="solid"/>
-                      <a:round/>
-                      <a:headEnd type="none" w="med" len="med"/>
-                      <a:tailEnd type="none" w="med" len="med"/>
-                    </a:lnL>
-                    <a:lnR w="9525" cap="flat" cmpd="sng" algn="ctr">
-                      <a:solidFill>
-                        <a:srgbClr val="D8DEE2"/>
-                      </a:solidFill>
-                      <a:prstDash val="solid"/>
-                      <a:round/>
-                      <a:headEnd type="none" w="med" len="med"/>
-                      <a:tailEnd type="none" w="med" len="med"/>
-                    </a:lnR>
-                    <a:lnT w="9525" cap="flat" cmpd="sng" algn="ctr">
-                      <a:solidFill>
-                        <a:srgbClr val="D8DEE2"/>
-                      </a:solidFill>
-                      <a:prstDash val="solid"/>
-                      <a:round/>
-                      <a:headEnd type="none" w="med" len="med"/>
-                      <a:tailEnd type="none" w="med" len="med"/>
-                    </a:lnT>
-                    <a:lnB w="9525" cap="flat" cmpd="sng" algn="ctr">
-                      <a:solidFill>
-                        <a:srgbClr val="D8DEE2"/>
-                      </a:solidFill>
-                      <a:prstDash val="solid"/>
-                      <a:round/>
-                      <a:headEnd type="none" w="med" len="med"/>
-                      <a:tailEnd type="none" w="med" len="med"/>
-                    </a:lnB>
-                  </a:tcPr>
-                </a:tc>
-              </a:tr>
-              <a:tr h="640080">
-                <a:tc>
-                  <a:txBody>
-                    <a:bodyPr/>
-                    <a:lstStyle/>
-                    <a:p>
-                      <a:pPr algn="ctr" indent="0" marL="0">
-                        <a:buNone/>
-                      </a:pPr>
-                      <a:r>
-                        <a:rPr lang="en-US" sz="1100" dirty="0">
-                          <a:solidFill>
-                            <a:srgbClr val="5B6B7A"/>
-                          </a:solidFill>
-                          <a:latin typeface="Calibri" pitchFamily="34" charset="0"/>
-                          <a:ea typeface="Calibri" pitchFamily="34" charset="-122"/>
-                          <a:cs typeface="Calibri" pitchFamily="34" charset="-120"/>
-                        </a:rPr>
-                        <a:t>5</a:t>
-                      </a:r>
-                      <a:endParaRPr lang="en-US" sz="1100" dirty="0">
-                        <a:latin typeface="Calibri" charset="0"/>
-                        <a:ea typeface="Calibri" charset="0"/>
-                        <a:cs typeface="Calibri" charset="0"/>
-                      </a:endParaRPr>
-                    </a:p>
-                  </a:txBody>
-                  <a:tcPr marL="114300" marR="114300" marT="76200" marB="76200" anchor="ctr">
-                    <a:lnL w="9525" cap="flat" cmpd="sng" algn="ctr">
-                      <a:solidFill>
-                        <a:srgbClr val="D8DEE2"/>
-                      </a:solidFill>
-                      <a:prstDash val="solid"/>
-                      <a:round/>
-                      <a:headEnd type="none" w="med" len="med"/>
-                      <a:tailEnd type="none" w="med" len="med"/>
-                    </a:lnL>
-                    <a:lnR w="9525" cap="flat" cmpd="sng" algn="ctr">
-                      <a:solidFill>
-                        <a:srgbClr val="D8DEE2"/>
-                      </a:solidFill>
-                      <a:prstDash val="solid"/>
-                      <a:round/>
-                      <a:headEnd type="none" w="med" len="med"/>
-                      <a:tailEnd type="none" w="med" len="med"/>
-                    </a:lnR>
-                    <a:lnT w="9525" cap="flat" cmpd="sng" algn="ctr">
-                      <a:solidFill>
-                        <a:srgbClr val="D8DEE2"/>
-                      </a:solidFill>
-                      <a:prstDash val="solid"/>
-                      <a:round/>
-                      <a:headEnd type="none" w="med" len="med"/>
-                      <a:tailEnd type="none" w="med" len="med"/>
-                    </a:lnT>
-                    <a:lnB w="9525" cap="flat" cmpd="sng" algn="ctr">
-                      <a:solidFill>
-                        <a:srgbClr val="D8DEE2"/>
-                      </a:solidFill>
-                      <a:prstDash val="solid"/>
-                      <a:round/>
-                      <a:headEnd type="none" w="med" len="med"/>
-                      <a:tailEnd type="none" w="med" len="med"/>
-                    </a:lnB>
-                  </a:tcPr>
-                </a:tc>
-                <a:tc>
-                  <a:txBody>
-                    <a:bodyPr/>
-                    <a:lstStyle/>
-                    <a:p>
-                      <a:pPr indent="0" marL="0">
-                        <a:buNone/>
-                      </a:pPr>
-                      <a:r>
-                        <a:rPr lang="en-US" sz="1100" b="1" dirty="0">
-                          <a:solidFill>
-                            <a:srgbClr val="1A2733"/>
-                          </a:solidFill>
-                          <a:latin typeface="Calibri" pitchFamily="34" charset="0"/>
-                          <a:ea typeface="Calibri" pitchFamily="34" charset="-122"/>
-                          <a:cs typeface="Calibri" pitchFamily="34" charset="-120"/>
-                        </a:rPr>
-                        <a:t>Волна 3+ (роллаут по ролям) — порядок по умолчанию: фронт-офис → аналитики/УК → руководство → бэк-офис</a:t>
-                      </a:r>
-                      <a:endParaRPr lang="en-US" sz="1100" dirty="0">
-                        <a:latin typeface="Calibri" charset="0"/>
-                        <a:ea typeface="Calibri" charset="0"/>
-                        <a:cs typeface="Calibri" charset="0"/>
-                      </a:endParaRPr>
-                    </a:p>
-                  </a:txBody>
-                  <a:tcPr marL="114300" marR="114300" marT="76200" marB="76200" anchor="ctr">
-                    <a:lnL w="9525" cap="flat" cmpd="sng" algn="ctr">
-                      <a:solidFill>
-                        <a:srgbClr val="D8DEE2"/>
-                      </a:solidFill>
-                      <a:prstDash val="solid"/>
-                      <a:round/>
-                      <a:headEnd type="none" w="med" len="med"/>
-                      <a:tailEnd type="none" w="med" len="med"/>
-                    </a:lnL>
-                    <a:lnR w="9525" cap="flat" cmpd="sng" algn="ctr">
-                      <a:solidFill>
-                        <a:srgbClr val="D8DEE2"/>
-                      </a:solidFill>
-                      <a:prstDash val="solid"/>
-                      <a:round/>
-                      <a:headEnd type="none" w="med" len="med"/>
-                      <a:tailEnd type="none" w="med" len="med"/>
-                    </a:lnR>
-                    <a:lnT w="9525" cap="flat" cmpd="sng" algn="ctr">
-                      <a:solidFill>
-                        <a:srgbClr val="D8DEE2"/>
-                      </a:solidFill>
-                      <a:prstDash val="solid"/>
-                      <a:round/>
-                      <a:headEnd type="none" w="med" len="med"/>
-                      <a:tailEnd type="none" w="med" len="med"/>
-                    </a:lnT>
-                    <a:lnB w="9525" cap="flat" cmpd="sng" algn="ctr">
-                      <a:solidFill>
-                        <a:srgbClr val="D8DEE2"/>
-                      </a:solidFill>
-                      <a:prstDash val="solid"/>
-                      <a:round/>
-                      <a:headEnd type="none" w="med" len="med"/>
-                      <a:tailEnd type="none" w="med" len="med"/>
-                    </a:lnB>
-                  </a:tcPr>
-                </a:tc>
-                <a:tc>
-                  <a:txBody>
-                    <a:bodyPr/>
-                    <a:lstStyle/>
-                    <a:p>
-                      <a:pPr indent="0" marL="0">
-                        <a:buNone/>
-                      </a:pPr>
-                      <a:r>
-                        <a:rPr lang="en-US" sz="1050" dirty="0">
-                          <a:solidFill>
-                            <a:srgbClr val="5B6B7A"/>
-                          </a:solidFill>
-                          <a:latin typeface="Calibri" pitchFamily="34" charset="0"/>
-                          <a:ea typeface="Calibri" pitchFamily="34" charset="-122"/>
-                          <a:cs typeface="Calibri" pitchFamily="34" charset="-120"/>
-                        </a:rPr>
-                        <a:t>Фронт-офис уже протестирован в пилоте — наименьший риск; бэк-офис — самые чувствительные данные, последним.</a:t>
-                      </a:r>
-                      <a:endParaRPr lang="en-US" sz="1050" dirty="0">
-                        <a:latin typeface="Calibri" charset="0"/>
-                        <a:ea typeface="Calibri" charset="0"/>
-                        <a:cs typeface="Calibri" charset="0"/>
-                      </a:endParaRPr>
-                    </a:p>
-                  </a:txBody>
-                  <a:tcPr marL="114300" marR="114300" marT="76200" marB="76200" anchor="ctr">
-                    <a:lnL w="9525" cap="flat" cmpd="sng" algn="ctr">
-                      <a:solidFill>
-                        <a:srgbClr val="D8DEE2"/>
-                      </a:solidFill>
-                      <a:prstDash val="solid"/>
-                      <a:round/>
-                      <a:headEnd type="none" w="med" len="med"/>
-                      <a:tailEnd type="none" w="med" len="med"/>
-                    </a:lnL>
-                    <a:lnR w="9525" cap="flat" cmpd="sng" algn="ctr">
-                      <a:solidFill>
-                        <a:srgbClr val="D8DEE2"/>
-                      </a:solidFill>
-                      <a:prstDash val="solid"/>
-                      <a:round/>
-                      <a:headEnd type="none" w="med" len="med"/>
-                      <a:tailEnd type="none" w="med" len="med"/>
-                    </a:lnR>
-                    <a:lnT w="9525" cap="flat" cmpd="sng" algn="ctr">
-                      <a:solidFill>
-                        <a:srgbClr val="D8DEE2"/>
-                      </a:solidFill>
-                      <a:prstDash val="solid"/>
-                      <a:round/>
-                      <a:headEnd type="none" w="med" len="med"/>
-                      <a:tailEnd type="none" w="med" len="med"/>
-                    </a:lnT>
-                    <a:lnB w="9525" cap="flat" cmpd="sng" algn="ctr">
-                      <a:solidFill>
-                        <a:srgbClr val="D8DEE2"/>
-                      </a:solidFill>
-                      <a:prstDash val="solid"/>
-                      <a:round/>
-                      <a:headEnd type="none" w="med" len="med"/>
-                      <a:tailEnd type="none" w="med" len="med"/>
-                    </a:lnB>
-                  </a:tcPr>
-                </a:tc>
-              </a:tr>
-              <a:tr h="640080">
-                <a:tc>
-                  <a:txBody>
-                    <a:bodyPr/>
-                    <a:lstStyle/>
-                    <a:p>
-                      <a:pPr algn="ctr" indent="0" marL="0">
-                        <a:buNone/>
-                      </a:pPr>
-                      <a:r>
-                        <a:rPr lang="en-US" sz="1100" dirty="0">
-                          <a:solidFill>
-                            <a:srgbClr val="5B6B7A"/>
-                          </a:solidFill>
-                          <a:latin typeface="Calibri" pitchFamily="34" charset="0"/>
-                          <a:ea typeface="Calibri" pitchFamily="34" charset="-122"/>
-                          <a:cs typeface="Calibri" pitchFamily="34" charset="-120"/>
-                        </a:rPr>
-                        <a:t>6</a:t>
-                      </a:r>
-                      <a:endParaRPr lang="en-US" sz="1100" dirty="0">
-                        <a:latin typeface="Calibri" charset="0"/>
-                        <a:ea typeface="Calibri" charset="0"/>
-                        <a:cs typeface="Calibri" charset="0"/>
-                      </a:endParaRPr>
-                    </a:p>
-                  </a:txBody>
-                  <a:tcPr marL="114300" marR="114300" marT="76200" marB="76200" anchor="ctr">
-                    <a:lnL w="9525" cap="flat" cmpd="sng" algn="ctr">
-                      <a:solidFill>
-                        <a:srgbClr val="D8DEE2"/>
-                      </a:solidFill>
-                      <a:prstDash val="solid"/>
-                      <a:round/>
-                      <a:headEnd type="none" w="med" len="med"/>
-                      <a:tailEnd type="none" w="med" len="med"/>
-                    </a:lnL>
-                    <a:lnR w="9525" cap="flat" cmpd="sng" algn="ctr">
-                      <a:solidFill>
-                        <a:srgbClr val="D8DEE2"/>
-                      </a:solidFill>
-                      <a:prstDash val="solid"/>
-                      <a:round/>
-                      <a:headEnd type="none" w="med" len="med"/>
-                      <a:tailEnd type="none" w="med" len="med"/>
-                    </a:lnR>
-                    <a:lnT w="9525" cap="flat" cmpd="sng" algn="ctr">
-                      <a:solidFill>
-                        <a:srgbClr val="D8DEE2"/>
-                      </a:solidFill>
-                      <a:prstDash val="solid"/>
-                      <a:round/>
-                      <a:headEnd type="none" w="med" len="med"/>
-                      <a:tailEnd type="none" w="med" len="med"/>
-                    </a:lnT>
-                    <a:lnB w="9525" cap="flat" cmpd="sng" algn="ctr">
-                      <a:solidFill>
-                        <a:srgbClr val="D8DEE2"/>
-                      </a:solidFill>
-                      <a:prstDash val="solid"/>
-                      <a:round/>
-                      <a:headEnd type="none" w="med" len="med"/>
-                      <a:tailEnd type="none" w="med" len="med"/>
-                    </a:lnB>
-                  </a:tcPr>
-                </a:tc>
-                <a:tc>
-                  <a:txBody>
-                    <a:bodyPr/>
-                    <a:lstStyle/>
-                    <a:p>
-                      <a:pPr indent="0" marL="0">
-                        <a:buNone/>
-                      </a:pPr>
-                      <a:r>
-                        <a:rPr lang="en-US" sz="1100" b="1" dirty="0">
-                          <a:solidFill>
-                            <a:srgbClr val="1A2733"/>
-                          </a:solidFill>
-                          <a:latin typeface="Calibri" pitchFamily="34" charset="0"/>
-                          <a:ea typeface="Calibri" pitchFamily="34" charset="-122"/>
-                          <a:cs typeface="Calibri" pitchFamily="34" charset="-120"/>
-                        </a:rPr>
-                        <a:t>Критерий перехода — не ждать дозакрытия сценариев 6 и 4</a:t>
-                      </a:r>
-                      <a:endParaRPr lang="en-US" sz="1100" dirty="0">
-                        <a:latin typeface="Calibri" charset="0"/>
-                        <a:ea typeface="Calibri" charset="0"/>
-                        <a:cs typeface="Calibri" charset="0"/>
-                      </a:endParaRPr>
-                    </a:p>
-                  </a:txBody>
-                  <a:tcPr marL="114300" marR="114300" marT="76200" marB="76200" anchor="ctr">
-                    <a:lnL w="9525" cap="flat" cmpd="sng" algn="ctr">
-                      <a:solidFill>
-                        <a:srgbClr val="D8DEE2"/>
-                      </a:solidFill>
-                      <a:prstDash val="solid"/>
-                      <a:round/>
-                      <a:headEnd type="none" w="med" len="med"/>
-                      <a:tailEnd type="none" w="med" len="med"/>
-                    </a:lnL>
-                    <a:lnR w="9525" cap="flat" cmpd="sng" algn="ctr">
-                      <a:solidFill>
-                        <a:srgbClr val="D8DEE2"/>
-                      </a:solidFill>
-                      <a:prstDash val="solid"/>
-                      <a:round/>
-                      <a:headEnd type="none" w="med" len="med"/>
-                      <a:tailEnd type="none" w="med" len="med"/>
-                    </a:lnR>
-                    <a:lnT w="9525" cap="flat" cmpd="sng" algn="ctr">
-                      <a:solidFill>
-                        <a:srgbClr val="D8DEE2"/>
-                      </a:solidFill>
-                      <a:prstDash val="solid"/>
-                      <a:round/>
-                      <a:headEnd type="none" w="med" len="med"/>
-                      <a:tailEnd type="none" w="med" len="med"/>
-                    </a:lnT>
-                    <a:lnB w="9525" cap="flat" cmpd="sng" algn="ctr">
-                      <a:solidFill>
-                        <a:srgbClr val="D8DEE2"/>
-                      </a:solidFill>
-                      <a:prstDash val="solid"/>
-                      <a:round/>
-                      <a:headEnd type="none" w="med" len="med"/>
-                      <a:tailEnd type="none" w="med" len="med"/>
-                    </a:lnB>
-                  </a:tcPr>
-                </a:tc>
-                <a:tc>
-                  <a:txBody>
-                    <a:bodyPr/>
-                    <a:lstStyle/>
-                    <a:p>
-                      <a:pPr indent="0" marL="0">
-                        <a:buNone/>
-                      </a:pPr>
-                      <a:r>
-                        <a:rPr lang="en-US" sz="1050" dirty="0">
-                          <a:solidFill>
-                            <a:srgbClr val="5B6B7A"/>
-                          </a:solidFill>
-                          <a:latin typeface="Calibri" pitchFamily="34" charset="0"/>
-                          <a:ea typeface="Calibri" pitchFamily="34" charset="-122"/>
-                          <a:cs typeface="Calibri" pitchFamily="34" charset="-120"/>
-                        </a:rPr>
-                        <a:t>Перенести оба пункта в список долга бизнес-кейса П1, а не тихо забыть при переходе в проект.</a:t>
-                      </a:r>
-                      <a:endParaRPr lang="en-US" sz="1050" dirty="0">
-                        <a:latin typeface="Calibri" charset="0"/>
-                        <a:ea typeface="Calibri" charset="0"/>
-                        <a:cs typeface="Calibri" charset="0"/>
-                      </a:endParaRPr>
-                    </a:p>
-                  </a:txBody>
-                  <a:tcPr marL="114300" marR="114300" marT="76200" marB="76200" anchor="ctr">
-                    <a:lnL w="9525" cap="flat" cmpd="sng" algn="ctr">
-                      <a:solidFill>
-                        <a:srgbClr val="D8DEE2"/>
-                      </a:solidFill>
-                      <a:prstDash val="solid"/>
-                      <a:round/>
-                      <a:headEnd type="none" w="med" len="med"/>
-                      <a:tailEnd type="none" w="med" len="med"/>
-                    </a:lnL>
-                    <a:lnR w="9525" cap="flat" cmpd="sng" algn="ctr">
-                      <a:solidFill>
-                        <a:srgbClr val="D8DEE2"/>
-                      </a:solidFill>
-                      <a:prstDash val="solid"/>
-                      <a:round/>
-                      <a:headEnd type="none" w="med" len="med"/>
-                      <a:tailEnd type="none" w="med" len="med"/>
-                    </a:lnR>
-                    <a:lnT w="9525" cap="flat" cmpd="sng" algn="ctr">
-                      <a:solidFill>
-                        <a:srgbClr val="D8DEE2"/>
-                      </a:solidFill>
-                      <a:prstDash val="solid"/>
-                      <a:round/>
-                      <a:headEnd type="none" w="med" len="med"/>
-                      <a:tailEnd type="none" w="med" len="med"/>
-                    </a:lnT>
-                    <a:lnB w="9525" cap="flat" cmpd="sng" algn="ctr">
-                      <a:solidFill>
-                        <a:srgbClr val="D8DEE2"/>
-                      </a:solidFill>
-                      <a:prstDash val="solid"/>
-                      <a:round/>
-                      <a:headEnd type="none" w="med" len="med"/>
-                      <a:tailEnd type="none" w="med" len="med"/>
-                    </a:lnB>
-                  </a:tcPr>
-                </a:tc>
-              </a:tr>
-            </a:tbl>
-          </a:graphicData>
-        </a:graphic>
-      </p:graphicFrame>
-      <p:sp>
-        <p:nvSpPr>
-          <p:cNvPr id="6" name="Text 3"/>
-          <p:cNvSpPr txBox="1"/>
-          <p:nvPr/>
-        </p:nvSpPr>
-        <p:spPr>
-          <a:xfrm>
-            <a:off x="10881360" y="6473952"/>
-            <a:ext cx="822960" cy="274320"/>
-          </a:xfrm>
-          <a:prstGeom prst="rect">
-            <a:avLst/>
-          </a:prstGeom>
-          <a:noFill/>
-          <a:ln/>
-        </p:spPr>
-        <p:txBody>
-          <a:bodyPr wrap="square" lIns="0" tIns="0" rIns="0" bIns="0" rtlCol="0" anchor="ctr"/>
-          <a:lstStyle/>
-          <a:p>
-            <a:pPr algn="r" indent="0" marL="0">
-              <a:buNone/>
-            </a:pPr>
-            <a:r>
-              <a:rPr lang="en-US" sz="1050" dirty="0">
-                <a:solidFill>
-                  <a:srgbClr val="8C99A6"/>
-                </a:solidFill>
-                <a:latin typeface="Calibri" pitchFamily="34" charset="0"/>
-                <a:ea typeface="Calibri" pitchFamily="34" charset="-122"/>
-                <a:cs typeface="Calibri" pitchFamily="34" charset="-120"/>
-              </a:rPr>
-              <a:t>6 / 7</a:t>
-            </a:r>
-            <a:endParaRPr lang="en-US" sz="1050" dirty="0"/>
-          </a:p>
-        </p:txBody>
-      </p:sp>
-    </p:spTree>
-  </p:cSld>
-  <p:clrMapOvr>
-    <a:masterClrMapping/>
-  </p:clrMapOvr>
-</p:sld>
-</file>
-
-<file path=ppt/slides/slide7.xml><?xml version="1.0" encoding="utf-8"?>
-<p:sld xmlns:a="http://schemas.openxmlformats.org/drawingml/2006/main" xmlns:r="http://schemas.openxmlformats.org/officeDocument/2006/relationships" xmlns:p="http://schemas.openxmlformats.org/presentationml/2006/main">
-  <p:cSld name="Slide 7">
-    <p:spTree>
-      <p:nvGrpSpPr>
-        <p:cNvPr id="1" name=""/>
-        <p:cNvGrpSpPr/>
-        <p:nvPr/>
-      </p:nvGrpSpPr>
-      <p:grpSpPr>
-        <a:xfrm>
-          <a:off x="0" y="0"/>
-          <a:ext cx="0" cy="0"/>
-          <a:chOff x="0" y="0"/>
-          <a:chExt cx="0" cy="0"/>
-        </a:xfrm>
-      </p:grpSpPr>
-      <p:sp>
-        <p:nvSpPr>
-          <p:cNvPr id="2" name="Text 0"/>
-          <p:cNvSpPr txBox="1"/>
-          <p:nvPr/>
-        </p:nvSpPr>
-        <p:spPr>
-          <a:xfrm>
-            <a:off x="502920" y="320040"/>
-            <a:ext cx="11155680" cy="274320"/>
-          </a:xfrm>
-          <a:prstGeom prst="rect">
-            <a:avLst/>
-          </a:prstGeom>
-          <a:noFill/>
-          <a:ln/>
-        </p:spPr>
-        <p:txBody>
-          <a:bodyPr wrap="square" lIns="0" tIns="0" rIns="0" bIns="0" rtlCol="0" anchor="ctr"/>
-          <a:lstStyle/>
-          <a:p>
-            <a:pPr indent="0" marL="0">
-              <a:buNone/>
-            </a:pPr>
-            <a:r>
-              <a:rPr lang="en-US" sz="1100" b="1" spc="120" kern="0" dirty="0">
-                <a:solidFill>
-                  <a:srgbClr val="0E7C86"/>
-                </a:solidFill>
-                <a:latin typeface="Calibri" pitchFamily="34" charset="0"/>
-                <a:ea typeface="Calibri" pitchFamily="34" charset="-122"/>
-                <a:cs typeface="Calibri" pitchFamily="34" charset="-120"/>
-              </a:rPr>
-              <a:t>6 · АРХИТЕКТУРА ПИЛОТА</a:t>
+              <a:t>5 · АРХИТЕКТУРА ПИЛОТА</a:t>
             </a:r>
             <a:endParaRPr lang="en-US" sz="1100" dirty="0"/>
           </a:p>
@@ -12429,7 +10740,7 @@
                 <a:ea typeface="Calibri" pitchFamily="34" charset="-122"/>
                 <a:cs typeface="Calibri" pitchFamily="34" charset="-120"/>
               </a:rPr>
-              <a:t>7 / 7</a:t>
+              <a:t>6 / 6</a:t>
             </a:r>
             <a:endParaRPr lang="en-US" sz="1050" dirty="0"/>
           </a:p>

--- a/docs/presentations/case-27-proekt-d8-skoup-i-voprosy.pptx
+++ b/docs/presentations/case-27-proekt-d8-skoup-i-voprosy.pptx
@@ -10,10 +10,9 @@
     <p:sldId id="258" r:id="rId4"/>
     <p:sldId id="259" r:id="rId5"/>
     <p:sldId id="260" r:id="rId6"/>
-    <p:sldId id="261" r:id="rId7"/>
   </p:sldIdLst>
   <p:notesMasterIdLst>
-    <p:notesMasterId r:id="rId8"/>
+    <p:notesMasterId r:id="rId7"/>
   </p:notesMasterIdLst>
   <p:sldSz cx="12192000" cy="6858000"/>
   <p:notesSz cx="6858000" cy="12192000"/>
@@ -883,94 +882,6 @@
             <a:fld id="{F7021451-1387-4CA6-816F-3879F97B5CBC}" type="slidenum">
               <a:rPr lang="en-US"/>
               <a:t>5</a:t>
-            </a:fld>
-            <a:endParaRPr lang="en-US"/>
-          </a:p>
-        </p:txBody>
-      </p:sp>
-    </p:spTree>
-    <p:extLst>
-      <p:ext uri="{BB962C8B-B14F-4D97-AF65-F5344CB8AC3E}">
-        <p14:creationId xmlns:p14="http://schemas.microsoft.com/office/powerpoint/2010/main" val="1024086991"/>
-      </p:ext>
-    </p:extLst>
-  </p:cSld>
-  <p:clrMapOvr>
-    <a:masterClrMapping/>
-  </p:clrMapOvr>
-</p:notes>
-</file>
-
-<file path=ppt/notesSlides/notesSlide6.xml><?xml version="1.0" encoding="utf-8"?>
-<p:notes xmlns:a="http://schemas.openxmlformats.org/drawingml/2006/main" xmlns:r="http://schemas.openxmlformats.org/officeDocument/2006/relationships" xmlns:p="http://schemas.openxmlformats.org/presentationml/2006/main">
-  <p:cSld>
-    <p:spTree>
-      <p:nvGrpSpPr>
-        <p:cNvPr id="1" name=""/>
-        <p:cNvGrpSpPr/>
-        <p:nvPr/>
-      </p:nvGrpSpPr>
-      <p:grpSpPr>
-        <a:xfrm>
-          <a:off x="0" y="0"/>
-          <a:ext cx="0" cy="0"/>
-          <a:chOff x="0" y="0"/>
-          <a:chExt cx="0" cy="0"/>
-        </a:xfrm>
-      </p:grpSpPr>
-      <p:sp>
-        <p:nvSpPr>
-          <p:cNvPr id="2" name="Slide Image Placeholder 1"/>
-          <p:cNvSpPr>
-            <a:spLocks noGrp="1" noRot="1" noChangeAspect="1"/>
-          </p:cNvSpPr>
-          <p:nvPr>
-            <p:ph type="sldImg"/>
-          </p:nvPr>
-        </p:nvSpPr>
-        <p:spPr/>
-      </p:sp>
-      <p:sp>
-        <p:nvSpPr>
-          <p:cNvPr id="3" name="Notes Placeholder 2"/>
-          <p:cNvSpPr>
-            <a:spLocks noGrp="1"/>
-          </p:cNvSpPr>
-          <p:nvPr>
-            <p:ph type="body" idx="1"/>
-          </p:nvPr>
-        </p:nvSpPr>
-        <p:spPr/>
-        <p:txBody>
-          <a:bodyPr/>
-          <a:lstStyle/>
-          <a:p>
-            <a:r>
-              <a:rPr lang="en-US" dirty="0"/>
-              <a:t/>
-            </a:r>
-            <a:endParaRPr lang="en-US" dirty="0"/>
-          </a:p>
-        </p:txBody>
-      </p:sp>
-      <p:sp>
-        <p:nvSpPr>
-          <p:cNvPr id="4" name="Slide Number Placeholder 3"/>
-          <p:cNvSpPr>
-            <a:spLocks noGrp="1"/>
-          </p:cNvSpPr>
-          <p:nvPr>
-            <p:ph type="sldNum" sz="quarter" idx="10"/>
-          </p:nvPr>
-        </p:nvSpPr>
-        <p:spPr/>
-        <p:txBody>
-          <a:bodyPr/>
-          <a:lstStyle/>
-          <a:p>
-            <a:fld id="{F7021451-1387-4CA6-816F-3879F97B5CBC}" type="slidenum">
-              <a:rPr lang="en-US"/>
-              <a:t>6</a:t>
             </a:fld>
             <a:endParaRPr lang="en-US"/>
           </a:p>
@@ -1931,7 +1842,7 @@
                 <a:ea typeface="Calibri" pitchFamily="34" charset="-122"/>
                 <a:cs typeface="Calibri" pitchFamily="34" charset="-120"/>
               </a:rPr>
-              <a:t>1 / 6</a:t>
+              <a:t>1 / 5</a:t>
             </a:r>
             <a:endParaRPr lang="en-US" sz="1050" dirty="0"/>
           </a:p>
@@ -3270,7 +3181,7 @@
                 <a:ea typeface="Calibri" pitchFamily="34" charset="-122"/>
                 <a:cs typeface="Calibri" pitchFamily="34" charset="-120"/>
               </a:rPr>
-              <a:t>2 / 6</a:t>
+              <a:t>2 / 5</a:t>
             </a:r>
             <a:endParaRPr lang="en-US" sz="1050" dirty="0"/>
           </a:p>
@@ -5368,7 +5279,7 @@
                 <a:ea typeface="Calibri" pitchFamily="34" charset="-122"/>
                 <a:cs typeface="Calibri" pitchFamily="34" charset="-120"/>
               </a:rPr>
-              <a:t>3 / 6</a:t>
+              <a:t>3 / 5</a:t>
             </a:r>
             <a:endParaRPr lang="en-US" sz="1050" dirty="0"/>
           </a:p>
@@ -8671,7 +8582,7 @@
                 <a:ea typeface="Calibri" pitchFamily="34" charset="-122"/>
                 <a:cs typeface="Calibri" pitchFamily="34" charset="-120"/>
               </a:rPr>
-              <a:t>4 / 6</a:t>
+              <a:t>4 / 5</a:t>
             </a:r>
             <a:endParaRPr lang="en-US" sz="1050" dirty="0"/>
           </a:p>
@@ -10535,212 +10446,7 @@
                 <a:ea typeface="Calibri" pitchFamily="34" charset="-122"/>
                 <a:cs typeface="Calibri" pitchFamily="34" charset="-120"/>
               </a:rPr>
-              <a:t>5 / 6</a:t>
-            </a:r>
-            <a:endParaRPr lang="en-US" sz="1050" dirty="0"/>
-          </a:p>
-        </p:txBody>
-      </p:sp>
-    </p:spTree>
-  </p:cSld>
-  <p:clrMapOvr>
-    <a:masterClrMapping/>
-  </p:clrMapOvr>
-</p:sld>
-</file>
-
-<file path=ppt/slides/slide6.xml><?xml version="1.0" encoding="utf-8"?>
-<p:sld xmlns:a="http://schemas.openxmlformats.org/drawingml/2006/main" xmlns:r="http://schemas.openxmlformats.org/officeDocument/2006/relationships" xmlns:p="http://schemas.openxmlformats.org/presentationml/2006/main">
-  <p:cSld name="Slide 6">
-    <p:spTree>
-      <p:nvGrpSpPr>
-        <p:cNvPr id="1" name=""/>
-        <p:cNvGrpSpPr/>
-        <p:nvPr/>
-      </p:nvGrpSpPr>
-      <p:grpSpPr>
-        <a:xfrm>
-          <a:off x="0" y="0"/>
-          <a:ext cx="0" cy="0"/>
-          <a:chOff x="0" y="0"/>
-          <a:chExt cx="0" cy="0"/>
-        </a:xfrm>
-      </p:grpSpPr>
-      <p:sp>
-        <p:nvSpPr>
-          <p:cNvPr id="2" name="Text 0"/>
-          <p:cNvSpPr txBox="1"/>
-          <p:nvPr/>
-        </p:nvSpPr>
-        <p:spPr>
-          <a:xfrm>
-            <a:off x="502920" y="320040"/>
-            <a:ext cx="11155680" cy="274320"/>
-          </a:xfrm>
-          <a:prstGeom prst="rect">
-            <a:avLst/>
-          </a:prstGeom>
-          <a:noFill/>
-          <a:ln/>
-        </p:spPr>
-        <p:txBody>
-          <a:bodyPr wrap="square" lIns="0" tIns="0" rIns="0" bIns="0" rtlCol="0" anchor="ctr"/>
-          <a:lstStyle/>
-          <a:p>
-            <a:pPr indent="0" marL="0">
-              <a:buNone/>
-            </a:pPr>
-            <a:r>
-              <a:rPr lang="en-US" sz="1100" b="1" spc="120" kern="0" dirty="0">
-                <a:solidFill>
-                  <a:srgbClr val="0E7C86"/>
-                </a:solidFill>
-                <a:latin typeface="Calibri" pitchFamily="34" charset="0"/>
-                <a:ea typeface="Calibri" pitchFamily="34" charset="-122"/>
-                <a:cs typeface="Calibri" pitchFamily="34" charset="-120"/>
-              </a:rPr>
-              <a:t>5 · АРХИТЕКТУРА ПИЛОТА</a:t>
-            </a:r>
-            <a:endParaRPr lang="en-US" sz="1100" dirty="0"/>
-          </a:p>
-        </p:txBody>
-      </p:sp>
-      <p:sp>
-        <p:nvSpPr>
-          <p:cNvPr id="3" name="Text 1"/>
-          <p:cNvSpPr txBox="1"/>
-          <p:nvPr/>
-        </p:nvSpPr>
-        <p:spPr>
-          <a:xfrm>
-            <a:off x="502920" y="621792"/>
-            <a:ext cx="11155680" cy="548640"/>
-          </a:xfrm>
-          <a:prstGeom prst="rect">
-            <a:avLst/>
-          </a:prstGeom>
-          <a:noFill/>
-          <a:ln/>
-        </p:spPr>
-        <p:txBody>
-          <a:bodyPr wrap="square" lIns="0" tIns="0" rIns="0" bIns="0" rtlCol="0" anchor="ctr"/>
-          <a:lstStyle/>
-          <a:p>
-            <a:pPr indent="0" marL="0">
-              <a:buNone/>
-            </a:pPr>
-            <a:r>
-              <a:rPr lang="en-US" sz="2700" b="1" dirty="0">
-                <a:solidFill>
-                  <a:srgbClr val="1A2733"/>
-                </a:solidFill>
-                <a:latin typeface="Cambria" pitchFamily="34" charset="0"/>
-                <a:ea typeface="Cambria" pitchFamily="34" charset="-122"/>
-                <a:cs typeface="Cambria" pitchFamily="34" charset="-120"/>
-              </a:rPr>
-              <a:t>Источники и получатели данных</a:t>
-            </a:r>
-            <a:endParaRPr lang="en-US" sz="2700" dirty="0"/>
-          </a:p>
-        </p:txBody>
-      </p:sp>
-      <p:sp>
-        <p:nvSpPr>
-          <p:cNvPr id="4" name="Text 2"/>
-          <p:cNvSpPr txBox="1"/>
-          <p:nvPr/>
-        </p:nvSpPr>
-        <p:spPr>
-          <a:xfrm>
-            <a:off x="502920" y="1170432"/>
-            <a:ext cx="11155680" cy="365760"/>
-          </a:xfrm>
-          <a:prstGeom prst="rect">
-            <a:avLst/>
-          </a:prstGeom>
-          <a:noFill/>
-          <a:ln/>
-        </p:spPr>
-        <p:txBody>
-          <a:bodyPr wrap="square" lIns="0" tIns="0" rIns="0" bIns="0" rtlCol="0" anchor="ctr"/>
-          <a:lstStyle/>
-          <a:p>
-            <a:pPr indent="0" marL="0">
-              <a:buNone/>
-            </a:pPr>
-            <a:r>
-              <a:rPr lang="en-US" sz="1300" dirty="0">
-                <a:solidFill>
-                  <a:srgbClr val="5B6B7A"/>
-                </a:solidFill>
-                <a:latin typeface="Calibri" pitchFamily="34" charset="0"/>
-                <a:ea typeface="Calibri" pitchFamily="34" charset="-122"/>
-                <a:cs typeface="Calibri" pitchFamily="34" charset="-120"/>
-              </a:rPr>
-              <a:t>Платформа «Камерата» по фактам пилота (не проектный скоуп) — расширение см. в разделе «Программа проекта»</a:t>
-            </a:r>
-            <a:endParaRPr lang="en-US" sz="1300" dirty="0"/>
-          </a:p>
-        </p:txBody>
-      </p:sp>
-      <p:pic>
-        <p:nvPicPr>
-          <p:cNvPr id="5" name="Image 0" descr="arhitektura-pilota.png">    </p:cNvPr>
-          <p:cNvPicPr>
-            <a:picLocks noChangeAspect="1"/>
-          </p:cNvPicPr>
-          <p:nvPr/>
-        </p:nvPicPr>
-        <p:blipFill>
-          <a:blip r:embed="rId1"/>
-          <a:stretch>
-            <a:fillRect/>
-          </a:stretch>
-        </p:blipFill>
-        <p:spPr>
-          <a:xfrm>
-            <a:off x="2148840" y="1783080"/>
-            <a:ext cx="7863840" cy="4456176"/>
-          </a:xfrm>
-          <a:prstGeom prst="rect">
-            <a:avLst/>
-          </a:prstGeom>
-        </p:spPr>
-      </p:pic>
-      <p:sp>
-        <p:nvSpPr>
-          <p:cNvPr id="6" name="Text 3"/>
-          <p:cNvSpPr txBox="1"/>
-          <p:nvPr/>
-        </p:nvSpPr>
-        <p:spPr>
-          <a:xfrm>
-            <a:off x="10881360" y="6473952"/>
-            <a:ext cx="822960" cy="274320"/>
-          </a:xfrm>
-          <a:prstGeom prst="rect">
-            <a:avLst/>
-          </a:prstGeom>
-          <a:noFill/>
-          <a:ln/>
-        </p:spPr>
-        <p:txBody>
-          <a:bodyPr wrap="square" lIns="0" tIns="0" rIns="0" bIns="0" rtlCol="0" anchor="ctr"/>
-          <a:lstStyle/>
-          <a:p>
-            <a:pPr algn="r" indent="0" marL="0">
-              <a:buNone/>
-            </a:pPr>
-            <a:r>
-              <a:rPr lang="en-US" sz="1050" dirty="0">
-                <a:solidFill>
-                  <a:srgbClr val="8C99A6"/>
-                </a:solidFill>
-                <a:latin typeface="Calibri" pitchFamily="34" charset="0"/>
-                <a:ea typeface="Calibri" pitchFamily="34" charset="-122"/>
-                <a:cs typeface="Calibri" pitchFamily="34" charset="-120"/>
-              </a:rPr>
-              <a:t>6 / 6</a:t>
+              <a:t>5 / 5</a:t>
             </a:r>
             <a:endParaRPr lang="en-US" sz="1050" dirty="0"/>
           </a:p>
